--- a/downloads/presentations/modules/exe-440.pptx
+++ b/downloads/presentations/modules/exe-440.pptx
@@ -612,7 +612,8 @@
               <a:rPr lang="en-US" dirty="0"/>
               <a:t>Risks, Failure Modes, and Guardrails
 One risk is assuming that AI reduces workforce needs. In practice, responsible AI often requires new review, training, documentation, and monitoring work. A guardrail is to include workforce impact in every business case and implementation plan.
-Another risk is uneven access to AI skills. Staff in better-resourced programs may receive training first, while others fall behind. A guardrail is to create a role-based training plan that includes all relevant staff groups and supports equitable participation.</a:t>
+Another risk is uneven access to AI skills. Staff in better-resourced programs may receive training first, while others fall behind. A guardrail is to create a role-based training plan that includes all relevant staff groups and supports equitable participation.
+Application guidance: Identify what could go wrong, who could be affected, what safeguards are needed, and what evidence should be reviewed before use expands.</a:t>
             </a:r>
             <a:endParaRPr lang="en-US" dirty="0"/>
           </a:p>
@@ -701,7 +702,8 @@
             <a:r>
               <a:rPr lang="en-US" dirty="0"/>
               <a:t>Application to AI-Supported Workflows
-Generative AI requires staff who can review outputs and manage source accuracy. Predictive analytics requires staff who can interpret performance and understand limitations. Agentic workflows require staff who can oversee permissions, actions, escalation, and rollback. Workforce strategy should connect each AI type to the roles needed to use it safely.</a:t>
+Generative AI requires staff who can review outputs and manage source accuracy. Predictive analytics requires staff who can interpret performance and understand limitations. Agentic workflows require staff who can oversee permissions, actions, escalation, and rollback. Workforce strategy should connect each AI type to the roles needed to use it safely.
+Application guidance: Use the concept to clarify workflow changes, dependencies, staffing, procurement requirements, training needs, and implementation checkpoints.</a:t>
             </a:r>
             <a:endParaRPr lang="en-US" dirty="0"/>
           </a:p>
@@ -792,7 +794,8 @@
               <a:t>Reflection Questions
 Which current or proposed AI use case in your agency raises this leadership or governance issue most clearly?
 Who currently has authority to make decisions about this issue, and is that authority documented?
-What evidence would governance or leadership need before approving the use case?</a:t>
+What evidence would governance or leadership need before approving the use case?
+Application guidance: Connect the concept to public health purpose, responsible use, required safeguards, documentation, and the next action a department should take.</a:t>
             </a:r>
             <a:endParaRPr lang="en-US" dirty="0"/>
           </a:p>
@@ -882,7 +885,8 @@
               <a:rPr lang="en-US" dirty="0"/>
               <a:t>Reflection Questions
 Which staff, partners, or communities would be affected if this issue were handled poorly?
-What policy, process, or artifact should be created or updated after this module?</a:t>
+What policy, process, or artifact should be created or updated after this module?
+Application guidance: Connect the concept to public health purpose, responsible use, required safeguards, documentation, and the next action a department should take.</a:t>
             </a:r>
             <a:endParaRPr lang="en-US" dirty="0"/>
           </a:p>
@@ -971,7 +975,8 @@
             <a:r>
               <a:rPr lang="en-US" dirty="0"/>
               <a:t>Practical Exercise
-Create a role-based AI workforce readiness plan. Include role groups, competencies, required training, responsibilities, decision authority, and support needs.</a:t>
+Create a role-based AI workforce readiness plan. Include role groups, competencies, required training, responsibilities, decision authority, and support needs.
+Application guidance: Use the assignment to test whether you can explain the concept, apply it to a realistic public health situation, and identify what would need review before the work moves forward.</a:t>
             </a:r>
             <a:endParaRPr lang="en-US" dirty="0"/>
           </a:p>
@@ -1060,7 +1065,8 @@
             <a:r>
               <a:rPr lang="en-US" dirty="0"/>
               <a:t>Before You Begin
-Choose a real or realistic public health AI use case. Document assumptions, unresolved questions, and which agency roles would need to review the artifact before it is adopted. The exercise should produce a work product that could support governance review, leadership discussion, implementation planning, or policy development.</a:t>
+Choose a real or realistic public health AI use case. Document assumptions, unresolved questions, and which agency roles would need to review the artifact before it is adopted. The exercise should produce a work product that could support governance review, leadership discussion, implementation planning, or policy development.
+Application guidance: Connect the concept to public health purpose, responsible use, required safeguards, documentation, and the next action a department should take.</a:t>
             </a:r>
             <a:endParaRPr lang="en-US" dirty="0"/>
           </a:p>
@@ -1149,7 +1155,8 @@
             <a:r>
               <a:rPr lang="en-US" dirty="0"/>
               <a:t>Expected Artifact or Evidence
-Workforce readiness plan; role-based competency matrix; training assignment matrix; AI bridge role description.</a:t>
+Workforce readiness plan; role-based competency matrix; training assignment matrix; AI bridge role description.
+Application guidance: Connect the concept to public health purpose, responsible use, required safeguards, documentation, and the next action a department should take.</a:t>
             </a:r>
             <a:endParaRPr lang="en-US" dirty="0"/>
           </a:p>
@@ -1238,7 +1245,8 @@
             <a:r>
               <a:rPr lang="en-US" dirty="0"/>
               <a:t>Expected Assignment
-Workforce readiness plan; role-based competency matrix; training assignment matrix; AI bridge role description.</a:t>
+Workforce readiness plan; role-based competency matrix; training assignment matrix; AI bridge role description.
+Application guidance: Use the assignment to test whether you can explain the concept, apply it to a realistic public health situation, and identify what would need review before the work moves forward.</a:t>
             </a:r>
             <a:endParaRPr lang="en-US" dirty="0"/>
           </a:p>
@@ -1331,7 +1339,8 @@
 2. Which practice best supports accountable public health AI governance?
 3. When should an AI use case be escalated for leadership or governance review?
 4. What is weak evidence of completion for a leadership and governance module?
-5. What should leaders do when an AI use case has meaningful benefits but unresolved risks?</a:t>
+5. What should leaders do when an AI use case has meaningful benefits but unresolved risks?
+Application guidance: Use the assignment to test whether you can explain the concept, apply it to a realistic public health situation, and identify what would need review before the work moves forward.</a:t>
             </a:r>
             <a:endParaRPr lang="en-US" dirty="0"/>
           </a:p>
@@ -1424,7 +1433,8 @@
 NIST Generative AI Profile: https://www.nist.gov/publications/artificial-intelligence-risk-management-framework-generative-artificial-intelligence
 NIST Privacy Framework
 CDC Public Health Data Strategy and Data Modernization resources: https://www.cdc.gov/public-health-data-strategy/php/about/index.html
-WHO Ethics and Governance of Artificial Intelligence for Health: https://www.who.int/publications/i/item/9789240029200</a:t>
+WHO Ethics and Governance of Artificial Intelligence for Health: https://www.who.int/publications/i/item/9789240029200
+Application guidance: Connect the concept to public health purpose, responsible use, required safeguards, documentation, and the next action a department should take.</a:t>
             </a:r>
             <a:endParaRPr lang="en-US" dirty="0"/>
           </a:p>
@@ -1606,7 +1616,8 @@
               <a:rPr lang="en-US" dirty="0"/>
               <a:t>References and Resources
 OMB Memorandum M-24-10 on federal AI governance, risk management, and innovation, where relevant to public-sector governance models
-Agency strategic plans, procurement policies, privacy policies, cybersecurity policies, records policies, and equity plans</a:t>
+Agency strategic plans, procurement policies, privacy policies, cybersecurity policies, records policies, and equity plans
+Application guidance: Connect the concept to public health purpose, responsible use, required safeguards, documentation, and the next action a department should take.</a:t>
             </a:r>
             <a:endParaRPr lang="en-US" dirty="0"/>
           </a:p>
@@ -1885,7 +1896,8 @@
 Distinguish between AI users, reviewers, implementers, governance participants, and accountability owners.
 Develop role-based competency expectations for AI-supported work.
 Recognize workforce risks such as deskilling, uneven access to training, and unclear role boundaries.
-Produce a workforce readiness and role design plan.</a:t>
+Produce a workforce readiness and role design plan.
+Application guidance: Use the assignment to test whether you can explain the concept, apply it to a realistic public health situation, and identify what would need review before the work moves forward.</a:t>
             </a:r>
             <a:endParaRPr lang="en-US" dirty="0"/>
           </a:p>
@@ -1975,7 +1987,8 @@
               <a:rPr lang="en-US" dirty="0"/>
               <a:t>Module Overview
 AI changes the skills, roles, and collaboration patterns needed in public health agencies. It does not eliminate the need for public health expertise. Instead, it increases the need for staff who can translate across program, data, technology, privacy, legal, equity, procurement, and community perspectives. Leaders need a workforce strategy that prepares staff to use, review, govern, and improve AI-supported workflows.
-This module helps leaders identify AI-related roles and competencies. It emphasizes the need for role-based training, AI bridge professionals, governance participants, technical reviewers, program owners, data stewards, and frontline users. The module also addresses workload, job redesign, deskilling risk, upskilling, and equitable access to training.</a:t>
+This module helps leaders identify AI-related roles and competencies. It emphasizes the need for role-based training, AI bridge professionals, governance participants, technical reviewers, program owners, data stewards, and frontline users. The module also addresses workload, job redesign, deskilling risk, upskilling, and equitable access to training.
+Application guidance: Connect the concept to public health purpose, responsible use, required safeguards, documentation, and the next action a department should take.</a:t>
             </a:r>
             <a:endParaRPr lang="en-US" dirty="0"/>
           </a:p>
@@ -2065,7 +2078,8 @@
               <a:rPr lang="en-US" dirty="0"/>
               <a:t>Why This Topic Matters for Public Health AI
 Public health AI depends on people who understand both technology and context. A model may generate a summary, but an epidemiologist must judge whether the summary is meaningful. A vendor may describe a product, but an informatician must assess interoperability and data flow. A leader may approve a use case, but governance participants must ensure that privacy, equity, security, and legal concerns have been addressed.
-Workforce strategy helps agencies move beyond ad hoc training. It defines which staff need baseline literacy, which staff need deeper technical skills, which staff need governance training, and which roles require ongoing competency development. It also helps agencies avoid concentrating AI knowledge in a small group while leaving most staff dependent on informal guidance.</a:t>
+Workforce strategy helps agencies move beyond ad hoc training. It defines which staff need baseline literacy, which staff need deeper technical skills, which staff need governance training, and which roles require ongoing competency development. It also helps agencies avoid concentrating AI knowledge in a small group while leaving most staff dependent on informal guidance.
+Application guidance: Connect the concept to public health purpose, responsible use, required safeguards, documentation, and the next action a department should take.</a:t>
             </a:r>
             <a:endParaRPr lang="en-US" dirty="0"/>
           </a:p>
@@ -2155,7 +2169,8 @@
               <a:rPr lang="en-US" dirty="0"/>
               <a:t>Public Health Example
 A public health agency implements several AI tools: a document assistant, a case summarization tool, a data quality monitor, and a predictive model for resource planning. Staff quickly discover that no single role owns all the knowledge needed. Program staff understand workflow, IT understands integration, privacy understands data restrictions, and analysts understand validation. However, there is no role that connects these perspectives consistently.
-The agency creates an AI bridge role to support use case development, governance preparation, workflow mapping, vendor questioning, training, and implementation review. The role does not replace technical specialists or program leaders. It helps them work together more effectively.</a:t>
+The agency creates an AI bridge role to support use case development, governance preparation, workflow mapping, vendor questioning, training, and implementation review. The role does not replace technical specialists or program leaders. It helps them work together more effectively.
+Application guidance: Connect the concept to public health purpose, responsible use, required safeguards, documentation, and the next action a department should take.</a:t>
             </a:r>
             <a:endParaRPr lang="en-US" dirty="0"/>
           </a:p>
@@ -2246,7 +2261,8 @@
               <a:t>Technical and Governance Deep Dive
 An AI workforce strategy should define role groups. General staff may need baseline AI literacy, approved-use guidance, and prompt safety. Frontline users need workflow-specific training and escalation expectations. Supervisors need to support review, feedback, and documentation. Program owners need to understand accountability and performance monitoring. Technical staff need deeper knowledge of data, architecture, validation, and security. Governance members need enough shared language to review proposals consistently.
 Competency expectations should be practical. Staff do not all need to become data scientists. However, many need to recognize when AI output is unsupported, when sensitive data should not be entered, when a use case exceeds approved boundaries, and when to escalate. Technical and informatics staff may need competencies in data quality, interoperability, model evaluation, RAG, security, and lifecycle monitoring.
-Role design should also address workload and equity. AI review and governance work require time. If these responsibilities are added informally to already overloaded staff, governance may become superficial. Leaders should identify protected time, training resources, role descriptions, and career pathways for staff who support responsible AI.</a:t>
+Role design should also address workload and equity. AI review and governance work require time. If these responsibilities are added informally to already overloaded staff, governance may become superficial. Leaders should identify protected time, training resources, role descriptions, and career pathways for staff who support responsible AI.
+Application guidance: Translate this concept into clear decision rights, review steps, documentation expectations, and escalation paths before an AI-supported workflow is approved.</a:t>
             </a:r>
             <a:endParaRPr lang="en-US" dirty="0"/>
           </a:p>
@@ -3017,8 +3033,8 @@
         </p:nvSpPr>
         <p:spPr>
           <a:xfrm>
-            <a:off x="9966960" y="6537960"/>
-            <a:ext cx="1645920" cy="201168"/>
+            <a:off x="9646920" y="6537960"/>
+            <a:ext cx="1965960" cy="201168"/>
           </a:xfrm>
           <a:prstGeom prst="rect">
             <a:avLst/>
@@ -3042,7 +3058,7 @@
                 <a:ea typeface="Aptos" pitchFamily="34" charset="-122"/>
                 <a:cs typeface="Aptos" pitchFamily="34" charset="-120"/>
               </a:rPr>
-              <a:t>Â© Paula Soper</a:t>
+              <a:t>Copyright Paula Soper</a:t>
             </a:r>
             <a:endParaRPr lang="en-US" sz="800" dirty="0"/>
           </a:p>
@@ -3089,77 +3105,13 @@
       </p:sp>
       <p:sp>
         <p:nvSpPr>
-          <p:cNvPr id="8" name="Shape 6"/>
+          <p:cNvPr id="8" name="Text 6"/>
           <p:cNvSpPr/>
           <p:nvPr/>
         </p:nvSpPr>
         <p:spPr>
           <a:xfrm>
             <a:off x="640080" y="658368"/>
-            <a:ext cx="420624" cy="420624"/>
-          </a:xfrm>
-          <a:prstGeom prst="ellipse">
-            <a:avLst/>
-          </a:prstGeom>
-          <a:solidFill>
-            <a:srgbClr val="0068B7"/>
-          </a:solidFill>
-          <a:ln w="12700">
-            <a:solidFill>
-              <a:srgbClr val="0068B7"/>
-            </a:solidFill>
-            <a:prstDash val="solid"/>
-          </a:ln>
-        </p:spPr>
-      </p:sp>
-      <p:sp>
-        <p:nvSpPr>
-          <p:cNvPr id="9" name="Text 7"/>
-          <p:cNvSpPr/>
-          <p:nvPr/>
-        </p:nvSpPr>
-        <p:spPr>
-          <a:xfrm>
-            <a:off x="640080" y="731520"/>
-            <a:ext cx="420624" cy="164592"/>
-          </a:xfrm>
-          <a:prstGeom prst="rect">
-            <a:avLst/>
-          </a:prstGeom>
-          <a:noFill/>
-          <a:ln/>
-        </p:spPr>
-        <p:txBody>
-          <a:bodyPr wrap="square" lIns="0" tIns="0" rIns="0" bIns="0" rtlCol="0" anchor="ctr"/>
-          <a:lstStyle/>
-          <a:p>
-            <a:pPr algn="ctr" indent="0" marL="0">
-              <a:buNone/>
-            </a:pPr>
-            <a:r>
-              <a:rPr lang="en-US" sz="1100" b="1" dirty="0">
-                <a:solidFill>
-                  <a:srgbClr val="FFFFFF"/>
-                </a:solidFill>
-                <a:latin typeface="Aptos" pitchFamily="34" charset="0"/>
-                <a:ea typeface="Aptos" pitchFamily="34" charset="-122"/>
-                <a:cs typeface="Aptos" pitchFamily="34" charset="-120"/>
-              </a:rPr>
-              <a:t>6</a:t>
-            </a:r>
-            <a:endParaRPr lang="en-US" sz="1100" dirty="0"/>
-          </a:p>
-        </p:txBody>
-      </p:sp>
-      <p:sp>
-        <p:nvSpPr>
-          <p:cNvPr id="10" name="Text 8"/>
-          <p:cNvSpPr/>
-          <p:nvPr/>
-        </p:nvSpPr>
-        <p:spPr>
-          <a:xfrm>
-            <a:off x="640080" y="621792"/>
             <a:ext cx="10881360" cy="713232"/>
           </a:xfrm>
           <a:prstGeom prst="rect">
@@ -3194,14 +3146,14 @@
       </p:sp>
       <p:sp>
         <p:nvSpPr>
-          <p:cNvPr id="11" name="Text 9"/>
+          <p:cNvPr id="9" name="Text 7"/>
           <p:cNvSpPr/>
           <p:nvPr/>
         </p:nvSpPr>
         <p:spPr>
           <a:xfrm>
             <a:off x="868680" y="1508760"/>
-            <a:ext cx="6537960" cy="4160520"/>
+            <a:ext cx="6309360" cy="4160520"/>
           </a:xfrm>
           <a:prstGeom prst="rect">
             <a:avLst/>
@@ -3260,18 +3212,18 @@
       </p:sp>
       <p:sp>
         <p:nvSpPr>
-          <p:cNvPr id="12" name="Shape 10"/>
-          <p:cNvSpPr/>
-          <p:nvPr/>
-        </p:nvSpPr>
-        <p:spPr>
-          <a:xfrm>
-            <a:off x="7909560" y="1417320"/>
-            <a:ext cx="3154680" cy="1828800"/>
+          <p:cNvPr id="10" name="Shape 8"/>
+          <p:cNvSpPr/>
+          <p:nvPr/>
+        </p:nvSpPr>
+        <p:spPr>
+          <a:xfrm>
+            <a:off x="7635240" y="1325880"/>
+            <a:ext cx="3474720" cy="1325880"/>
           </a:xfrm>
           <a:prstGeom prst="roundRect">
             <a:avLst>
-              <a:gd name="adj" fmla="val 6000"/>
+              <a:gd name="adj" fmla="val 8276"/>
             </a:avLst>
           </a:prstGeom>
           <a:solidFill>
@@ -3287,14 +3239,14 @@
       </p:sp>
       <p:sp>
         <p:nvSpPr>
-          <p:cNvPr id="13" name="Text 11"/>
-          <p:cNvSpPr/>
-          <p:nvPr/>
-        </p:nvSpPr>
-        <p:spPr>
-          <a:xfrm>
-            <a:off x="8074152" y="1563624"/>
-            <a:ext cx="2825496" cy="256032"/>
+          <p:cNvPr id="11" name="Text 9"/>
+          <p:cNvSpPr/>
+          <p:nvPr/>
+        </p:nvSpPr>
+        <p:spPr>
+          <a:xfrm>
+            <a:off x="7799832" y="1472184"/>
+            <a:ext cx="3145536" cy="256032"/>
           </a:xfrm>
           <a:prstGeom prst="rect">
             <a:avLst/>
@@ -3318,7 +3270,7 @@
                 <a:ea typeface="Aptos" pitchFamily="34" charset="-122"/>
                 <a:cs typeface="Aptos" pitchFamily="34" charset="-120"/>
               </a:rPr>
-              <a:t>Key idea</a:t>
+              <a:t>Risk check</a:t>
             </a:r>
             <a:endParaRPr lang="en-US" sz="1300" dirty="0"/>
           </a:p>
@@ -3326,14 +3278,14 @@
       </p:sp>
       <p:sp>
         <p:nvSpPr>
-          <p:cNvPr id="14" name="Text 12"/>
-          <p:cNvSpPr/>
-          <p:nvPr/>
-        </p:nvSpPr>
-        <p:spPr>
-          <a:xfrm>
-            <a:off x="8074152" y="1920240"/>
-            <a:ext cx="2825496" cy="1188720"/>
+          <p:cNvPr id="12" name="Text 10"/>
+          <p:cNvSpPr/>
+          <p:nvPr/>
+        </p:nvSpPr>
+        <p:spPr>
+          <a:xfrm>
+            <a:off x="7799832" y="1828800"/>
+            <a:ext cx="3145536" cy="685800"/>
           </a:xfrm>
           <a:prstGeom prst="rect">
             <a:avLst/>
@@ -3367,18 +3319,171 @@
       </p:sp>
       <p:sp>
         <p:nvSpPr>
-          <p:cNvPr id="15" name="Shape 13"/>
-          <p:cNvSpPr/>
-          <p:nvPr/>
-        </p:nvSpPr>
-        <p:spPr>
-          <a:xfrm>
-            <a:off x="7909560" y="3520440"/>
-            <a:ext cx="3154680" cy="1737360"/>
+          <p:cNvPr id="13" name="Shape 11"/>
+          <p:cNvSpPr/>
+          <p:nvPr/>
+        </p:nvSpPr>
+        <p:spPr>
+          <a:xfrm>
+            <a:off x="7635240" y="2788920"/>
+            <a:ext cx="3474720" cy="1536192"/>
           </a:xfrm>
           <a:prstGeom prst="roundRect">
             <a:avLst>
-              <a:gd name="adj" fmla="val 6316"/>
+              <a:gd name="adj" fmla="val 7143"/>
+            </a:avLst>
+          </a:prstGeom>
+          <a:solidFill>
+            <a:srgbClr val="FFFFFF">
+              <a:alpha val="88000"/>
+            </a:srgbClr>
+          </a:solidFill>
+          <a:ln w="12700">
+            <a:solidFill>
+              <a:srgbClr val="D6E8F2"/>
+            </a:solidFill>
+            <a:prstDash val="solid"/>
+          </a:ln>
+        </p:spPr>
+      </p:sp>
+      <p:sp>
+        <p:nvSpPr>
+          <p:cNvPr id="14" name="Shape 12"/>
+          <p:cNvSpPr/>
+          <p:nvPr/>
+        </p:nvSpPr>
+        <p:spPr>
+          <a:xfrm>
+            <a:off x="8046720" y="3108960"/>
+            <a:ext cx="2651760" cy="896112"/>
+          </a:xfrm>
+          <a:prstGeom prst="arc">
+            <a:avLst/>
+          </a:prstGeom>
+          <a:noFill/>
+          <a:ln w="25400">
+            <a:solidFill>
+              <a:srgbClr val="0068B7"/>
+            </a:solidFill>
+            <a:prstDash val="solid"/>
+          </a:ln>
+        </p:spPr>
+      </p:sp>
+      <p:sp>
+        <p:nvSpPr>
+          <p:cNvPr id="15" name="Text 13"/>
+          <p:cNvSpPr/>
+          <p:nvPr/>
+        </p:nvSpPr>
+        <p:spPr>
+          <a:xfrm>
+            <a:off x="7909560" y="3099816"/>
+            <a:ext cx="2926080" cy="256032"/>
+          </a:xfrm>
+          <a:prstGeom prst="rect">
+            <a:avLst/>
+          </a:prstGeom>
+          <a:noFill/>
+          <a:ln/>
+        </p:spPr>
+        <p:txBody>
+          <a:bodyPr wrap="square" lIns="0" tIns="0" rIns="0" bIns="0" rtlCol="0" anchor="ctr"/>
+          <a:lstStyle/>
+          <a:p>
+            <a:pPr algn="ctr" indent="0" marL="0">
+              <a:buNone/>
+            </a:pPr>
+            <a:r>
+              <a:rPr lang="en-US" sz="1500" b="1" dirty="0">
+                <a:solidFill>
+                  <a:srgbClr val="003A63"/>
+                </a:solidFill>
+                <a:latin typeface="Aptos" pitchFamily="34" charset="0"/>
+                <a:ea typeface="Aptos" pitchFamily="34" charset="-122"/>
+                <a:cs typeface="Aptos" pitchFamily="34" charset="-120"/>
+              </a:rPr>
+              <a:t>Risk</a:t>
+            </a:r>
+            <a:endParaRPr lang="en-US" sz="1500" dirty="0"/>
+          </a:p>
+        </p:txBody>
+      </p:sp>
+      <p:sp>
+        <p:nvSpPr>
+          <p:cNvPr id="16" name="Shape 14"/>
+          <p:cNvSpPr/>
+          <p:nvPr/>
+        </p:nvSpPr>
+        <p:spPr>
+          <a:xfrm>
+            <a:off x="8366760" y="3639312"/>
+            <a:ext cx="2011680" cy="0"/>
+          </a:xfrm>
+          <a:prstGeom prst="line">
+            <a:avLst/>
+          </a:prstGeom>
+          <a:noFill/>
+          <a:ln w="63500">
+            <a:solidFill>
+              <a:srgbClr val="2F8A28"/>
+            </a:solidFill>
+            <a:prstDash val="solid"/>
+          </a:ln>
+        </p:spPr>
+      </p:sp>
+      <p:sp>
+        <p:nvSpPr>
+          <p:cNvPr id="17" name="Text 15"/>
+          <p:cNvSpPr/>
+          <p:nvPr/>
+        </p:nvSpPr>
+        <p:spPr>
+          <a:xfrm>
+            <a:off x="7909560" y="3849624"/>
+            <a:ext cx="2926080" cy="164592"/>
+          </a:xfrm>
+          <a:prstGeom prst="rect">
+            <a:avLst/>
+          </a:prstGeom>
+          <a:noFill/>
+          <a:ln/>
+        </p:spPr>
+        <p:txBody>
+          <a:bodyPr wrap="square" lIns="0" tIns="0" rIns="0" bIns="0" rtlCol="0" anchor="ctr"/>
+          <a:lstStyle/>
+          <a:p>
+            <a:pPr algn="ctr" indent="0" marL="0">
+              <a:buNone/>
+            </a:pPr>
+            <a:r>
+              <a:rPr lang="en-US" sz="900" dirty="0">
+                <a:solidFill>
+                  <a:srgbClr val="003A63"/>
+                </a:solidFill>
+                <a:latin typeface="Aptos" pitchFamily="34" charset="0"/>
+                <a:ea typeface="Aptos" pitchFamily="34" charset="-122"/>
+                <a:cs typeface="Aptos" pitchFamily="34" charset="-120"/>
+              </a:rPr>
+              <a:t>Human review</a:t>
+            </a:r>
+            <a:endParaRPr lang="en-US" sz="900" dirty="0"/>
+          </a:p>
+        </p:txBody>
+      </p:sp>
+      <p:sp>
+        <p:nvSpPr>
+          <p:cNvPr id="18" name="Shape 16"/>
+          <p:cNvSpPr/>
+          <p:nvPr/>
+        </p:nvSpPr>
+        <p:spPr>
+          <a:xfrm>
+            <a:off x="7635240" y="4498848"/>
+            <a:ext cx="3474720" cy="1143000"/>
+          </a:xfrm>
+          <a:prstGeom prst="roundRect">
+            <a:avLst>
+              <a:gd name="adj" fmla="val 9600"/>
             </a:avLst>
           </a:prstGeom>
           <a:solidFill>
@@ -3394,14 +3499,14 @@
       </p:sp>
       <p:sp>
         <p:nvSpPr>
-          <p:cNvPr id="16" name="Text 14"/>
-          <p:cNvSpPr/>
-          <p:nvPr/>
-        </p:nvSpPr>
-        <p:spPr>
-          <a:xfrm>
-            <a:off x="8074152" y="3666744"/>
-            <a:ext cx="2825496" cy="256032"/>
+          <p:cNvPr id="19" name="Text 17"/>
+          <p:cNvSpPr/>
+          <p:nvPr/>
+        </p:nvSpPr>
+        <p:spPr>
+          <a:xfrm>
+            <a:off x="7799832" y="4645152"/>
+            <a:ext cx="3145536" cy="256032"/>
           </a:xfrm>
           <a:prstGeom prst="rect">
             <a:avLst/>
@@ -3425,7 +3530,7 @@
                 <a:ea typeface="Aptos" pitchFamily="34" charset="-122"/>
                 <a:cs typeface="Aptos" pitchFamily="34" charset="-120"/>
               </a:rPr>
-              <a:t>Use this for</a:t>
+              <a:t>Safeguard to plan</a:t>
             </a:r>
             <a:endParaRPr lang="en-US" sz="1300" dirty="0"/>
           </a:p>
@@ -3433,14 +3538,14 @@
       </p:sp>
       <p:sp>
         <p:nvSpPr>
-          <p:cNvPr id="17" name="Text 15"/>
-          <p:cNvSpPr/>
-          <p:nvPr/>
-        </p:nvSpPr>
-        <p:spPr>
-          <a:xfrm>
-            <a:off x="8074152" y="4023360"/>
-            <a:ext cx="2825496" cy="1097280"/>
+          <p:cNvPr id="20" name="Text 18"/>
+          <p:cNvSpPr/>
+          <p:nvPr/>
+        </p:nvSpPr>
+        <p:spPr>
+          <a:xfrm>
+            <a:off x="7799832" y="5001768"/>
+            <a:ext cx="3145536" cy="502920"/>
           </a:xfrm>
           <a:prstGeom prst="rect">
             <a:avLst/>
@@ -3466,7 +3571,7 @@
                 <a:ea typeface="Aptos" pitchFamily="34" charset="-122"/>
                 <a:cs typeface="Aptos" pitchFamily="34" charset="-120"/>
               </a:rPr>
-              <a:t>Connect the concept to public health decisions, safeguards, documentation, or implementation work.</a:t>
+              <a:t>Identify what could go wrong, who could be affected, what safeguards are needed, and what evidence should be reviewed before use expands.</a:t>
             </a:r>
             <a:endParaRPr lang="en-US" sz="1550" dirty="0"/>
           </a:p>
@@ -3640,8 +3745,8 @@
         </p:nvSpPr>
         <p:spPr>
           <a:xfrm>
-            <a:off x="9966960" y="6537960"/>
-            <a:ext cx="1645920" cy="201168"/>
+            <a:off x="9646920" y="6537960"/>
+            <a:ext cx="1965960" cy="201168"/>
           </a:xfrm>
           <a:prstGeom prst="rect">
             <a:avLst/>
@@ -3665,7 +3770,7 @@
                 <a:ea typeface="Aptos" pitchFamily="34" charset="-122"/>
                 <a:cs typeface="Aptos" pitchFamily="34" charset="-120"/>
               </a:rPr>
-              <a:t>Â© Paula Soper</a:t>
+              <a:t>Copyright Paula Soper</a:t>
             </a:r>
             <a:endParaRPr lang="en-US" sz="800" dirty="0"/>
           </a:p>
@@ -3712,17 +3817,262 @@
       </p:sp>
       <p:sp>
         <p:nvSpPr>
-          <p:cNvPr id="8" name="Shape 6"/>
+          <p:cNvPr id="8" name="Text 6"/>
           <p:cNvSpPr/>
           <p:nvPr/>
         </p:nvSpPr>
         <p:spPr>
           <a:xfrm>
             <a:off x="640080" y="658368"/>
-            <a:ext cx="420624" cy="420624"/>
-          </a:xfrm>
-          <a:prstGeom prst="ellipse">
-            <a:avLst/>
+            <a:ext cx="10881360" cy="713232"/>
+          </a:xfrm>
+          <a:prstGeom prst="rect">
+            <a:avLst/>
+          </a:prstGeom>
+          <a:noFill/>
+          <a:ln/>
+        </p:spPr>
+        <p:txBody>
+          <a:bodyPr wrap="square" lIns="0" tIns="0" rIns="0" bIns="0" rtlCol="0" anchor="ctr">
+            <a:normAutofit/>
+          </a:bodyPr>
+          <a:lstStyle/>
+          <a:p>
+            <a:pPr indent="0" marL="0">
+              <a:buNone/>
+            </a:pPr>
+            <a:r>
+              <a:rPr lang="en-US" sz="3400" b="1" dirty="0">
+                <a:solidFill>
+                  <a:srgbClr val="003A63"/>
+                </a:solidFill>
+                <a:latin typeface="Aptos Display" pitchFamily="34" charset="0"/>
+                <a:ea typeface="Aptos Display" pitchFamily="34" charset="-122"/>
+                <a:cs typeface="Aptos Display" pitchFamily="34" charset="-120"/>
+              </a:rPr>
+              <a:t>Application to AI-Supported Workflows</a:t>
+            </a:r>
+            <a:endParaRPr lang="en-US" sz="3400" dirty="0"/>
+          </a:p>
+        </p:txBody>
+      </p:sp>
+      <p:sp>
+        <p:nvSpPr>
+          <p:cNvPr id="9" name="Text 7"/>
+          <p:cNvSpPr/>
+          <p:nvPr/>
+        </p:nvSpPr>
+        <p:spPr>
+          <a:xfrm>
+            <a:off x="868680" y="1508760"/>
+            <a:ext cx="6309360" cy="4160520"/>
+          </a:xfrm>
+          <a:prstGeom prst="rect">
+            <a:avLst/>
+          </a:prstGeom>
+          <a:noFill/>
+          <a:ln/>
+        </p:spPr>
+        <p:txBody>
+          <a:bodyPr wrap="square" lIns="635" tIns="635" rIns="635" bIns="635" rtlCol="0" anchor="t">
+            <a:normAutofit/>
+          </a:bodyPr>
+          <a:lstStyle/>
+          <a:p>
+            <a:r>
+              <a:rPr lang="en-US" sz="2100" dirty="0">
+                <a:solidFill>
+                  <a:srgbClr val="17364A"/>
+                </a:solidFill>
+                <a:latin typeface="Aptos" pitchFamily="34" charset="0"/>
+                <a:ea typeface="Aptos" pitchFamily="34" charset="-122"/>
+                <a:cs typeface="Aptos" pitchFamily="34" charset="-120"/>
+              </a:rPr>
+              <a:t>Generative AI requires staff who can review outputs and manage source accuracy.</a:t>
+            </a:r>
+            <a:endParaRPr lang="en-US" sz="2100" dirty="0"/>
+          </a:p>
+          <a:p>
+            <a:r>
+              <a:rPr lang="en-US" sz="2100" dirty="0">
+                <a:solidFill>
+                  <a:srgbClr val="17364A"/>
+                </a:solidFill>
+                <a:latin typeface="Aptos" pitchFamily="34" charset="0"/>
+                <a:ea typeface="Aptos" pitchFamily="34" charset="-122"/>
+                <a:cs typeface="Aptos" pitchFamily="34" charset="-120"/>
+              </a:rPr>
+              <a:t>Predictive analytics requires staff who can interpret performance and understand limitations.</a:t>
+            </a:r>
+            <a:endParaRPr lang="en-US" sz="2100" dirty="0"/>
+          </a:p>
+          <a:p>
+            <a:r>
+              <a:rPr lang="en-US" sz="2100" dirty="0">
+                <a:solidFill>
+                  <a:srgbClr val="17364A"/>
+                </a:solidFill>
+                <a:latin typeface="Aptos" pitchFamily="34" charset="0"/>
+                <a:ea typeface="Aptos" pitchFamily="34" charset="-122"/>
+                <a:cs typeface="Aptos" pitchFamily="34" charset="-120"/>
+              </a:rPr>
+              <a:t>Agentic workflows require staff who can oversee permissions, actions, escalation, and rollback.</a:t>
+            </a:r>
+            <a:endParaRPr lang="en-US" sz="2100" dirty="0"/>
+          </a:p>
+        </p:txBody>
+      </p:sp>
+      <p:sp>
+        <p:nvSpPr>
+          <p:cNvPr id="10" name="Shape 8"/>
+          <p:cNvSpPr/>
+          <p:nvPr/>
+        </p:nvSpPr>
+        <p:spPr>
+          <a:xfrm>
+            <a:off x="7635240" y="1325880"/>
+            <a:ext cx="3474720" cy="1325880"/>
+          </a:xfrm>
+          <a:prstGeom prst="roundRect">
+            <a:avLst>
+              <a:gd name="adj" fmla="val 8276"/>
+            </a:avLst>
+          </a:prstGeom>
+          <a:solidFill>
+            <a:srgbClr val="EEF8ED"/>
+          </a:solidFill>
+          <a:ln w="12700">
+            <a:solidFill>
+              <a:srgbClr val="B9D7E6"/>
+            </a:solidFill>
+            <a:prstDash val="solid"/>
+          </a:ln>
+        </p:spPr>
+      </p:sp>
+      <p:sp>
+        <p:nvSpPr>
+          <p:cNvPr id="11" name="Text 9"/>
+          <p:cNvSpPr/>
+          <p:nvPr/>
+        </p:nvSpPr>
+        <p:spPr>
+          <a:xfrm>
+            <a:off x="7799832" y="1472184"/>
+            <a:ext cx="3145536" cy="256032"/>
+          </a:xfrm>
+          <a:prstGeom prst="rect">
+            <a:avLst/>
+          </a:prstGeom>
+          <a:noFill/>
+          <a:ln/>
+        </p:spPr>
+        <p:txBody>
+          <a:bodyPr wrap="square" lIns="0" tIns="0" rIns="0" bIns="0" rtlCol="0" anchor="ctr"/>
+          <a:lstStyle/>
+          <a:p>
+            <a:pPr indent="0" marL="0">
+              <a:buNone/>
+            </a:pPr>
+            <a:r>
+              <a:rPr lang="en-US" sz="1300" b="1" dirty="0">
+                <a:solidFill>
+                  <a:srgbClr val="0068B7"/>
+                </a:solidFill>
+                <a:latin typeface="Aptos" pitchFamily="34" charset="0"/>
+                <a:ea typeface="Aptos" pitchFamily="34" charset="-122"/>
+                <a:cs typeface="Aptos" pitchFamily="34" charset="-120"/>
+              </a:rPr>
+              <a:t>Implementation cue</a:t>
+            </a:r>
+            <a:endParaRPr lang="en-US" sz="1300" dirty="0"/>
+          </a:p>
+        </p:txBody>
+      </p:sp>
+      <p:sp>
+        <p:nvSpPr>
+          <p:cNvPr id="12" name="Text 10"/>
+          <p:cNvSpPr/>
+          <p:nvPr/>
+        </p:nvSpPr>
+        <p:spPr>
+          <a:xfrm>
+            <a:off x="7799832" y="1828800"/>
+            <a:ext cx="3145536" cy="685800"/>
+          </a:xfrm>
+          <a:prstGeom prst="rect">
+            <a:avLst/>
+          </a:prstGeom>
+          <a:noFill/>
+          <a:ln/>
+        </p:spPr>
+        <p:txBody>
+          <a:bodyPr wrap="square" lIns="0" tIns="0" rIns="0" bIns="0" rtlCol="0" anchor="t">
+            <a:normAutofit/>
+          </a:bodyPr>
+          <a:lstStyle/>
+          <a:p>
+            <a:pPr indent="0" marL="0">
+              <a:buNone/>
+            </a:pPr>
+            <a:r>
+              <a:rPr lang="en-US" sz="1550" dirty="0">
+                <a:solidFill>
+                  <a:srgbClr val="17364A"/>
+                </a:solidFill>
+                <a:latin typeface="Aptos" pitchFamily="34" charset="0"/>
+                <a:ea typeface="Aptos" pitchFamily="34" charset="-122"/>
+                <a:cs typeface="Aptos" pitchFamily="34" charset="-120"/>
+              </a:rPr>
+              <a:t>Generative AI requires staff who can review outputs and manage source accuracy.</a:t>
+            </a:r>
+            <a:endParaRPr lang="en-US" sz="1550" dirty="0"/>
+          </a:p>
+        </p:txBody>
+      </p:sp>
+      <p:sp>
+        <p:nvSpPr>
+          <p:cNvPr id="13" name="Shape 11"/>
+          <p:cNvSpPr/>
+          <p:nvPr/>
+        </p:nvSpPr>
+        <p:spPr>
+          <a:xfrm>
+            <a:off x="7635240" y="2788920"/>
+            <a:ext cx="3474720" cy="1536192"/>
+          </a:xfrm>
+          <a:prstGeom prst="roundRect">
+            <a:avLst>
+              <a:gd name="adj" fmla="val 7143"/>
+            </a:avLst>
+          </a:prstGeom>
+          <a:solidFill>
+            <a:srgbClr val="FFFFFF">
+              <a:alpha val="88000"/>
+            </a:srgbClr>
+          </a:solidFill>
+          <a:ln w="12700">
+            <a:solidFill>
+              <a:srgbClr val="D6E8F2"/>
+            </a:solidFill>
+            <a:prstDash val="solid"/>
+          </a:ln>
+        </p:spPr>
+      </p:sp>
+      <p:sp>
+        <p:nvSpPr>
+          <p:cNvPr id="14" name="Shape 12"/>
+          <p:cNvSpPr/>
+          <p:nvPr/>
+        </p:nvSpPr>
+        <p:spPr>
+          <a:xfrm>
+            <a:off x="7927848" y="3319272"/>
+            <a:ext cx="792480" cy="749808"/>
+          </a:xfrm>
+          <a:prstGeom prst="roundRect">
+            <a:avLst>
+              <a:gd name="adj" fmla="val 14634"/>
+            </a:avLst>
           </a:prstGeom>
           <a:solidFill>
             <a:srgbClr val="0068B7"/>
@@ -3737,53 +4087,14 @@
       </p:sp>
       <p:sp>
         <p:nvSpPr>
-          <p:cNvPr id="9" name="Text 7"/>
-          <p:cNvSpPr/>
-          <p:nvPr/>
-        </p:nvSpPr>
-        <p:spPr>
-          <a:xfrm>
-            <a:off x="640080" y="731520"/>
-            <a:ext cx="420624" cy="164592"/>
-          </a:xfrm>
-          <a:prstGeom prst="rect">
-            <a:avLst/>
-          </a:prstGeom>
-          <a:noFill/>
-          <a:ln/>
-        </p:spPr>
-        <p:txBody>
-          <a:bodyPr wrap="square" lIns="0" tIns="0" rIns="0" bIns="0" rtlCol="0" anchor="ctr"/>
-          <a:lstStyle/>
-          <a:p>
-            <a:pPr algn="ctr" indent="0" marL="0">
-              <a:buNone/>
-            </a:pPr>
-            <a:r>
-              <a:rPr lang="en-US" sz="1100" b="1" dirty="0">
-                <a:solidFill>
-                  <a:srgbClr val="FFFFFF"/>
-                </a:solidFill>
-                <a:latin typeface="Aptos" pitchFamily="34" charset="0"/>
-                <a:ea typeface="Aptos" pitchFamily="34" charset="-122"/>
-                <a:cs typeface="Aptos" pitchFamily="34" charset="-120"/>
-              </a:rPr>
-              <a:t>7</a:t>
-            </a:r>
-            <a:endParaRPr lang="en-US" sz="1100" dirty="0"/>
-          </a:p>
-        </p:txBody>
-      </p:sp>
-      <p:sp>
-        <p:nvSpPr>
-          <p:cNvPr id="10" name="Text 8"/>
-          <p:cNvSpPr/>
-          <p:nvPr/>
-        </p:nvSpPr>
-        <p:spPr>
-          <a:xfrm>
-            <a:off x="640080" y="621792"/>
-            <a:ext cx="10881360" cy="713232"/>
+          <p:cNvPr id="15" name="Text 13"/>
+          <p:cNvSpPr/>
+          <p:nvPr/>
+        </p:nvSpPr>
+        <p:spPr>
+          <a:xfrm>
+            <a:off x="8001000" y="3511296"/>
+            <a:ext cx="646176" cy="310896"/>
           </a:xfrm>
           <a:prstGeom prst="rect">
             <a:avLst/>
@@ -3797,112 +4108,46 @@
           </a:bodyPr>
           <a:lstStyle/>
           <a:p>
-            <a:pPr indent="0" marL="0">
-              <a:buNone/>
-            </a:pPr>
-            <a:r>
-              <a:rPr lang="en-US" sz="3400" b="1" dirty="0">
-                <a:solidFill>
-                  <a:srgbClr val="003A63"/>
-                </a:solidFill>
-                <a:latin typeface="Aptos Display" pitchFamily="34" charset="0"/>
-                <a:ea typeface="Aptos Display" pitchFamily="34" charset="-122"/>
-                <a:cs typeface="Aptos Display" pitchFamily="34" charset="-120"/>
-              </a:rPr>
-              <a:t>Application to AI-Supported Workflows</a:t>
-            </a:r>
-            <a:endParaRPr lang="en-US" sz="3400" dirty="0"/>
-          </a:p>
-        </p:txBody>
-      </p:sp>
-      <p:sp>
-        <p:nvSpPr>
-          <p:cNvPr id="11" name="Text 9"/>
-          <p:cNvSpPr/>
-          <p:nvPr/>
-        </p:nvSpPr>
-        <p:spPr>
-          <a:xfrm>
-            <a:off x="868680" y="1508760"/>
-            <a:ext cx="6537960" cy="4160520"/>
-          </a:xfrm>
-          <a:prstGeom prst="rect">
-            <a:avLst/>
-          </a:prstGeom>
-          <a:noFill/>
-          <a:ln/>
-        </p:spPr>
-        <p:txBody>
-          <a:bodyPr wrap="square" lIns="635" tIns="635" rIns="635" bIns="635" rtlCol="0" anchor="t">
-            <a:normAutofit/>
-          </a:bodyPr>
-          <a:lstStyle/>
-          <a:p>
-            <a:r>
-              <a:rPr lang="en-US" sz="2100" dirty="0">
-                <a:solidFill>
-                  <a:srgbClr val="17364A"/>
-                </a:solidFill>
-                <a:latin typeface="Aptos" pitchFamily="34" charset="0"/>
-                <a:ea typeface="Aptos" pitchFamily="34" charset="-122"/>
-                <a:cs typeface="Aptos" pitchFamily="34" charset="-120"/>
-              </a:rPr>
-              <a:t>Generative AI requires staff who can review outputs and manage source accuracy.</a:t>
-            </a:r>
-            <a:endParaRPr lang="en-US" sz="2100" dirty="0"/>
-          </a:p>
-          <a:p>
-            <a:r>
-              <a:rPr lang="en-US" sz="2100" dirty="0">
-                <a:solidFill>
-                  <a:srgbClr val="17364A"/>
-                </a:solidFill>
-                <a:latin typeface="Aptos" pitchFamily="34" charset="0"/>
-                <a:ea typeface="Aptos" pitchFamily="34" charset="-122"/>
-                <a:cs typeface="Aptos" pitchFamily="34" charset="-120"/>
-              </a:rPr>
-              <a:t>Predictive analytics requires staff who can interpret performance and understand limitations.</a:t>
-            </a:r>
-            <a:endParaRPr lang="en-US" sz="2100" dirty="0"/>
-          </a:p>
-          <a:p>
-            <a:r>
-              <a:rPr lang="en-US" sz="2100" dirty="0">
-                <a:solidFill>
-                  <a:srgbClr val="17364A"/>
-                </a:solidFill>
-                <a:latin typeface="Aptos" pitchFamily="34" charset="0"/>
-                <a:ea typeface="Aptos" pitchFamily="34" charset="-122"/>
-                <a:cs typeface="Aptos" pitchFamily="34" charset="-120"/>
-              </a:rPr>
-              <a:t>Agentic workflows require staff who can oversee permissions, actions, escalation, and rollback.</a:t>
-            </a:r>
-            <a:endParaRPr lang="en-US" sz="2100" dirty="0"/>
-          </a:p>
-        </p:txBody>
-      </p:sp>
-      <p:sp>
-        <p:nvSpPr>
-          <p:cNvPr id="12" name="Shape 10"/>
-          <p:cNvSpPr/>
-          <p:nvPr/>
-        </p:nvSpPr>
-        <p:spPr>
-          <a:xfrm>
-            <a:off x="7909560" y="1417320"/>
-            <a:ext cx="3154680" cy="1828800"/>
+            <a:pPr algn="ctr" indent="0" marL="0">
+              <a:buNone/>
+            </a:pPr>
+            <a:r>
+              <a:rPr lang="en-US" sz="1500" b="1" dirty="0">
+                <a:solidFill>
+                  <a:srgbClr val="FFFFFF"/>
+                </a:solidFill>
+                <a:latin typeface="Aptos" pitchFamily="34" charset="0"/>
+                <a:ea typeface="Aptos" pitchFamily="34" charset="-122"/>
+                <a:cs typeface="Aptos" pitchFamily="34" charset="-120"/>
+              </a:rPr>
+              <a:t>Plan</a:t>
+            </a:r>
+            <a:endParaRPr lang="en-US" sz="1500" dirty="0"/>
+          </a:p>
+        </p:txBody>
+      </p:sp>
+      <p:sp>
+        <p:nvSpPr>
+          <p:cNvPr id="16" name="Shape 14"/>
+          <p:cNvSpPr/>
+          <p:nvPr/>
+        </p:nvSpPr>
+        <p:spPr>
+          <a:xfrm>
+            <a:off x="8976360" y="3319272"/>
+            <a:ext cx="792480" cy="749808"/>
           </a:xfrm>
           <a:prstGeom prst="roundRect">
             <a:avLst>
-              <a:gd name="adj" fmla="val 6000"/>
+              <a:gd name="adj" fmla="val 14634"/>
             </a:avLst>
           </a:prstGeom>
           <a:solidFill>
-            <a:srgbClr val="EEF8ED"/>
+            <a:srgbClr val="2F8A28"/>
           </a:solidFill>
           <a:ln w="12700">
             <a:solidFill>
-              <a:srgbClr val="B9D7E6"/>
+              <a:srgbClr val="2F8A28"/>
             </a:solidFill>
             <a:prstDash val="solid"/>
           </a:ln>
@@ -3910,98 +4155,189 @@
       </p:sp>
       <p:sp>
         <p:nvSpPr>
-          <p:cNvPr id="13" name="Text 11"/>
-          <p:cNvSpPr/>
-          <p:nvPr/>
-        </p:nvSpPr>
-        <p:spPr>
-          <a:xfrm>
-            <a:off x="8074152" y="1563624"/>
-            <a:ext cx="2825496" cy="256032"/>
-          </a:xfrm>
-          <a:prstGeom prst="rect">
-            <a:avLst/>
-          </a:prstGeom>
-          <a:noFill/>
-          <a:ln/>
-        </p:spPr>
-        <p:txBody>
-          <a:bodyPr wrap="square" lIns="0" tIns="0" rIns="0" bIns="0" rtlCol="0" anchor="ctr"/>
-          <a:lstStyle/>
-          <a:p>
-            <a:pPr indent="0" marL="0">
-              <a:buNone/>
-            </a:pPr>
-            <a:r>
-              <a:rPr lang="en-US" sz="1300" b="1" dirty="0">
-                <a:solidFill>
-                  <a:srgbClr val="0068B7"/>
-                </a:solidFill>
-                <a:latin typeface="Aptos" pitchFamily="34" charset="0"/>
-                <a:ea typeface="Aptos" pitchFamily="34" charset="-122"/>
-                <a:cs typeface="Aptos" pitchFamily="34" charset="-120"/>
-              </a:rPr>
-              <a:t>Key idea</a:t>
-            </a:r>
-            <a:endParaRPr lang="en-US" sz="1300" dirty="0"/>
-          </a:p>
-        </p:txBody>
-      </p:sp>
-      <p:sp>
-        <p:nvSpPr>
-          <p:cNvPr id="14" name="Text 12"/>
-          <p:cNvSpPr/>
-          <p:nvPr/>
-        </p:nvSpPr>
-        <p:spPr>
-          <a:xfrm>
-            <a:off x="8074152" y="1920240"/>
-            <a:ext cx="2825496" cy="1188720"/>
-          </a:xfrm>
-          <a:prstGeom prst="rect">
-            <a:avLst/>
-          </a:prstGeom>
-          <a:noFill/>
-          <a:ln/>
-        </p:spPr>
-        <p:txBody>
-          <a:bodyPr wrap="square" lIns="0" tIns="0" rIns="0" bIns="0" rtlCol="0" anchor="t">
+          <p:cNvPr id="17" name="Text 15"/>
+          <p:cNvSpPr/>
+          <p:nvPr/>
+        </p:nvSpPr>
+        <p:spPr>
+          <a:xfrm>
+            <a:off x="9049512" y="3511296"/>
+            <a:ext cx="646176" cy="310896"/>
+          </a:xfrm>
+          <a:prstGeom prst="rect">
+            <a:avLst/>
+          </a:prstGeom>
+          <a:noFill/>
+          <a:ln/>
+        </p:spPr>
+        <p:txBody>
+          <a:bodyPr wrap="square" lIns="0" tIns="0" rIns="0" bIns="0" rtlCol="0" anchor="ctr">
             <a:normAutofit/>
           </a:bodyPr>
           <a:lstStyle/>
           <a:p>
-            <a:pPr indent="0" marL="0">
-              <a:buNone/>
-            </a:pPr>
-            <a:r>
-              <a:rPr lang="en-US" sz="1550" dirty="0">
-                <a:solidFill>
-                  <a:srgbClr val="17364A"/>
-                </a:solidFill>
-                <a:latin typeface="Aptos" pitchFamily="34" charset="0"/>
-                <a:ea typeface="Aptos" pitchFamily="34" charset="-122"/>
-                <a:cs typeface="Aptos" pitchFamily="34" charset="-120"/>
-              </a:rPr>
-              <a:t>Generative AI requires staff who can review outputs and manage source accuracy.</a:t>
-            </a:r>
-            <a:endParaRPr lang="en-US" sz="1550" dirty="0"/>
-          </a:p>
-        </p:txBody>
-      </p:sp>
-      <p:sp>
-        <p:nvSpPr>
-          <p:cNvPr id="15" name="Shape 13"/>
-          <p:cNvSpPr/>
-          <p:nvPr/>
-        </p:nvSpPr>
-        <p:spPr>
-          <a:xfrm>
-            <a:off x="7909560" y="3520440"/>
-            <a:ext cx="3154680" cy="1737360"/>
+            <a:pPr algn="ctr" indent="0" marL="0">
+              <a:buNone/>
+            </a:pPr>
+            <a:r>
+              <a:rPr lang="en-US" sz="1500" b="1" dirty="0">
+                <a:solidFill>
+                  <a:srgbClr val="FFFFFF"/>
+                </a:solidFill>
+                <a:latin typeface="Aptos" pitchFamily="34" charset="0"/>
+                <a:ea typeface="Aptos" pitchFamily="34" charset="-122"/>
+                <a:cs typeface="Aptos" pitchFamily="34" charset="-120"/>
+              </a:rPr>
+              <a:t>Do</a:t>
+            </a:r>
+            <a:endParaRPr lang="en-US" sz="1500" dirty="0"/>
+          </a:p>
+        </p:txBody>
+      </p:sp>
+      <p:sp>
+        <p:nvSpPr>
+          <p:cNvPr id="18" name="Shape 16"/>
+          <p:cNvSpPr/>
+          <p:nvPr/>
+        </p:nvSpPr>
+        <p:spPr>
+          <a:xfrm>
+            <a:off x="10024872" y="3319272"/>
+            <a:ext cx="792480" cy="749808"/>
           </a:xfrm>
           <a:prstGeom prst="roundRect">
             <a:avLst>
-              <a:gd name="adj" fmla="val 6316"/>
+              <a:gd name="adj" fmla="val 14634"/>
+            </a:avLst>
+          </a:prstGeom>
+          <a:solidFill>
+            <a:srgbClr val="D69A2D"/>
+          </a:solidFill>
+          <a:ln w="12700">
+            <a:solidFill>
+              <a:srgbClr val="D69A2D"/>
+            </a:solidFill>
+            <a:prstDash val="solid"/>
+          </a:ln>
+        </p:spPr>
+      </p:sp>
+      <p:sp>
+        <p:nvSpPr>
+          <p:cNvPr id="19" name="Text 17"/>
+          <p:cNvSpPr/>
+          <p:nvPr/>
+        </p:nvSpPr>
+        <p:spPr>
+          <a:xfrm>
+            <a:off x="10098024" y="3511296"/>
+            <a:ext cx="646176" cy="310896"/>
+          </a:xfrm>
+          <a:prstGeom prst="rect">
+            <a:avLst/>
+          </a:prstGeom>
+          <a:noFill/>
+          <a:ln/>
+        </p:spPr>
+        <p:txBody>
+          <a:bodyPr wrap="square" lIns="0" tIns="0" rIns="0" bIns="0" rtlCol="0" anchor="ctr">
+            <a:normAutofit/>
+          </a:bodyPr>
+          <a:lstStyle/>
+          <a:p>
+            <a:pPr algn="ctr" indent="0" marL="0">
+              <a:buNone/>
+            </a:pPr>
+            <a:r>
+              <a:rPr lang="en-US" sz="1500" b="1" dirty="0">
+                <a:solidFill>
+                  <a:srgbClr val="FFFFFF"/>
+                </a:solidFill>
+                <a:latin typeface="Aptos" pitchFamily="34" charset="0"/>
+                <a:ea typeface="Aptos" pitchFamily="34" charset="-122"/>
+                <a:cs typeface="Aptos" pitchFamily="34" charset="-120"/>
+              </a:rPr>
+              <a:t>Review</a:t>
+            </a:r>
+            <a:endParaRPr lang="en-US" sz="1500" dirty="0"/>
+          </a:p>
+        </p:txBody>
+      </p:sp>
+      <p:sp>
+        <p:nvSpPr>
+          <p:cNvPr id="20" name="Shape 18"/>
+          <p:cNvSpPr/>
+          <p:nvPr/>
+        </p:nvSpPr>
+        <p:spPr>
+          <a:xfrm>
+            <a:off x="8293608" y="4389120"/>
+            <a:ext cx="2157984" cy="0"/>
+          </a:xfrm>
+          <a:prstGeom prst="line">
+            <a:avLst/>
+          </a:prstGeom>
+          <a:noFill/>
+          <a:ln w="25400">
+            <a:solidFill>
+              <a:srgbClr val="8ABBD8"/>
+            </a:solidFill>
+            <a:prstDash val="solid"/>
+          </a:ln>
+        </p:spPr>
+      </p:sp>
+      <p:sp>
+        <p:nvSpPr>
+          <p:cNvPr id="21" name="Text 19"/>
+          <p:cNvSpPr/>
+          <p:nvPr/>
+        </p:nvSpPr>
+        <p:spPr>
+          <a:xfrm>
+            <a:off x="7909560" y="3977640"/>
+            <a:ext cx="2926080" cy="182880"/>
+          </a:xfrm>
+          <a:prstGeom prst="rect">
+            <a:avLst/>
+          </a:prstGeom>
+          <a:noFill/>
+          <a:ln/>
+        </p:spPr>
+        <p:txBody>
+          <a:bodyPr wrap="square" lIns="0" tIns="0" rIns="0" bIns="0" rtlCol="0" anchor="ctr"/>
+          <a:lstStyle/>
+          <a:p>
+            <a:pPr algn="ctr" indent="0" marL="0">
+              <a:buNone/>
+            </a:pPr>
+            <a:r>
+              <a:rPr lang="en-US" sz="1000" dirty="0">
+                <a:solidFill>
+                  <a:srgbClr val="003A63"/>
+                </a:solidFill>
+                <a:latin typeface="Aptos" pitchFamily="34" charset="0"/>
+                <a:ea typeface="Aptos" pitchFamily="34" charset="-122"/>
+                <a:cs typeface="Aptos" pitchFamily="34" charset="-120"/>
+              </a:rPr>
+              <a:t>Dependencies visible</a:t>
+            </a:r>
+            <a:endParaRPr lang="en-US" sz="1000" dirty="0"/>
+          </a:p>
+        </p:txBody>
+      </p:sp>
+      <p:sp>
+        <p:nvSpPr>
+          <p:cNvPr id="22" name="Shape 20"/>
+          <p:cNvSpPr/>
+          <p:nvPr/>
+        </p:nvSpPr>
+        <p:spPr>
+          <a:xfrm>
+            <a:off x="7635240" y="4498848"/>
+            <a:ext cx="3474720" cy="1143000"/>
+          </a:xfrm>
+          <a:prstGeom prst="roundRect">
+            <a:avLst>
+              <a:gd name="adj" fmla="val 9600"/>
             </a:avLst>
           </a:prstGeom>
           <a:solidFill>
@@ -4017,14 +4353,14 @@
       </p:sp>
       <p:sp>
         <p:nvSpPr>
-          <p:cNvPr id="16" name="Text 14"/>
-          <p:cNvSpPr/>
-          <p:nvPr/>
-        </p:nvSpPr>
-        <p:spPr>
-          <a:xfrm>
-            <a:off x="8074152" y="3666744"/>
-            <a:ext cx="2825496" cy="256032"/>
+          <p:cNvPr id="23" name="Text 21"/>
+          <p:cNvSpPr/>
+          <p:nvPr/>
+        </p:nvSpPr>
+        <p:spPr>
+          <a:xfrm>
+            <a:off x="7799832" y="4645152"/>
+            <a:ext cx="3145536" cy="256032"/>
           </a:xfrm>
           <a:prstGeom prst="rect">
             <a:avLst/>
@@ -4048,7 +4384,7 @@
                 <a:ea typeface="Aptos" pitchFamily="34" charset="-122"/>
                 <a:cs typeface="Aptos" pitchFamily="34" charset="-120"/>
               </a:rPr>
-              <a:t>Use this for</a:t>
+              <a:t>Next action</a:t>
             </a:r>
             <a:endParaRPr lang="en-US" sz="1300" dirty="0"/>
           </a:p>
@@ -4056,14 +4392,14 @@
       </p:sp>
       <p:sp>
         <p:nvSpPr>
-          <p:cNvPr id="17" name="Text 15"/>
-          <p:cNvSpPr/>
-          <p:nvPr/>
-        </p:nvSpPr>
-        <p:spPr>
-          <a:xfrm>
-            <a:off x="8074152" y="4023360"/>
-            <a:ext cx="2825496" cy="1097280"/>
+          <p:cNvPr id="24" name="Text 22"/>
+          <p:cNvSpPr/>
+          <p:nvPr/>
+        </p:nvSpPr>
+        <p:spPr>
+          <a:xfrm>
+            <a:off x="7799832" y="5001768"/>
+            <a:ext cx="3145536" cy="502920"/>
           </a:xfrm>
           <a:prstGeom prst="rect">
             <a:avLst/>
@@ -4089,7 +4425,7 @@
                 <a:ea typeface="Aptos" pitchFamily="34" charset="-122"/>
                 <a:cs typeface="Aptos" pitchFamily="34" charset="-120"/>
               </a:rPr>
-              <a:t>Connect the concept to public health decisions, safeguards, documentation, or implementation work.</a:t>
+              <a:t>Use the concept to clarify workflow changes, dependencies, staffing, procurement requirements, training needs, and implementation checkpoints.</a:t>
             </a:r>
             <a:endParaRPr lang="en-US" sz="1550" dirty="0"/>
           </a:p>
@@ -4263,8 +4599,8 @@
         </p:nvSpPr>
         <p:spPr>
           <a:xfrm>
-            <a:off x="9966960" y="6537960"/>
-            <a:ext cx="1645920" cy="201168"/>
+            <a:off x="9646920" y="6537960"/>
+            <a:ext cx="1965960" cy="201168"/>
           </a:xfrm>
           <a:prstGeom prst="rect">
             <a:avLst/>
@@ -4288,7 +4624,7 @@
                 <a:ea typeface="Aptos" pitchFamily="34" charset="-122"/>
                 <a:cs typeface="Aptos" pitchFamily="34" charset="-120"/>
               </a:rPr>
-              <a:t>Â© Paula Soper</a:t>
+              <a:t>Copyright Paula Soper</a:t>
             </a:r>
             <a:endParaRPr lang="en-US" sz="800" dirty="0"/>
           </a:p>
@@ -4335,77 +4671,13 @@
       </p:sp>
       <p:sp>
         <p:nvSpPr>
-          <p:cNvPr id="8" name="Shape 6"/>
+          <p:cNvPr id="8" name="Text 6"/>
           <p:cNvSpPr/>
           <p:nvPr/>
         </p:nvSpPr>
         <p:spPr>
           <a:xfrm>
             <a:off x="640080" y="658368"/>
-            <a:ext cx="420624" cy="420624"/>
-          </a:xfrm>
-          <a:prstGeom prst="ellipse">
-            <a:avLst/>
-          </a:prstGeom>
-          <a:solidFill>
-            <a:srgbClr val="0068B7"/>
-          </a:solidFill>
-          <a:ln w="12700">
-            <a:solidFill>
-              <a:srgbClr val="0068B7"/>
-            </a:solidFill>
-            <a:prstDash val="solid"/>
-          </a:ln>
-        </p:spPr>
-      </p:sp>
-      <p:sp>
-        <p:nvSpPr>
-          <p:cNvPr id="9" name="Text 7"/>
-          <p:cNvSpPr/>
-          <p:nvPr/>
-        </p:nvSpPr>
-        <p:spPr>
-          <a:xfrm>
-            <a:off x="640080" y="731520"/>
-            <a:ext cx="420624" cy="164592"/>
-          </a:xfrm>
-          <a:prstGeom prst="rect">
-            <a:avLst/>
-          </a:prstGeom>
-          <a:noFill/>
-          <a:ln/>
-        </p:spPr>
-        <p:txBody>
-          <a:bodyPr wrap="square" lIns="0" tIns="0" rIns="0" bIns="0" rtlCol="0" anchor="ctr"/>
-          <a:lstStyle/>
-          <a:p>
-            <a:pPr algn="ctr" indent="0" marL="0">
-              <a:buNone/>
-            </a:pPr>
-            <a:r>
-              <a:rPr lang="en-US" sz="1100" b="1" dirty="0">
-                <a:solidFill>
-                  <a:srgbClr val="FFFFFF"/>
-                </a:solidFill>
-                <a:latin typeface="Aptos" pitchFamily="34" charset="0"/>
-                <a:ea typeface="Aptos" pitchFamily="34" charset="-122"/>
-                <a:cs typeface="Aptos" pitchFamily="34" charset="-120"/>
-              </a:rPr>
-              <a:t>8</a:t>
-            </a:r>
-            <a:endParaRPr lang="en-US" sz="1100" dirty="0"/>
-          </a:p>
-        </p:txBody>
-      </p:sp>
-      <p:sp>
-        <p:nvSpPr>
-          <p:cNvPr id="10" name="Text 8"/>
-          <p:cNvSpPr/>
-          <p:nvPr/>
-        </p:nvSpPr>
-        <p:spPr>
-          <a:xfrm>
-            <a:off x="640080" y="621792"/>
             <a:ext cx="10881360" cy="713232"/>
           </a:xfrm>
           <a:prstGeom prst="rect">
@@ -4440,14 +4712,14 @@
       </p:sp>
       <p:sp>
         <p:nvSpPr>
-          <p:cNvPr id="11" name="Text 9"/>
+          <p:cNvPr id="9" name="Text 7"/>
           <p:cNvSpPr/>
           <p:nvPr/>
         </p:nvSpPr>
         <p:spPr>
           <a:xfrm>
             <a:off x="868680" y="1508760"/>
-            <a:ext cx="6537960" cy="4160520"/>
+            <a:ext cx="6309360" cy="4160520"/>
           </a:xfrm>
           <a:prstGeom prst="rect">
             <a:avLst/>
@@ -4506,18 +4778,18 @@
       </p:sp>
       <p:sp>
         <p:nvSpPr>
-          <p:cNvPr id="12" name="Shape 10"/>
-          <p:cNvSpPr/>
-          <p:nvPr/>
-        </p:nvSpPr>
-        <p:spPr>
-          <a:xfrm>
-            <a:off x="7909560" y="1417320"/>
-            <a:ext cx="3154680" cy="1828800"/>
+          <p:cNvPr id="10" name="Shape 8"/>
+          <p:cNvSpPr/>
+          <p:nvPr/>
+        </p:nvSpPr>
+        <p:spPr>
+          <a:xfrm>
+            <a:off x="7635240" y="1325880"/>
+            <a:ext cx="3474720" cy="1325880"/>
           </a:xfrm>
           <a:prstGeom prst="roundRect">
             <a:avLst>
-              <a:gd name="adj" fmla="val 6000"/>
+              <a:gd name="adj" fmla="val 8276"/>
             </a:avLst>
           </a:prstGeom>
           <a:solidFill>
@@ -4533,14 +4805,14 @@
       </p:sp>
       <p:sp>
         <p:nvSpPr>
-          <p:cNvPr id="13" name="Text 11"/>
-          <p:cNvSpPr/>
-          <p:nvPr/>
-        </p:nvSpPr>
-        <p:spPr>
-          <a:xfrm>
-            <a:off x="8074152" y="1563624"/>
-            <a:ext cx="2825496" cy="256032"/>
+          <p:cNvPr id="11" name="Text 9"/>
+          <p:cNvSpPr/>
+          <p:nvPr/>
+        </p:nvSpPr>
+        <p:spPr>
+          <a:xfrm>
+            <a:off x="7799832" y="1472184"/>
+            <a:ext cx="3145536" cy="256032"/>
           </a:xfrm>
           <a:prstGeom prst="rect">
             <a:avLst/>
@@ -4564,7 +4836,7 @@
                 <a:ea typeface="Aptos" pitchFamily="34" charset="-122"/>
                 <a:cs typeface="Aptos" pitchFamily="34" charset="-120"/>
               </a:rPr>
-              <a:t>Key idea</a:t>
+              <a:t>Core concept</a:t>
             </a:r>
             <a:endParaRPr lang="en-US" sz="1300" dirty="0"/>
           </a:p>
@@ -4572,14 +4844,14 @@
       </p:sp>
       <p:sp>
         <p:nvSpPr>
-          <p:cNvPr id="14" name="Text 12"/>
-          <p:cNvSpPr/>
-          <p:nvPr/>
-        </p:nvSpPr>
-        <p:spPr>
-          <a:xfrm>
-            <a:off x="8074152" y="1920240"/>
-            <a:ext cx="2825496" cy="1188720"/>
+          <p:cNvPr id="12" name="Text 10"/>
+          <p:cNvSpPr/>
+          <p:nvPr/>
+        </p:nvSpPr>
+        <p:spPr>
+          <a:xfrm>
+            <a:off x="7799832" y="1828800"/>
+            <a:ext cx="3145536" cy="685800"/>
           </a:xfrm>
           <a:prstGeom prst="rect">
             <a:avLst/>
@@ -4613,18 +4885,159 @@
       </p:sp>
       <p:sp>
         <p:nvSpPr>
-          <p:cNvPr id="15" name="Shape 13"/>
-          <p:cNvSpPr/>
-          <p:nvPr/>
-        </p:nvSpPr>
-        <p:spPr>
-          <a:xfrm>
-            <a:off x="7909560" y="3520440"/>
-            <a:ext cx="3154680" cy="1737360"/>
+          <p:cNvPr id="13" name="Shape 11"/>
+          <p:cNvSpPr/>
+          <p:nvPr/>
+        </p:nvSpPr>
+        <p:spPr>
+          <a:xfrm>
+            <a:off x="7635240" y="2788920"/>
+            <a:ext cx="3474720" cy="1536192"/>
           </a:xfrm>
           <a:prstGeom prst="roundRect">
             <a:avLst>
-              <a:gd name="adj" fmla="val 6316"/>
+              <a:gd name="adj" fmla="val 7143"/>
+            </a:avLst>
+          </a:prstGeom>
+          <a:solidFill>
+            <a:srgbClr val="FFFFFF">
+              <a:alpha val="88000"/>
+            </a:srgbClr>
+          </a:solidFill>
+          <a:ln w="12700">
+            <a:solidFill>
+              <a:srgbClr val="D6E8F2"/>
+            </a:solidFill>
+            <a:prstDash val="solid"/>
+          </a:ln>
+        </p:spPr>
+      </p:sp>
+      <p:sp>
+        <p:nvSpPr>
+          <p:cNvPr id="14" name="Shape 12"/>
+          <p:cNvSpPr/>
+          <p:nvPr/>
+        </p:nvSpPr>
+        <p:spPr>
+          <a:xfrm>
+            <a:off x="8074152" y="3291840"/>
+            <a:ext cx="2596896" cy="749808"/>
+          </a:xfrm>
+          <a:prstGeom prst="rect">
+            <a:avLst/>
+          </a:prstGeom>
+          <a:solidFill>
+            <a:srgbClr val="EAF6F8"/>
+          </a:solidFill>
+          <a:ln w="12700">
+            <a:solidFill>
+              <a:srgbClr val="8ABBD8"/>
+            </a:solidFill>
+            <a:prstDash val="solid"/>
+          </a:ln>
+        </p:spPr>
+      </p:sp>
+      <p:sp>
+        <p:nvSpPr>
+          <p:cNvPr id="15" name="Shape 13"/>
+          <p:cNvSpPr/>
+          <p:nvPr/>
+        </p:nvSpPr>
+        <p:spPr>
+          <a:xfrm>
+            <a:off x="8202168" y="3721608"/>
+            <a:ext cx="2340864" cy="0"/>
+          </a:xfrm>
+          <a:prstGeom prst="line">
+            <a:avLst/>
+          </a:prstGeom>
+          <a:noFill/>
+          <a:ln w="19050">
+            <a:solidFill>
+              <a:srgbClr val="0068B7"/>
+            </a:solidFill>
+            <a:prstDash val="solid"/>
+          </a:ln>
+        </p:spPr>
+      </p:sp>
+      <p:sp>
+        <p:nvSpPr>
+          <p:cNvPr id="16" name="Shape 14"/>
+          <p:cNvSpPr/>
+          <p:nvPr/>
+        </p:nvSpPr>
+        <p:spPr>
+          <a:xfrm>
+            <a:off x="9198864" y="4206240"/>
+            <a:ext cx="347472" cy="347472"/>
+          </a:xfrm>
+          <a:prstGeom prst="ellipse">
+            <a:avLst/>
+          </a:prstGeom>
+          <a:solidFill>
+            <a:srgbClr val="2F8A28"/>
+          </a:solidFill>
+          <a:ln w="12700">
+            <a:solidFill>
+              <a:srgbClr val="2F8A28"/>
+            </a:solidFill>
+            <a:prstDash val="solid"/>
+          </a:ln>
+        </p:spPr>
+      </p:sp>
+      <p:sp>
+        <p:nvSpPr>
+          <p:cNvPr id="17" name="Text 15"/>
+          <p:cNvSpPr/>
+          <p:nvPr/>
+        </p:nvSpPr>
+        <p:spPr>
+          <a:xfrm>
+            <a:off x="7909560" y="3977640"/>
+            <a:ext cx="2926080" cy="182880"/>
+          </a:xfrm>
+          <a:prstGeom prst="rect">
+            <a:avLst/>
+          </a:prstGeom>
+          <a:noFill/>
+          <a:ln/>
+        </p:spPr>
+        <p:txBody>
+          <a:bodyPr wrap="square" lIns="0" tIns="0" rIns="0" bIns="0" rtlCol="0" anchor="ctr"/>
+          <a:lstStyle/>
+          <a:p>
+            <a:pPr algn="ctr" indent="0" marL="0">
+              <a:buNone/>
+            </a:pPr>
+            <a:r>
+              <a:rPr lang="en-US" sz="1000" dirty="0">
+                <a:solidFill>
+                  <a:srgbClr val="003A63"/>
+                </a:solidFill>
+                <a:latin typeface="Aptos" pitchFamily="34" charset="0"/>
+                <a:ea typeface="Aptos" pitchFamily="34" charset="-122"/>
+                <a:cs typeface="Aptos" pitchFamily="34" charset="-120"/>
+              </a:rPr>
+              <a:t>Concept to action</a:t>
+            </a:r>
+            <a:endParaRPr lang="en-US" sz="1000" dirty="0"/>
+          </a:p>
+        </p:txBody>
+      </p:sp>
+      <p:sp>
+        <p:nvSpPr>
+          <p:cNvPr id="18" name="Shape 16"/>
+          <p:cNvSpPr/>
+          <p:nvPr/>
+        </p:nvSpPr>
+        <p:spPr>
+          <a:xfrm>
+            <a:off x="7635240" y="4498848"/>
+            <a:ext cx="3474720" cy="1143000"/>
+          </a:xfrm>
+          <a:prstGeom prst="roundRect">
+            <a:avLst>
+              <a:gd name="adj" fmla="val 9600"/>
             </a:avLst>
           </a:prstGeom>
           <a:solidFill>
@@ -4640,14 +5053,14 @@
       </p:sp>
       <p:sp>
         <p:nvSpPr>
-          <p:cNvPr id="16" name="Text 14"/>
-          <p:cNvSpPr/>
-          <p:nvPr/>
-        </p:nvSpPr>
-        <p:spPr>
-          <a:xfrm>
-            <a:off x="8074152" y="3666744"/>
-            <a:ext cx="2825496" cy="256032"/>
+          <p:cNvPr id="19" name="Text 17"/>
+          <p:cNvSpPr/>
+          <p:nvPr/>
+        </p:nvSpPr>
+        <p:spPr>
+          <a:xfrm>
+            <a:off x="7799832" y="4645152"/>
+            <a:ext cx="3145536" cy="256032"/>
           </a:xfrm>
           <a:prstGeom prst="rect">
             <a:avLst/>
@@ -4671,7 +5084,7 @@
                 <a:ea typeface="Aptos" pitchFamily="34" charset="-122"/>
                 <a:cs typeface="Aptos" pitchFamily="34" charset="-120"/>
               </a:rPr>
-              <a:t>Use this for</a:t>
+              <a:t>Apply it</a:t>
             </a:r>
             <a:endParaRPr lang="en-US" sz="1300" dirty="0"/>
           </a:p>
@@ -4679,14 +5092,14 @@
       </p:sp>
       <p:sp>
         <p:nvSpPr>
-          <p:cNvPr id="17" name="Text 15"/>
-          <p:cNvSpPr/>
-          <p:nvPr/>
-        </p:nvSpPr>
-        <p:spPr>
-          <a:xfrm>
-            <a:off x="8074152" y="4023360"/>
-            <a:ext cx="2825496" cy="1097280"/>
+          <p:cNvPr id="20" name="Text 18"/>
+          <p:cNvSpPr/>
+          <p:nvPr/>
+        </p:nvSpPr>
+        <p:spPr>
+          <a:xfrm>
+            <a:off x="7799832" y="5001768"/>
+            <a:ext cx="3145536" cy="502920"/>
           </a:xfrm>
           <a:prstGeom prst="rect">
             <a:avLst/>
@@ -4712,7 +5125,7 @@
                 <a:ea typeface="Aptos" pitchFamily="34" charset="-122"/>
                 <a:cs typeface="Aptos" pitchFamily="34" charset="-120"/>
               </a:rPr>
-              <a:t>Connect the concept to public health decisions, safeguards, documentation, or implementation work.</a:t>
+              <a:t>Connect the concept to public health purpose, responsible use, required safeguards, documentation, and the next action a department should take.</a:t>
             </a:r>
             <a:endParaRPr lang="en-US" sz="1550" dirty="0"/>
           </a:p>
@@ -4886,8 +5299,8 @@
         </p:nvSpPr>
         <p:spPr>
           <a:xfrm>
-            <a:off x="9966960" y="6537960"/>
-            <a:ext cx="1645920" cy="201168"/>
+            <a:off x="9646920" y="6537960"/>
+            <a:ext cx="1965960" cy="201168"/>
           </a:xfrm>
           <a:prstGeom prst="rect">
             <a:avLst/>
@@ -4911,7 +5324,7 @@
                 <a:ea typeface="Aptos" pitchFamily="34" charset="-122"/>
                 <a:cs typeface="Aptos" pitchFamily="34" charset="-120"/>
               </a:rPr>
-              <a:t>Â© Paula Soper</a:t>
+              <a:t>Copyright Paula Soper</a:t>
             </a:r>
             <a:endParaRPr lang="en-US" sz="800" dirty="0"/>
           </a:p>
@@ -5006,7 +5419,7 @@
         <p:spPr>
           <a:xfrm>
             <a:off x="868680" y="1508760"/>
-            <a:ext cx="6537960" cy="4160520"/>
+            <a:ext cx="6309360" cy="4160520"/>
           </a:xfrm>
           <a:prstGeom prst="rect">
             <a:avLst/>
@@ -5057,12 +5470,12 @@
         </p:nvSpPr>
         <p:spPr>
           <a:xfrm>
-            <a:off x="7909560" y="1417320"/>
-            <a:ext cx="3154680" cy="1828800"/>
+            <a:off x="7635240" y="1325880"/>
+            <a:ext cx="3474720" cy="1325880"/>
           </a:xfrm>
           <a:prstGeom prst="roundRect">
             <a:avLst>
-              <a:gd name="adj" fmla="val 6000"/>
+              <a:gd name="adj" fmla="val 8276"/>
             </a:avLst>
           </a:prstGeom>
           <a:solidFill>
@@ -5084,8 +5497,8 @@
         </p:nvSpPr>
         <p:spPr>
           <a:xfrm>
-            <a:off x="8074152" y="1563624"/>
-            <a:ext cx="2825496" cy="256032"/>
+            <a:off x="7799832" y="1472184"/>
+            <a:ext cx="3145536" cy="256032"/>
           </a:xfrm>
           <a:prstGeom prst="rect">
             <a:avLst/>
@@ -5109,7 +5522,7 @@
                 <a:ea typeface="Aptos" pitchFamily="34" charset="-122"/>
                 <a:cs typeface="Aptos" pitchFamily="34" charset="-120"/>
               </a:rPr>
-              <a:t>Key idea</a:t>
+              <a:t>Core concept</a:t>
             </a:r>
             <a:endParaRPr lang="en-US" sz="1300" dirty="0"/>
           </a:p>
@@ -5123,8 +5536,8 @@
         </p:nvSpPr>
         <p:spPr>
           <a:xfrm>
-            <a:off x="8074152" y="1920240"/>
-            <a:ext cx="2825496" cy="1188720"/>
+            <a:off x="7799832" y="1828800"/>
+            <a:ext cx="3145536" cy="685800"/>
           </a:xfrm>
           <a:prstGeom prst="rect">
             <a:avLst/>
@@ -5164,12 +5577,153 @@
         </p:nvSpPr>
         <p:spPr>
           <a:xfrm>
-            <a:off x="7909560" y="3520440"/>
-            <a:ext cx="3154680" cy="1737360"/>
+            <a:off x="7635240" y="2788920"/>
+            <a:ext cx="3474720" cy="1536192"/>
           </a:xfrm>
           <a:prstGeom prst="roundRect">
             <a:avLst>
-              <a:gd name="adj" fmla="val 6316"/>
+              <a:gd name="adj" fmla="val 7143"/>
+            </a:avLst>
+          </a:prstGeom>
+          <a:solidFill>
+            <a:srgbClr val="FFFFFF">
+              <a:alpha val="88000"/>
+            </a:srgbClr>
+          </a:solidFill>
+          <a:ln w="12700">
+            <a:solidFill>
+              <a:srgbClr val="D6E8F2"/>
+            </a:solidFill>
+            <a:prstDash val="solid"/>
+          </a:ln>
+        </p:spPr>
+      </p:sp>
+      <p:sp>
+        <p:nvSpPr>
+          <p:cNvPr id="14" name="Shape 12"/>
+          <p:cNvSpPr/>
+          <p:nvPr/>
+        </p:nvSpPr>
+        <p:spPr>
+          <a:xfrm>
+            <a:off x="8074152" y="3291840"/>
+            <a:ext cx="2596896" cy="749808"/>
+          </a:xfrm>
+          <a:prstGeom prst="rect">
+            <a:avLst/>
+          </a:prstGeom>
+          <a:solidFill>
+            <a:srgbClr val="EAF6F8"/>
+          </a:solidFill>
+          <a:ln w="12700">
+            <a:solidFill>
+              <a:srgbClr val="8ABBD8"/>
+            </a:solidFill>
+            <a:prstDash val="solid"/>
+          </a:ln>
+        </p:spPr>
+      </p:sp>
+      <p:sp>
+        <p:nvSpPr>
+          <p:cNvPr id="15" name="Shape 13"/>
+          <p:cNvSpPr/>
+          <p:nvPr/>
+        </p:nvSpPr>
+        <p:spPr>
+          <a:xfrm>
+            <a:off x="8202168" y="3721608"/>
+            <a:ext cx="2340864" cy="0"/>
+          </a:xfrm>
+          <a:prstGeom prst="line">
+            <a:avLst/>
+          </a:prstGeom>
+          <a:noFill/>
+          <a:ln w="19050">
+            <a:solidFill>
+              <a:srgbClr val="0068B7"/>
+            </a:solidFill>
+            <a:prstDash val="solid"/>
+          </a:ln>
+        </p:spPr>
+      </p:sp>
+      <p:sp>
+        <p:nvSpPr>
+          <p:cNvPr id="16" name="Shape 14"/>
+          <p:cNvSpPr/>
+          <p:nvPr/>
+        </p:nvSpPr>
+        <p:spPr>
+          <a:xfrm>
+            <a:off x="9198864" y="4206240"/>
+            <a:ext cx="347472" cy="347472"/>
+          </a:xfrm>
+          <a:prstGeom prst="ellipse">
+            <a:avLst/>
+          </a:prstGeom>
+          <a:solidFill>
+            <a:srgbClr val="2F8A28"/>
+          </a:solidFill>
+          <a:ln w="12700">
+            <a:solidFill>
+              <a:srgbClr val="2F8A28"/>
+            </a:solidFill>
+            <a:prstDash val="solid"/>
+          </a:ln>
+        </p:spPr>
+      </p:sp>
+      <p:sp>
+        <p:nvSpPr>
+          <p:cNvPr id="17" name="Text 15"/>
+          <p:cNvSpPr/>
+          <p:nvPr/>
+        </p:nvSpPr>
+        <p:spPr>
+          <a:xfrm>
+            <a:off x="7909560" y="3977640"/>
+            <a:ext cx="2926080" cy="182880"/>
+          </a:xfrm>
+          <a:prstGeom prst="rect">
+            <a:avLst/>
+          </a:prstGeom>
+          <a:noFill/>
+          <a:ln/>
+        </p:spPr>
+        <p:txBody>
+          <a:bodyPr wrap="square" lIns="0" tIns="0" rIns="0" bIns="0" rtlCol="0" anchor="ctr"/>
+          <a:lstStyle/>
+          <a:p>
+            <a:pPr algn="ctr" indent="0" marL="0">
+              <a:buNone/>
+            </a:pPr>
+            <a:r>
+              <a:rPr lang="en-US" sz="1000" dirty="0">
+                <a:solidFill>
+                  <a:srgbClr val="003A63"/>
+                </a:solidFill>
+                <a:latin typeface="Aptos" pitchFamily="34" charset="0"/>
+                <a:ea typeface="Aptos" pitchFamily="34" charset="-122"/>
+                <a:cs typeface="Aptos" pitchFamily="34" charset="-120"/>
+              </a:rPr>
+              <a:t>Concept to action</a:t>
+            </a:r>
+            <a:endParaRPr lang="en-US" sz="1000" dirty="0"/>
+          </a:p>
+        </p:txBody>
+      </p:sp>
+      <p:sp>
+        <p:nvSpPr>
+          <p:cNvPr id="18" name="Shape 16"/>
+          <p:cNvSpPr/>
+          <p:nvPr/>
+        </p:nvSpPr>
+        <p:spPr>
+          <a:xfrm>
+            <a:off x="7635240" y="4498848"/>
+            <a:ext cx="3474720" cy="1143000"/>
+          </a:xfrm>
+          <a:prstGeom prst="roundRect">
+            <a:avLst>
+              <a:gd name="adj" fmla="val 9600"/>
             </a:avLst>
           </a:prstGeom>
           <a:solidFill>
@@ -5185,14 +5739,14 @@
       </p:sp>
       <p:sp>
         <p:nvSpPr>
-          <p:cNvPr id="14" name="Text 12"/>
-          <p:cNvSpPr/>
-          <p:nvPr/>
-        </p:nvSpPr>
-        <p:spPr>
-          <a:xfrm>
-            <a:off x="8074152" y="3666744"/>
-            <a:ext cx="2825496" cy="256032"/>
+          <p:cNvPr id="19" name="Text 17"/>
+          <p:cNvSpPr/>
+          <p:nvPr/>
+        </p:nvSpPr>
+        <p:spPr>
+          <a:xfrm>
+            <a:off x="7799832" y="4645152"/>
+            <a:ext cx="3145536" cy="256032"/>
           </a:xfrm>
           <a:prstGeom prst="rect">
             <a:avLst/>
@@ -5216,7 +5770,7 @@
                 <a:ea typeface="Aptos" pitchFamily="34" charset="-122"/>
                 <a:cs typeface="Aptos" pitchFamily="34" charset="-120"/>
               </a:rPr>
-              <a:t>Use this for</a:t>
+              <a:t>Apply it</a:t>
             </a:r>
             <a:endParaRPr lang="en-US" sz="1300" dirty="0"/>
           </a:p>
@@ -5224,14 +5778,14 @@
       </p:sp>
       <p:sp>
         <p:nvSpPr>
-          <p:cNvPr id="15" name="Text 13"/>
-          <p:cNvSpPr/>
-          <p:nvPr/>
-        </p:nvSpPr>
-        <p:spPr>
-          <a:xfrm>
-            <a:off x="8074152" y="4023360"/>
-            <a:ext cx="2825496" cy="1097280"/>
+          <p:cNvPr id="20" name="Text 18"/>
+          <p:cNvSpPr/>
+          <p:nvPr/>
+        </p:nvSpPr>
+        <p:spPr>
+          <a:xfrm>
+            <a:off x="7799832" y="5001768"/>
+            <a:ext cx="3145536" cy="502920"/>
           </a:xfrm>
           <a:prstGeom prst="rect">
             <a:avLst/>
@@ -5257,7 +5811,7 @@
                 <a:ea typeface="Aptos" pitchFamily="34" charset="-122"/>
                 <a:cs typeface="Aptos" pitchFamily="34" charset="-120"/>
               </a:rPr>
-              <a:t>Connect the concept to public health decisions, safeguards, documentation, or implementation work.</a:t>
+              <a:t>Connect the concept to public health purpose, responsible use, required safeguards, documentation, and the next action a department should take.</a:t>
             </a:r>
             <a:endParaRPr lang="en-US" sz="1550" dirty="0"/>
           </a:p>
@@ -5431,8 +5985,8 @@
         </p:nvSpPr>
         <p:spPr>
           <a:xfrm>
-            <a:off x="9966960" y="6537960"/>
-            <a:ext cx="1645920" cy="201168"/>
+            <a:off x="9646920" y="6537960"/>
+            <a:ext cx="1965960" cy="201168"/>
           </a:xfrm>
           <a:prstGeom prst="rect">
             <a:avLst/>
@@ -5456,7 +6010,7 @@
                 <a:ea typeface="Aptos" pitchFamily="34" charset="-122"/>
                 <a:cs typeface="Aptos" pitchFamily="34" charset="-120"/>
               </a:rPr>
-              <a:t>Â© Paula Soper</a:t>
+              <a:t>Copyright Paula Soper</a:t>
             </a:r>
             <a:endParaRPr lang="en-US" sz="800" dirty="0"/>
           </a:p>
@@ -5503,77 +6057,13 @@
       </p:sp>
       <p:sp>
         <p:nvSpPr>
-          <p:cNvPr id="8" name="Shape 6"/>
+          <p:cNvPr id="8" name="Text 6"/>
           <p:cNvSpPr/>
           <p:nvPr/>
         </p:nvSpPr>
         <p:spPr>
           <a:xfrm>
             <a:off x="640080" y="658368"/>
-            <a:ext cx="420624" cy="420624"/>
-          </a:xfrm>
-          <a:prstGeom prst="ellipse">
-            <a:avLst/>
-          </a:prstGeom>
-          <a:solidFill>
-            <a:srgbClr val="0068B7"/>
-          </a:solidFill>
-          <a:ln w="12700">
-            <a:solidFill>
-              <a:srgbClr val="0068B7"/>
-            </a:solidFill>
-            <a:prstDash val="solid"/>
-          </a:ln>
-        </p:spPr>
-      </p:sp>
-      <p:sp>
-        <p:nvSpPr>
-          <p:cNvPr id="9" name="Text 7"/>
-          <p:cNvSpPr/>
-          <p:nvPr/>
-        </p:nvSpPr>
-        <p:spPr>
-          <a:xfrm>
-            <a:off x="640080" y="731520"/>
-            <a:ext cx="420624" cy="164592"/>
-          </a:xfrm>
-          <a:prstGeom prst="rect">
-            <a:avLst/>
-          </a:prstGeom>
-          <a:noFill/>
-          <a:ln/>
-        </p:spPr>
-        <p:txBody>
-          <a:bodyPr wrap="square" lIns="0" tIns="0" rIns="0" bIns="0" rtlCol="0" anchor="ctr"/>
-          <a:lstStyle/>
-          <a:p>
-            <a:pPr algn="ctr" indent="0" marL="0">
-              <a:buNone/>
-            </a:pPr>
-            <a:r>
-              <a:rPr lang="en-US" sz="1100" b="1" dirty="0">
-                <a:solidFill>
-                  <a:srgbClr val="FFFFFF"/>
-                </a:solidFill>
-                <a:latin typeface="Aptos" pitchFamily="34" charset="0"/>
-                <a:ea typeface="Aptos" pitchFamily="34" charset="-122"/>
-                <a:cs typeface="Aptos" pitchFamily="34" charset="-120"/>
-              </a:rPr>
-              <a:t>9</a:t>
-            </a:r>
-            <a:endParaRPr lang="en-US" sz="1100" dirty="0"/>
-          </a:p>
-        </p:txBody>
-      </p:sp>
-      <p:sp>
-        <p:nvSpPr>
-          <p:cNvPr id="10" name="Text 8"/>
-          <p:cNvSpPr/>
-          <p:nvPr/>
-        </p:nvSpPr>
-        <p:spPr>
-          <a:xfrm>
-            <a:off x="640080" y="621792"/>
             <a:ext cx="10881360" cy="713232"/>
           </a:xfrm>
           <a:prstGeom prst="rect">
@@ -5608,14 +6098,14 @@
       </p:sp>
       <p:sp>
         <p:nvSpPr>
-          <p:cNvPr id="11" name="Text 9"/>
+          <p:cNvPr id="9" name="Text 7"/>
           <p:cNvSpPr/>
           <p:nvPr/>
         </p:nvSpPr>
         <p:spPr>
           <a:xfrm>
             <a:off x="868680" y="1508760"/>
-            <a:ext cx="6537960" cy="4160520"/>
+            <a:ext cx="6309360" cy="4160520"/>
           </a:xfrm>
           <a:prstGeom prst="rect">
             <a:avLst/>
@@ -5660,18 +6150,18 @@
       </p:sp>
       <p:sp>
         <p:nvSpPr>
-          <p:cNvPr id="12" name="Shape 10"/>
-          <p:cNvSpPr/>
-          <p:nvPr/>
-        </p:nvSpPr>
-        <p:spPr>
-          <a:xfrm>
-            <a:off x="7909560" y="1417320"/>
-            <a:ext cx="3154680" cy="1828800"/>
+          <p:cNvPr id="10" name="Shape 8"/>
+          <p:cNvSpPr/>
+          <p:nvPr/>
+        </p:nvSpPr>
+        <p:spPr>
+          <a:xfrm>
+            <a:off x="7635240" y="1325880"/>
+            <a:ext cx="3474720" cy="1325880"/>
           </a:xfrm>
           <a:prstGeom prst="roundRect">
             <a:avLst>
-              <a:gd name="adj" fmla="val 6000"/>
+              <a:gd name="adj" fmla="val 8276"/>
             </a:avLst>
           </a:prstGeom>
           <a:solidFill>
@@ -5687,14 +6177,14 @@
       </p:sp>
       <p:sp>
         <p:nvSpPr>
-          <p:cNvPr id="13" name="Text 11"/>
-          <p:cNvSpPr/>
-          <p:nvPr/>
-        </p:nvSpPr>
-        <p:spPr>
-          <a:xfrm>
-            <a:off x="8074152" y="1563624"/>
-            <a:ext cx="2825496" cy="256032"/>
+          <p:cNvPr id="11" name="Text 9"/>
+          <p:cNvSpPr/>
+          <p:nvPr/>
+        </p:nvSpPr>
+        <p:spPr>
+          <a:xfrm>
+            <a:off x="7799832" y="1472184"/>
+            <a:ext cx="3145536" cy="256032"/>
           </a:xfrm>
           <a:prstGeom prst="rect">
             <a:avLst/>
@@ -5718,7 +6208,7 @@
                 <a:ea typeface="Aptos" pitchFamily="34" charset="-122"/>
                 <a:cs typeface="Aptos" pitchFamily="34" charset="-120"/>
               </a:rPr>
-              <a:t>Key idea</a:t>
+              <a:t>Practice focus</a:t>
             </a:r>
             <a:endParaRPr lang="en-US" sz="1300" dirty="0"/>
           </a:p>
@@ -5726,14 +6216,14 @@
       </p:sp>
       <p:sp>
         <p:nvSpPr>
-          <p:cNvPr id="14" name="Text 12"/>
-          <p:cNvSpPr/>
-          <p:nvPr/>
-        </p:nvSpPr>
-        <p:spPr>
-          <a:xfrm>
-            <a:off x="8074152" y="1920240"/>
-            <a:ext cx="2825496" cy="1188720"/>
+          <p:cNvPr id="12" name="Text 10"/>
+          <p:cNvSpPr/>
+          <p:nvPr/>
+        </p:nvSpPr>
+        <p:spPr>
+          <a:xfrm>
+            <a:off x="7799832" y="1828800"/>
+            <a:ext cx="3145536" cy="685800"/>
           </a:xfrm>
           <a:prstGeom prst="rect">
             <a:avLst/>
@@ -5767,18 +6257,159 @@
       </p:sp>
       <p:sp>
         <p:nvSpPr>
-          <p:cNvPr id="15" name="Shape 13"/>
-          <p:cNvSpPr/>
-          <p:nvPr/>
-        </p:nvSpPr>
-        <p:spPr>
-          <a:xfrm>
-            <a:off x="7909560" y="3520440"/>
-            <a:ext cx="3154680" cy="1737360"/>
+          <p:cNvPr id="13" name="Shape 11"/>
+          <p:cNvSpPr/>
+          <p:nvPr/>
+        </p:nvSpPr>
+        <p:spPr>
+          <a:xfrm>
+            <a:off x="7635240" y="2788920"/>
+            <a:ext cx="3474720" cy="1536192"/>
           </a:xfrm>
           <a:prstGeom prst="roundRect">
             <a:avLst>
-              <a:gd name="adj" fmla="val 6316"/>
+              <a:gd name="adj" fmla="val 7143"/>
+            </a:avLst>
+          </a:prstGeom>
+          <a:solidFill>
+            <a:srgbClr val="FFFFFF">
+              <a:alpha val="88000"/>
+            </a:srgbClr>
+          </a:solidFill>
+          <a:ln w="12700">
+            <a:solidFill>
+              <a:srgbClr val="D6E8F2"/>
+            </a:solidFill>
+            <a:prstDash val="solid"/>
+          </a:ln>
+        </p:spPr>
+      </p:sp>
+      <p:sp>
+        <p:nvSpPr>
+          <p:cNvPr id="14" name="Shape 12"/>
+          <p:cNvSpPr/>
+          <p:nvPr/>
+        </p:nvSpPr>
+        <p:spPr>
+          <a:xfrm>
+            <a:off x="8074152" y="3291840"/>
+            <a:ext cx="2596896" cy="749808"/>
+          </a:xfrm>
+          <a:prstGeom prst="rect">
+            <a:avLst/>
+          </a:prstGeom>
+          <a:solidFill>
+            <a:srgbClr val="EAF6F8"/>
+          </a:solidFill>
+          <a:ln w="12700">
+            <a:solidFill>
+              <a:srgbClr val="8ABBD8"/>
+            </a:solidFill>
+            <a:prstDash val="solid"/>
+          </a:ln>
+        </p:spPr>
+      </p:sp>
+      <p:sp>
+        <p:nvSpPr>
+          <p:cNvPr id="15" name="Shape 13"/>
+          <p:cNvSpPr/>
+          <p:nvPr/>
+        </p:nvSpPr>
+        <p:spPr>
+          <a:xfrm>
+            <a:off x="8202168" y="3721608"/>
+            <a:ext cx="2340864" cy="0"/>
+          </a:xfrm>
+          <a:prstGeom prst="line">
+            <a:avLst/>
+          </a:prstGeom>
+          <a:noFill/>
+          <a:ln w="19050">
+            <a:solidFill>
+              <a:srgbClr val="0068B7"/>
+            </a:solidFill>
+            <a:prstDash val="solid"/>
+          </a:ln>
+        </p:spPr>
+      </p:sp>
+      <p:sp>
+        <p:nvSpPr>
+          <p:cNvPr id="16" name="Shape 14"/>
+          <p:cNvSpPr/>
+          <p:nvPr/>
+        </p:nvSpPr>
+        <p:spPr>
+          <a:xfrm>
+            <a:off x="9198864" y="4206240"/>
+            <a:ext cx="347472" cy="347472"/>
+          </a:xfrm>
+          <a:prstGeom prst="ellipse">
+            <a:avLst/>
+          </a:prstGeom>
+          <a:solidFill>
+            <a:srgbClr val="2F8A28"/>
+          </a:solidFill>
+          <a:ln w="12700">
+            <a:solidFill>
+              <a:srgbClr val="2F8A28"/>
+            </a:solidFill>
+            <a:prstDash val="solid"/>
+          </a:ln>
+        </p:spPr>
+      </p:sp>
+      <p:sp>
+        <p:nvSpPr>
+          <p:cNvPr id="17" name="Text 15"/>
+          <p:cNvSpPr/>
+          <p:nvPr/>
+        </p:nvSpPr>
+        <p:spPr>
+          <a:xfrm>
+            <a:off x="7909560" y="3977640"/>
+            <a:ext cx="2926080" cy="182880"/>
+          </a:xfrm>
+          <a:prstGeom prst="rect">
+            <a:avLst/>
+          </a:prstGeom>
+          <a:noFill/>
+          <a:ln/>
+        </p:spPr>
+        <p:txBody>
+          <a:bodyPr wrap="square" lIns="0" tIns="0" rIns="0" bIns="0" rtlCol="0" anchor="ctr"/>
+          <a:lstStyle/>
+          <a:p>
+            <a:pPr algn="ctr" indent="0" marL="0">
+              <a:buNone/>
+            </a:pPr>
+            <a:r>
+              <a:rPr lang="en-US" sz="1000" dirty="0">
+                <a:solidFill>
+                  <a:srgbClr val="003A63"/>
+                </a:solidFill>
+                <a:latin typeface="Aptos" pitchFamily="34" charset="0"/>
+                <a:ea typeface="Aptos" pitchFamily="34" charset="-122"/>
+                <a:cs typeface="Aptos" pitchFamily="34" charset="-120"/>
+              </a:rPr>
+              <a:t>Concept to action</a:t>
+            </a:r>
+            <a:endParaRPr lang="en-US" sz="1000" dirty="0"/>
+          </a:p>
+        </p:txBody>
+      </p:sp>
+      <p:sp>
+        <p:nvSpPr>
+          <p:cNvPr id="18" name="Shape 16"/>
+          <p:cNvSpPr/>
+          <p:nvPr/>
+        </p:nvSpPr>
+        <p:spPr>
+          <a:xfrm>
+            <a:off x="7635240" y="4498848"/>
+            <a:ext cx="3474720" cy="1143000"/>
+          </a:xfrm>
+          <a:prstGeom prst="roundRect">
+            <a:avLst>
+              <a:gd name="adj" fmla="val 9600"/>
             </a:avLst>
           </a:prstGeom>
           <a:solidFill>
@@ -5794,14 +6425,14 @@
       </p:sp>
       <p:sp>
         <p:nvSpPr>
-          <p:cNvPr id="16" name="Text 14"/>
-          <p:cNvSpPr/>
-          <p:nvPr/>
-        </p:nvSpPr>
-        <p:spPr>
-          <a:xfrm>
-            <a:off x="8074152" y="3666744"/>
-            <a:ext cx="2825496" cy="256032"/>
+          <p:cNvPr id="19" name="Text 17"/>
+          <p:cNvSpPr/>
+          <p:nvPr/>
+        </p:nvSpPr>
+        <p:spPr>
+          <a:xfrm>
+            <a:off x="7799832" y="4645152"/>
+            <a:ext cx="3145536" cy="256032"/>
           </a:xfrm>
           <a:prstGeom prst="rect">
             <a:avLst/>
@@ -5825,7 +6456,7 @@
                 <a:ea typeface="Aptos" pitchFamily="34" charset="-122"/>
                 <a:cs typeface="Aptos" pitchFamily="34" charset="-120"/>
               </a:rPr>
-              <a:t>Use this for</a:t>
+              <a:t>What to produce</a:t>
             </a:r>
             <a:endParaRPr lang="en-US" sz="1300" dirty="0"/>
           </a:p>
@@ -5833,14 +6464,14 @@
       </p:sp>
       <p:sp>
         <p:nvSpPr>
-          <p:cNvPr id="17" name="Text 15"/>
-          <p:cNvSpPr/>
-          <p:nvPr/>
-        </p:nvSpPr>
-        <p:spPr>
-          <a:xfrm>
-            <a:off x="8074152" y="4023360"/>
-            <a:ext cx="2825496" cy="1097280"/>
+          <p:cNvPr id="20" name="Text 18"/>
+          <p:cNvSpPr/>
+          <p:nvPr/>
+        </p:nvSpPr>
+        <p:spPr>
+          <a:xfrm>
+            <a:off x="7799832" y="5001768"/>
+            <a:ext cx="3145536" cy="502920"/>
           </a:xfrm>
           <a:prstGeom prst="rect">
             <a:avLst/>
@@ -5866,7 +6497,7 @@
                 <a:ea typeface="Aptos" pitchFamily="34" charset="-122"/>
                 <a:cs typeface="Aptos" pitchFamily="34" charset="-120"/>
               </a:rPr>
-              <a:t>Connect the concept to public health decisions, safeguards, documentation, or implementation work.</a:t>
+              <a:t>Use the assignment to test whether you can explain the concept, apply it to a realistic public health situation, and identify what would need review before the work moves forward.</a:t>
             </a:r>
             <a:endParaRPr lang="en-US" sz="1550" dirty="0"/>
           </a:p>
@@ -6040,8 +6671,8 @@
         </p:nvSpPr>
         <p:spPr>
           <a:xfrm>
-            <a:off x="9966960" y="6537960"/>
-            <a:ext cx="1645920" cy="201168"/>
+            <a:off x="9646920" y="6537960"/>
+            <a:ext cx="1965960" cy="201168"/>
           </a:xfrm>
           <a:prstGeom prst="rect">
             <a:avLst/>
@@ -6065,7 +6696,7 @@
                 <a:ea typeface="Aptos" pitchFamily="34" charset="-122"/>
                 <a:cs typeface="Aptos" pitchFamily="34" charset="-120"/>
               </a:rPr>
-              <a:t>Â© Paula Soper</a:t>
+              <a:t>Copyright Paula Soper</a:t>
             </a:r>
             <a:endParaRPr lang="en-US" sz="800" dirty="0"/>
           </a:p>
@@ -6112,77 +6743,13 @@
       </p:sp>
       <p:sp>
         <p:nvSpPr>
-          <p:cNvPr id="8" name="Shape 6"/>
+          <p:cNvPr id="8" name="Text 6"/>
           <p:cNvSpPr/>
           <p:nvPr/>
         </p:nvSpPr>
         <p:spPr>
           <a:xfrm>
             <a:off x="640080" y="658368"/>
-            <a:ext cx="420624" cy="420624"/>
-          </a:xfrm>
-          <a:prstGeom prst="ellipse">
-            <a:avLst/>
-          </a:prstGeom>
-          <a:solidFill>
-            <a:srgbClr val="0068B7"/>
-          </a:solidFill>
-          <a:ln w="12700">
-            <a:solidFill>
-              <a:srgbClr val="0068B7"/>
-            </a:solidFill>
-            <a:prstDash val="solid"/>
-          </a:ln>
-        </p:spPr>
-      </p:sp>
-      <p:sp>
-        <p:nvSpPr>
-          <p:cNvPr id="9" name="Text 7"/>
-          <p:cNvSpPr/>
-          <p:nvPr/>
-        </p:nvSpPr>
-        <p:spPr>
-          <a:xfrm>
-            <a:off x="640080" y="731520"/>
-            <a:ext cx="420624" cy="164592"/>
-          </a:xfrm>
-          <a:prstGeom prst="rect">
-            <a:avLst/>
-          </a:prstGeom>
-          <a:noFill/>
-          <a:ln/>
-        </p:spPr>
-        <p:txBody>
-          <a:bodyPr wrap="square" lIns="0" tIns="0" rIns="0" bIns="0" rtlCol="0" anchor="ctr"/>
-          <a:lstStyle/>
-          <a:p>
-            <a:pPr algn="ctr" indent="0" marL="0">
-              <a:buNone/>
-            </a:pPr>
-            <a:r>
-              <a:rPr lang="en-US" sz="1100" b="1" dirty="0">
-                <a:solidFill>
-                  <a:srgbClr val="FFFFFF"/>
-                </a:solidFill>
-                <a:latin typeface="Aptos" pitchFamily="34" charset="0"/>
-                <a:ea typeface="Aptos" pitchFamily="34" charset="-122"/>
-                <a:cs typeface="Aptos" pitchFamily="34" charset="-120"/>
-              </a:rPr>
-              <a:t>10</a:t>
-            </a:r>
-            <a:endParaRPr lang="en-US" sz="1100" dirty="0"/>
-          </a:p>
-        </p:txBody>
-      </p:sp>
-      <p:sp>
-        <p:nvSpPr>
-          <p:cNvPr id="10" name="Text 8"/>
-          <p:cNvSpPr/>
-          <p:nvPr/>
-        </p:nvSpPr>
-        <p:spPr>
-          <a:xfrm>
-            <a:off x="640080" y="621792"/>
             <a:ext cx="10881360" cy="713232"/>
           </a:xfrm>
           <a:prstGeom prst="rect">
@@ -6217,14 +6784,14 @@
       </p:sp>
       <p:sp>
         <p:nvSpPr>
-          <p:cNvPr id="11" name="Text 9"/>
+          <p:cNvPr id="9" name="Text 7"/>
           <p:cNvSpPr/>
           <p:nvPr/>
         </p:nvSpPr>
         <p:spPr>
           <a:xfrm>
             <a:off x="868680" y="1508760"/>
-            <a:ext cx="6537960" cy="4160520"/>
+            <a:ext cx="6309360" cy="4160520"/>
           </a:xfrm>
           <a:prstGeom prst="rect">
             <a:avLst/>
@@ -6283,18 +6850,18 @@
       </p:sp>
       <p:sp>
         <p:nvSpPr>
-          <p:cNvPr id="12" name="Shape 10"/>
-          <p:cNvSpPr/>
-          <p:nvPr/>
-        </p:nvSpPr>
-        <p:spPr>
-          <a:xfrm>
-            <a:off x="7909560" y="1417320"/>
-            <a:ext cx="3154680" cy="1828800"/>
+          <p:cNvPr id="10" name="Shape 8"/>
+          <p:cNvSpPr/>
+          <p:nvPr/>
+        </p:nvSpPr>
+        <p:spPr>
+          <a:xfrm>
+            <a:off x="7635240" y="1325880"/>
+            <a:ext cx="3474720" cy="1325880"/>
           </a:xfrm>
           <a:prstGeom prst="roundRect">
             <a:avLst>
-              <a:gd name="adj" fmla="val 6000"/>
+              <a:gd name="adj" fmla="val 8276"/>
             </a:avLst>
           </a:prstGeom>
           <a:solidFill>
@@ -6310,14 +6877,14 @@
       </p:sp>
       <p:sp>
         <p:nvSpPr>
-          <p:cNvPr id="13" name="Text 11"/>
-          <p:cNvSpPr/>
-          <p:nvPr/>
-        </p:nvSpPr>
-        <p:spPr>
-          <a:xfrm>
-            <a:off x="8074152" y="1563624"/>
-            <a:ext cx="2825496" cy="256032"/>
+          <p:cNvPr id="11" name="Text 9"/>
+          <p:cNvSpPr/>
+          <p:nvPr/>
+        </p:nvSpPr>
+        <p:spPr>
+          <a:xfrm>
+            <a:off x="7799832" y="1472184"/>
+            <a:ext cx="3145536" cy="256032"/>
           </a:xfrm>
           <a:prstGeom prst="rect">
             <a:avLst/>
@@ -6341,7 +6908,7 @@
                 <a:ea typeface="Aptos" pitchFamily="34" charset="-122"/>
                 <a:cs typeface="Aptos" pitchFamily="34" charset="-120"/>
               </a:rPr>
-              <a:t>Key idea</a:t>
+              <a:t>Core concept</a:t>
             </a:r>
             <a:endParaRPr lang="en-US" sz="1300" dirty="0"/>
           </a:p>
@@ -6349,14 +6916,14 @@
       </p:sp>
       <p:sp>
         <p:nvSpPr>
-          <p:cNvPr id="14" name="Text 12"/>
-          <p:cNvSpPr/>
-          <p:nvPr/>
-        </p:nvSpPr>
-        <p:spPr>
-          <a:xfrm>
-            <a:off x="8074152" y="1920240"/>
-            <a:ext cx="2825496" cy="1188720"/>
+          <p:cNvPr id="12" name="Text 10"/>
+          <p:cNvSpPr/>
+          <p:nvPr/>
+        </p:nvSpPr>
+        <p:spPr>
+          <a:xfrm>
+            <a:off x="7799832" y="1828800"/>
+            <a:ext cx="3145536" cy="685800"/>
           </a:xfrm>
           <a:prstGeom prst="rect">
             <a:avLst/>
@@ -6390,18 +6957,159 @@
       </p:sp>
       <p:sp>
         <p:nvSpPr>
-          <p:cNvPr id="15" name="Shape 13"/>
-          <p:cNvSpPr/>
-          <p:nvPr/>
-        </p:nvSpPr>
-        <p:spPr>
-          <a:xfrm>
-            <a:off x="7909560" y="3520440"/>
-            <a:ext cx="3154680" cy="1737360"/>
+          <p:cNvPr id="13" name="Shape 11"/>
+          <p:cNvSpPr/>
+          <p:nvPr/>
+        </p:nvSpPr>
+        <p:spPr>
+          <a:xfrm>
+            <a:off x="7635240" y="2788920"/>
+            <a:ext cx="3474720" cy="1536192"/>
           </a:xfrm>
           <a:prstGeom prst="roundRect">
             <a:avLst>
-              <a:gd name="adj" fmla="val 6316"/>
+              <a:gd name="adj" fmla="val 7143"/>
+            </a:avLst>
+          </a:prstGeom>
+          <a:solidFill>
+            <a:srgbClr val="FFFFFF">
+              <a:alpha val="88000"/>
+            </a:srgbClr>
+          </a:solidFill>
+          <a:ln w="12700">
+            <a:solidFill>
+              <a:srgbClr val="D6E8F2"/>
+            </a:solidFill>
+            <a:prstDash val="solid"/>
+          </a:ln>
+        </p:spPr>
+      </p:sp>
+      <p:sp>
+        <p:nvSpPr>
+          <p:cNvPr id="14" name="Shape 12"/>
+          <p:cNvSpPr/>
+          <p:nvPr/>
+        </p:nvSpPr>
+        <p:spPr>
+          <a:xfrm>
+            <a:off x="8074152" y="3291840"/>
+            <a:ext cx="2596896" cy="749808"/>
+          </a:xfrm>
+          <a:prstGeom prst="rect">
+            <a:avLst/>
+          </a:prstGeom>
+          <a:solidFill>
+            <a:srgbClr val="EAF6F8"/>
+          </a:solidFill>
+          <a:ln w="12700">
+            <a:solidFill>
+              <a:srgbClr val="8ABBD8"/>
+            </a:solidFill>
+            <a:prstDash val="solid"/>
+          </a:ln>
+        </p:spPr>
+      </p:sp>
+      <p:sp>
+        <p:nvSpPr>
+          <p:cNvPr id="15" name="Shape 13"/>
+          <p:cNvSpPr/>
+          <p:nvPr/>
+        </p:nvSpPr>
+        <p:spPr>
+          <a:xfrm>
+            <a:off x="8202168" y="3721608"/>
+            <a:ext cx="2340864" cy="0"/>
+          </a:xfrm>
+          <a:prstGeom prst="line">
+            <a:avLst/>
+          </a:prstGeom>
+          <a:noFill/>
+          <a:ln w="19050">
+            <a:solidFill>
+              <a:srgbClr val="0068B7"/>
+            </a:solidFill>
+            <a:prstDash val="solid"/>
+          </a:ln>
+        </p:spPr>
+      </p:sp>
+      <p:sp>
+        <p:nvSpPr>
+          <p:cNvPr id="16" name="Shape 14"/>
+          <p:cNvSpPr/>
+          <p:nvPr/>
+        </p:nvSpPr>
+        <p:spPr>
+          <a:xfrm>
+            <a:off x="9198864" y="4206240"/>
+            <a:ext cx="347472" cy="347472"/>
+          </a:xfrm>
+          <a:prstGeom prst="ellipse">
+            <a:avLst/>
+          </a:prstGeom>
+          <a:solidFill>
+            <a:srgbClr val="2F8A28"/>
+          </a:solidFill>
+          <a:ln w="12700">
+            <a:solidFill>
+              <a:srgbClr val="2F8A28"/>
+            </a:solidFill>
+            <a:prstDash val="solid"/>
+          </a:ln>
+        </p:spPr>
+      </p:sp>
+      <p:sp>
+        <p:nvSpPr>
+          <p:cNvPr id="17" name="Text 15"/>
+          <p:cNvSpPr/>
+          <p:nvPr/>
+        </p:nvSpPr>
+        <p:spPr>
+          <a:xfrm>
+            <a:off x="7909560" y="3977640"/>
+            <a:ext cx="2926080" cy="182880"/>
+          </a:xfrm>
+          <a:prstGeom prst="rect">
+            <a:avLst/>
+          </a:prstGeom>
+          <a:noFill/>
+          <a:ln/>
+        </p:spPr>
+        <p:txBody>
+          <a:bodyPr wrap="square" lIns="0" tIns="0" rIns="0" bIns="0" rtlCol="0" anchor="ctr"/>
+          <a:lstStyle/>
+          <a:p>
+            <a:pPr algn="ctr" indent="0" marL="0">
+              <a:buNone/>
+            </a:pPr>
+            <a:r>
+              <a:rPr lang="en-US" sz="1000" dirty="0">
+                <a:solidFill>
+                  <a:srgbClr val="003A63"/>
+                </a:solidFill>
+                <a:latin typeface="Aptos" pitchFamily="34" charset="0"/>
+                <a:ea typeface="Aptos" pitchFamily="34" charset="-122"/>
+                <a:cs typeface="Aptos" pitchFamily="34" charset="-120"/>
+              </a:rPr>
+              <a:t>Concept to action</a:t>
+            </a:r>
+            <a:endParaRPr lang="en-US" sz="1000" dirty="0"/>
+          </a:p>
+        </p:txBody>
+      </p:sp>
+      <p:sp>
+        <p:nvSpPr>
+          <p:cNvPr id="18" name="Shape 16"/>
+          <p:cNvSpPr/>
+          <p:nvPr/>
+        </p:nvSpPr>
+        <p:spPr>
+          <a:xfrm>
+            <a:off x="7635240" y="4498848"/>
+            <a:ext cx="3474720" cy="1143000"/>
+          </a:xfrm>
+          <a:prstGeom prst="roundRect">
+            <a:avLst>
+              <a:gd name="adj" fmla="val 9600"/>
             </a:avLst>
           </a:prstGeom>
           <a:solidFill>
@@ -6417,14 +7125,14 @@
       </p:sp>
       <p:sp>
         <p:nvSpPr>
-          <p:cNvPr id="16" name="Text 14"/>
-          <p:cNvSpPr/>
-          <p:nvPr/>
-        </p:nvSpPr>
-        <p:spPr>
-          <a:xfrm>
-            <a:off x="8074152" y="3666744"/>
-            <a:ext cx="2825496" cy="256032"/>
+          <p:cNvPr id="19" name="Text 17"/>
+          <p:cNvSpPr/>
+          <p:nvPr/>
+        </p:nvSpPr>
+        <p:spPr>
+          <a:xfrm>
+            <a:off x="7799832" y="4645152"/>
+            <a:ext cx="3145536" cy="256032"/>
           </a:xfrm>
           <a:prstGeom prst="rect">
             <a:avLst/>
@@ -6448,7 +7156,7 @@
                 <a:ea typeface="Aptos" pitchFamily="34" charset="-122"/>
                 <a:cs typeface="Aptos" pitchFamily="34" charset="-120"/>
               </a:rPr>
-              <a:t>Use this for</a:t>
+              <a:t>Apply it</a:t>
             </a:r>
             <a:endParaRPr lang="en-US" sz="1300" dirty="0"/>
           </a:p>
@@ -6456,14 +7164,14 @@
       </p:sp>
       <p:sp>
         <p:nvSpPr>
-          <p:cNvPr id="17" name="Text 15"/>
-          <p:cNvSpPr/>
-          <p:nvPr/>
-        </p:nvSpPr>
-        <p:spPr>
-          <a:xfrm>
-            <a:off x="8074152" y="4023360"/>
-            <a:ext cx="2825496" cy="1097280"/>
+          <p:cNvPr id="20" name="Text 18"/>
+          <p:cNvSpPr/>
+          <p:nvPr/>
+        </p:nvSpPr>
+        <p:spPr>
+          <a:xfrm>
+            <a:off x="7799832" y="5001768"/>
+            <a:ext cx="3145536" cy="502920"/>
           </a:xfrm>
           <a:prstGeom prst="rect">
             <a:avLst/>
@@ -6489,7 +7197,7 @@
                 <a:ea typeface="Aptos" pitchFamily="34" charset="-122"/>
                 <a:cs typeface="Aptos" pitchFamily="34" charset="-120"/>
               </a:rPr>
-              <a:t>Connect the concept to public health decisions, safeguards, documentation, or implementation work.</a:t>
+              <a:t>Connect the concept to public health purpose, responsible use, required safeguards, documentation, and the next action a department should take.</a:t>
             </a:r>
             <a:endParaRPr lang="en-US" sz="1550" dirty="0"/>
           </a:p>
@@ -6663,8 +7371,8 @@
         </p:nvSpPr>
         <p:spPr>
           <a:xfrm>
-            <a:off x="9966960" y="6537960"/>
-            <a:ext cx="1645920" cy="201168"/>
+            <a:off x="9646920" y="6537960"/>
+            <a:ext cx="1965960" cy="201168"/>
           </a:xfrm>
           <a:prstGeom prst="rect">
             <a:avLst/>
@@ -6688,7 +7396,7 @@
                 <a:ea typeface="Aptos" pitchFamily="34" charset="-122"/>
                 <a:cs typeface="Aptos" pitchFamily="34" charset="-120"/>
               </a:rPr>
-              <a:t>Â© Paula Soper</a:t>
+              <a:t>Copyright Paula Soper</a:t>
             </a:r>
             <a:endParaRPr lang="en-US" sz="800" dirty="0"/>
           </a:p>
@@ -6735,77 +7443,13 @@
       </p:sp>
       <p:sp>
         <p:nvSpPr>
-          <p:cNvPr id="8" name="Shape 6"/>
+          <p:cNvPr id="8" name="Text 6"/>
           <p:cNvSpPr/>
           <p:nvPr/>
         </p:nvSpPr>
         <p:spPr>
           <a:xfrm>
             <a:off x="640080" y="658368"/>
-            <a:ext cx="420624" cy="420624"/>
-          </a:xfrm>
-          <a:prstGeom prst="ellipse">
-            <a:avLst/>
-          </a:prstGeom>
-          <a:solidFill>
-            <a:srgbClr val="0068B7"/>
-          </a:solidFill>
-          <a:ln w="12700">
-            <a:solidFill>
-              <a:srgbClr val="0068B7"/>
-            </a:solidFill>
-            <a:prstDash val="solid"/>
-          </a:ln>
-        </p:spPr>
-      </p:sp>
-      <p:sp>
-        <p:nvSpPr>
-          <p:cNvPr id="9" name="Text 7"/>
-          <p:cNvSpPr/>
-          <p:nvPr/>
-        </p:nvSpPr>
-        <p:spPr>
-          <a:xfrm>
-            <a:off x="640080" y="731520"/>
-            <a:ext cx="420624" cy="164592"/>
-          </a:xfrm>
-          <a:prstGeom prst="rect">
-            <a:avLst/>
-          </a:prstGeom>
-          <a:noFill/>
-          <a:ln/>
-        </p:spPr>
-        <p:txBody>
-          <a:bodyPr wrap="square" lIns="0" tIns="0" rIns="0" bIns="0" rtlCol="0" anchor="ctr"/>
-          <a:lstStyle/>
-          <a:p>
-            <a:pPr algn="ctr" indent="0" marL="0">
-              <a:buNone/>
-            </a:pPr>
-            <a:r>
-              <a:rPr lang="en-US" sz="1100" b="1" dirty="0">
-                <a:solidFill>
-                  <a:srgbClr val="FFFFFF"/>
-                </a:solidFill>
-                <a:latin typeface="Aptos" pitchFamily="34" charset="0"/>
-                <a:ea typeface="Aptos" pitchFamily="34" charset="-122"/>
-                <a:cs typeface="Aptos" pitchFamily="34" charset="-120"/>
-              </a:rPr>
-              <a:t>11</a:t>
-            </a:r>
-            <a:endParaRPr lang="en-US" sz="1100" dirty="0"/>
-          </a:p>
-        </p:txBody>
-      </p:sp>
-      <p:sp>
-        <p:nvSpPr>
-          <p:cNvPr id="10" name="Text 8"/>
-          <p:cNvSpPr/>
-          <p:nvPr/>
-        </p:nvSpPr>
-        <p:spPr>
-          <a:xfrm>
-            <a:off x="640080" y="621792"/>
             <a:ext cx="10881360" cy="713232"/>
           </a:xfrm>
           <a:prstGeom prst="rect">
@@ -6840,14 +7484,14 @@
       </p:sp>
       <p:sp>
         <p:nvSpPr>
-          <p:cNvPr id="11" name="Text 9"/>
+          <p:cNvPr id="9" name="Text 7"/>
           <p:cNvSpPr/>
           <p:nvPr/>
         </p:nvSpPr>
         <p:spPr>
           <a:xfrm>
             <a:off x="868680" y="1508760"/>
-            <a:ext cx="6537960" cy="4160520"/>
+            <a:ext cx="6309360" cy="4160520"/>
           </a:xfrm>
           <a:prstGeom prst="rect">
             <a:avLst/>
@@ -6878,18 +7522,18 @@
       </p:sp>
       <p:sp>
         <p:nvSpPr>
-          <p:cNvPr id="12" name="Shape 10"/>
-          <p:cNvSpPr/>
-          <p:nvPr/>
-        </p:nvSpPr>
-        <p:spPr>
-          <a:xfrm>
-            <a:off x="7909560" y="1417320"/>
-            <a:ext cx="3154680" cy="1828800"/>
+          <p:cNvPr id="10" name="Shape 8"/>
+          <p:cNvSpPr/>
+          <p:nvPr/>
+        </p:nvSpPr>
+        <p:spPr>
+          <a:xfrm>
+            <a:off x="7635240" y="1325880"/>
+            <a:ext cx="3474720" cy="1325880"/>
           </a:xfrm>
           <a:prstGeom prst="roundRect">
             <a:avLst>
-              <a:gd name="adj" fmla="val 6000"/>
+              <a:gd name="adj" fmla="val 8276"/>
             </a:avLst>
           </a:prstGeom>
           <a:solidFill>
@@ -6905,14 +7549,14 @@
       </p:sp>
       <p:sp>
         <p:nvSpPr>
-          <p:cNvPr id="13" name="Text 11"/>
-          <p:cNvSpPr/>
-          <p:nvPr/>
-        </p:nvSpPr>
-        <p:spPr>
-          <a:xfrm>
-            <a:off x="8074152" y="1563624"/>
-            <a:ext cx="2825496" cy="256032"/>
+          <p:cNvPr id="11" name="Text 9"/>
+          <p:cNvSpPr/>
+          <p:nvPr/>
+        </p:nvSpPr>
+        <p:spPr>
+          <a:xfrm>
+            <a:off x="7799832" y="1472184"/>
+            <a:ext cx="3145536" cy="256032"/>
           </a:xfrm>
           <a:prstGeom prst="rect">
             <a:avLst/>
@@ -6936,7 +7580,7 @@
                 <a:ea typeface="Aptos" pitchFamily="34" charset="-122"/>
                 <a:cs typeface="Aptos" pitchFamily="34" charset="-120"/>
               </a:rPr>
-              <a:t>Key idea</a:t>
+              <a:t>Core concept</a:t>
             </a:r>
             <a:endParaRPr lang="en-US" sz="1300" dirty="0"/>
           </a:p>
@@ -6944,14 +7588,14 @@
       </p:sp>
       <p:sp>
         <p:nvSpPr>
-          <p:cNvPr id="14" name="Text 12"/>
-          <p:cNvSpPr/>
-          <p:nvPr/>
-        </p:nvSpPr>
-        <p:spPr>
-          <a:xfrm>
-            <a:off x="8074152" y="1920240"/>
-            <a:ext cx="2825496" cy="1188720"/>
+          <p:cNvPr id="12" name="Text 10"/>
+          <p:cNvSpPr/>
+          <p:nvPr/>
+        </p:nvSpPr>
+        <p:spPr>
+          <a:xfrm>
+            <a:off x="7799832" y="1828800"/>
+            <a:ext cx="3145536" cy="685800"/>
           </a:xfrm>
           <a:prstGeom prst="rect">
             <a:avLst/>
@@ -6985,18 +7629,159 @@
       </p:sp>
       <p:sp>
         <p:nvSpPr>
-          <p:cNvPr id="15" name="Shape 13"/>
-          <p:cNvSpPr/>
-          <p:nvPr/>
-        </p:nvSpPr>
-        <p:spPr>
-          <a:xfrm>
-            <a:off x="7909560" y="3520440"/>
-            <a:ext cx="3154680" cy="1737360"/>
+          <p:cNvPr id="13" name="Shape 11"/>
+          <p:cNvSpPr/>
+          <p:nvPr/>
+        </p:nvSpPr>
+        <p:spPr>
+          <a:xfrm>
+            <a:off x="7635240" y="2788920"/>
+            <a:ext cx="3474720" cy="1536192"/>
           </a:xfrm>
           <a:prstGeom prst="roundRect">
             <a:avLst>
-              <a:gd name="adj" fmla="val 6316"/>
+              <a:gd name="adj" fmla="val 7143"/>
+            </a:avLst>
+          </a:prstGeom>
+          <a:solidFill>
+            <a:srgbClr val="FFFFFF">
+              <a:alpha val="88000"/>
+            </a:srgbClr>
+          </a:solidFill>
+          <a:ln w="12700">
+            <a:solidFill>
+              <a:srgbClr val="D6E8F2"/>
+            </a:solidFill>
+            <a:prstDash val="solid"/>
+          </a:ln>
+        </p:spPr>
+      </p:sp>
+      <p:sp>
+        <p:nvSpPr>
+          <p:cNvPr id="14" name="Shape 12"/>
+          <p:cNvSpPr/>
+          <p:nvPr/>
+        </p:nvSpPr>
+        <p:spPr>
+          <a:xfrm>
+            <a:off x="8074152" y="3291840"/>
+            <a:ext cx="2596896" cy="749808"/>
+          </a:xfrm>
+          <a:prstGeom prst="rect">
+            <a:avLst/>
+          </a:prstGeom>
+          <a:solidFill>
+            <a:srgbClr val="EAF6F8"/>
+          </a:solidFill>
+          <a:ln w="12700">
+            <a:solidFill>
+              <a:srgbClr val="8ABBD8"/>
+            </a:solidFill>
+            <a:prstDash val="solid"/>
+          </a:ln>
+        </p:spPr>
+      </p:sp>
+      <p:sp>
+        <p:nvSpPr>
+          <p:cNvPr id="15" name="Shape 13"/>
+          <p:cNvSpPr/>
+          <p:nvPr/>
+        </p:nvSpPr>
+        <p:spPr>
+          <a:xfrm>
+            <a:off x="8202168" y="3721608"/>
+            <a:ext cx="2340864" cy="0"/>
+          </a:xfrm>
+          <a:prstGeom prst="line">
+            <a:avLst/>
+          </a:prstGeom>
+          <a:noFill/>
+          <a:ln w="19050">
+            <a:solidFill>
+              <a:srgbClr val="0068B7"/>
+            </a:solidFill>
+            <a:prstDash val="solid"/>
+          </a:ln>
+        </p:spPr>
+      </p:sp>
+      <p:sp>
+        <p:nvSpPr>
+          <p:cNvPr id="16" name="Shape 14"/>
+          <p:cNvSpPr/>
+          <p:nvPr/>
+        </p:nvSpPr>
+        <p:spPr>
+          <a:xfrm>
+            <a:off x="9198864" y="4206240"/>
+            <a:ext cx="347472" cy="347472"/>
+          </a:xfrm>
+          <a:prstGeom prst="ellipse">
+            <a:avLst/>
+          </a:prstGeom>
+          <a:solidFill>
+            <a:srgbClr val="2F8A28"/>
+          </a:solidFill>
+          <a:ln w="12700">
+            <a:solidFill>
+              <a:srgbClr val="2F8A28"/>
+            </a:solidFill>
+            <a:prstDash val="solid"/>
+          </a:ln>
+        </p:spPr>
+      </p:sp>
+      <p:sp>
+        <p:nvSpPr>
+          <p:cNvPr id="17" name="Text 15"/>
+          <p:cNvSpPr/>
+          <p:nvPr/>
+        </p:nvSpPr>
+        <p:spPr>
+          <a:xfrm>
+            <a:off x="7909560" y="3977640"/>
+            <a:ext cx="2926080" cy="182880"/>
+          </a:xfrm>
+          <a:prstGeom prst="rect">
+            <a:avLst/>
+          </a:prstGeom>
+          <a:noFill/>
+          <a:ln/>
+        </p:spPr>
+        <p:txBody>
+          <a:bodyPr wrap="square" lIns="0" tIns="0" rIns="0" bIns="0" rtlCol="0" anchor="ctr"/>
+          <a:lstStyle/>
+          <a:p>
+            <a:pPr algn="ctr" indent="0" marL="0">
+              <a:buNone/>
+            </a:pPr>
+            <a:r>
+              <a:rPr lang="en-US" sz="1000" dirty="0">
+                <a:solidFill>
+                  <a:srgbClr val="003A63"/>
+                </a:solidFill>
+                <a:latin typeface="Aptos" pitchFamily="34" charset="0"/>
+                <a:ea typeface="Aptos" pitchFamily="34" charset="-122"/>
+                <a:cs typeface="Aptos" pitchFamily="34" charset="-120"/>
+              </a:rPr>
+              <a:t>Concept to action</a:t>
+            </a:r>
+            <a:endParaRPr lang="en-US" sz="1000" dirty="0"/>
+          </a:p>
+        </p:txBody>
+      </p:sp>
+      <p:sp>
+        <p:nvSpPr>
+          <p:cNvPr id="18" name="Shape 16"/>
+          <p:cNvSpPr/>
+          <p:nvPr/>
+        </p:nvSpPr>
+        <p:spPr>
+          <a:xfrm>
+            <a:off x="7635240" y="4498848"/>
+            <a:ext cx="3474720" cy="1143000"/>
+          </a:xfrm>
+          <a:prstGeom prst="roundRect">
+            <a:avLst>
+              <a:gd name="adj" fmla="val 9600"/>
             </a:avLst>
           </a:prstGeom>
           <a:solidFill>
@@ -7012,14 +7797,14 @@
       </p:sp>
       <p:sp>
         <p:nvSpPr>
-          <p:cNvPr id="16" name="Text 14"/>
-          <p:cNvSpPr/>
-          <p:nvPr/>
-        </p:nvSpPr>
-        <p:spPr>
-          <a:xfrm>
-            <a:off x="8074152" y="3666744"/>
-            <a:ext cx="2825496" cy="256032"/>
+          <p:cNvPr id="19" name="Text 17"/>
+          <p:cNvSpPr/>
+          <p:nvPr/>
+        </p:nvSpPr>
+        <p:spPr>
+          <a:xfrm>
+            <a:off x="7799832" y="4645152"/>
+            <a:ext cx="3145536" cy="256032"/>
           </a:xfrm>
           <a:prstGeom prst="rect">
             <a:avLst/>
@@ -7043,7 +7828,7 @@
                 <a:ea typeface="Aptos" pitchFamily="34" charset="-122"/>
                 <a:cs typeface="Aptos" pitchFamily="34" charset="-120"/>
               </a:rPr>
-              <a:t>Use this for</a:t>
+              <a:t>Apply it</a:t>
             </a:r>
             <a:endParaRPr lang="en-US" sz="1300" dirty="0"/>
           </a:p>
@@ -7051,14 +7836,14 @@
       </p:sp>
       <p:sp>
         <p:nvSpPr>
-          <p:cNvPr id="17" name="Text 15"/>
-          <p:cNvSpPr/>
-          <p:nvPr/>
-        </p:nvSpPr>
-        <p:spPr>
-          <a:xfrm>
-            <a:off x="8074152" y="4023360"/>
-            <a:ext cx="2825496" cy="1097280"/>
+          <p:cNvPr id="20" name="Text 18"/>
+          <p:cNvSpPr/>
+          <p:nvPr/>
+        </p:nvSpPr>
+        <p:spPr>
+          <a:xfrm>
+            <a:off x="7799832" y="5001768"/>
+            <a:ext cx="3145536" cy="502920"/>
           </a:xfrm>
           <a:prstGeom prst="rect">
             <a:avLst/>
@@ -7084,7 +7869,7 @@
                 <a:ea typeface="Aptos" pitchFamily="34" charset="-122"/>
                 <a:cs typeface="Aptos" pitchFamily="34" charset="-120"/>
               </a:rPr>
-              <a:t>Connect the concept to public health decisions, safeguards, documentation, or implementation work.</a:t>
+              <a:t>Connect the concept to public health purpose, responsible use, required safeguards, documentation, and the next action a department should take.</a:t>
             </a:r>
             <a:endParaRPr lang="en-US" sz="1550" dirty="0"/>
           </a:p>
@@ -7258,8 +8043,8 @@
         </p:nvSpPr>
         <p:spPr>
           <a:xfrm>
-            <a:off x="9966960" y="6537960"/>
-            <a:ext cx="1645920" cy="201168"/>
+            <a:off x="9646920" y="6537960"/>
+            <a:ext cx="1965960" cy="201168"/>
           </a:xfrm>
           <a:prstGeom prst="rect">
             <a:avLst/>
@@ -7283,7 +8068,7 @@
                 <a:ea typeface="Aptos" pitchFamily="34" charset="-122"/>
                 <a:cs typeface="Aptos" pitchFamily="34" charset="-120"/>
               </a:rPr>
-              <a:t>Â© Paula Soper</a:t>
+              <a:t>Copyright Paula Soper</a:t>
             </a:r>
             <a:endParaRPr lang="en-US" sz="800" dirty="0"/>
           </a:p>
@@ -7330,77 +8115,13 @@
       </p:sp>
       <p:sp>
         <p:nvSpPr>
-          <p:cNvPr id="8" name="Shape 6"/>
+          <p:cNvPr id="8" name="Text 6"/>
           <p:cNvSpPr/>
           <p:nvPr/>
         </p:nvSpPr>
         <p:spPr>
           <a:xfrm>
             <a:off x="640080" y="658368"/>
-            <a:ext cx="420624" cy="420624"/>
-          </a:xfrm>
-          <a:prstGeom prst="ellipse">
-            <a:avLst/>
-          </a:prstGeom>
-          <a:solidFill>
-            <a:srgbClr val="0068B7"/>
-          </a:solidFill>
-          <a:ln w="12700">
-            <a:solidFill>
-              <a:srgbClr val="0068B7"/>
-            </a:solidFill>
-            <a:prstDash val="solid"/>
-          </a:ln>
-        </p:spPr>
-      </p:sp>
-      <p:sp>
-        <p:nvSpPr>
-          <p:cNvPr id="9" name="Text 7"/>
-          <p:cNvSpPr/>
-          <p:nvPr/>
-        </p:nvSpPr>
-        <p:spPr>
-          <a:xfrm>
-            <a:off x="640080" y="731520"/>
-            <a:ext cx="420624" cy="164592"/>
-          </a:xfrm>
-          <a:prstGeom prst="rect">
-            <a:avLst/>
-          </a:prstGeom>
-          <a:noFill/>
-          <a:ln/>
-        </p:spPr>
-        <p:txBody>
-          <a:bodyPr wrap="square" lIns="0" tIns="0" rIns="0" bIns="0" rtlCol="0" anchor="ctr"/>
-          <a:lstStyle/>
-          <a:p>
-            <a:pPr algn="ctr" indent="0" marL="0">
-              <a:buNone/>
-            </a:pPr>
-            <a:r>
-              <a:rPr lang="en-US" sz="1100" b="1" dirty="0">
-                <a:solidFill>
-                  <a:srgbClr val="FFFFFF"/>
-                </a:solidFill>
-                <a:latin typeface="Aptos" pitchFamily="34" charset="0"/>
-                <a:ea typeface="Aptos" pitchFamily="34" charset="-122"/>
-                <a:cs typeface="Aptos" pitchFamily="34" charset="-120"/>
-              </a:rPr>
-              <a:t>12</a:t>
-            </a:r>
-            <a:endParaRPr lang="en-US" sz="1100" dirty="0"/>
-          </a:p>
-        </p:txBody>
-      </p:sp>
-      <p:sp>
-        <p:nvSpPr>
-          <p:cNvPr id="10" name="Text 8"/>
-          <p:cNvSpPr/>
-          <p:nvPr/>
-        </p:nvSpPr>
-        <p:spPr>
-          <a:xfrm>
-            <a:off x="640080" y="621792"/>
             <a:ext cx="10881360" cy="713232"/>
           </a:xfrm>
           <a:prstGeom prst="rect">
@@ -7435,14 +8156,14 @@
       </p:sp>
       <p:sp>
         <p:nvSpPr>
-          <p:cNvPr id="11" name="Text 9"/>
+          <p:cNvPr id="9" name="Text 7"/>
           <p:cNvSpPr/>
           <p:nvPr/>
         </p:nvSpPr>
         <p:spPr>
           <a:xfrm>
             <a:off x="868680" y="1508760"/>
-            <a:ext cx="6537960" cy="4160520"/>
+            <a:ext cx="6309360" cy="4160520"/>
           </a:xfrm>
           <a:prstGeom prst="rect">
             <a:avLst/>
@@ -7473,18 +8194,18 @@
       </p:sp>
       <p:sp>
         <p:nvSpPr>
-          <p:cNvPr id="12" name="Shape 10"/>
-          <p:cNvSpPr/>
-          <p:nvPr/>
-        </p:nvSpPr>
-        <p:spPr>
-          <a:xfrm>
-            <a:off x="7909560" y="1417320"/>
-            <a:ext cx="3154680" cy="1828800"/>
+          <p:cNvPr id="10" name="Shape 8"/>
+          <p:cNvSpPr/>
+          <p:nvPr/>
+        </p:nvSpPr>
+        <p:spPr>
+          <a:xfrm>
+            <a:off x="7635240" y="1325880"/>
+            <a:ext cx="3474720" cy="1325880"/>
           </a:xfrm>
           <a:prstGeom prst="roundRect">
             <a:avLst>
-              <a:gd name="adj" fmla="val 6000"/>
+              <a:gd name="adj" fmla="val 8276"/>
             </a:avLst>
           </a:prstGeom>
           <a:solidFill>
@@ -7500,14 +8221,14 @@
       </p:sp>
       <p:sp>
         <p:nvSpPr>
-          <p:cNvPr id="13" name="Text 11"/>
-          <p:cNvSpPr/>
-          <p:nvPr/>
-        </p:nvSpPr>
-        <p:spPr>
-          <a:xfrm>
-            <a:off x="8074152" y="1563624"/>
-            <a:ext cx="2825496" cy="256032"/>
+          <p:cNvPr id="11" name="Text 9"/>
+          <p:cNvSpPr/>
+          <p:nvPr/>
+        </p:nvSpPr>
+        <p:spPr>
+          <a:xfrm>
+            <a:off x="7799832" y="1472184"/>
+            <a:ext cx="3145536" cy="256032"/>
           </a:xfrm>
           <a:prstGeom prst="rect">
             <a:avLst/>
@@ -7531,7 +8252,7 @@
                 <a:ea typeface="Aptos" pitchFamily="34" charset="-122"/>
                 <a:cs typeface="Aptos" pitchFamily="34" charset="-120"/>
               </a:rPr>
-              <a:t>Key idea</a:t>
+              <a:t>Practice focus</a:t>
             </a:r>
             <a:endParaRPr lang="en-US" sz="1300" dirty="0"/>
           </a:p>
@@ -7539,14 +8260,14 @@
       </p:sp>
       <p:sp>
         <p:nvSpPr>
-          <p:cNvPr id="14" name="Text 12"/>
-          <p:cNvSpPr/>
-          <p:nvPr/>
-        </p:nvSpPr>
-        <p:spPr>
-          <a:xfrm>
-            <a:off x="8074152" y="1920240"/>
-            <a:ext cx="2825496" cy="1188720"/>
+          <p:cNvPr id="12" name="Text 10"/>
+          <p:cNvSpPr/>
+          <p:nvPr/>
+        </p:nvSpPr>
+        <p:spPr>
+          <a:xfrm>
+            <a:off x="7799832" y="1828800"/>
+            <a:ext cx="3145536" cy="685800"/>
           </a:xfrm>
           <a:prstGeom prst="rect">
             <a:avLst/>
@@ -7580,18 +8301,159 @@
       </p:sp>
       <p:sp>
         <p:nvSpPr>
-          <p:cNvPr id="15" name="Shape 13"/>
-          <p:cNvSpPr/>
-          <p:nvPr/>
-        </p:nvSpPr>
-        <p:spPr>
-          <a:xfrm>
-            <a:off x="7909560" y="3520440"/>
-            <a:ext cx="3154680" cy="1737360"/>
+          <p:cNvPr id="13" name="Shape 11"/>
+          <p:cNvSpPr/>
+          <p:nvPr/>
+        </p:nvSpPr>
+        <p:spPr>
+          <a:xfrm>
+            <a:off x="7635240" y="2788920"/>
+            <a:ext cx="3474720" cy="1536192"/>
           </a:xfrm>
           <a:prstGeom prst="roundRect">
             <a:avLst>
-              <a:gd name="adj" fmla="val 6316"/>
+              <a:gd name="adj" fmla="val 7143"/>
+            </a:avLst>
+          </a:prstGeom>
+          <a:solidFill>
+            <a:srgbClr val="FFFFFF">
+              <a:alpha val="88000"/>
+            </a:srgbClr>
+          </a:solidFill>
+          <a:ln w="12700">
+            <a:solidFill>
+              <a:srgbClr val="D6E8F2"/>
+            </a:solidFill>
+            <a:prstDash val="solid"/>
+          </a:ln>
+        </p:spPr>
+      </p:sp>
+      <p:sp>
+        <p:nvSpPr>
+          <p:cNvPr id="14" name="Shape 12"/>
+          <p:cNvSpPr/>
+          <p:nvPr/>
+        </p:nvSpPr>
+        <p:spPr>
+          <a:xfrm>
+            <a:off x="8074152" y="3291840"/>
+            <a:ext cx="2596896" cy="749808"/>
+          </a:xfrm>
+          <a:prstGeom prst="rect">
+            <a:avLst/>
+          </a:prstGeom>
+          <a:solidFill>
+            <a:srgbClr val="EAF6F8"/>
+          </a:solidFill>
+          <a:ln w="12700">
+            <a:solidFill>
+              <a:srgbClr val="8ABBD8"/>
+            </a:solidFill>
+            <a:prstDash val="solid"/>
+          </a:ln>
+        </p:spPr>
+      </p:sp>
+      <p:sp>
+        <p:nvSpPr>
+          <p:cNvPr id="15" name="Shape 13"/>
+          <p:cNvSpPr/>
+          <p:nvPr/>
+        </p:nvSpPr>
+        <p:spPr>
+          <a:xfrm>
+            <a:off x="8202168" y="3721608"/>
+            <a:ext cx="2340864" cy="0"/>
+          </a:xfrm>
+          <a:prstGeom prst="line">
+            <a:avLst/>
+          </a:prstGeom>
+          <a:noFill/>
+          <a:ln w="19050">
+            <a:solidFill>
+              <a:srgbClr val="0068B7"/>
+            </a:solidFill>
+            <a:prstDash val="solid"/>
+          </a:ln>
+        </p:spPr>
+      </p:sp>
+      <p:sp>
+        <p:nvSpPr>
+          <p:cNvPr id="16" name="Shape 14"/>
+          <p:cNvSpPr/>
+          <p:nvPr/>
+        </p:nvSpPr>
+        <p:spPr>
+          <a:xfrm>
+            <a:off x="9198864" y="4206240"/>
+            <a:ext cx="347472" cy="347472"/>
+          </a:xfrm>
+          <a:prstGeom prst="ellipse">
+            <a:avLst/>
+          </a:prstGeom>
+          <a:solidFill>
+            <a:srgbClr val="2F8A28"/>
+          </a:solidFill>
+          <a:ln w="12700">
+            <a:solidFill>
+              <a:srgbClr val="2F8A28"/>
+            </a:solidFill>
+            <a:prstDash val="solid"/>
+          </a:ln>
+        </p:spPr>
+      </p:sp>
+      <p:sp>
+        <p:nvSpPr>
+          <p:cNvPr id="17" name="Text 15"/>
+          <p:cNvSpPr/>
+          <p:nvPr/>
+        </p:nvSpPr>
+        <p:spPr>
+          <a:xfrm>
+            <a:off x="7909560" y="3977640"/>
+            <a:ext cx="2926080" cy="182880"/>
+          </a:xfrm>
+          <a:prstGeom prst="rect">
+            <a:avLst/>
+          </a:prstGeom>
+          <a:noFill/>
+          <a:ln/>
+        </p:spPr>
+        <p:txBody>
+          <a:bodyPr wrap="square" lIns="0" tIns="0" rIns="0" bIns="0" rtlCol="0" anchor="ctr"/>
+          <a:lstStyle/>
+          <a:p>
+            <a:pPr algn="ctr" indent="0" marL="0">
+              <a:buNone/>
+            </a:pPr>
+            <a:r>
+              <a:rPr lang="en-US" sz="1000" dirty="0">
+                <a:solidFill>
+                  <a:srgbClr val="003A63"/>
+                </a:solidFill>
+                <a:latin typeface="Aptos" pitchFamily="34" charset="0"/>
+                <a:ea typeface="Aptos" pitchFamily="34" charset="-122"/>
+                <a:cs typeface="Aptos" pitchFamily="34" charset="-120"/>
+              </a:rPr>
+              <a:t>Concept to action</a:t>
+            </a:r>
+            <a:endParaRPr lang="en-US" sz="1000" dirty="0"/>
+          </a:p>
+        </p:txBody>
+      </p:sp>
+      <p:sp>
+        <p:nvSpPr>
+          <p:cNvPr id="18" name="Shape 16"/>
+          <p:cNvSpPr/>
+          <p:nvPr/>
+        </p:nvSpPr>
+        <p:spPr>
+          <a:xfrm>
+            <a:off x="7635240" y="4498848"/>
+            <a:ext cx="3474720" cy="1143000"/>
+          </a:xfrm>
+          <a:prstGeom prst="roundRect">
+            <a:avLst>
+              <a:gd name="adj" fmla="val 9600"/>
             </a:avLst>
           </a:prstGeom>
           <a:solidFill>
@@ -7607,14 +8469,14 @@
       </p:sp>
       <p:sp>
         <p:nvSpPr>
-          <p:cNvPr id="16" name="Text 14"/>
-          <p:cNvSpPr/>
-          <p:nvPr/>
-        </p:nvSpPr>
-        <p:spPr>
-          <a:xfrm>
-            <a:off x="8074152" y="3666744"/>
-            <a:ext cx="2825496" cy="256032"/>
+          <p:cNvPr id="19" name="Text 17"/>
+          <p:cNvSpPr/>
+          <p:nvPr/>
+        </p:nvSpPr>
+        <p:spPr>
+          <a:xfrm>
+            <a:off x="7799832" y="4645152"/>
+            <a:ext cx="3145536" cy="256032"/>
           </a:xfrm>
           <a:prstGeom prst="rect">
             <a:avLst/>
@@ -7638,7 +8500,7 @@
                 <a:ea typeface="Aptos" pitchFamily="34" charset="-122"/>
                 <a:cs typeface="Aptos" pitchFamily="34" charset="-120"/>
               </a:rPr>
-              <a:t>Use this for</a:t>
+              <a:t>What to produce</a:t>
             </a:r>
             <a:endParaRPr lang="en-US" sz="1300" dirty="0"/>
           </a:p>
@@ -7646,14 +8508,14 @@
       </p:sp>
       <p:sp>
         <p:nvSpPr>
-          <p:cNvPr id="17" name="Text 15"/>
-          <p:cNvSpPr/>
-          <p:nvPr/>
-        </p:nvSpPr>
-        <p:spPr>
-          <a:xfrm>
-            <a:off x="8074152" y="4023360"/>
-            <a:ext cx="2825496" cy="1097280"/>
+          <p:cNvPr id="20" name="Text 18"/>
+          <p:cNvSpPr/>
+          <p:nvPr/>
+        </p:nvSpPr>
+        <p:spPr>
+          <a:xfrm>
+            <a:off x="7799832" y="5001768"/>
+            <a:ext cx="3145536" cy="502920"/>
           </a:xfrm>
           <a:prstGeom prst="rect">
             <a:avLst/>
@@ -7679,7 +8541,7 @@
                 <a:ea typeface="Aptos" pitchFamily="34" charset="-122"/>
                 <a:cs typeface="Aptos" pitchFamily="34" charset="-120"/>
               </a:rPr>
-              <a:t>Connect the concept to public health decisions, safeguards, documentation, or implementation work.</a:t>
+              <a:t>Use the assignment to test whether you can explain the concept, apply it to a realistic public health situation, and identify what would need review before the work moves forward.</a:t>
             </a:r>
             <a:endParaRPr lang="en-US" sz="1550" dirty="0"/>
           </a:p>
@@ -7853,8 +8715,8 @@
         </p:nvSpPr>
         <p:spPr>
           <a:xfrm>
-            <a:off x="9966960" y="6537960"/>
-            <a:ext cx="1645920" cy="201168"/>
+            <a:off x="9646920" y="6537960"/>
+            <a:ext cx="1965960" cy="201168"/>
           </a:xfrm>
           <a:prstGeom prst="rect">
             <a:avLst/>
@@ -7878,7 +8740,7 @@
                 <a:ea typeface="Aptos" pitchFamily="34" charset="-122"/>
                 <a:cs typeface="Aptos" pitchFamily="34" charset="-120"/>
               </a:rPr>
-              <a:t>Â© Paula Soper</a:t>
+              <a:t>Copyright Paula Soper</a:t>
             </a:r>
             <a:endParaRPr lang="en-US" sz="800" dirty="0"/>
           </a:p>
@@ -7925,77 +8787,13 @@
       </p:sp>
       <p:sp>
         <p:nvSpPr>
-          <p:cNvPr id="8" name="Shape 6"/>
+          <p:cNvPr id="8" name="Text 6"/>
           <p:cNvSpPr/>
           <p:nvPr/>
         </p:nvSpPr>
         <p:spPr>
           <a:xfrm>
             <a:off x="640080" y="658368"/>
-            <a:ext cx="420624" cy="420624"/>
-          </a:xfrm>
-          <a:prstGeom prst="ellipse">
-            <a:avLst/>
-          </a:prstGeom>
-          <a:solidFill>
-            <a:srgbClr val="0068B7"/>
-          </a:solidFill>
-          <a:ln w="12700">
-            <a:solidFill>
-              <a:srgbClr val="0068B7"/>
-            </a:solidFill>
-            <a:prstDash val="solid"/>
-          </a:ln>
-        </p:spPr>
-      </p:sp>
-      <p:sp>
-        <p:nvSpPr>
-          <p:cNvPr id="9" name="Text 7"/>
-          <p:cNvSpPr/>
-          <p:nvPr/>
-        </p:nvSpPr>
-        <p:spPr>
-          <a:xfrm>
-            <a:off x="640080" y="731520"/>
-            <a:ext cx="420624" cy="164592"/>
-          </a:xfrm>
-          <a:prstGeom prst="rect">
-            <a:avLst/>
-          </a:prstGeom>
-          <a:noFill/>
-          <a:ln/>
-        </p:spPr>
-        <p:txBody>
-          <a:bodyPr wrap="square" lIns="0" tIns="0" rIns="0" bIns="0" rtlCol="0" anchor="ctr"/>
-          <a:lstStyle/>
-          <a:p>
-            <a:pPr algn="ctr" indent="0" marL="0">
-              <a:buNone/>
-            </a:pPr>
-            <a:r>
-              <a:rPr lang="en-US" sz="1100" b="1" dirty="0">
-                <a:solidFill>
-                  <a:srgbClr val="FFFFFF"/>
-                </a:solidFill>
-                <a:latin typeface="Aptos" pitchFamily="34" charset="0"/>
-                <a:ea typeface="Aptos" pitchFamily="34" charset="-122"/>
-                <a:cs typeface="Aptos" pitchFamily="34" charset="-120"/>
-              </a:rPr>
-              <a:t>13</a:t>
-            </a:r>
-            <a:endParaRPr lang="en-US" sz="1100" dirty="0"/>
-          </a:p>
-        </p:txBody>
-      </p:sp>
-      <p:sp>
-        <p:nvSpPr>
-          <p:cNvPr id="10" name="Text 8"/>
-          <p:cNvSpPr/>
-          <p:nvPr/>
-        </p:nvSpPr>
-        <p:spPr>
-          <a:xfrm>
-            <a:off x="640080" y="621792"/>
             <a:ext cx="10881360" cy="713232"/>
           </a:xfrm>
           <a:prstGeom prst="rect">
@@ -8030,14 +8828,14 @@
       </p:sp>
       <p:sp>
         <p:nvSpPr>
-          <p:cNvPr id="11" name="Text 9"/>
+          <p:cNvPr id="9" name="Text 7"/>
           <p:cNvSpPr/>
           <p:nvPr/>
         </p:nvSpPr>
         <p:spPr>
           <a:xfrm>
             <a:off x="868680" y="1508760"/>
-            <a:ext cx="6537960" cy="4160520"/>
+            <a:ext cx="6309360" cy="4160520"/>
           </a:xfrm>
           <a:prstGeom prst="rect">
             <a:avLst/>
@@ -8096,18 +8894,18 @@
       </p:sp>
       <p:sp>
         <p:nvSpPr>
-          <p:cNvPr id="12" name="Shape 10"/>
-          <p:cNvSpPr/>
-          <p:nvPr/>
-        </p:nvSpPr>
-        <p:spPr>
-          <a:xfrm>
-            <a:off x="7909560" y="1417320"/>
-            <a:ext cx="3154680" cy="1828800"/>
+          <p:cNvPr id="10" name="Shape 8"/>
+          <p:cNvSpPr/>
+          <p:nvPr/>
+        </p:nvSpPr>
+        <p:spPr>
+          <a:xfrm>
+            <a:off x="7635240" y="1325880"/>
+            <a:ext cx="3474720" cy="1325880"/>
           </a:xfrm>
           <a:prstGeom prst="roundRect">
             <a:avLst>
-              <a:gd name="adj" fmla="val 6000"/>
+              <a:gd name="adj" fmla="val 8276"/>
             </a:avLst>
           </a:prstGeom>
           <a:solidFill>
@@ -8123,14 +8921,14 @@
       </p:sp>
       <p:sp>
         <p:nvSpPr>
-          <p:cNvPr id="13" name="Text 11"/>
-          <p:cNvSpPr/>
-          <p:nvPr/>
-        </p:nvSpPr>
-        <p:spPr>
-          <a:xfrm>
-            <a:off x="8074152" y="1563624"/>
-            <a:ext cx="2825496" cy="256032"/>
+          <p:cNvPr id="11" name="Text 9"/>
+          <p:cNvSpPr/>
+          <p:nvPr/>
+        </p:nvSpPr>
+        <p:spPr>
+          <a:xfrm>
+            <a:off x="7799832" y="1472184"/>
+            <a:ext cx="3145536" cy="256032"/>
           </a:xfrm>
           <a:prstGeom prst="rect">
             <a:avLst/>
@@ -8154,7 +8952,7 @@
                 <a:ea typeface="Aptos" pitchFamily="34" charset="-122"/>
                 <a:cs typeface="Aptos" pitchFamily="34" charset="-120"/>
               </a:rPr>
-              <a:t>Key idea</a:t>
+              <a:t>Practice focus</a:t>
             </a:r>
             <a:endParaRPr lang="en-US" sz="1300" dirty="0"/>
           </a:p>
@@ -8162,14 +8960,14 @@
       </p:sp>
       <p:sp>
         <p:nvSpPr>
-          <p:cNvPr id="14" name="Text 12"/>
-          <p:cNvSpPr/>
-          <p:nvPr/>
-        </p:nvSpPr>
-        <p:spPr>
-          <a:xfrm>
-            <a:off x="8074152" y="1920240"/>
-            <a:ext cx="2825496" cy="1188720"/>
+          <p:cNvPr id="12" name="Text 10"/>
+          <p:cNvSpPr/>
+          <p:nvPr/>
+        </p:nvSpPr>
+        <p:spPr>
+          <a:xfrm>
+            <a:off x="7799832" y="1828800"/>
+            <a:ext cx="3145536" cy="685800"/>
           </a:xfrm>
           <a:prstGeom prst="rect">
             <a:avLst/>
@@ -8203,18 +9001,159 @@
       </p:sp>
       <p:sp>
         <p:nvSpPr>
-          <p:cNvPr id="15" name="Shape 13"/>
-          <p:cNvSpPr/>
-          <p:nvPr/>
-        </p:nvSpPr>
-        <p:spPr>
-          <a:xfrm>
-            <a:off x="7909560" y="3520440"/>
-            <a:ext cx="3154680" cy="1737360"/>
+          <p:cNvPr id="13" name="Shape 11"/>
+          <p:cNvSpPr/>
+          <p:nvPr/>
+        </p:nvSpPr>
+        <p:spPr>
+          <a:xfrm>
+            <a:off x="7635240" y="2788920"/>
+            <a:ext cx="3474720" cy="1536192"/>
           </a:xfrm>
           <a:prstGeom prst="roundRect">
             <a:avLst>
-              <a:gd name="adj" fmla="val 6316"/>
+              <a:gd name="adj" fmla="val 7143"/>
+            </a:avLst>
+          </a:prstGeom>
+          <a:solidFill>
+            <a:srgbClr val="FFFFFF">
+              <a:alpha val="88000"/>
+            </a:srgbClr>
+          </a:solidFill>
+          <a:ln w="12700">
+            <a:solidFill>
+              <a:srgbClr val="D6E8F2"/>
+            </a:solidFill>
+            <a:prstDash val="solid"/>
+          </a:ln>
+        </p:spPr>
+      </p:sp>
+      <p:sp>
+        <p:nvSpPr>
+          <p:cNvPr id="14" name="Shape 12"/>
+          <p:cNvSpPr/>
+          <p:nvPr/>
+        </p:nvSpPr>
+        <p:spPr>
+          <a:xfrm>
+            <a:off x="8074152" y="3291840"/>
+            <a:ext cx="2596896" cy="749808"/>
+          </a:xfrm>
+          <a:prstGeom prst="rect">
+            <a:avLst/>
+          </a:prstGeom>
+          <a:solidFill>
+            <a:srgbClr val="EAF6F8"/>
+          </a:solidFill>
+          <a:ln w="12700">
+            <a:solidFill>
+              <a:srgbClr val="8ABBD8"/>
+            </a:solidFill>
+            <a:prstDash val="solid"/>
+          </a:ln>
+        </p:spPr>
+      </p:sp>
+      <p:sp>
+        <p:nvSpPr>
+          <p:cNvPr id="15" name="Shape 13"/>
+          <p:cNvSpPr/>
+          <p:nvPr/>
+        </p:nvSpPr>
+        <p:spPr>
+          <a:xfrm>
+            <a:off x="8202168" y="3721608"/>
+            <a:ext cx="2340864" cy="0"/>
+          </a:xfrm>
+          <a:prstGeom prst="line">
+            <a:avLst/>
+          </a:prstGeom>
+          <a:noFill/>
+          <a:ln w="19050">
+            <a:solidFill>
+              <a:srgbClr val="0068B7"/>
+            </a:solidFill>
+            <a:prstDash val="solid"/>
+          </a:ln>
+        </p:spPr>
+      </p:sp>
+      <p:sp>
+        <p:nvSpPr>
+          <p:cNvPr id="16" name="Shape 14"/>
+          <p:cNvSpPr/>
+          <p:nvPr/>
+        </p:nvSpPr>
+        <p:spPr>
+          <a:xfrm>
+            <a:off x="9198864" y="4206240"/>
+            <a:ext cx="347472" cy="347472"/>
+          </a:xfrm>
+          <a:prstGeom prst="ellipse">
+            <a:avLst/>
+          </a:prstGeom>
+          <a:solidFill>
+            <a:srgbClr val="2F8A28"/>
+          </a:solidFill>
+          <a:ln w="12700">
+            <a:solidFill>
+              <a:srgbClr val="2F8A28"/>
+            </a:solidFill>
+            <a:prstDash val="solid"/>
+          </a:ln>
+        </p:spPr>
+      </p:sp>
+      <p:sp>
+        <p:nvSpPr>
+          <p:cNvPr id="17" name="Text 15"/>
+          <p:cNvSpPr/>
+          <p:nvPr/>
+        </p:nvSpPr>
+        <p:spPr>
+          <a:xfrm>
+            <a:off x="7909560" y="3977640"/>
+            <a:ext cx="2926080" cy="182880"/>
+          </a:xfrm>
+          <a:prstGeom prst="rect">
+            <a:avLst/>
+          </a:prstGeom>
+          <a:noFill/>
+          <a:ln/>
+        </p:spPr>
+        <p:txBody>
+          <a:bodyPr wrap="square" lIns="0" tIns="0" rIns="0" bIns="0" rtlCol="0" anchor="ctr"/>
+          <a:lstStyle/>
+          <a:p>
+            <a:pPr algn="ctr" indent="0" marL="0">
+              <a:buNone/>
+            </a:pPr>
+            <a:r>
+              <a:rPr lang="en-US" sz="1000" dirty="0">
+                <a:solidFill>
+                  <a:srgbClr val="003A63"/>
+                </a:solidFill>
+                <a:latin typeface="Aptos" pitchFamily="34" charset="0"/>
+                <a:ea typeface="Aptos" pitchFamily="34" charset="-122"/>
+                <a:cs typeface="Aptos" pitchFamily="34" charset="-120"/>
+              </a:rPr>
+              <a:t>Concept to action</a:t>
+            </a:r>
+            <a:endParaRPr lang="en-US" sz="1000" dirty="0"/>
+          </a:p>
+        </p:txBody>
+      </p:sp>
+      <p:sp>
+        <p:nvSpPr>
+          <p:cNvPr id="18" name="Shape 16"/>
+          <p:cNvSpPr/>
+          <p:nvPr/>
+        </p:nvSpPr>
+        <p:spPr>
+          <a:xfrm>
+            <a:off x="7635240" y="4498848"/>
+            <a:ext cx="3474720" cy="1143000"/>
+          </a:xfrm>
+          <a:prstGeom prst="roundRect">
+            <a:avLst>
+              <a:gd name="adj" fmla="val 9600"/>
             </a:avLst>
           </a:prstGeom>
           <a:solidFill>
@@ -8230,14 +9169,14 @@
       </p:sp>
       <p:sp>
         <p:nvSpPr>
-          <p:cNvPr id="16" name="Text 14"/>
-          <p:cNvSpPr/>
-          <p:nvPr/>
-        </p:nvSpPr>
-        <p:spPr>
-          <a:xfrm>
-            <a:off x="8074152" y="3666744"/>
-            <a:ext cx="2825496" cy="256032"/>
+          <p:cNvPr id="19" name="Text 17"/>
+          <p:cNvSpPr/>
+          <p:nvPr/>
+        </p:nvSpPr>
+        <p:spPr>
+          <a:xfrm>
+            <a:off x="7799832" y="4645152"/>
+            <a:ext cx="3145536" cy="256032"/>
           </a:xfrm>
           <a:prstGeom prst="rect">
             <a:avLst/>
@@ -8261,7 +9200,7 @@
                 <a:ea typeface="Aptos" pitchFamily="34" charset="-122"/>
                 <a:cs typeface="Aptos" pitchFamily="34" charset="-120"/>
               </a:rPr>
-              <a:t>Use this for</a:t>
+              <a:t>What to produce</a:t>
             </a:r>
             <a:endParaRPr lang="en-US" sz="1300" dirty="0"/>
           </a:p>
@@ -8269,14 +9208,14 @@
       </p:sp>
       <p:sp>
         <p:nvSpPr>
-          <p:cNvPr id="17" name="Text 15"/>
-          <p:cNvSpPr/>
-          <p:nvPr/>
-        </p:nvSpPr>
-        <p:spPr>
-          <a:xfrm>
-            <a:off x="8074152" y="4023360"/>
-            <a:ext cx="2825496" cy="1097280"/>
+          <p:cNvPr id="20" name="Text 18"/>
+          <p:cNvSpPr/>
+          <p:nvPr/>
+        </p:nvSpPr>
+        <p:spPr>
+          <a:xfrm>
+            <a:off x="7799832" y="5001768"/>
+            <a:ext cx="3145536" cy="502920"/>
           </a:xfrm>
           <a:prstGeom prst="rect">
             <a:avLst/>
@@ -8302,7 +9241,7 @@
                 <a:ea typeface="Aptos" pitchFamily="34" charset="-122"/>
                 <a:cs typeface="Aptos" pitchFamily="34" charset="-120"/>
               </a:rPr>
-              <a:t>Connect the concept to public health decisions, safeguards, documentation, or implementation work.</a:t>
+              <a:t>Use the assignment to test whether you can explain the concept, apply it to a realistic public health situation, and identify what would need review before the work moves forward.</a:t>
             </a:r>
             <a:endParaRPr lang="en-US" sz="1550" dirty="0"/>
           </a:p>
@@ -8476,8 +9415,8 @@
         </p:nvSpPr>
         <p:spPr>
           <a:xfrm>
-            <a:off x="9966960" y="6537960"/>
-            <a:ext cx="1645920" cy="201168"/>
+            <a:off x="9646920" y="6537960"/>
+            <a:ext cx="1965960" cy="201168"/>
           </a:xfrm>
           <a:prstGeom prst="rect">
             <a:avLst/>
@@ -8501,7 +9440,7 @@
                 <a:ea typeface="Aptos" pitchFamily="34" charset="-122"/>
                 <a:cs typeface="Aptos" pitchFamily="34" charset="-120"/>
               </a:rPr>
-              <a:t>Â© Paula Soper</a:t>
+              <a:t>Copyright Paula Soper</a:t>
             </a:r>
             <a:endParaRPr lang="en-US" sz="800" dirty="0"/>
           </a:p>
@@ -8548,77 +9487,13 @@
       </p:sp>
       <p:sp>
         <p:nvSpPr>
-          <p:cNvPr id="8" name="Shape 6"/>
+          <p:cNvPr id="8" name="Text 6"/>
           <p:cNvSpPr/>
           <p:nvPr/>
         </p:nvSpPr>
         <p:spPr>
           <a:xfrm>
             <a:off x="640080" y="658368"/>
-            <a:ext cx="420624" cy="420624"/>
-          </a:xfrm>
-          <a:prstGeom prst="ellipse">
-            <a:avLst/>
-          </a:prstGeom>
-          <a:solidFill>
-            <a:srgbClr val="0068B7"/>
-          </a:solidFill>
-          <a:ln w="12700">
-            <a:solidFill>
-              <a:srgbClr val="0068B7"/>
-            </a:solidFill>
-            <a:prstDash val="solid"/>
-          </a:ln>
-        </p:spPr>
-      </p:sp>
-      <p:sp>
-        <p:nvSpPr>
-          <p:cNvPr id="9" name="Text 7"/>
-          <p:cNvSpPr/>
-          <p:nvPr/>
-        </p:nvSpPr>
-        <p:spPr>
-          <a:xfrm>
-            <a:off x="640080" y="731520"/>
-            <a:ext cx="420624" cy="164592"/>
-          </a:xfrm>
-          <a:prstGeom prst="rect">
-            <a:avLst/>
-          </a:prstGeom>
-          <a:noFill/>
-          <a:ln/>
-        </p:spPr>
-        <p:txBody>
-          <a:bodyPr wrap="square" lIns="0" tIns="0" rIns="0" bIns="0" rtlCol="0" anchor="ctr"/>
-          <a:lstStyle/>
-          <a:p>
-            <a:pPr algn="ctr" indent="0" marL="0">
-              <a:buNone/>
-            </a:pPr>
-            <a:r>
-              <a:rPr lang="en-US" sz="1100" b="1" dirty="0">
-                <a:solidFill>
-                  <a:srgbClr val="FFFFFF"/>
-                </a:solidFill>
-                <a:latin typeface="Aptos" pitchFamily="34" charset="0"/>
-                <a:ea typeface="Aptos" pitchFamily="34" charset="-122"/>
-                <a:cs typeface="Aptos" pitchFamily="34" charset="-120"/>
-              </a:rPr>
-              <a:t>14</a:t>
-            </a:r>
-            <a:endParaRPr lang="en-US" sz="1100" dirty="0"/>
-          </a:p>
-        </p:txBody>
-      </p:sp>
-      <p:sp>
-        <p:nvSpPr>
-          <p:cNvPr id="10" name="Text 8"/>
-          <p:cNvSpPr/>
-          <p:nvPr/>
-        </p:nvSpPr>
-        <p:spPr>
-          <a:xfrm>
-            <a:off x="640080" y="621792"/>
             <a:ext cx="10881360" cy="713232"/>
           </a:xfrm>
           <a:prstGeom prst="rect">
@@ -8653,14 +9528,14 @@
       </p:sp>
       <p:sp>
         <p:nvSpPr>
-          <p:cNvPr id="11" name="Text 9"/>
+          <p:cNvPr id="9" name="Text 7"/>
           <p:cNvSpPr/>
           <p:nvPr/>
         </p:nvSpPr>
         <p:spPr>
           <a:xfrm>
             <a:off x="868680" y="1508760"/>
-            <a:ext cx="6537960" cy="4160520"/>
+            <a:ext cx="6309360" cy="4160520"/>
           </a:xfrm>
           <a:prstGeom prst="rect">
             <a:avLst/>
@@ -8719,18 +9594,18 @@
       </p:sp>
       <p:sp>
         <p:nvSpPr>
-          <p:cNvPr id="12" name="Shape 10"/>
-          <p:cNvSpPr/>
-          <p:nvPr/>
-        </p:nvSpPr>
-        <p:spPr>
-          <a:xfrm>
-            <a:off x="7909560" y="1417320"/>
-            <a:ext cx="3154680" cy="1828800"/>
+          <p:cNvPr id="10" name="Shape 8"/>
+          <p:cNvSpPr/>
+          <p:nvPr/>
+        </p:nvSpPr>
+        <p:spPr>
+          <a:xfrm>
+            <a:off x="7635240" y="1325880"/>
+            <a:ext cx="3474720" cy="1325880"/>
           </a:xfrm>
           <a:prstGeom prst="roundRect">
             <a:avLst>
-              <a:gd name="adj" fmla="val 6000"/>
+              <a:gd name="adj" fmla="val 8276"/>
             </a:avLst>
           </a:prstGeom>
           <a:solidFill>
@@ -8746,14 +9621,14 @@
       </p:sp>
       <p:sp>
         <p:nvSpPr>
-          <p:cNvPr id="13" name="Text 11"/>
-          <p:cNvSpPr/>
-          <p:nvPr/>
-        </p:nvSpPr>
-        <p:spPr>
-          <a:xfrm>
-            <a:off x="8074152" y="1563624"/>
-            <a:ext cx="2825496" cy="256032"/>
+          <p:cNvPr id="11" name="Text 9"/>
+          <p:cNvSpPr/>
+          <p:nvPr/>
+        </p:nvSpPr>
+        <p:spPr>
+          <a:xfrm>
+            <a:off x="7799832" y="1472184"/>
+            <a:ext cx="3145536" cy="256032"/>
           </a:xfrm>
           <a:prstGeom prst="rect">
             <a:avLst/>
@@ -8777,7 +9652,7 @@
                 <a:ea typeface="Aptos" pitchFamily="34" charset="-122"/>
                 <a:cs typeface="Aptos" pitchFamily="34" charset="-120"/>
               </a:rPr>
-              <a:t>Key idea</a:t>
+              <a:t>Core concept</a:t>
             </a:r>
             <a:endParaRPr lang="en-US" sz="1300" dirty="0"/>
           </a:p>
@@ -8785,14 +9660,14 @@
       </p:sp>
       <p:sp>
         <p:nvSpPr>
-          <p:cNvPr id="14" name="Text 12"/>
-          <p:cNvSpPr/>
-          <p:nvPr/>
-        </p:nvSpPr>
-        <p:spPr>
-          <a:xfrm>
-            <a:off x="8074152" y="1920240"/>
-            <a:ext cx="2825496" cy="1188720"/>
+          <p:cNvPr id="12" name="Text 10"/>
+          <p:cNvSpPr/>
+          <p:nvPr/>
+        </p:nvSpPr>
+        <p:spPr>
+          <a:xfrm>
+            <a:off x="7799832" y="1828800"/>
+            <a:ext cx="3145536" cy="685800"/>
           </a:xfrm>
           <a:prstGeom prst="rect">
             <a:avLst/>
@@ -8826,18 +9701,159 @@
       </p:sp>
       <p:sp>
         <p:nvSpPr>
-          <p:cNvPr id="15" name="Shape 13"/>
-          <p:cNvSpPr/>
-          <p:nvPr/>
-        </p:nvSpPr>
-        <p:spPr>
-          <a:xfrm>
-            <a:off x="7909560" y="3520440"/>
-            <a:ext cx="3154680" cy="1737360"/>
+          <p:cNvPr id="13" name="Shape 11"/>
+          <p:cNvSpPr/>
+          <p:nvPr/>
+        </p:nvSpPr>
+        <p:spPr>
+          <a:xfrm>
+            <a:off x="7635240" y="2788920"/>
+            <a:ext cx="3474720" cy="1536192"/>
           </a:xfrm>
           <a:prstGeom prst="roundRect">
             <a:avLst>
-              <a:gd name="adj" fmla="val 6316"/>
+              <a:gd name="adj" fmla="val 7143"/>
+            </a:avLst>
+          </a:prstGeom>
+          <a:solidFill>
+            <a:srgbClr val="FFFFFF">
+              <a:alpha val="88000"/>
+            </a:srgbClr>
+          </a:solidFill>
+          <a:ln w="12700">
+            <a:solidFill>
+              <a:srgbClr val="D6E8F2"/>
+            </a:solidFill>
+            <a:prstDash val="solid"/>
+          </a:ln>
+        </p:spPr>
+      </p:sp>
+      <p:sp>
+        <p:nvSpPr>
+          <p:cNvPr id="14" name="Shape 12"/>
+          <p:cNvSpPr/>
+          <p:nvPr/>
+        </p:nvSpPr>
+        <p:spPr>
+          <a:xfrm>
+            <a:off x="8074152" y="3291840"/>
+            <a:ext cx="2596896" cy="749808"/>
+          </a:xfrm>
+          <a:prstGeom prst="rect">
+            <a:avLst/>
+          </a:prstGeom>
+          <a:solidFill>
+            <a:srgbClr val="EAF6F8"/>
+          </a:solidFill>
+          <a:ln w="12700">
+            <a:solidFill>
+              <a:srgbClr val="8ABBD8"/>
+            </a:solidFill>
+            <a:prstDash val="solid"/>
+          </a:ln>
+        </p:spPr>
+      </p:sp>
+      <p:sp>
+        <p:nvSpPr>
+          <p:cNvPr id="15" name="Shape 13"/>
+          <p:cNvSpPr/>
+          <p:nvPr/>
+        </p:nvSpPr>
+        <p:spPr>
+          <a:xfrm>
+            <a:off x="8202168" y="3721608"/>
+            <a:ext cx="2340864" cy="0"/>
+          </a:xfrm>
+          <a:prstGeom prst="line">
+            <a:avLst/>
+          </a:prstGeom>
+          <a:noFill/>
+          <a:ln w="19050">
+            <a:solidFill>
+              <a:srgbClr val="0068B7"/>
+            </a:solidFill>
+            <a:prstDash val="solid"/>
+          </a:ln>
+        </p:spPr>
+      </p:sp>
+      <p:sp>
+        <p:nvSpPr>
+          <p:cNvPr id="16" name="Shape 14"/>
+          <p:cNvSpPr/>
+          <p:nvPr/>
+        </p:nvSpPr>
+        <p:spPr>
+          <a:xfrm>
+            <a:off x="9198864" y="4206240"/>
+            <a:ext cx="347472" cy="347472"/>
+          </a:xfrm>
+          <a:prstGeom prst="ellipse">
+            <a:avLst/>
+          </a:prstGeom>
+          <a:solidFill>
+            <a:srgbClr val="2F8A28"/>
+          </a:solidFill>
+          <a:ln w="12700">
+            <a:solidFill>
+              <a:srgbClr val="2F8A28"/>
+            </a:solidFill>
+            <a:prstDash val="solid"/>
+          </a:ln>
+        </p:spPr>
+      </p:sp>
+      <p:sp>
+        <p:nvSpPr>
+          <p:cNvPr id="17" name="Text 15"/>
+          <p:cNvSpPr/>
+          <p:nvPr/>
+        </p:nvSpPr>
+        <p:spPr>
+          <a:xfrm>
+            <a:off x="7909560" y="3977640"/>
+            <a:ext cx="2926080" cy="182880"/>
+          </a:xfrm>
+          <a:prstGeom prst="rect">
+            <a:avLst/>
+          </a:prstGeom>
+          <a:noFill/>
+          <a:ln/>
+        </p:spPr>
+        <p:txBody>
+          <a:bodyPr wrap="square" lIns="0" tIns="0" rIns="0" bIns="0" rtlCol="0" anchor="ctr"/>
+          <a:lstStyle/>
+          <a:p>
+            <a:pPr algn="ctr" indent="0" marL="0">
+              <a:buNone/>
+            </a:pPr>
+            <a:r>
+              <a:rPr lang="en-US" sz="1000" dirty="0">
+                <a:solidFill>
+                  <a:srgbClr val="003A63"/>
+                </a:solidFill>
+                <a:latin typeface="Aptos" pitchFamily="34" charset="0"/>
+                <a:ea typeface="Aptos" pitchFamily="34" charset="-122"/>
+                <a:cs typeface="Aptos" pitchFamily="34" charset="-120"/>
+              </a:rPr>
+              <a:t>Concept to action</a:t>
+            </a:r>
+            <a:endParaRPr lang="en-US" sz="1000" dirty="0"/>
+          </a:p>
+        </p:txBody>
+      </p:sp>
+      <p:sp>
+        <p:nvSpPr>
+          <p:cNvPr id="18" name="Shape 16"/>
+          <p:cNvSpPr/>
+          <p:nvPr/>
+        </p:nvSpPr>
+        <p:spPr>
+          <a:xfrm>
+            <a:off x="7635240" y="4498848"/>
+            <a:ext cx="3474720" cy="1143000"/>
+          </a:xfrm>
+          <a:prstGeom prst="roundRect">
+            <a:avLst>
+              <a:gd name="adj" fmla="val 9600"/>
             </a:avLst>
           </a:prstGeom>
           <a:solidFill>
@@ -8853,14 +9869,14 @@
       </p:sp>
       <p:sp>
         <p:nvSpPr>
-          <p:cNvPr id="16" name="Text 14"/>
-          <p:cNvSpPr/>
-          <p:nvPr/>
-        </p:nvSpPr>
-        <p:spPr>
-          <a:xfrm>
-            <a:off x="8074152" y="3666744"/>
-            <a:ext cx="2825496" cy="256032"/>
+          <p:cNvPr id="19" name="Text 17"/>
+          <p:cNvSpPr/>
+          <p:nvPr/>
+        </p:nvSpPr>
+        <p:spPr>
+          <a:xfrm>
+            <a:off x="7799832" y="4645152"/>
+            <a:ext cx="3145536" cy="256032"/>
           </a:xfrm>
           <a:prstGeom prst="rect">
             <a:avLst/>
@@ -8884,7 +9900,7 @@
                 <a:ea typeface="Aptos" pitchFamily="34" charset="-122"/>
                 <a:cs typeface="Aptos" pitchFamily="34" charset="-120"/>
               </a:rPr>
-              <a:t>Use this for</a:t>
+              <a:t>Apply it</a:t>
             </a:r>
             <a:endParaRPr lang="en-US" sz="1300" dirty="0"/>
           </a:p>
@@ -8892,14 +9908,14 @@
       </p:sp>
       <p:sp>
         <p:nvSpPr>
-          <p:cNvPr id="17" name="Text 15"/>
-          <p:cNvSpPr/>
-          <p:nvPr/>
-        </p:nvSpPr>
-        <p:spPr>
-          <a:xfrm>
-            <a:off x="8074152" y="4023360"/>
-            <a:ext cx="2825496" cy="1097280"/>
+          <p:cNvPr id="20" name="Text 18"/>
+          <p:cNvSpPr/>
+          <p:nvPr/>
+        </p:nvSpPr>
+        <p:spPr>
+          <a:xfrm>
+            <a:off x="7799832" y="5001768"/>
+            <a:ext cx="3145536" cy="502920"/>
           </a:xfrm>
           <a:prstGeom prst="rect">
             <a:avLst/>
@@ -8925,7 +9941,7 @@
                 <a:ea typeface="Aptos" pitchFamily="34" charset="-122"/>
                 <a:cs typeface="Aptos" pitchFamily="34" charset="-120"/>
               </a:rPr>
-              <a:t>Connect the concept to public health decisions, safeguards, documentation, or implementation work.</a:t>
+              <a:t>Connect the concept to public health purpose, responsible use, required safeguards, documentation, and the next action a department should take.</a:t>
             </a:r>
             <a:endParaRPr lang="en-US" sz="1550" dirty="0"/>
           </a:p>
@@ -9099,8 +10115,8 @@
         </p:nvSpPr>
         <p:spPr>
           <a:xfrm>
-            <a:off x="9966960" y="6537960"/>
-            <a:ext cx="1645920" cy="201168"/>
+            <a:off x="9646920" y="6537960"/>
+            <a:ext cx="1965960" cy="201168"/>
           </a:xfrm>
           <a:prstGeom prst="rect">
             <a:avLst/>
@@ -9124,7 +10140,7 @@
                 <a:ea typeface="Aptos" pitchFamily="34" charset="-122"/>
                 <a:cs typeface="Aptos" pitchFamily="34" charset="-120"/>
               </a:rPr>
-              <a:t>Â© Paula Soper</a:t>
+              <a:t>Copyright Paula Soper</a:t>
             </a:r>
             <a:endParaRPr lang="en-US" sz="800" dirty="0"/>
           </a:p>
@@ -9487,46 +10503,7 @@
       </p:sp>
       <p:sp>
         <p:nvSpPr>
-          <p:cNvPr id="15" name="Text 13"/>
-          <p:cNvSpPr/>
-          <p:nvPr/>
-        </p:nvSpPr>
-        <p:spPr>
-          <a:xfrm>
-            <a:off x="8695944" y="3941064"/>
-            <a:ext cx="201168" cy="256032"/>
-          </a:xfrm>
-          <a:prstGeom prst="rect">
-            <a:avLst/>
-          </a:prstGeom>
-          <a:noFill/>
-          <a:ln/>
-        </p:spPr>
-        <p:txBody>
-          <a:bodyPr wrap="square" lIns="0" tIns="0" rIns="0" bIns="0" rtlCol="0" anchor="ctr"/>
-          <a:lstStyle/>
-          <a:p>
-            <a:pPr algn="ctr" indent="0" marL="0">
-              <a:buNone/>
-            </a:pPr>
-            <a:r>
-              <a:rPr lang="en-US" sz="1800" b="1" dirty="0">
-                <a:solidFill>
-                  <a:srgbClr val="0068B7"/>
-                </a:solidFill>
-                <a:latin typeface="Aptos" pitchFamily="34" charset="0"/>
-                <a:ea typeface="Aptos" pitchFamily="34" charset="-122"/>
-                <a:cs typeface="Aptos" pitchFamily="34" charset="-120"/>
-              </a:rPr>
-              <a:t>â†’</a:t>
-            </a:r>
-            <a:endParaRPr lang="en-US" sz="1800" dirty="0"/>
-          </a:p>
-        </p:txBody>
-      </p:sp>
-      <p:sp>
-        <p:nvSpPr>
-          <p:cNvPr id="16" name="Shape 14"/>
+          <p:cNvPr id="15" name="Shape 13"/>
           <p:cNvSpPr/>
           <p:nvPr/>
         </p:nvSpPr>
@@ -9553,7 +10530,7 @@
       </p:sp>
       <p:sp>
         <p:nvSpPr>
-          <p:cNvPr id="17" name="Text 15"/>
+          <p:cNvPr id="16" name="Text 14"/>
           <p:cNvSpPr/>
           <p:nvPr/>
         </p:nvSpPr>
@@ -9594,46 +10571,7 @@
       </p:sp>
       <p:sp>
         <p:nvSpPr>
-          <p:cNvPr id="18" name="Text 16"/>
-          <p:cNvSpPr/>
-          <p:nvPr/>
-        </p:nvSpPr>
-        <p:spPr>
-          <a:xfrm>
-            <a:off x="9985248" y="3941064"/>
-            <a:ext cx="201168" cy="256032"/>
-          </a:xfrm>
-          <a:prstGeom prst="rect">
-            <a:avLst/>
-          </a:prstGeom>
-          <a:noFill/>
-          <a:ln/>
-        </p:spPr>
-        <p:txBody>
-          <a:bodyPr wrap="square" lIns="0" tIns="0" rIns="0" bIns="0" rtlCol="0" anchor="ctr"/>
-          <a:lstStyle/>
-          <a:p>
-            <a:pPr algn="ctr" indent="0" marL="0">
-              <a:buNone/>
-            </a:pPr>
-            <a:r>
-              <a:rPr lang="en-US" sz="1800" b="1" dirty="0">
-                <a:solidFill>
-                  <a:srgbClr val="0068B7"/>
-                </a:solidFill>
-                <a:latin typeface="Aptos" pitchFamily="34" charset="0"/>
-                <a:ea typeface="Aptos" pitchFamily="34" charset="-122"/>
-                <a:cs typeface="Aptos" pitchFamily="34" charset="-120"/>
-              </a:rPr>
-              <a:t>â†’</a:t>
-            </a:r>
-            <a:endParaRPr lang="en-US" sz="1800" dirty="0"/>
-          </a:p>
-        </p:txBody>
-      </p:sp>
-      <p:sp>
-        <p:nvSpPr>
-          <p:cNvPr id="19" name="Shape 17"/>
+          <p:cNvPr id="17" name="Shape 15"/>
           <p:cNvSpPr/>
           <p:nvPr/>
         </p:nvSpPr>
@@ -9660,7 +10598,7 @@
       </p:sp>
       <p:sp>
         <p:nvSpPr>
-          <p:cNvPr id="20" name="Text 18"/>
+          <p:cNvPr id="18" name="Text 16"/>
           <p:cNvSpPr/>
           <p:nvPr/>
         </p:nvSpPr>
@@ -9867,8 +10805,8 @@
         </p:nvSpPr>
         <p:spPr>
           <a:xfrm>
-            <a:off x="9966960" y="6537960"/>
-            <a:ext cx="1645920" cy="201168"/>
+            <a:off x="9646920" y="6537960"/>
+            <a:ext cx="1965960" cy="201168"/>
           </a:xfrm>
           <a:prstGeom prst="rect">
             <a:avLst/>
@@ -9892,7 +10830,7 @@
                 <a:ea typeface="Aptos" pitchFamily="34" charset="-122"/>
                 <a:cs typeface="Aptos" pitchFamily="34" charset="-120"/>
               </a:rPr>
-              <a:t>Â© Paula Soper</a:t>
+              <a:t>Copyright Paula Soper</a:t>
             </a:r>
             <a:endParaRPr lang="en-US" sz="800" dirty="0"/>
           </a:p>
@@ -9987,7 +10925,7 @@
         <p:spPr>
           <a:xfrm>
             <a:off x="868680" y="1508760"/>
-            <a:ext cx="6537960" cy="4160520"/>
+            <a:ext cx="6309360" cy="4160520"/>
           </a:xfrm>
           <a:prstGeom prst="rect">
             <a:avLst/>
@@ -10038,12 +10976,12 @@
         </p:nvSpPr>
         <p:spPr>
           <a:xfrm>
-            <a:off x="7909560" y="1417320"/>
-            <a:ext cx="3154680" cy="1828800"/>
+            <a:off x="7635240" y="1325880"/>
+            <a:ext cx="3474720" cy="1325880"/>
           </a:xfrm>
           <a:prstGeom prst="roundRect">
             <a:avLst>
-              <a:gd name="adj" fmla="val 6000"/>
+              <a:gd name="adj" fmla="val 8276"/>
             </a:avLst>
           </a:prstGeom>
           <a:solidFill>
@@ -10065,8 +11003,8 @@
         </p:nvSpPr>
         <p:spPr>
           <a:xfrm>
-            <a:off x="8074152" y="1563624"/>
-            <a:ext cx="2825496" cy="256032"/>
+            <a:off x="7799832" y="1472184"/>
+            <a:ext cx="3145536" cy="256032"/>
           </a:xfrm>
           <a:prstGeom prst="rect">
             <a:avLst/>
@@ -10090,7 +11028,7 @@
                 <a:ea typeface="Aptos" pitchFamily="34" charset="-122"/>
                 <a:cs typeface="Aptos" pitchFamily="34" charset="-120"/>
               </a:rPr>
-              <a:t>Key idea</a:t>
+              <a:t>Core concept</a:t>
             </a:r>
             <a:endParaRPr lang="en-US" sz="1300" dirty="0"/>
           </a:p>
@@ -10104,8 +11042,8 @@
         </p:nvSpPr>
         <p:spPr>
           <a:xfrm>
-            <a:off x="8074152" y="1920240"/>
-            <a:ext cx="2825496" cy="1188720"/>
+            <a:off x="7799832" y="1828800"/>
+            <a:ext cx="3145536" cy="685800"/>
           </a:xfrm>
           <a:prstGeom prst="rect">
             <a:avLst/>
@@ -10145,12 +11083,153 @@
         </p:nvSpPr>
         <p:spPr>
           <a:xfrm>
-            <a:off x="7909560" y="3520440"/>
-            <a:ext cx="3154680" cy="1737360"/>
+            <a:off x="7635240" y="2788920"/>
+            <a:ext cx="3474720" cy="1536192"/>
           </a:xfrm>
           <a:prstGeom prst="roundRect">
             <a:avLst>
-              <a:gd name="adj" fmla="val 6316"/>
+              <a:gd name="adj" fmla="val 7143"/>
+            </a:avLst>
+          </a:prstGeom>
+          <a:solidFill>
+            <a:srgbClr val="FFFFFF">
+              <a:alpha val="88000"/>
+            </a:srgbClr>
+          </a:solidFill>
+          <a:ln w="12700">
+            <a:solidFill>
+              <a:srgbClr val="D6E8F2"/>
+            </a:solidFill>
+            <a:prstDash val="solid"/>
+          </a:ln>
+        </p:spPr>
+      </p:sp>
+      <p:sp>
+        <p:nvSpPr>
+          <p:cNvPr id="14" name="Shape 12"/>
+          <p:cNvSpPr/>
+          <p:nvPr/>
+        </p:nvSpPr>
+        <p:spPr>
+          <a:xfrm>
+            <a:off x="8074152" y="3291840"/>
+            <a:ext cx="2596896" cy="749808"/>
+          </a:xfrm>
+          <a:prstGeom prst="rect">
+            <a:avLst/>
+          </a:prstGeom>
+          <a:solidFill>
+            <a:srgbClr val="EAF6F8"/>
+          </a:solidFill>
+          <a:ln w="12700">
+            <a:solidFill>
+              <a:srgbClr val="8ABBD8"/>
+            </a:solidFill>
+            <a:prstDash val="solid"/>
+          </a:ln>
+        </p:spPr>
+      </p:sp>
+      <p:sp>
+        <p:nvSpPr>
+          <p:cNvPr id="15" name="Shape 13"/>
+          <p:cNvSpPr/>
+          <p:nvPr/>
+        </p:nvSpPr>
+        <p:spPr>
+          <a:xfrm>
+            <a:off x="8202168" y="3721608"/>
+            <a:ext cx="2340864" cy="0"/>
+          </a:xfrm>
+          <a:prstGeom prst="line">
+            <a:avLst/>
+          </a:prstGeom>
+          <a:noFill/>
+          <a:ln w="19050">
+            <a:solidFill>
+              <a:srgbClr val="0068B7"/>
+            </a:solidFill>
+            <a:prstDash val="solid"/>
+          </a:ln>
+        </p:spPr>
+      </p:sp>
+      <p:sp>
+        <p:nvSpPr>
+          <p:cNvPr id="16" name="Shape 14"/>
+          <p:cNvSpPr/>
+          <p:nvPr/>
+        </p:nvSpPr>
+        <p:spPr>
+          <a:xfrm>
+            <a:off x="9198864" y="4206240"/>
+            <a:ext cx="347472" cy="347472"/>
+          </a:xfrm>
+          <a:prstGeom prst="ellipse">
+            <a:avLst/>
+          </a:prstGeom>
+          <a:solidFill>
+            <a:srgbClr val="2F8A28"/>
+          </a:solidFill>
+          <a:ln w="12700">
+            <a:solidFill>
+              <a:srgbClr val="2F8A28"/>
+            </a:solidFill>
+            <a:prstDash val="solid"/>
+          </a:ln>
+        </p:spPr>
+      </p:sp>
+      <p:sp>
+        <p:nvSpPr>
+          <p:cNvPr id="17" name="Text 15"/>
+          <p:cNvSpPr/>
+          <p:nvPr/>
+        </p:nvSpPr>
+        <p:spPr>
+          <a:xfrm>
+            <a:off x="7909560" y="3977640"/>
+            <a:ext cx="2926080" cy="182880"/>
+          </a:xfrm>
+          <a:prstGeom prst="rect">
+            <a:avLst/>
+          </a:prstGeom>
+          <a:noFill/>
+          <a:ln/>
+        </p:spPr>
+        <p:txBody>
+          <a:bodyPr wrap="square" lIns="0" tIns="0" rIns="0" bIns="0" rtlCol="0" anchor="ctr"/>
+          <a:lstStyle/>
+          <a:p>
+            <a:pPr algn="ctr" indent="0" marL="0">
+              <a:buNone/>
+            </a:pPr>
+            <a:r>
+              <a:rPr lang="en-US" sz="1000" dirty="0">
+                <a:solidFill>
+                  <a:srgbClr val="003A63"/>
+                </a:solidFill>
+                <a:latin typeface="Aptos" pitchFamily="34" charset="0"/>
+                <a:ea typeface="Aptos" pitchFamily="34" charset="-122"/>
+                <a:cs typeface="Aptos" pitchFamily="34" charset="-120"/>
+              </a:rPr>
+              <a:t>Concept to action</a:t>
+            </a:r>
+            <a:endParaRPr lang="en-US" sz="1000" dirty="0"/>
+          </a:p>
+        </p:txBody>
+      </p:sp>
+      <p:sp>
+        <p:nvSpPr>
+          <p:cNvPr id="18" name="Shape 16"/>
+          <p:cNvSpPr/>
+          <p:nvPr/>
+        </p:nvSpPr>
+        <p:spPr>
+          <a:xfrm>
+            <a:off x="7635240" y="4498848"/>
+            <a:ext cx="3474720" cy="1143000"/>
+          </a:xfrm>
+          <a:prstGeom prst="roundRect">
+            <a:avLst>
+              <a:gd name="adj" fmla="val 9600"/>
             </a:avLst>
           </a:prstGeom>
           <a:solidFill>
@@ -10166,14 +11245,14 @@
       </p:sp>
       <p:sp>
         <p:nvSpPr>
-          <p:cNvPr id="14" name="Text 12"/>
-          <p:cNvSpPr/>
-          <p:nvPr/>
-        </p:nvSpPr>
-        <p:spPr>
-          <a:xfrm>
-            <a:off x="8074152" y="3666744"/>
-            <a:ext cx="2825496" cy="256032"/>
+          <p:cNvPr id="19" name="Text 17"/>
+          <p:cNvSpPr/>
+          <p:nvPr/>
+        </p:nvSpPr>
+        <p:spPr>
+          <a:xfrm>
+            <a:off x="7799832" y="4645152"/>
+            <a:ext cx="3145536" cy="256032"/>
           </a:xfrm>
           <a:prstGeom prst="rect">
             <a:avLst/>
@@ -10197,7 +11276,7 @@
                 <a:ea typeface="Aptos" pitchFamily="34" charset="-122"/>
                 <a:cs typeface="Aptos" pitchFamily="34" charset="-120"/>
               </a:rPr>
-              <a:t>Use this for</a:t>
+              <a:t>Apply it</a:t>
             </a:r>
             <a:endParaRPr lang="en-US" sz="1300" dirty="0"/>
           </a:p>
@@ -10205,14 +11284,14 @@
       </p:sp>
       <p:sp>
         <p:nvSpPr>
-          <p:cNvPr id="15" name="Text 13"/>
-          <p:cNvSpPr/>
-          <p:nvPr/>
-        </p:nvSpPr>
-        <p:spPr>
-          <a:xfrm>
-            <a:off x="8074152" y="4023360"/>
-            <a:ext cx="2825496" cy="1097280"/>
+          <p:cNvPr id="20" name="Text 18"/>
+          <p:cNvSpPr/>
+          <p:nvPr/>
+        </p:nvSpPr>
+        <p:spPr>
+          <a:xfrm>
+            <a:off x="7799832" y="5001768"/>
+            <a:ext cx="3145536" cy="502920"/>
           </a:xfrm>
           <a:prstGeom prst="rect">
             <a:avLst/>
@@ -10238,7 +11317,7 @@
                 <a:ea typeface="Aptos" pitchFamily="34" charset="-122"/>
                 <a:cs typeface="Aptos" pitchFamily="34" charset="-120"/>
               </a:rPr>
-              <a:t>Connect the concept to public health decisions, safeguards, documentation, or implementation work.</a:t>
+              <a:t>Connect the concept to public health purpose, responsible use, required safeguards, documentation, and the next action a department should take.</a:t>
             </a:r>
             <a:endParaRPr lang="en-US" sz="1550" dirty="0"/>
           </a:p>
@@ -10412,8 +11491,8 @@
         </p:nvSpPr>
         <p:spPr>
           <a:xfrm>
-            <a:off x="9966960" y="6537960"/>
-            <a:ext cx="1645920" cy="201168"/>
+            <a:off x="9646920" y="6537960"/>
+            <a:ext cx="1965960" cy="201168"/>
           </a:xfrm>
           <a:prstGeom prst="rect">
             <a:avLst/>
@@ -10437,7 +11516,7 @@
                 <a:ea typeface="Aptos" pitchFamily="34" charset="-122"/>
                 <a:cs typeface="Aptos" pitchFamily="34" charset="-120"/>
               </a:rPr>
-              <a:t>Â© Paula Soper</a:t>
+              <a:t>Copyright Paula Soper</a:t>
             </a:r>
             <a:endParaRPr lang="en-US" sz="800" dirty="0"/>
           </a:p>
@@ -10780,46 +11859,7 @@
       </p:sp>
       <p:sp>
         <p:nvSpPr>
-          <p:cNvPr id="15" name="Text 13"/>
-          <p:cNvSpPr/>
-          <p:nvPr/>
-        </p:nvSpPr>
-        <p:spPr>
-          <a:xfrm>
-            <a:off x="8817864" y="4187952"/>
-            <a:ext cx="201168" cy="256032"/>
-          </a:xfrm>
-          <a:prstGeom prst="rect">
-            <a:avLst/>
-          </a:prstGeom>
-          <a:noFill/>
-          <a:ln/>
-        </p:spPr>
-        <p:txBody>
-          <a:bodyPr wrap="square" lIns="0" tIns="0" rIns="0" bIns="0" rtlCol="0" anchor="ctr"/>
-          <a:lstStyle/>
-          <a:p>
-            <a:pPr algn="ctr" indent="0" marL="0">
-              <a:buNone/>
-            </a:pPr>
-            <a:r>
-              <a:rPr lang="en-US" sz="1800" b="1" dirty="0">
-                <a:solidFill>
-                  <a:srgbClr val="0068B7"/>
-                </a:solidFill>
-                <a:latin typeface="Aptos" pitchFamily="34" charset="0"/>
-                <a:ea typeface="Aptos" pitchFamily="34" charset="-122"/>
-                <a:cs typeface="Aptos" pitchFamily="34" charset="-120"/>
-              </a:rPr>
-              <a:t>â†’</a:t>
-            </a:r>
-            <a:endParaRPr lang="en-US" sz="1800" dirty="0"/>
-          </a:p>
-        </p:txBody>
-      </p:sp>
-      <p:sp>
-        <p:nvSpPr>
-          <p:cNvPr id="16" name="Shape 14"/>
+          <p:cNvPr id="15" name="Shape 13"/>
           <p:cNvSpPr/>
           <p:nvPr/>
         </p:nvSpPr>
@@ -10846,7 +11886,7 @@
       </p:sp>
       <p:sp>
         <p:nvSpPr>
-          <p:cNvPr id="17" name="Text 15"/>
+          <p:cNvPr id="16" name="Text 14"/>
           <p:cNvSpPr/>
           <p:nvPr/>
         </p:nvSpPr>
@@ -10887,46 +11927,7 @@
       </p:sp>
       <p:sp>
         <p:nvSpPr>
-          <p:cNvPr id="18" name="Text 16"/>
-          <p:cNvSpPr/>
-          <p:nvPr/>
-        </p:nvSpPr>
-        <p:spPr>
-          <a:xfrm>
-            <a:off x="10046208" y="4187952"/>
-            <a:ext cx="201168" cy="256032"/>
-          </a:xfrm>
-          <a:prstGeom prst="rect">
-            <a:avLst/>
-          </a:prstGeom>
-          <a:noFill/>
-          <a:ln/>
-        </p:spPr>
-        <p:txBody>
-          <a:bodyPr wrap="square" lIns="0" tIns="0" rIns="0" bIns="0" rtlCol="0" anchor="ctr"/>
-          <a:lstStyle/>
-          <a:p>
-            <a:pPr algn="ctr" indent="0" marL="0">
-              <a:buNone/>
-            </a:pPr>
-            <a:r>
-              <a:rPr lang="en-US" sz="1800" b="1" dirty="0">
-                <a:solidFill>
-                  <a:srgbClr val="0068B7"/>
-                </a:solidFill>
-                <a:latin typeface="Aptos" pitchFamily="34" charset="0"/>
-                <a:ea typeface="Aptos" pitchFamily="34" charset="-122"/>
-                <a:cs typeface="Aptos" pitchFamily="34" charset="-120"/>
-              </a:rPr>
-              <a:t>â†’</a:t>
-            </a:r>
-            <a:endParaRPr lang="en-US" sz="1800" dirty="0"/>
-          </a:p>
-        </p:txBody>
-      </p:sp>
-      <p:sp>
-        <p:nvSpPr>
-          <p:cNvPr id="19" name="Shape 17"/>
+          <p:cNvPr id="17" name="Shape 15"/>
           <p:cNvSpPr/>
           <p:nvPr/>
         </p:nvSpPr>
@@ -10953,7 +11954,7 @@
       </p:sp>
       <p:sp>
         <p:nvSpPr>
-          <p:cNvPr id="20" name="Text 18"/>
+          <p:cNvPr id="18" name="Text 16"/>
           <p:cNvSpPr/>
           <p:nvPr/>
         </p:nvSpPr>
@@ -11160,8 +12161,8 @@
         </p:nvSpPr>
         <p:spPr>
           <a:xfrm>
-            <a:off x="9966960" y="6537960"/>
-            <a:ext cx="1645920" cy="201168"/>
+            <a:off x="9646920" y="6537960"/>
+            <a:ext cx="1965960" cy="201168"/>
           </a:xfrm>
           <a:prstGeom prst="rect">
             <a:avLst/>
@@ -11185,7 +12186,7 @@
                 <a:ea typeface="Aptos" pitchFamily="34" charset="-122"/>
                 <a:cs typeface="Aptos" pitchFamily="34" charset="-120"/>
               </a:rPr>
-              <a:t>Â© Paula Soper</a:t>
+              <a:t>Copyright Paula Soper</a:t>
             </a:r>
             <a:endParaRPr lang="en-US" sz="800" dirty="0"/>
           </a:p>
@@ -11528,46 +12529,7 @@
       </p:sp>
       <p:sp>
         <p:nvSpPr>
-          <p:cNvPr id="15" name="Text 13"/>
-          <p:cNvSpPr/>
-          <p:nvPr/>
-        </p:nvSpPr>
-        <p:spPr>
-          <a:xfrm>
-            <a:off x="8817864" y="4187952"/>
-            <a:ext cx="201168" cy="256032"/>
-          </a:xfrm>
-          <a:prstGeom prst="rect">
-            <a:avLst/>
-          </a:prstGeom>
-          <a:noFill/>
-          <a:ln/>
-        </p:spPr>
-        <p:txBody>
-          <a:bodyPr wrap="square" lIns="0" tIns="0" rIns="0" bIns="0" rtlCol="0" anchor="ctr"/>
-          <a:lstStyle/>
-          <a:p>
-            <a:pPr algn="ctr" indent="0" marL="0">
-              <a:buNone/>
-            </a:pPr>
-            <a:r>
-              <a:rPr lang="en-US" sz="1800" b="1" dirty="0">
-                <a:solidFill>
-                  <a:srgbClr val="0068B7"/>
-                </a:solidFill>
-                <a:latin typeface="Aptos" pitchFamily="34" charset="0"/>
-                <a:ea typeface="Aptos" pitchFamily="34" charset="-122"/>
-                <a:cs typeface="Aptos" pitchFamily="34" charset="-120"/>
-              </a:rPr>
-              <a:t>â†’</a:t>
-            </a:r>
-            <a:endParaRPr lang="en-US" sz="1800" dirty="0"/>
-          </a:p>
-        </p:txBody>
-      </p:sp>
-      <p:sp>
-        <p:nvSpPr>
-          <p:cNvPr id="16" name="Shape 14"/>
+          <p:cNvPr id="15" name="Shape 13"/>
           <p:cNvSpPr/>
           <p:nvPr/>
         </p:nvSpPr>
@@ -11594,7 +12556,7 @@
       </p:sp>
       <p:sp>
         <p:nvSpPr>
-          <p:cNvPr id="17" name="Text 15"/>
+          <p:cNvPr id="16" name="Text 14"/>
           <p:cNvSpPr/>
           <p:nvPr/>
         </p:nvSpPr>
@@ -11635,46 +12597,7 @@
       </p:sp>
       <p:sp>
         <p:nvSpPr>
-          <p:cNvPr id="18" name="Text 16"/>
-          <p:cNvSpPr/>
-          <p:nvPr/>
-        </p:nvSpPr>
-        <p:spPr>
-          <a:xfrm>
-            <a:off x="10046208" y="4187952"/>
-            <a:ext cx="201168" cy="256032"/>
-          </a:xfrm>
-          <a:prstGeom prst="rect">
-            <a:avLst/>
-          </a:prstGeom>
-          <a:noFill/>
-          <a:ln/>
-        </p:spPr>
-        <p:txBody>
-          <a:bodyPr wrap="square" lIns="0" tIns="0" rIns="0" bIns="0" rtlCol="0" anchor="ctr"/>
-          <a:lstStyle/>
-          <a:p>
-            <a:pPr algn="ctr" indent="0" marL="0">
-              <a:buNone/>
-            </a:pPr>
-            <a:r>
-              <a:rPr lang="en-US" sz="1800" b="1" dirty="0">
-                <a:solidFill>
-                  <a:srgbClr val="0068B7"/>
-                </a:solidFill>
-                <a:latin typeface="Aptos" pitchFamily="34" charset="0"/>
-                <a:ea typeface="Aptos" pitchFamily="34" charset="-122"/>
-                <a:cs typeface="Aptos" pitchFamily="34" charset="-120"/>
-              </a:rPr>
-              <a:t>â†’</a:t>
-            </a:r>
-            <a:endParaRPr lang="en-US" sz="1800" dirty="0"/>
-          </a:p>
-        </p:txBody>
-      </p:sp>
-      <p:sp>
-        <p:nvSpPr>
-          <p:cNvPr id="19" name="Shape 17"/>
+          <p:cNvPr id="17" name="Shape 15"/>
           <p:cNvSpPr/>
           <p:nvPr/>
         </p:nvSpPr>
@@ -11701,7 +12624,7 @@
       </p:sp>
       <p:sp>
         <p:nvSpPr>
-          <p:cNvPr id="20" name="Text 18"/>
+          <p:cNvPr id="18" name="Text 16"/>
           <p:cNvSpPr/>
           <p:nvPr/>
         </p:nvSpPr>
@@ -11908,8 +12831,8 @@
         </p:nvSpPr>
         <p:spPr>
           <a:xfrm>
-            <a:off x="9966960" y="6537960"/>
-            <a:ext cx="1645920" cy="201168"/>
+            <a:off x="9646920" y="6537960"/>
+            <a:ext cx="1965960" cy="201168"/>
           </a:xfrm>
           <a:prstGeom prst="rect">
             <a:avLst/>
@@ -11933,7 +12856,7 @@
                 <a:ea typeface="Aptos" pitchFamily="34" charset="-122"/>
                 <a:cs typeface="Aptos" pitchFamily="34" charset="-120"/>
               </a:rPr>
-              <a:t>Â© Paula Soper</a:t>
+              <a:t>Copyright Paula Soper</a:t>
             </a:r>
             <a:endParaRPr lang="en-US" sz="800" dirty="0"/>
           </a:p>
@@ -11980,77 +12903,13 @@
       </p:sp>
       <p:sp>
         <p:nvSpPr>
-          <p:cNvPr id="8" name="Shape 6"/>
+          <p:cNvPr id="8" name="Text 6"/>
           <p:cNvSpPr/>
           <p:nvPr/>
         </p:nvSpPr>
         <p:spPr>
           <a:xfrm>
             <a:off x="640080" y="658368"/>
-            <a:ext cx="420624" cy="420624"/>
-          </a:xfrm>
-          <a:prstGeom prst="ellipse">
-            <a:avLst/>
-          </a:prstGeom>
-          <a:solidFill>
-            <a:srgbClr val="0068B7"/>
-          </a:solidFill>
-          <a:ln w="12700">
-            <a:solidFill>
-              <a:srgbClr val="0068B7"/>
-            </a:solidFill>
-            <a:prstDash val="solid"/>
-          </a:ln>
-        </p:spPr>
-      </p:sp>
-      <p:sp>
-        <p:nvSpPr>
-          <p:cNvPr id="9" name="Text 7"/>
-          <p:cNvSpPr/>
-          <p:nvPr/>
-        </p:nvSpPr>
-        <p:spPr>
-          <a:xfrm>
-            <a:off x="640080" y="731520"/>
-            <a:ext cx="420624" cy="164592"/>
-          </a:xfrm>
-          <a:prstGeom prst="rect">
-            <a:avLst/>
-          </a:prstGeom>
-          <a:noFill/>
-          <a:ln/>
-        </p:spPr>
-        <p:txBody>
-          <a:bodyPr wrap="square" lIns="0" tIns="0" rIns="0" bIns="0" rtlCol="0" anchor="ctr"/>
-          <a:lstStyle/>
-          <a:p>
-            <a:pPr algn="ctr" indent="0" marL="0">
-              <a:buNone/>
-            </a:pPr>
-            <a:r>
-              <a:rPr lang="en-US" sz="1100" b="1" dirty="0">
-                <a:solidFill>
-                  <a:srgbClr val="FFFFFF"/>
-                </a:solidFill>
-                <a:latin typeface="Aptos" pitchFamily="34" charset="0"/>
-                <a:ea typeface="Aptos" pitchFamily="34" charset="-122"/>
-                <a:cs typeface="Aptos" pitchFamily="34" charset="-120"/>
-              </a:rPr>
-              <a:t>1</a:t>
-            </a:r>
-            <a:endParaRPr lang="en-US" sz="1100" dirty="0"/>
-          </a:p>
-        </p:txBody>
-      </p:sp>
-      <p:sp>
-        <p:nvSpPr>
-          <p:cNvPr id="10" name="Text 8"/>
-          <p:cNvSpPr/>
-          <p:nvPr/>
-        </p:nvSpPr>
-        <p:spPr>
-          <a:xfrm>
-            <a:off x="640080" y="621792"/>
             <a:ext cx="10881360" cy="713232"/>
           </a:xfrm>
           <a:prstGeom prst="rect">
@@ -12085,14 +12944,14 @@
       </p:sp>
       <p:sp>
         <p:nvSpPr>
-          <p:cNvPr id="11" name="Text 9"/>
+          <p:cNvPr id="9" name="Text 7"/>
           <p:cNvSpPr/>
           <p:nvPr/>
         </p:nvSpPr>
         <p:spPr>
           <a:xfrm>
             <a:off x="868680" y="1508760"/>
-            <a:ext cx="6537960" cy="4160520"/>
+            <a:ext cx="6309360" cy="4160520"/>
           </a:xfrm>
           <a:prstGeom prst="rect">
             <a:avLst/>
@@ -12151,18 +13010,18 @@
       </p:sp>
       <p:sp>
         <p:nvSpPr>
-          <p:cNvPr id="12" name="Shape 10"/>
-          <p:cNvSpPr/>
-          <p:nvPr/>
-        </p:nvSpPr>
-        <p:spPr>
-          <a:xfrm>
-            <a:off x="7909560" y="1417320"/>
-            <a:ext cx="3154680" cy="1828800"/>
+          <p:cNvPr id="10" name="Shape 8"/>
+          <p:cNvSpPr/>
+          <p:nvPr/>
+        </p:nvSpPr>
+        <p:spPr>
+          <a:xfrm>
+            <a:off x="7635240" y="1325880"/>
+            <a:ext cx="3474720" cy="1325880"/>
           </a:xfrm>
           <a:prstGeom prst="roundRect">
             <a:avLst>
-              <a:gd name="adj" fmla="val 6000"/>
+              <a:gd name="adj" fmla="val 8276"/>
             </a:avLst>
           </a:prstGeom>
           <a:solidFill>
@@ -12178,14 +13037,14 @@
       </p:sp>
       <p:sp>
         <p:nvSpPr>
-          <p:cNvPr id="13" name="Text 11"/>
-          <p:cNvSpPr/>
-          <p:nvPr/>
-        </p:nvSpPr>
-        <p:spPr>
-          <a:xfrm>
-            <a:off x="8074152" y="1563624"/>
-            <a:ext cx="2825496" cy="256032"/>
+          <p:cNvPr id="11" name="Text 9"/>
+          <p:cNvSpPr/>
+          <p:nvPr/>
+        </p:nvSpPr>
+        <p:spPr>
+          <a:xfrm>
+            <a:off x="7799832" y="1472184"/>
+            <a:ext cx="3145536" cy="256032"/>
           </a:xfrm>
           <a:prstGeom prst="rect">
             <a:avLst/>
@@ -12209,7 +13068,7 @@
                 <a:ea typeface="Aptos" pitchFamily="34" charset="-122"/>
                 <a:cs typeface="Aptos" pitchFamily="34" charset="-120"/>
               </a:rPr>
-              <a:t>Key idea</a:t>
+              <a:t>Practice focus</a:t>
             </a:r>
             <a:endParaRPr lang="en-US" sz="1300" dirty="0"/>
           </a:p>
@@ -12217,14 +13076,14 @@
       </p:sp>
       <p:sp>
         <p:nvSpPr>
-          <p:cNvPr id="14" name="Text 12"/>
-          <p:cNvSpPr/>
-          <p:nvPr/>
-        </p:nvSpPr>
-        <p:spPr>
-          <a:xfrm>
-            <a:off x="8074152" y="1920240"/>
-            <a:ext cx="2825496" cy="1188720"/>
+          <p:cNvPr id="12" name="Text 10"/>
+          <p:cNvSpPr/>
+          <p:nvPr/>
+        </p:nvSpPr>
+        <p:spPr>
+          <a:xfrm>
+            <a:off x="7799832" y="1828800"/>
+            <a:ext cx="3145536" cy="685800"/>
           </a:xfrm>
           <a:prstGeom prst="rect">
             <a:avLst/>
@@ -12258,18 +13117,159 @@
       </p:sp>
       <p:sp>
         <p:nvSpPr>
-          <p:cNvPr id="15" name="Shape 13"/>
-          <p:cNvSpPr/>
-          <p:nvPr/>
-        </p:nvSpPr>
-        <p:spPr>
-          <a:xfrm>
-            <a:off x="7909560" y="3520440"/>
-            <a:ext cx="3154680" cy="1737360"/>
+          <p:cNvPr id="13" name="Shape 11"/>
+          <p:cNvSpPr/>
+          <p:nvPr/>
+        </p:nvSpPr>
+        <p:spPr>
+          <a:xfrm>
+            <a:off x="7635240" y="2788920"/>
+            <a:ext cx="3474720" cy="1536192"/>
           </a:xfrm>
           <a:prstGeom prst="roundRect">
             <a:avLst>
-              <a:gd name="adj" fmla="val 6316"/>
+              <a:gd name="adj" fmla="val 7143"/>
+            </a:avLst>
+          </a:prstGeom>
+          <a:solidFill>
+            <a:srgbClr val="FFFFFF">
+              <a:alpha val="88000"/>
+            </a:srgbClr>
+          </a:solidFill>
+          <a:ln w="12700">
+            <a:solidFill>
+              <a:srgbClr val="D6E8F2"/>
+            </a:solidFill>
+            <a:prstDash val="solid"/>
+          </a:ln>
+        </p:spPr>
+      </p:sp>
+      <p:sp>
+        <p:nvSpPr>
+          <p:cNvPr id="14" name="Shape 12"/>
+          <p:cNvSpPr/>
+          <p:nvPr/>
+        </p:nvSpPr>
+        <p:spPr>
+          <a:xfrm>
+            <a:off x="8074152" y="3291840"/>
+            <a:ext cx="2596896" cy="749808"/>
+          </a:xfrm>
+          <a:prstGeom prst="rect">
+            <a:avLst/>
+          </a:prstGeom>
+          <a:solidFill>
+            <a:srgbClr val="EAF6F8"/>
+          </a:solidFill>
+          <a:ln w="12700">
+            <a:solidFill>
+              <a:srgbClr val="8ABBD8"/>
+            </a:solidFill>
+            <a:prstDash val="solid"/>
+          </a:ln>
+        </p:spPr>
+      </p:sp>
+      <p:sp>
+        <p:nvSpPr>
+          <p:cNvPr id="15" name="Shape 13"/>
+          <p:cNvSpPr/>
+          <p:nvPr/>
+        </p:nvSpPr>
+        <p:spPr>
+          <a:xfrm>
+            <a:off x="8202168" y="3721608"/>
+            <a:ext cx="2340864" cy="0"/>
+          </a:xfrm>
+          <a:prstGeom prst="line">
+            <a:avLst/>
+          </a:prstGeom>
+          <a:noFill/>
+          <a:ln w="19050">
+            <a:solidFill>
+              <a:srgbClr val="0068B7"/>
+            </a:solidFill>
+            <a:prstDash val="solid"/>
+          </a:ln>
+        </p:spPr>
+      </p:sp>
+      <p:sp>
+        <p:nvSpPr>
+          <p:cNvPr id="16" name="Shape 14"/>
+          <p:cNvSpPr/>
+          <p:nvPr/>
+        </p:nvSpPr>
+        <p:spPr>
+          <a:xfrm>
+            <a:off x="9198864" y="4206240"/>
+            <a:ext cx="347472" cy="347472"/>
+          </a:xfrm>
+          <a:prstGeom prst="ellipse">
+            <a:avLst/>
+          </a:prstGeom>
+          <a:solidFill>
+            <a:srgbClr val="2F8A28"/>
+          </a:solidFill>
+          <a:ln w="12700">
+            <a:solidFill>
+              <a:srgbClr val="2F8A28"/>
+            </a:solidFill>
+            <a:prstDash val="solid"/>
+          </a:ln>
+        </p:spPr>
+      </p:sp>
+      <p:sp>
+        <p:nvSpPr>
+          <p:cNvPr id="17" name="Text 15"/>
+          <p:cNvSpPr/>
+          <p:nvPr/>
+        </p:nvSpPr>
+        <p:spPr>
+          <a:xfrm>
+            <a:off x="7909560" y="3977640"/>
+            <a:ext cx="2926080" cy="182880"/>
+          </a:xfrm>
+          <a:prstGeom prst="rect">
+            <a:avLst/>
+          </a:prstGeom>
+          <a:noFill/>
+          <a:ln/>
+        </p:spPr>
+        <p:txBody>
+          <a:bodyPr wrap="square" lIns="0" tIns="0" rIns="0" bIns="0" rtlCol="0" anchor="ctr"/>
+          <a:lstStyle/>
+          <a:p>
+            <a:pPr algn="ctr" indent="0" marL="0">
+              <a:buNone/>
+            </a:pPr>
+            <a:r>
+              <a:rPr lang="en-US" sz="1000" dirty="0">
+                <a:solidFill>
+                  <a:srgbClr val="003A63"/>
+                </a:solidFill>
+                <a:latin typeface="Aptos" pitchFamily="34" charset="0"/>
+                <a:ea typeface="Aptos" pitchFamily="34" charset="-122"/>
+                <a:cs typeface="Aptos" pitchFamily="34" charset="-120"/>
+              </a:rPr>
+              <a:t>Concept to action</a:t>
+            </a:r>
+            <a:endParaRPr lang="en-US" sz="1000" dirty="0"/>
+          </a:p>
+        </p:txBody>
+      </p:sp>
+      <p:sp>
+        <p:nvSpPr>
+          <p:cNvPr id="18" name="Shape 16"/>
+          <p:cNvSpPr/>
+          <p:nvPr/>
+        </p:nvSpPr>
+        <p:spPr>
+          <a:xfrm>
+            <a:off x="7635240" y="4498848"/>
+            <a:ext cx="3474720" cy="1143000"/>
+          </a:xfrm>
+          <a:prstGeom prst="roundRect">
+            <a:avLst>
+              <a:gd name="adj" fmla="val 9600"/>
             </a:avLst>
           </a:prstGeom>
           <a:solidFill>
@@ -12285,14 +13285,14 @@
       </p:sp>
       <p:sp>
         <p:nvSpPr>
-          <p:cNvPr id="16" name="Text 14"/>
-          <p:cNvSpPr/>
-          <p:nvPr/>
-        </p:nvSpPr>
-        <p:spPr>
-          <a:xfrm>
-            <a:off x="8074152" y="3666744"/>
-            <a:ext cx="2825496" cy="256032"/>
+          <p:cNvPr id="19" name="Text 17"/>
+          <p:cNvSpPr/>
+          <p:nvPr/>
+        </p:nvSpPr>
+        <p:spPr>
+          <a:xfrm>
+            <a:off x="7799832" y="4645152"/>
+            <a:ext cx="3145536" cy="256032"/>
           </a:xfrm>
           <a:prstGeom prst="rect">
             <a:avLst/>
@@ -12316,7 +13316,7 @@
                 <a:ea typeface="Aptos" pitchFamily="34" charset="-122"/>
                 <a:cs typeface="Aptos" pitchFamily="34" charset="-120"/>
               </a:rPr>
-              <a:t>Use this for</a:t>
+              <a:t>What to produce</a:t>
             </a:r>
             <a:endParaRPr lang="en-US" sz="1300" dirty="0"/>
           </a:p>
@@ -12324,14 +13324,14 @@
       </p:sp>
       <p:sp>
         <p:nvSpPr>
-          <p:cNvPr id="17" name="Text 15"/>
-          <p:cNvSpPr/>
-          <p:nvPr/>
-        </p:nvSpPr>
-        <p:spPr>
-          <a:xfrm>
-            <a:off x="8074152" y="4023360"/>
-            <a:ext cx="2825496" cy="1097280"/>
+          <p:cNvPr id="20" name="Text 18"/>
+          <p:cNvSpPr/>
+          <p:nvPr/>
+        </p:nvSpPr>
+        <p:spPr>
+          <a:xfrm>
+            <a:off x="7799832" y="5001768"/>
+            <a:ext cx="3145536" cy="502920"/>
           </a:xfrm>
           <a:prstGeom prst="rect">
             <a:avLst/>
@@ -12357,7 +13357,7 @@
                 <a:ea typeface="Aptos" pitchFamily="34" charset="-122"/>
                 <a:cs typeface="Aptos" pitchFamily="34" charset="-120"/>
               </a:rPr>
-              <a:t>Connect the concept to public health decisions, safeguards, documentation, or implementation work.</a:t>
+              <a:t>Use the assignment to test whether you can explain the concept, apply it to a realistic public health situation, and identify what would need review before the work moves forward.</a:t>
             </a:r>
             <a:endParaRPr lang="en-US" sz="1550" dirty="0"/>
           </a:p>
@@ -12531,8 +13531,8 @@
         </p:nvSpPr>
         <p:spPr>
           <a:xfrm>
-            <a:off x="9966960" y="6537960"/>
-            <a:ext cx="1645920" cy="201168"/>
+            <a:off x="9646920" y="6537960"/>
+            <a:ext cx="1965960" cy="201168"/>
           </a:xfrm>
           <a:prstGeom prst="rect">
             <a:avLst/>
@@ -12556,7 +13556,7 @@
                 <a:ea typeface="Aptos" pitchFamily="34" charset="-122"/>
                 <a:cs typeface="Aptos" pitchFamily="34" charset="-120"/>
               </a:rPr>
-              <a:t>Â© Paula Soper</a:t>
+              <a:t>Copyright Paula Soper</a:t>
             </a:r>
             <a:endParaRPr lang="en-US" sz="800" dirty="0"/>
           </a:p>
@@ -12603,77 +13603,13 @@
       </p:sp>
       <p:sp>
         <p:nvSpPr>
-          <p:cNvPr id="8" name="Shape 6"/>
+          <p:cNvPr id="8" name="Text 6"/>
           <p:cNvSpPr/>
           <p:nvPr/>
         </p:nvSpPr>
         <p:spPr>
           <a:xfrm>
             <a:off x="640080" y="658368"/>
-            <a:ext cx="420624" cy="420624"/>
-          </a:xfrm>
-          <a:prstGeom prst="ellipse">
-            <a:avLst/>
-          </a:prstGeom>
-          <a:solidFill>
-            <a:srgbClr val="0068B7"/>
-          </a:solidFill>
-          <a:ln w="12700">
-            <a:solidFill>
-              <a:srgbClr val="0068B7"/>
-            </a:solidFill>
-            <a:prstDash val="solid"/>
-          </a:ln>
-        </p:spPr>
-      </p:sp>
-      <p:sp>
-        <p:nvSpPr>
-          <p:cNvPr id="9" name="Text 7"/>
-          <p:cNvSpPr/>
-          <p:nvPr/>
-        </p:nvSpPr>
-        <p:spPr>
-          <a:xfrm>
-            <a:off x="640080" y="731520"/>
-            <a:ext cx="420624" cy="164592"/>
-          </a:xfrm>
-          <a:prstGeom prst="rect">
-            <a:avLst/>
-          </a:prstGeom>
-          <a:noFill/>
-          <a:ln/>
-        </p:spPr>
-        <p:txBody>
-          <a:bodyPr wrap="square" lIns="0" tIns="0" rIns="0" bIns="0" rtlCol="0" anchor="ctr"/>
-          <a:lstStyle/>
-          <a:p>
-            <a:pPr algn="ctr" indent="0" marL="0">
-              <a:buNone/>
-            </a:pPr>
-            <a:r>
-              <a:rPr lang="en-US" sz="1100" b="1" dirty="0">
-                <a:solidFill>
-                  <a:srgbClr val="FFFFFF"/>
-                </a:solidFill>
-                <a:latin typeface="Aptos" pitchFamily="34" charset="0"/>
-                <a:ea typeface="Aptos" pitchFamily="34" charset="-122"/>
-                <a:cs typeface="Aptos" pitchFamily="34" charset="-120"/>
-              </a:rPr>
-              <a:t>2</a:t>
-            </a:r>
-            <a:endParaRPr lang="en-US" sz="1100" dirty="0"/>
-          </a:p>
-        </p:txBody>
-      </p:sp>
-      <p:sp>
-        <p:nvSpPr>
-          <p:cNvPr id="10" name="Text 8"/>
-          <p:cNvSpPr/>
-          <p:nvPr/>
-        </p:nvSpPr>
-        <p:spPr>
-          <a:xfrm>
-            <a:off x="640080" y="621792"/>
             <a:ext cx="10881360" cy="713232"/>
           </a:xfrm>
           <a:prstGeom prst="rect">
@@ -12708,14 +13644,14 @@
       </p:sp>
       <p:sp>
         <p:nvSpPr>
-          <p:cNvPr id="11" name="Text 9"/>
+          <p:cNvPr id="9" name="Text 7"/>
           <p:cNvSpPr/>
           <p:nvPr/>
         </p:nvSpPr>
         <p:spPr>
           <a:xfrm>
             <a:off x="868680" y="1508760"/>
-            <a:ext cx="6537960" cy="4160520"/>
+            <a:ext cx="6309360" cy="4160520"/>
           </a:xfrm>
           <a:prstGeom prst="rect">
             <a:avLst/>
@@ -12774,18 +13710,18 @@
       </p:sp>
       <p:sp>
         <p:nvSpPr>
-          <p:cNvPr id="12" name="Shape 10"/>
-          <p:cNvSpPr/>
-          <p:nvPr/>
-        </p:nvSpPr>
-        <p:spPr>
-          <a:xfrm>
-            <a:off x="7909560" y="1417320"/>
-            <a:ext cx="3154680" cy="1828800"/>
+          <p:cNvPr id="10" name="Shape 8"/>
+          <p:cNvSpPr/>
+          <p:nvPr/>
+        </p:nvSpPr>
+        <p:spPr>
+          <a:xfrm>
+            <a:off x="7635240" y="1325880"/>
+            <a:ext cx="3474720" cy="1325880"/>
           </a:xfrm>
           <a:prstGeom prst="roundRect">
             <a:avLst>
-              <a:gd name="adj" fmla="val 6000"/>
+              <a:gd name="adj" fmla="val 8276"/>
             </a:avLst>
           </a:prstGeom>
           <a:solidFill>
@@ -12801,14 +13737,14 @@
       </p:sp>
       <p:sp>
         <p:nvSpPr>
-          <p:cNvPr id="13" name="Text 11"/>
-          <p:cNvSpPr/>
-          <p:nvPr/>
-        </p:nvSpPr>
-        <p:spPr>
-          <a:xfrm>
-            <a:off x="8074152" y="1563624"/>
-            <a:ext cx="2825496" cy="256032"/>
+          <p:cNvPr id="11" name="Text 9"/>
+          <p:cNvSpPr/>
+          <p:nvPr/>
+        </p:nvSpPr>
+        <p:spPr>
+          <a:xfrm>
+            <a:off x="7799832" y="1472184"/>
+            <a:ext cx="3145536" cy="256032"/>
           </a:xfrm>
           <a:prstGeom prst="rect">
             <a:avLst/>
@@ -12832,7 +13768,7 @@
                 <a:ea typeface="Aptos" pitchFamily="34" charset="-122"/>
                 <a:cs typeface="Aptos" pitchFamily="34" charset="-120"/>
               </a:rPr>
-              <a:t>Key idea</a:t>
+              <a:t>Core concept</a:t>
             </a:r>
             <a:endParaRPr lang="en-US" sz="1300" dirty="0"/>
           </a:p>
@@ -12840,14 +13776,14 @@
       </p:sp>
       <p:sp>
         <p:nvSpPr>
-          <p:cNvPr id="14" name="Text 12"/>
-          <p:cNvSpPr/>
-          <p:nvPr/>
-        </p:nvSpPr>
-        <p:spPr>
-          <a:xfrm>
-            <a:off x="8074152" y="1920240"/>
-            <a:ext cx="2825496" cy="1188720"/>
+          <p:cNvPr id="12" name="Text 10"/>
+          <p:cNvSpPr/>
+          <p:nvPr/>
+        </p:nvSpPr>
+        <p:spPr>
+          <a:xfrm>
+            <a:off x="7799832" y="1828800"/>
+            <a:ext cx="3145536" cy="685800"/>
           </a:xfrm>
           <a:prstGeom prst="rect">
             <a:avLst/>
@@ -12881,18 +13817,159 @@
       </p:sp>
       <p:sp>
         <p:nvSpPr>
-          <p:cNvPr id="15" name="Shape 13"/>
-          <p:cNvSpPr/>
-          <p:nvPr/>
-        </p:nvSpPr>
-        <p:spPr>
-          <a:xfrm>
-            <a:off x="7909560" y="3520440"/>
-            <a:ext cx="3154680" cy="1737360"/>
+          <p:cNvPr id="13" name="Shape 11"/>
+          <p:cNvSpPr/>
+          <p:nvPr/>
+        </p:nvSpPr>
+        <p:spPr>
+          <a:xfrm>
+            <a:off x="7635240" y="2788920"/>
+            <a:ext cx="3474720" cy="1536192"/>
           </a:xfrm>
           <a:prstGeom prst="roundRect">
             <a:avLst>
-              <a:gd name="adj" fmla="val 6316"/>
+              <a:gd name="adj" fmla="val 7143"/>
+            </a:avLst>
+          </a:prstGeom>
+          <a:solidFill>
+            <a:srgbClr val="FFFFFF">
+              <a:alpha val="88000"/>
+            </a:srgbClr>
+          </a:solidFill>
+          <a:ln w="12700">
+            <a:solidFill>
+              <a:srgbClr val="D6E8F2"/>
+            </a:solidFill>
+            <a:prstDash val="solid"/>
+          </a:ln>
+        </p:spPr>
+      </p:sp>
+      <p:sp>
+        <p:nvSpPr>
+          <p:cNvPr id="14" name="Shape 12"/>
+          <p:cNvSpPr/>
+          <p:nvPr/>
+        </p:nvSpPr>
+        <p:spPr>
+          <a:xfrm>
+            <a:off x="8074152" y="3291840"/>
+            <a:ext cx="2596896" cy="749808"/>
+          </a:xfrm>
+          <a:prstGeom prst="rect">
+            <a:avLst/>
+          </a:prstGeom>
+          <a:solidFill>
+            <a:srgbClr val="EAF6F8"/>
+          </a:solidFill>
+          <a:ln w="12700">
+            <a:solidFill>
+              <a:srgbClr val="8ABBD8"/>
+            </a:solidFill>
+            <a:prstDash val="solid"/>
+          </a:ln>
+        </p:spPr>
+      </p:sp>
+      <p:sp>
+        <p:nvSpPr>
+          <p:cNvPr id="15" name="Shape 13"/>
+          <p:cNvSpPr/>
+          <p:nvPr/>
+        </p:nvSpPr>
+        <p:spPr>
+          <a:xfrm>
+            <a:off x="8202168" y="3721608"/>
+            <a:ext cx="2340864" cy="0"/>
+          </a:xfrm>
+          <a:prstGeom prst="line">
+            <a:avLst/>
+          </a:prstGeom>
+          <a:noFill/>
+          <a:ln w="19050">
+            <a:solidFill>
+              <a:srgbClr val="0068B7"/>
+            </a:solidFill>
+            <a:prstDash val="solid"/>
+          </a:ln>
+        </p:spPr>
+      </p:sp>
+      <p:sp>
+        <p:nvSpPr>
+          <p:cNvPr id="16" name="Shape 14"/>
+          <p:cNvSpPr/>
+          <p:nvPr/>
+        </p:nvSpPr>
+        <p:spPr>
+          <a:xfrm>
+            <a:off x="9198864" y="4206240"/>
+            <a:ext cx="347472" cy="347472"/>
+          </a:xfrm>
+          <a:prstGeom prst="ellipse">
+            <a:avLst/>
+          </a:prstGeom>
+          <a:solidFill>
+            <a:srgbClr val="2F8A28"/>
+          </a:solidFill>
+          <a:ln w="12700">
+            <a:solidFill>
+              <a:srgbClr val="2F8A28"/>
+            </a:solidFill>
+            <a:prstDash val="solid"/>
+          </a:ln>
+        </p:spPr>
+      </p:sp>
+      <p:sp>
+        <p:nvSpPr>
+          <p:cNvPr id="17" name="Text 15"/>
+          <p:cNvSpPr/>
+          <p:nvPr/>
+        </p:nvSpPr>
+        <p:spPr>
+          <a:xfrm>
+            <a:off x="7909560" y="3977640"/>
+            <a:ext cx="2926080" cy="182880"/>
+          </a:xfrm>
+          <a:prstGeom prst="rect">
+            <a:avLst/>
+          </a:prstGeom>
+          <a:noFill/>
+          <a:ln/>
+        </p:spPr>
+        <p:txBody>
+          <a:bodyPr wrap="square" lIns="0" tIns="0" rIns="0" bIns="0" rtlCol="0" anchor="ctr"/>
+          <a:lstStyle/>
+          <a:p>
+            <a:pPr algn="ctr" indent="0" marL="0">
+              <a:buNone/>
+            </a:pPr>
+            <a:r>
+              <a:rPr lang="en-US" sz="1000" dirty="0">
+                <a:solidFill>
+                  <a:srgbClr val="003A63"/>
+                </a:solidFill>
+                <a:latin typeface="Aptos" pitchFamily="34" charset="0"/>
+                <a:ea typeface="Aptos" pitchFamily="34" charset="-122"/>
+                <a:cs typeface="Aptos" pitchFamily="34" charset="-120"/>
+              </a:rPr>
+              <a:t>Concept to action</a:t>
+            </a:r>
+            <a:endParaRPr lang="en-US" sz="1000" dirty="0"/>
+          </a:p>
+        </p:txBody>
+      </p:sp>
+      <p:sp>
+        <p:nvSpPr>
+          <p:cNvPr id="18" name="Shape 16"/>
+          <p:cNvSpPr/>
+          <p:nvPr/>
+        </p:nvSpPr>
+        <p:spPr>
+          <a:xfrm>
+            <a:off x="7635240" y="4498848"/>
+            <a:ext cx="3474720" cy="1143000"/>
+          </a:xfrm>
+          <a:prstGeom prst="roundRect">
+            <a:avLst>
+              <a:gd name="adj" fmla="val 9600"/>
             </a:avLst>
           </a:prstGeom>
           <a:solidFill>
@@ -12908,14 +13985,14 @@
       </p:sp>
       <p:sp>
         <p:nvSpPr>
-          <p:cNvPr id="16" name="Text 14"/>
-          <p:cNvSpPr/>
-          <p:nvPr/>
-        </p:nvSpPr>
-        <p:spPr>
-          <a:xfrm>
-            <a:off x="8074152" y="3666744"/>
-            <a:ext cx="2825496" cy="256032"/>
+          <p:cNvPr id="19" name="Text 17"/>
+          <p:cNvSpPr/>
+          <p:nvPr/>
+        </p:nvSpPr>
+        <p:spPr>
+          <a:xfrm>
+            <a:off x="7799832" y="4645152"/>
+            <a:ext cx="3145536" cy="256032"/>
           </a:xfrm>
           <a:prstGeom prst="rect">
             <a:avLst/>
@@ -12939,7 +14016,7 @@
                 <a:ea typeface="Aptos" pitchFamily="34" charset="-122"/>
                 <a:cs typeface="Aptos" pitchFamily="34" charset="-120"/>
               </a:rPr>
-              <a:t>Use this for</a:t>
+              <a:t>Apply it</a:t>
             </a:r>
             <a:endParaRPr lang="en-US" sz="1300" dirty="0"/>
           </a:p>
@@ -12947,14 +14024,14 @@
       </p:sp>
       <p:sp>
         <p:nvSpPr>
-          <p:cNvPr id="17" name="Text 15"/>
-          <p:cNvSpPr/>
-          <p:nvPr/>
-        </p:nvSpPr>
-        <p:spPr>
-          <a:xfrm>
-            <a:off x="8074152" y="4023360"/>
-            <a:ext cx="2825496" cy="1097280"/>
+          <p:cNvPr id="20" name="Text 18"/>
+          <p:cNvSpPr/>
+          <p:nvPr/>
+        </p:nvSpPr>
+        <p:spPr>
+          <a:xfrm>
+            <a:off x="7799832" y="5001768"/>
+            <a:ext cx="3145536" cy="502920"/>
           </a:xfrm>
           <a:prstGeom prst="rect">
             <a:avLst/>
@@ -12980,7 +14057,7 @@
                 <a:ea typeface="Aptos" pitchFamily="34" charset="-122"/>
                 <a:cs typeface="Aptos" pitchFamily="34" charset="-120"/>
               </a:rPr>
-              <a:t>Connect the concept to public health decisions, safeguards, documentation, or implementation work.</a:t>
+              <a:t>Connect the concept to public health purpose, responsible use, required safeguards, documentation, and the next action a department should take.</a:t>
             </a:r>
             <a:endParaRPr lang="en-US" sz="1550" dirty="0"/>
           </a:p>
@@ -13154,8 +14231,8 @@
         </p:nvSpPr>
         <p:spPr>
           <a:xfrm>
-            <a:off x="9966960" y="6537960"/>
-            <a:ext cx="1645920" cy="201168"/>
+            <a:off x="9646920" y="6537960"/>
+            <a:ext cx="1965960" cy="201168"/>
           </a:xfrm>
           <a:prstGeom prst="rect">
             <a:avLst/>
@@ -13179,7 +14256,7 @@
                 <a:ea typeface="Aptos" pitchFamily="34" charset="-122"/>
                 <a:cs typeface="Aptos" pitchFamily="34" charset="-120"/>
               </a:rPr>
-              <a:t>Â© Paula Soper</a:t>
+              <a:t>Copyright Paula Soper</a:t>
             </a:r>
             <a:endParaRPr lang="en-US" sz="800" dirty="0"/>
           </a:p>
@@ -13226,77 +14303,13 @@
       </p:sp>
       <p:sp>
         <p:nvSpPr>
-          <p:cNvPr id="8" name="Shape 6"/>
+          <p:cNvPr id="8" name="Text 6"/>
           <p:cNvSpPr/>
           <p:nvPr/>
         </p:nvSpPr>
         <p:spPr>
           <a:xfrm>
             <a:off x="640080" y="658368"/>
-            <a:ext cx="420624" cy="420624"/>
-          </a:xfrm>
-          <a:prstGeom prst="ellipse">
-            <a:avLst/>
-          </a:prstGeom>
-          <a:solidFill>
-            <a:srgbClr val="0068B7"/>
-          </a:solidFill>
-          <a:ln w="12700">
-            <a:solidFill>
-              <a:srgbClr val="0068B7"/>
-            </a:solidFill>
-            <a:prstDash val="solid"/>
-          </a:ln>
-        </p:spPr>
-      </p:sp>
-      <p:sp>
-        <p:nvSpPr>
-          <p:cNvPr id="9" name="Text 7"/>
-          <p:cNvSpPr/>
-          <p:nvPr/>
-        </p:nvSpPr>
-        <p:spPr>
-          <a:xfrm>
-            <a:off x="640080" y="731520"/>
-            <a:ext cx="420624" cy="164592"/>
-          </a:xfrm>
-          <a:prstGeom prst="rect">
-            <a:avLst/>
-          </a:prstGeom>
-          <a:noFill/>
-          <a:ln/>
-        </p:spPr>
-        <p:txBody>
-          <a:bodyPr wrap="square" lIns="0" tIns="0" rIns="0" bIns="0" rtlCol="0" anchor="ctr"/>
-          <a:lstStyle/>
-          <a:p>
-            <a:pPr algn="ctr" indent="0" marL="0">
-              <a:buNone/>
-            </a:pPr>
-            <a:r>
-              <a:rPr lang="en-US" sz="1100" b="1" dirty="0">
-                <a:solidFill>
-                  <a:srgbClr val="FFFFFF"/>
-                </a:solidFill>
-                <a:latin typeface="Aptos" pitchFamily="34" charset="0"/>
-                <a:ea typeface="Aptos" pitchFamily="34" charset="-122"/>
-                <a:cs typeface="Aptos" pitchFamily="34" charset="-120"/>
-              </a:rPr>
-              <a:t>3</a:t>
-            </a:r>
-            <a:endParaRPr lang="en-US" sz="1100" dirty="0"/>
-          </a:p>
-        </p:txBody>
-      </p:sp>
-      <p:sp>
-        <p:nvSpPr>
-          <p:cNvPr id="10" name="Text 8"/>
-          <p:cNvSpPr/>
-          <p:nvPr/>
-        </p:nvSpPr>
-        <p:spPr>
-          <a:xfrm>
-            <a:off x="640080" y="621792"/>
             <a:ext cx="10881360" cy="713232"/>
           </a:xfrm>
           <a:prstGeom prst="rect">
@@ -13331,14 +14344,14 @@
       </p:sp>
       <p:sp>
         <p:nvSpPr>
-          <p:cNvPr id="11" name="Text 9"/>
+          <p:cNvPr id="9" name="Text 7"/>
           <p:cNvSpPr/>
           <p:nvPr/>
         </p:nvSpPr>
         <p:spPr>
           <a:xfrm>
             <a:off x="868680" y="1508760"/>
-            <a:ext cx="6537960" cy="4160520"/>
+            <a:ext cx="6309360" cy="4160520"/>
           </a:xfrm>
           <a:prstGeom prst="rect">
             <a:avLst/>
@@ -13397,18 +14410,18 @@
       </p:sp>
       <p:sp>
         <p:nvSpPr>
-          <p:cNvPr id="12" name="Shape 10"/>
-          <p:cNvSpPr/>
-          <p:nvPr/>
-        </p:nvSpPr>
-        <p:spPr>
-          <a:xfrm>
-            <a:off x="7909560" y="1417320"/>
-            <a:ext cx="3154680" cy="1828800"/>
+          <p:cNvPr id="10" name="Shape 8"/>
+          <p:cNvSpPr/>
+          <p:nvPr/>
+        </p:nvSpPr>
+        <p:spPr>
+          <a:xfrm>
+            <a:off x="7635240" y="1325880"/>
+            <a:ext cx="3474720" cy="1325880"/>
           </a:xfrm>
           <a:prstGeom prst="roundRect">
             <a:avLst>
-              <a:gd name="adj" fmla="val 6000"/>
+              <a:gd name="adj" fmla="val 8276"/>
             </a:avLst>
           </a:prstGeom>
           <a:solidFill>
@@ -13424,14 +14437,14 @@
       </p:sp>
       <p:sp>
         <p:nvSpPr>
-          <p:cNvPr id="13" name="Text 11"/>
-          <p:cNvSpPr/>
-          <p:nvPr/>
-        </p:nvSpPr>
-        <p:spPr>
-          <a:xfrm>
-            <a:off x="8074152" y="1563624"/>
-            <a:ext cx="2825496" cy="256032"/>
+          <p:cNvPr id="11" name="Text 9"/>
+          <p:cNvSpPr/>
+          <p:nvPr/>
+        </p:nvSpPr>
+        <p:spPr>
+          <a:xfrm>
+            <a:off x="7799832" y="1472184"/>
+            <a:ext cx="3145536" cy="256032"/>
           </a:xfrm>
           <a:prstGeom prst="rect">
             <a:avLst/>
@@ -13455,7 +14468,7 @@
                 <a:ea typeface="Aptos" pitchFamily="34" charset="-122"/>
                 <a:cs typeface="Aptos" pitchFamily="34" charset="-120"/>
               </a:rPr>
-              <a:t>Key idea</a:t>
+              <a:t>Core concept</a:t>
             </a:r>
             <a:endParaRPr lang="en-US" sz="1300" dirty="0"/>
           </a:p>
@@ -13463,14 +14476,14 @@
       </p:sp>
       <p:sp>
         <p:nvSpPr>
-          <p:cNvPr id="14" name="Text 12"/>
-          <p:cNvSpPr/>
-          <p:nvPr/>
-        </p:nvSpPr>
-        <p:spPr>
-          <a:xfrm>
-            <a:off x="8074152" y="1920240"/>
-            <a:ext cx="2825496" cy="1188720"/>
+          <p:cNvPr id="12" name="Text 10"/>
+          <p:cNvSpPr/>
+          <p:nvPr/>
+        </p:nvSpPr>
+        <p:spPr>
+          <a:xfrm>
+            <a:off x="7799832" y="1828800"/>
+            <a:ext cx="3145536" cy="685800"/>
           </a:xfrm>
           <a:prstGeom prst="rect">
             <a:avLst/>
@@ -13504,18 +14517,159 @@
       </p:sp>
       <p:sp>
         <p:nvSpPr>
-          <p:cNvPr id="15" name="Shape 13"/>
-          <p:cNvSpPr/>
-          <p:nvPr/>
-        </p:nvSpPr>
-        <p:spPr>
-          <a:xfrm>
-            <a:off x="7909560" y="3520440"/>
-            <a:ext cx="3154680" cy="1737360"/>
+          <p:cNvPr id="13" name="Shape 11"/>
+          <p:cNvSpPr/>
+          <p:nvPr/>
+        </p:nvSpPr>
+        <p:spPr>
+          <a:xfrm>
+            <a:off x="7635240" y="2788920"/>
+            <a:ext cx="3474720" cy="1536192"/>
           </a:xfrm>
           <a:prstGeom prst="roundRect">
             <a:avLst>
-              <a:gd name="adj" fmla="val 6316"/>
+              <a:gd name="adj" fmla="val 7143"/>
+            </a:avLst>
+          </a:prstGeom>
+          <a:solidFill>
+            <a:srgbClr val="FFFFFF">
+              <a:alpha val="88000"/>
+            </a:srgbClr>
+          </a:solidFill>
+          <a:ln w="12700">
+            <a:solidFill>
+              <a:srgbClr val="D6E8F2"/>
+            </a:solidFill>
+            <a:prstDash val="solid"/>
+          </a:ln>
+        </p:spPr>
+      </p:sp>
+      <p:sp>
+        <p:nvSpPr>
+          <p:cNvPr id="14" name="Shape 12"/>
+          <p:cNvSpPr/>
+          <p:nvPr/>
+        </p:nvSpPr>
+        <p:spPr>
+          <a:xfrm>
+            <a:off x="8074152" y="3291840"/>
+            <a:ext cx="2596896" cy="749808"/>
+          </a:xfrm>
+          <a:prstGeom prst="rect">
+            <a:avLst/>
+          </a:prstGeom>
+          <a:solidFill>
+            <a:srgbClr val="EAF6F8"/>
+          </a:solidFill>
+          <a:ln w="12700">
+            <a:solidFill>
+              <a:srgbClr val="8ABBD8"/>
+            </a:solidFill>
+            <a:prstDash val="solid"/>
+          </a:ln>
+        </p:spPr>
+      </p:sp>
+      <p:sp>
+        <p:nvSpPr>
+          <p:cNvPr id="15" name="Shape 13"/>
+          <p:cNvSpPr/>
+          <p:nvPr/>
+        </p:nvSpPr>
+        <p:spPr>
+          <a:xfrm>
+            <a:off x="8202168" y="3721608"/>
+            <a:ext cx="2340864" cy="0"/>
+          </a:xfrm>
+          <a:prstGeom prst="line">
+            <a:avLst/>
+          </a:prstGeom>
+          <a:noFill/>
+          <a:ln w="19050">
+            <a:solidFill>
+              <a:srgbClr val="0068B7"/>
+            </a:solidFill>
+            <a:prstDash val="solid"/>
+          </a:ln>
+        </p:spPr>
+      </p:sp>
+      <p:sp>
+        <p:nvSpPr>
+          <p:cNvPr id="16" name="Shape 14"/>
+          <p:cNvSpPr/>
+          <p:nvPr/>
+        </p:nvSpPr>
+        <p:spPr>
+          <a:xfrm>
+            <a:off x="9198864" y="4206240"/>
+            <a:ext cx="347472" cy="347472"/>
+          </a:xfrm>
+          <a:prstGeom prst="ellipse">
+            <a:avLst/>
+          </a:prstGeom>
+          <a:solidFill>
+            <a:srgbClr val="2F8A28"/>
+          </a:solidFill>
+          <a:ln w="12700">
+            <a:solidFill>
+              <a:srgbClr val="2F8A28"/>
+            </a:solidFill>
+            <a:prstDash val="solid"/>
+          </a:ln>
+        </p:spPr>
+      </p:sp>
+      <p:sp>
+        <p:nvSpPr>
+          <p:cNvPr id="17" name="Text 15"/>
+          <p:cNvSpPr/>
+          <p:nvPr/>
+        </p:nvSpPr>
+        <p:spPr>
+          <a:xfrm>
+            <a:off x="7909560" y="3977640"/>
+            <a:ext cx="2926080" cy="182880"/>
+          </a:xfrm>
+          <a:prstGeom prst="rect">
+            <a:avLst/>
+          </a:prstGeom>
+          <a:noFill/>
+          <a:ln/>
+        </p:spPr>
+        <p:txBody>
+          <a:bodyPr wrap="square" lIns="0" tIns="0" rIns="0" bIns="0" rtlCol="0" anchor="ctr"/>
+          <a:lstStyle/>
+          <a:p>
+            <a:pPr algn="ctr" indent="0" marL="0">
+              <a:buNone/>
+            </a:pPr>
+            <a:r>
+              <a:rPr lang="en-US" sz="1000" dirty="0">
+                <a:solidFill>
+                  <a:srgbClr val="003A63"/>
+                </a:solidFill>
+                <a:latin typeface="Aptos" pitchFamily="34" charset="0"/>
+                <a:ea typeface="Aptos" pitchFamily="34" charset="-122"/>
+                <a:cs typeface="Aptos" pitchFamily="34" charset="-120"/>
+              </a:rPr>
+              <a:t>Concept to action</a:t>
+            </a:r>
+            <a:endParaRPr lang="en-US" sz="1000" dirty="0"/>
+          </a:p>
+        </p:txBody>
+      </p:sp>
+      <p:sp>
+        <p:nvSpPr>
+          <p:cNvPr id="18" name="Shape 16"/>
+          <p:cNvSpPr/>
+          <p:nvPr/>
+        </p:nvSpPr>
+        <p:spPr>
+          <a:xfrm>
+            <a:off x="7635240" y="4498848"/>
+            <a:ext cx="3474720" cy="1143000"/>
+          </a:xfrm>
+          <a:prstGeom prst="roundRect">
+            <a:avLst>
+              <a:gd name="adj" fmla="val 9600"/>
             </a:avLst>
           </a:prstGeom>
           <a:solidFill>
@@ -13531,14 +14685,14 @@
       </p:sp>
       <p:sp>
         <p:nvSpPr>
-          <p:cNvPr id="16" name="Text 14"/>
-          <p:cNvSpPr/>
-          <p:nvPr/>
-        </p:nvSpPr>
-        <p:spPr>
-          <a:xfrm>
-            <a:off x="8074152" y="3666744"/>
-            <a:ext cx="2825496" cy="256032"/>
+          <p:cNvPr id="19" name="Text 17"/>
+          <p:cNvSpPr/>
+          <p:nvPr/>
+        </p:nvSpPr>
+        <p:spPr>
+          <a:xfrm>
+            <a:off x="7799832" y="4645152"/>
+            <a:ext cx="3145536" cy="256032"/>
           </a:xfrm>
           <a:prstGeom prst="rect">
             <a:avLst/>
@@ -13562,7 +14716,7 @@
                 <a:ea typeface="Aptos" pitchFamily="34" charset="-122"/>
                 <a:cs typeface="Aptos" pitchFamily="34" charset="-120"/>
               </a:rPr>
-              <a:t>Use this for</a:t>
+              <a:t>Apply it</a:t>
             </a:r>
             <a:endParaRPr lang="en-US" sz="1300" dirty="0"/>
           </a:p>
@@ -13570,14 +14724,14 @@
       </p:sp>
       <p:sp>
         <p:nvSpPr>
-          <p:cNvPr id="17" name="Text 15"/>
-          <p:cNvSpPr/>
-          <p:nvPr/>
-        </p:nvSpPr>
-        <p:spPr>
-          <a:xfrm>
-            <a:off x="8074152" y="4023360"/>
-            <a:ext cx="2825496" cy="1097280"/>
+          <p:cNvPr id="20" name="Text 18"/>
+          <p:cNvSpPr/>
+          <p:nvPr/>
+        </p:nvSpPr>
+        <p:spPr>
+          <a:xfrm>
+            <a:off x="7799832" y="5001768"/>
+            <a:ext cx="3145536" cy="502920"/>
           </a:xfrm>
           <a:prstGeom prst="rect">
             <a:avLst/>
@@ -13603,7 +14757,7 @@
                 <a:ea typeface="Aptos" pitchFamily="34" charset="-122"/>
                 <a:cs typeface="Aptos" pitchFamily="34" charset="-120"/>
               </a:rPr>
-              <a:t>Connect the concept to public health decisions, safeguards, documentation, or implementation work.</a:t>
+              <a:t>Connect the concept to public health purpose, responsible use, required safeguards, documentation, and the next action a department should take.</a:t>
             </a:r>
             <a:endParaRPr lang="en-US" sz="1550" dirty="0"/>
           </a:p>
@@ -13777,8 +14931,8 @@
         </p:nvSpPr>
         <p:spPr>
           <a:xfrm>
-            <a:off x="9966960" y="6537960"/>
-            <a:ext cx="1645920" cy="201168"/>
+            <a:off x="9646920" y="6537960"/>
+            <a:ext cx="1965960" cy="201168"/>
           </a:xfrm>
           <a:prstGeom prst="rect">
             <a:avLst/>
@@ -13802,7 +14956,7 @@
                 <a:ea typeface="Aptos" pitchFamily="34" charset="-122"/>
                 <a:cs typeface="Aptos" pitchFamily="34" charset="-120"/>
               </a:rPr>
-              <a:t>Â© Paula Soper</a:t>
+              <a:t>Copyright Paula Soper</a:t>
             </a:r>
             <a:endParaRPr lang="en-US" sz="800" dirty="0"/>
           </a:p>
@@ -13849,77 +15003,13 @@
       </p:sp>
       <p:sp>
         <p:nvSpPr>
-          <p:cNvPr id="8" name="Shape 6"/>
+          <p:cNvPr id="8" name="Text 6"/>
           <p:cNvSpPr/>
           <p:nvPr/>
         </p:nvSpPr>
         <p:spPr>
           <a:xfrm>
             <a:off x="640080" y="658368"/>
-            <a:ext cx="420624" cy="420624"/>
-          </a:xfrm>
-          <a:prstGeom prst="ellipse">
-            <a:avLst/>
-          </a:prstGeom>
-          <a:solidFill>
-            <a:srgbClr val="0068B7"/>
-          </a:solidFill>
-          <a:ln w="12700">
-            <a:solidFill>
-              <a:srgbClr val="0068B7"/>
-            </a:solidFill>
-            <a:prstDash val="solid"/>
-          </a:ln>
-        </p:spPr>
-      </p:sp>
-      <p:sp>
-        <p:nvSpPr>
-          <p:cNvPr id="9" name="Text 7"/>
-          <p:cNvSpPr/>
-          <p:nvPr/>
-        </p:nvSpPr>
-        <p:spPr>
-          <a:xfrm>
-            <a:off x="640080" y="731520"/>
-            <a:ext cx="420624" cy="164592"/>
-          </a:xfrm>
-          <a:prstGeom prst="rect">
-            <a:avLst/>
-          </a:prstGeom>
-          <a:noFill/>
-          <a:ln/>
-        </p:spPr>
-        <p:txBody>
-          <a:bodyPr wrap="square" lIns="0" tIns="0" rIns="0" bIns="0" rtlCol="0" anchor="ctr"/>
-          <a:lstStyle/>
-          <a:p>
-            <a:pPr algn="ctr" indent="0" marL="0">
-              <a:buNone/>
-            </a:pPr>
-            <a:r>
-              <a:rPr lang="en-US" sz="1100" b="1" dirty="0">
-                <a:solidFill>
-                  <a:srgbClr val="FFFFFF"/>
-                </a:solidFill>
-                <a:latin typeface="Aptos" pitchFamily="34" charset="0"/>
-                <a:ea typeface="Aptos" pitchFamily="34" charset="-122"/>
-                <a:cs typeface="Aptos" pitchFamily="34" charset="-120"/>
-              </a:rPr>
-              <a:t>4</a:t>
-            </a:r>
-            <a:endParaRPr lang="en-US" sz="1100" dirty="0"/>
-          </a:p>
-        </p:txBody>
-      </p:sp>
-      <p:sp>
-        <p:nvSpPr>
-          <p:cNvPr id="10" name="Text 8"/>
-          <p:cNvSpPr/>
-          <p:nvPr/>
-        </p:nvSpPr>
-        <p:spPr>
-          <a:xfrm>
-            <a:off x="640080" y="621792"/>
             <a:ext cx="10881360" cy="713232"/>
           </a:xfrm>
           <a:prstGeom prst="rect">
@@ -13954,14 +15044,14 @@
       </p:sp>
       <p:sp>
         <p:nvSpPr>
-          <p:cNvPr id="11" name="Text 9"/>
+          <p:cNvPr id="9" name="Text 7"/>
           <p:cNvSpPr/>
           <p:nvPr/>
         </p:nvSpPr>
         <p:spPr>
           <a:xfrm>
             <a:off x="868680" y="1508760"/>
-            <a:ext cx="6537960" cy="4160520"/>
+            <a:ext cx="6309360" cy="4160520"/>
           </a:xfrm>
           <a:prstGeom prst="rect">
             <a:avLst/>
@@ -14020,18 +15110,18 @@
       </p:sp>
       <p:sp>
         <p:nvSpPr>
-          <p:cNvPr id="12" name="Shape 10"/>
-          <p:cNvSpPr/>
-          <p:nvPr/>
-        </p:nvSpPr>
-        <p:spPr>
-          <a:xfrm>
-            <a:off x="7909560" y="1417320"/>
-            <a:ext cx="3154680" cy="1828800"/>
+          <p:cNvPr id="10" name="Shape 8"/>
+          <p:cNvSpPr/>
+          <p:nvPr/>
+        </p:nvSpPr>
+        <p:spPr>
+          <a:xfrm>
+            <a:off x="7635240" y="1325880"/>
+            <a:ext cx="3474720" cy="1325880"/>
           </a:xfrm>
           <a:prstGeom prst="roundRect">
             <a:avLst>
-              <a:gd name="adj" fmla="val 6000"/>
+              <a:gd name="adj" fmla="val 8276"/>
             </a:avLst>
           </a:prstGeom>
           <a:solidFill>
@@ -14047,14 +15137,14 @@
       </p:sp>
       <p:sp>
         <p:nvSpPr>
-          <p:cNvPr id="13" name="Text 11"/>
-          <p:cNvSpPr/>
-          <p:nvPr/>
-        </p:nvSpPr>
-        <p:spPr>
-          <a:xfrm>
-            <a:off x="8074152" y="1563624"/>
-            <a:ext cx="2825496" cy="256032"/>
+          <p:cNvPr id="11" name="Text 9"/>
+          <p:cNvSpPr/>
+          <p:nvPr/>
+        </p:nvSpPr>
+        <p:spPr>
+          <a:xfrm>
+            <a:off x="7799832" y="1472184"/>
+            <a:ext cx="3145536" cy="256032"/>
           </a:xfrm>
           <a:prstGeom prst="rect">
             <a:avLst/>
@@ -14078,7 +15168,7 @@
                 <a:ea typeface="Aptos" pitchFamily="34" charset="-122"/>
                 <a:cs typeface="Aptos" pitchFamily="34" charset="-120"/>
               </a:rPr>
-              <a:t>Key idea</a:t>
+              <a:t>Core concept</a:t>
             </a:r>
             <a:endParaRPr lang="en-US" sz="1300" dirty="0"/>
           </a:p>
@@ -14086,14 +15176,14 @@
       </p:sp>
       <p:sp>
         <p:nvSpPr>
-          <p:cNvPr id="14" name="Text 12"/>
-          <p:cNvSpPr/>
-          <p:nvPr/>
-        </p:nvSpPr>
-        <p:spPr>
-          <a:xfrm>
-            <a:off x="8074152" y="1920240"/>
-            <a:ext cx="2825496" cy="1188720"/>
+          <p:cNvPr id="12" name="Text 10"/>
+          <p:cNvSpPr/>
+          <p:nvPr/>
+        </p:nvSpPr>
+        <p:spPr>
+          <a:xfrm>
+            <a:off x="7799832" y="1828800"/>
+            <a:ext cx="3145536" cy="685800"/>
           </a:xfrm>
           <a:prstGeom prst="rect">
             <a:avLst/>
@@ -14127,18 +15217,159 @@
       </p:sp>
       <p:sp>
         <p:nvSpPr>
-          <p:cNvPr id="15" name="Shape 13"/>
-          <p:cNvSpPr/>
-          <p:nvPr/>
-        </p:nvSpPr>
-        <p:spPr>
-          <a:xfrm>
-            <a:off x="7909560" y="3520440"/>
-            <a:ext cx="3154680" cy="1737360"/>
+          <p:cNvPr id="13" name="Shape 11"/>
+          <p:cNvSpPr/>
+          <p:nvPr/>
+        </p:nvSpPr>
+        <p:spPr>
+          <a:xfrm>
+            <a:off x="7635240" y="2788920"/>
+            <a:ext cx="3474720" cy="1536192"/>
           </a:xfrm>
           <a:prstGeom prst="roundRect">
             <a:avLst>
-              <a:gd name="adj" fmla="val 6316"/>
+              <a:gd name="adj" fmla="val 7143"/>
+            </a:avLst>
+          </a:prstGeom>
+          <a:solidFill>
+            <a:srgbClr val="FFFFFF">
+              <a:alpha val="88000"/>
+            </a:srgbClr>
+          </a:solidFill>
+          <a:ln w="12700">
+            <a:solidFill>
+              <a:srgbClr val="D6E8F2"/>
+            </a:solidFill>
+            <a:prstDash val="solid"/>
+          </a:ln>
+        </p:spPr>
+      </p:sp>
+      <p:sp>
+        <p:nvSpPr>
+          <p:cNvPr id="14" name="Shape 12"/>
+          <p:cNvSpPr/>
+          <p:nvPr/>
+        </p:nvSpPr>
+        <p:spPr>
+          <a:xfrm>
+            <a:off x="8074152" y="3291840"/>
+            <a:ext cx="2596896" cy="749808"/>
+          </a:xfrm>
+          <a:prstGeom prst="rect">
+            <a:avLst/>
+          </a:prstGeom>
+          <a:solidFill>
+            <a:srgbClr val="EAF6F8"/>
+          </a:solidFill>
+          <a:ln w="12700">
+            <a:solidFill>
+              <a:srgbClr val="8ABBD8"/>
+            </a:solidFill>
+            <a:prstDash val="solid"/>
+          </a:ln>
+        </p:spPr>
+      </p:sp>
+      <p:sp>
+        <p:nvSpPr>
+          <p:cNvPr id="15" name="Shape 13"/>
+          <p:cNvSpPr/>
+          <p:nvPr/>
+        </p:nvSpPr>
+        <p:spPr>
+          <a:xfrm>
+            <a:off x="8202168" y="3721608"/>
+            <a:ext cx="2340864" cy="0"/>
+          </a:xfrm>
+          <a:prstGeom prst="line">
+            <a:avLst/>
+          </a:prstGeom>
+          <a:noFill/>
+          <a:ln w="19050">
+            <a:solidFill>
+              <a:srgbClr val="0068B7"/>
+            </a:solidFill>
+            <a:prstDash val="solid"/>
+          </a:ln>
+        </p:spPr>
+      </p:sp>
+      <p:sp>
+        <p:nvSpPr>
+          <p:cNvPr id="16" name="Shape 14"/>
+          <p:cNvSpPr/>
+          <p:nvPr/>
+        </p:nvSpPr>
+        <p:spPr>
+          <a:xfrm>
+            <a:off x="9198864" y="4206240"/>
+            <a:ext cx="347472" cy="347472"/>
+          </a:xfrm>
+          <a:prstGeom prst="ellipse">
+            <a:avLst/>
+          </a:prstGeom>
+          <a:solidFill>
+            <a:srgbClr val="2F8A28"/>
+          </a:solidFill>
+          <a:ln w="12700">
+            <a:solidFill>
+              <a:srgbClr val="2F8A28"/>
+            </a:solidFill>
+            <a:prstDash val="solid"/>
+          </a:ln>
+        </p:spPr>
+      </p:sp>
+      <p:sp>
+        <p:nvSpPr>
+          <p:cNvPr id="17" name="Text 15"/>
+          <p:cNvSpPr/>
+          <p:nvPr/>
+        </p:nvSpPr>
+        <p:spPr>
+          <a:xfrm>
+            <a:off x="7909560" y="3977640"/>
+            <a:ext cx="2926080" cy="182880"/>
+          </a:xfrm>
+          <a:prstGeom prst="rect">
+            <a:avLst/>
+          </a:prstGeom>
+          <a:noFill/>
+          <a:ln/>
+        </p:spPr>
+        <p:txBody>
+          <a:bodyPr wrap="square" lIns="0" tIns="0" rIns="0" bIns="0" rtlCol="0" anchor="ctr"/>
+          <a:lstStyle/>
+          <a:p>
+            <a:pPr algn="ctr" indent="0" marL="0">
+              <a:buNone/>
+            </a:pPr>
+            <a:r>
+              <a:rPr lang="en-US" sz="1000" dirty="0">
+                <a:solidFill>
+                  <a:srgbClr val="003A63"/>
+                </a:solidFill>
+                <a:latin typeface="Aptos" pitchFamily="34" charset="0"/>
+                <a:ea typeface="Aptos" pitchFamily="34" charset="-122"/>
+                <a:cs typeface="Aptos" pitchFamily="34" charset="-120"/>
+              </a:rPr>
+              <a:t>Concept to action</a:t>
+            </a:r>
+            <a:endParaRPr lang="en-US" sz="1000" dirty="0"/>
+          </a:p>
+        </p:txBody>
+      </p:sp>
+      <p:sp>
+        <p:nvSpPr>
+          <p:cNvPr id="18" name="Shape 16"/>
+          <p:cNvSpPr/>
+          <p:nvPr/>
+        </p:nvSpPr>
+        <p:spPr>
+          <a:xfrm>
+            <a:off x="7635240" y="4498848"/>
+            <a:ext cx="3474720" cy="1143000"/>
+          </a:xfrm>
+          <a:prstGeom prst="roundRect">
+            <a:avLst>
+              <a:gd name="adj" fmla="val 9600"/>
             </a:avLst>
           </a:prstGeom>
           <a:solidFill>
@@ -14154,14 +15385,14 @@
       </p:sp>
       <p:sp>
         <p:nvSpPr>
-          <p:cNvPr id="16" name="Text 14"/>
-          <p:cNvSpPr/>
-          <p:nvPr/>
-        </p:nvSpPr>
-        <p:spPr>
-          <a:xfrm>
-            <a:off x="8074152" y="3666744"/>
-            <a:ext cx="2825496" cy="256032"/>
+          <p:cNvPr id="19" name="Text 17"/>
+          <p:cNvSpPr/>
+          <p:nvPr/>
+        </p:nvSpPr>
+        <p:spPr>
+          <a:xfrm>
+            <a:off x="7799832" y="4645152"/>
+            <a:ext cx="3145536" cy="256032"/>
           </a:xfrm>
           <a:prstGeom prst="rect">
             <a:avLst/>
@@ -14185,7 +15416,7 @@
                 <a:ea typeface="Aptos" pitchFamily="34" charset="-122"/>
                 <a:cs typeface="Aptos" pitchFamily="34" charset="-120"/>
               </a:rPr>
-              <a:t>Use this for</a:t>
+              <a:t>Apply it</a:t>
             </a:r>
             <a:endParaRPr lang="en-US" sz="1300" dirty="0"/>
           </a:p>
@@ -14193,14 +15424,14 @@
       </p:sp>
       <p:sp>
         <p:nvSpPr>
-          <p:cNvPr id="17" name="Text 15"/>
-          <p:cNvSpPr/>
-          <p:nvPr/>
-        </p:nvSpPr>
-        <p:spPr>
-          <a:xfrm>
-            <a:off x="8074152" y="4023360"/>
-            <a:ext cx="2825496" cy="1097280"/>
+          <p:cNvPr id="20" name="Text 18"/>
+          <p:cNvSpPr/>
+          <p:nvPr/>
+        </p:nvSpPr>
+        <p:spPr>
+          <a:xfrm>
+            <a:off x="7799832" y="5001768"/>
+            <a:ext cx="3145536" cy="502920"/>
           </a:xfrm>
           <a:prstGeom prst="rect">
             <a:avLst/>
@@ -14226,7 +15457,7 @@
                 <a:ea typeface="Aptos" pitchFamily="34" charset="-122"/>
                 <a:cs typeface="Aptos" pitchFamily="34" charset="-120"/>
               </a:rPr>
-              <a:t>Connect the concept to public health decisions, safeguards, documentation, or implementation work.</a:t>
+              <a:t>Connect the concept to public health purpose, responsible use, required safeguards, documentation, and the next action a department should take.</a:t>
             </a:r>
             <a:endParaRPr lang="en-US" sz="1550" dirty="0"/>
           </a:p>
@@ -14400,8 +15631,8 @@
         </p:nvSpPr>
         <p:spPr>
           <a:xfrm>
-            <a:off x="9966960" y="6537960"/>
-            <a:ext cx="1645920" cy="201168"/>
+            <a:off x="9646920" y="6537960"/>
+            <a:ext cx="1965960" cy="201168"/>
           </a:xfrm>
           <a:prstGeom prst="rect">
             <a:avLst/>
@@ -14425,7 +15656,7 @@
                 <a:ea typeface="Aptos" pitchFamily="34" charset="-122"/>
                 <a:cs typeface="Aptos" pitchFamily="34" charset="-120"/>
               </a:rPr>
-              <a:t>Â© Paula Soper</a:t>
+              <a:t>Copyright Paula Soper</a:t>
             </a:r>
             <a:endParaRPr lang="en-US" sz="800" dirty="0"/>
           </a:p>
@@ -14472,14 +15703,257 @@
       </p:sp>
       <p:sp>
         <p:nvSpPr>
-          <p:cNvPr id="8" name="Shape 6"/>
+          <p:cNvPr id="8" name="Text 6"/>
           <p:cNvSpPr/>
           <p:nvPr/>
         </p:nvSpPr>
         <p:spPr>
           <a:xfrm>
             <a:off x="640080" y="658368"/>
-            <a:ext cx="420624" cy="420624"/>
+            <a:ext cx="10881360" cy="713232"/>
+          </a:xfrm>
+          <a:prstGeom prst="rect">
+            <a:avLst/>
+          </a:prstGeom>
+          <a:noFill/>
+          <a:ln/>
+        </p:spPr>
+        <p:txBody>
+          <a:bodyPr wrap="square" lIns="0" tIns="0" rIns="0" bIns="0" rtlCol="0" anchor="ctr">
+            <a:normAutofit/>
+          </a:bodyPr>
+          <a:lstStyle/>
+          <a:p>
+            <a:pPr indent="0" marL="0">
+              <a:buNone/>
+            </a:pPr>
+            <a:r>
+              <a:rPr lang="en-US" sz="3400" b="1" dirty="0">
+                <a:solidFill>
+                  <a:srgbClr val="003A63"/>
+                </a:solidFill>
+                <a:latin typeface="Aptos Display" pitchFamily="34" charset="0"/>
+                <a:ea typeface="Aptos Display" pitchFamily="34" charset="-122"/>
+                <a:cs typeface="Aptos Display" pitchFamily="34" charset="-120"/>
+              </a:rPr>
+              <a:t>Technical and Governance Deep Dive</a:t>
+            </a:r>
+            <a:endParaRPr lang="en-US" sz="3400" dirty="0"/>
+          </a:p>
+        </p:txBody>
+      </p:sp>
+      <p:sp>
+        <p:nvSpPr>
+          <p:cNvPr id="9" name="Text 7"/>
+          <p:cNvSpPr/>
+          <p:nvPr/>
+        </p:nvSpPr>
+        <p:spPr>
+          <a:xfrm>
+            <a:off x="868680" y="1508760"/>
+            <a:ext cx="6309360" cy="4160520"/>
+          </a:xfrm>
+          <a:prstGeom prst="rect">
+            <a:avLst/>
+          </a:prstGeom>
+          <a:noFill/>
+          <a:ln/>
+        </p:spPr>
+        <p:txBody>
+          <a:bodyPr wrap="square" lIns="635" tIns="635" rIns="635" bIns="635" rtlCol="0" anchor="t">
+            <a:normAutofit/>
+          </a:bodyPr>
+          <a:lstStyle/>
+          <a:p>
+            <a:r>
+              <a:rPr lang="en-US" sz="2100" dirty="0">
+                <a:solidFill>
+                  <a:srgbClr val="17364A"/>
+                </a:solidFill>
+                <a:latin typeface="Aptos" pitchFamily="34" charset="0"/>
+                <a:ea typeface="Aptos" pitchFamily="34" charset="-122"/>
+                <a:cs typeface="Aptos" pitchFamily="34" charset="-120"/>
+              </a:rPr>
+              <a:t>An AI workforce strategy should define role groups.</a:t>
+            </a:r>
+            <a:endParaRPr lang="en-US" sz="2100" dirty="0"/>
+          </a:p>
+          <a:p>
+            <a:r>
+              <a:rPr lang="en-US" sz="2100" dirty="0">
+                <a:solidFill>
+                  <a:srgbClr val="17364A"/>
+                </a:solidFill>
+                <a:latin typeface="Aptos" pitchFamily="34" charset="0"/>
+                <a:ea typeface="Aptos" pitchFamily="34" charset="-122"/>
+                <a:cs typeface="Aptos" pitchFamily="34" charset="-120"/>
+              </a:rPr>
+              <a:t>General staff may need baseline AI literacy, approved-use guidance, and prompt safety.</a:t>
+            </a:r>
+            <a:endParaRPr lang="en-US" sz="2100" dirty="0"/>
+          </a:p>
+          <a:p>
+            <a:r>
+              <a:rPr lang="en-US" sz="2100" dirty="0">
+                <a:solidFill>
+                  <a:srgbClr val="17364A"/>
+                </a:solidFill>
+                <a:latin typeface="Aptos" pitchFamily="34" charset="0"/>
+                <a:ea typeface="Aptos" pitchFamily="34" charset="-122"/>
+                <a:cs typeface="Aptos" pitchFamily="34" charset="-120"/>
+              </a:rPr>
+              <a:t>Frontline users need workflow-specific training and escalation expectations.</a:t>
+            </a:r>
+            <a:endParaRPr lang="en-US" sz="2100" dirty="0"/>
+          </a:p>
+        </p:txBody>
+      </p:sp>
+      <p:sp>
+        <p:nvSpPr>
+          <p:cNvPr id="10" name="Shape 8"/>
+          <p:cNvSpPr/>
+          <p:nvPr/>
+        </p:nvSpPr>
+        <p:spPr>
+          <a:xfrm>
+            <a:off x="7635240" y="1325880"/>
+            <a:ext cx="3474720" cy="1325880"/>
+          </a:xfrm>
+          <a:prstGeom prst="roundRect">
+            <a:avLst>
+              <a:gd name="adj" fmla="val 8276"/>
+            </a:avLst>
+          </a:prstGeom>
+          <a:solidFill>
+            <a:srgbClr val="EEF8ED"/>
+          </a:solidFill>
+          <a:ln w="12700">
+            <a:solidFill>
+              <a:srgbClr val="B9D7E6"/>
+            </a:solidFill>
+            <a:prstDash val="solid"/>
+          </a:ln>
+        </p:spPr>
+      </p:sp>
+      <p:sp>
+        <p:nvSpPr>
+          <p:cNvPr id="11" name="Text 9"/>
+          <p:cNvSpPr/>
+          <p:nvPr/>
+        </p:nvSpPr>
+        <p:spPr>
+          <a:xfrm>
+            <a:off x="7799832" y="1472184"/>
+            <a:ext cx="3145536" cy="256032"/>
+          </a:xfrm>
+          <a:prstGeom prst="rect">
+            <a:avLst/>
+          </a:prstGeom>
+          <a:noFill/>
+          <a:ln/>
+        </p:spPr>
+        <p:txBody>
+          <a:bodyPr wrap="square" lIns="0" tIns="0" rIns="0" bIns="0" rtlCol="0" anchor="ctr"/>
+          <a:lstStyle/>
+          <a:p>
+            <a:pPr indent="0" marL="0">
+              <a:buNone/>
+            </a:pPr>
+            <a:r>
+              <a:rPr lang="en-US" sz="1300" b="1" dirty="0">
+                <a:solidFill>
+                  <a:srgbClr val="0068B7"/>
+                </a:solidFill>
+                <a:latin typeface="Aptos" pitchFamily="34" charset="0"/>
+                <a:ea typeface="Aptos" pitchFamily="34" charset="-122"/>
+                <a:cs typeface="Aptos" pitchFamily="34" charset="-120"/>
+              </a:rPr>
+              <a:t>Governance lens</a:t>
+            </a:r>
+            <a:endParaRPr lang="en-US" sz="1300" dirty="0"/>
+          </a:p>
+        </p:txBody>
+      </p:sp>
+      <p:sp>
+        <p:nvSpPr>
+          <p:cNvPr id="12" name="Text 10"/>
+          <p:cNvSpPr/>
+          <p:nvPr/>
+        </p:nvSpPr>
+        <p:spPr>
+          <a:xfrm>
+            <a:off x="7799832" y="1828800"/>
+            <a:ext cx="3145536" cy="685800"/>
+          </a:xfrm>
+          <a:prstGeom prst="rect">
+            <a:avLst/>
+          </a:prstGeom>
+          <a:noFill/>
+          <a:ln/>
+        </p:spPr>
+        <p:txBody>
+          <a:bodyPr wrap="square" lIns="0" tIns="0" rIns="0" bIns="0" rtlCol="0" anchor="t">
+            <a:normAutofit/>
+          </a:bodyPr>
+          <a:lstStyle/>
+          <a:p>
+            <a:pPr indent="0" marL="0">
+              <a:buNone/>
+            </a:pPr>
+            <a:r>
+              <a:rPr lang="en-US" sz="1550" dirty="0">
+                <a:solidFill>
+                  <a:srgbClr val="17364A"/>
+                </a:solidFill>
+                <a:latin typeface="Aptos" pitchFamily="34" charset="0"/>
+                <a:ea typeface="Aptos" pitchFamily="34" charset="-122"/>
+                <a:cs typeface="Aptos" pitchFamily="34" charset="-120"/>
+              </a:rPr>
+              <a:t>An AI workforce strategy should define role groups.</a:t>
+            </a:r>
+            <a:endParaRPr lang="en-US" sz="1550" dirty="0"/>
+          </a:p>
+        </p:txBody>
+      </p:sp>
+      <p:sp>
+        <p:nvSpPr>
+          <p:cNvPr id="13" name="Shape 11"/>
+          <p:cNvSpPr/>
+          <p:nvPr/>
+        </p:nvSpPr>
+        <p:spPr>
+          <a:xfrm>
+            <a:off x="7635240" y="2788920"/>
+            <a:ext cx="3474720" cy="1536192"/>
+          </a:xfrm>
+          <a:prstGeom prst="roundRect">
+            <a:avLst>
+              <a:gd name="adj" fmla="val 7143"/>
+            </a:avLst>
+          </a:prstGeom>
+          <a:solidFill>
+            <a:srgbClr val="FFFFFF">
+              <a:alpha val="88000"/>
+            </a:srgbClr>
+          </a:solidFill>
+          <a:ln w="12700">
+            <a:solidFill>
+              <a:srgbClr val="D6E8F2"/>
+            </a:solidFill>
+            <a:prstDash val="solid"/>
+          </a:ln>
+        </p:spPr>
+      </p:sp>
+      <p:sp>
+        <p:nvSpPr>
+          <p:cNvPr id="14" name="Shape 12"/>
+          <p:cNvSpPr/>
+          <p:nvPr/>
+        </p:nvSpPr>
+        <p:spPr>
+          <a:xfrm>
+            <a:off x="7891272" y="3108960"/>
+            <a:ext cx="566928" cy="566928"/>
           </a:xfrm>
           <a:prstGeom prst="ellipse">
             <a:avLst/>
@@ -14497,172 +15971,24 @@
       </p:sp>
       <p:sp>
         <p:nvSpPr>
-          <p:cNvPr id="9" name="Text 7"/>
-          <p:cNvSpPr/>
-          <p:nvPr/>
-        </p:nvSpPr>
-        <p:spPr>
-          <a:xfrm>
-            <a:off x="640080" y="731520"/>
-            <a:ext cx="420624" cy="164592"/>
-          </a:xfrm>
-          <a:prstGeom prst="rect">
-            <a:avLst/>
-          </a:prstGeom>
-          <a:noFill/>
-          <a:ln/>
-        </p:spPr>
-        <p:txBody>
-          <a:bodyPr wrap="square" lIns="0" tIns="0" rIns="0" bIns="0" rtlCol="0" anchor="ctr"/>
-          <a:lstStyle/>
-          <a:p>
-            <a:pPr algn="ctr" indent="0" marL="0">
-              <a:buNone/>
-            </a:pPr>
-            <a:r>
-              <a:rPr lang="en-US" sz="1100" b="1" dirty="0">
-                <a:solidFill>
-                  <a:srgbClr val="FFFFFF"/>
-                </a:solidFill>
-                <a:latin typeface="Aptos" pitchFamily="34" charset="0"/>
-                <a:ea typeface="Aptos" pitchFamily="34" charset="-122"/>
-                <a:cs typeface="Aptos" pitchFamily="34" charset="-120"/>
-              </a:rPr>
-              <a:t>5</a:t>
-            </a:r>
-            <a:endParaRPr lang="en-US" sz="1100" dirty="0"/>
-          </a:p>
-        </p:txBody>
-      </p:sp>
-      <p:sp>
-        <p:nvSpPr>
-          <p:cNvPr id="10" name="Text 8"/>
-          <p:cNvSpPr/>
-          <p:nvPr/>
-        </p:nvSpPr>
-        <p:spPr>
-          <a:xfrm>
-            <a:off x="640080" y="621792"/>
-            <a:ext cx="10881360" cy="713232"/>
-          </a:xfrm>
-          <a:prstGeom prst="rect">
-            <a:avLst/>
-          </a:prstGeom>
-          <a:noFill/>
-          <a:ln/>
-        </p:spPr>
-        <p:txBody>
-          <a:bodyPr wrap="square" lIns="0" tIns="0" rIns="0" bIns="0" rtlCol="0" anchor="ctr">
-            <a:normAutofit/>
-          </a:bodyPr>
-          <a:lstStyle/>
-          <a:p>
-            <a:pPr indent="0" marL="0">
-              <a:buNone/>
-            </a:pPr>
-            <a:r>
-              <a:rPr lang="en-US" sz="3400" b="1" dirty="0">
-                <a:solidFill>
-                  <a:srgbClr val="003A63"/>
-                </a:solidFill>
-                <a:latin typeface="Aptos Display" pitchFamily="34" charset="0"/>
-                <a:ea typeface="Aptos Display" pitchFamily="34" charset="-122"/>
-                <a:cs typeface="Aptos Display" pitchFamily="34" charset="-120"/>
-              </a:rPr>
-              <a:t>Technical and Governance Deep Dive</a:t>
-            </a:r>
-            <a:endParaRPr lang="en-US" sz="3400" dirty="0"/>
-          </a:p>
-        </p:txBody>
-      </p:sp>
-      <p:sp>
-        <p:nvSpPr>
-          <p:cNvPr id="11" name="Text 9"/>
-          <p:cNvSpPr/>
-          <p:nvPr/>
-        </p:nvSpPr>
-        <p:spPr>
-          <a:xfrm>
-            <a:off x="868680" y="1508760"/>
-            <a:ext cx="6537960" cy="4160520"/>
-          </a:xfrm>
-          <a:prstGeom prst="rect">
-            <a:avLst/>
-          </a:prstGeom>
-          <a:noFill/>
-          <a:ln/>
-        </p:spPr>
-        <p:txBody>
-          <a:bodyPr wrap="square" lIns="635" tIns="635" rIns="635" bIns="635" rtlCol="0" anchor="t">
-            <a:normAutofit/>
-          </a:bodyPr>
-          <a:lstStyle/>
-          <a:p>
-            <a:r>
-              <a:rPr lang="en-US" sz="2100" dirty="0">
-                <a:solidFill>
-                  <a:srgbClr val="17364A"/>
-                </a:solidFill>
-                <a:latin typeface="Aptos" pitchFamily="34" charset="0"/>
-                <a:ea typeface="Aptos" pitchFamily="34" charset="-122"/>
-                <a:cs typeface="Aptos" pitchFamily="34" charset="-120"/>
-              </a:rPr>
-              <a:t>An AI workforce strategy should define role groups.</a:t>
-            </a:r>
-            <a:endParaRPr lang="en-US" sz="2100" dirty="0"/>
-          </a:p>
-          <a:p>
-            <a:r>
-              <a:rPr lang="en-US" sz="2100" dirty="0">
-                <a:solidFill>
-                  <a:srgbClr val="17364A"/>
-                </a:solidFill>
-                <a:latin typeface="Aptos" pitchFamily="34" charset="0"/>
-                <a:ea typeface="Aptos" pitchFamily="34" charset="-122"/>
-                <a:cs typeface="Aptos" pitchFamily="34" charset="-120"/>
-              </a:rPr>
-              <a:t>General staff may need baseline AI literacy, approved-use guidance, and prompt safety.</a:t>
-            </a:r>
-            <a:endParaRPr lang="en-US" sz="2100" dirty="0"/>
-          </a:p>
-          <a:p>
-            <a:r>
-              <a:rPr lang="en-US" sz="2100" dirty="0">
-                <a:solidFill>
-                  <a:srgbClr val="17364A"/>
-                </a:solidFill>
-                <a:latin typeface="Aptos" pitchFamily="34" charset="0"/>
-                <a:ea typeface="Aptos" pitchFamily="34" charset="-122"/>
-                <a:cs typeface="Aptos" pitchFamily="34" charset="-120"/>
-              </a:rPr>
-              <a:t>Frontline users need workflow-specific training and escalation expectations.</a:t>
-            </a:r>
-            <a:endParaRPr lang="en-US" sz="2100" dirty="0"/>
-          </a:p>
-        </p:txBody>
-      </p:sp>
-      <p:sp>
-        <p:nvSpPr>
-          <p:cNvPr id="12" name="Shape 10"/>
-          <p:cNvSpPr/>
-          <p:nvPr/>
-        </p:nvSpPr>
-        <p:spPr>
-          <a:xfrm>
-            <a:off x="7909560" y="1417320"/>
-            <a:ext cx="3154680" cy="1828800"/>
-          </a:xfrm>
-          <a:prstGeom prst="roundRect">
-            <a:avLst>
-              <a:gd name="adj" fmla="val 6000"/>
-            </a:avLst>
+          <p:cNvPr id="15" name="Shape 13"/>
+          <p:cNvSpPr/>
+          <p:nvPr/>
+        </p:nvSpPr>
+        <p:spPr>
+          <a:xfrm>
+            <a:off x="10287000" y="3108960"/>
+            <a:ext cx="566928" cy="566928"/>
+          </a:xfrm>
+          <a:prstGeom prst="ellipse">
+            <a:avLst/>
           </a:prstGeom>
           <a:solidFill>
-            <a:srgbClr val="EEF8ED"/>
+            <a:srgbClr val="2F8A28"/>
           </a:solidFill>
           <a:ln w="12700">
             <a:solidFill>
-              <a:srgbClr val="B9D7E6"/>
+              <a:srgbClr val="2F8A28"/>
             </a:solidFill>
             <a:prstDash val="solid"/>
           </a:ln>
@@ -14670,14 +15996,108 @@
       </p:sp>
       <p:sp>
         <p:nvSpPr>
-          <p:cNvPr id="13" name="Text 11"/>
-          <p:cNvSpPr/>
-          <p:nvPr/>
-        </p:nvSpPr>
-        <p:spPr>
-          <a:xfrm>
-            <a:off x="8074152" y="1563624"/>
-            <a:ext cx="2825496" cy="256032"/>
+          <p:cNvPr id="16" name="Shape 14"/>
+          <p:cNvSpPr/>
+          <p:nvPr/>
+        </p:nvSpPr>
+        <p:spPr>
+          <a:xfrm>
+            <a:off x="9089136" y="3456432"/>
+            <a:ext cx="566928" cy="566928"/>
+          </a:xfrm>
+          <a:prstGeom prst="ellipse">
+            <a:avLst/>
+          </a:prstGeom>
+          <a:solidFill>
+            <a:srgbClr val="6A4CA3"/>
+          </a:solidFill>
+          <a:ln w="12700">
+            <a:solidFill>
+              <a:srgbClr val="6A4CA3"/>
+            </a:solidFill>
+            <a:prstDash val="solid"/>
+          </a:ln>
+        </p:spPr>
+      </p:sp>
+      <p:sp>
+        <p:nvSpPr>
+          <p:cNvPr id="17" name="Shape 15"/>
+          <p:cNvSpPr/>
+          <p:nvPr/>
+        </p:nvSpPr>
+        <p:spPr>
+          <a:xfrm>
+            <a:off x="8385048" y="3419856"/>
+            <a:ext cx="1975104" cy="0"/>
+          </a:xfrm>
+          <a:prstGeom prst="line">
+            <a:avLst/>
+          </a:prstGeom>
+          <a:noFill/>
+          <a:ln w="25400">
+            <a:solidFill>
+              <a:srgbClr val="8ABBD8"/>
+            </a:solidFill>
+            <a:prstDash val="solid"/>
+          </a:ln>
+        </p:spPr>
+      </p:sp>
+      <p:sp>
+        <p:nvSpPr>
+          <p:cNvPr id="18" name="Shape 16"/>
+          <p:cNvSpPr/>
+          <p:nvPr/>
+        </p:nvSpPr>
+        <p:spPr>
+          <a:xfrm>
+            <a:off x="8202168" y="3630168"/>
+            <a:ext cx="1170432" cy="118872"/>
+          </a:xfrm>
+          <a:prstGeom prst="line">
+            <a:avLst/>
+          </a:prstGeom>
+          <a:noFill/>
+          <a:ln w="25400">
+            <a:solidFill>
+              <a:srgbClr val="8ABBD8"/>
+            </a:solidFill>
+            <a:prstDash val="solid"/>
+          </a:ln>
+        </p:spPr>
+      </p:sp>
+      <p:sp>
+        <p:nvSpPr>
+          <p:cNvPr id="19" name="Shape 17"/>
+          <p:cNvSpPr/>
+          <p:nvPr/>
+        </p:nvSpPr>
+        <p:spPr>
+          <a:xfrm>
+            <a:off x="10543032" y="3630168"/>
+            <a:ext cx="-1170432" cy="118872"/>
+          </a:xfrm>
+          <a:prstGeom prst="line">
+            <a:avLst/>
+          </a:prstGeom>
+          <a:noFill/>
+          <a:ln w="25400">
+            <a:solidFill>
+              <a:srgbClr val="8ABBD8"/>
+            </a:solidFill>
+            <a:prstDash val="solid"/>
+          </a:ln>
+        </p:spPr>
+      </p:sp>
+      <p:sp>
+        <p:nvSpPr>
+          <p:cNvPr id="20" name="Text 18"/>
+          <p:cNvSpPr/>
+          <p:nvPr/>
+        </p:nvSpPr>
+        <p:spPr>
+          <a:xfrm>
+            <a:off x="7863840" y="4069080"/>
+            <a:ext cx="3017520" cy="164592"/>
           </a:xfrm>
           <a:prstGeom prst="rect">
             <a:avLst/>
@@ -14689,79 +16109,38 @@
           <a:bodyPr wrap="square" lIns="0" tIns="0" rIns="0" bIns="0" rtlCol="0" anchor="ctr"/>
           <a:lstStyle/>
           <a:p>
-            <a:pPr indent="0" marL="0">
-              <a:buNone/>
-            </a:pPr>
-            <a:r>
-              <a:rPr lang="en-US" sz="1300" b="1" dirty="0">
-                <a:solidFill>
-                  <a:srgbClr val="0068B7"/>
-                </a:solidFill>
-                <a:latin typeface="Aptos" pitchFamily="34" charset="0"/>
-                <a:ea typeface="Aptos" pitchFamily="34" charset="-122"/>
-                <a:cs typeface="Aptos" pitchFamily="34" charset="-120"/>
-              </a:rPr>
-              <a:t>Key idea</a:t>
-            </a:r>
-            <a:endParaRPr lang="en-US" sz="1300" dirty="0"/>
-          </a:p>
-        </p:txBody>
-      </p:sp>
-      <p:sp>
-        <p:nvSpPr>
-          <p:cNvPr id="14" name="Text 12"/>
-          <p:cNvSpPr/>
-          <p:nvPr/>
-        </p:nvSpPr>
-        <p:spPr>
-          <a:xfrm>
-            <a:off x="8074152" y="1920240"/>
-            <a:ext cx="2825496" cy="1188720"/>
-          </a:xfrm>
-          <a:prstGeom prst="rect">
-            <a:avLst/>
-          </a:prstGeom>
-          <a:noFill/>
-          <a:ln/>
-        </p:spPr>
-        <p:txBody>
-          <a:bodyPr wrap="square" lIns="0" tIns="0" rIns="0" bIns="0" rtlCol="0" anchor="t">
-            <a:normAutofit/>
-          </a:bodyPr>
-          <a:lstStyle/>
-          <a:p>
-            <a:pPr indent="0" marL="0">
-              <a:buNone/>
-            </a:pPr>
-            <a:r>
-              <a:rPr lang="en-US" sz="1550" dirty="0">
-                <a:solidFill>
-                  <a:srgbClr val="17364A"/>
-                </a:solidFill>
-                <a:latin typeface="Aptos" pitchFamily="34" charset="0"/>
-                <a:ea typeface="Aptos" pitchFamily="34" charset="-122"/>
-                <a:cs typeface="Aptos" pitchFamily="34" charset="-120"/>
-              </a:rPr>
-              <a:t>An AI workforce strategy should define role groups.</a:t>
-            </a:r>
-            <a:endParaRPr lang="en-US" sz="1550" dirty="0"/>
-          </a:p>
-        </p:txBody>
-      </p:sp>
-      <p:sp>
-        <p:nvSpPr>
-          <p:cNvPr id="15" name="Shape 13"/>
-          <p:cNvSpPr/>
-          <p:nvPr/>
-        </p:nvSpPr>
-        <p:spPr>
-          <a:xfrm>
-            <a:off x="7909560" y="3520440"/>
-            <a:ext cx="3154680" cy="1737360"/>
+            <a:pPr algn="ctr" indent="0" marL="0">
+              <a:buNone/>
+            </a:pPr>
+            <a:r>
+              <a:rPr lang="en-US" sz="900" b="1" dirty="0">
+                <a:solidFill>
+                  <a:srgbClr val="003A63"/>
+                </a:solidFill>
+                <a:latin typeface="Aptos" pitchFamily="34" charset="0"/>
+                <a:ea typeface="Aptos" pitchFamily="34" charset="-122"/>
+                <a:cs typeface="Aptos" pitchFamily="34" charset="-120"/>
+              </a:rPr>
+              <a:t>Decision rights</a:t>
+            </a:r>
+            <a:endParaRPr lang="en-US" sz="900" dirty="0"/>
+          </a:p>
+        </p:txBody>
+      </p:sp>
+      <p:sp>
+        <p:nvSpPr>
+          <p:cNvPr id="21" name="Shape 19"/>
+          <p:cNvSpPr/>
+          <p:nvPr/>
+        </p:nvSpPr>
+        <p:spPr>
+          <a:xfrm>
+            <a:off x="7635240" y="4498848"/>
+            <a:ext cx="3474720" cy="1143000"/>
           </a:xfrm>
           <a:prstGeom prst="roundRect">
             <a:avLst>
-              <a:gd name="adj" fmla="val 6316"/>
+              <a:gd name="adj" fmla="val 9600"/>
             </a:avLst>
           </a:prstGeom>
           <a:solidFill>
@@ -14777,14 +16156,14 @@
       </p:sp>
       <p:sp>
         <p:nvSpPr>
-          <p:cNvPr id="16" name="Text 14"/>
-          <p:cNvSpPr/>
-          <p:nvPr/>
-        </p:nvSpPr>
-        <p:spPr>
-          <a:xfrm>
-            <a:off x="8074152" y="3666744"/>
-            <a:ext cx="2825496" cy="256032"/>
+          <p:cNvPr id="22" name="Text 20"/>
+          <p:cNvSpPr/>
+          <p:nvPr/>
+        </p:nvSpPr>
+        <p:spPr>
+          <a:xfrm>
+            <a:off x="7799832" y="4645152"/>
+            <a:ext cx="3145536" cy="256032"/>
           </a:xfrm>
           <a:prstGeom prst="rect">
             <a:avLst/>
@@ -14808,7 +16187,7 @@
                 <a:ea typeface="Aptos" pitchFamily="34" charset="-122"/>
                 <a:cs typeface="Aptos" pitchFamily="34" charset="-120"/>
               </a:rPr>
-              <a:t>Use this for</a:t>
+              <a:t>What to document</a:t>
             </a:r>
             <a:endParaRPr lang="en-US" sz="1300" dirty="0"/>
           </a:p>
@@ -14816,14 +16195,14 @@
       </p:sp>
       <p:sp>
         <p:nvSpPr>
-          <p:cNvPr id="17" name="Text 15"/>
-          <p:cNvSpPr/>
-          <p:nvPr/>
-        </p:nvSpPr>
-        <p:spPr>
-          <a:xfrm>
-            <a:off x="8074152" y="4023360"/>
-            <a:ext cx="2825496" cy="1097280"/>
+          <p:cNvPr id="23" name="Text 21"/>
+          <p:cNvSpPr/>
+          <p:nvPr/>
+        </p:nvSpPr>
+        <p:spPr>
+          <a:xfrm>
+            <a:off x="7799832" y="5001768"/>
+            <a:ext cx="3145536" cy="502920"/>
           </a:xfrm>
           <a:prstGeom prst="rect">
             <a:avLst/>
@@ -14849,7 +16228,7 @@
                 <a:ea typeface="Aptos" pitchFamily="34" charset="-122"/>
                 <a:cs typeface="Aptos" pitchFamily="34" charset="-120"/>
               </a:rPr>
-              <a:t>Connect the concept to public health decisions, safeguards, documentation, or implementation work.</a:t>
+              <a:t>Translate this concept into clear decision rights, review steps, documentation expectations, and escalation paths before an AI-supported workflow is approved.</a:t>
             </a:r>
             <a:endParaRPr lang="en-US" sz="1550" dirty="0"/>
           </a:p>

--- a/downloads/presentations/modules/exe-440.pptx
+++ b/downloads/presentations/modules/exe-440.pptx
@@ -3334,13 +3334,11 @@
             </a:avLst>
           </a:prstGeom>
           <a:solidFill>
-            <a:srgbClr val="FFFFFF">
-              <a:alpha val="88000"/>
-            </a:srgbClr>
+            <a:srgbClr val="FFFFFF"/>
           </a:solidFill>
           <a:ln w="12700">
             <a:solidFill>
-              <a:srgbClr val="D6E8F2"/>
+              <a:srgbClr val="B9D7E6"/>
             </a:solidFill>
             <a:prstDash val="solid"/>
           </a:ln>
@@ -3348,26 +3346,42 @@
       </p:sp>
       <p:sp>
         <p:nvSpPr>
-          <p:cNvPr id="14" name="Shape 12"/>
-          <p:cNvSpPr/>
-          <p:nvPr/>
-        </p:nvSpPr>
-        <p:spPr>
-          <a:xfrm>
-            <a:off x="8046720" y="3108960"/>
-            <a:ext cx="2651760" cy="896112"/>
-          </a:xfrm>
-          <a:prstGeom prst="arc">
-            <a:avLst/>
-          </a:prstGeom>
-          <a:noFill/>
-          <a:ln w="25400">
-            <a:solidFill>
-              <a:srgbClr val="0068B7"/>
-            </a:solidFill>
-            <a:prstDash val="solid"/>
-          </a:ln>
-        </p:spPr>
+          <p:cNvPr id="14" name="Text 12"/>
+          <p:cNvSpPr/>
+          <p:nvPr/>
+        </p:nvSpPr>
+        <p:spPr>
+          <a:xfrm>
+            <a:off x="7799832" y="2935224"/>
+            <a:ext cx="3145536" cy="256032"/>
+          </a:xfrm>
+          <a:prstGeom prst="rect">
+            <a:avLst/>
+          </a:prstGeom>
+          <a:noFill/>
+          <a:ln/>
+        </p:spPr>
+        <p:txBody>
+          <a:bodyPr wrap="square" lIns="0" tIns="0" rIns="0" bIns="0" rtlCol="0" anchor="ctr"/>
+          <a:lstStyle/>
+          <a:p>
+            <a:pPr indent="0" marL="0">
+              <a:buNone/>
+            </a:pPr>
+            <a:r>
+              <a:rPr lang="en-US" sz="1300" b="1" dirty="0">
+                <a:solidFill>
+                  <a:srgbClr val="0068B7"/>
+                </a:solidFill>
+                <a:latin typeface="Aptos" pitchFamily="34" charset="0"/>
+                <a:ea typeface="Aptos" pitchFamily="34" charset="-122"/>
+                <a:cs typeface="Aptos" pitchFamily="34" charset="-120"/>
+              </a:rPr>
+              <a:t>Concept checkpoints</a:t>
+            </a:r>
+            <a:endParaRPr lang="en-US" sz="1300" dirty="0"/>
+          </a:p>
+        </p:txBody>
       </p:sp>
       <p:sp>
         <p:nvSpPr>
@@ -3377,102 +3391,67 @@
         </p:nvSpPr>
         <p:spPr>
           <a:xfrm>
-            <a:off x="7909560" y="3099816"/>
-            <a:ext cx="2926080" cy="256032"/>
-          </a:xfrm>
-          <a:prstGeom prst="rect">
-            <a:avLst/>
-          </a:prstGeom>
-          <a:noFill/>
-          <a:ln/>
-        </p:spPr>
-        <p:txBody>
-          <a:bodyPr wrap="square" lIns="0" tIns="0" rIns="0" bIns="0" rtlCol="0" anchor="ctr"/>
-          <a:lstStyle/>
-          <a:p>
-            <a:pPr algn="ctr" indent="0" marL="0">
-              <a:buNone/>
-            </a:pPr>
-            <a:r>
-              <a:rPr lang="en-US" sz="1500" b="1" dirty="0">
-                <a:solidFill>
-                  <a:srgbClr val="003A63"/>
-                </a:solidFill>
-                <a:latin typeface="Aptos" pitchFamily="34" charset="0"/>
-                <a:ea typeface="Aptos" pitchFamily="34" charset="-122"/>
-                <a:cs typeface="Aptos" pitchFamily="34" charset="-120"/>
-              </a:rPr>
-              <a:t>Risk</a:t>
-            </a:r>
-            <a:endParaRPr lang="en-US" sz="1500" dirty="0"/>
+            <a:off x="7818120" y="3300984"/>
+            <a:ext cx="3090672" cy="877824"/>
+          </a:xfrm>
+          <a:prstGeom prst="rect">
+            <a:avLst/>
+          </a:prstGeom>
+          <a:noFill/>
+          <a:ln/>
+        </p:spPr>
+        <p:txBody>
+          <a:bodyPr wrap="square" lIns="254" tIns="254" rIns="254" bIns="254" rtlCol="0" anchor="t">
+            <a:normAutofit/>
+          </a:bodyPr>
+          <a:lstStyle/>
+          <a:p>
+            <a:r>
+              <a:rPr lang="en-US" sz="1380" dirty="0">
+                <a:solidFill>
+                  <a:srgbClr val="17364A"/>
+                </a:solidFill>
+                <a:latin typeface="Aptos" pitchFamily="34" charset="0"/>
+                <a:ea typeface="Aptos" pitchFamily="34" charset="-122"/>
+                <a:cs typeface="Aptos" pitchFamily="34" charset="-120"/>
+              </a:rPr>
+              <a:t>Another risk is uneven access to AI skills.</a:t>
+            </a:r>
+            <a:endParaRPr lang="en-US" sz="1380" dirty="0"/>
+          </a:p>
+          <a:p>
+            <a:r>
+              <a:rPr lang="en-US" sz="1380" dirty="0">
+                <a:solidFill>
+                  <a:srgbClr val="17364A"/>
+                </a:solidFill>
+                <a:latin typeface="Aptos" pitchFamily="34" charset="0"/>
+                <a:ea typeface="Aptos" pitchFamily="34" charset="-122"/>
+                <a:cs typeface="Aptos" pitchFamily="34" charset="-120"/>
+              </a:rPr>
+              <a:t>Staff in better-resourced programs may receive training first, while others fall behind.</a:t>
+            </a:r>
+            <a:endParaRPr lang="en-US" sz="1380" dirty="0"/>
+          </a:p>
+          <a:p>
+            <a:r>
+              <a:rPr lang="en-US" sz="1380" dirty="0">
+                <a:solidFill>
+                  <a:srgbClr val="17364A"/>
+                </a:solidFill>
+                <a:latin typeface="Aptos" pitchFamily="34" charset="0"/>
+                <a:ea typeface="Aptos" pitchFamily="34" charset="-122"/>
+                <a:cs typeface="Aptos" pitchFamily="34" charset="-120"/>
+              </a:rPr>
+              <a:t>A guardrail is to create a role-based training plan that includes all relevant staff.</a:t>
+            </a:r>
+            <a:endParaRPr lang="en-US" sz="1380" dirty="0"/>
           </a:p>
         </p:txBody>
       </p:sp>
       <p:sp>
         <p:nvSpPr>
           <p:cNvPr id="16" name="Shape 14"/>
-          <p:cNvSpPr/>
-          <p:nvPr/>
-        </p:nvSpPr>
-        <p:spPr>
-          <a:xfrm>
-            <a:off x="8366760" y="3639312"/>
-            <a:ext cx="2011680" cy="0"/>
-          </a:xfrm>
-          <a:prstGeom prst="line">
-            <a:avLst/>
-          </a:prstGeom>
-          <a:noFill/>
-          <a:ln w="63500">
-            <a:solidFill>
-              <a:srgbClr val="2F8A28"/>
-            </a:solidFill>
-            <a:prstDash val="solid"/>
-          </a:ln>
-        </p:spPr>
-      </p:sp>
-      <p:sp>
-        <p:nvSpPr>
-          <p:cNvPr id="17" name="Text 15"/>
-          <p:cNvSpPr/>
-          <p:nvPr/>
-        </p:nvSpPr>
-        <p:spPr>
-          <a:xfrm>
-            <a:off x="7909560" y="3849624"/>
-            <a:ext cx="2926080" cy="164592"/>
-          </a:xfrm>
-          <a:prstGeom prst="rect">
-            <a:avLst/>
-          </a:prstGeom>
-          <a:noFill/>
-          <a:ln/>
-        </p:spPr>
-        <p:txBody>
-          <a:bodyPr wrap="square" lIns="0" tIns="0" rIns="0" bIns="0" rtlCol="0" anchor="ctr"/>
-          <a:lstStyle/>
-          <a:p>
-            <a:pPr algn="ctr" indent="0" marL="0">
-              <a:buNone/>
-            </a:pPr>
-            <a:r>
-              <a:rPr lang="en-US" sz="900" dirty="0">
-                <a:solidFill>
-                  <a:srgbClr val="003A63"/>
-                </a:solidFill>
-                <a:latin typeface="Aptos" pitchFamily="34" charset="0"/>
-                <a:ea typeface="Aptos" pitchFamily="34" charset="-122"/>
-                <a:cs typeface="Aptos" pitchFamily="34" charset="-120"/>
-              </a:rPr>
-              <a:t>Human review</a:t>
-            </a:r>
-            <a:endParaRPr lang="en-US" sz="900" dirty="0"/>
-          </a:p>
-        </p:txBody>
-      </p:sp>
-      <p:sp>
-        <p:nvSpPr>
-          <p:cNvPr id="18" name="Shape 16"/>
           <p:cNvSpPr/>
           <p:nvPr/>
         </p:nvSpPr>
@@ -3499,7 +3478,7 @@
       </p:sp>
       <p:sp>
         <p:nvSpPr>
-          <p:cNvPr id="19" name="Text 17"/>
+          <p:cNvPr id="17" name="Text 15"/>
           <p:cNvSpPr/>
           <p:nvPr/>
         </p:nvSpPr>
@@ -3538,7 +3517,7 @@
       </p:sp>
       <p:sp>
         <p:nvSpPr>
-          <p:cNvPr id="20" name="Text 18"/>
+          <p:cNvPr id="18" name="Text 16"/>
           <p:cNvSpPr/>
           <p:nvPr/>
         </p:nvSpPr>
@@ -4046,13 +4025,11 @@
             </a:avLst>
           </a:prstGeom>
           <a:solidFill>
-            <a:srgbClr val="FFFFFF">
-              <a:alpha val="88000"/>
-            </a:srgbClr>
+            <a:srgbClr val="FFFFFF"/>
           </a:solidFill>
           <a:ln w="12700">
             <a:solidFill>
-              <a:srgbClr val="D6E8F2"/>
+              <a:srgbClr val="B9D7E6"/>
             </a:solidFill>
             <a:prstDash val="solid"/>
           </a:ln>
@@ -4060,30 +4037,42 @@
       </p:sp>
       <p:sp>
         <p:nvSpPr>
-          <p:cNvPr id="14" name="Shape 12"/>
-          <p:cNvSpPr/>
-          <p:nvPr/>
-        </p:nvSpPr>
-        <p:spPr>
-          <a:xfrm>
-            <a:off x="7927848" y="3319272"/>
-            <a:ext cx="792480" cy="749808"/>
-          </a:xfrm>
-          <a:prstGeom prst="roundRect">
-            <a:avLst>
-              <a:gd name="adj" fmla="val 14634"/>
-            </a:avLst>
-          </a:prstGeom>
-          <a:solidFill>
-            <a:srgbClr val="0068B7"/>
-          </a:solidFill>
-          <a:ln w="12700">
-            <a:solidFill>
-              <a:srgbClr val="0068B7"/>
-            </a:solidFill>
-            <a:prstDash val="solid"/>
-          </a:ln>
-        </p:spPr>
+          <p:cNvPr id="14" name="Text 12"/>
+          <p:cNvSpPr/>
+          <p:nvPr/>
+        </p:nvSpPr>
+        <p:spPr>
+          <a:xfrm>
+            <a:off x="7799832" y="2935224"/>
+            <a:ext cx="3145536" cy="256032"/>
+          </a:xfrm>
+          <a:prstGeom prst="rect">
+            <a:avLst/>
+          </a:prstGeom>
+          <a:noFill/>
+          <a:ln/>
+        </p:spPr>
+        <p:txBody>
+          <a:bodyPr wrap="square" lIns="0" tIns="0" rIns="0" bIns="0" rtlCol="0" anchor="ctr"/>
+          <a:lstStyle/>
+          <a:p>
+            <a:pPr indent="0" marL="0">
+              <a:buNone/>
+            </a:pPr>
+            <a:r>
+              <a:rPr lang="en-US" sz="1300" b="1" dirty="0">
+                <a:solidFill>
+                  <a:srgbClr val="0068B7"/>
+                </a:solidFill>
+                <a:latin typeface="Aptos" pitchFamily="34" charset="0"/>
+                <a:ea typeface="Aptos" pitchFamily="34" charset="-122"/>
+                <a:cs typeface="Aptos" pitchFamily="34" charset="-120"/>
+              </a:rPr>
+              <a:t>Concept checkpoints</a:t>
+            </a:r>
+            <a:endParaRPr lang="en-US" sz="1300" dirty="0"/>
+          </a:p>
+        </p:txBody>
       </p:sp>
       <p:sp>
         <p:nvSpPr>
@@ -4093,240 +4082,67 @@
         </p:nvSpPr>
         <p:spPr>
           <a:xfrm>
-            <a:off x="8001000" y="3511296"/>
-            <a:ext cx="646176" cy="310896"/>
-          </a:xfrm>
-          <a:prstGeom prst="rect">
-            <a:avLst/>
-          </a:prstGeom>
-          <a:noFill/>
-          <a:ln/>
-        </p:spPr>
-        <p:txBody>
-          <a:bodyPr wrap="square" lIns="0" tIns="0" rIns="0" bIns="0" rtlCol="0" anchor="ctr">
+            <a:off x="7818120" y="3300984"/>
+            <a:ext cx="3090672" cy="877824"/>
+          </a:xfrm>
+          <a:prstGeom prst="rect">
+            <a:avLst/>
+          </a:prstGeom>
+          <a:noFill/>
+          <a:ln/>
+        </p:spPr>
+        <p:txBody>
+          <a:bodyPr wrap="square" lIns="254" tIns="254" rIns="254" bIns="254" rtlCol="0" anchor="t">
             <a:normAutofit/>
           </a:bodyPr>
           <a:lstStyle/>
           <a:p>
-            <a:pPr algn="ctr" indent="0" marL="0">
-              <a:buNone/>
-            </a:pPr>
-            <a:r>
-              <a:rPr lang="en-US" sz="1500" b="1" dirty="0">
-                <a:solidFill>
-                  <a:srgbClr val="FFFFFF"/>
-                </a:solidFill>
-                <a:latin typeface="Aptos" pitchFamily="34" charset="0"/>
-                <a:ea typeface="Aptos" pitchFamily="34" charset="-122"/>
-                <a:cs typeface="Aptos" pitchFamily="34" charset="-120"/>
-              </a:rPr>
-              <a:t>Plan</a:t>
-            </a:r>
-            <a:endParaRPr lang="en-US" sz="1500" dirty="0"/>
+            <a:r>
+              <a:rPr lang="en-US" sz="1380" dirty="0">
+                <a:solidFill>
+                  <a:srgbClr val="17364A"/>
+                </a:solidFill>
+                <a:latin typeface="Aptos" pitchFamily="34" charset="0"/>
+                <a:ea typeface="Aptos" pitchFamily="34" charset="-122"/>
+                <a:cs typeface="Aptos" pitchFamily="34" charset="-120"/>
+              </a:rPr>
+              <a:t>Generative AI requires staff who can review outputs and manage source accuracy.</a:t>
+            </a:r>
+            <a:endParaRPr lang="en-US" sz="1380" dirty="0"/>
+          </a:p>
+          <a:p>
+            <a:r>
+              <a:rPr lang="en-US" sz="1380" dirty="0">
+                <a:solidFill>
+                  <a:srgbClr val="17364A"/>
+                </a:solidFill>
+                <a:latin typeface="Aptos" pitchFamily="34" charset="0"/>
+                <a:ea typeface="Aptos" pitchFamily="34" charset="-122"/>
+                <a:cs typeface="Aptos" pitchFamily="34" charset="-120"/>
+              </a:rPr>
+              <a:t>Predictive analytics requires staff who can interpret performance and understand.</a:t>
+            </a:r>
+            <a:endParaRPr lang="en-US" sz="1380" dirty="0"/>
+          </a:p>
+          <a:p>
+            <a:r>
+              <a:rPr lang="en-US" sz="1380" dirty="0">
+                <a:solidFill>
+                  <a:srgbClr val="17364A"/>
+                </a:solidFill>
+                <a:latin typeface="Aptos" pitchFamily="34" charset="0"/>
+                <a:ea typeface="Aptos" pitchFamily="34" charset="-122"/>
+                <a:cs typeface="Aptos" pitchFamily="34" charset="-120"/>
+              </a:rPr>
+              <a:t>Agentic workflows require staff who can oversee permissions, actions, escalation, and.</a:t>
+            </a:r>
+            <a:endParaRPr lang="en-US" sz="1380" dirty="0"/>
           </a:p>
         </p:txBody>
       </p:sp>
       <p:sp>
         <p:nvSpPr>
           <p:cNvPr id="16" name="Shape 14"/>
-          <p:cNvSpPr/>
-          <p:nvPr/>
-        </p:nvSpPr>
-        <p:spPr>
-          <a:xfrm>
-            <a:off x="8976360" y="3319272"/>
-            <a:ext cx="792480" cy="749808"/>
-          </a:xfrm>
-          <a:prstGeom prst="roundRect">
-            <a:avLst>
-              <a:gd name="adj" fmla="val 14634"/>
-            </a:avLst>
-          </a:prstGeom>
-          <a:solidFill>
-            <a:srgbClr val="2F8A28"/>
-          </a:solidFill>
-          <a:ln w="12700">
-            <a:solidFill>
-              <a:srgbClr val="2F8A28"/>
-            </a:solidFill>
-            <a:prstDash val="solid"/>
-          </a:ln>
-        </p:spPr>
-      </p:sp>
-      <p:sp>
-        <p:nvSpPr>
-          <p:cNvPr id="17" name="Text 15"/>
-          <p:cNvSpPr/>
-          <p:nvPr/>
-        </p:nvSpPr>
-        <p:spPr>
-          <a:xfrm>
-            <a:off x="9049512" y="3511296"/>
-            <a:ext cx="646176" cy="310896"/>
-          </a:xfrm>
-          <a:prstGeom prst="rect">
-            <a:avLst/>
-          </a:prstGeom>
-          <a:noFill/>
-          <a:ln/>
-        </p:spPr>
-        <p:txBody>
-          <a:bodyPr wrap="square" lIns="0" tIns="0" rIns="0" bIns="0" rtlCol="0" anchor="ctr">
-            <a:normAutofit/>
-          </a:bodyPr>
-          <a:lstStyle/>
-          <a:p>
-            <a:pPr algn="ctr" indent="0" marL="0">
-              <a:buNone/>
-            </a:pPr>
-            <a:r>
-              <a:rPr lang="en-US" sz="1500" b="1" dirty="0">
-                <a:solidFill>
-                  <a:srgbClr val="FFFFFF"/>
-                </a:solidFill>
-                <a:latin typeface="Aptos" pitchFamily="34" charset="0"/>
-                <a:ea typeface="Aptos" pitchFamily="34" charset="-122"/>
-                <a:cs typeface="Aptos" pitchFamily="34" charset="-120"/>
-              </a:rPr>
-              <a:t>Do</a:t>
-            </a:r>
-            <a:endParaRPr lang="en-US" sz="1500" dirty="0"/>
-          </a:p>
-        </p:txBody>
-      </p:sp>
-      <p:sp>
-        <p:nvSpPr>
-          <p:cNvPr id="18" name="Shape 16"/>
-          <p:cNvSpPr/>
-          <p:nvPr/>
-        </p:nvSpPr>
-        <p:spPr>
-          <a:xfrm>
-            <a:off x="10024872" y="3319272"/>
-            <a:ext cx="792480" cy="749808"/>
-          </a:xfrm>
-          <a:prstGeom prst="roundRect">
-            <a:avLst>
-              <a:gd name="adj" fmla="val 14634"/>
-            </a:avLst>
-          </a:prstGeom>
-          <a:solidFill>
-            <a:srgbClr val="D69A2D"/>
-          </a:solidFill>
-          <a:ln w="12700">
-            <a:solidFill>
-              <a:srgbClr val="D69A2D"/>
-            </a:solidFill>
-            <a:prstDash val="solid"/>
-          </a:ln>
-        </p:spPr>
-      </p:sp>
-      <p:sp>
-        <p:nvSpPr>
-          <p:cNvPr id="19" name="Text 17"/>
-          <p:cNvSpPr/>
-          <p:nvPr/>
-        </p:nvSpPr>
-        <p:spPr>
-          <a:xfrm>
-            <a:off x="10098024" y="3511296"/>
-            <a:ext cx="646176" cy="310896"/>
-          </a:xfrm>
-          <a:prstGeom prst="rect">
-            <a:avLst/>
-          </a:prstGeom>
-          <a:noFill/>
-          <a:ln/>
-        </p:spPr>
-        <p:txBody>
-          <a:bodyPr wrap="square" lIns="0" tIns="0" rIns="0" bIns="0" rtlCol="0" anchor="ctr">
-            <a:normAutofit/>
-          </a:bodyPr>
-          <a:lstStyle/>
-          <a:p>
-            <a:pPr algn="ctr" indent="0" marL="0">
-              <a:buNone/>
-            </a:pPr>
-            <a:r>
-              <a:rPr lang="en-US" sz="1500" b="1" dirty="0">
-                <a:solidFill>
-                  <a:srgbClr val="FFFFFF"/>
-                </a:solidFill>
-                <a:latin typeface="Aptos" pitchFamily="34" charset="0"/>
-                <a:ea typeface="Aptos" pitchFamily="34" charset="-122"/>
-                <a:cs typeface="Aptos" pitchFamily="34" charset="-120"/>
-              </a:rPr>
-              <a:t>Review</a:t>
-            </a:r>
-            <a:endParaRPr lang="en-US" sz="1500" dirty="0"/>
-          </a:p>
-        </p:txBody>
-      </p:sp>
-      <p:sp>
-        <p:nvSpPr>
-          <p:cNvPr id="20" name="Shape 18"/>
-          <p:cNvSpPr/>
-          <p:nvPr/>
-        </p:nvSpPr>
-        <p:spPr>
-          <a:xfrm>
-            <a:off x="8293608" y="4389120"/>
-            <a:ext cx="2157984" cy="0"/>
-          </a:xfrm>
-          <a:prstGeom prst="line">
-            <a:avLst/>
-          </a:prstGeom>
-          <a:noFill/>
-          <a:ln w="25400">
-            <a:solidFill>
-              <a:srgbClr val="8ABBD8"/>
-            </a:solidFill>
-            <a:prstDash val="solid"/>
-          </a:ln>
-        </p:spPr>
-      </p:sp>
-      <p:sp>
-        <p:nvSpPr>
-          <p:cNvPr id="21" name="Text 19"/>
-          <p:cNvSpPr/>
-          <p:nvPr/>
-        </p:nvSpPr>
-        <p:spPr>
-          <a:xfrm>
-            <a:off x="7909560" y="3977640"/>
-            <a:ext cx="2926080" cy="182880"/>
-          </a:xfrm>
-          <a:prstGeom prst="rect">
-            <a:avLst/>
-          </a:prstGeom>
-          <a:noFill/>
-          <a:ln/>
-        </p:spPr>
-        <p:txBody>
-          <a:bodyPr wrap="square" lIns="0" tIns="0" rIns="0" bIns="0" rtlCol="0" anchor="ctr"/>
-          <a:lstStyle/>
-          <a:p>
-            <a:pPr algn="ctr" indent="0" marL="0">
-              <a:buNone/>
-            </a:pPr>
-            <a:r>
-              <a:rPr lang="en-US" sz="1000" dirty="0">
-                <a:solidFill>
-                  <a:srgbClr val="003A63"/>
-                </a:solidFill>
-                <a:latin typeface="Aptos" pitchFamily="34" charset="0"/>
-                <a:ea typeface="Aptos" pitchFamily="34" charset="-122"/>
-                <a:cs typeface="Aptos" pitchFamily="34" charset="-120"/>
-              </a:rPr>
-              <a:t>Dependencies visible</a:t>
-            </a:r>
-            <a:endParaRPr lang="en-US" sz="1000" dirty="0"/>
-          </a:p>
-        </p:txBody>
-      </p:sp>
-      <p:sp>
-        <p:nvSpPr>
-          <p:cNvPr id="22" name="Shape 20"/>
           <p:cNvSpPr/>
           <p:nvPr/>
         </p:nvSpPr>
@@ -4353,7 +4169,7 @@
       </p:sp>
       <p:sp>
         <p:nvSpPr>
-          <p:cNvPr id="23" name="Text 21"/>
+          <p:cNvPr id="17" name="Text 15"/>
           <p:cNvSpPr/>
           <p:nvPr/>
         </p:nvSpPr>
@@ -4392,7 +4208,7 @@
       </p:sp>
       <p:sp>
         <p:nvSpPr>
-          <p:cNvPr id="24" name="Text 22"/>
+          <p:cNvPr id="18" name="Text 16"/>
           <p:cNvSpPr/>
           <p:nvPr/>
         </p:nvSpPr>
@@ -4900,13 +4716,11 @@
             </a:avLst>
           </a:prstGeom>
           <a:solidFill>
-            <a:srgbClr val="FFFFFF">
-              <a:alpha val="88000"/>
-            </a:srgbClr>
+            <a:srgbClr val="FFFFFF"/>
           </a:solidFill>
           <a:ln w="12700">
             <a:solidFill>
-              <a:srgbClr val="D6E8F2"/>
+              <a:srgbClr val="B9D7E6"/>
             </a:solidFill>
             <a:prstDash val="solid"/>
           </a:ln>
@@ -4914,119 +4728,112 @@
       </p:sp>
       <p:sp>
         <p:nvSpPr>
-          <p:cNvPr id="14" name="Shape 12"/>
-          <p:cNvSpPr/>
-          <p:nvPr/>
-        </p:nvSpPr>
-        <p:spPr>
-          <a:xfrm>
-            <a:off x="8074152" y="3291840"/>
-            <a:ext cx="2596896" cy="749808"/>
-          </a:xfrm>
-          <a:prstGeom prst="rect">
-            <a:avLst/>
-          </a:prstGeom>
-          <a:solidFill>
-            <a:srgbClr val="EAF6F8"/>
-          </a:solidFill>
-          <a:ln w="12700">
-            <a:solidFill>
-              <a:srgbClr val="8ABBD8"/>
-            </a:solidFill>
-            <a:prstDash val="solid"/>
-          </a:ln>
-        </p:spPr>
-      </p:sp>
-      <p:sp>
-        <p:nvSpPr>
-          <p:cNvPr id="15" name="Shape 13"/>
-          <p:cNvSpPr/>
-          <p:nvPr/>
-        </p:nvSpPr>
-        <p:spPr>
-          <a:xfrm>
-            <a:off x="8202168" y="3721608"/>
-            <a:ext cx="2340864" cy="0"/>
-          </a:xfrm>
-          <a:prstGeom prst="line">
-            <a:avLst/>
-          </a:prstGeom>
-          <a:noFill/>
-          <a:ln w="19050">
-            <a:solidFill>
-              <a:srgbClr val="0068B7"/>
-            </a:solidFill>
-            <a:prstDash val="solid"/>
-          </a:ln>
-        </p:spPr>
+          <p:cNvPr id="14" name="Text 12"/>
+          <p:cNvSpPr/>
+          <p:nvPr/>
+        </p:nvSpPr>
+        <p:spPr>
+          <a:xfrm>
+            <a:off x="7799832" y="2935224"/>
+            <a:ext cx="3145536" cy="256032"/>
+          </a:xfrm>
+          <a:prstGeom prst="rect">
+            <a:avLst/>
+          </a:prstGeom>
+          <a:noFill/>
+          <a:ln/>
+        </p:spPr>
+        <p:txBody>
+          <a:bodyPr wrap="square" lIns="0" tIns="0" rIns="0" bIns="0" rtlCol="0" anchor="ctr"/>
+          <a:lstStyle/>
+          <a:p>
+            <a:pPr indent="0" marL="0">
+              <a:buNone/>
+            </a:pPr>
+            <a:r>
+              <a:rPr lang="en-US" sz="1300" b="1" dirty="0">
+                <a:solidFill>
+                  <a:srgbClr val="0068B7"/>
+                </a:solidFill>
+                <a:latin typeface="Aptos" pitchFamily="34" charset="0"/>
+                <a:ea typeface="Aptos" pitchFamily="34" charset="-122"/>
+                <a:cs typeface="Aptos" pitchFamily="34" charset="-120"/>
+              </a:rPr>
+              <a:t>Concept checkpoints</a:t>
+            </a:r>
+            <a:endParaRPr lang="en-US" sz="1300" dirty="0"/>
+          </a:p>
+        </p:txBody>
+      </p:sp>
+      <p:sp>
+        <p:nvSpPr>
+          <p:cNvPr id="15" name="Text 13"/>
+          <p:cNvSpPr/>
+          <p:nvPr/>
+        </p:nvSpPr>
+        <p:spPr>
+          <a:xfrm>
+            <a:off x="7818120" y="3300984"/>
+            <a:ext cx="3090672" cy="877824"/>
+          </a:xfrm>
+          <a:prstGeom prst="rect">
+            <a:avLst/>
+          </a:prstGeom>
+          <a:noFill/>
+          <a:ln/>
+        </p:spPr>
+        <p:txBody>
+          <a:bodyPr wrap="square" lIns="254" tIns="254" rIns="254" bIns="254" rtlCol="0" anchor="t">
+            <a:normAutofit/>
+          </a:bodyPr>
+          <a:lstStyle/>
+          <a:p>
+            <a:r>
+              <a:rPr lang="en-US" sz="1380" dirty="0">
+                <a:solidFill>
+                  <a:srgbClr val="17364A"/>
+                </a:solidFill>
+                <a:latin typeface="Aptos" pitchFamily="34" charset="0"/>
+                <a:ea typeface="Aptos" pitchFamily="34" charset="-122"/>
+                <a:cs typeface="Aptos" pitchFamily="34" charset="-120"/>
+              </a:rPr>
+              <a:t>Which current or proposed AI use case in your agency raises this leadership or governance.</a:t>
+            </a:r>
+            <a:endParaRPr lang="en-US" sz="1380" dirty="0"/>
+          </a:p>
+          <a:p>
+            <a:r>
+              <a:rPr lang="en-US" sz="1380" dirty="0">
+                <a:solidFill>
+                  <a:srgbClr val="17364A"/>
+                </a:solidFill>
+                <a:latin typeface="Aptos" pitchFamily="34" charset="0"/>
+                <a:ea typeface="Aptos" pitchFamily="34" charset="-122"/>
+                <a:cs typeface="Aptos" pitchFamily="34" charset="-120"/>
+              </a:rPr>
+              <a:t>Who currently has authority to make decisions about this issue, and is that authority.</a:t>
+            </a:r>
+            <a:endParaRPr lang="en-US" sz="1380" dirty="0"/>
+          </a:p>
+          <a:p>
+            <a:r>
+              <a:rPr lang="en-US" sz="1380" dirty="0">
+                <a:solidFill>
+                  <a:srgbClr val="17364A"/>
+                </a:solidFill>
+                <a:latin typeface="Aptos" pitchFamily="34" charset="0"/>
+                <a:ea typeface="Aptos" pitchFamily="34" charset="-122"/>
+                <a:cs typeface="Aptos" pitchFamily="34" charset="-120"/>
+              </a:rPr>
+              <a:t>What evidence would governance or leadership need before approving the use case?</a:t>
+            </a:r>
+            <a:endParaRPr lang="en-US" sz="1380" dirty="0"/>
+          </a:p>
+        </p:txBody>
       </p:sp>
       <p:sp>
         <p:nvSpPr>
           <p:cNvPr id="16" name="Shape 14"/>
-          <p:cNvSpPr/>
-          <p:nvPr/>
-        </p:nvSpPr>
-        <p:spPr>
-          <a:xfrm>
-            <a:off x="9198864" y="4206240"/>
-            <a:ext cx="347472" cy="347472"/>
-          </a:xfrm>
-          <a:prstGeom prst="ellipse">
-            <a:avLst/>
-          </a:prstGeom>
-          <a:solidFill>
-            <a:srgbClr val="2F8A28"/>
-          </a:solidFill>
-          <a:ln w="12700">
-            <a:solidFill>
-              <a:srgbClr val="2F8A28"/>
-            </a:solidFill>
-            <a:prstDash val="solid"/>
-          </a:ln>
-        </p:spPr>
-      </p:sp>
-      <p:sp>
-        <p:nvSpPr>
-          <p:cNvPr id="17" name="Text 15"/>
-          <p:cNvSpPr/>
-          <p:nvPr/>
-        </p:nvSpPr>
-        <p:spPr>
-          <a:xfrm>
-            <a:off x="7909560" y="3977640"/>
-            <a:ext cx="2926080" cy="182880"/>
-          </a:xfrm>
-          <a:prstGeom prst="rect">
-            <a:avLst/>
-          </a:prstGeom>
-          <a:noFill/>
-          <a:ln/>
-        </p:spPr>
-        <p:txBody>
-          <a:bodyPr wrap="square" lIns="0" tIns="0" rIns="0" bIns="0" rtlCol="0" anchor="ctr"/>
-          <a:lstStyle/>
-          <a:p>
-            <a:pPr algn="ctr" indent="0" marL="0">
-              <a:buNone/>
-            </a:pPr>
-            <a:r>
-              <a:rPr lang="en-US" sz="1000" dirty="0">
-                <a:solidFill>
-                  <a:srgbClr val="003A63"/>
-                </a:solidFill>
-                <a:latin typeface="Aptos" pitchFamily="34" charset="0"/>
-                <a:ea typeface="Aptos" pitchFamily="34" charset="-122"/>
-                <a:cs typeface="Aptos" pitchFamily="34" charset="-120"/>
-              </a:rPr>
-              <a:t>Concept to action</a:t>
-            </a:r>
-            <a:endParaRPr lang="en-US" sz="1000" dirty="0"/>
-          </a:p>
-        </p:txBody>
-      </p:sp>
-      <p:sp>
-        <p:nvSpPr>
-          <p:cNvPr id="18" name="Shape 16"/>
           <p:cNvSpPr/>
           <p:nvPr/>
         </p:nvSpPr>
@@ -5053,7 +4860,7 @@
       </p:sp>
       <p:sp>
         <p:nvSpPr>
-          <p:cNvPr id="19" name="Text 17"/>
+          <p:cNvPr id="17" name="Text 15"/>
           <p:cNvSpPr/>
           <p:nvPr/>
         </p:nvSpPr>
@@ -5092,7 +4899,7 @@
       </p:sp>
       <p:sp>
         <p:nvSpPr>
-          <p:cNvPr id="20" name="Text 18"/>
+          <p:cNvPr id="18" name="Text 16"/>
           <p:cNvSpPr/>
           <p:nvPr/>
         </p:nvSpPr>
@@ -5586,13 +5393,11 @@
             </a:avLst>
           </a:prstGeom>
           <a:solidFill>
-            <a:srgbClr val="FFFFFF">
-              <a:alpha val="88000"/>
-            </a:srgbClr>
+            <a:srgbClr val="FFFFFF"/>
           </a:solidFill>
           <a:ln w="12700">
             <a:solidFill>
-              <a:srgbClr val="D6E8F2"/>
+              <a:srgbClr val="B9D7E6"/>
             </a:solidFill>
             <a:prstDash val="solid"/>
           </a:ln>
@@ -5600,119 +5405,98 @@
       </p:sp>
       <p:sp>
         <p:nvSpPr>
-          <p:cNvPr id="14" name="Shape 12"/>
-          <p:cNvSpPr/>
-          <p:nvPr/>
-        </p:nvSpPr>
-        <p:spPr>
-          <a:xfrm>
-            <a:off x="8074152" y="3291840"/>
-            <a:ext cx="2596896" cy="749808"/>
-          </a:xfrm>
-          <a:prstGeom prst="rect">
-            <a:avLst/>
-          </a:prstGeom>
-          <a:solidFill>
-            <a:srgbClr val="EAF6F8"/>
-          </a:solidFill>
-          <a:ln w="12700">
-            <a:solidFill>
-              <a:srgbClr val="8ABBD8"/>
-            </a:solidFill>
-            <a:prstDash val="solid"/>
-          </a:ln>
-        </p:spPr>
-      </p:sp>
-      <p:sp>
-        <p:nvSpPr>
-          <p:cNvPr id="15" name="Shape 13"/>
-          <p:cNvSpPr/>
-          <p:nvPr/>
-        </p:nvSpPr>
-        <p:spPr>
-          <a:xfrm>
-            <a:off x="8202168" y="3721608"/>
-            <a:ext cx="2340864" cy="0"/>
-          </a:xfrm>
-          <a:prstGeom prst="line">
-            <a:avLst/>
-          </a:prstGeom>
-          <a:noFill/>
-          <a:ln w="19050">
-            <a:solidFill>
-              <a:srgbClr val="0068B7"/>
-            </a:solidFill>
-            <a:prstDash val="solid"/>
-          </a:ln>
-        </p:spPr>
+          <p:cNvPr id="14" name="Text 12"/>
+          <p:cNvSpPr/>
+          <p:nvPr/>
+        </p:nvSpPr>
+        <p:spPr>
+          <a:xfrm>
+            <a:off x="7799832" y="2935224"/>
+            <a:ext cx="3145536" cy="256032"/>
+          </a:xfrm>
+          <a:prstGeom prst="rect">
+            <a:avLst/>
+          </a:prstGeom>
+          <a:noFill/>
+          <a:ln/>
+        </p:spPr>
+        <p:txBody>
+          <a:bodyPr wrap="square" lIns="0" tIns="0" rIns="0" bIns="0" rtlCol="0" anchor="ctr"/>
+          <a:lstStyle/>
+          <a:p>
+            <a:pPr indent="0" marL="0">
+              <a:buNone/>
+            </a:pPr>
+            <a:r>
+              <a:rPr lang="en-US" sz="1300" b="1" dirty="0">
+                <a:solidFill>
+                  <a:srgbClr val="0068B7"/>
+                </a:solidFill>
+                <a:latin typeface="Aptos" pitchFamily="34" charset="0"/>
+                <a:ea typeface="Aptos" pitchFamily="34" charset="-122"/>
+                <a:cs typeface="Aptos" pitchFamily="34" charset="-120"/>
+              </a:rPr>
+              <a:t>Concept checkpoints</a:t>
+            </a:r>
+            <a:endParaRPr lang="en-US" sz="1300" dirty="0"/>
+          </a:p>
+        </p:txBody>
+      </p:sp>
+      <p:sp>
+        <p:nvSpPr>
+          <p:cNvPr id="15" name="Text 13"/>
+          <p:cNvSpPr/>
+          <p:nvPr/>
+        </p:nvSpPr>
+        <p:spPr>
+          <a:xfrm>
+            <a:off x="7818120" y="3300984"/>
+            <a:ext cx="3090672" cy="877824"/>
+          </a:xfrm>
+          <a:prstGeom prst="rect">
+            <a:avLst/>
+          </a:prstGeom>
+          <a:noFill/>
+          <a:ln/>
+        </p:spPr>
+        <p:txBody>
+          <a:bodyPr wrap="square" lIns="254" tIns="254" rIns="254" bIns="254" rtlCol="0" anchor="t">
+            <a:normAutofit/>
+          </a:bodyPr>
+          <a:lstStyle/>
+          <a:p>
+            <a:r>
+              <a:rPr lang="en-US" sz="1380" dirty="0">
+                <a:solidFill>
+                  <a:srgbClr val="17364A"/>
+                </a:solidFill>
+                <a:latin typeface="Aptos" pitchFamily="34" charset="0"/>
+                <a:ea typeface="Aptos" pitchFamily="34" charset="-122"/>
+                <a:cs typeface="Aptos" pitchFamily="34" charset="-120"/>
+              </a:rPr>
+              <a:t>Which staff, partners, or communities would be affected if this issue were handled poorly?</a:t>
+            </a:r>
+            <a:endParaRPr lang="en-US" sz="1380" dirty="0"/>
+          </a:p>
+          <a:p>
+            <a:r>
+              <a:rPr lang="en-US" sz="1380" dirty="0">
+                <a:solidFill>
+                  <a:srgbClr val="17364A"/>
+                </a:solidFill>
+                <a:latin typeface="Aptos" pitchFamily="34" charset="0"/>
+                <a:ea typeface="Aptos" pitchFamily="34" charset="-122"/>
+                <a:cs typeface="Aptos" pitchFamily="34" charset="-120"/>
+              </a:rPr>
+              <a:t>What policy, process, or artifact should be created or updated after this module?</a:t>
+            </a:r>
+            <a:endParaRPr lang="en-US" sz="1380" dirty="0"/>
+          </a:p>
+        </p:txBody>
       </p:sp>
       <p:sp>
         <p:nvSpPr>
           <p:cNvPr id="16" name="Shape 14"/>
-          <p:cNvSpPr/>
-          <p:nvPr/>
-        </p:nvSpPr>
-        <p:spPr>
-          <a:xfrm>
-            <a:off x="9198864" y="4206240"/>
-            <a:ext cx="347472" cy="347472"/>
-          </a:xfrm>
-          <a:prstGeom prst="ellipse">
-            <a:avLst/>
-          </a:prstGeom>
-          <a:solidFill>
-            <a:srgbClr val="2F8A28"/>
-          </a:solidFill>
-          <a:ln w="12700">
-            <a:solidFill>
-              <a:srgbClr val="2F8A28"/>
-            </a:solidFill>
-            <a:prstDash val="solid"/>
-          </a:ln>
-        </p:spPr>
-      </p:sp>
-      <p:sp>
-        <p:nvSpPr>
-          <p:cNvPr id="17" name="Text 15"/>
-          <p:cNvSpPr/>
-          <p:nvPr/>
-        </p:nvSpPr>
-        <p:spPr>
-          <a:xfrm>
-            <a:off x="7909560" y="3977640"/>
-            <a:ext cx="2926080" cy="182880"/>
-          </a:xfrm>
-          <a:prstGeom prst="rect">
-            <a:avLst/>
-          </a:prstGeom>
-          <a:noFill/>
-          <a:ln/>
-        </p:spPr>
-        <p:txBody>
-          <a:bodyPr wrap="square" lIns="0" tIns="0" rIns="0" bIns="0" rtlCol="0" anchor="ctr"/>
-          <a:lstStyle/>
-          <a:p>
-            <a:pPr algn="ctr" indent="0" marL="0">
-              <a:buNone/>
-            </a:pPr>
-            <a:r>
-              <a:rPr lang="en-US" sz="1000" dirty="0">
-                <a:solidFill>
-                  <a:srgbClr val="003A63"/>
-                </a:solidFill>
-                <a:latin typeface="Aptos" pitchFamily="34" charset="0"/>
-                <a:ea typeface="Aptos" pitchFamily="34" charset="-122"/>
-                <a:cs typeface="Aptos" pitchFamily="34" charset="-120"/>
-              </a:rPr>
-              <a:t>Concept to action</a:t>
-            </a:r>
-            <a:endParaRPr lang="en-US" sz="1000" dirty="0"/>
-          </a:p>
-        </p:txBody>
-      </p:sp>
-      <p:sp>
-        <p:nvSpPr>
-          <p:cNvPr id="18" name="Shape 16"/>
           <p:cNvSpPr/>
           <p:nvPr/>
         </p:nvSpPr>
@@ -5739,7 +5523,7 @@
       </p:sp>
       <p:sp>
         <p:nvSpPr>
-          <p:cNvPr id="19" name="Text 17"/>
+          <p:cNvPr id="17" name="Text 15"/>
           <p:cNvSpPr/>
           <p:nvPr/>
         </p:nvSpPr>
@@ -5778,7 +5562,7 @@
       </p:sp>
       <p:sp>
         <p:nvSpPr>
-          <p:cNvPr id="20" name="Text 18"/>
+          <p:cNvPr id="18" name="Text 16"/>
           <p:cNvSpPr/>
           <p:nvPr/>
         </p:nvSpPr>
@@ -6272,13 +6056,11 @@
             </a:avLst>
           </a:prstGeom>
           <a:solidFill>
-            <a:srgbClr val="FFFFFF">
-              <a:alpha val="88000"/>
-            </a:srgbClr>
+            <a:srgbClr val="FFFFFF"/>
           </a:solidFill>
           <a:ln w="12700">
             <a:solidFill>
-              <a:srgbClr val="D6E8F2"/>
+              <a:srgbClr val="B9D7E6"/>
             </a:solidFill>
             <a:prstDash val="solid"/>
           </a:ln>
@@ -6286,119 +6068,98 @@
       </p:sp>
       <p:sp>
         <p:nvSpPr>
-          <p:cNvPr id="14" name="Shape 12"/>
-          <p:cNvSpPr/>
-          <p:nvPr/>
-        </p:nvSpPr>
-        <p:spPr>
-          <a:xfrm>
-            <a:off x="8074152" y="3291840"/>
-            <a:ext cx="2596896" cy="749808"/>
-          </a:xfrm>
-          <a:prstGeom prst="rect">
-            <a:avLst/>
-          </a:prstGeom>
-          <a:solidFill>
-            <a:srgbClr val="EAF6F8"/>
-          </a:solidFill>
-          <a:ln w="12700">
-            <a:solidFill>
-              <a:srgbClr val="8ABBD8"/>
-            </a:solidFill>
-            <a:prstDash val="solid"/>
-          </a:ln>
-        </p:spPr>
-      </p:sp>
-      <p:sp>
-        <p:nvSpPr>
-          <p:cNvPr id="15" name="Shape 13"/>
-          <p:cNvSpPr/>
-          <p:nvPr/>
-        </p:nvSpPr>
-        <p:spPr>
-          <a:xfrm>
-            <a:off x="8202168" y="3721608"/>
-            <a:ext cx="2340864" cy="0"/>
-          </a:xfrm>
-          <a:prstGeom prst="line">
-            <a:avLst/>
-          </a:prstGeom>
-          <a:noFill/>
-          <a:ln w="19050">
-            <a:solidFill>
-              <a:srgbClr val="0068B7"/>
-            </a:solidFill>
-            <a:prstDash val="solid"/>
-          </a:ln>
-        </p:spPr>
+          <p:cNvPr id="14" name="Text 12"/>
+          <p:cNvSpPr/>
+          <p:nvPr/>
+        </p:nvSpPr>
+        <p:spPr>
+          <a:xfrm>
+            <a:off x="7799832" y="2935224"/>
+            <a:ext cx="3145536" cy="256032"/>
+          </a:xfrm>
+          <a:prstGeom prst="rect">
+            <a:avLst/>
+          </a:prstGeom>
+          <a:noFill/>
+          <a:ln/>
+        </p:spPr>
+        <p:txBody>
+          <a:bodyPr wrap="square" lIns="0" tIns="0" rIns="0" bIns="0" rtlCol="0" anchor="ctr"/>
+          <a:lstStyle/>
+          <a:p>
+            <a:pPr indent="0" marL="0">
+              <a:buNone/>
+            </a:pPr>
+            <a:r>
+              <a:rPr lang="en-US" sz="1300" b="1" dirty="0">
+                <a:solidFill>
+                  <a:srgbClr val="0068B7"/>
+                </a:solidFill>
+                <a:latin typeface="Aptos" pitchFamily="34" charset="0"/>
+                <a:ea typeface="Aptos" pitchFamily="34" charset="-122"/>
+                <a:cs typeface="Aptos" pitchFamily="34" charset="-120"/>
+              </a:rPr>
+              <a:t>Concept checkpoints</a:t>
+            </a:r>
+            <a:endParaRPr lang="en-US" sz="1300" dirty="0"/>
+          </a:p>
+        </p:txBody>
+      </p:sp>
+      <p:sp>
+        <p:nvSpPr>
+          <p:cNvPr id="15" name="Text 13"/>
+          <p:cNvSpPr/>
+          <p:nvPr/>
+        </p:nvSpPr>
+        <p:spPr>
+          <a:xfrm>
+            <a:off x="7818120" y="3300984"/>
+            <a:ext cx="3090672" cy="877824"/>
+          </a:xfrm>
+          <a:prstGeom prst="rect">
+            <a:avLst/>
+          </a:prstGeom>
+          <a:noFill/>
+          <a:ln/>
+        </p:spPr>
+        <p:txBody>
+          <a:bodyPr wrap="square" lIns="254" tIns="254" rIns="254" bIns="254" rtlCol="0" anchor="t">
+            <a:normAutofit/>
+          </a:bodyPr>
+          <a:lstStyle/>
+          <a:p>
+            <a:r>
+              <a:rPr lang="en-US" sz="1380" dirty="0">
+                <a:solidFill>
+                  <a:srgbClr val="17364A"/>
+                </a:solidFill>
+                <a:latin typeface="Aptos" pitchFamily="34" charset="0"/>
+                <a:ea typeface="Aptos" pitchFamily="34" charset="-122"/>
+                <a:cs typeface="Aptos" pitchFamily="34" charset="-120"/>
+              </a:rPr>
+              <a:t>Create a role-based AI workforce readiness plan.</a:t>
+            </a:r>
+            <a:endParaRPr lang="en-US" sz="1380" dirty="0"/>
+          </a:p>
+          <a:p>
+            <a:r>
+              <a:rPr lang="en-US" sz="1380" dirty="0">
+                <a:solidFill>
+                  <a:srgbClr val="17364A"/>
+                </a:solidFill>
+                <a:latin typeface="Aptos" pitchFamily="34" charset="0"/>
+                <a:ea typeface="Aptos" pitchFamily="34" charset="-122"/>
+                <a:cs typeface="Aptos" pitchFamily="34" charset="-120"/>
+              </a:rPr>
+              <a:t>Include role groups, competencies, required training, responsibilities, decision.</a:t>
+            </a:r>
+            <a:endParaRPr lang="en-US" sz="1380" dirty="0"/>
+          </a:p>
+        </p:txBody>
       </p:sp>
       <p:sp>
         <p:nvSpPr>
           <p:cNvPr id="16" name="Shape 14"/>
-          <p:cNvSpPr/>
-          <p:nvPr/>
-        </p:nvSpPr>
-        <p:spPr>
-          <a:xfrm>
-            <a:off x="9198864" y="4206240"/>
-            <a:ext cx="347472" cy="347472"/>
-          </a:xfrm>
-          <a:prstGeom prst="ellipse">
-            <a:avLst/>
-          </a:prstGeom>
-          <a:solidFill>
-            <a:srgbClr val="2F8A28"/>
-          </a:solidFill>
-          <a:ln w="12700">
-            <a:solidFill>
-              <a:srgbClr val="2F8A28"/>
-            </a:solidFill>
-            <a:prstDash val="solid"/>
-          </a:ln>
-        </p:spPr>
-      </p:sp>
-      <p:sp>
-        <p:nvSpPr>
-          <p:cNvPr id="17" name="Text 15"/>
-          <p:cNvSpPr/>
-          <p:nvPr/>
-        </p:nvSpPr>
-        <p:spPr>
-          <a:xfrm>
-            <a:off x="7909560" y="3977640"/>
-            <a:ext cx="2926080" cy="182880"/>
-          </a:xfrm>
-          <a:prstGeom prst="rect">
-            <a:avLst/>
-          </a:prstGeom>
-          <a:noFill/>
-          <a:ln/>
-        </p:spPr>
-        <p:txBody>
-          <a:bodyPr wrap="square" lIns="0" tIns="0" rIns="0" bIns="0" rtlCol="0" anchor="ctr"/>
-          <a:lstStyle/>
-          <a:p>
-            <a:pPr algn="ctr" indent="0" marL="0">
-              <a:buNone/>
-            </a:pPr>
-            <a:r>
-              <a:rPr lang="en-US" sz="1000" dirty="0">
-                <a:solidFill>
-                  <a:srgbClr val="003A63"/>
-                </a:solidFill>
-                <a:latin typeface="Aptos" pitchFamily="34" charset="0"/>
-                <a:ea typeface="Aptos" pitchFamily="34" charset="-122"/>
-                <a:cs typeface="Aptos" pitchFamily="34" charset="-120"/>
-              </a:rPr>
-              <a:t>Concept to action</a:t>
-            </a:r>
-            <a:endParaRPr lang="en-US" sz="1000" dirty="0"/>
-          </a:p>
-        </p:txBody>
-      </p:sp>
-      <p:sp>
-        <p:nvSpPr>
-          <p:cNvPr id="18" name="Shape 16"/>
           <p:cNvSpPr/>
           <p:nvPr/>
         </p:nvSpPr>
@@ -6425,7 +6186,7 @@
       </p:sp>
       <p:sp>
         <p:nvSpPr>
-          <p:cNvPr id="19" name="Text 17"/>
+          <p:cNvPr id="17" name="Text 15"/>
           <p:cNvSpPr/>
           <p:nvPr/>
         </p:nvSpPr>
@@ -6464,7 +6225,7 @@
       </p:sp>
       <p:sp>
         <p:nvSpPr>
-          <p:cNvPr id="20" name="Text 18"/>
+          <p:cNvPr id="18" name="Text 16"/>
           <p:cNvSpPr/>
           <p:nvPr/>
         </p:nvSpPr>
@@ -6972,13 +6733,11 @@
             </a:avLst>
           </a:prstGeom>
           <a:solidFill>
-            <a:srgbClr val="FFFFFF">
-              <a:alpha val="88000"/>
-            </a:srgbClr>
+            <a:srgbClr val="FFFFFF"/>
           </a:solidFill>
           <a:ln w="12700">
             <a:solidFill>
-              <a:srgbClr val="D6E8F2"/>
+              <a:srgbClr val="B9D7E6"/>
             </a:solidFill>
             <a:prstDash val="solid"/>
           </a:ln>
@@ -6986,119 +6745,98 @@
       </p:sp>
       <p:sp>
         <p:nvSpPr>
-          <p:cNvPr id="14" name="Shape 12"/>
-          <p:cNvSpPr/>
-          <p:nvPr/>
-        </p:nvSpPr>
-        <p:spPr>
-          <a:xfrm>
-            <a:off x="8074152" y="3291840"/>
-            <a:ext cx="2596896" cy="749808"/>
-          </a:xfrm>
-          <a:prstGeom prst="rect">
-            <a:avLst/>
-          </a:prstGeom>
-          <a:solidFill>
-            <a:srgbClr val="EAF6F8"/>
-          </a:solidFill>
-          <a:ln w="12700">
-            <a:solidFill>
-              <a:srgbClr val="8ABBD8"/>
-            </a:solidFill>
-            <a:prstDash val="solid"/>
-          </a:ln>
-        </p:spPr>
-      </p:sp>
-      <p:sp>
-        <p:nvSpPr>
-          <p:cNvPr id="15" name="Shape 13"/>
-          <p:cNvSpPr/>
-          <p:nvPr/>
-        </p:nvSpPr>
-        <p:spPr>
-          <a:xfrm>
-            <a:off x="8202168" y="3721608"/>
-            <a:ext cx="2340864" cy="0"/>
-          </a:xfrm>
-          <a:prstGeom prst="line">
-            <a:avLst/>
-          </a:prstGeom>
-          <a:noFill/>
-          <a:ln w="19050">
-            <a:solidFill>
-              <a:srgbClr val="0068B7"/>
-            </a:solidFill>
-            <a:prstDash val="solid"/>
-          </a:ln>
-        </p:spPr>
+          <p:cNvPr id="14" name="Text 12"/>
+          <p:cNvSpPr/>
+          <p:nvPr/>
+        </p:nvSpPr>
+        <p:spPr>
+          <a:xfrm>
+            <a:off x="7799832" y="2935224"/>
+            <a:ext cx="3145536" cy="256032"/>
+          </a:xfrm>
+          <a:prstGeom prst="rect">
+            <a:avLst/>
+          </a:prstGeom>
+          <a:noFill/>
+          <a:ln/>
+        </p:spPr>
+        <p:txBody>
+          <a:bodyPr wrap="square" lIns="0" tIns="0" rIns="0" bIns="0" rtlCol="0" anchor="ctr"/>
+          <a:lstStyle/>
+          <a:p>
+            <a:pPr indent="0" marL="0">
+              <a:buNone/>
+            </a:pPr>
+            <a:r>
+              <a:rPr lang="en-US" sz="1300" b="1" dirty="0">
+                <a:solidFill>
+                  <a:srgbClr val="0068B7"/>
+                </a:solidFill>
+                <a:latin typeface="Aptos" pitchFamily="34" charset="0"/>
+                <a:ea typeface="Aptos" pitchFamily="34" charset="-122"/>
+                <a:cs typeface="Aptos" pitchFamily="34" charset="-120"/>
+              </a:rPr>
+              <a:t>Concept checkpoints</a:t>
+            </a:r>
+            <a:endParaRPr lang="en-US" sz="1300" dirty="0"/>
+          </a:p>
+        </p:txBody>
+      </p:sp>
+      <p:sp>
+        <p:nvSpPr>
+          <p:cNvPr id="15" name="Text 13"/>
+          <p:cNvSpPr/>
+          <p:nvPr/>
+        </p:nvSpPr>
+        <p:spPr>
+          <a:xfrm>
+            <a:off x="7818120" y="3300984"/>
+            <a:ext cx="3090672" cy="877824"/>
+          </a:xfrm>
+          <a:prstGeom prst="rect">
+            <a:avLst/>
+          </a:prstGeom>
+          <a:noFill/>
+          <a:ln/>
+        </p:spPr>
+        <p:txBody>
+          <a:bodyPr wrap="square" lIns="254" tIns="254" rIns="254" bIns="254" rtlCol="0" anchor="t">
+            <a:normAutofit/>
+          </a:bodyPr>
+          <a:lstStyle/>
+          <a:p>
+            <a:r>
+              <a:rPr lang="en-US" sz="1380" dirty="0">
+                <a:solidFill>
+                  <a:srgbClr val="17364A"/>
+                </a:solidFill>
+                <a:latin typeface="Aptos" pitchFamily="34" charset="0"/>
+                <a:ea typeface="Aptos" pitchFamily="34" charset="-122"/>
+                <a:cs typeface="Aptos" pitchFamily="34" charset="-120"/>
+              </a:rPr>
+              <a:t>Document assumptions, unresolved questions, and which agency roles would need to review.</a:t>
+            </a:r>
+            <a:endParaRPr lang="en-US" sz="1380" dirty="0"/>
+          </a:p>
+          <a:p>
+            <a:r>
+              <a:rPr lang="en-US" sz="1380" dirty="0">
+                <a:solidFill>
+                  <a:srgbClr val="17364A"/>
+                </a:solidFill>
+                <a:latin typeface="Aptos" pitchFamily="34" charset="0"/>
+                <a:ea typeface="Aptos" pitchFamily="34" charset="-122"/>
+                <a:cs typeface="Aptos" pitchFamily="34" charset="-120"/>
+              </a:rPr>
+              <a:t>The exercise should produce a work product that could support governance review,.</a:t>
+            </a:r>
+            <a:endParaRPr lang="en-US" sz="1380" dirty="0"/>
+          </a:p>
+        </p:txBody>
       </p:sp>
       <p:sp>
         <p:nvSpPr>
           <p:cNvPr id="16" name="Shape 14"/>
-          <p:cNvSpPr/>
-          <p:nvPr/>
-        </p:nvSpPr>
-        <p:spPr>
-          <a:xfrm>
-            <a:off x="9198864" y="4206240"/>
-            <a:ext cx="347472" cy="347472"/>
-          </a:xfrm>
-          <a:prstGeom prst="ellipse">
-            <a:avLst/>
-          </a:prstGeom>
-          <a:solidFill>
-            <a:srgbClr val="2F8A28"/>
-          </a:solidFill>
-          <a:ln w="12700">
-            <a:solidFill>
-              <a:srgbClr val="2F8A28"/>
-            </a:solidFill>
-            <a:prstDash val="solid"/>
-          </a:ln>
-        </p:spPr>
-      </p:sp>
-      <p:sp>
-        <p:nvSpPr>
-          <p:cNvPr id="17" name="Text 15"/>
-          <p:cNvSpPr/>
-          <p:nvPr/>
-        </p:nvSpPr>
-        <p:spPr>
-          <a:xfrm>
-            <a:off x="7909560" y="3977640"/>
-            <a:ext cx="2926080" cy="182880"/>
-          </a:xfrm>
-          <a:prstGeom prst="rect">
-            <a:avLst/>
-          </a:prstGeom>
-          <a:noFill/>
-          <a:ln/>
-        </p:spPr>
-        <p:txBody>
-          <a:bodyPr wrap="square" lIns="0" tIns="0" rIns="0" bIns="0" rtlCol="0" anchor="ctr"/>
-          <a:lstStyle/>
-          <a:p>
-            <a:pPr algn="ctr" indent="0" marL="0">
-              <a:buNone/>
-            </a:pPr>
-            <a:r>
-              <a:rPr lang="en-US" sz="1000" dirty="0">
-                <a:solidFill>
-                  <a:srgbClr val="003A63"/>
-                </a:solidFill>
-                <a:latin typeface="Aptos" pitchFamily="34" charset="0"/>
-                <a:ea typeface="Aptos" pitchFamily="34" charset="-122"/>
-                <a:cs typeface="Aptos" pitchFamily="34" charset="-120"/>
-              </a:rPr>
-              <a:t>Concept to action</a:t>
-            </a:r>
-            <a:endParaRPr lang="en-US" sz="1000" dirty="0"/>
-          </a:p>
-        </p:txBody>
-      </p:sp>
-      <p:sp>
-        <p:nvSpPr>
-          <p:cNvPr id="18" name="Shape 16"/>
           <p:cNvSpPr/>
           <p:nvPr/>
         </p:nvSpPr>
@@ -7125,7 +6863,7 @@
       </p:sp>
       <p:sp>
         <p:nvSpPr>
-          <p:cNvPr id="19" name="Text 17"/>
+          <p:cNvPr id="17" name="Text 15"/>
           <p:cNvSpPr/>
           <p:nvPr/>
         </p:nvSpPr>
@@ -7164,7 +6902,7 @@
       </p:sp>
       <p:sp>
         <p:nvSpPr>
-          <p:cNvPr id="20" name="Text 18"/>
+          <p:cNvPr id="18" name="Text 16"/>
           <p:cNvSpPr/>
           <p:nvPr/>
         </p:nvSpPr>
@@ -7644,13 +7382,11 @@
             </a:avLst>
           </a:prstGeom>
           <a:solidFill>
-            <a:srgbClr val="FFFFFF">
-              <a:alpha val="88000"/>
-            </a:srgbClr>
+            <a:srgbClr val="FFFFFF"/>
           </a:solidFill>
           <a:ln w="12700">
             <a:solidFill>
-              <a:srgbClr val="D6E8F2"/>
+              <a:srgbClr val="B9D7E6"/>
             </a:solidFill>
             <a:prstDash val="solid"/>
           </a:ln>
@@ -7658,119 +7394,84 @@
       </p:sp>
       <p:sp>
         <p:nvSpPr>
-          <p:cNvPr id="14" name="Shape 12"/>
-          <p:cNvSpPr/>
-          <p:nvPr/>
-        </p:nvSpPr>
-        <p:spPr>
-          <a:xfrm>
-            <a:off x="8074152" y="3291840"/>
-            <a:ext cx="2596896" cy="749808"/>
-          </a:xfrm>
-          <a:prstGeom prst="rect">
-            <a:avLst/>
-          </a:prstGeom>
-          <a:solidFill>
-            <a:srgbClr val="EAF6F8"/>
-          </a:solidFill>
-          <a:ln w="12700">
-            <a:solidFill>
-              <a:srgbClr val="8ABBD8"/>
-            </a:solidFill>
-            <a:prstDash val="solid"/>
-          </a:ln>
-        </p:spPr>
-      </p:sp>
-      <p:sp>
-        <p:nvSpPr>
-          <p:cNvPr id="15" name="Shape 13"/>
-          <p:cNvSpPr/>
-          <p:nvPr/>
-        </p:nvSpPr>
-        <p:spPr>
-          <a:xfrm>
-            <a:off x="8202168" y="3721608"/>
-            <a:ext cx="2340864" cy="0"/>
-          </a:xfrm>
-          <a:prstGeom prst="line">
-            <a:avLst/>
-          </a:prstGeom>
-          <a:noFill/>
-          <a:ln w="19050">
-            <a:solidFill>
-              <a:srgbClr val="0068B7"/>
-            </a:solidFill>
-            <a:prstDash val="solid"/>
-          </a:ln>
-        </p:spPr>
+          <p:cNvPr id="14" name="Text 12"/>
+          <p:cNvSpPr/>
+          <p:nvPr/>
+        </p:nvSpPr>
+        <p:spPr>
+          <a:xfrm>
+            <a:off x="7799832" y="2935224"/>
+            <a:ext cx="3145536" cy="256032"/>
+          </a:xfrm>
+          <a:prstGeom prst="rect">
+            <a:avLst/>
+          </a:prstGeom>
+          <a:noFill/>
+          <a:ln/>
+        </p:spPr>
+        <p:txBody>
+          <a:bodyPr wrap="square" lIns="0" tIns="0" rIns="0" bIns="0" rtlCol="0" anchor="ctr"/>
+          <a:lstStyle/>
+          <a:p>
+            <a:pPr indent="0" marL="0">
+              <a:buNone/>
+            </a:pPr>
+            <a:r>
+              <a:rPr lang="en-US" sz="1300" b="1" dirty="0">
+                <a:solidFill>
+                  <a:srgbClr val="0068B7"/>
+                </a:solidFill>
+                <a:latin typeface="Aptos" pitchFamily="34" charset="0"/>
+                <a:ea typeface="Aptos" pitchFamily="34" charset="-122"/>
+                <a:cs typeface="Aptos" pitchFamily="34" charset="-120"/>
+              </a:rPr>
+              <a:t>Concept checkpoints</a:t>
+            </a:r>
+            <a:endParaRPr lang="en-US" sz="1300" dirty="0"/>
+          </a:p>
+        </p:txBody>
+      </p:sp>
+      <p:sp>
+        <p:nvSpPr>
+          <p:cNvPr id="15" name="Text 13"/>
+          <p:cNvSpPr/>
+          <p:nvPr/>
+        </p:nvSpPr>
+        <p:spPr>
+          <a:xfrm>
+            <a:off x="7818120" y="3300984"/>
+            <a:ext cx="3090672" cy="877824"/>
+          </a:xfrm>
+          <a:prstGeom prst="rect">
+            <a:avLst/>
+          </a:prstGeom>
+          <a:noFill/>
+          <a:ln/>
+        </p:spPr>
+        <p:txBody>
+          <a:bodyPr wrap="square" lIns="254" tIns="254" rIns="254" bIns="254" rtlCol="0" anchor="t">
+            <a:normAutofit/>
+          </a:bodyPr>
+          <a:lstStyle/>
+          <a:p>
+            <a:r>
+              <a:rPr lang="en-US" sz="1380" dirty="0">
+                <a:solidFill>
+                  <a:srgbClr val="17364A"/>
+                </a:solidFill>
+                <a:latin typeface="Aptos" pitchFamily="34" charset="0"/>
+                <a:ea typeface="Aptos" pitchFamily="34" charset="-122"/>
+                <a:cs typeface="Aptos" pitchFamily="34" charset="-120"/>
+              </a:rPr>
+              <a:t>Workforce readiness plan; role-based competency matrix; training assignment matrix; AI.</a:t>
+            </a:r>
+            <a:endParaRPr lang="en-US" sz="1380" dirty="0"/>
+          </a:p>
+        </p:txBody>
       </p:sp>
       <p:sp>
         <p:nvSpPr>
           <p:cNvPr id="16" name="Shape 14"/>
-          <p:cNvSpPr/>
-          <p:nvPr/>
-        </p:nvSpPr>
-        <p:spPr>
-          <a:xfrm>
-            <a:off x="9198864" y="4206240"/>
-            <a:ext cx="347472" cy="347472"/>
-          </a:xfrm>
-          <a:prstGeom prst="ellipse">
-            <a:avLst/>
-          </a:prstGeom>
-          <a:solidFill>
-            <a:srgbClr val="2F8A28"/>
-          </a:solidFill>
-          <a:ln w="12700">
-            <a:solidFill>
-              <a:srgbClr val="2F8A28"/>
-            </a:solidFill>
-            <a:prstDash val="solid"/>
-          </a:ln>
-        </p:spPr>
-      </p:sp>
-      <p:sp>
-        <p:nvSpPr>
-          <p:cNvPr id="17" name="Text 15"/>
-          <p:cNvSpPr/>
-          <p:nvPr/>
-        </p:nvSpPr>
-        <p:spPr>
-          <a:xfrm>
-            <a:off x="7909560" y="3977640"/>
-            <a:ext cx="2926080" cy="182880"/>
-          </a:xfrm>
-          <a:prstGeom prst="rect">
-            <a:avLst/>
-          </a:prstGeom>
-          <a:noFill/>
-          <a:ln/>
-        </p:spPr>
-        <p:txBody>
-          <a:bodyPr wrap="square" lIns="0" tIns="0" rIns="0" bIns="0" rtlCol="0" anchor="ctr"/>
-          <a:lstStyle/>
-          <a:p>
-            <a:pPr algn="ctr" indent="0" marL="0">
-              <a:buNone/>
-            </a:pPr>
-            <a:r>
-              <a:rPr lang="en-US" sz="1000" dirty="0">
-                <a:solidFill>
-                  <a:srgbClr val="003A63"/>
-                </a:solidFill>
-                <a:latin typeface="Aptos" pitchFamily="34" charset="0"/>
-                <a:ea typeface="Aptos" pitchFamily="34" charset="-122"/>
-                <a:cs typeface="Aptos" pitchFamily="34" charset="-120"/>
-              </a:rPr>
-              <a:t>Concept to action</a:t>
-            </a:r>
-            <a:endParaRPr lang="en-US" sz="1000" dirty="0"/>
-          </a:p>
-        </p:txBody>
-      </p:sp>
-      <p:sp>
-        <p:nvSpPr>
-          <p:cNvPr id="18" name="Shape 16"/>
           <p:cNvSpPr/>
           <p:nvPr/>
         </p:nvSpPr>
@@ -7797,7 +7498,7 @@
       </p:sp>
       <p:sp>
         <p:nvSpPr>
-          <p:cNvPr id="19" name="Text 17"/>
+          <p:cNvPr id="17" name="Text 15"/>
           <p:cNvSpPr/>
           <p:nvPr/>
         </p:nvSpPr>
@@ -7836,7 +7537,7 @@
       </p:sp>
       <p:sp>
         <p:nvSpPr>
-          <p:cNvPr id="20" name="Text 18"/>
+          <p:cNvPr id="18" name="Text 16"/>
           <p:cNvSpPr/>
           <p:nvPr/>
         </p:nvSpPr>
@@ -8316,13 +8017,11 @@
             </a:avLst>
           </a:prstGeom>
           <a:solidFill>
-            <a:srgbClr val="FFFFFF">
-              <a:alpha val="88000"/>
-            </a:srgbClr>
+            <a:srgbClr val="FFFFFF"/>
           </a:solidFill>
           <a:ln w="12700">
             <a:solidFill>
-              <a:srgbClr val="D6E8F2"/>
+              <a:srgbClr val="B9D7E6"/>
             </a:solidFill>
             <a:prstDash val="solid"/>
           </a:ln>
@@ -8330,119 +8029,84 @@
       </p:sp>
       <p:sp>
         <p:nvSpPr>
-          <p:cNvPr id="14" name="Shape 12"/>
-          <p:cNvSpPr/>
-          <p:nvPr/>
-        </p:nvSpPr>
-        <p:spPr>
-          <a:xfrm>
-            <a:off x="8074152" y="3291840"/>
-            <a:ext cx="2596896" cy="749808"/>
-          </a:xfrm>
-          <a:prstGeom prst="rect">
-            <a:avLst/>
-          </a:prstGeom>
-          <a:solidFill>
-            <a:srgbClr val="EAF6F8"/>
-          </a:solidFill>
-          <a:ln w="12700">
-            <a:solidFill>
-              <a:srgbClr val="8ABBD8"/>
-            </a:solidFill>
-            <a:prstDash val="solid"/>
-          </a:ln>
-        </p:spPr>
-      </p:sp>
-      <p:sp>
-        <p:nvSpPr>
-          <p:cNvPr id="15" name="Shape 13"/>
-          <p:cNvSpPr/>
-          <p:nvPr/>
-        </p:nvSpPr>
-        <p:spPr>
-          <a:xfrm>
-            <a:off x="8202168" y="3721608"/>
-            <a:ext cx="2340864" cy="0"/>
-          </a:xfrm>
-          <a:prstGeom prst="line">
-            <a:avLst/>
-          </a:prstGeom>
-          <a:noFill/>
-          <a:ln w="19050">
-            <a:solidFill>
-              <a:srgbClr val="0068B7"/>
-            </a:solidFill>
-            <a:prstDash val="solid"/>
-          </a:ln>
-        </p:spPr>
+          <p:cNvPr id="14" name="Text 12"/>
+          <p:cNvSpPr/>
+          <p:nvPr/>
+        </p:nvSpPr>
+        <p:spPr>
+          <a:xfrm>
+            <a:off x="7799832" y="2935224"/>
+            <a:ext cx="3145536" cy="256032"/>
+          </a:xfrm>
+          <a:prstGeom prst="rect">
+            <a:avLst/>
+          </a:prstGeom>
+          <a:noFill/>
+          <a:ln/>
+        </p:spPr>
+        <p:txBody>
+          <a:bodyPr wrap="square" lIns="0" tIns="0" rIns="0" bIns="0" rtlCol="0" anchor="ctr"/>
+          <a:lstStyle/>
+          <a:p>
+            <a:pPr indent="0" marL="0">
+              <a:buNone/>
+            </a:pPr>
+            <a:r>
+              <a:rPr lang="en-US" sz="1300" b="1" dirty="0">
+                <a:solidFill>
+                  <a:srgbClr val="0068B7"/>
+                </a:solidFill>
+                <a:latin typeface="Aptos" pitchFamily="34" charset="0"/>
+                <a:ea typeface="Aptos" pitchFamily="34" charset="-122"/>
+                <a:cs typeface="Aptos" pitchFamily="34" charset="-120"/>
+              </a:rPr>
+              <a:t>Concept checkpoints</a:t>
+            </a:r>
+            <a:endParaRPr lang="en-US" sz="1300" dirty="0"/>
+          </a:p>
+        </p:txBody>
+      </p:sp>
+      <p:sp>
+        <p:nvSpPr>
+          <p:cNvPr id="15" name="Text 13"/>
+          <p:cNvSpPr/>
+          <p:nvPr/>
+        </p:nvSpPr>
+        <p:spPr>
+          <a:xfrm>
+            <a:off x="7818120" y="3300984"/>
+            <a:ext cx="3090672" cy="877824"/>
+          </a:xfrm>
+          <a:prstGeom prst="rect">
+            <a:avLst/>
+          </a:prstGeom>
+          <a:noFill/>
+          <a:ln/>
+        </p:spPr>
+        <p:txBody>
+          <a:bodyPr wrap="square" lIns="254" tIns="254" rIns="254" bIns="254" rtlCol="0" anchor="t">
+            <a:normAutofit/>
+          </a:bodyPr>
+          <a:lstStyle/>
+          <a:p>
+            <a:r>
+              <a:rPr lang="en-US" sz="1380" dirty="0">
+                <a:solidFill>
+                  <a:srgbClr val="17364A"/>
+                </a:solidFill>
+                <a:latin typeface="Aptos" pitchFamily="34" charset="0"/>
+                <a:ea typeface="Aptos" pitchFamily="34" charset="-122"/>
+                <a:cs typeface="Aptos" pitchFamily="34" charset="-120"/>
+              </a:rPr>
+              <a:t>Workforce readiness plan; role-based competency matrix; training assignment matrix; AI.</a:t>
+            </a:r>
+            <a:endParaRPr lang="en-US" sz="1380" dirty="0"/>
+          </a:p>
+        </p:txBody>
       </p:sp>
       <p:sp>
         <p:nvSpPr>
           <p:cNvPr id="16" name="Shape 14"/>
-          <p:cNvSpPr/>
-          <p:nvPr/>
-        </p:nvSpPr>
-        <p:spPr>
-          <a:xfrm>
-            <a:off x="9198864" y="4206240"/>
-            <a:ext cx="347472" cy="347472"/>
-          </a:xfrm>
-          <a:prstGeom prst="ellipse">
-            <a:avLst/>
-          </a:prstGeom>
-          <a:solidFill>
-            <a:srgbClr val="2F8A28"/>
-          </a:solidFill>
-          <a:ln w="12700">
-            <a:solidFill>
-              <a:srgbClr val="2F8A28"/>
-            </a:solidFill>
-            <a:prstDash val="solid"/>
-          </a:ln>
-        </p:spPr>
-      </p:sp>
-      <p:sp>
-        <p:nvSpPr>
-          <p:cNvPr id="17" name="Text 15"/>
-          <p:cNvSpPr/>
-          <p:nvPr/>
-        </p:nvSpPr>
-        <p:spPr>
-          <a:xfrm>
-            <a:off x="7909560" y="3977640"/>
-            <a:ext cx="2926080" cy="182880"/>
-          </a:xfrm>
-          <a:prstGeom prst="rect">
-            <a:avLst/>
-          </a:prstGeom>
-          <a:noFill/>
-          <a:ln/>
-        </p:spPr>
-        <p:txBody>
-          <a:bodyPr wrap="square" lIns="0" tIns="0" rIns="0" bIns="0" rtlCol="0" anchor="ctr"/>
-          <a:lstStyle/>
-          <a:p>
-            <a:pPr algn="ctr" indent="0" marL="0">
-              <a:buNone/>
-            </a:pPr>
-            <a:r>
-              <a:rPr lang="en-US" sz="1000" dirty="0">
-                <a:solidFill>
-                  <a:srgbClr val="003A63"/>
-                </a:solidFill>
-                <a:latin typeface="Aptos" pitchFamily="34" charset="0"/>
-                <a:ea typeface="Aptos" pitchFamily="34" charset="-122"/>
-                <a:cs typeface="Aptos" pitchFamily="34" charset="-120"/>
-              </a:rPr>
-              <a:t>Concept to action</a:t>
-            </a:r>
-            <a:endParaRPr lang="en-US" sz="1000" dirty="0"/>
-          </a:p>
-        </p:txBody>
-      </p:sp>
-      <p:sp>
-        <p:nvSpPr>
-          <p:cNvPr id="18" name="Shape 16"/>
           <p:cNvSpPr/>
           <p:nvPr/>
         </p:nvSpPr>
@@ -8469,7 +8133,7 @@
       </p:sp>
       <p:sp>
         <p:nvSpPr>
-          <p:cNvPr id="19" name="Text 17"/>
+          <p:cNvPr id="17" name="Text 15"/>
           <p:cNvSpPr/>
           <p:nvPr/>
         </p:nvSpPr>
@@ -8508,7 +8172,7 @@
       </p:sp>
       <p:sp>
         <p:nvSpPr>
-          <p:cNvPr id="20" name="Text 18"/>
+          <p:cNvPr id="18" name="Text 16"/>
           <p:cNvSpPr/>
           <p:nvPr/>
         </p:nvSpPr>
@@ -9016,13 +8680,11 @@
             </a:avLst>
           </a:prstGeom>
           <a:solidFill>
-            <a:srgbClr val="FFFFFF">
-              <a:alpha val="88000"/>
-            </a:srgbClr>
+            <a:srgbClr val="FFFFFF"/>
           </a:solidFill>
           <a:ln w="12700">
             <a:solidFill>
-              <a:srgbClr val="D6E8F2"/>
+              <a:srgbClr val="B9D7E6"/>
             </a:solidFill>
             <a:prstDash val="solid"/>
           </a:ln>
@@ -9030,119 +8692,112 @@
       </p:sp>
       <p:sp>
         <p:nvSpPr>
-          <p:cNvPr id="14" name="Shape 12"/>
-          <p:cNvSpPr/>
-          <p:nvPr/>
-        </p:nvSpPr>
-        <p:spPr>
-          <a:xfrm>
-            <a:off x="8074152" y="3291840"/>
-            <a:ext cx="2596896" cy="749808"/>
-          </a:xfrm>
-          <a:prstGeom prst="rect">
-            <a:avLst/>
-          </a:prstGeom>
-          <a:solidFill>
-            <a:srgbClr val="EAF6F8"/>
-          </a:solidFill>
-          <a:ln w="12700">
-            <a:solidFill>
-              <a:srgbClr val="8ABBD8"/>
-            </a:solidFill>
-            <a:prstDash val="solid"/>
-          </a:ln>
-        </p:spPr>
-      </p:sp>
-      <p:sp>
-        <p:nvSpPr>
-          <p:cNvPr id="15" name="Shape 13"/>
-          <p:cNvSpPr/>
-          <p:nvPr/>
-        </p:nvSpPr>
-        <p:spPr>
-          <a:xfrm>
-            <a:off x="8202168" y="3721608"/>
-            <a:ext cx="2340864" cy="0"/>
-          </a:xfrm>
-          <a:prstGeom prst="line">
-            <a:avLst/>
-          </a:prstGeom>
-          <a:noFill/>
-          <a:ln w="19050">
-            <a:solidFill>
-              <a:srgbClr val="0068B7"/>
-            </a:solidFill>
-            <a:prstDash val="solid"/>
-          </a:ln>
-        </p:spPr>
+          <p:cNvPr id="14" name="Text 12"/>
+          <p:cNvSpPr/>
+          <p:nvPr/>
+        </p:nvSpPr>
+        <p:spPr>
+          <a:xfrm>
+            <a:off x="7799832" y="2935224"/>
+            <a:ext cx="3145536" cy="256032"/>
+          </a:xfrm>
+          <a:prstGeom prst="rect">
+            <a:avLst/>
+          </a:prstGeom>
+          <a:noFill/>
+          <a:ln/>
+        </p:spPr>
+        <p:txBody>
+          <a:bodyPr wrap="square" lIns="0" tIns="0" rIns="0" bIns="0" rtlCol="0" anchor="ctr"/>
+          <a:lstStyle/>
+          <a:p>
+            <a:pPr indent="0" marL="0">
+              <a:buNone/>
+            </a:pPr>
+            <a:r>
+              <a:rPr lang="en-US" sz="1300" b="1" dirty="0">
+                <a:solidFill>
+                  <a:srgbClr val="0068B7"/>
+                </a:solidFill>
+                <a:latin typeface="Aptos" pitchFamily="34" charset="0"/>
+                <a:ea typeface="Aptos" pitchFamily="34" charset="-122"/>
+                <a:cs typeface="Aptos" pitchFamily="34" charset="-120"/>
+              </a:rPr>
+              <a:t>Concept checkpoints</a:t>
+            </a:r>
+            <a:endParaRPr lang="en-US" sz="1300" dirty="0"/>
+          </a:p>
+        </p:txBody>
+      </p:sp>
+      <p:sp>
+        <p:nvSpPr>
+          <p:cNvPr id="15" name="Text 13"/>
+          <p:cNvSpPr/>
+          <p:nvPr/>
+        </p:nvSpPr>
+        <p:spPr>
+          <a:xfrm>
+            <a:off x="7818120" y="3300984"/>
+            <a:ext cx="3090672" cy="877824"/>
+          </a:xfrm>
+          <a:prstGeom prst="rect">
+            <a:avLst/>
+          </a:prstGeom>
+          <a:noFill/>
+          <a:ln/>
+        </p:spPr>
+        <p:txBody>
+          <a:bodyPr wrap="square" lIns="254" tIns="254" rIns="254" bIns="254" rtlCol="0" anchor="t">
+            <a:normAutofit/>
+          </a:bodyPr>
+          <a:lstStyle/>
+          <a:p>
+            <a:r>
+              <a:rPr lang="en-US" sz="1380" dirty="0">
+                <a:solidFill>
+                  <a:srgbClr val="17364A"/>
+                </a:solidFill>
+                <a:latin typeface="Aptos" pitchFamily="34" charset="0"/>
+                <a:ea typeface="Aptos" pitchFamily="34" charset="-122"/>
+                <a:cs typeface="Aptos" pitchFamily="34" charset="-120"/>
+              </a:rPr>
+              <a:t>1.</a:t>
+            </a:r>
+            <a:endParaRPr lang="en-US" sz="1380" dirty="0"/>
+          </a:p>
+          <a:p>
+            <a:r>
+              <a:rPr lang="en-US" sz="1380" dirty="0">
+                <a:solidFill>
+                  <a:srgbClr val="17364A"/>
+                </a:solidFill>
+                <a:latin typeface="Aptos" pitchFamily="34" charset="0"/>
+                <a:ea typeface="Aptos" pitchFamily="34" charset="-122"/>
+                <a:cs typeface="Aptos" pitchFamily="34" charset="-120"/>
+              </a:rPr>
+              <a:t>What is the strongest reason this module topic belongs in AI leadership and governance.</a:t>
+            </a:r>
+            <a:endParaRPr lang="en-US" sz="1380" dirty="0"/>
+          </a:p>
+          <a:p>
+            <a:r>
+              <a:rPr lang="en-US" sz="1380" dirty="0">
+                <a:solidFill>
+                  <a:srgbClr val="17364A"/>
+                </a:solidFill>
+                <a:latin typeface="Aptos" pitchFamily="34" charset="0"/>
+                <a:ea typeface="Aptos" pitchFamily="34" charset="-122"/>
+                <a:cs typeface="Aptos" pitchFamily="34" charset="-120"/>
+              </a:rPr>
+              <a:t>2.</a:t>
+            </a:r>
+            <a:endParaRPr lang="en-US" sz="1380" dirty="0"/>
+          </a:p>
+        </p:txBody>
       </p:sp>
       <p:sp>
         <p:nvSpPr>
           <p:cNvPr id="16" name="Shape 14"/>
-          <p:cNvSpPr/>
-          <p:nvPr/>
-        </p:nvSpPr>
-        <p:spPr>
-          <a:xfrm>
-            <a:off x="9198864" y="4206240"/>
-            <a:ext cx="347472" cy="347472"/>
-          </a:xfrm>
-          <a:prstGeom prst="ellipse">
-            <a:avLst/>
-          </a:prstGeom>
-          <a:solidFill>
-            <a:srgbClr val="2F8A28"/>
-          </a:solidFill>
-          <a:ln w="12700">
-            <a:solidFill>
-              <a:srgbClr val="2F8A28"/>
-            </a:solidFill>
-            <a:prstDash val="solid"/>
-          </a:ln>
-        </p:spPr>
-      </p:sp>
-      <p:sp>
-        <p:nvSpPr>
-          <p:cNvPr id="17" name="Text 15"/>
-          <p:cNvSpPr/>
-          <p:nvPr/>
-        </p:nvSpPr>
-        <p:spPr>
-          <a:xfrm>
-            <a:off x="7909560" y="3977640"/>
-            <a:ext cx="2926080" cy="182880"/>
-          </a:xfrm>
-          <a:prstGeom prst="rect">
-            <a:avLst/>
-          </a:prstGeom>
-          <a:noFill/>
-          <a:ln/>
-        </p:spPr>
-        <p:txBody>
-          <a:bodyPr wrap="square" lIns="0" tIns="0" rIns="0" bIns="0" rtlCol="0" anchor="ctr"/>
-          <a:lstStyle/>
-          <a:p>
-            <a:pPr algn="ctr" indent="0" marL="0">
-              <a:buNone/>
-            </a:pPr>
-            <a:r>
-              <a:rPr lang="en-US" sz="1000" dirty="0">
-                <a:solidFill>
-                  <a:srgbClr val="003A63"/>
-                </a:solidFill>
-                <a:latin typeface="Aptos" pitchFamily="34" charset="0"/>
-                <a:ea typeface="Aptos" pitchFamily="34" charset="-122"/>
-                <a:cs typeface="Aptos" pitchFamily="34" charset="-120"/>
-              </a:rPr>
-              <a:t>Concept to action</a:t>
-            </a:r>
-            <a:endParaRPr lang="en-US" sz="1000" dirty="0"/>
-          </a:p>
-        </p:txBody>
-      </p:sp>
-      <p:sp>
-        <p:nvSpPr>
-          <p:cNvPr id="18" name="Shape 16"/>
           <p:cNvSpPr/>
           <p:nvPr/>
         </p:nvSpPr>
@@ -9169,7 +8824,7 @@
       </p:sp>
       <p:sp>
         <p:nvSpPr>
-          <p:cNvPr id="19" name="Text 17"/>
+          <p:cNvPr id="17" name="Text 15"/>
           <p:cNvSpPr/>
           <p:nvPr/>
         </p:nvSpPr>
@@ -9208,7 +8863,7 @@
       </p:sp>
       <p:sp>
         <p:nvSpPr>
-          <p:cNvPr id="20" name="Text 18"/>
+          <p:cNvPr id="18" name="Text 16"/>
           <p:cNvSpPr/>
           <p:nvPr/>
         </p:nvSpPr>
@@ -9716,13 +9371,11 @@
             </a:avLst>
           </a:prstGeom>
           <a:solidFill>
-            <a:srgbClr val="FFFFFF">
-              <a:alpha val="88000"/>
-            </a:srgbClr>
+            <a:srgbClr val="FFFFFF"/>
           </a:solidFill>
           <a:ln w="12700">
             <a:solidFill>
-              <a:srgbClr val="D6E8F2"/>
+              <a:srgbClr val="B9D7E6"/>
             </a:solidFill>
             <a:prstDash val="solid"/>
           </a:ln>
@@ -9730,119 +9383,112 @@
       </p:sp>
       <p:sp>
         <p:nvSpPr>
-          <p:cNvPr id="14" name="Shape 12"/>
-          <p:cNvSpPr/>
-          <p:nvPr/>
-        </p:nvSpPr>
-        <p:spPr>
-          <a:xfrm>
-            <a:off x="8074152" y="3291840"/>
-            <a:ext cx="2596896" cy="749808"/>
-          </a:xfrm>
-          <a:prstGeom prst="rect">
-            <a:avLst/>
-          </a:prstGeom>
-          <a:solidFill>
-            <a:srgbClr val="EAF6F8"/>
-          </a:solidFill>
-          <a:ln w="12700">
-            <a:solidFill>
-              <a:srgbClr val="8ABBD8"/>
-            </a:solidFill>
-            <a:prstDash val="solid"/>
-          </a:ln>
-        </p:spPr>
-      </p:sp>
-      <p:sp>
-        <p:nvSpPr>
-          <p:cNvPr id="15" name="Shape 13"/>
-          <p:cNvSpPr/>
-          <p:nvPr/>
-        </p:nvSpPr>
-        <p:spPr>
-          <a:xfrm>
-            <a:off x="8202168" y="3721608"/>
-            <a:ext cx="2340864" cy="0"/>
-          </a:xfrm>
-          <a:prstGeom prst="line">
-            <a:avLst/>
-          </a:prstGeom>
-          <a:noFill/>
-          <a:ln w="19050">
-            <a:solidFill>
-              <a:srgbClr val="0068B7"/>
-            </a:solidFill>
-            <a:prstDash val="solid"/>
-          </a:ln>
-        </p:spPr>
+          <p:cNvPr id="14" name="Text 12"/>
+          <p:cNvSpPr/>
+          <p:nvPr/>
+        </p:nvSpPr>
+        <p:spPr>
+          <a:xfrm>
+            <a:off x="7799832" y="2935224"/>
+            <a:ext cx="3145536" cy="256032"/>
+          </a:xfrm>
+          <a:prstGeom prst="rect">
+            <a:avLst/>
+          </a:prstGeom>
+          <a:noFill/>
+          <a:ln/>
+        </p:spPr>
+        <p:txBody>
+          <a:bodyPr wrap="square" lIns="0" tIns="0" rIns="0" bIns="0" rtlCol="0" anchor="ctr"/>
+          <a:lstStyle/>
+          <a:p>
+            <a:pPr indent="0" marL="0">
+              <a:buNone/>
+            </a:pPr>
+            <a:r>
+              <a:rPr lang="en-US" sz="1300" b="1" dirty="0">
+                <a:solidFill>
+                  <a:srgbClr val="0068B7"/>
+                </a:solidFill>
+                <a:latin typeface="Aptos" pitchFamily="34" charset="0"/>
+                <a:ea typeface="Aptos" pitchFamily="34" charset="-122"/>
+                <a:cs typeface="Aptos" pitchFamily="34" charset="-120"/>
+              </a:rPr>
+              <a:t>Concept checkpoints</a:t>
+            </a:r>
+            <a:endParaRPr lang="en-US" sz="1300" dirty="0"/>
+          </a:p>
+        </p:txBody>
+      </p:sp>
+      <p:sp>
+        <p:nvSpPr>
+          <p:cNvPr id="15" name="Text 13"/>
+          <p:cNvSpPr/>
+          <p:nvPr/>
+        </p:nvSpPr>
+        <p:spPr>
+          <a:xfrm>
+            <a:off x="7818120" y="3300984"/>
+            <a:ext cx="3090672" cy="877824"/>
+          </a:xfrm>
+          <a:prstGeom prst="rect">
+            <a:avLst/>
+          </a:prstGeom>
+          <a:noFill/>
+          <a:ln/>
+        </p:spPr>
+        <p:txBody>
+          <a:bodyPr wrap="square" lIns="254" tIns="254" rIns="254" bIns="254" rtlCol="0" anchor="t">
+            <a:normAutofit/>
+          </a:bodyPr>
+          <a:lstStyle/>
+          <a:p>
+            <a:r>
+              <a:rPr lang="en-US" sz="1380" dirty="0">
+                <a:solidFill>
+                  <a:srgbClr val="17364A"/>
+                </a:solidFill>
+                <a:latin typeface="Aptos" pitchFamily="34" charset="0"/>
+                <a:ea typeface="Aptos" pitchFamily="34" charset="-122"/>
+                <a:cs typeface="Aptos" pitchFamily="34" charset="-120"/>
+              </a:rPr>
+              <a:t>NIST Artificial Intelligence Risk Management Framework (AI RMF 1.0):.</a:t>
+            </a:r>
+            <a:endParaRPr lang="en-US" sz="1380" dirty="0"/>
+          </a:p>
+          <a:p>
+            <a:r>
+              <a:rPr lang="en-US" sz="1380" dirty="0">
+                <a:solidFill>
+                  <a:srgbClr val="17364A"/>
+                </a:solidFill>
+                <a:latin typeface="Aptos" pitchFamily="34" charset="0"/>
+                <a:ea typeface="Aptos" pitchFamily="34" charset="-122"/>
+                <a:cs typeface="Aptos" pitchFamily="34" charset="-120"/>
+              </a:rPr>
+              <a:t>CDC Public Health Data Strategy and Data Modernization resources:.</a:t>
+            </a:r>
+            <a:endParaRPr lang="en-US" sz="1380" dirty="0"/>
+          </a:p>
+          <a:p>
+            <a:r>
+              <a:rPr lang="en-US" sz="1380" dirty="0">
+                <a:solidFill>
+                  <a:srgbClr val="17364A"/>
+                </a:solidFill>
+                <a:latin typeface="Aptos" pitchFamily="34" charset="0"/>
+                <a:ea typeface="Aptos" pitchFamily="34" charset="-122"/>
+                <a:cs typeface="Aptos" pitchFamily="34" charset="-120"/>
+              </a:rPr>
+              <a:t>WHO Ethics and Governance of Artificial Intelligence for Health:.</a:t>
+            </a:r>
+            <a:endParaRPr lang="en-US" sz="1380" dirty="0"/>
+          </a:p>
+        </p:txBody>
       </p:sp>
       <p:sp>
         <p:nvSpPr>
           <p:cNvPr id="16" name="Shape 14"/>
-          <p:cNvSpPr/>
-          <p:nvPr/>
-        </p:nvSpPr>
-        <p:spPr>
-          <a:xfrm>
-            <a:off x="9198864" y="4206240"/>
-            <a:ext cx="347472" cy="347472"/>
-          </a:xfrm>
-          <a:prstGeom prst="ellipse">
-            <a:avLst/>
-          </a:prstGeom>
-          <a:solidFill>
-            <a:srgbClr val="2F8A28"/>
-          </a:solidFill>
-          <a:ln w="12700">
-            <a:solidFill>
-              <a:srgbClr val="2F8A28"/>
-            </a:solidFill>
-            <a:prstDash val="solid"/>
-          </a:ln>
-        </p:spPr>
-      </p:sp>
-      <p:sp>
-        <p:nvSpPr>
-          <p:cNvPr id="17" name="Text 15"/>
-          <p:cNvSpPr/>
-          <p:nvPr/>
-        </p:nvSpPr>
-        <p:spPr>
-          <a:xfrm>
-            <a:off x="7909560" y="3977640"/>
-            <a:ext cx="2926080" cy="182880"/>
-          </a:xfrm>
-          <a:prstGeom prst="rect">
-            <a:avLst/>
-          </a:prstGeom>
-          <a:noFill/>
-          <a:ln/>
-        </p:spPr>
-        <p:txBody>
-          <a:bodyPr wrap="square" lIns="0" tIns="0" rIns="0" bIns="0" rtlCol="0" anchor="ctr"/>
-          <a:lstStyle/>
-          <a:p>
-            <a:pPr algn="ctr" indent="0" marL="0">
-              <a:buNone/>
-            </a:pPr>
-            <a:r>
-              <a:rPr lang="en-US" sz="1000" dirty="0">
-                <a:solidFill>
-                  <a:srgbClr val="003A63"/>
-                </a:solidFill>
-                <a:latin typeface="Aptos" pitchFamily="34" charset="0"/>
-                <a:ea typeface="Aptos" pitchFamily="34" charset="-122"/>
-                <a:cs typeface="Aptos" pitchFamily="34" charset="-120"/>
-              </a:rPr>
-              <a:t>Concept to action</a:t>
-            </a:r>
-            <a:endParaRPr lang="en-US" sz="1000" dirty="0"/>
-          </a:p>
-        </p:txBody>
-      </p:sp>
-      <p:sp>
-        <p:nvSpPr>
-          <p:cNvPr id="18" name="Shape 16"/>
           <p:cNvSpPr/>
           <p:nvPr/>
         </p:nvSpPr>
@@ -9869,7 +9515,7 @@
       </p:sp>
       <p:sp>
         <p:nvSpPr>
-          <p:cNvPr id="19" name="Text 17"/>
+          <p:cNvPr id="17" name="Text 15"/>
           <p:cNvSpPr/>
           <p:nvPr/>
         </p:nvSpPr>
@@ -9908,7 +9554,7 @@
       </p:sp>
       <p:sp>
         <p:nvSpPr>
-          <p:cNvPr id="20" name="Text 18"/>
+          <p:cNvPr id="18" name="Text 16"/>
           <p:cNvSpPr/>
           <p:nvPr/>
         </p:nvSpPr>
@@ -10441,20 +10087,20 @@
         </p:nvSpPr>
         <p:spPr>
           <a:xfrm>
-            <a:off x="7635240" y="3730752"/>
-            <a:ext cx="1033272" cy="749808"/>
+            <a:off x="7909560" y="3675888"/>
+            <a:ext cx="3154680" cy="1691640"/>
           </a:xfrm>
           <a:prstGeom prst="roundRect">
             <a:avLst>
-              <a:gd name="adj" fmla="val 14634"/>
+              <a:gd name="adj" fmla="val 6486"/>
             </a:avLst>
           </a:prstGeom>
           <a:solidFill>
-            <a:srgbClr val="0068B7"/>
+            <a:srgbClr val="FFFFFF"/>
           </a:solidFill>
           <a:ln w="12700">
             <a:solidFill>
-              <a:srgbClr val="0068B7"/>
+              <a:srgbClr val="B9D7E6"/>
             </a:solidFill>
             <a:prstDash val="solid"/>
           </a:ln>
@@ -10468,172 +10114,100 @@
         </p:nvSpPr>
         <p:spPr>
           <a:xfrm>
-            <a:off x="7708392" y="3922776"/>
-            <a:ext cx="886968" cy="310896"/>
-          </a:xfrm>
-          <a:prstGeom prst="rect">
-            <a:avLst/>
-          </a:prstGeom>
-          <a:noFill/>
-          <a:ln/>
-        </p:spPr>
-        <p:txBody>
-          <a:bodyPr wrap="square" lIns="0" tIns="0" rIns="0" bIns="0" rtlCol="0" anchor="ctr">
+            <a:off x="8074152" y="3822192"/>
+            <a:ext cx="2825496" cy="256032"/>
+          </a:xfrm>
+          <a:prstGeom prst="rect">
+            <a:avLst/>
+          </a:prstGeom>
+          <a:noFill/>
+          <a:ln/>
+        </p:spPr>
+        <p:txBody>
+          <a:bodyPr wrap="square" lIns="0" tIns="0" rIns="0" bIns="0" rtlCol="0" anchor="ctr"/>
+          <a:lstStyle/>
+          <a:p>
+            <a:pPr indent="0" marL="0">
+              <a:buNone/>
+            </a:pPr>
+            <a:r>
+              <a:rPr lang="en-US" sz="1300" b="1" dirty="0">
+                <a:solidFill>
+                  <a:srgbClr val="0068B7"/>
+                </a:solidFill>
+                <a:latin typeface="Aptos" pitchFamily="34" charset="0"/>
+                <a:ea typeface="Aptos" pitchFamily="34" charset="-122"/>
+                <a:cs typeface="Aptos" pitchFamily="34" charset="-120"/>
+              </a:rPr>
+              <a:t>Learning sequence</a:t>
+            </a:r>
+            <a:endParaRPr lang="en-US" sz="1300" dirty="0"/>
+          </a:p>
+        </p:txBody>
+      </p:sp>
+      <p:sp>
+        <p:nvSpPr>
+          <p:cNvPr id="15" name="Text 13"/>
+          <p:cNvSpPr/>
+          <p:nvPr/>
+        </p:nvSpPr>
+        <p:spPr>
+          <a:xfrm>
+            <a:off x="8092440" y="4187952"/>
+            <a:ext cx="2770632" cy="1033272"/>
+          </a:xfrm>
+          <a:prstGeom prst="rect">
+            <a:avLst/>
+          </a:prstGeom>
+          <a:noFill/>
+          <a:ln/>
+        </p:spPr>
+        <p:txBody>
+          <a:bodyPr wrap="square" lIns="254" tIns="254" rIns="254" bIns="254" rtlCol="0" anchor="t">
             <a:normAutofit/>
           </a:bodyPr>
           <a:lstStyle/>
           <a:p>
-            <a:pPr algn="ctr" indent="0" marL="0">
-              <a:buNone/>
-            </a:pPr>
-            <a:r>
-              <a:rPr lang="en-US" sz="1500" b="1" dirty="0">
-                <a:solidFill>
-                  <a:srgbClr val="FFFFFF"/>
-                </a:solidFill>
-                <a:latin typeface="Aptos" pitchFamily="34" charset="0"/>
-                <a:ea typeface="Aptos" pitchFamily="34" charset="-122"/>
-                <a:cs typeface="Aptos" pitchFamily="34" charset="-120"/>
-              </a:rPr>
-              <a:t>Learn</a:t>
-            </a:r>
-            <a:endParaRPr lang="en-US" sz="1500" dirty="0"/>
-          </a:p>
-        </p:txBody>
-      </p:sp>
-      <p:sp>
-        <p:nvSpPr>
-          <p:cNvPr id="15" name="Shape 13"/>
-          <p:cNvSpPr/>
-          <p:nvPr/>
-        </p:nvSpPr>
-        <p:spPr>
-          <a:xfrm>
-            <a:off x="8924544" y="3730752"/>
-            <a:ext cx="1033272" cy="749808"/>
-          </a:xfrm>
-          <a:prstGeom prst="roundRect">
-            <a:avLst>
-              <a:gd name="adj" fmla="val 14634"/>
-            </a:avLst>
-          </a:prstGeom>
-          <a:solidFill>
-            <a:srgbClr val="2F8A28"/>
-          </a:solidFill>
-          <a:ln w="12700">
-            <a:solidFill>
-              <a:srgbClr val="2F8A28"/>
-            </a:solidFill>
-            <a:prstDash val="solid"/>
-          </a:ln>
-        </p:spPr>
-      </p:sp>
-      <p:sp>
-        <p:nvSpPr>
-          <p:cNvPr id="16" name="Text 14"/>
-          <p:cNvSpPr/>
-          <p:nvPr/>
-        </p:nvSpPr>
-        <p:spPr>
-          <a:xfrm>
-            <a:off x="8997696" y="3922776"/>
-            <a:ext cx="886968" cy="310896"/>
-          </a:xfrm>
-          <a:prstGeom prst="rect">
-            <a:avLst/>
-          </a:prstGeom>
-          <a:noFill/>
-          <a:ln/>
-        </p:spPr>
-        <p:txBody>
-          <a:bodyPr wrap="square" lIns="0" tIns="0" rIns="0" bIns="0" rtlCol="0" anchor="ctr">
-            <a:normAutofit/>
-          </a:bodyPr>
-          <a:lstStyle/>
-          <a:p>
-            <a:pPr algn="ctr" indent="0" marL="0">
-              <a:buNone/>
-            </a:pPr>
-            <a:r>
-              <a:rPr lang="en-US" sz="1500" b="1" dirty="0">
-                <a:solidFill>
-                  <a:srgbClr val="FFFFFF"/>
-                </a:solidFill>
-                <a:latin typeface="Aptos" pitchFamily="34" charset="0"/>
-                <a:ea typeface="Aptos" pitchFamily="34" charset="-122"/>
-                <a:cs typeface="Aptos" pitchFamily="34" charset="-120"/>
-              </a:rPr>
-              <a:t>Apply</a:t>
-            </a:r>
-            <a:endParaRPr lang="en-US" sz="1500" dirty="0"/>
-          </a:p>
-        </p:txBody>
-      </p:sp>
-      <p:sp>
-        <p:nvSpPr>
-          <p:cNvPr id="17" name="Shape 15"/>
-          <p:cNvSpPr/>
-          <p:nvPr/>
-        </p:nvSpPr>
-        <p:spPr>
-          <a:xfrm>
-            <a:off x="10213848" y="3730752"/>
-            <a:ext cx="1033272" cy="749808"/>
-          </a:xfrm>
-          <a:prstGeom prst="roundRect">
-            <a:avLst>
-              <a:gd name="adj" fmla="val 14634"/>
-            </a:avLst>
-          </a:prstGeom>
-          <a:solidFill>
-            <a:srgbClr val="6A4CA3"/>
-          </a:solidFill>
-          <a:ln w="12700">
-            <a:solidFill>
-              <a:srgbClr val="6A4CA3"/>
-            </a:solidFill>
-            <a:prstDash val="solid"/>
-          </a:ln>
-        </p:spPr>
-      </p:sp>
-      <p:sp>
-        <p:nvSpPr>
-          <p:cNvPr id="18" name="Text 16"/>
-          <p:cNvSpPr/>
-          <p:nvPr/>
-        </p:nvSpPr>
-        <p:spPr>
-          <a:xfrm>
-            <a:off x="10287000" y="3922776"/>
-            <a:ext cx="886968" cy="310896"/>
-          </a:xfrm>
-          <a:prstGeom prst="rect">
-            <a:avLst/>
-          </a:prstGeom>
-          <a:noFill/>
-          <a:ln/>
-        </p:spPr>
-        <p:txBody>
-          <a:bodyPr wrap="square" lIns="0" tIns="0" rIns="0" bIns="0" rtlCol="0" anchor="ctr">
-            <a:normAutofit/>
-          </a:bodyPr>
-          <a:lstStyle/>
-          <a:p>
-            <a:pPr algn="ctr" indent="0" marL="0">
-              <a:buNone/>
-            </a:pPr>
-            <a:r>
-              <a:rPr lang="en-US" sz="1500" b="1" dirty="0">
-                <a:solidFill>
-                  <a:srgbClr val="FFFFFF"/>
-                </a:solidFill>
-                <a:latin typeface="Aptos" pitchFamily="34" charset="0"/>
-                <a:ea typeface="Aptos" pitchFamily="34" charset="-122"/>
-                <a:cs typeface="Aptos" pitchFamily="34" charset="-120"/>
-              </a:rPr>
-              <a:t>Document</a:t>
-            </a:r>
-            <a:endParaRPr lang="en-US" sz="1500" dirty="0"/>
+            <a:r>
+              <a:rPr lang="en-US" sz="1380" dirty="0">
+                <a:solidFill>
+                  <a:srgbClr val="17364A"/>
+                </a:solidFill>
+                <a:latin typeface="Aptos" pitchFamily="34" charset="0"/>
+                <a:ea typeface="Aptos" pitchFamily="34" charset="-122"/>
+                <a:cs typeface="Aptos" pitchFamily="34" charset="-120"/>
+              </a:rPr>
+              <a:t>Read the module for shared vocabulary and context.</a:t>
+            </a:r>
+            <a:endParaRPr lang="en-US" sz="1380" dirty="0"/>
+          </a:p>
+          <a:p>
+            <a:r>
+              <a:rPr lang="en-US" sz="1380" dirty="0">
+                <a:solidFill>
+                  <a:srgbClr val="17364A"/>
+                </a:solidFill>
+                <a:latin typeface="Aptos" pitchFamily="34" charset="0"/>
+                <a:ea typeface="Aptos" pitchFamily="34" charset="-122"/>
+                <a:cs typeface="Aptos" pitchFamily="34" charset="-120"/>
+              </a:rPr>
+              <a:t>Complete the practical exercise to apply the concept.</a:t>
+            </a:r>
+            <a:endParaRPr lang="en-US" sz="1380" dirty="0"/>
+          </a:p>
+          <a:p>
+            <a:r>
+              <a:rPr lang="en-US" sz="1380" dirty="0">
+                <a:solidFill>
+                  <a:srgbClr val="17364A"/>
+                </a:solidFill>
+                <a:latin typeface="Aptos" pitchFamily="34" charset="0"/>
+                <a:ea typeface="Aptos" pitchFamily="34" charset="-122"/>
+                <a:cs typeface="Aptos" pitchFamily="34" charset="-120"/>
+              </a:rPr>
+              <a:t>Use the notes and references for deeper review.</a:t>
+            </a:r>
+            <a:endParaRPr lang="en-US" sz="1380" dirty="0"/>
           </a:p>
         </p:txBody>
       </p:sp>
@@ -11092,13 +10666,11 @@
             </a:avLst>
           </a:prstGeom>
           <a:solidFill>
-            <a:srgbClr val="FFFFFF">
-              <a:alpha val="88000"/>
-            </a:srgbClr>
+            <a:srgbClr val="FFFFFF"/>
           </a:solidFill>
           <a:ln w="12700">
             <a:solidFill>
-              <a:srgbClr val="D6E8F2"/>
+              <a:srgbClr val="B9D7E6"/>
             </a:solidFill>
             <a:prstDash val="solid"/>
           </a:ln>
@@ -11106,119 +10678,98 @@
       </p:sp>
       <p:sp>
         <p:nvSpPr>
-          <p:cNvPr id="14" name="Shape 12"/>
-          <p:cNvSpPr/>
-          <p:nvPr/>
-        </p:nvSpPr>
-        <p:spPr>
-          <a:xfrm>
-            <a:off x="8074152" y="3291840"/>
-            <a:ext cx="2596896" cy="749808"/>
-          </a:xfrm>
-          <a:prstGeom prst="rect">
-            <a:avLst/>
-          </a:prstGeom>
-          <a:solidFill>
-            <a:srgbClr val="EAF6F8"/>
-          </a:solidFill>
-          <a:ln w="12700">
-            <a:solidFill>
-              <a:srgbClr val="8ABBD8"/>
-            </a:solidFill>
-            <a:prstDash val="solid"/>
-          </a:ln>
-        </p:spPr>
-      </p:sp>
-      <p:sp>
-        <p:nvSpPr>
-          <p:cNvPr id="15" name="Shape 13"/>
-          <p:cNvSpPr/>
-          <p:nvPr/>
-        </p:nvSpPr>
-        <p:spPr>
-          <a:xfrm>
-            <a:off x="8202168" y="3721608"/>
-            <a:ext cx="2340864" cy="0"/>
-          </a:xfrm>
-          <a:prstGeom prst="line">
-            <a:avLst/>
-          </a:prstGeom>
-          <a:noFill/>
-          <a:ln w="19050">
-            <a:solidFill>
-              <a:srgbClr val="0068B7"/>
-            </a:solidFill>
-            <a:prstDash val="solid"/>
-          </a:ln>
-        </p:spPr>
+          <p:cNvPr id="14" name="Text 12"/>
+          <p:cNvSpPr/>
+          <p:nvPr/>
+        </p:nvSpPr>
+        <p:spPr>
+          <a:xfrm>
+            <a:off x="7799832" y="2935224"/>
+            <a:ext cx="3145536" cy="256032"/>
+          </a:xfrm>
+          <a:prstGeom prst="rect">
+            <a:avLst/>
+          </a:prstGeom>
+          <a:noFill/>
+          <a:ln/>
+        </p:spPr>
+        <p:txBody>
+          <a:bodyPr wrap="square" lIns="0" tIns="0" rIns="0" bIns="0" rtlCol="0" anchor="ctr"/>
+          <a:lstStyle/>
+          <a:p>
+            <a:pPr indent="0" marL="0">
+              <a:buNone/>
+            </a:pPr>
+            <a:r>
+              <a:rPr lang="en-US" sz="1300" b="1" dirty="0">
+                <a:solidFill>
+                  <a:srgbClr val="0068B7"/>
+                </a:solidFill>
+                <a:latin typeface="Aptos" pitchFamily="34" charset="0"/>
+                <a:ea typeface="Aptos" pitchFamily="34" charset="-122"/>
+                <a:cs typeface="Aptos" pitchFamily="34" charset="-120"/>
+              </a:rPr>
+              <a:t>Concept checkpoints</a:t>
+            </a:r>
+            <a:endParaRPr lang="en-US" sz="1300" dirty="0"/>
+          </a:p>
+        </p:txBody>
+      </p:sp>
+      <p:sp>
+        <p:nvSpPr>
+          <p:cNvPr id="15" name="Text 13"/>
+          <p:cNvSpPr/>
+          <p:nvPr/>
+        </p:nvSpPr>
+        <p:spPr>
+          <a:xfrm>
+            <a:off x="7818120" y="3300984"/>
+            <a:ext cx="3090672" cy="877824"/>
+          </a:xfrm>
+          <a:prstGeom prst="rect">
+            <a:avLst/>
+          </a:prstGeom>
+          <a:noFill/>
+          <a:ln/>
+        </p:spPr>
+        <p:txBody>
+          <a:bodyPr wrap="square" lIns="254" tIns="254" rIns="254" bIns="254" rtlCol="0" anchor="t">
+            <a:normAutofit/>
+          </a:bodyPr>
+          <a:lstStyle/>
+          <a:p>
+            <a:r>
+              <a:rPr lang="en-US" sz="1380" dirty="0">
+                <a:solidFill>
+                  <a:srgbClr val="17364A"/>
+                </a:solidFill>
+                <a:latin typeface="Aptos" pitchFamily="34" charset="0"/>
+                <a:ea typeface="Aptos" pitchFamily="34" charset="-122"/>
+                <a:cs typeface="Aptos" pitchFamily="34" charset="-120"/>
+              </a:rPr>
+              <a:t>OMB Memorandum M-24-10 on federal AI governance, risk management, and innovation, where.</a:t>
+            </a:r>
+            <a:endParaRPr lang="en-US" sz="1380" dirty="0"/>
+          </a:p>
+          <a:p>
+            <a:r>
+              <a:rPr lang="en-US" sz="1380" dirty="0">
+                <a:solidFill>
+                  <a:srgbClr val="17364A"/>
+                </a:solidFill>
+                <a:latin typeface="Aptos" pitchFamily="34" charset="0"/>
+                <a:ea typeface="Aptos" pitchFamily="34" charset="-122"/>
+                <a:cs typeface="Aptos" pitchFamily="34" charset="-120"/>
+              </a:rPr>
+              <a:t>Agency strategic plans, procurement policies, privacy policies, cybersecurity policies,.</a:t>
+            </a:r>
+            <a:endParaRPr lang="en-US" sz="1380" dirty="0"/>
+          </a:p>
+        </p:txBody>
       </p:sp>
       <p:sp>
         <p:nvSpPr>
           <p:cNvPr id="16" name="Shape 14"/>
-          <p:cNvSpPr/>
-          <p:nvPr/>
-        </p:nvSpPr>
-        <p:spPr>
-          <a:xfrm>
-            <a:off x="9198864" y="4206240"/>
-            <a:ext cx="347472" cy="347472"/>
-          </a:xfrm>
-          <a:prstGeom prst="ellipse">
-            <a:avLst/>
-          </a:prstGeom>
-          <a:solidFill>
-            <a:srgbClr val="2F8A28"/>
-          </a:solidFill>
-          <a:ln w="12700">
-            <a:solidFill>
-              <a:srgbClr val="2F8A28"/>
-            </a:solidFill>
-            <a:prstDash val="solid"/>
-          </a:ln>
-        </p:spPr>
-      </p:sp>
-      <p:sp>
-        <p:nvSpPr>
-          <p:cNvPr id="17" name="Text 15"/>
-          <p:cNvSpPr/>
-          <p:nvPr/>
-        </p:nvSpPr>
-        <p:spPr>
-          <a:xfrm>
-            <a:off x="7909560" y="3977640"/>
-            <a:ext cx="2926080" cy="182880"/>
-          </a:xfrm>
-          <a:prstGeom prst="rect">
-            <a:avLst/>
-          </a:prstGeom>
-          <a:noFill/>
-          <a:ln/>
-        </p:spPr>
-        <p:txBody>
-          <a:bodyPr wrap="square" lIns="0" tIns="0" rIns="0" bIns="0" rtlCol="0" anchor="ctr"/>
-          <a:lstStyle/>
-          <a:p>
-            <a:pPr algn="ctr" indent="0" marL="0">
-              <a:buNone/>
-            </a:pPr>
-            <a:r>
-              <a:rPr lang="en-US" sz="1000" dirty="0">
-                <a:solidFill>
-                  <a:srgbClr val="003A63"/>
-                </a:solidFill>
-                <a:latin typeface="Aptos" pitchFamily="34" charset="0"/>
-                <a:ea typeface="Aptos" pitchFamily="34" charset="-122"/>
-                <a:cs typeface="Aptos" pitchFamily="34" charset="-120"/>
-              </a:rPr>
-              <a:t>Concept to action</a:t>
-            </a:r>
-            <a:endParaRPr lang="en-US" sz="1000" dirty="0"/>
-          </a:p>
-        </p:txBody>
-      </p:sp>
-      <p:sp>
-        <p:nvSpPr>
-          <p:cNvPr id="18" name="Shape 16"/>
           <p:cNvSpPr/>
           <p:nvPr/>
         </p:nvSpPr>
@@ -11245,7 +10796,7 @@
       </p:sp>
       <p:sp>
         <p:nvSpPr>
-          <p:cNvPr id="19" name="Text 17"/>
+          <p:cNvPr id="17" name="Text 15"/>
           <p:cNvSpPr/>
           <p:nvPr/>
         </p:nvSpPr>
@@ -11284,7 +10835,7 @@
       </p:sp>
       <p:sp>
         <p:nvSpPr>
-          <p:cNvPr id="20" name="Text 18"/>
+          <p:cNvPr id="18" name="Text 16"/>
           <p:cNvSpPr/>
           <p:nvPr/>
         </p:nvSpPr>
@@ -11797,20 +11348,20 @@
         </p:nvSpPr>
         <p:spPr>
           <a:xfrm>
-            <a:off x="7818120" y="3977640"/>
-            <a:ext cx="972312" cy="749808"/>
+            <a:off x="8046720" y="3794760"/>
+            <a:ext cx="3063240" cy="1600200"/>
           </a:xfrm>
           <a:prstGeom prst="roundRect">
             <a:avLst>
-              <a:gd name="adj" fmla="val 14634"/>
+              <a:gd name="adj" fmla="val 6857"/>
             </a:avLst>
           </a:prstGeom>
           <a:solidFill>
-            <a:srgbClr val="0068B7"/>
+            <a:srgbClr val="FFFFFF"/>
           </a:solidFill>
           <a:ln w="12700">
             <a:solidFill>
-              <a:srgbClr val="0068B7"/>
+              <a:srgbClr val="B9D7E6"/>
             </a:solidFill>
             <a:prstDash val="solid"/>
           </a:ln>
@@ -11824,172 +11375,100 @@
         </p:nvSpPr>
         <p:spPr>
           <a:xfrm>
-            <a:off x="7891272" y="4169664"/>
-            <a:ext cx="826008" cy="310896"/>
-          </a:xfrm>
-          <a:prstGeom prst="rect">
-            <a:avLst/>
-          </a:prstGeom>
-          <a:noFill/>
-          <a:ln/>
-        </p:spPr>
-        <p:txBody>
-          <a:bodyPr wrap="square" lIns="0" tIns="0" rIns="0" bIns="0" rtlCol="0" anchor="ctr">
+            <a:off x="8211312" y="3941064"/>
+            <a:ext cx="2734056" cy="256032"/>
+          </a:xfrm>
+          <a:prstGeom prst="rect">
+            <a:avLst/>
+          </a:prstGeom>
+          <a:noFill/>
+          <a:ln/>
+        </p:spPr>
+        <p:txBody>
+          <a:bodyPr wrap="square" lIns="0" tIns="0" rIns="0" bIns="0" rtlCol="0" anchor="ctr"/>
+          <a:lstStyle/>
+          <a:p>
+            <a:pPr indent="0" marL="0">
+              <a:buNone/>
+            </a:pPr>
+            <a:r>
+              <a:rPr lang="en-US" sz="1300" b="1" dirty="0">
+                <a:solidFill>
+                  <a:srgbClr val="0068B7"/>
+                </a:solidFill>
+                <a:latin typeface="Aptos" pitchFamily="34" charset="0"/>
+                <a:ea typeface="Aptos" pitchFamily="34" charset="-122"/>
+                <a:cs typeface="Aptos" pitchFamily="34" charset="-120"/>
+              </a:rPr>
+              <a:t>Use the play links to</a:t>
+            </a:r>
+            <a:endParaRPr lang="en-US" sz="1300" dirty="0"/>
+          </a:p>
+        </p:txBody>
+      </p:sp>
+      <p:sp>
+        <p:nvSpPr>
+          <p:cNvPr id="15" name="Text 13"/>
+          <p:cNvSpPr/>
+          <p:nvPr/>
+        </p:nvSpPr>
+        <p:spPr>
+          <a:xfrm>
+            <a:off x="8229600" y="4306824"/>
+            <a:ext cx="2679192" cy="941832"/>
+          </a:xfrm>
+          <a:prstGeom prst="rect">
+            <a:avLst/>
+          </a:prstGeom>
+          <a:noFill/>
+          <a:ln/>
+        </p:spPr>
+        <p:txBody>
+          <a:bodyPr wrap="square" lIns="254" tIns="254" rIns="254" bIns="254" rtlCol="0" anchor="t">
             <a:normAutofit/>
           </a:bodyPr>
           <a:lstStyle/>
           <a:p>
-            <a:pPr algn="ctr" indent="0" marL="0">
-              <a:buNone/>
-            </a:pPr>
-            <a:r>
-              <a:rPr lang="en-US" sz="1500" b="1" dirty="0">
-                <a:solidFill>
-                  <a:srgbClr val="FFFFFF"/>
-                </a:solidFill>
-                <a:latin typeface="Aptos" pitchFamily="34" charset="0"/>
-                <a:ea typeface="Aptos" pitchFamily="34" charset="-122"/>
-                <a:cs typeface="Aptos" pitchFamily="34" charset="-120"/>
-              </a:rPr>
-              <a:t>Lesson</a:t>
-            </a:r>
-            <a:endParaRPr lang="en-US" sz="1500" dirty="0"/>
-          </a:p>
-        </p:txBody>
-      </p:sp>
-      <p:sp>
-        <p:nvSpPr>
-          <p:cNvPr id="15" name="Shape 13"/>
-          <p:cNvSpPr/>
-          <p:nvPr/>
-        </p:nvSpPr>
-        <p:spPr>
-          <a:xfrm>
-            <a:off x="9046464" y="3977640"/>
-            <a:ext cx="972312" cy="749808"/>
-          </a:xfrm>
-          <a:prstGeom prst="roundRect">
-            <a:avLst>
-              <a:gd name="adj" fmla="val 14634"/>
-            </a:avLst>
-          </a:prstGeom>
-          <a:solidFill>
-            <a:srgbClr val="2F8A28"/>
-          </a:solidFill>
-          <a:ln w="12700">
-            <a:solidFill>
-              <a:srgbClr val="2F8A28"/>
-            </a:solidFill>
-            <a:prstDash val="solid"/>
-          </a:ln>
-        </p:spPr>
-      </p:sp>
-      <p:sp>
-        <p:nvSpPr>
-          <p:cNvPr id="16" name="Text 14"/>
-          <p:cNvSpPr/>
-          <p:nvPr/>
-        </p:nvSpPr>
-        <p:spPr>
-          <a:xfrm>
-            <a:off x="9119616" y="4169664"/>
-            <a:ext cx="826008" cy="310896"/>
-          </a:xfrm>
-          <a:prstGeom prst="rect">
-            <a:avLst/>
-          </a:prstGeom>
-          <a:noFill/>
-          <a:ln/>
-        </p:spPr>
-        <p:txBody>
-          <a:bodyPr wrap="square" lIns="0" tIns="0" rIns="0" bIns="0" rtlCol="0" anchor="ctr">
-            <a:normAutofit/>
-          </a:bodyPr>
-          <a:lstStyle/>
-          <a:p>
-            <a:pPr algn="ctr" indent="0" marL="0">
-              <a:buNone/>
-            </a:pPr>
-            <a:r>
-              <a:rPr lang="en-US" sz="1500" b="1" dirty="0">
-                <a:solidFill>
-                  <a:srgbClr val="FFFFFF"/>
-                </a:solidFill>
-                <a:latin typeface="Aptos" pitchFamily="34" charset="0"/>
-                <a:ea typeface="Aptos" pitchFamily="34" charset="-122"/>
-                <a:cs typeface="Aptos" pitchFamily="34" charset="-120"/>
-              </a:rPr>
-              <a:t>Plays</a:t>
-            </a:r>
-            <a:endParaRPr lang="en-US" sz="1500" dirty="0"/>
-          </a:p>
-        </p:txBody>
-      </p:sp>
-      <p:sp>
-        <p:nvSpPr>
-          <p:cNvPr id="17" name="Shape 15"/>
-          <p:cNvSpPr/>
-          <p:nvPr/>
-        </p:nvSpPr>
-        <p:spPr>
-          <a:xfrm>
-            <a:off x="10274808" y="3977640"/>
-            <a:ext cx="972312" cy="749808"/>
-          </a:xfrm>
-          <a:prstGeom prst="roundRect">
-            <a:avLst>
-              <a:gd name="adj" fmla="val 14634"/>
-            </a:avLst>
-          </a:prstGeom>
-          <a:solidFill>
-            <a:srgbClr val="6A4CA3"/>
-          </a:solidFill>
-          <a:ln w="12700">
-            <a:solidFill>
-              <a:srgbClr val="6A4CA3"/>
-            </a:solidFill>
-            <a:prstDash val="solid"/>
-          </a:ln>
-        </p:spPr>
-      </p:sp>
-      <p:sp>
-        <p:nvSpPr>
-          <p:cNvPr id="18" name="Text 16"/>
-          <p:cNvSpPr/>
-          <p:nvPr/>
-        </p:nvSpPr>
-        <p:spPr>
-          <a:xfrm>
-            <a:off x="10347960" y="4169664"/>
-            <a:ext cx="826008" cy="310896"/>
-          </a:xfrm>
-          <a:prstGeom prst="rect">
-            <a:avLst/>
-          </a:prstGeom>
-          <a:noFill/>
-          <a:ln/>
-        </p:spPr>
-        <p:txBody>
-          <a:bodyPr wrap="square" lIns="0" tIns="0" rIns="0" bIns="0" rtlCol="0" anchor="ctr">
-            <a:normAutofit/>
-          </a:bodyPr>
-          <a:lstStyle/>
-          <a:p>
-            <a:pPr algn="ctr" indent="0" marL="0">
-              <a:buNone/>
-            </a:pPr>
-            <a:r>
-              <a:rPr lang="en-US" sz="1500" b="1" dirty="0">
-                <a:solidFill>
-                  <a:srgbClr val="FFFFFF"/>
-                </a:solidFill>
-                <a:latin typeface="Aptos" pitchFamily="34" charset="0"/>
-                <a:ea typeface="Aptos" pitchFamily="34" charset="-122"/>
-                <a:cs typeface="Aptos" pitchFamily="34" charset="-120"/>
-              </a:rPr>
-              <a:t>Action</a:t>
-            </a:r>
-            <a:endParaRPr lang="en-US" sz="1500" dirty="0"/>
+            <a:r>
+              <a:rPr lang="en-US" sz="1380" dirty="0">
+                <a:solidFill>
+                  <a:srgbClr val="17364A"/>
+                </a:solidFill>
+                <a:latin typeface="Aptos" pitchFamily="34" charset="0"/>
+                <a:ea typeface="Aptos" pitchFamily="34" charset="-122"/>
+                <a:cs typeface="Aptos" pitchFamily="34" charset="-120"/>
+              </a:rPr>
+              <a:t>Locate the decision point in the playbook sequence.</a:t>
+            </a:r>
+            <a:endParaRPr lang="en-US" sz="1380" dirty="0"/>
+          </a:p>
+          <a:p>
+            <a:r>
+              <a:rPr lang="en-US" sz="1380" dirty="0">
+                <a:solidFill>
+                  <a:srgbClr val="17364A"/>
+                </a:solidFill>
+                <a:latin typeface="Aptos" pitchFamily="34" charset="0"/>
+                <a:ea typeface="Aptos" pitchFamily="34" charset="-122"/>
+                <a:cs typeface="Aptos" pitchFamily="34" charset="-120"/>
+              </a:rPr>
+              <a:t>Identify who should participate in the work.</a:t>
+            </a:r>
+            <a:endParaRPr lang="en-US" sz="1380" dirty="0"/>
+          </a:p>
+          <a:p>
+            <a:r>
+              <a:rPr lang="en-US" sz="1380" dirty="0">
+                <a:solidFill>
+                  <a:srgbClr val="17364A"/>
+                </a:solidFill>
+                <a:latin typeface="Aptos" pitchFamily="34" charset="0"/>
+                <a:ea typeface="Aptos" pitchFamily="34" charset="-122"/>
+                <a:cs typeface="Aptos" pitchFamily="34" charset="-120"/>
+              </a:rPr>
+              <a:t>Document the review, approval, or implementation step.</a:t>
+            </a:r>
+            <a:endParaRPr lang="en-US" sz="1380" dirty="0"/>
           </a:p>
         </p:txBody>
       </p:sp>
@@ -12467,20 +11946,20 @@
         </p:nvSpPr>
         <p:spPr>
           <a:xfrm>
-            <a:off x="7818120" y="3977640"/>
-            <a:ext cx="972312" cy="749808"/>
+            <a:off x="8046720" y="3794760"/>
+            <a:ext cx="3063240" cy="1600200"/>
           </a:xfrm>
           <a:prstGeom prst="roundRect">
             <a:avLst>
-              <a:gd name="adj" fmla="val 14634"/>
+              <a:gd name="adj" fmla="val 6857"/>
             </a:avLst>
           </a:prstGeom>
           <a:solidFill>
-            <a:srgbClr val="0068B7"/>
+            <a:srgbClr val="FFFFFF"/>
           </a:solidFill>
           <a:ln w="12700">
             <a:solidFill>
-              <a:srgbClr val="0068B7"/>
+              <a:srgbClr val="B9D7E6"/>
             </a:solidFill>
             <a:prstDash val="solid"/>
           </a:ln>
@@ -12494,172 +11973,100 @@
         </p:nvSpPr>
         <p:spPr>
           <a:xfrm>
-            <a:off x="7891272" y="4169664"/>
-            <a:ext cx="826008" cy="310896"/>
-          </a:xfrm>
-          <a:prstGeom prst="rect">
-            <a:avLst/>
-          </a:prstGeom>
-          <a:noFill/>
-          <a:ln/>
-        </p:spPr>
-        <p:txBody>
-          <a:bodyPr wrap="square" lIns="0" tIns="0" rIns="0" bIns="0" rtlCol="0" anchor="ctr">
+            <a:off x="8211312" y="3941064"/>
+            <a:ext cx="2734056" cy="256032"/>
+          </a:xfrm>
+          <a:prstGeom prst="rect">
+            <a:avLst/>
+          </a:prstGeom>
+          <a:noFill/>
+          <a:ln/>
+        </p:spPr>
+        <p:txBody>
+          <a:bodyPr wrap="square" lIns="0" tIns="0" rIns="0" bIns="0" rtlCol="0" anchor="ctr"/>
+          <a:lstStyle/>
+          <a:p>
+            <a:pPr indent="0" marL="0">
+              <a:buNone/>
+            </a:pPr>
+            <a:r>
+              <a:rPr lang="en-US" sz="1300" b="1" dirty="0">
+                <a:solidFill>
+                  <a:srgbClr val="0068B7"/>
+                </a:solidFill>
+                <a:latin typeface="Aptos" pitchFamily="34" charset="0"/>
+                <a:ea typeface="Aptos" pitchFamily="34" charset="-122"/>
+                <a:cs typeface="Aptos" pitchFamily="34" charset="-120"/>
+              </a:rPr>
+              <a:t>Tool selection cues</a:t>
+            </a:r>
+            <a:endParaRPr lang="en-US" sz="1300" dirty="0"/>
+          </a:p>
+        </p:txBody>
+      </p:sp>
+      <p:sp>
+        <p:nvSpPr>
+          <p:cNvPr id="15" name="Text 13"/>
+          <p:cNvSpPr/>
+          <p:nvPr/>
+        </p:nvSpPr>
+        <p:spPr>
+          <a:xfrm>
+            <a:off x="8229600" y="4306824"/>
+            <a:ext cx="2679192" cy="941832"/>
+          </a:xfrm>
+          <a:prstGeom prst="rect">
+            <a:avLst/>
+          </a:prstGeom>
+          <a:noFill/>
+          <a:ln/>
+        </p:spPr>
+        <p:txBody>
+          <a:bodyPr wrap="square" lIns="254" tIns="254" rIns="254" bIns="254" rtlCol="0" anchor="t">
             <a:normAutofit/>
           </a:bodyPr>
           <a:lstStyle/>
           <a:p>
-            <a:pPr algn="ctr" indent="0" marL="0">
-              <a:buNone/>
-            </a:pPr>
-            <a:r>
-              <a:rPr lang="en-US" sz="1500" b="1" dirty="0">
-                <a:solidFill>
-                  <a:srgbClr val="FFFFFF"/>
-                </a:solidFill>
-                <a:latin typeface="Aptos" pitchFamily="34" charset="0"/>
-                <a:ea typeface="Aptos" pitchFamily="34" charset="-122"/>
-                <a:cs typeface="Aptos" pitchFamily="34" charset="-120"/>
-              </a:rPr>
-              <a:t>Concept</a:t>
-            </a:r>
-            <a:endParaRPr lang="en-US" sz="1500" dirty="0"/>
-          </a:p>
-        </p:txBody>
-      </p:sp>
-      <p:sp>
-        <p:nvSpPr>
-          <p:cNvPr id="15" name="Shape 13"/>
-          <p:cNvSpPr/>
-          <p:nvPr/>
-        </p:nvSpPr>
-        <p:spPr>
-          <a:xfrm>
-            <a:off x="9046464" y="3977640"/>
-            <a:ext cx="972312" cy="749808"/>
-          </a:xfrm>
-          <a:prstGeom prst="roundRect">
-            <a:avLst>
-              <a:gd name="adj" fmla="val 14634"/>
-            </a:avLst>
-          </a:prstGeom>
-          <a:solidFill>
-            <a:srgbClr val="2F8A28"/>
-          </a:solidFill>
-          <a:ln w="12700">
-            <a:solidFill>
-              <a:srgbClr val="2F8A28"/>
-            </a:solidFill>
-            <a:prstDash val="solid"/>
-          </a:ln>
-        </p:spPr>
-      </p:sp>
-      <p:sp>
-        <p:nvSpPr>
-          <p:cNvPr id="16" name="Text 14"/>
-          <p:cNvSpPr/>
-          <p:nvPr/>
-        </p:nvSpPr>
-        <p:spPr>
-          <a:xfrm>
-            <a:off x="9119616" y="4169664"/>
-            <a:ext cx="826008" cy="310896"/>
-          </a:xfrm>
-          <a:prstGeom prst="rect">
-            <a:avLst/>
-          </a:prstGeom>
-          <a:noFill/>
-          <a:ln/>
-        </p:spPr>
-        <p:txBody>
-          <a:bodyPr wrap="square" lIns="0" tIns="0" rIns="0" bIns="0" rtlCol="0" anchor="ctr">
-            <a:normAutofit/>
-          </a:bodyPr>
-          <a:lstStyle/>
-          <a:p>
-            <a:pPr algn="ctr" indent="0" marL="0">
-              <a:buNone/>
-            </a:pPr>
-            <a:r>
-              <a:rPr lang="en-US" sz="1500" b="1" dirty="0">
-                <a:solidFill>
-                  <a:srgbClr val="FFFFFF"/>
-                </a:solidFill>
-                <a:latin typeface="Aptos" pitchFamily="34" charset="0"/>
-                <a:ea typeface="Aptos" pitchFamily="34" charset="-122"/>
-                <a:cs typeface="Aptos" pitchFamily="34" charset="-120"/>
-              </a:rPr>
-              <a:t>Tool</a:t>
-            </a:r>
-            <a:endParaRPr lang="en-US" sz="1500" dirty="0"/>
-          </a:p>
-        </p:txBody>
-      </p:sp>
-      <p:sp>
-        <p:nvSpPr>
-          <p:cNvPr id="17" name="Shape 15"/>
-          <p:cNvSpPr/>
-          <p:nvPr/>
-        </p:nvSpPr>
-        <p:spPr>
-          <a:xfrm>
-            <a:off x="10274808" y="3977640"/>
-            <a:ext cx="972312" cy="749808"/>
-          </a:xfrm>
-          <a:prstGeom prst="roundRect">
-            <a:avLst>
-              <a:gd name="adj" fmla="val 14634"/>
-            </a:avLst>
-          </a:prstGeom>
-          <a:solidFill>
-            <a:srgbClr val="D69A2D"/>
-          </a:solidFill>
-          <a:ln w="12700">
-            <a:solidFill>
-              <a:srgbClr val="D69A2D"/>
-            </a:solidFill>
-            <a:prstDash val="solid"/>
-          </a:ln>
-        </p:spPr>
-      </p:sp>
-      <p:sp>
-        <p:nvSpPr>
-          <p:cNvPr id="18" name="Text 16"/>
-          <p:cNvSpPr/>
-          <p:nvPr/>
-        </p:nvSpPr>
-        <p:spPr>
-          <a:xfrm>
-            <a:off x="10347960" y="4169664"/>
-            <a:ext cx="826008" cy="310896"/>
-          </a:xfrm>
-          <a:prstGeom prst="rect">
-            <a:avLst/>
-          </a:prstGeom>
-          <a:noFill/>
-          <a:ln/>
-        </p:spPr>
-        <p:txBody>
-          <a:bodyPr wrap="square" lIns="0" tIns="0" rIns="0" bIns="0" rtlCol="0" anchor="ctr">
-            <a:normAutofit/>
-          </a:bodyPr>
-          <a:lstStyle/>
-          <a:p>
-            <a:pPr algn="ctr" indent="0" marL="0">
-              <a:buNone/>
-            </a:pPr>
-            <a:r>
-              <a:rPr lang="en-US" sz="1500" b="1" dirty="0">
-                <a:solidFill>
-                  <a:srgbClr val="FFFFFF"/>
-                </a:solidFill>
-                <a:latin typeface="Aptos" pitchFamily="34" charset="0"/>
-                <a:ea typeface="Aptos" pitchFamily="34" charset="-122"/>
-                <a:cs typeface="Aptos" pitchFamily="34" charset="-120"/>
-              </a:rPr>
-              <a:t>Artifact</a:t>
-            </a:r>
-            <a:endParaRPr lang="en-US" sz="1500" dirty="0"/>
+            <a:r>
+              <a:rPr lang="en-US" sz="1380" dirty="0">
+                <a:solidFill>
+                  <a:srgbClr val="17364A"/>
+                </a:solidFill>
+                <a:latin typeface="Aptos" pitchFamily="34" charset="0"/>
+                <a:ea typeface="Aptos" pitchFamily="34" charset="-122"/>
+                <a:cs typeface="Aptos" pitchFamily="34" charset="-120"/>
+              </a:rPr>
+              <a:t>Use a tool when no comparable local process exists.</a:t>
+            </a:r>
+            <a:endParaRPr lang="en-US" sz="1380" dirty="0"/>
+          </a:p>
+          <a:p>
+            <a:r>
+              <a:rPr lang="en-US" sz="1380" dirty="0">
+                <a:solidFill>
+                  <a:srgbClr val="17364A"/>
+                </a:solidFill>
+                <a:latin typeface="Aptos" pitchFamily="34" charset="0"/>
+                <a:ea typeface="Aptos" pitchFamily="34" charset="-122"/>
+                <a:cs typeface="Aptos" pitchFamily="34" charset="-120"/>
+              </a:rPr>
+              <a:t>Adapt existing department templates when they already fit the purpose.</a:t>
+            </a:r>
+            <a:endParaRPr lang="en-US" sz="1380" dirty="0"/>
+          </a:p>
+          <a:p>
+            <a:r>
+              <a:rPr lang="en-US" sz="1380" dirty="0">
+                <a:solidFill>
+                  <a:srgbClr val="17364A"/>
+                </a:solidFill>
+                <a:latin typeface="Aptos" pitchFamily="34" charset="0"/>
+                <a:ea typeface="Aptos" pitchFamily="34" charset="-122"/>
+                <a:cs typeface="Aptos" pitchFamily="34" charset="-120"/>
+              </a:rPr>
+              <a:t>Save the completed artifact as evidence of the decision.</a:t>
+            </a:r>
+            <a:endParaRPr lang="en-US" sz="1380" dirty="0"/>
           </a:p>
         </p:txBody>
       </p:sp>
@@ -13132,13 +12539,11 @@
             </a:avLst>
           </a:prstGeom>
           <a:solidFill>
-            <a:srgbClr val="FFFFFF">
-              <a:alpha val="88000"/>
-            </a:srgbClr>
+            <a:srgbClr val="FFFFFF"/>
           </a:solidFill>
           <a:ln w="12700">
             <a:solidFill>
-              <a:srgbClr val="D6E8F2"/>
+              <a:srgbClr val="B9D7E6"/>
             </a:solidFill>
             <a:prstDash val="solid"/>
           </a:ln>
@@ -13146,119 +12551,112 @@
       </p:sp>
       <p:sp>
         <p:nvSpPr>
-          <p:cNvPr id="14" name="Shape 12"/>
-          <p:cNvSpPr/>
-          <p:nvPr/>
-        </p:nvSpPr>
-        <p:spPr>
-          <a:xfrm>
-            <a:off x="8074152" y="3291840"/>
-            <a:ext cx="2596896" cy="749808"/>
-          </a:xfrm>
-          <a:prstGeom prst="rect">
-            <a:avLst/>
-          </a:prstGeom>
-          <a:solidFill>
-            <a:srgbClr val="EAF6F8"/>
-          </a:solidFill>
-          <a:ln w="12700">
-            <a:solidFill>
-              <a:srgbClr val="8ABBD8"/>
-            </a:solidFill>
-            <a:prstDash val="solid"/>
-          </a:ln>
-        </p:spPr>
-      </p:sp>
-      <p:sp>
-        <p:nvSpPr>
-          <p:cNvPr id="15" name="Shape 13"/>
-          <p:cNvSpPr/>
-          <p:nvPr/>
-        </p:nvSpPr>
-        <p:spPr>
-          <a:xfrm>
-            <a:off x="8202168" y="3721608"/>
-            <a:ext cx="2340864" cy="0"/>
-          </a:xfrm>
-          <a:prstGeom prst="line">
-            <a:avLst/>
-          </a:prstGeom>
-          <a:noFill/>
-          <a:ln w="19050">
-            <a:solidFill>
-              <a:srgbClr val="0068B7"/>
-            </a:solidFill>
-            <a:prstDash val="solid"/>
-          </a:ln>
-        </p:spPr>
+          <p:cNvPr id="14" name="Text 12"/>
+          <p:cNvSpPr/>
+          <p:nvPr/>
+        </p:nvSpPr>
+        <p:spPr>
+          <a:xfrm>
+            <a:off x="7799832" y="2935224"/>
+            <a:ext cx="3145536" cy="256032"/>
+          </a:xfrm>
+          <a:prstGeom prst="rect">
+            <a:avLst/>
+          </a:prstGeom>
+          <a:noFill/>
+          <a:ln/>
+        </p:spPr>
+        <p:txBody>
+          <a:bodyPr wrap="square" lIns="0" tIns="0" rIns="0" bIns="0" rtlCol="0" anchor="ctr"/>
+          <a:lstStyle/>
+          <a:p>
+            <a:pPr indent="0" marL="0">
+              <a:buNone/>
+            </a:pPr>
+            <a:r>
+              <a:rPr lang="en-US" sz="1300" b="1" dirty="0">
+                <a:solidFill>
+                  <a:srgbClr val="0068B7"/>
+                </a:solidFill>
+                <a:latin typeface="Aptos" pitchFamily="34" charset="0"/>
+                <a:ea typeface="Aptos" pitchFamily="34" charset="-122"/>
+                <a:cs typeface="Aptos" pitchFamily="34" charset="-120"/>
+              </a:rPr>
+              <a:t>Concept checkpoints</a:t>
+            </a:r>
+            <a:endParaRPr lang="en-US" sz="1300" dirty="0"/>
+          </a:p>
+        </p:txBody>
+      </p:sp>
+      <p:sp>
+        <p:nvSpPr>
+          <p:cNvPr id="15" name="Text 13"/>
+          <p:cNvSpPr/>
+          <p:nvPr/>
+        </p:nvSpPr>
+        <p:spPr>
+          <a:xfrm>
+            <a:off x="7818120" y="3300984"/>
+            <a:ext cx="3090672" cy="877824"/>
+          </a:xfrm>
+          <a:prstGeom prst="rect">
+            <a:avLst/>
+          </a:prstGeom>
+          <a:noFill/>
+          <a:ln/>
+        </p:spPr>
+        <p:txBody>
+          <a:bodyPr wrap="square" lIns="254" tIns="254" rIns="254" bIns="254" rtlCol="0" anchor="t">
+            <a:normAutofit/>
+          </a:bodyPr>
+          <a:lstStyle/>
+          <a:p>
+            <a:r>
+              <a:rPr lang="en-US" sz="1380" dirty="0">
+                <a:solidFill>
+                  <a:srgbClr val="17364A"/>
+                </a:solidFill>
+                <a:latin typeface="Aptos" pitchFamily="34" charset="0"/>
+                <a:ea typeface="Aptos" pitchFamily="34" charset="-122"/>
+                <a:cs typeface="Aptos" pitchFamily="34" charset="-120"/>
+              </a:rPr>
+              <a:t>Distinguish between AI users, reviewers, implementers, governance participants, and.</a:t>
+            </a:r>
+            <a:endParaRPr lang="en-US" sz="1380" dirty="0"/>
+          </a:p>
+          <a:p>
+            <a:r>
+              <a:rPr lang="en-US" sz="1380" dirty="0">
+                <a:solidFill>
+                  <a:srgbClr val="17364A"/>
+                </a:solidFill>
+                <a:latin typeface="Aptos" pitchFamily="34" charset="0"/>
+                <a:ea typeface="Aptos" pitchFamily="34" charset="-122"/>
+                <a:cs typeface="Aptos" pitchFamily="34" charset="-120"/>
+              </a:rPr>
+              <a:t>Recognize workforce risks such as deskilling, uneven access to training, and unclear role.</a:t>
+            </a:r>
+            <a:endParaRPr lang="en-US" sz="1380" dirty="0"/>
+          </a:p>
+          <a:p>
+            <a:r>
+              <a:rPr lang="en-US" sz="1380" dirty="0">
+                <a:solidFill>
+                  <a:srgbClr val="17364A"/>
+                </a:solidFill>
+                <a:latin typeface="Aptos" pitchFamily="34" charset="0"/>
+                <a:ea typeface="Aptos" pitchFamily="34" charset="-122"/>
+                <a:cs typeface="Aptos" pitchFamily="34" charset="-120"/>
+              </a:rPr>
+              <a:t>Produce a workforce readiness and role design plan.</a:t>
+            </a:r>
+            <a:endParaRPr lang="en-US" sz="1380" dirty="0"/>
+          </a:p>
+        </p:txBody>
       </p:sp>
       <p:sp>
         <p:nvSpPr>
           <p:cNvPr id="16" name="Shape 14"/>
-          <p:cNvSpPr/>
-          <p:nvPr/>
-        </p:nvSpPr>
-        <p:spPr>
-          <a:xfrm>
-            <a:off x="9198864" y="4206240"/>
-            <a:ext cx="347472" cy="347472"/>
-          </a:xfrm>
-          <a:prstGeom prst="ellipse">
-            <a:avLst/>
-          </a:prstGeom>
-          <a:solidFill>
-            <a:srgbClr val="2F8A28"/>
-          </a:solidFill>
-          <a:ln w="12700">
-            <a:solidFill>
-              <a:srgbClr val="2F8A28"/>
-            </a:solidFill>
-            <a:prstDash val="solid"/>
-          </a:ln>
-        </p:spPr>
-      </p:sp>
-      <p:sp>
-        <p:nvSpPr>
-          <p:cNvPr id="17" name="Text 15"/>
-          <p:cNvSpPr/>
-          <p:nvPr/>
-        </p:nvSpPr>
-        <p:spPr>
-          <a:xfrm>
-            <a:off x="7909560" y="3977640"/>
-            <a:ext cx="2926080" cy="182880"/>
-          </a:xfrm>
-          <a:prstGeom prst="rect">
-            <a:avLst/>
-          </a:prstGeom>
-          <a:noFill/>
-          <a:ln/>
-        </p:spPr>
-        <p:txBody>
-          <a:bodyPr wrap="square" lIns="0" tIns="0" rIns="0" bIns="0" rtlCol="0" anchor="ctr"/>
-          <a:lstStyle/>
-          <a:p>
-            <a:pPr algn="ctr" indent="0" marL="0">
-              <a:buNone/>
-            </a:pPr>
-            <a:r>
-              <a:rPr lang="en-US" sz="1000" dirty="0">
-                <a:solidFill>
-                  <a:srgbClr val="003A63"/>
-                </a:solidFill>
-                <a:latin typeface="Aptos" pitchFamily="34" charset="0"/>
-                <a:ea typeface="Aptos" pitchFamily="34" charset="-122"/>
-                <a:cs typeface="Aptos" pitchFamily="34" charset="-120"/>
-              </a:rPr>
-              <a:t>Concept to action</a:t>
-            </a:r>
-            <a:endParaRPr lang="en-US" sz="1000" dirty="0"/>
-          </a:p>
-        </p:txBody>
-      </p:sp>
-      <p:sp>
-        <p:nvSpPr>
-          <p:cNvPr id="18" name="Shape 16"/>
           <p:cNvSpPr/>
           <p:nvPr/>
         </p:nvSpPr>
@@ -13285,7 +12683,7 @@
       </p:sp>
       <p:sp>
         <p:nvSpPr>
-          <p:cNvPr id="19" name="Text 17"/>
+          <p:cNvPr id="17" name="Text 15"/>
           <p:cNvSpPr/>
           <p:nvPr/>
         </p:nvSpPr>
@@ -13324,7 +12722,7 @@
       </p:sp>
       <p:sp>
         <p:nvSpPr>
-          <p:cNvPr id="20" name="Text 18"/>
+          <p:cNvPr id="18" name="Text 16"/>
           <p:cNvSpPr/>
           <p:nvPr/>
         </p:nvSpPr>
@@ -13832,13 +13230,11 @@
             </a:avLst>
           </a:prstGeom>
           <a:solidFill>
-            <a:srgbClr val="FFFFFF">
-              <a:alpha val="88000"/>
-            </a:srgbClr>
+            <a:srgbClr val="FFFFFF"/>
           </a:solidFill>
           <a:ln w="12700">
             <a:solidFill>
-              <a:srgbClr val="D6E8F2"/>
+              <a:srgbClr val="B9D7E6"/>
             </a:solidFill>
             <a:prstDash val="solid"/>
           </a:ln>
@@ -13846,119 +13242,112 @@
       </p:sp>
       <p:sp>
         <p:nvSpPr>
-          <p:cNvPr id="14" name="Shape 12"/>
-          <p:cNvSpPr/>
-          <p:nvPr/>
-        </p:nvSpPr>
-        <p:spPr>
-          <a:xfrm>
-            <a:off x="8074152" y="3291840"/>
-            <a:ext cx="2596896" cy="749808"/>
-          </a:xfrm>
-          <a:prstGeom prst="rect">
-            <a:avLst/>
-          </a:prstGeom>
-          <a:solidFill>
-            <a:srgbClr val="EAF6F8"/>
-          </a:solidFill>
-          <a:ln w="12700">
-            <a:solidFill>
-              <a:srgbClr val="8ABBD8"/>
-            </a:solidFill>
-            <a:prstDash val="solid"/>
-          </a:ln>
-        </p:spPr>
-      </p:sp>
-      <p:sp>
-        <p:nvSpPr>
-          <p:cNvPr id="15" name="Shape 13"/>
-          <p:cNvSpPr/>
-          <p:nvPr/>
-        </p:nvSpPr>
-        <p:spPr>
-          <a:xfrm>
-            <a:off x="8202168" y="3721608"/>
-            <a:ext cx="2340864" cy="0"/>
-          </a:xfrm>
-          <a:prstGeom prst="line">
-            <a:avLst/>
-          </a:prstGeom>
-          <a:noFill/>
-          <a:ln w="19050">
-            <a:solidFill>
-              <a:srgbClr val="0068B7"/>
-            </a:solidFill>
-            <a:prstDash val="solid"/>
-          </a:ln>
-        </p:spPr>
+          <p:cNvPr id="14" name="Text 12"/>
+          <p:cNvSpPr/>
+          <p:nvPr/>
+        </p:nvSpPr>
+        <p:spPr>
+          <a:xfrm>
+            <a:off x="7799832" y="2935224"/>
+            <a:ext cx="3145536" cy="256032"/>
+          </a:xfrm>
+          <a:prstGeom prst="rect">
+            <a:avLst/>
+          </a:prstGeom>
+          <a:noFill/>
+          <a:ln/>
+        </p:spPr>
+        <p:txBody>
+          <a:bodyPr wrap="square" lIns="0" tIns="0" rIns="0" bIns="0" rtlCol="0" anchor="ctr"/>
+          <a:lstStyle/>
+          <a:p>
+            <a:pPr indent="0" marL="0">
+              <a:buNone/>
+            </a:pPr>
+            <a:r>
+              <a:rPr lang="en-US" sz="1300" b="1" dirty="0">
+                <a:solidFill>
+                  <a:srgbClr val="0068B7"/>
+                </a:solidFill>
+                <a:latin typeface="Aptos" pitchFamily="34" charset="0"/>
+                <a:ea typeface="Aptos" pitchFamily="34" charset="-122"/>
+                <a:cs typeface="Aptos" pitchFamily="34" charset="-120"/>
+              </a:rPr>
+              <a:t>Concept checkpoints</a:t>
+            </a:r>
+            <a:endParaRPr lang="en-US" sz="1300" dirty="0"/>
+          </a:p>
+        </p:txBody>
+      </p:sp>
+      <p:sp>
+        <p:nvSpPr>
+          <p:cNvPr id="15" name="Text 13"/>
+          <p:cNvSpPr/>
+          <p:nvPr/>
+        </p:nvSpPr>
+        <p:spPr>
+          <a:xfrm>
+            <a:off x="7818120" y="3300984"/>
+            <a:ext cx="3090672" cy="877824"/>
+          </a:xfrm>
+          <a:prstGeom prst="rect">
+            <a:avLst/>
+          </a:prstGeom>
+          <a:noFill/>
+          <a:ln/>
+        </p:spPr>
+        <p:txBody>
+          <a:bodyPr wrap="square" lIns="254" tIns="254" rIns="254" bIns="254" rtlCol="0" anchor="t">
+            <a:normAutofit/>
+          </a:bodyPr>
+          <a:lstStyle/>
+          <a:p>
+            <a:r>
+              <a:rPr lang="en-US" sz="1380" dirty="0">
+                <a:solidFill>
+                  <a:srgbClr val="17364A"/>
+                </a:solidFill>
+                <a:latin typeface="Aptos" pitchFamily="34" charset="0"/>
+                <a:ea typeface="Aptos" pitchFamily="34" charset="-122"/>
+                <a:cs typeface="Aptos" pitchFamily="34" charset="-120"/>
+              </a:rPr>
+              <a:t>Instead, it increases the need for staff who can translate across program, data,.</a:t>
+            </a:r>
+            <a:endParaRPr lang="en-US" sz="1380" dirty="0"/>
+          </a:p>
+          <a:p>
+            <a:r>
+              <a:rPr lang="en-US" sz="1380" dirty="0">
+                <a:solidFill>
+                  <a:srgbClr val="17364A"/>
+                </a:solidFill>
+                <a:latin typeface="Aptos" pitchFamily="34" charset="0"/>
+                <a:ea typeface="Aptos" pitchFamily="34" charset="-122"/>
+                <a:cs typeface="Aptos" pitchFamily="34" charset="-120"/>
+              </a:rPr>
+              <a:t>Leaders need a workforce strategy that prepares staff to use, review, govern, and improve.</a:t>
+            </a:r>
+            <a:endParaRPr lang="en-US" sz="1380" dirty="0"/>
+          </a:p>
+          <a:p>
+            <a:r>
+              <a:rPr lang="en-US" sz="1380" dirty="0">
+                <a:solidFill>
+                  <a:srgbClr val="17364A"/>
+                </a:solidFill>
+                <a:latin typeface="Aptos" pitchFamily="34" charset="0"/>
+                <a:ea typeface="Aptos" pitchFamily="34" charset="-122"/>
+                <a:cs typeface="Aptos" pitchFamily="34" charset="-120"/>
+              </a:rPr>
+              <a:t>This module helps leaders identify AI-related roles and competencies.</a:t>
+            </a:r>
+            <a:endParaRPr lang="en-US" sz="1380" dirty="0"/>
+          </a:p>
+        </p:txBody>
       </p:sp>
       <p:sp>
         <p:nvSpPr>
           <p:cNvPr id="16" name="Shape 14"/>
-          <p:cNvSpPr/>
-          <p:nvPr/>
-        </p:nvSpPr>
-        <p:spPr>
-          <a:xfrm>
-            <a:off x="9198864" y="4206240"/>
-            <a:ext cx="347472" cy="347472"/>
-          </a:xfrm>
-          <a:prstGeom prst="ellipse">
-            <a:avLst/>
-          </a:prstGeom>
-          <a:solidFill>
-            <a:srgbClr val="2F8A28"/>
-          </a:solidFill>
-          <a:ln w="12700">
-            <a:solidFill>
-              <a:srgbClr val="2F8A28"/>
-            </a:solidFill>
-            <a:prstDash val="solid"/>
-          </a:ln>
-        </p:spPr>
-      </p:sp>
-      <p:sp>
-        <p:nvSpPr>
-          <p:cNvPr id="17" name="Text 15"/>
-          <p:cNvSpPr/>
-          <p:nvPr/>
-        </p:nvSpPr>
-        <p:spPr>
-          <a:xfrm>
-            <a:off x="7909560" y="3977640"/>
-            <a:ext cx="2926080" cy="182880"/>
-          </a:xfrm>
-          <a:prstGeom prst="rect">
-            <a:avLst/>
-          </a:prstGeom>
-          <a:noFill/>
-          <a:ln/>
-        </p:spPr>
-        <p:txBody>
-          <a:bodyPr wrap="square" lIns="0" tIns="0" rIns="0" bIns="0" rtlCol="0" anchor="ctr"/>
-          <a:lstStyle/>
-          <a:p>
-            <a:pPr algn="ctr" indent="0" marL="0">
-              <a:buNone/>
-            </a:pPr>
-            <a:r>
-              <a:rPr lang="en-US" sz="1000" dirty="0">
-                <a:solidFill>
-                  <a:srgbClr val="003A63"/>
-                </a:solidFill>
-                <a:latin typeface="Aptos" pitchFamily="34" charset="0"/>
-                <a:ea typeface="Aptos" pitchFamily="34" charset="-122"/>
-                <a:cs typeface="Aptos" pitchFamily="34" charset="-120"/>
-              </a:rPr>
-              <a:t>Concept to action</a:t>
-            </a:r>
-            <a:endParaRPr lang="en-US" sz="1000" dirty="0"/>
-          </a:p>
-        </p:txBody>
-      </p:sp>
-      <p:sp>
-        <p:nvSpPr>
-          <p:cNvPr id="18" name="Shape 16"/>
           <p:cNvSpPr/>
           <p:nvPr/>
         </p:nvSpPr>
@@ -13985,7 +13374,7 @@
       </p:sp>
       <p:sp>
         <p:nvSpPr>
-          <p:cNvPr id="19" name="Text 17"/>
+          <p:cNvPr id="17" name="Text 15"/>
           <p:cNvSpPr/>
           <p:nvPr/>
         </p:nvSpPr>
@@ -14024,7 +13413,7 @@
       </p:sp>
       <p:sp>
         <p:nvSpPr>
-          <p:cNvPr id="20" name="Text 18"/>
+          <p:cNvPr id="18" name="Text 16"/>
           <p:cNvSpPr/>
           <p:nvPr/>
         </p:nvSpPr>
@@ -14532,13 +13921,11 @@
             </a:avLst>
           </a:prstGeom>
           <a:solidFill>
-            <a:srgbClr val="FFFFFF">
-              <a:alpha val="88000"/>
-            </a:srgbClr>
+            <a:srgbClr val="FFFFFF"/>
           </a:solidFill>
           <a:ln w="12700">
             <a:solidFill>
-              <a:srgbClr val="D6E8F2"/>
+              <a:srgbClr val="B9D7E6"/>
             </a:solidFill>
             <a:prstDash val="solid"/>
           </a:ln>
@@ -14546,119 +13933,112 @@
       </p:sp>
       <p:sp>
         <p:nvSpPr>
-          <p:cNvPr id="14" name="Shape 12"/>
-          <p:cNvSpPr/>
-          <p:nvPr/>
-        </p:nvSpPr>
-        <p:spPr>
-          <a:xfrm>
-            <a:off x="8074152" y="3291840"/>
-            <a:ext cx="2596896" cy="749808"/>
-          </a:xfrm>
-          <a:prstGeom prst="rect">
-            <a:avLst/>
-          </a:prstGeom>
-          <a:solidFill>
-            <a:srgbClr val="EAF6F8"/>
-          </a:solidFill>
-          <a:ln w="12700">
-            <a:solidFill>
-              <a:srgbClr val="8ABBD8"/>
-            </a:solidFill>
-            <a:prstDash val="solid"/>
-          </a:ln>
-        </p:spPr>
-      </p:sp>
-      <p:sp>
-        <p:nvSpPr>
-          <p:cNvPr id="15" name="Shape 13"/>
-          <p:cNvSpPr/>
-          <p:nvPr/>
-        </p:nvSpPr>
-        <p:spPr>
-          <a:xfrm>
-            <a:off x="8202168" y="3721608"/>
-            <a:ext cx="2340864" cy="0"/>
-          </a:xfrm>
-          <a:prstGeom prst="line">
-            <a:avLst/>
-          </a:prstGeom>
-          <a:noFill/>
-          <a:ln w="19050">
-            <a:solidFill>
-              <a:srgbClr val="0068B7"/>
-            </a:solidFill>
-            <a:prstDash val="solid"/>
-          </a:ln>
-        </p:spPr>
+          <p:cNvPr id="14" name="Text 12"/>
+          <p:cNvSpPr/>
+          <p:nvPr/>
+        </p:nvSpPr>
+        <p:spPr>
+          <a:xfrm>
+            <a:off x="7799832" y="2935224"/>
+            <a:ext cx="3145536" cy="256032"/>
+          </a:xfrm>
+          <a:prstGeom prst="rect">
+            <a:avLst/>
+          </a:prstGeom>
+          <a:noFill/>
+          <a:ln/>
+        </p:spPr>
+        <p:txBody>
+          <a:bodyPr wrap="square" lIns="0" tIns="0" rIns="0" bIns="0" rtlCol="0" anchor="ctr"/>
+          <a:lstStyle/>
+          <a:p>
+            <a:pPr indent="0" marL="0">
+              <a:buNone/>
+            </a:pPr>
+            <a:r>
+              <a:rPr lang="en-US" sz="1300" b="1" dirty="0">
+                <a:solidFill>
+                  <a:srgbClr val="0068B7"/>
+                </a:solidFill>
+                <a:latin typeface="Aptos" pitchFamily="34" charset="0"/>
+                <a:ea typeface="Aptos" pitchFamily="34" charset="-122"/>
+                <a:cs typeface="Aptos" pitchFamily="34" charset="-120"/>
+              </a:rPr>
+              <a:t>Concept checkpoints</a:t>
+            </a:r>
+            <a:endParaRPr lang="en-US" sz="1300" dirty="0"/>
+          </a:p>
+        </p:txBody>
+      </p:sp>
+      <p:sp>
+        <p:nvSpPr>
+          <p:cNvPr id="15" name="Text 13"/>
+          <p:cNvSpPr/>
+          <p:nvPr/>
+        </p:nvSpPr>
+        <p:spPr>
+          <a:xfrm>
+            <a:off x="7818120" y="3300984"/>
+            <a:ext cx="3090672" cy="877824"/>
+          </a:xfrm>
+          <a:prstGeom prst="rect">
+            <a:avLst/>
+          </a:prstGeom>
+          <a:noFill/>
+          <a:ln/>
+        </p:spPr>
+        <p:txBody>
+          <a:bodyPr wrap="square" lIns="254" tIns="254" rIns="254" bIns="254" rtlCol="0" anchor="t">
+            <a:normAutofit/>
+          </a:bodyPr>
+          <a:lstStyle/>
+          <a:p>
+            <a:r>
+              <a:rPr lang="en-US" sz="1380" dirty="0">
+                <a:solidFill>
+                  <a:srgbClr val="17364A"/>
+                </a:solidFill>
+                <a:latin typeface="Aptos" pitchFamily="34" charset="0"/>
+                <a:ea typeface="Aptos" pitchFamily="34" charset="-122"/>
+                <a:cs typeface="Aptos" pitchFamily="34" charset="-120"/>
+              </a:rPr>
+              <a:t>A leader may approve a use case, but governance participants must ensure that privacy,.</a:t>
+            </a:r>
+            <a:endParaRPr lang="en-US" sz="1380" dirty="0"/>
+          </a:p>
+          <a:p>
+            <a:r>
+              <a:rPr lang="en-US" sz="1380" dirty="0">
+                <a:solidFill>
+                  <a:srgbClr val="17364A"/>
+                </a:solidFill>
+                <a:latin typeface="Aptos" pitchFamily="34" charset="0"/>
+                <a:ea typeface="Aptos" pitchFamily="34" charset="-122"/>
+                <a:cs typeface="Aptos" pitchFamily="34" charset="-120"/>
+              </a:rPr>
+              <a:t>Workforce strategy helps agencies move beyond ad hoc training.</a:t>
+            </a:r>
+            <a:endParaRPr lang="en-US" sz="1380" dirty="0"/>
+          </a:p>
+          <a:p>
+            <a:r>
+              <a:rPr lang="en-US" sz="1380" dirty="0">
+                <a:solidFill>
+                  <a:srgbClr val="17364A"/>
+                </a:solidFill>
+                <a:latin typeface="Aptos" pitchFamily="34" charset="0"/>
+                <a:ea typeface="Aptos" pitchFamily="34" charset="-122"/>
+                <a:cs typeface="Aptos" pitchFamily="34" charset="-120"/>
+              </a:rPr>
+              <a:t>It defines which staff need baseline literacy, which staff need deeper technical skills,.</a:t>
+            </a:r>
+            <a:endParaRPr lang="en-US" sz="1380" dirty="0"/>
+          </a:p>
+        </p:txBody>
       </p:sp>
       <p:sp>
         <p:nvSpPr>
           <p:cNvPr id="16" name="Shape 14"/>
-          <p:cNvSpPr/>
-          <p:nvPr/>
-        </p:nvSpPr>
-        <p:spPr>
-          <a:xfrm>
-            <a:off x="9198864" y="4206240"/>
-            <a:ext cx="347472" cy="347472"/>
-          </a:xfrm>
-          <a:prstGeom prst="ellipse">
-            <a:avLst/>
-          </a:prstGeom>
-          <a:solidFill>
-            <a:srgbClr val="2F8A28"/>
-          </a:solidFill>
-          <a:ln w="12700">
-            <a:solidFill>
-              <a:srgbClr val="2F8A28"/>
-            </a:solidFill>
-            <a:prstDash val="solid"/>
-          </a:ln>
-        </p:spPr>
-      </p:sp>
-      <p:sp>
-        <p:nvSpPr>
-          <p:cNvPr id="17" name="Text 15"/>
-          <p:cNvSpPr/>
-          <p:nvPr/>
-        </p:nvSpPr>
-        <p:spPr>
-          <a:xfrm>
-            <a:off x="7909560" y="3977640"/>
-            <a:ext cx="2926080" cy="182880"/>
-          </a:xfrm>
-          <a:prstGeom prst="rect">
-            <a:avLst/>
-          </a:prstGeom>
-          <a:noFill/>
-          <a:ln/>
-        </p:spPr>
-        <p:txBody>
-          <a:bodyPr wrap="square" lIns="0" tIns="0" rIns="0" bIns="0" rtlCol="0" anchor="ctr"/>
-          <a:lstStyle/>
-          <a:p>
-            <a:pPr algn="ctr" indent="0" marL="0">
-              <a:buNone/>
-            </a:pPr>
-            <a:r>
-              <a:rPr lang="en-US" sz="1000" dirty="0">
-                <a:solidFill>
-                  <a:srgbClr val="003A63"/>
-                </a:solidFill>
-                <a:latin typeface="Aptos" pitchFamily="34" charset="0"/>
-                <a:ea typeface="Aptos" pitchFamily="34" charset="-122"/>
-                <a:cs typeface="Aptos" pitchFamily="34" charset="-120"/>
-              </a:rPr>
-              <a:t>Concept to action</a:t>
-            </a:r>
-            <a:endParaRPr lang="en-US" sz="1000" dirty="0"/>
-          </a:p>
-        </p:txBody>
-      </p:sp>
-      <p:sp>
-        <p:nvSpPr>
-          <p:cNvPr id="18" name="Shape 16"/>
           <p:cNvSpPr/>
           <p:nvPr/>
         </p:nvSpPr>
@@ -14685,7 +14065,7 @@
       </p:sp>
       <p:sp>
         <p:nvSpPr>
-          <p:cNvPr id="19" name="Text 17"/>
+          <p:cNvPr id="17" name="Text 15"/>
           <p:cNvSpPr/>
           <p:nvPr/>
         </p:nvSpPr>
@@ -14724,7 +14104,7 @@
       </p:sp>
       <p:sp>
         <p:nvSpPr>
-          <p:cNvPr id="20" name="Text 18"/>
+          <p:cNvPr id="18" name="Text 16"/>
           <p:cNvSpPr/>
           <p:nvPr/>
         </p:nvSpPr>
@@ -15232,13 +14612,11 @@
             </a:avLst>
           </a:prstGeom>
           <a:solidFill>
-            <a:srgbClr val="FFFFFF">
-              <a:alpha val="88000"/>
-            </a:srgbClr>
+            <a:srgbClr val="FFFFFF"/>
           </a:solidFill>
           <a:ln w="12700">
             <a:solidFill>
-              <a:srgbClr val="D6E8F2"/>
+              <a:srgbClr val="B9D7E6"/>
             </a:solidFill>
             <a:prstDash val="solid"/>
           </a:ln>
@@ -15246,119 +14624,112 @@
       </p:sp>
       <p:sp>
         <p:nvSpPr>
-          <p:cNvPr id="14" name="Shape 12"/>
-          <p:cNvSpPr/>
-          <p:nvPr/>
-        </p:nvSpPr>
-        <p:spPr>
-          <a:xfrm>
-            <a:off x="8074152" y="3291840"/>
-            <a:ext cx="2596896" cy="749808"/>
-          </a:xfrm>
-          <a:prstGeom prst="rect">
-            <a:avLst/>
-          </a:prstGeom>
-          <a:solidFill>
-            <a:srgbClr val="EAF6F8"/>
-          </a:solidFill>
-          <a:ln w="12700">
-            <a:solidFill>
-              <a:srgbClr val="8ABBD8"/>
-            </a:solidFill>
-            <a:prstDash val="solid"/>
-          </a:ln>
-        </p:spPr>
-      </p:sp>
-      <p:sp>
-        <p:nvSpPr>
-          <p:cNvPr id="15" name="Shape 13"/>
-          <p:cNvSpPr/>
-          <p:nvPr/>
-        </p:nvSpPr>
-        <p:spPr>
-          <a:xfrm>
-            <a:off x="8202168" y="3721608"/>
-            <a:ext cx="2340864" cy="0"/>
-          </a:xfrm>
-          <a:prstGeom prst="line">
-            <a:avLst/>
-          </a:prstGeom>
-          <a:noFill/>
-          <a:ln w="19050">
-            <a:solidFill>
-              <a:srgbClr val="0068B7"/>
-            </a:solidFill>
-            <a:prstDash val="solid"/>
-          </a:ln>
-        </p:spPr>
+          <p:cNvPr id="14" name="Text 12"/>
+          <p:cNvSpPr/>
+          <p:nvPr/>
+        </p:nvSpPr>
+        <p:spPr>
+          <a:xfrm>
+            <a:off x="7799832" y="2935224"/>
+            <a:ext cx="3145536" cy="256032"/>
+          </a:xfrm>
+          <a:prstGeom prst="rect">
+            <a:avLst/>
+          </a:prstGeom>
+          <a:noFill/>
+          <a:ln/>
+        </p:spPr>
+        <p:txBody>
+          <a:bodyPr wrap="square" lIns="0" tIns="0" rIns="0" bIns="0" rtlCol="0" anchor="ctr"/>
+          <a:lstStyle/>
+          <a:p>
+            <a:pPr indent="0" marL="0">
+              <a:buNone/>
+            </a:pPr>
+            <a:r>
+              <a:rPr lang="en-US" sz="1300" b="1" dirty="0">
+                <a:solidFill>
+                  <a:srgbClr val="0068B7"/>
+                </a:solidFill>
+                <a:latin typeface="Aptos" pitchFamily="34" charset="0"/>
+                <a:ea typeface="Aptos" pitchFamily="34" charset="-122"/>
+                <a:cs typeface="Aptos" pitchFamily="34" charset="-120"/>
+              </a:rPr>
+              <a:t>Concept checkpoints</a:t>
+            </a:r>
+            <a:endParaRPr lang="en-US" sz="1300" dirty="0"/>
+          </a:p>
+        </p:txBody>
+      </p:sp>
+      <p:sp>
+        <p:nvSpPr>
+          <p:cNvPr id="15" name="Text 13"/>
+          <p:cNvSpPr/>
+          <p:nvPr/>
+        </p:nvSpPr>
+        <p:spPr>
+          <a:xfrm>
+            <a:off x="7818120" y="3300984"/>
+            <a:ext cx="3090672" cy="877824"/>
+          </a:xfrm>
+          <a:prstGeom prst="rect">
+            <a:avLst/>
+          </a:prstGeom>
+          <a:noFill/>
+          <a:ln/>
+        </p:spPr>
+        <p:txBody>
+          <a:bodyPr wrap="square" lIns="254" tIns="254" rIns="254" bIns="254" rtlCol="0" anchor="t">
+            <a:normAutofit/>
+          </a:bodyPr>
+          <a:lstStyle/>
+          <a:p>
+            <a:r>
+              <a:rPr lang="en-US" sz="1380" dirty="0">
+                <a:solidFill>
+                  <a:srgbClr val="17364A"/>
+                </a:solidFill>
+                <a:latin typeface="Aptos" pitchFamily="34" charset="0"/>
+                <a:ea typeface="Aptos" pitchFamily="34" charset="-122"/>
+                <a:cs typeface="Aptos" pitchFamily="34" charset="-120"/>
+              </a:rPr>
+              <a:t>A public health agency implements several AI tools: a document assistant, a case.</a:t>
+            </a:r>
+            <a:endParaRPr lang="en-US" sz="1380" dirty="0"/>
+          </a:p>
+          <a:p>
+            <a:r>
+              <a:rPr lang="en-US" sz="1380" dirty="0">
+                <a:solidFill>
+                  <a:srgbClr val="17364A"/>
+                </a:solidFill>
+                <a:latin typeface="Aptos" pitchFamily="34" charset="0"/>
+                <a:ea typeface="Aptos" pitchFamily="34" charset="-122"/>
+                <a:cs typeface="Aptos" pitchFamily="34" charset="-120"/>
+              </a:rPr>
+              <a:t>Program staff understand workflow, IT understands integration, privacy understands data.</a:t>
+            </a:r>
+            <a:endParaRPr lang="en-US" sz="1380" dirty="0"/>
+          </a:p>
+          <a:p>
+            <a:r>
+              <a:rPr lang="en-US" sz="1380" dirty="0">
+                <a:solidFill>
+                  <a:srgbClr val="17364A"/>
+                </a:solidFill>
+                <a:latin typeface="Aptos" pitchFamily="34" charset="0"/>
+                <a:ea typeface="Aptos" pitchFamily="34" charset="-122"/>
+                <a:cs typeface="Aptos" pitchFamily="34" charset="-120"/>
+              </a:rPr>
+              <a:t>However, there is no role that connects these perspectives consistently.</a:t>
+            </a:r>
+            <a:endParaRPr lang="en-US" sz="1380" dirty="0"/>
+          </a:p>
+        </p:txBody>
       </p:sp>
       <p:sp>
         <p:nvSpPr>
           <p:cNvPr id="16" name="Shape 14"/>
-          <p:cNvSpPr/>
-          <p:nvPr/>
-        </p:nvSpPr>
-        <p:spPr>
-          <a:xfrm>
-            <a:off x="9198864" y="4206240"/>
-            <a:ext cx="347472" cy="347472"/>
-          </a:xfrm>
-          <a:prstGeom prst="ellipse">
-            <a:avLst/>
-          </a:prstGeom>
-          <a:solidFill>
-            <a:srgbClr val="2F8A28"/>
-          </a:solidFill>
-          <a:ln w="12700">
-            <a:solidFill>
-              <a:srgbClr val="2F8A28"/>
-            </a:solidFill>
-            <a:prstDash val="solid"/>
-          </a:ln>
-        </p:spPr>
-      </p:sp>
-      <p:sp>
-        <p:nvSpPr>
-          <p:cNvPr id="17" name="Text 15"/>
-          <p:cNvSpPr/>
-          <p:nvPr/>
-        </p:nvSpPr>
-        <p:spPr>
-          <a:xfrm>
-            <a:off x="7909560" y="3977640"/>
-            <a:ext cx="2926080" cy="182880"/>
-          </a:xfrm>
-          <a:prstGeom prst="rect">
-            <a:avLst/>
-          </a:prstGeom>
-          <a:noFill/>
-          <a:ln/>
-        </p:spPr>
-        <p:txBody>
-          <a:bodyPr wrap="square" lIns="0" tIns="0" rIns="0" bIns="0" rtlCol="0" anchor="ctr"/>
-          <a:lstStyle/>
-          <a:p>
-            <a:pPr algn="ctr" indent="0" marL="0">
-              <a:buNone/>
-            </a:pPr>
-            <a:r>
-              <a:rPr lang="en-US" sz="1000" dirty="0">
-                <a:solidFill>
-                  <a:srgbClr val="003A63"/>
-                </a:solidFill>
-                <a:latin typeface="Aptos" pitchFamily="34" charset="0"/>
-                <a:ea typeface="Aptos" pitchFamily="34" charset="-122"/>
-                <a:cs typeface="Aptos" pitchFamily="34" charset="-120"/>
-              </a:rPr>
-              <a:t>Concept to action</a:t>
-            </a:r>
-            <a:endParaRPr lang="en-US" sz="1000" dirty="0"/>
-          </a:p>
-        </p:txBody>
-      </p:sp>
-      <p:sp>
-        <p:nvSpPr>
-          <p:cNvPr id="18" name="Shape 16"/>
           <p:cNvSpPr/>
           <p:nvPr/>
         </p:nvSpPr>
@@ -15385,7 +14756,7 @@
       </p:sp>
       <p:sp>
         <p:nvSpPr>
-          <p:cNvPr id="19" name="Text 17"/>
+          <p:cNvPr id="17" name="Text 15"/>
           <p:cNvSpPr/>
           <p:nvPr/>
         </p:nvSpPr>
@@ -15424,7 +14795,7 @@
       </p:sp>
       <p:sp>
         <p:nvSpPr>
-          <p:cNvPr id="20" name="Text 18"/>
+          <p:cNvPr id="18" name="Text 16"/>
           <p:cNvSpPr/>
           <p:nvPr/>
         </p:nvSpPr>
@@ -15932,13 +15303,11 @@
             </a:avLst>
           </a:prstGeom>
           <a:solidFill>
-            <a:srgbClr val="FFFFFF">
-              <a:alpha val="88000"/>
-            </a:srgbClr>
+            <a:srgbClr val="FFFFFF"/>
           </a:solidFill>
           <a:ln w="12700">
             <a:solidFill>
-              <a:srgbClr val="D6E8F2"/>
+              <a:srgbClr val="B9D7E6"/>
             </a:solidFill>
             <a:prstDash val="solid"/>
           </a:ln>
@@ -15946,190 +15315,112 @@
       </p:sp>
       <p:sp>
         <p:nvSpPr>
-          <p:cNvPr id="14" name="Shape 12"/>
-          <p:cNvSpPr/>
-          <p:nvPr/>
-        </p:nvSpPr>
-        <p:spPr>
-          <a:xfrm>
-            <a:off x="7891272" y="3108960"/>
-            <a:ext cx="566928" cy="566928"/>
-          </a:xfrm>
-          <a:prstGeom prst="ellipse">
-            <a:avLst/>
-          </a:prstGeom>
-          <a:solidFill>
-            <a:srgbClr val="0068B7"/>
-          </a:solidFill>
-          <a:ln w="12700">
-            <a:solidFill>
-              <a:srgbClr val="0068B7"/>
-            </a:solidFill>
-            <a:prstDash val="solid"/>
-          </a:ln>
-        </p:spPr>
-      </p:sp>
-      <p:sp>
-        <p:nvSpPr>
-          <p:cNvPr id="15" name="Shape 13"/>
-          <p:cNvSpPr/>
-          <p:nvPr/>
-        </p:nvSpPr>
-        <p:spPr>
-          <a:xfrm>
-            <a:off x="10287000" y="3108960"/>
-            <a:ext cx="566928" cy="566928"/>
-          </a:xfrm>
-          <a:prstGeom prst="ellipse">
-            <a:avLst/>
-          </a:prstGeom>
-          <a:solidFill>
-            <a:srgbClr val="2F8A28"/>
-          </a:solidFill>
-          <a:ln w="12700">
-            <a:solidFill>
-              <a:srgbClr val="2F8A28"/>
-            </a:solidFill>
-            <a:prstDash val="solid"/>
-          </a:ln>
-        </p:spPr>
+          <p:cNvPr id="14" name="Text 12"/>
+          <p:cNvSpPr/>
+          <p:nvPr/>
+        </p:nvSpPr>
+        <p:spPr>
+          <a:xfrm>
+            <a:off x="7799832" y="2935224"/>
+            <a:ext cx="3145536" cy="256032"/>
+          </a:xfrm>
+          <a:prstGeom prst="rect">
+            <a:avLst/>
+          </a:prstGeom>
+          <a:noFill/>
+          <a:ln/>
+        </p:spPr>
+        <p:txBody>
+          <a:bodyPr wrap="square" lIns="0" tIns="0" rIns="0" bIns="0" rtlCol="0" anchor="ctr"/>
+          <a:lstStyle/>
+          <a:p>
+            <a:pPr indent="0" marL="0">
+              <a:buNone/>
+            </a:pPr>
+            <a:r>
+              <a:rPr lang="en-US" sz="1300" b="1" dirty="0">
+                <a:solidFill>
+                  <a:srgbClr val="0068B7"/>
+                </a:solidFill>
+                <a:latin typeface="Aptos" pitchFamily="34" charset="0"/>
+                <a:ea typeface="Aptos" pitchFamily="34" charset="-122"/>
+                <a:cs typeface="Aptos" pitchFamily="34" charset="-120"/>
+              </a:rPr>
+              <a:t>Concept checkpoints</a:t>
+            </a:r>
+            <a:endParaRPr lang="en-US" sz="1300" dirty="0"/>
+          </a:p>
+        </p:txBody>
+      </p:sp>
+      <p:sp>
+        <p:nvSpPr>
+          <p:cNvPr id="15" name="Text 13"/>
+          <p:cNvSpPr/>
+          <p:nvPr/>
+        </p:nvSpPr>
+        <p:spPr>
+          <a:xfrm>
+            <a:off x="7818120" y="3300984"/>
+            <a:ext cx="3090672" cy="877824"/>
+          </a:xfrm>
+          <a:prstGeom prst="rect">
+            <a:avLst/>
+          </a:prstGeom>
+          <a:noFill/>
+          <a:ln/>
+        </p:spPr>
+        <p:txBody>
+          <a:bodyPr wrap="square" lIns="254" tIns="254" rIns="254" bIns="254" rtlCol="0" anchor="t">
+            <a:normAutofit/>
+          </a:bodyPr>
+          <a:lstStyle/>
+          <a:p>
+            <a:r>
+              <a:rPr lang="en-US" sz="1380" dirty="0">
+                <a:solidFill>
+                  <a:srgbClr val="17364A"/>
+                </a:solidFill>
+                <a:latin typeface="Aptos" pitchFamily="34" charset="0"/>
+                <a:ea typeface="Aptos" pitchFamily="34" charset="-122"/>
+                <a:cs typeface="Aptos" pitchFamily="34" charset="-120"/>
+              </a:rPr>
+              <a:t>Supervisors need to support review, feedback, and documentation.</a:t>
+            </a:r>
+            <a:endParaRPr lang="en-US" sz="1380" dirty="0"/>
+          </a:p>
+          <a:p>
+            <a:r>
+              <a:rPr lang="en-US" sz="1380" dirty="0">
+                <a:solidFill>
+                  <a:srgbClr val="17364A"/>
+                </a:solidFill>
+                <a:latin typeface="Aptos" pitchFamily="34" charset="0"/>
+                <a:ea typeface="Aptos" pitchFamily="34" charset="-122"/>
+                <a:cs typeface="Aptos" pitchFamily="34" charset="-120"/>
+              </a:rPr>
+              <a:t>Program owners need to understand accountability and performance monitoring.</a:t>
+            </a:r>
+            <a:endParaRPr lang="en-US" sz="1380" dirty="0"/>
+          </a:p>
+          <a:p>
+            <a:r>
+              <a:rPr lang="en-US" sz="1380" dirty="0">
+                <a:solidFill>
+                  <a:srgbClr val="17364A"/>
+                </a:solidFill>
+                <a:latin typeface="Aptos" pitchFamily="34" charset="0"/>
+                <a:ea typeface="Aptos" pitchFamily="34" charset="-122"/>
+                <a:cs typeface="Aptos" pitchFamily="34" charset="-120"/>
+              </a:rPr>
+              <a:t>Technical staff need deeper knowledge of data, architecture, validation, and security.</a:t>
+            </a:r>
+            <a:endParaRPr lang="en-US" sz="1380" dirty="0"/>
+          </a:p>
+        </p:txBody>
       </p:sp>
       <p:sp>
         <p:nvSpPr>
           <p:cNvPr id="16" name="Shape 14"/>
-          <p:cNvSpPr/>
-          <p:nvPr/>
-        </p:nvSpPr>
-        <p:spPr>
-          <a:xfrm>
-            <a:off x="9089136" y="3456432"/>
-            <a:ext cx="566928" cy="566928"/>
-          </a:xfrm>
-          <a:prstGeom prst="ellipse">
-            <a:avLst/>
-          </a:prstGeom>
-          <a:solidFill>
-            <a:srgbClr val="6A4CA3"/>
-          </a:solidFill>
-          <a:ln w="12700">
-            <a:solidFill>
-              <a:srgbClr val="6A4CA3"/>
-            </a:solidFill>
-            <a:prstDash val="solid"/>
-          </a:ln>
-        </p:spPr>
-      </p:sp>
-      <p:sp>
-        <p:nvSpPr>
-          <p:cNvPr id="17" name="Shape 15"/>
-          <p:cNvSpPr/>
-          <p:nvPr/>
-        </p:nvSpPr>
-        <p:spPr>
-          <a:xfrm>
-            <a:off x="8385048" y="3419856"/>
-            <a:ext cx="1975104" cy="0"/>
-          </a:xfrm>
-          <a:prstGeom prst="line">
-            <a:avLst/>
-          </a:prstGeom>
-          <a:noFill/>
-          <a:ln w="25400">
-            <a:solidFill>
-              <a:srgbClr val="8ABBD8"/>
-            </a:solidFill>
-            <a:prstDash val="solid"/>
-          </a:ln>
-        </p:spPr>
-      </p:sp>
-      <p:sp>
-        <p:nvSpPr>
-          <p:cNvPr id="18" name="Shape 16"/>
-          <p:cNvSpPr/>
-          <p:nvPr/>
-        </p:nvSpPr>
-        <p:spPr>
-          <a:xfrm>
-            <a:off x="8202168" y="3630168"/>
-            <a:ext cx="1170432" cy="118872"/>
-          </a:xfrm>
-          <a:prstGeom prst="line">
-            <a:avLst/>
-          </a:prstGeom>
-          <a:noFill/>
-          <a:ln w="25400">
-            <a:solidFill>
-              <a:srgbClr val="8ABBD8"/>
-            </a:solidFill>
-            <a:prstDash val="solid"/>
-          </a:ln>
-        </p:spPr>
-      </p:sp>
-      <p:sp>
-        <p:nvSpPr>
-          <p:cNvPr id="19" name="Shape 17"/>
-          <p:cNvSpPr/>
-          <p:nvPr/>
-        </p:nvSpPr>
-        <p:spPr>
-          <a:xfrm>
-            <a:off x="10543032" y="3630168"/>
-            <a:ext cx="-1170432" cy="118872"/>
-          </a:xfrm>
-          <a:prstGeom prst="line">
-            <a:avLst/>
-          </a:prstGeom>
-          <a:noFill/>
-          <a:ln w="25400">
-            <a:solidFill>
-              <a:srgbClr val="8ABBD8"/>
-            </a:solidFill>
-            <a:prstDash val="solid"/>
-          </a:ln>
-        </p:spPr>
-      </p:sp>
-      <p:sp>
-        <p:nvSpPr>
-          <p:cNvPr id="20" name="Text 18"/>
-          <p:cNvSpPr/>
-          <p:nvPr/>
-        </p:nvSpPr>
-        <p:spPr>
-          <a:xfrm>
-            <a:off x="7863840" y="4069080"/>
-            <a:ext cx="3017520" cy="164592"/>
-          </a:xfrm>
-          <a:prstGeom prst="rect">
-            <a:avLst/>
-          </a:prstGeom>
-          <a:noFill/>
-          <a:ln/>
-        </p:spPr>
-        <p:txBody>
-          <a:bodyPr wrap="square" lIns="0" tIns="0" rIns="0" bIns="0" rtlCol="0" anchor="ctr"/>
-          <a:lstStyle/>
-          <a:p>
-            <a:pPr algn="ctr" indent="0" marL="0">
-              <a:buNone/>
-            </a:pPr>
-            <a:r>
-              <a:rPr lang="en-US" sz="900" b="1" dirty="0">
-                <a:solidFill>
-                  <a:srgbClr val="003A63"/>
-                </a:solidFill>
-                <a:latin typeface="Aptos" pitchFamily="34" charset="0"/>
-                <a:ea typeface="Aptos" pitchFamily="34" charset="-122"/>
-                <a:cs typeface="Aptos" pitchFamily="34" charset="-120"/>
-              </a:rPr>
-              <a:t>Decision rights</a:t>
-            </a:r>
-            <a:endParaRPr lang="en-US" sz="900" dirty="0"/>
-          </a:p>
-        </p:txBody>
-      </p:sp>
-      <p:sp>
-        <p:nvSpPr>
-          <p:cNvPr id="21" name="Shape 19"/>
           <p:cNvSpPr/>
           <p:nvPr/>
         </p:nvSpPr>
@@ -16156,7 +15447,7 @@
       </p:sp>
       <p:sp>
         <p:nvSpPr>
-          <p:cNvPr id="22" name="Text 20"/>
+          <p:cNvPr id="17" name="Text 15"/>
           <p:cNvSpPr/>
           <p:nvPr/>
         </p:nvSpPr>
@@ -16195,7 +15486,7 @@
       </p:sp>
       <p:sp>
         <p:nvSpPr>
-          <p:cNvPr id="23" name="Text 21"/>
+          <p:cNvPr id="18" name="Text 16"/>
           <p:cNvSpPr/>
           <p:nvPr/>
         </p:nvSpPr>

--- a/downloads/presentations/modules/exe-440.pptx
+++ b/downloads/presentations/modules/exe-440.pptx
@@ -3162,49 +3162,58 @@
           <a:ln/>
         </p:spPr>
         <p:txBody>
-          <a:bodyPr wrap="square" lIns="635" tIns="635" rIns="635" bIns="635" rtlCol="0" anchor="t">
+          <a:bodyPr wrap="square" lIns="1016" tIns="1016" rIns="1016" bIns="1016" rtlCol="0" anchor="t">
             <a:normAutofit/>
           </a:bodyPr>
           <a:lstStyle/>
           <a:p>
+            <a:pPr indent="0" marL="0">
+              <a:buNone/>
+            </a:pPr>
             <a:r>
               <a:rPr lang="en-US" sz="2100" dirty="0">
                 <a:solidFill>
-                  <a:srgbClr val="17364A"/>
-                </a:solidFill>
-                <a:latin typeface="Aptos" pitchFamily="34" charset="0"/>
-                <a:ea typeface="Aptos" pitchFamily="34" charset="-122"/>
-                <a:cs typeface="Aptos" pitchFamily="34" charset="-120"/>
-              </a:rPr>
-              <a:t>One risk is assuming that AI reduces workforce needs.</a:t>
+                  <a:srgbClr val="003A63"/>
+                </a:solidFill>
+                <a:latin typeface="Aptos" pitchFamily="34" charset="0"/>
+                <a:ea typeface="Aptos" pitchFamily="34" charset="-122"/>
+                <a:cs typeface="Aptos" pitchFamily="34" charset="-120"/>
+              </a:rPr>
+              <a:t>• One risk is assuming that AI reduces workforce needs.</a:t>
             </a:r>
             <a:endParaRPr lang="en-US" sz="2100" dirty="0"/>
           </a:p>
           <a:p>
+            <a:pPr indent="0" marL="0">
+              <a:buNone/>
+            </a:pPr>
             <a:r>
               <a:rPr lang="en-US" sz="2100" dirty="0">
                 <a:solidFill>
-                  <a:srgbClr val="17364A"/>
-                </a:solidFill>
-                <a:latin typeface="Aptos" pitchFamily="34" charset="0"/>
-                <a:ea typeface="Aptos" pitchFamily="34" charset="-122"/>
-                <a:cs typeface="Aptos" pitchFamily="34" charset="-120"/>
-              </a:rPr>
-              <a:t>In practice, responsible AI often requires new review, training, documentation, and monitoring work.</a:t>
+                  <a:srgbClr val="003A63"/>
+                </a:solidFill>
+                <a:latin typeface="Aptos" pitchFamily="34" charset="0"/>
+                <a:ea typeface="Aptos" pitchFamily="34" charset="-122"/>
+                <a:cs typeface="Aptos" pitchFamily="34" charset="-120"/>
+              </a:rPr>
+              <a:t>• In practice, responsible AI often requires new review, training, documentation, and monitoring.</a:t>
             </a:r>
             <a:endParaRPr lang="en-US" sz="2100" dirty="0"/>
           </a:p>
           <a:p>
+            <a:pPr indent="0" marL="0">
+              <a:buNone/>
+            </a:pPr>
             <a:r>
               <a:rPr lang="en-US" sz="2100" dirty="0">
                 <a:solidFill>
-                  <a:srgbClr val="17364A"/>
-                </a:solidFill>
-                <a:latin typeface="Aptos" pitchFamily="34" charset="0"/>
-                <a:ea typeface="Aptos" pitchFamily="34" charset="-122"/>
-                <a:cs typeface="Aptos" pitchFamily="34" charset="-120"/>
-              </a:rPr>
-              <a:t>A guardrail is to include workforce impact in every business case and implementation plan.</a:t>
+                  <a:srgbClr val="003A63"/>
+                </a:solidFill>
+                <a:latin typeface="Aptos" pitchFamily="34" charset="0"/>
+                <a:ea typeface="Aptos" pitchFamily="34" charset="-122"/>
+                <a:cs typeface="Aptos" pitchFamily="34" charset="-120"/>
+              </a:rPr>
+              <a:t>• A guardrail is to include workforce impact in every business case and implementation plan.</a:t>
             </a:r>
             <a:endParaRPr lang="en-US" sz="2100" dirty="0"/>
           </a:p>
@@ -3284,17 +3293,17 @@
         </p:nvSpPr>
         <p:spPr>
           <a:xfrm>
-            <a:off x="7799832" y="1828800"/>
-            <a:ext cx="3145536" cy="685800"/>
-          </a:xfrm>
-          <a:prstGeom prst="rect">
-            <a:avLst/>
-          </a:prstGeom>
-          <a:noFill/>
-          <a:ln/>
-        </p:spPr>
-        <p:txBody>
-          <a:bodyPr wrap="square" lIns="0" tIns="0" rIns="0" bIns="0" rtlCol="0" anchor="t">
+            <a:off x="7799832" y="1801368"/>
+            <a:ext cx="3145536" cy="758952"/>
+          </a:xfrm>
+          <a:prstGeom prst="rect">
+            <a:avLst/>
+          </a:prstGeom>
+          <a:noFill/>
+          <a:ln/>
+        </p:spPr>
+        <p:txBody>
+          <a:bodyPr wrap="square" lIns="254" tIns="254" rIns="254" bIns="254" rtlCol="0" anchor="t">
             <a:normAutofit/>
           </a:bodyPr>
           <a:lstStyle/>
@@ -3303,7 +3312,7 @@
               <a:buNone/>
             </a:pPr>
             <a:r>
-              <a:rPr lang="en-US" sz="1550" dirty="0">
+              <a:rPr lang="en-US" sz="1320" dirty="0">
                 <a:solidFill>
                   <a:srgbClr val="17364A"/>
                 </a:solidFill>
@@ -3313,7 +3322,7 @@
               </a:rPr>
               <a:t>One risk is assuming that AI reduces workforce needs.</a:t>
             </a:r>
-            <a:endParaRPr lang="en-US" sz="1550" dirty="0"/>
+            <a:endParaRPr lang="en-US" sz="1320" dirty="0"/>
           </a:p>
         </p:txBody>
       </p:sp>
@@ -3401,13 +3410,16 @@
           <a:ln/>
         </p:spPr>
         <p:txBody>
-          <a:bodyPr wrap="square" lIns="254" tIns="254" rIns="254" bIns="254" rtlCol="0" anchor="t">
+          <a:bodyPr wrap="square" lIns="508" tIns="508" rIns="508" bIns="508" rtlCol="0" anchor="t">
             <a:normAutofit/>
           </a:bodyPr>
           <a:lstStyle/>
           <a:p>
-            <a:r>
-              <a:rPr lang="en-US" sz="1380" dirty="0">
+            <a:pPr indent="0" marL="0">
+              <a:buNone/>
+            </a:pPr>
+            <a:r>
+              <a:rPr lang="en-US" sz="1220" dirty="0">
                 <a:solidFill>
                   <a:srgbClr val="17364A"/>
                 </a:solidFill>
@@ -3417,11 +3429,14 @@
               </a:rPr>
               <a:t>Another risk is uneven access to AI skills.</a:t>
             </a:r>
-            <a:endParaRPr lang="en-US" sz="1380" dirty="0"/>
-          </a:p>
-          <a:p>
-            <a:r>
-              <a:rPr lang="en-US" sz="1380" dirty="0">
+            <a:endParaRPr lang="en-US" sz="1220" dirty="0"/>
+          </a:p>
+          <a:p>
+            <a:pPr indent="0" marL="0">
+              <a:buNone/>
+            </a:pPr>
+            <a:r>
+              <a:rPr lang="en-US" sz="1220" dirty="0">
                 <a:solidFill>
                   <a:srgbClr val="17364A"/>
                 </a:solidFill>
@@ -3429,13 +3444,16 @@
                 <a:ea typeface="Aptos" pitchFamily="34" charset="-122"/>
                 <a:cs typeface="Aptos" pitchFamily="34" charset="-120"/>
               </a:rPr>
-              <a:t>Staff in better-resourced programs may receive training first, while others fall behind.</a:t>
-            </a:r>
-            <a:endParaRPr lang="en-US" sz="1380" dirty="0"/>
-          </a:p>
-          <a:p>
-            <a:r>
-              <a:rPr lang="en-US" sz="1380" dirty="0">
+              <a:t>Staff in better-resourced programs may receive training first,.</a:t>
+            </a:r>
+            <a:endParaRPr lang="en-US" sz="1220" dirty="0"/>
+          </a:p>
+          <a:p>
+            <a:pPr indent="0" marL="0">
+              <a:buNone/>
+            </a:pPr>
+            <a:r>
+              <a:rPr lang="en-US" sz="1220" dirty="0">
                 <a:solidFill>
                   <a:srgbClr val="17364A"/>
                 </a:solidFill>
@@ -3443,9 +3461,9 @@
                 <a:ea typeface="Aptos" pitchFamily="34" charset="-122"/>
                 <a:cs typeface="Aptos" pitchFamily="34" charset="-120"/>
               </a:rPr>
-              <a:t>A guardrail is to create a role-based training plan that includes all relevant staff.</a:t>
-            </a:r>
-            <a:endParaRPr lang="en-US" sz="1380" dirty="0"/>
+              <a:t>A guardrail is to create a role-based training plan that includes.</a:t>
+            </a:r>
+            <a:endParaRPr lang="en-US" sz="1220" dirty="0"/>
           </a:p>
         </p:txBody>
       </p:sp>
@@ -3523,17 +3541,17 @@
         </p:nvSpPr>
         <p:spPr>
           <a:xfrm>
-            <a:off x="7799832" y="5001768"/>
-            <a:ext cx="3145536" cy="502920"/>
-          </a:xfrm>
-          <a:prstGeom prst="rect">
-            <a:avLst/>
-          </a:prstGeom>
-          <a:noFill/>
-          <a:ln/>
-        </p:spPr>
-        <p:txBody>
-          <a:bodyPr wrap="square" lIns="0" tIns="0" rIns="0" bIns="0" rtlCol="0" anchor="t">
+            <a:off x="7799832" y="4974336"/>
+            <a:ext cx="3145536" cy="576072"/>
+          </a:xfrm>
+          <a:prstGeom prst="rect">
+            <a:avLst/>
+          </a:prstGeom>
+          <a:noFill/>
+          <a:ln/>
+        </p:spPr>
+        <p:txBody>
+          <a:bodyPr wrap="square" lIns="254" tIns="254" rIns="254" bIns="254" rtlCol="0" anchor="t">
             <a:normAutofit/>
           </a:bodyPr>
           <a:lstStyle/>
@@ -3542,7 +3560,7 @@
               <a:buNone/>
             </a:pPr>
             <a:r>
-              <a:rPr lang="en-US" sz="1550" dirty="0">
+              <a:rPr lang="en-US" sz="1320" dirty="0">
                 <a:solidFill>
                   <a:srgbClr val="17364A"/>
                 </a:solidFill>
@@ -3550,9 +3568,9 @@
                 <a:ea typeface="Aptos" pitchFamily="34" charset="-122"/>
                 <a:cs typeface="Aptos" pitchFamily="34" charset="-120"/>
               </a:rPr>
-              <a:t>Identify what could go wrong, who could be affected, what safeguards are needed, and what evidence should be reviewed before use expands.</a:t>
-            </a:r>
-            <a:endParaRPr lang="en-US" sz="1550" dirty="0"/>
+              <a:t>Identify what could go wrong, who could be affected, what safeguards are needed, and what evidence should be reviewed.</a:t>
+            </a:r>
+            <a:endParaRPr lang="en-US" sz="1320" dirty="0"/>
           </a:p>
         </p:txBody>
       </p:sp>
@@ -3853,49 +3871,58 @@
           <a:ln/>
         </p:spPr>
         <p:txBody>
-          <a:bodyPr wrap="square" lIns="635" tIns="635" rIns="635" bIns="635" rtlCol="0" anchor="t">
+          <a:bodyPr wrap="square" lIns="1016" tIns="1016" rIns="1016" bIns="1016" rtlCol="0" anchor="t">
             <a:normAutofit/>
           </a:bodyPr>
           <a:lstStyle/>
           <a:p>
+            <a:pPr indent="0" marL="0">
+              <a:buNone/>
+            </a:pPr>
             <a:r>
               <a:rPr lang="en-US" sz="2100" dirty="0">
                 <a:solidFill>
-                  <a:srgbClr val="17364A"/>
-                </a:solidFill>
-                <a:latin typeface="Aptos" pitchFamily="34" charset="0"/>
-                <a:ea typeface="Aptos" pitchFamily="34" charset="-122"/>
-                <a:cs typeface="Aptos" pitchFamily="34" charset="-120"/>
-              </a:rPr>
-              <a:t>Generative AI requires staff who can review outputs and manage source accuracy.</a:t>
+                  <a:srgbClr val="003A63"/>
+                </a:solidFill>
+                <a:latin typeface="Aptos" pitchFamily="34" charset="0"/>
+                <a:ea typeface="Aptos" pitchFamily="34" charset="-122"/>
+                <a:cs typeface="Aptos" pitchFamily="34" charset="-120"/>
+              </a:rPr>
+              <a:t>• Generative AI requires staff who can review outputs and manage source accuracy.</a:t>
             </a:r>
             <a:endParaRPr lang="en-US" sz="2100" dirty="0"/>
           </a:p>
           <a:p>
+            <a:pPr indent="0" marL="0">
+              <a:buNone/>
+            </a:pPr>
             <a:r>
               <a:rPr lang="en-US" sz="2100" dirty="0">
                 <a:solidFill>
-                  <a:srgbClr val="17364A"/>
-                </a:solidFill>
-                <a:latin typeface="Aptos" pitchFamily="34" charset="0"/>
-                <a:ea typeface="Aptos" pitchFamily="34" charset="-122"/>
-                <a:cs typeface="Aptos" pitchFamily="34" charset="-120"/>
-              </a:rPr>
-              <a:t>Predictive analytics requires staff who can interpret performance and understand limitations.</a:t>
+                  <a:srgbClr val="003A63"/>
+                </a:solidFill>
+                <a:latin typeface="Aptos" pitchFamily="34" charset="0"/>
+                <a:ea typeface="Aptos" pitchFamily="34" charset="-122"/>
+                <a:cs typeface="Aptos" pitchFamily="34" charset="-120"/>
+              </a:rPr>
+              <a:t>• Predictive analytics requires staff who can interpret performance and understand limitations.</a:t>
             </a:r>
             <a:endParaRPr lang="en-US" sz="2100" dirty="0"/>
           </a:p>
           <a:p>
+            <a:pPr indent="0" marL="0">
+              <a:buNone/>
+            </a:pPr>
             <a:r>
               <a:rPr lang="en-US" sz="2100" dirty="0">
                 <a:solidFill>
-                  <a:srgbClr val="17364A"/>
-                </a:solidFill>
-                <a:latin typeface="Aptos" pitchFamily="34" charset="0"/>
-                <a:ea typeface="Aptos" pitchFamily="34" charset="-122"/>
-                <a:cs typeface="Aptos" pitchFamily="34" charset="-120"/>
-              </a:rPr>
-              <a:t>Agentic workflows require staff who can oversee permissions, actions, escalation, and rollback.</a:t>
+                  <a:srgbClr val="003A63"/>
+                </a:solidFill>
+                <a:latin typeface="Aptos" pitchFamily="34" charset="0"/>
+                <a:ea typeface="Aptos" pitchFamily="34" charset="-122"/>
+                <a:cs typeface="Aptos" pitchFamily="34" charset="-120"/>
+              </a:rPr>
+              <a:t>• Agentic workflows require staff who can oversee permissions, actions, escalation, and rollback.</a:t>
             </a:r>
             <a:endParaRPr lang="en-US" sz="2100" dirty="0"/>
           </a:p>
@@ -3975,17 +4002,17 @@
         </p:nvSpPr>
         <p:spPr>
           <a:xfrm>
-            <a:off x="7799832" y="1828800"/>
-            <a:ext cx="3145536" cy="685800"/>
-          </a:xfrm>
-          <a:prstGeom prst="rect">
-            <a:avLst/>
-          </a:prstGeom>
-          <a:noFill/>
-          <a:ln/>
-        </p:spPr>
-        <p:txBody>
-          <a:bodyPr wrap="square" lIns="0" tIns="0" rIns="0" bIns="0" rtlCol="0" anchor="t">
+            <a:off x="7799832" y="1801368"/>
+            <a:ext cx="3145536" cy="758952"/>
+          </a:xfrm>
+          <a:prstGeom prst="rect">
+            <a:avLst/>
+          </a:prstGeom>
+          <a:noFill/>
+          <a:ln/>
+        </p:spPr>
+        <p:txBody>
+          <a:bodyPr wrap="square" lIns="254" tIns="254" rIns="254" bIns="254" rtlCol="0" anchor="t">
             <a:normAutofit/>
           </a:bodyPr>
           <a:lstStyle/>
@@ -3994,7 +4021,7 @@
               <a:buNone/>
             </a:pPr>
             <a:r>
-              <a:rPr lang="en-US" sz="1550" dirty="0">
+              <a:rPr lang="en-US" sz="1320" dirty="0">
                 <a:solidFill>
                   <a:srgbClr val="17364A"/>
                 </a:solidFill>
@@ -4004,7 +4031,7 @@
               </a:rPr>
               <a:t>Generative AI requires staff who can review outputs and manage source accuracy.</a:t>
             </a:r>
-            <a:endParaRPr lang="en-US" sz="1550" dirty="0"/>
+            <a:endParaRPr lang="en-US" sz="1320" dirty="0"/>
           </a:p>
         </p:txBody>
       </p:sp>
@@ -4092,13 +4119,16 @@
           <a:ln/>
         </p:spPr>
         <p:txBody>
-          <a:bodyPr wrap="square" lIns="254" tIns="254" rIns="254" bIns="254" rtlCol="0" anchor="t">
+          <a:bodyPr wrap="square" lIns="508" tIns="508" rIns="508" bIns="508" rtlCol="0" anchor="t">
             <a:normAutofit/>
           </a:bodyPr>
           <a:lstStyle/>
           <a:p>
-            <a:r>
-              <a:rPr lang="en-US" sz="1380" dirty="0">
+            <a:pPr indent="0" marL="0">
+              <a:buNone/>
+            </a:pPr>
+            <a:r>
+              <a:rPr lang="en-US" sz="1220" dirty="0">
                 <a:solidFill>
                   <a:srgbClr val="17364A"/>
                 </a:solidFill>
@@ -4106,13 +4136,16 @@
                 <a:ea typeface="Aptos" pitchFamily="34" charset="-122"/>
                 <a:cs typeface="Aptos" pitchFamily="34" charset="-120"/>
               </a:rPr>
-              <a:t>Generative AI requires staff who can review outputs and manage source accuracy.</a:t>
-            </a:r>
-            <a:endParaRPr lang="en-US" sz="1380" dirty="0"/>
-          </a:p>
-          <a:p>
-            <a:r>
-              <a:rPr lang="en-US" sz="1380" dirty="0">
+              <a:t>Generative AI requires staff who can review outputs and manage.</a:t>
+            </a:r>
+            <a:endParaRPr lang="en-US" sz="1220" dirty="0"/>
+          </a:p>
+          <a:p>
+            <a:pPr indent="0" marL="0">
+              <a:buNone/>
+            </a:pPr>
+            <a:r>
+              <a:rPr lang="en-US" sz="1220" dirty="0">
                 <a:solidFill>
                   <a:srgbClr val="17364A"/>
                 </a:solidFill>
@@ -4120,13 +4153,16 @@
                 <a:ea typeface="Aptos" pitchFamily="34" charset="-122"/>
                 <a:cs typeface="Aptos" pitchFamily="34" charset="-120"/>
               </a:rPr>
-              <a:t>Predictive analytics requires staff who can interpret performance and understand.</a:t>
-            </a:r>
-            <a:endParaRPr lang="en-US" sz="1380" dirty="0"/>
-          </a:p>
-          <a:p>
-            <a:r>
-              <a:rPr lang="en-US" sz="1380" dirty="0">
+              <a:t>Predictive analytics requires staff who can interpret performance.</a:t>
+            </a:r>
+            <a:endParaRPr lang="en-US" sz="1220" dirty="0"/>
+          </a:p>
+          <a:p>
+            <a:pPr indent="0" marL="0">
+              <a:buNone/>
+            </a:pPr>
+            <a:r>
+              <a:rPr lang="en-US" sz="1220" dirty="0">
                 <a:solidFill>
                   <a:srgbClr val="17364A"/>
                 </a:solidFill>
@@ -4134,9 +4170,9 @@
                 <a:ea typeface="Aptos" pitchFamily="34" charset="-122"/>
                 <a:cs typeface="Aptos" pitchFamily="34" charset="-120"/>
               </a:rPr>
-              <a:t>Agentic workflows require staff who can oversee permissions, actions, escalation, and.</a:t>
-            </a:r>
-            <a:endParaRPr lang="en-US" sz="1380" dirty="0"/>
+              <a:t>Agentic workflows require staff who can oversee permissions,.</a:t>
+            </a:r>
+            <a:endParaRPr lang="en-US" sz="1220" dirty="0"/>
           </a:p>
         </p:txBody>
       </p:sp>
@@ -4214,17 +4250,17 @@
         </p:nvSpPr>
         <p:spPr>
           <a:xfrm>
-            <a:off x="7799832" y="5001768"/>
-            <a:ext cx="3145536" cy="502920"/>
-          </a:xfrm>
-          <a:prstGeom prst="rect">
-            <a:avLst/>
-          </a:prstGeom>
-          <a:noFill/>
-          <a:ln/>
-        </p:spPr>
-        <p:txBody>
-          <a:bodyPr wrap="square" lIns="0" tIns="0" rIns="0" bIns="0" rtlCol="0" anchor="t">
+            <a:off x="7799832" y="4974336"/>
+            <a:ext cx="3145536" cy="576072"/>
+          </a:xfrm>
+          <a:prstGeom prst="rect">
+            <a:avLst/>
+          </a:prstGeom>
+          <a:noFill/>
+          <a:ln/>
+        </p:spPr>
+        <p:txBody>
+          <a:bodyPr wrap="square" lIns="254" tIns="254" rIns="254" bIns="254" rtlCol="0" anchor="t">
             <a:normAutofit/>
           </a:bodyPr>
           <a:lstStyle/>
@@ -4233,7 +4269,7 @@
               <a:buNone/>
             </a:pPr>
             <a:r>
-              <a:rPr lang="en-US" sz="1550" dirty="0">
+              <a:rPr lang="en-US" sz="1320" dirty="0">
                 <a:solidFill>
                   <a:srgbClr val="17364A"/>
                 </a:solidFill>
@@ -4241,9 +4277,9 @@
                 <a:ea typeface="Aptos" pitchFamily="34" charset="-122"/>
                 <a:cs typeface="Aptos" pitchFamily="34" charset="-120"/>
               </a:rPr>
-              <a:t>Use the concept to clarify workflow changes, dependencies, staffing, procurement requirements, training needs, and implementation checkpoints.</a:t>
-            </a:r>
-            <a:endParaRPr lang="en-US" sz="1550" dirty="0"/>
+              <a:t>Use the concept to clarify workflow changes, dependencies, staffing, procurement requirements, training needs, and.</a:t>
+            </a:r>
+            <a:endParaRPr lang="en-US" sz="1320" dirty="0"/>
           </a:p>
         </p:txBody>
       </p:sp>
@@ -4544,49 +4580,58 @@
           <a:ln/>
         </p:spPr>
         <p:txBody>
-          <a:bodyPr wrap="square" lIns="635" tIns="635" rIns="635" bIns="635" rtlCol="0" anchor="t">
+          <a:bodyPr wrap="square" lIns="1016" tIns="1016" rIns="1016" bIns="1016" rtlCol="0" anchor="t">
             <a:normAutofit/>
           </a:bodyPr>
           <a:lstStyle/>
           <a:p>
+            <a:pPr indent="0" marL="0">
+              <a:buNone/>
+            </a:pPr>
             <a:r>
               <a:rPr lang="en-US" sz="2100" dirty="0">
                 <a:solidFill>
-                  <a:srgbClr val="17364A"/>
-                </a:solidFill>
-                <a:latin typeface="Aptos" pitchFamily="34" charset="0"/>
-                <a:ea typeface="Aptos" pitchFamily="34" charset="-122"/>
-                <a:cs typeface="Aptos" pitchFamily="34" charset="-120"/>
-              </a:rPr>
-              <a:t>Which current or proposed AI use case in your agency raises this leadership or governance issue most.</a:t>
+                  <a:srgbClr val="003A63"/>
+                </a:solidFill>
+                <a:latin typeface="Aptos" pitchFamily="34" charset="0"/>
+                <a:ea typeface="Aptos" pitchFamily="34" charset="-122"/>
+                <a:cs typeface="Aptos" pitchFamily="34" charset="-120"/>
+              </a:rPr>
+              <a:t>• Which current or proposed AI use case in your agency raises this leadership or governance.</a:t>
             </a:r>
             <a:endParaRPr lang="en-US" sz="2100" dirty="0"/>
           </a:p>
           <a:p>
+            <a:pPr indent="0" marL="0">
+              <a:buNone/>
+            </a:pPr>
             <a:r>
               <a:rPr lang="en-US" sz="2100" dirty="0">
                 <a:solidFill>
-                  <a:srgbClr val="17364A"/>
-                </a:solidFill>
-                <a:latin typeface="Aptos" pitchFamily="34" charset="0"/>
-                <a:ea typeface="Aptos" pitchFamily="34" charset="-122"/>
-                <a:cs typeface="Aptos" pitchFamily="34" charset="-120"/>
-              </a:rPr>
-              <a:t>Who currently has authority to make decisions about this issue, and is that authority documented?</a:t>
+                  <a:srgbClr val="003A63"/>
+                </a:solidFill>
+                <a:latin typeface="Aptos" pitchFamily="34" charset="0"/>
+                <a:ea typeface="Aptos" pitchFamily="34" charset="-122"/>
+                <a:cs typeface="Aptos" pitchFamily="34" charset="-120"/>
+              </a:rPr>
+              <a:t>• Who currently has authority to make decisions about this issue, and is that authority.</a:t>
             </a:r>
             <a:endParaRPr lang="en-US" sz="2100" dirty="0"/>
           </a:p>
           <a:p>
+            <a:pPr indent="0" marL="0">
+              <a:buNone/>
+            </a:pPr>
             <a:r>
               <a:rPr lang="en-US" sz="2100" dirty="0">
                 <a:solidFill>
-                  <a:srgbClr val="17364A"/>
-                </a:solidFill>
-                <a:latin typeface="Aptos" pitchFamily="34" charset="0"/>
-                <a:ea typeface="Aptos" pitchFamily="34" charset="-122"/>
-                <a:cs typeface="Aptos" pitchFamily="34" charset="-120"/>
-              </a:rPr>
-              <a:t>What evidence would governance or leadership need before approving the use case?</a:t>
+                  <a:srgbClr val="003A63"/>
+                </a:solidFill>
+                <a:latin typeface="Aptos" pitchFamily="34" charset="0"/>
+                <a:ea typeface="Aptos" pitchFamily="34" charset="-122"/>
+                <a:cs typeface="Aptos" pitchFamily="34" charset="-120"/>
+              </a:rPr>
+              <a:t>• What evidence would governance or leadership need before approving the use case?</a:t>
             </a:r>
             <a:endParaRPr lang="en-US" sz="2100" dirty="0"/>
           </a:p>
@@ -4666,17 +4711,17 @@
         </p:nvSpPr>
         <p:spPr>
           <a:xfrm>
-            <a:off x="7799832" y="1828800"/>
-            <a:ext cx="3145536" cy="685800"/>
-          </a:xfrm>
-          <a:prstGeom prst="rect">
-            <a:avLst/>
-          </a:prstGeom>
-          <a:noFill/>
-          <a:ln/>
-        </p:spPr>
-        <p:txBody>
-          <a:bodyPr wrap="square" lIns="0" tIns="0" rIns="0" bIns="0" rtlCol="0" anchor="t">
+            <a:off x="7799832" y="1801368"/>
+            <a:ext cx="3145536" cy="758952"/>
+          </a:xfrm>
+          <a:prstGeom prst="rect">
+            <a:avLst/>
+          </a:prstGeom>
+          <a:noFill/>
+          <a:ln/>
+        </p:spPr>
+        <p:txBody>
+          <a:bodyPr wrap="square" lIns="254" tIns="254" rIns="254" bIns="254" rtlCol="0" anchor="t">
             <a:normAutofit/>
           </a:bodyPr>
           <a:lstStyle/>
@@ -4685,7 +4730,7 @@
               <a:buNone/>
             </a:pPr>
             <a:r>
-              <a:rPr lang="en-US" sz="1550" dirty="0">
+              <a:rPr lang="en-US" sz="1320" dirty="0">
                 <a:solidFill>
                   <a:srgbClr val="17364A"/>
                 </a:solidFill>
@@ -4695,7 +4740,7 @@
               </a:rPr>
               <a:t>Which current or proposed AI use case in your agency raises this leadership or governance issue most.</a:t>
             </a:r>
-            <a:endParaRPr lang="en-US" sz="1550" dirty="0"/>
+            <a:endParaRPr lang="en-US" sz="1320" dirty="0"/>
           </a:p>
         </p:txBody>
       </p:sp>
@@ -4783,13 +4828,16 @@
           <a:ln/>
         </p:spPr>
         <p:txBody>
-          <a:bodyPr wrap="square" lIns="254" tIns="254" rIns="254" bIns="254" rtlCol="0" anchor="t">
+          <a:bodyPr wrap="square" lIns="508" tIns="508" rIns="508" bIns="508" rtlCol="0" anchor="t">
             <a:normAutofit/>
           </a:bodyPr>
           <a:lstStyle/>
           <a:p>
-            <a:r>
-              <a:rPr lang="en-US" sz="1380" dirty="0">
+            <a:pPr indent="0" marL="0">
+              <a:buNone/>
+            </a:pPr>
+            <a:r>
+              <a:rPr lang="en-US" sz="1220" dirty="0">
                 <a:solidFill>
                   <a:srgbClr val="17364A"/>
                 </a:solidFill>
@@ -4797,13 +4845,16 @@
                 <a:ea typeface="Aptos" pitchFamily="34" charset="-122"/>
                 <a:cs typeface="Aptos" pitchFamily="34" charset="-120"/>
               </a:rPr>
-              <a:t>Which current or proposed AI use case in your agency raises this leadership or governance.</a:t>
-            </a:r>
-            <a:endParaRPr lang="en-US" sz="1380" dirty="0"/>
-          </a:p>
-          <a:p>
-            <a:r>
-              <a:rPr lang="en-US" sz="1380" dirty="0">
+              <a:t>Which current or proposed AI use case in your agency raises this.</a:t>
+            </a:r>
+            <a:endParaRPr lang="en-US" sz="1220" dirty="0"/>
+          </a:p>
+          <a:p>
+            <a:pPr indent="0" marL="0">
+              <a:buNone/>
+            </a:pPr>
+            <a:r>
+              <a:rPr lang="en-US" sz="1220" dirty="0">
                 <a:solidFill>
                   <a:srgbClr val="17364A"/>
                 </a:solidFill>
@@ -4811,13 +4862,16 @@
                 <a:ea typeface="Aptos" pitchFamily="34" charset="-122"/>
                 <a:cs typeface="Aptos" pitchFamily="34" charset="-120"/>
               </a:rPr>
-              <a:t>Who currently has authority to make decisions about this issue, and is that authority.</a:t>
-            </a:r>
-            <a:endParaRPr lang="en-US" sz="1380" dirty="0"/>
-          </a:p>
-          <a:p>
-            <a:r>
-              <a:rPr lang="en-US" sz="1380" dirty="0">
+              <a:t>Who currently has authority to make decisions about this issue,.</a:t>
+            </a:r>
+            <a:endParaRPr lang="en-US" sz="1220" dirty="0"/>
+          </a:p>
+          <a:p>
+            <a:pPr indent="0" marL="0">
+              <a:buNone/>
+            </a:pPr>
+            <a:r>
+              <a:rPr lang="en-US" sz="1220" dirty="0">
                 <a:solidFill>
                   <a:srgbClr val="17364A"/>
                 </a:solidFill>
@@ -4825,9 +4879,9 @@
                 <a:ea typeface="Aptos" pitchFamily="34" charset="-122"/>
                 <a:cs typeface="Aptos" pitchFamily="34" charset="-120"/>
               </a:rPr>
-              <a:t>What evidence would governance or leadership need before approving the use case?</a:t>
-            </a:r>
-            <a:endParaRPr lang="en-US" sz="1380" dirty="0"/>
+              <a:t>What evidence would governance or leadership need before approving.</a:t>
+            </a:r>
+            <a:endParaRPr lang="en-US" sz="1220" dirty="0"/>
           </a:p>
         </p:txBody>
       </p:sp>
@@ -4905,17 +4959,17 @@
         </p:nvSpPr>
         <p:spPr>
           <a:xfrm>
-            <a:off x="7799832" y="5001768"/>
-            <a:ext cx="3145536" cy="502920"/>
-          </a:xfrm>
-          <a:prstGeom prst="rect">
-            <a:avLst/>
-          </a:prstGeom>
-          <a:noFill/>
-          <a:ln/>
-        </p:spPr>
-        <p:txBody>
-          <a:bodyPr wrap="square" lIns="0" tIns="0" rIns="0" bIns="0" rtlCol="0" anchor="t">
+            <a:off x="7799832" y="4974336"/>
+            <a:ext cx="3145536" cy="576072"/>
+          </a:xfrm>
+          <a:prstGeom prst="rect">
+            <a:avLst/>
+          </a:prstGeom>
+          <a:noFill/>
+          <a:ln/>
+        </p:spPr>
+        <p:txBody>
+          <a:bodyPr wrap="square" lIns="254" tIns="254" rIns="254" bIns="254" rtlCol="0" anchor="t">
             <a:normAutofit/>
           </a:bodyPr>
           <a:lstStyle/>
@@ -4924,7 +4978,7 @@
               <a:buNone/>
             </a:pPr>
             <a:r>
-              <a:rPr lang="en-US" sz="1550" dirty="0">
+              <a:rPr lang="en-US" sz="1320" dirty="0">
                 <a:solidFill>
                   <a:srgbClr val="17364A"/>
                 </a:solidFill>
@@ -4932,9 +4986,9 @@
                 <a:ea typeface="Aptos" pitchFamily="34" charset="-122"/>
                 <a:cs typeface="Aptos" pitchFamily="34" charset="-120"/>
               </a:rPr>
-              <a:t>Connect the concept to public health purpose, responsible use, required safeguards, documentation, and the next action a department should take.</a:t>
-            </a:r>
-            <a:endParaRPr lang="en-US" sz="1550" dirty="0"/>
+              <a:t>Connect the concept to public health purpose, responsible use, required safeguards, documentation, and the next action a.</a:t>
+            </a:r>
+            <a:endParaRPr lang="en-US" sz="1320" dirty="0"/>
           </a:p>
         </p:txBody>
       </p:sp>
@@ -5235,35 +5289,41 @@
           <a:ln/>
         </p:spPr>
         <p:txBody>
-          <a:bodyPr wrap="square" lIns="635" tIns="635" rIns="635" bIns="635" rtlCol="0" anchor="t">
+          <a:bodyPr wrap="square" lIns="1016" tIns="1016" rIns="1016" bIns="1016" rtlCol="0" anchor="t">
             <a:normAutofit/>
           </a:bodyPr>
           <a:lstStyle/>
           <a:p>
+            <a:pPr indent="0" marL="0">
+              <a:buNone/>
+            </a:pPr>
             <a:r>
               <a:rPr lang="en-US" sz="2100" dirty="0">
                 <a:solidFill>
-                  <a:srgbClr val="17364A"/>
-                </a:solidFill>
-                <a:latin typeface="Aptos" pitchFamily="34" charset="0"/>
-                <a:ea typeface="Aptos" pitchFamily="34" charset="-122"/>
-                <a:cs typeface="Aptos" pitchFamily="34" charset="-120"/>
-              </a:rPr>
-              <a:t>Which staff, partners, or communities would be affected if this issue were handled poorly?</a:t>
+                  <a:srgbClr val="003A63"/>
+                </a:solidFill>
+                <a:latin typeface="Aptos" pitchFamily="34" charset="0"/>
+                <a:ea typeface="Aptos" pitchFamily="34" charset="-122"/>
+                <a:cs typeface="Aptos" pitchFamily="34" charset="-120"/>
+              </a:rPr>
+              <a:t>• Which staff, partners, or communities would be affected if this issue were handled poorly?</a:t>
             </a:r>
             <a:endParaRPr lang="en-US" sz="2100" dirty="0"/>
           </a:p>
           <a:p>
+            <a:pPr indent="0" marL="0">
+              <a:buNone/>
+            </a:pPr>
             <a:r>
               <a:rPr lang="en-US" sz="2100" dirty="0">
                 <a:solidFill>
-                  <a:srgbClr val="17364A"/>
-                </a:solidFill>
-                <a:latin typeface="Aptos" pitchFamily="34" charset="0"/>
-                <a:ea typeface="Aptos" pitchFamily="34" charset="-122"/>
-                <a:cs typeface="Aptos" pitchFamily="34" charset="-120"/>
-              </a:rPr>
-              <a:t>What policy, process, or artifact should be created or updated after this module?</a:t>
+                  <a:srgbClr val="003A63"/>
+                </a:solidFill>
+                <a:latin typeface="Aptos" pitchFamily="34" charset="0"/>
+                <a:ea typeface="Aptos" pitchFamily="34" charset="-122"/>
+                <a:cs typeface="Aptos" pitchFamily="34" charset="-120"/>
+              </a:rPr>
+              <a:t>• What policy, process, or artifact should be created or updated after this module?</a:t>
             </a:r>
             <a:endParaRPr lang="en-US" sz="2100" dirty="0"/>
           </a:p>
@@ -5343,17 +5403,17 @@
         </p:nvSpPr>
         <p:spPr>
           <a:xfrm>
-            <a:off x="7799832" y="1828800"/>
-            <a:ext cx="3145536" cy="685800"/>
-          </a:xfrm>
-          <a:prstGeom prst="rect">
-            <a:avLst/>
-          </a:prstGeom>
-          <a:noFill/>
-          <a:ln/>
-        </p:spPr>
-        <p:txBody>
-          <a:bodyPr wrap="square" lIns="0" tIns="0" rIns="0" bIns="0" rtlCol="0" anchor="t">
+            <a:off x="7799832" y="1801368"/>
+            <a:ext cx="3145536" cy="758952"/>
+          </a:xfrm>
+          <a:prstGeom prst="rect">
+            <a:avLst/>
+          </a:prstGeom>
+          <a:noFill/>
+          <a:ln/>
+        </p:spPr>
+        <p:txBody>
+          <a:bodyPr wrap="square" lIns="254" tIns="254" rIns="254" bIns="254" rtlCol="0" anchor="t">
             <a:normAutofit/>
           </a:bodyPr>
           <a:lstStyle/>
@@ -5362,7 +5422,7 @@
               <a:buNone/>
             </a:pPr>
             <a:r>
-              <a:rPr lang="en-US" sz="1550" dirty="0">
+              <a:rPr lang="en-US" sz="1320" dirty="0">
                 <a:solidFill>
                   <a:srgbClr val="17364A"/>
                 </a:solidFill>
@@ -5372,7 +5432,7 @@
               </a:rPr>
               <a:t>Which staff, partners, or communities would be affected if this issue were handled poorly?</a:t>
             </a:r>
-            <a:endParaRPr lang="en-US" sz="1550" dirty="0"/>
+            <a:endParaRPr lang="en-US" sz="1320" dirty="0"/>
           </a:p>
         </p:txBody>
       </p:sp>
@@ -5460,13 +5520,16 @@
           <a:ln/>
         </p:spPr>
         <p:txBody>
-          <a:bodyPr wrap="square" lIns="254" tIns="254" rIns="254" bIns="254" rtlCol="0" anchor="t">
+          <a:bodyPr wrap="square" lIns="508" tIns="508" rIns="508" bIns="508" rtlCol="0" anchor="t">
             <a:normAutofit/>
           </a:bodyPr>
           <a:lstStyle/>
           <a:p>
-            <a:r>
-              <a:rPr lang="en-US" sz="1380" dirty="0">
+            <a:pPr indent="0" marL="0">
+              <a:buNone/>
+            </a:pPr>
+            <a:r>
+              <a:rPr lang="en-US" sz="1220" dirty="0">
                 <a:solidFill>
                   <a:srgbClr val="17364A"/>
                 </a:solidFill>
@@ -5474,13 +5537,16 @@
                 <a:ea typeface="Aptos" pitchFamily="34" charset="-122"/>
                 <a:cs typeface="Aptos" pitchFamily="34" charset="-120"/>
               </a:rPr>
-              <a:t>Which staff, partners, or communities would be affected if this issue were handled poorly?</a:t>
-            </a:r>
-            <a:endParaRPr lang="en-US" sz="1380" dirty="0"/>
-          </a:p>
-          <a:p>
-            <a:r>
-              <a:rPr lang="en-US" sz="1380" dirty="0">
+              <a:t>Which staff, partners, or communities would be affected if this.</a:t>
+            </a:r>
+            <a:endParaRPr lang="en-US" sz="1220" dirty="0"/>
+          </a:p>
+          <a:p>
+            <a:pPr indent="0" marL="0">
+              <a:buNone/>
+            </a:pPr>
+            <a:r>
+              <a:rPr lang="en-US" sz="1220" dirty="0">
                 <a:solidFill>
                   <a:srgbClr val="17364A"/>
                 </a:solidFill>
@@ -5488,9 +5554,9 @@
                 <a:ea typeface="Aptos" pitchFamily="34" charset="-122"/>
                 <a:cs typeface="Aptos" pitchFamily="34" charset="-120"/>
               </a:rPr>
-              <a:t>What policy, process, or artifact should be created or updated after this module?</a:t>
-            </a:r>
-            <a:endParaRPr lang="en-US" sz="1380" dirty="0"/>
+              <a:t>What policy, process, or artifact should be created or updated.</a:t>
+            </a:r>
+            <a:endParaRPr lang="en-US" sz="1220" dirty="0"/>
           </a:p>
         </p:txBody>
       </p:sp>
@@ -5568,17 +5634,17 @@
         </p:nvSpPr>
         <p:spPr>
           <a:xfrm>
-            <a:off x="7799832" y="5001768"/>
-            <a:ext cx="3145536" cy="502920"/>
-          </a:xfrm>
-          <a:prstGeom prst="rect">
-            <a:avLst/>
-          </a:prstGeom>
-          <a:noFill/>
-          <a:ln/>
-        </p:spPr>
-        <p:txBody>
-          <a:bodyPr wrap="square" lIns="0" tIns="0" rIns="0" bIns="0" rtlCol="0" anchor="t">
+            <a:off x="7799832" y="4974336"/>
+            <a:ext cx="3145536" cy="576072"/>
+          </a:xfrm>
+          <a:prstGeom prst="rect">
+            <a:avLst/>
+          </a:prstGeom>
+          <a:noFill/>
+          <a:ln/>
+        </p:spPr>
+        <p:txBody>
+          <a:bodyPr wrap="square" lIns="254" tIns="254" rIns="254" bIns="254" rtlCol="0" anchor="t">
             <a:normAutofit/>
           </a:bodyPr>
           <a:lstStyle/>
@@ -5587,7 +5653,7 @@
               <a:buNone/>
             </a:pPr>
             <a:r>
-              <a:rPr lang="en-US" sz="1550" dirty="0">
+              <a:rPr lang="en-US" sz="1320" dirty="0">
                 <a:solidFill>
                   <a:srgbClr val="17364A"/>
                 </a:solidFill>
@@ -5595,9 +5661,9 @@
                 <a:ea typeface="Aptos" pitchFamily="34" charset="-122"/>
                 <a:cs typeface="Aptos" pitchFamily="34" charset="-120"/>
               </a:rPr>
-              <a:t>Connect the concept to public health purpose, responsible use, required safeguards, documentation, and the next action a department should take.</a:t>
-            </a:r>
-            <a:endParaRPr lang="en-US" sz="1550" dirty="0"/>
+              <a:t>Connect the concept to public health purpose, responsible use, required safeguards, documentation, and the next action a.</a:t>
+            </a:r>
+            <a:endParaRPr lang="en-US" sz="1320" dirty="0"/>
           </a:p>
         </p:txBody>
       </p:sp>
@@ -5898,35 +5964,41 @@
           <a:ln/>
         </p:spPr>
         <p:txBody>
-          <a:bodyPr wrap="square" lIns="635" tIns="635" rIns="635" bIns="635" rtlCol="0" anchor="t">
+          <a:bodyPr wrap="square" lIns="1016" tIns="1016" rIns="1016" bIns="1016" rtlCol="0" anchor="t">
             <a:normAutofit/>
           </a:bodyPr>
           <a:lstStyle/>
           <a:p>
+            <a:pPr indent="0" marL="0">
+              <a:buNone/>
+            </a:pPr>
             <a:r>
               <a:rPr lang="en-US" sz="2100" dirty="0">
                 <a:solidFill>
-                  <a:srgbClr val="17364A"/>
-                </a:solidFill>
-                <a:latin typeface="Aptos" pitchFamily="34" charset="0"/>
-                <a:ea typeface="Aptos" pitchFamily="34" charset="-122"/>
-                <a:cs typeface="Aptos" pitchFamily="34" charset="-120"/>
-              </a:rPr>
-              <a:t>Create a role-based AI workforce readiness plan.</a:t>
+                  <a:srgbClr val="003A63"/>
+                </a:solidFill>
+                <a:latin typeface="Aptos" pitchFamily="34" charset="0"/>
+                <a:ea typeface="Aptos" pitchFamily="34" charset="-122"/>
+                <a:cs typeface="Aptos" pitchFamily="34" charset="-120"/>
+              </a:rPr>
+              <a:t>• Create a role-based AI workforce readiness plan.</a:t>
             </a:r>
             <a:endParaRPr lang="en-US" sz="2100" dirty="0"/>
           </a:p>
           <a:p>
+            <a:pPr indent="0" marL="0">
+              <a:buNone/>
+            </a:pPr>
             <a:r>
               <a:rPr lang="en-US" sz="2100" dirty="0">
                 <a:solidFill>
-                  <a:srgbClr val="17364A"/>
-                </a:solidFill>
-                <a:latin typeface="Aptos" pitchFamily="34" charset="0"/>
-                <a:ea typeface="Aptos" pitchFamily="34" charset="-122"/>
-                <a:cs typeface="Aptos" pitchFamily="34" charset="-120"/>
-              </a:rPr>
-              <a:t>Include role groups, competencies, required training, responsibilities, decision authority, and support.</a:t>
+                  <a:srgbClr val="003A63"/>
+                </a:solidFill>
+                <a:latin typeface="Aptos" pitchFamily="34" charset="0"/>
+                <a:ea typeface="Aptos" pitchFamily="34" charset="-122"/>
+                <a:cs typeface="Aptos" pitchFamily="34" charset="-120"/>
+              </a:rPr>
+              <a:t>• Include role groups, competencies, required training, responsibilities, decision authority,.</a:t>
             </a:r>
             <a:endParaRPr lang="en-US" sz="2100" dirty="0"/>
           </a:p>
@@ -6006,17 +6078,17 @@
         </p:nvSpPr>
         <p:spPr>
           <a:xfrm>
-            <a:off x="7799832" y="1828800"/>
-            <a:ext cx="3145536" cy="685800"/>
-          </a:xfrm>
-          <a:prstGeom prst="rect">
-            <a:avLst/>
-          </a:prstGeom>
-          <a:noFill/>
-          <a:ln/>
-        </p:spPr>
-        <p:txBody>
-          <a:bodyPr wrap="square" lIns="0" tIns="0" rIns="0" bIns="0" rtlCol="0" anchor="t">
+            <a:off x="7799832" y="1801368"/>
+            <a:ext cx="3145536" cy="758952"/>
+          </a:xfrm>
+          <a:prstGeom prst="rect">
+            <a:avLst/>
+          </a:prstGeom>
+          <a:noFill/>
+          <a:ln/>
+        </p:spPr>
+        <p:txBody>
+          <a:bodyPr wrap="square" lIns="254" tIns="254" rIns="254" bIns="254" rtlCol="0" anchor="t">
             <a:normAutofit/>
           </a:bodyPr>
           <a:lstStyle/>
@@ -6025,7 +6097,7 @@
               <a:buNone/>
             </a:pPr>
             <a:r>
-              <a:rPr lang="en-US" sz="1550" dirty="0">
+              <a:rPr lang="en-US" sz="1320" dirty="0">
                 <a:solidFill>
                   <a:srgbClr val="17364A"/>
                 </a:solidFill>
@@ -6035,7 +6107,7 @@
               </a:rPr>
               <a:t>Create a role-based AI workforce readiness plan.</a:t>
             </a:r>
-            <a:endParaRPr lang="en-US" sz="1550" dirty="0"/>
+            <a:endParaRPr lang="en-US" sz="1320" dirty="0"/>
           </a:p>
         </p:txBody>
       </p:sp>
@@ -6123,13 +6195,16 @@
           <a:ln/>
         </p:spPr>
         <p:txBody>
-          <a:bodyPr wrap="square" lIns="254" tIns="254" rIns="254" bIns="254" rtlCol="0" anchor="t">
+          <a:bodyPr wrap="square" lIns="508" tIns="508" rIns="508" bIns="508" rtlCol="0" anchor="t">
             <a:normAutofit/>
           </a:bodyPr>
           <a:lstStyle/>
           <a:p>
-            <a:r>
-              <a:rPr lang="en-US" sz="1380" dirty="0">
+            <a:pPr indent="0" marL="0">
+              <a:buNone/>
+            </a:pPr>
+            <a:r>
+              <a:rPr lang="en-US" sz="1220" dirty="0">
                 <a:solidFill>
                   <a:srgbClr val="17364A"/>
                 </a:solidFill>
@@ -6139,11 +6214,14 @@
               </a:rPr>
               <a:t>Create a role-based AI workforce readiness plan.</a:t>
             </a:r>
-            <a:endParaRPr lang="en-US" sz="1380" dirty="0"/>
-          </a:p>
-          <a:p>
-            <a:r>
-              <a:rPr lang="en-US" sz="1380" dirty="0">
+            <a:endParaRPr lang="en-US" sz="1220" dirty="0"/>
+          </a:p>
+          <a:p>
+            <a:pPr indent="0" marL="0">
+              <a:buNone/>
+            </a:pPr>
+            <a:r>
+              <a:rPr lang="en-US" sz="1220" dirty="0">
                 <a:solidFill>
                   <a:srgbClr val="17364A"/>
                 </a:solidFill>
@@ -6151,9 +6229,9 @@
                 <a:ea typeface="Aptos" pitchFamily="34" charset="-122"/>
                 <a:cs typeface="Aptos" pitchFamily="34" charset="-120"/>
               </a:rPr>
-              <a:t>Include role groups, competencies, required training, responsibilities, decision.</a:t>
-            </a:r>
-            <a:endParaRPr lang="en-US" sz="1380" dirty="0"/>
+              <a:t>Include role groups, competencies, required training,.</a:t>
+            </a:r>
+            <a:endParaRPr lang="en-US" sz="1220" dirty="0"/>
           </a:p>
         </p:txBody>
       </p:sp>
@@ -6231,17 +6309,17 @@
         </p:nvSpPr>
         <p:spPr>
           <a:xfrm>
-            <a:off x="7799832" y="5001768"/>
-            <a:ext cx="3145536" cy="502920"/>
-          </a:xfrm>
-          <a:prstGeom prst="rect">
-            <a:avLst/>
-          </a:prstGeom>
-          <a:noFill/>
-          <a:ln/>
-        </p:spPr>
-        <p:txBody>
-          <a:bodyPr wrap="square" lIns="0" tIns="0" rIns="0" bIns="0" rtlCol="0" anchor="t">
+            <a:off x="7799832" y="4974336"/>
+            <a:ext cx="3145536" cy="576072"/>
+          </a:xfrm>
+          <a:prstGeom prst="rect">
+            <a:avLst/>
+          </a:prstGeom>
+          <a:noFill/>
+          <a:ln/>
+        </p:spPr>
+        <p:txBody>
+          <a:bodyPr wrap="square" lIns="254" tIns="254" rIns="254" bIns="254" rtlCol="0" anchor="t">
             <a:normAutofit/>
           </a:bodyPr>
           <a:lstStyle/>
@@ -6250,7 +6328,7 @@
               <a:buNone/>
             </a:pPr>
             <a:r>
-              <a:rPr lang="en-US" sz="1550" dirty="0">
+              <a:rPr lang="en-US" sz="1320" dirty="0">
                 <a:solidFill>
                   <a:srgbClr val="17364A"/>
                 </a:solidFill>
@@ -6258,9 +6336,9 @@
                 <a:ea typeface="Aptos" pitchFamily="34" charset="-122"/>
                 <a:cs typeface="Aptos" pitchFamily="34" charset="-120"/>
               </a:rPr>
-              <a:t>Use the assignment to test whether you can explain the concept, apply it to a realistic public health situation, and identify what would need review before the work moves forward.</a:t>
-            </a:r>
-            <a:endParaRPr lang="en-US" sz="1550" dirty="0"/>
+              <a:t>Use the assignment to test whether you can explain the concept, apply it to a realistic public health situation, and.</a:t>
+            </a:r>
+            <a:endParaRPr lang="en-US" sz="1320" dirty="0"/>
           </a:p>
         </p:txBody>
       </p:sp>
@@ -6561,49 +6639,58 @@
           <a:ln/>
         </p:spPr>
         <p:txBody>
-          <a:bodyPr wrap="square" lIns="635" tIns="635" rIns="635" bIns="635" rtlCol="0" anchor="t">
+          <a:bodyPr wrap="square" lIns="1016" tIns="1016" rIns="1016" bIns="1016" rtlCol="0" anchor="t">
             <a:normAutofit/>
           </a:bodyPr>
           <a:lstStyle/>
           <a:p>
+            <a:pPr indent="0" marL="0">
+              <a:buNone/>
+            </a:pPr>
             <a:r>
               <a:rPr lang="en-US" sz="2100" dirty="0">
                 <a:solidFill>
-                  <a:srgbClr val="17364A"/>
-                </a:solidFill>
-                <a:latin typeface="Aptos" pitchFamily="34" charset="0"/>
-                <a:ea typeface="Aptos" pitchFamily="34" charset="-122"/>
-                <a:cs typeface="Aptos" pitchFamily="34" charset="-120"/>
-              </a:rPr>
-              <a:t>Choose a real or realistic public health AI use case.</a:t>
+                  <a:srgbClr val="003A63"/>
+                </a:solidFill>
+                <a:latin typeface="Aptos" pitchFamily="34" charset="0"/>
+                <a:ea typeface="Aptos" pitchFamily="34" charset="-122"/>
+                <a:cs typeface="Aptos" pitchFamily="34" charset="-120"/>
+              </a:rPr>
+              <a:t>• Choose a real or realistic public health AI use case.</a:t>
             </a:r>
             <a:endParaRPr lang="en-US" sz="2100" dirty="0"/>
           </a:p>
           <a:p>
+            <a:pPr indent="0" marL="0">
+              <a:buNone/>
+            </a:pPr>
             <a:r>
               <a:rPr lang="en-US" sz="2100" dirty="0">
                 <a:solidFill>
-                  <a:srgbClr val="17364A"/>
-                </a:solidFill>
-                <a:latin typeface="Aptos" pitchFamily="34" charset="0"/>
-                <a:ea typeface="Aptos" pitchFamily="34" charset="-122"/>
-                <a:cs typeface="Aptos" pitchFamily="34" charset="-120"/>
-              </a:rPr>
-              <a:t>Document assumptions, unresolved questions, and which agency roles would need to review the artifact.</a:t>
+                  <a:srgbClr val="003A63"/>
+                </a:solidFill>
+                <a:latin typeface="Aptos" pitchFamily="34" charset="0"/>
+                <a:ea typeface="Aptos" pitchFamily="34" charset="-122"/>
+                <a:cs typeface="Aptos" pitchFamily="34" charset="-120"/>
+              </a:rPr>
+              <a:t>• Document assumptions, unresolved questions, and which agency roles would need to review the.</a:t>
             </a:r>
             <a:endParaRPr lang="en-US" sz="2100" dirty="0"/>
           </a:p>
           <a:p>
+            <a:pPr indent="0" marL="0">
+              <a:buNone/>
+            </a:pPr>
             <a:r>
               <a:rPr lang="en-US" sz="2100" dirty="0">
                 <a:solidFill>
-                  <a:srgbClr val="17364A"/>
-                </a:solidFill>
-                <a:latin typeface="Aptos" pitchFamily="34" charset="0"/>
-                <a:ea typeface="Aptos" pitchFamily="34" charset="-122"/>
-                <a:cs typeface="Aptos" pitchFamily="34" charset="-120"/>
-              </a:rPr>
-              <a:t>The exercise should produce a work product that could support governance review, leadership discussion,.</a:t>
+                  <a:srgbClr val="003A63"/>
+                </a:solidFill>
+                <a:latin typeface="Aptos" pitchFamily="34" charset="0"/>
+                <a:ea typeface="Aptos" pitchFamily="34" charset="-122"/>
+                <a:cs typeface="Aptos" pitchFamily="34" charset="-120"/>
+              </a:rPr>
+              <a:t>• The exercise should produce a work product that could support governance review, leadership.</a:t>
             </a:r>
             <a:endParaRPr lang="en-US" sz="2100" dirty="0"/>
           </a:p>
@@ -6683,17 +6770,17 @@
         </p:nvSpPr>
         <p:spPr>
           <a:xfrm>
-            <a:off x="7799832" y="1828800"/>
-            <a:ext cx="3145536" cy="685800"/>
-          </a:xfrm>
-          <a:prstGeom prst="rect">
-            <a:avLst/>
-          </a:prstGeom>
-          <a:noFill/>
-          <a:ln/>
-        </p:spPr>
-        <p:txBody>
-          <a:bodyPr wrap="square" lIns="0" tIns="0" rIns="0" bIns="0" rtlCol="0" anchor="t">
+            <a:off x="7799832" y="1801368"/>
+            <a:ext cx="3145536" cy="758952"/>
+          </a:xfrm>
+          <a:prstGeom prst="rect">
+            <a:avLst/>
+          </a:prstGeom>
+          <a:noFill/>
+          <a:ln/>
+        </p:spPr>
+        <p:txBody>
+          <a:bodyPr wrap="square" lIns="254" tIns="254" rIns="254" bIns="254" rtlCol="0" anchor="t">
             <a:normAutofit/>
           </a:bodyPr>
           <a:lstStyle/>
@@ -6702,7 +6789,7 @@
               <a:buNone/>
             </a:pPr>
             <a:r>
-              <a:rPr lang="en-US" sz="1550" dirty="0">
+              <a:rPr lang="en-US" sz="1320" dirty="0">
                 <a:solidFill>
                   <a:srgbClr val="17364A"/>
                 </a:solidFill>
@@ -6712,7 +6799,7 @@
               </a:rPr>
               <a:t>Choose a real or realistic public health AI use case.</a:t>
             </a:r>
-            <a:endParaRPr lang="en-US" sz="1550" dirty="0"/>
+            <a:endParaRPr lang="en-US" sz="1320" dirty="0"/>
           </a:p>
         </p:txBody>
       </p:sp>
@@ -6800,13 +6887,16 @@
           <a:ln/>
         </p:spPr>
         <p:txBody>
-          <a:bodyPr wrap="square" lIns="254" tIns="254" rIns="254" bIns="254" rtlCol="0" anchor="t">
+          <a:bodyPr wrap="square" lIns="508" tIns="508" rIns="508" bIns="508" rtlCol="0" anchor="t">
             <a:normAutofit/>
           </a:bodyPr>
           <a:lstStyle/>
           <a:p>
-            <a:r>
-              <a:rPr lang="en-US" sz="1380" dirty="0">
+            <a:pPr indent="0" marL="0">
+              <a:buNone/>
+            </a:pPr>
+            <a:r>
+              <a:rPr lang="en-US" sz="1220" dirty="0">
                 <a:solidFill>
                   <a:srgbClr val="17364A"/>
                 </a:solidFill>
@@ -6814,13 +6904,16 @@
                 <a:ea typeface="Aptos" pitchFamily="34" charset="-122"/>
                 <a:cs typeface="Aptos" pitchFamily="34" charset="-120"/>
               </a:rPr>
-              <a:t>Document assumptions, unresolved questions, and which agency roles would need to review.</a:t>
-            </a:r>
-            <a:endParaRPr lang="en-US" sz="1380" dirty="0"/>
-          </a:p>
-          <a:p>
-            <a:r>
-              <a:rPr lang="en-US" sz="1380" dirty="0">
+              <a:t>Document assumptions, unresolved questions, and which agency roles.</a:t>
+            </a:r>
+            <a:endParaRPr lang="en-US" sz="1220" dirty="0"/>
+          </a:p>
+          <a:p>
+            <a:pPr indent="0" marL="0">
+              <a:buNone/>
+            </a:pPr>
+            <a:r>
+              <a:rPr lang="en-US" sz="1220" dirty="0">
                 <a:solidFill>
                   <a:srgbClr val="17364A"/>
                 </a:solidFill>
@@ -6828,9 +6921,9 @@
                 <a:ea typeface="Aptos" pitchFamily="34" charset="-122"/>
                 <a:cs typeface="Aptos" pitchFamily="34" charset="-120"/>
               </a:rPr>
-              <a:t>The exercise should produce a work product that could support governance review,.</a:t>
-            </a:r>
-            <a:endParaRPr lang="en-US" sz="1380" dirty="0"/>
+              <a:t>The exercise should produce a work product that could support.</a:t>
+            </a:r>
+            <a:endParaRPr lang="en-US" sz="1220" dirty="0"/>
           </a:p>
         </p:txBody>
       </p:sp>
@@ -6908,17 +7001,17 @@
         </p:nvSpPr>
         <p:spPr>
           <a:xfrm>
-            <a:off x="7799832" y="5001768"/>
-            <a:ext cx="3145536" cy="502920"/>
-          </a:xfrm>
-          <a:prstGeom prst="rect">
-            <a:avLst/>
-          </a:prstGeom>
-          <a:noFill/>
-          <a:ln/>
-        </p:spPr>
-        <p:txBody>
-          <a:bodyPr wrap="square" lIns="0" tIns="0" rIns="0" bIns="0" rtlCol="0" anchor="t">
+            <a:off x="7799832" y="4974336"/>
+            <a:ext cx="3145536" cy="576072"/>
+          </a:xfrm>
+          <a:prstGeom prst="rect">
+            <a:avLst/>
+          </a:prstGeom>
+          <a:noFill/>
+          <a:ln/>
+        </p:spPr>
+        <p:txBody>
+          <a:bodyPr wrap="square" lIns="254" tIns="254" rIns="254" bIns="254" rtlCol="0" anchor="t">
             <a:normAutofit/>
           </a:bodyPr>
           <a:lstStyle/>
@@ -6927,7 +7020,7 @@
               <a:buNone/>
             </a:pPr>
             <a:r>
-              <a:rPr lang="en-US" sz="1550" dirty="0">
+              <a:rPr lang="en-US" sz="1320" dirty="0">
                 <a:solidFill>
                   <a:srgbClr val="17364A"/>
                 </a:solidFill>
@@ -6935,9 +7028,9 @@
                 <a:ea typeface="Aptos" pitchFamily="34" charset="-122"/>
                 <a:cs typeface="Aptos" pitchFamily="34" charset="-120"/>
               </a:rPr>
-              <a:t>Connect the concept to public health purpose, responsible use, required safeguards, documentation, and the next action a department should take.</a:t>
-            </a:r>
-            <a:endParaRPr lang="en-US" sz="1550" dirty="0"/>
+              <a:t>Connect the concept to public health purpose, responsible use, required safeguards, documentation, and the next action a.</a:t>
+            </a:r>
+            <a:endParaRPr lang="en-US" sz="1320" dirty="0"/>
           </a:p>
         </p:txBody>
       </p:sp>
@@ -7238,21 +7331,24 @@
           <a:ln/>
         </p:spPr>
         <p:txBody>
-          <a:bodyPr wrap="square" lIns="635" tIns="635" rIns="635" bIns="635" rtlCol="0" anchor="t">
+          <a:bodyPr wrap="square" lIns="1016" tIns="1016" rIns="1016" bIns="1016" rtlCol="0" anchor="t">
             <a:normAutofit/>
           </a:bodyPr>
           <a:lstStyle/>
           <a:p>
+            <a:pPr indent="0" marL="0">
+              <a:buNone/>
+            </a:pPr>
             <a:r>
               <a:rPr lang="en-US" sz="2100" dirty="0">
                 <a:solidFill>
-                  <a:srgbClr val="17364A"/>
-                </a:solidFill>
-                <a:latin typeface="Aptos" pitchFamily="34" charset="0"/>
-                <a:ea typeface="Aptos" pitchFamily="34" charset="-122"/>
-                <a:cs typeface="Aptos" pitchFamily="34" charset="-120"/>
-              </a:rPr>
-              <a:t>Workforce readiness plan; role-based competency matrix; training assignment matrix; AI bridge role.</a:t>
+                  <a:srgbClr val="003A63"/>
+                </a:solidFill>
+                <a:latin typeface="Aptos" pitchFamily="34" charset="0"/>
+                <a:ea typeface="Aptos" pitchFamily="34" charset="-122"/>
+                <a:cs typeface="Aptos" pitchFamily="34" charset="-120"/>
+              </a:rPr>
+              <a:t>• Workforce readiness plan; role-based competency matrix; training assignment matrix; AI bridge.</a:t>
             </a:r>
             <a:endParaRPr lang="en-US" sz="2100" dirty="0"/>
           </a:p>
@@ -7332,17 +7428,17 @@
         </p:nvSpPr>
         <p:spPr>
           <a:xfrm>
-            <a:off x="7799832" y="1828800"/>
-            <a:ext cx="3145536" cy="685800"/>
-          </a:xfrm>
-          <a:prstGeom prst="rect">
-            <a:avLst/>
-          </a:prstGeom>
-          <a:noFill/>
-          <a:ln/>
-        </p:spPr>
-        <p:txBody>
-          <a:bodyPr wrap="square" lIns="0" tIns="0" rIns="0" bIns="0" rtlCol="0" anchor="t">
+            <a:off x="7799832" y="1801368"/>
+            <a:ext cx="3145536" cy="758952"/>
+          </a:xfrm>
+          <a:prstGeom prst="rect">
+            <a:avLst/>
+          </a:prstGeom>
+          <a:noFill/>
+          <a:ln/>
+        </p:spPr>
+        <p:txBody>
+          <a:bodyPr wrap="square" lIns="254" tIns="254" rIns="254" bIns="254" rtlCol="0" anchor="t">
             <a:normAutofit/>
           </a:bodyPr>
           <a:lstStyle/>
@@ -7351,7 +7447,7 @@
               <a:buNone/>
             </a:pPr>
             <a:r>
-              <a:rPr lang="en-US" sz="1550" dirty="0">
+              <a:rPr lang="en-US" sz="1320" dirty="0">
                 <a:solidFill>
                   <a:srgbClr val="17364A"/>
                 </a:solidFill>
@@ -7361,7 +7457,7 @@
               </a:rPr>
               <a:t>Workforce readiness plan; role-based competency matrix; training assignment matrix; AI bridge role.</a:t>
             </a:r>
-            <a:endParaRPr lang="en-US" sz="1550" dirty="0"/>
+            <a:endParaRPr lang="en-US" sz="1320" dirty="0"/>
           </a:p>
         </p:txBody>
       </p:sp>
@@ -7449,13 +7545,16 @@
           <a:ln/>
         </p:spPr>
         <p:txBody>
-          <a:bodyPr wrap="square" lIns="254" tIns="254" rIns="254" bIns="254" rtlCol="0" anchor="t">
+          <a:bodyPr wrap="square" lIns="508" tIns="508" rIns="508" bIns="508" rtlCol="0" anchor="t">
             <a:normAutofit/>
           </a:bodyPr>
           <a:lstStyle/>
           <a:p>
-            <a:r>
-              <a:rPr lang="en-US" sz="1380" dirty="0">
+            <a:pPr indent="0" marL="0">
+              <a:buNone/>
+            </a:pPr>
+            <a:r>
+              <a:rPr lang="en-US" sz="1220" dirty="0">
                 <a:solidFill>
                   <a:srgbClr val="17364A"/>
                 </a:solidFill>
@@ -7463,9 +7562,9 @@
                 <a:ea typeface="Aptos" pitchFamily="34" charset="-122"/>
                 <a:cs typeface="Aptos" pitchFamily="34" charset="-120"/>
               </a:rPr>
-              <a:t>Workforce readiness plan; role-based competency matrix; training assignment matrix; AI.</a:t>
-            </a:r>
-            <a:endParaRPr lang="en-US" sz="1380" dirty="0"/>
+              <a:t>Workforce readiness plan; role-based competency matrix; training.</a:t>
+            </a:r>
+            <a:endParaRPr lang="en-US" sz="1220" dirty="0"/>
           </a:p>
         </p:txBody>
       </p:sp>
@@ -7543,17 +7642,17 @@
         </p:nvSpPr>
         <p:spPr>
           <a:xfrm>
-            <a:off x="7799832" y="5001768"/>
-            <a:ext cx="3145536" cy="502920"/>
-          </a:xfrm>
-          <a:prstGeom prst="rect">
-            <a:avLst/>
-          </a:prstGeom>
-          <a:noFill/>
-          <a:ln/>
-        </p:spPr>
-        <p:txBody>
-          <a:bodyPr wrap="square" lIns="0" tIns="0" rIns="0" bIns="0" rtlCol="0" anchor="t">
+            <a:off x="7799832" y="4974336"/>
+            <a:ext cx="3145536" cy="576072"/>
+          </a:xfrm>
+          <a:prstGeom prst="rect">
+            <a:avLst/>
+          </a:prstGeom>
+          <a:noFill/>
+          <a:ln/>
+        </p:spPr>
+        <p:txBody>
+          <a:bodyPr wrap="square" lIns="254" tIns="254" rIns="254" bIns="254" rtlCol="0" anchor="t">
             <a:normAutofit/>
           </a:bodyPr>
           <a:lstStyle/>
@@ -7562,7 +7661,7 @@
               <a:buNone/>
             </a:pPr>
             <a:r>
-              <a:rPr lang="en-US" sz="1550" dirty="0">
+              <a:rPr lang="en-US" sz="1320" dirty="0">
                 <a:solidFill>
                   <a:srgbClr val="17364A"/>
                 </a:solidFill>
@@ -7570,9 +7669,9 @@
                 <a:ea typeface="Aptos" pitchFamily="34" charset="-122"/>
                 <a:cs typeface="Aptos" pitchFamily="34" charset="-120"/>
               </a:rPr>
-              <a:t>Connect the concept to public health purpose, responsible use, required safeguards, documentation, and the next action a department should take.</a:t>
-            </a:r>
-            <a:endParaRPr lang="en-US" sz="1550" dirty="0"/>
+              <a:t>Connect the concept to public health purpose, responsible use, required safeguards, documentation, and the next action a.</a:t>
+            </a:r>
+            <a:endParaRPr lang="en-US" sz="1320" dirty="0"/>
           </a:p>
         </p:txBody>
       </p:sp>
@@ -7873,21 +7972,24 @@
           <a:ln/>
         </p:spPr>
         <p:txBody>
-          <a:bodyPr wrap="square" lIns="635" tIns="635" rIns="635" bIns="635" rtlCol="0" anchor="t">
+          <a:bodyPr wrap="square" lIns="1016" tIns="1016" rIns="1016" bIns="1016" rtlCol="0" anchor="t">
             <a:normAutofit/>
           </a:bodyPr>
           <a:lstStyle/>
           <a:p>
+            <a:pPr indent="0" marL="0">
+              <a:buNone/>
+            </a:pPr>
             <a:r>
               <a:rPr lang="en-US" sz="2100" dirty="0">
                 <a:solidFill>
-                  <a:srgbClr val="17364A"/>
-                </a:solidFill>
-                <a:latin typeface="Aptos" pitchFamily="34" charset="0"/>
-                <a:ea typeface="Aptos" pitchFamily="34" charset="-122"/>
-                <a:cs typeface="Aptos" pitchFamily="34" charset="-120"/>
-              </a:rPr>
-              <a:t>Workforce readiness plan; role-based competency matrix; training assignment matrix; AI bridge role.</a:t>
+                  <a:srgbClr val="003A63"/>
+                </a:solidFill>
+                <a:latin typeface="Aptos" pitchFamily="34" charset="0"/>
+                <a:ea typeface="Aptos" pitchFamily="34" charset="-122"/>
+                <a:cs typeface="Aptos" pitchFamily="34" charset="-120"/>
+              </a:rPr>
+              <a:t>• Workforce readiness plan; role-based competency matrix; training assignment matrix; AI bridge.</a:t>
             </a:r>
             <a:endParaRPr lang="en-US" sz="2100" dirty="0"/>
           </a:p>
@@ -7967,17 +8069,17 @@
         </p:nvSpPr>
         <p:spPr>
           <a:xfrm>
-            <a:off x="7799832" y="1828800"/>
-            <a:ext cx="3145536" cy="685800"/>
-          </a:xfrm>
-          <a:prstGeom prst="rect">
-            <a:avLst/>
-          </a:prstGeom>
-          <a:noFill/>
-          <a:ln/>
-        </p:spPr>
-        <p:txBody>
-          <a:bodyPr wrap="square" lIns="0" tIns="0" rIns="0" bIns="0" rtlCol="0" anchor="t">
+            <a:off x="7799832" y="1801368"/>
+            <a:ext cx="3145536" cy="758952"/>
+          </a:xfrm>
+          <a:prstGeom prst="rect">
+            <a:avLst/>
+          </a:prstGeom>
+          <a:noFill/>
+          <a:ln/>
+        </p:spPr>
+        <p:txBody>
+          <a:bodyPr wrap="square" lIns="254" tIns="254" rIns="254" bIns="254" rtlCol="0" anchor="t">
             <a:normAutofit/>
           </a:bodyPr>
           <a:lstStyle/>
@@ -7986,7 +8088,7 @@
               <a:buNone/>
             </a:pPr>
             <a:r>
-              <a:rPr lang="en-US" sz="1550" dirty="0">
+              <a:rPr lang="en-US" sz="1320" dirty="0">
                 <a:solidFill>
                   <a:srgbClr val="17364A"/>
                 </a:solidFill>
@@ -7996,7 +8098,7 @@
               </a:rPr>
               <a:t>Workforce readiness plan; role-based competency matrix; training assignment matrix; AI bridge role.</a:t>
             </a:r>
-            <a:endParaRPr lang="en-US" sz="1550" dirty="0"/>
+            <a:endParaRPr lang="en-US" sz="1320" dirty="0"/>
           </a:p>
         </p:txBody>
       </p:sp>
@@ -8084,13 +8186,16 @@
           <a:ln/>
         </p:spPr>
         <p:txBody>
-          <a:bodyPr wrap="square" lIns="254" tIns="254" rIns="254" bIns="254" rtlCol="0" anchor="t">
+          <a:bodyPr wrap="square" lIns="508" tIns="508" rIns="508" bIns="508" rtlCol="0" anchor="t">
             <a:normAutofit/>
           </a:bodyPr>
           <a:lstStyle/>
           <a:p>
-            <a:r>
-              <a:rPr lang="en-US" sz="1380" dirty="0">
+            <a:pPr indent="0" marL="0">
+              <a:buNone/>
+            </a:pPr>
+            <a:r>
+              <a:rPr lang="en-US" sz="1220" dirty="0">
                 <a:solidFill>
                   <a:srgbClr val="17364A"/>
                 </a:solidFill>
@@ -8098,9 +8203,9 @@
                 <a:ea typeface="Aptos" pitchFamily="34" charset="-122"/>
                 <a:cs typeface="Aptos" pitchFamily="34" charset="-120"/>
               </a:rPr>
-              <a:t>Workforce readiness plan; role-based competency matrix; training assignment matrix; AI.</a:t>
-            </a:r>
-            <a:endParaRPr lang="en-US" sz="1380" dirty="0"/>
+              <a:t>Workforce readiness plan; role-based competency matrix; training.</a:t>
+            </a:r>
+            <a:endParaRPr lang="en-US" sz="1220" dirty="0"/>
           </a:p>
         </p:txBody>
       </p:sp>
@@ -8178,17 +8283,17 @@
         </p:nvSpPr>
         <p:spPr>
           <a:xfrm>
-            <a:off x="7799832" y="5001768"/>
-            <a:ext cx="3145536" cy="502920"/>
-          </a:xfrm>
-          <a:prstGeom prst="rect">
-            <a:avLst/>
-          </a:prstGeom>
-          <a:noFill/>
-          <a:ln/>
-        </p:spPr>
-        <p:txBody>
-          <a:bodyPr wrap="square" lIns="0" tIns="0" rIns="0" bIns="0" rtlCol="0" anchor="t">
+            <a:off x="7799832" y="4974336"/>
+            <a:ext cx="3145536" cy="576072"/>
+          </a:xfrm>
+          <a:prstGeom prst="rect">
+            <a:avLst/>
+          </a:prstGeom>
+          <a:noFill/>
+          <a:ln/>
+        </p:spPr>
+        <p:txBody>
+          <a:bodyPr wrap="square" lIns="254" tIns="254" rIns="254" bIns="254" rtlCol="0" anchor="t">
             <a:normAutofit/>
           </a:bodyPr>
           <a:lstStyle/>
@@ -8197,7 +8302,7 @@
               <a:buNone/>
             </a:pPr>
             <a:r>
-              <a:rPr lang="en-US" sz="1550" dirty="0">
+              <a:rPr lang="en-US" sz="1320" dirty="0">
                 <a:solidFill>
                   <a:srgbClr val="17364A"/>
                 </a:solidFill>
@@ -8205,9 +8310,9 @@
                 <a:ea typeface="Aptos" pitchFamily="34" charset="-122"/>
                 <a:cs typeface="Aptos" pitchFamily="34" charset="-120"/>
               </a:rPr>
-              <a:t>Use the assignment to test whether you can explain the concept, apply it to a realistic public health situation, and identify what would need review before the work moves forward.</a:t>
-            </a:r>
-            <a:endParaRPr lang="en-US" sz="1550" dirty="0"/>
+              <a:t>Use the assignment to test whether you can explain the concept, apply it to a realistic public health situation, and.</a:t>
+            </a:r>
+            <a:endParaRPr lang="en-US" sz="1320" dirty="0"/>
           </a:p>
         </p:txBody>
       </p:sp>
@@ -8508,49 +8613,58 @@
           <a:ln/>
         </p:spPr>
         <p:txBody>
-          <a:bodyPr wrap="square" lIns="635" tIns="635" rIns="635" bIns="635" rtlCol="0" anchor="t">
+          <a:bodyPr wrap="square" lIns="1016" tIns="1016" rIns="1016" bIns="1016" rtlCol="0" anchor="t">
             <a:normAutofit/>
           </a:bodyPr>
           <a:lstStyle/>
           <a:p>
+            <a:pPr indent="0" marL="0">
+              <a:buNone/>
+            </a:pPr>
             <a:r>
               <a:rPr lang="en-US" sz="2100" dirty="0">
                 <a:solidFill>
-                  <a:srgbClr val="17364A"/>
-                </a:solidFill>
-                <a:latin typeface="Aptos" pitchFamily="34" charset="0"/>
-                <a:ea typeface="Aptos" pitchFamily="34" charset="-122"/>
-                <a:cs typeface="Aptos" pitchFamily="34" charset="-120"/>
-              </a:rPr>
-              <a:t>1. What is the strongest reason this module topic belongs in AI leadership and governance training?</a:t>
+                  <a:srgbClr val="003A63"/>
+                </a:solidFill>
+                <a:latin typeface="Aptos" pitchFamily="34" charset="0"/>
+                <a:ea typeface="Aptos" pitchFamily="34" charset="-122"/>
+                <a:cs typeface="Aptos" pitchFamily="34" charset="-120"/>
+              </a:rPr>
+              <a:t>• 1. What is the strongest reason this module topic belongs in AI leadership and governance.</a:t>
             </a:r>
             <a:endParaRPr lang="en-US" sz="2100" dirty="0"/>
           </a:p>
           <a:p>
+            <a:pPr indent="0" marL="0">
+              <a:buNone/>
+            </a:pPr>
             <a:r>
               <a:rPr lang="en-US" sz="2100" dirty="0">
                 <a:solidFill>
-                  <a:srgbClr val="17364A"/>
-                </a:solidFill>
-                <a:latin typeface="Aptos" pitchFamily="34" charset="0"/>
-                <a:ea typeface="Aptos" pitchFamily="34" charset="-122"/>
-                <a:cs typeface="Aptos" pitchFamily="34" charset="-120"/>
-              </a:rPr>
-              <a:t>2. Which practice best supports accountable public health AI governance?</a:t>
+                  <a:srgbClr val="003A63"/>
+                </a:solidFill>
+                <a:latin typeface="Aptos" pitchFamily="34" charset="0"/>
+                <a:ea typeface="Aptos" pitchFamily="34" charset="-122"/>
+                <a:cs typeface="Aptos" pitchFamily="34" charset="-120"/>
+              </a:rPr>
+              <a:t>• 2. Which practice best supports accountable public health AI governance?</a:t>
             </a:r>
             <a:endParaRPr lang="en-US" sz="2100" dirty="0"/>
           </a:p>
           <a:p>
+            <a:pPr indent="0" marL="0">
+              <a:buNone/>
+            </a:pPr>
             <a:r>
               <a:rPr lang="en-US" sz="2100" dirty="0">
                 <a:solidFill>
-                  <a:srgbClr val="17364A"/>
-                </a:solidFill>
-                <a:latin typeface="Aptos" pitchFamily="34" charset="0"/>
-                <a:ea typeface="Aptos" pitchFamily="34" charset="-122"/>
-                <a:cs typeface="Aptos" pitchFamily="34" charset="-120"/>
-              </a:rPr>
-              <a:t>3. When should an AI use case be escalated for leadership or governance review?</a:t>
+                  <a:srgbClr val="003A63"/>
+                </a:solidFill>
+                <a:latin typeface="Aptos" pitchFamily="34" charset="0"/>
+                <a:ea typeface="Aptos" pitchFamily="34" charset="-122"/>
+                <a:cs typeface="Aptos" pitchFamily="34" charset="-120"/>
+              </a:rPr>
+              <a:t>• 3. When should an AI use case be escalated for leadership or governance review?</a:t>
             </a:r>
             <a:endParaRPr lang="en-US" sz="2100" dirty="0"/>
           </a:p>
@@ -8630,17 +8744,17 @@
         </p:nvSpPr>
         <p:spPr>
           <a:xfrm>
-            <a:off x="7799832" y="1828800"/>
-            <a:ext cx="3145536" cy="685800"/>
-          </a:xfrm>
-          <a:prstGeom prst="rect">
-            <a:avLst/>
-          </a:prstGeom>
-          <a:noFill/>
-          <a:ln/>
-        </p:spPr>
-        <p:txBody>
-          <a:bodyPr wrap="square" lIns="0" tIns="0" rIns="0" bIns="0" rtlCol="0" anchor="t">
+            <a:off x="7799832" y="1801368"/>
+            <a:ext cx="3145536" cy="758952"/>
+          </a:xfrm>
+          <a:prstGeom prst="rect">
+            <a:avLst/>
+          </a:prstGeom>
+          <a:noFill/>
+          <a:ln/>
+        </p:spPr>
+        <p:txBody>
+          <a:bodyPr wrap="square" lIns="254" tIns="254" rIns="254" bIns="254" rtlCol="0" anchor="t">
             <a:normAutofit/>
           </a:bodyPr>
           <a:lstStyle/>
@@ -8649,7 +8763,7 @@
               <a:buNone/>
             </a:pPr>
             <a:r>
-              <a:rPr lang="en-US" sz="1550" dirty="0">
+              <a:rPr lang="en-US" sz="1320" dirty="0">
                 <a:solidFill>
                   <a:srgbClr val="17364A"/>
                 </a:solidFill>
@@ -8659,7 +8773,7 @@
               </a:rPr>
               <a:t>1. What is the strongest reason this module topic belongs in AI leadership and governance training?</a:t>
             </a:r>
-            <a:endParaRPr lang="en-US" sz="1550" dirty="0"/>
+            <a:endParaRPr lang="en-US" sz="1320" dirty="0"/>
           </a:p>
         </p:txBody>
       </p:sp>
@@ -8747,13 +8861,16 @@
           <a:ln/>
         </p:spPr>
         <p:txBody>
-          <a:bodyPr wrap="square" lIns="254" tIns="254" rIns="254" bIns="254" rtlCol="0" anchor="t">
+          <a:bodyPr wrap="square" lIns="508" tIns="508" rIns="508" bIns="508" rtlCol="0" anchor="t">
             <a:normAutofit/>
           </a:bodyPr>
           <a:lstStyle/>
           <a:p>
-            <a:r>
-              <a:rPr lang="en-US" sz="1380" dirty="0">
+            <a:pPr indent="0" marL="0">
+              <a:buNone/>
+            </a:pPr>
+            <a:r>
+              <a:rPr lang="en-US" sz="1220" dirty="0">
                 <a:solidFill>
                   <a:srgbClr val="17364A"/>
                 </a:solidFill>
@@ -8763,11 +8880,14 @@
               </a:rPr>
               <a:t>1.</a:t>
             </a:r>
-            <a:endParaRPr lang="en-US" sz="1380" dirty="0"/>
-          </a:p>
-          <a:p>
-            <a:r>
-              <a:rPr lang="en-US" sz="1380" dirty="0">
+            <a:endParaRPr lang="en-US" sz="1220" dirty="0"/>
+          </a:p>
+          <a:p>
+            <a:pPr indent="0" marL="0">
+              <a:buNone/>
+            </a:pPr>
+            <a:r>
+              <a:rPr lang="en-US" sz="1220" dirty="0">
                 <a:solidFill>
                   <a:srgbClr val="17364A"/>
                 </a:solidFill>
@@ -8775,13 +8895,16 @@
                 <a:ea typeface="Aptos" pitchFamily="34" charset="-122"/>
                 <a:cs typeface="Aptos" pitchFamily="34" charset="-120"/>
               </a:rPr>
-              <a:t>What is the strongest reason this module topic belongs in AI leadership and governance.</a:t>
-            </a:r>
-            <a:endParaRPr lang="en-US" sz="1380" dirty="0"/>
-          </a:p>
-          <a:p>
-            <a:r>
-              <a:rPr lang="en-US" sz="1380" dirty="0">
+              <a:t>What is the strongest reason this module topic belongs in AI.</a:t>
+            </a:r>
+            <a:endParaRPr lang="en-US" sz="1220" dirty="0"/>
+          </a:p>
+          <a:p>
+            <a:pPr indent="0" marL="0">
+              <a:buNone/>
+            </a:pPr>
+            <a:r>
+              <a:rPr lang="en-US" sz="1220" dirty="0">
                 <a:solidFill>
                   <a:srgbClr val="17364A"/>
                 </a:solidFill>
@@ -8791,7 +8914,7 @@
               </a:rPr>
               <a:t>2.</a:t>
             </a:r>
-            <a:endParaRPr lang="en-US" sz="1380" dirty="0"/>
+            <a:endParaRPr lang="en-US" sz="1220" dirty="0"/>
           </a:p>
         </p:txBody>
       </p:sp>
@@ -8869,17 +8992,17 @@
         </p:nvSpPr>
         <p:spPr>
           <a:xfrm>
-            <a:off x="7799832" y="5001768"/>
-            <a:ext cx="3145536" cy="502920"/>
-          </a:xfrm>
-          <a:prstGeom prst="rect">
-            <a:avLst/>
-          </a:prstGeom>
-          <a:noFill/>
-          <a:ln/>
-        </p:spPr>
-        <p:txBody>
-          <a:bodyPr wrap="square" lIns="0" tIns="0" rIns="0" bIns="0" rtlCol="0" anchor="t">
+            <a:off x="7799832" y="4974336"/>
+            <a:ext cx="3145536" cy="576072"/>
+          </a:xfrm>
+          <a:prstGeom prst="rect">
+            <a:avLst/>
+          </a:prstGeom>
+          <a:noFill/>
+          <a:ln/>
+        </p:spPr>
+        <p:txBody>
+          <a:bodyPr wrap="square" lIns="254" tIns="254" rIns="254" bIns="254" rtlCol="0" anchor="t">
             <a:normAutofit/>
           </a:bodyPr>
           <a:lstStyle/>
@@ -8888,7 +9011,7 @@
               <a:buNone/>
             </a:pPr>
             <a:r>
-              <a:rPr lang="en-US" sz="1550" dirty="0">
+              <a:rPr lang="en-US" sz="1320" dirty="0">
                 <a:solidFill>
                   <a:srgbClr val="17364A"/>
                 </a:solidFill>
@@ -8896,9 +9019,9 @@
                 <a:ea typeface="Aptos" pitchFamily="34" charset="-122"/>
                 <a:cs typeface="Aptos" pitchFamily="34" charset="-120"/>
               </a:rPr>
-              <a:t>Use the assignment to test whether you can explain the concept, apply it to a realistic public health situation, and identify what would need review before the work moves forward.</a:t>
-            </a:r>
-            <a:endParaRPr lang="en-US" sz="1550" dirty="0"/>
+              <a:t>Use the assignment to test whether you can explain the concept, apply it to a realistic public health situation, and.</a:t>
+            </a:r>
+            <a:endParaRPr lang="en-US" sz="1320" dirty="0"/>
           </a:p>
         </p:txBody>
       </p:sp>
@@ -9199,49 +9322,58 @@
           <a:ln/>
         </p:spPr>
         <p:txBody>
-          <a:bodyPr wrap="square" lIns="635" tIns="635" rIns="635" bIns="635" rtlCol="0" anchor="t">
+          <a:bodyPr wrap="square" lIns="1016" tIns="1016" rIns="1016" bIns="1016" rtlCol="0" anchor="t">
             <a:normAutofit/>
           </a:bodyPr>
           <a:lstStyle/>
           <a:p>
+            <a:pPr indent="0" marL="0">
+              <a:buNone/>
+            </a:pPr>
             <a:r>
               <a:rPr lang="en-US" sz="2100" dirty="0">
                 <a:solidFill>
-                  <a:srgbClr val="17364A"/>
-                </a:solidFill>
-                <a:latin typeface="Aptos" pitchFamily="34" charset="0"/>
-                <a:ea typeface="Aptos" pitchFamily="34" charset="-122"/>
-                <a:cs typeface="Aptos" pitchFamily="34" charset="-120"/>
-              </a:rPr>
-              <a:t>NIST Artificial Intelligence Risk Management Framework (AI RMF 1.0):.</a:t>
+                  <a:srgbClr val="003A63"/>
+                </a:solidFill>
+                <a:latin typeface="Aptos" pitchFamily="34" charset="0"/>
+                <a:ea typeface="Aptos" pitchFamily="34" charset="-122"/>
+                <a:cs typeface="Aptos" pitchFamily="34" charset="-120"/>
+              </a:rPr>
+              <a:t>• NIST Artificial Intelligence Risk Management Framework (AI RMF 1.0):.</a:t>
             </a:r>
             <a:endParaRPr lang="en-US" sz="2100" dirty="0"/>
           </a:p>
           <a:p>
+            <a:pPr indent="0" marL="0">
+              <a:buNone/>
+            </a:pPr>
             <a:r>
               <a:rPr lang="en-US" sz="2100" dirty="0">
                 <a:solidFill>
-                  <a:srgbClr val="17364A"/>
-                </a:solidFill>
-                <a:latin typeface="Aptos" pitchFamily="34" charset="0"/>
-                <a:ea typeface="Aptos" pitchFamily="34" charset="-122"/>
-                <a:cs typeface="Aptos" pitchFamily="34" charset="-120"/>
-              </a:rPr>
-              <a:t>NIST Generative AI Profile:.</a:t>
+                  <a:srgbClr val="003A63"/>
+                </a:solidFill>
+                <a:latin typeface="Aptos" pitchFamily="34" charset="0"/>
+                <a:ea typeface="Aptos" pitchFamily="34" charset="-122"/>
+                <a:cs typeface="Aptos" pitchFamily="34" charset="-120"/>
+              </a:rPr>
+              <a:t>• NIST Generative AI Profile:.</a:t>
             </a:r>
             <a:endParaRPr lang="en-US" sz="2100" dirty="0"/>
           </a:p>
           <a:p>
+            <a:pPr indent="0" marL="0">
+              <a:buNone/>
+            </a:pPr>
             <a:r>
               <a:rPr lang="en-US" sz="2100" dirty="0">
                 <a:solidFill>
-                  <a:srgbClr val="17364A"/>
-                </a:solidFill>
-                <a:latin typeface="Aptos" pitchFamily="34" charset="0"/>
-                <a:ea typeface="Aptos" pitchFamily="34" charset="-122"/>
-                <a:cs typeface="Aptos" pitchFamily="34" charset="-120"/>
-              </a:rPr>
-              <a:t>NIST Privacy Framework</a:t>
+                  <a:srgbClr val="003A63"/>
+                </a:solidFill>
+                <a:latin typeface="Aptos" pitchFamily="34" charset="0"/>
+                <a:ea typeface="Aptos" pitchFamily="34" charset="-122"/>
+                <a:cs typeface="Aptos" pitchFamily="34" charset="-120"/>
+              </a:rPr>
+              <a:t>• NIST Privacy Framework</a:t>
             </a:r>
             <a:endParaRPr lang="en-US" sz="2100" dirty="0"/>
           </a:p>
@@ -9321,17 +9453,17 @@
         </p:nvSpPr>
         <p:spPr>
           <a:xfrm>
-            <a:off x="7799832" y="1828800"/>
-            <a:ext cx="3145536" cy="685800"/>
-          </a:xfrm>
-          <a:prstGeom prst="rect">
-            <a:avLst/>
-          </a:prstGeom>
-          <a:noFill/>
-          <a:ln/>
-        </p:spPr>
-        <p:txBody>
-          <a:bodyPr wrap="square" lIns="0" tIns="0" rIns="0" bIns="0" rtlCol="0" anchor="t">
+            <a:off x="7799832" y="1801368"/>
+            <a:ext cx="3145536" cy="758952"/>
+          </a:xfrm>
+          <a:prstGeom prst="rect">
+            <a:avLst/>
+          </a:prstGeom>
+          <a:noFill/>
+          <a:ln/>
+        </p:spPr>
+        <p:txBody>
+          <a:bodyPr wrap="square" lIns="254" tIns="254" rIns="254" bIns="254" rtlCol="0" anchor="t">
             <a:normAutofit/>
           </a:bodyPr>
           <a:lstStyle/>
@@ -9340,7 +9472,7 @@
               <a:buNone/>
             </a:pPr>
             <a:r>
-              <a:rPr lang="en-US" sz="1550" dirty="0">
+              <a:rPr lang="en-US" sz="1320" dirty="0">
                 <a:solidFill>
                   <a:srgbClr val="17364A"/>
                 </a:solidFill>
@@ -9350,7 +9482,7 @@
               </a:rPr>
               <a:t>NIST Artificial Intelligence Risk Management Framework (AI RMF 1.0):.</a:t>
             </a:r>
-            <a:endParaRPr lang="en-US" sz="1550" dirty="0"/>
+            <a:endParaRPr lang="en-US" sz="1320" dirty="0"/>
           </a:p>
         </p:txBody>
       </p:sp>
@@ -9438,13 +9570,16 @@
           <a:ln/>
         </p:spPr>
         <p:txBody>
-          <a:bodyPr wrap="square" lIns="254" tIns="254" rIns="254" bIns="254" rtlCol="0" anchor="t">
+          <a:bodyPr wrap="square" lIns="508" tIns="508" rIns="508" bIns="508" rtlCol="0" anchor="t">
             <a:normAutofit/>
           </a:bodyPr>
           <a:lstStyle/>
           <a:p>
-            <a:r>
-              <a:rPr lang="en-US" sz="1380" dirty="0">
+            <a:pPr indent="0" marL="0">
+              <a:buNone/>
+            </a:pPr>
+            <a:r>
+              <a:rPr lang="en-US" sz="1220" dirty="0">
                 <a:solidFill>
                   <a:srgbClr val="17364A"/>
                 </a:solidFill>
@@ -9452,13 +9587,16 @@
                 <a:ea typeface="Aptos" pitchFamily="34" charset="-122"/>
                 <a:cs typeface="Aptos" pitchFamily="34" charset="-120"/>
               </a:rPr>
-              <a:t>NIST Artificial Intelligence Risk Management Framework (AI RMF 1.0):.</a:t>
-            </a:r>
-            <a:endParaRPr lang="en-US" sz="1380" dirty="0"/>
-          </a:p>
-          <a:p>
-            <a:r>
-              <a:rPr lang="en-US" sz="1380" dirty="0">
+              <a:t>NIST Artificial Intelligence Risk Management Framework (AI RMF.</a:t>
+            </a:r>
+            <a:endParaRPr lang="en-US" sz="1220" dirty="0"/>
+          </a:p>
+          <a:p>
+            <a:pPr indent="0" marL="0">
+              <a:buNone/>
+            </a:pPr>
+            <a:r>
+              <a:rPr lang="en-US" sz="1220" dirty="0">
                 <a:solidFill>
                   <a:srgbClr val="17364A"/>
                 </a:solidFill>
@@ -9468,11 +9606,14 @@
               </a:rPr>
               <a:t>CDC Public Health Data Strategy and Data Modernization resources:.</a:t>
             </a:r>
-            <a:endParaRPr lang="en-US" sz="1380" dirty="0"/>
-          </a:p>
-          <a:p>
-            <a:r>
-              <a:rPr lang="en-US" sz="1380" dirty="0">
+            <a:endParaRPr lang="en-US" sz="1220" dirty="0"/>
+          </a:p>
+          <a:p>
+            <a:pPr indent="0" marL="0">
+              <a:buNone/>
+            </a:pPr>
+            <a:r>
+              <a:rPr lang="en-US" sz="1220" dirty="0">
                 <a:solidFill>
                   <a:srgbClr val="17364A"/>
                 </a:solidFill>
@@ -9482,7 +9623,7 @@
               </a:rPr>
               <a:t>WHO Ethics and Governance of Artificial Intelligence for Health:.</a:t>
             </a:r>
-            <a:endParaRPr lang="en-US" sz="1380" dirty="0"/>
+            <a:endParaRPr lang="en-US" sz="1220" dirty="0"/>
           </a:p>
         </p:txBody>
       </p:sp>
@@ -9560,17 +9701,17 @@
         </p:nvSpPr>
         <p:spPr>
           <a:xfrm>
-            <a:off x="7799832" y="5001768"/>
-            <a:ext cx="3145536" cy="502920"/>
-          </a:xfrm>
-          <a:prstGeom prst="rect">
-            <a:avLst/>
-          </a:prstGeom>
-          <a:noFill/>
-          <a:ln/>
-        </p:spPr>
-        <p:txBody>
-          <a:bodyPr wrap="square" lIns="0" tIns="0" rIns="0" bIns="0" rtlCol="0" anchor="t">
+            <a:off x="7799832" y="4974336"/>
+            <a:ext cx="3145536" cy="576072"/>
+          </a:xfrm>
+          <a:prstGeom prst="rect">
+            <a:avLst/>
+          </a:prstGeom>
+          <a:noFill/>
+          <a:ln/>
+        </p:spPr>
+        <p:txBody>
+          <a:bodyPr wrap="square" lIns="254" tIns="254" rIns="254" bIns="254" rtlCol="0" anchor="t">
             <a:normAutofit/>
           </a:bodyPr>
           <a:lstStyle/>
@@ -9579,7 +9720,7 @@
               <a:buNone/>
             </a:pPr>
             <a:r>
-              <a:rPr lang="en-US" sz="1550" dirty="0">
+              <a:rPr lang="en-US" sz="1320" dirty="0">
                 <a:solidFill>
                   <a:srgbClr val="17364A"/>
                 </a:solidFill>
@@ -9587,9 +9728,9 @@
                 <a:ea typeface="Aptos" pitchFamily="34" charset="-122"/>
                 <a:cs typeface="Aptos" pitchFamily="34" charset="-120"/>
               </a:rPr>
-              <a:t>Connect the concept to public health purpose, responsible use, required safeguards, documentation, and the next action a department should take.</a:t>
-            </a:r>
-            <a:endParaRPr lang="en-US" sz="1550" dirty="0"/>
+              <a:t>Connect the concept to public health purpose, responsible use, required safeguards, documentation, and the next action a.</a:t>
+            </a:r>
+            <a:endParaRPr lang="en-US" sz="1320" dirty="0"/>
           </a:p>
         </p:txBody>
       </p:sp>
@@ -9890,49 +10031,58 @@
           <a:ln/>
         </p:spPr>
         <p:txBody>
-          <a:bodyPr wrap="square" lIns="635" tIns="635" rIns="635" bIns="635" rtlCol="0" anchor="t">
+          <a:bodyPr wrap="square" lIns="1016" tIns="1016" rIns="1016" bIns="1016" rtlCol="0" anchor="t">
             <a:normAutofit/>
           </a:bodyPr>
           <a:lstStyle/>
           <a:p>
+            <a:pPr indent="0" marL="0">
+              <a:buNone/>
+            </a:pPr>
             <a:r>
               <a:rPr lang="en-US" sz="2100" dirty="0">
                 <a:solidFill>
-                  <a:srgbClr val="17364A"/>
-                </a:solidFill>
-                <a:latin typeface="Aptos" pitchFamily="34" charset="0"/>
-                <a:ea typeface="Aptos" pitchFamily="34" charset="-122"/>
-                <a:cs typeface="Aptos" pitchFamily="34" charset="-120"/>
-              </a:rPr>
-              <a:t>AI changes the skills, roles, and collaboration patterns needed in public health agencies.</a:t>
+                  <a:srgbClr val="003A63"/>
+                </a:solidFill>
+                <a:latin typeface="Aptos" pitchFamily="34" charset="0"/>
+                <a:ea typeface="Aptos" pitchFamily="34" charset="-122"/>
+                <a:cs typeface="Aptos" pitchFamily="34" charset="-120"/>
+              </a:rPr>
+              <a:t>• AI changes the skills, roles, and collaboration patterns needed in public health agencies.</a:t>
             </a:r>
             <a:endParaRPr lang="en-US" sz="2100" dirty="0"/>
           </a:p>
           <a:p>
+            <a:pPr indent="0" marL="0">
+              <a:buNone/>
+            </a:pPr>
             <a:r>
               <a:rPr lang="en-US" sz="2100" dirty="0">
                 <a:solidFill>
-                  <a:srgbClr val="17364A"/>
-                </a:solidFill>
-                <a:latin typeface="Aptos" pitchFamily="34" charset="0"/>
-                <a:ea typeface="Aptos" pitchFamily="34" charset="-122"/>
-                <a:cs typeface="Aptos" pitchFamily="34" charset="-120"/>
-              </a:rPr>
-              <a:t>It does not eliminate the need for public health expertise.</a:t>
+                  <a:srgbClr val="003A63"/>
+                </a:solidFill>
+                <a:latin typeface="Aptos" pitchFamily="34" charset="0"/>
+                <a:ea typeface="Aptos" pitchFamily="34" charset="-122"/>
+                <a:cs typeface="Aptos" pitchFamily="34" charset="-120"/>
+              </a:rPr>
+              <a:t>• It does not eliminate the need for public health expertise.</a:t>
             </a:r>
             <a:endParaRPr lang="en-US" sz="2100" dirty="0"/>
           </a:p>
           <a:p>
+            <a:pPr indent="0" marL="0">
+              <a:buNone/>
+            </a:pPr>
             <a:r>
               <a:rPr lang="en-US" sz="2100" dirty="0">
                 <a:solidFill>
-                  <a:srgbClr val="17364A"/>
-                </a:solidFill>
-                <a:latin typeface="Aptos" pitchFamily="34" charset="0"/>
-                <a:ea typeface="Aptos" pitchFamily="34" charset="-122"/>
-                <a:cs typeface="Aptos" pitchFamily="34" charset="-120"/>
-              </a:rPr>
-              <a:t>Instead, it increases the need for staff who can translate across program, data, technology, privacy, legal,.</a:t>
+                  <a:srgbClr val="003A63"/>
+                </a:solidFill>
+                <a:latin typeface="Aptos" pitchFamily="34" charset="0"/>
+                <a:ea typeface="Aptos" pitchFamily="34" charset="-122"/>
+                <a:cs typeface="Aptos" pitchFamily="34" charset="-120"/>
+              </a:rPr>
+              <a:t>• Instead, it increases the need for staff who can translate across program, data, technology,.</a:t>
             </a:r>
             <a:endParaRPr lang="en-US" sz="2100" dirty="0"/>
           </a:p>
@@ -10012,17 +10162,17 @@
         </p:nvSpPr>
         <p:spPr>
           <a:xfrm>
-            <a:off x="8074152" y="1920240"/>
-            <a:ext cx="2825496" cy="1280160"/>
-          </a:xfrm>
-          <a:prstGeom prst="rect">
-            <a:avLst/>
-          </a:prstGeom>
-          <a:noFill/>
-          <a:ln/>
-        </p:spPr>
-        <p:txBody>
-          <a:bodyPr wrap="square" lIns="0" tIns="0" rIns="0" bIns="0" rtlCol="0" anchor="t">
+            <a:off x="8074152" y="1892808"/>
+            <a:ext cx="2825496" cy="1353312"/>
+          </a:xfrm>
+          <a:prstGeom prst="rect">
+            <a:avLst/>
+          </a:prstGeom>
+          <a:noFill/>
+          <a:ln/>
+        </p:spPr>
+        <p:txBody>
+          <a:bodyPr wrap="square" lIns="254" tIns="254" rIns="254" bIns="254" rtlCol="0" anchor="t">
             <a:normAutofit/>
           </a:bodyPr>
           <a:lstStyle/>
@@ -10031,7 +10181,7 @@
               <a:buNone/>
             </a:pPr>
             <a:r>
-              <a:rPr lang="en-US" sz="1550" dirty="0">
+              <a:rPr lang="en-US" sz="1320" dirty="0">
                 <a:solidFill>
                   <a:srgbClr val="17364A"/>
                 </a:solidFill>
@@ -10039,43 +10189,9 @@
                 <a:ea typeface="Aptos" pitchFamily="34" charset="-122"/>
                 <a:cs typeface="Aptos" pitchFamily="34" charset="-120"/>
               </a:rPr>
-              <a:t>Level: advanced/leadership</a:t>
-            </a:r>
-            <a:endParaRPr lang="en-US" sz="1550" dirty="0"/>
-          </a:p>
-          <a:p>
-            <a:pPr indent="0" marL="0">
-              <a:buNone/>
-            </a:pPr>
-            <a:r>
-              <a:rPr lang="en-US" sz="1550" dirty="0">
-                <a:solidFill>
-                  <a:srgbClr val="17364A"/>
-                </a:solidFill>
-                <a:latin typeface="Aptos" pitchFamily="34" charset="0"/>
-                <a:ea typeface="Aptos" pitchFamily="34" charset="-122"/>
-                <a:cs typeface="Aptos" pitchFamily="34" charset="-120"/>
-              </a:rPr>
-              <a:t>Primary track: Public Health Executive Leadership Track</a:t>
-            </a:r>
-            <a:endParaRPr lang="en-US" sz="1550" dirty="0"/>
-          </a:p>
-          <a:p>
-            <a:pPr indent="0" marL="0">
-              <a:buNone/>
-            </a:pPr>
-            <a:r>
-              <a:rPr lang="en-US" sz="1550" dirty="0">
-                <a:solidFill>
-                  <a:srgbClr val="17364A"/>
-                </a:solidFill>
-                <a:latin typeface="Aptos" pitchFamily="34" charset="0"/>
-                <a:ea typeface="Aptos" pitchFamily="34" charset="-122"/>
-                <a:cs typeface="Aptos" pitchFamily="34" charset="-120"/>
-              </a:rPr>
-              <a:t>Appears in tracks: governance-security</a:t>
-            </a:r>
-            <a:endParaRPr lang="en-US" sz="1550" dirty="0"/>
+              <a:t>Level: advanced/leadership Primary track: Public Health Executive Leadership Track Appears in tracks: governance-security</a:t>
+            </a:r>
+            <a:endParaRPr lang="en-US" sz="1320" dirty="0"/>
           </a:p>
         </p:txBody>
       </p:sp>
@@ -10163,13 +10279,16 @@
           <a:ln/>
         </p:spPr>
         <p:txBody>
-          <a:bodyPr wrap="square" lIns="254" tIns="254" rIns="254" bIns="254" rtlCol="0" anchor="t">
+          <a:bodyPr wrap="square" lIns="508" tIns="508" rIns="508" bIns="508" rtlCol="0" anchor="t">
             <a:normAutofit/>
           </a:bodyPr>
           <a:lstStyle/>
           <a:p>
-            <a:r>
-              <a:rPr lang="en-US" sz="1380" dirty="0">
+            <a:pPr indent="0" marL="0">
+              <a:buNone/>
+            </a:pPr>
+            <a:r>
+              <a:rPr lang="en-US" sz="1220" dirty="0">
                 <a:solidFill>
                   <a:srgbClr val="17364A"/>
                 </a:solidFill>
@@ -10179,11 +10298,14 @@
               </a:rPr>
               <a:t>Read the module for shared vocabulary and context.</a:t>
             </a:r>
-            <a:endParaRPr lang="en-US" sz="1380" dirty="0"/>
-          </a:p>
-          <a:p>
-            <a:r>
-              <a:rPr lang="en-US" sz="1380" dirty="0">
+            <a:endParaRPr lang="en-US" sz="1220" dirty="0"/>
+          </a:p>
+          <a:p>
+            <a:pPr indent="0" marL="0">
+              <a:buNone/>
+            </a:pPr>
+            <a:r>
+              <a:rPr lang="en-US" sz="1220" dirty="0">
                 <a:solidFill>
                   <a:srgbClr val="17364A"/>
                 </a:solidFill>
@@ -10193,11 +10315,14 @@
               </a:rPr>
               <a:t>Complete the practical exercise to apply the concept.</a:t>
             </a:r>
-            <a:endParaRPr lang="en-US" sz="1380" dirty="0"/>
-          </a:p>
-          <a:p>
-            <a:r>
-              <a:rPr lang="en-US" sz="1380" dirty="0">
+            <a:endParaRPr lang="en-US" sz="1220" dirty="0"/>
+          </a:p>
+          <a:p>
+            <a:pPr indent="0" marL="0">
+              <a:buNone/>
+            </a:pPr>
+            <a:r>
+              <a:rPr lang="en-US" sz="1220" dirty="0">
                 <a:solidFill>
                   <a:srgbClr val="17364A"/>
                 </a:solidFill>
@@ -10207,7 +10332,7 @@
               </a:rPr>
               <a:t>Use the notes and references for deeper review.</a:t>
             </a:r>
-            <a:endParaRPr lang="en-US" sz="1380" dirty="0"/>
+            <a:endParaRPr lang="en-US" sz="1220" dirty="0"/>
           </a:p>
         </p:txBody>
       </p:sp>
@@ -10508,35 +10633,41 @@
           <a:ln/>
         </p:spPr>
         <p:txBody>
-          <a:bodyPr wrap="square" lIns="635" tIns="635" rIns="635" bIns="635" rtlCol="0" anchor="t">
+          <a:bodyPr wrap="square" lIns="1016" tIns="1016" rIns="1016" bIns="1016" rtlCol="0" anchor="t">
             <a:normAutofit/>
           </a:bodyPr>
           <a:lstStyle/>
           <a:p>
+            <a:pPr indent="0" marL="0">
+              <a:buNone/>
+            </a:pPr>
             <a:r>
               <a:rPr lang="en-US" sz="2100" dirty="0">
                 <a:solidFill>
-                  <a:srgbClr val="17364A"/>
-                </a:solidFill>
-                <a:latin typeface="Aptos" pitchFamily="34" charset="0"/>
-                <a:ea typeface="Aptos" pitchFamily="34" charset="-122"/>
-                <a:cs typeface="Aptos" pitchFamily="34" charset="-120"/>
-              </a:rPr>
-              <a:t>OMB Memorandum M-24-10 on federal AI governance, risk management, and innovation, where relevant to.</a:t>
+                  <a:srgbClr val="003A63"/>
+                </a:solidFill>
+                <a:latin typeface="Aptos" pitchFamily="34" charset="0"/>
+                <a:ea typeface="Aptos" pitchFamily="34" charset="-122"/>
+                <a:cs typeface="Aptos" pitchFamily="34" charset="-120"/>
+              </a:rPr>
+              <a:t>• OMB Memorandum M-24-10 on federal AI governance, risk management, and innovation, where.</a:t>
             </a:r>
             <a:endParaRPr lang="en-US" sz="2100" dirty="0"/>
           </a:p>
           <a:p>
+            <a:pPr indent="0" marL="0">
+              <a:buNone/>
+            </a:pPr>
             <a:r>
               <a:rPr lang="en-US" sz="2100" dirty="0">
                 <a:solidFill>
-                  <a:srgbClr val="17364A"/>
-                </a:solidFill>
-                <a:latin typeface="Aptos" pitchFamily="34" charset="0"/>
-                <a:ea typeface="Aptos" pitchFamily="34" charset="-122"/>
-                <a:cs typeface="Aptos" pitchFamily="34" charset="-120"/>
-              </a:rPr>
-              <a:t>Agency strategic plans, procurement policies, privacy policies, cybersecurity policies, records.</a:t>
+                  <a:srgbClr val="003A63"/>
+                </a:solidFill>
+                <a:latin typeface="Aptos" pitchFamily="34" charset="0"/>
+                <a:ea typeface="Aptos" pitchFamily="34" charset="-122"/>
+                <a:cs typeface="Aptos" pitchFamily="34" charset="-120"/>
+              </a:rPr>
+              <a:t>• Agency strategic plans, procurement policies, privacy policies, cybersecurity policies, records.</a:t>
             </a:r>
             <a:endParaRPr lang="en-US" sz="2100" dirty="0"/>
           </a:p>
@@ -10616,17 +10747,17 @@
         </p:nvSpPr>
         <p:spPr>
           <a:xfrm>
-            <a:off x="7799832" y="1828800"/>
-            <a:ext cx="3145536" cy="685800"/>
-          </a:xfrm>
-          <a:prstGeom prst="rect">
-            <a:avLst/>
-          </a:prstGeom>
-          <a:noFill/>
-          <a:ln/>
-        </p:spPr>
-        <p:txBody>
-          <a:bodyPr wrap="square" lIns="0" tIns="0" rIns="0" bIns="0" rtlCol="0" anchor="t">
+            <a:off x="7799832" y="1801368"/>
+            <a:ext cx="3145536" cy="758952"/>
+          </a:xfrm>
+          <a:prstGeom prst="rect">
+            <a:avLst/>
+          </a:prstGeom>
+          <a:noFill/>
+          <a:ln/>
+        </p:spPr>
+        <p:txBody>
+          <a:bodyPr wrap="square" lIns="254" tIns="254" rIns="254" bIns="254" rtlCol="0" anchor="t">
             <a:normAutofit/>
           </a:bodyPr>
           <a:lstStyle/>
@@ -10635,7 +10766,7 @@
               <a:buNone/>
             </a:pPr>
             <a:r>
-              <a:rPr lang="en-US" sz="1550" dirty="0">
+              <a:rPr lang="en-US" sz="1320" dirty="0">
                 <a:solidFill>
                   <a:srgbClr val="17364A"/>
                 </a:solidFill>
@@ -10645,7 +10776,7 @@
               </a:rPr>
               <a:t>OMB Memorandum M-24-10 on federal AI governance, risk management, and innovation, where relevant to.</a:t>
             </a:r>
-            <a:endParaRPr lang="en-US" sz="1550" dirty="0"/>
+            <a:endParaRPr lang="en-US" sz="1320" dirty="0"/>
           </a:p>
         </p:txBody>
       </p:sp>
@@ -10733,13 +10864,16 @@
           <a:ln/>
         </p:spPr>
         <p:txBody>
-          <a:bodyPr wrap="square" lIns="254" tIns="254" rIns="254" bIns="254" rtlCol="0" anchor="t">
+          <a:bodyPr wrap="square" lIns="508" tIns="508" rIns="508" bIns="508" rtlCol="0" anchor="t">
             <a:normAutofit/>
           </a:bodyPr>
           <a:lstStyle/>
           <a:p>
-            <a:r>
-              <a:rPr lang="en-US" sz="1380" dirty="0">
+            <a:pPr indent="0" marL="0">
+              <a:buNone/>
+            </a:pPr>
+            <a:r>
+              <a:rPr lang="en-US" sz="1220" dirty="0">
                 <a:solidFill>
                   <a:srgbClr val="17364A"/>
                 </a:solidFill>
@@ -10747,13 +10881,16 @@
                 <a:ea typeface="Aptos" pitchFamily="34" charset="-122"/>
                 <a:cs typeface="Aptos" pitchFamily="34" charset="-120"/>
               </a:rPr>
-              <a:t>OMB Memorandum M-24-10 on federal AI governance, risk management, and innovation, where.</a:t>
-            </a:r>
-            <a:endParaRPr lang="en-US" sz="1380" dirty="0"/>
-          </a:p>
-          <a:p>
-            <a:r>
-              <a:rPr lang="en-US" sz="1380" dirty="0">
+              <a:t>OMB Memorandum M-24-10 on federal AI governance, risk management,.</a:t>
+            </a:r>
+            <a:endParaRPr lang="en-US" sz="1220" dirty="0"/>
+          </a:p>
+          <a:p>
+            <a:pPr indent="0" marL="0">
+              <a:buNone/>
+            </a:pPr>
+            <a:r>
+              <a:rPr lang="en-US" sz="1220" dirty="0">
                 <a:solidFill>
                   <a:srgbClr val="17364A"/>
                 </a:solidFill>
@@ -10761,9 +10898,9 @@
                 <a:ea typeface="Aptos" pitchFamily="34" charset="-122"/>
                 <a:cs typeface="Aptos" pitchFamily="34" charset="-120"/>
               </a:rPr>
-              <a:t>Agency strategic plans, procurement policies, privacy policies, cybersecurity policies,.</a:t>
-            </a:r>
-            <a:endParaRPr lang="en-US" sz="1380" dirty="0"/>
+              <a:t>Agency strategic plans, procurement policies, privacy policies,.</a:t>
+            </a:r>
+            <a:endParaRPr lang="en-US" sz="1220" dirty="0"/>
           </a:p>
         </p:txBody>
       </p:sp>
@@ -10841,17 +10978,17 @@
         </p:nvSpPr>
         <p:spPr>
           <a:xfrm>
-            <a:off x="7799832" y="5001768"/>
-            <a:ext cx="3145536" cy="502920"/>
-          </a:xfrm>
-          <a:prstGeom prst="rect">
-            <a:avLst/>
-          </a:prstGeom>
-          <a:noFill/>
-          <a:ln/>
-        </p:spPr>
-        <p:txBody>
-          <a:bodyPr wrap="square" lIns="0" tIns="0" rIns="0" bIns="0" rtlCol="0" anchor="t">
+            <a:off x="7799832" y="4974336"/>
+            <a:ext cx="3145536" cy="576072"/>
+          </a:xfrm>
+          <a:prstGeom prst="rect">
+            <a:avLst/>
+          </a:prstGeom>
+          <a:noFill/>
+          <a:ln/>
+        </p:spPr>
+        <p:txBody>
+          <a:bodyPr wrap="square" lIns="254" tIns="254" rIns="254" bIns="254" rtlCol="0" anchor="t">
             <a:normAutofit/>
           </a:bodyPr>
           <a:lstStyle/>
@@ -10860,7 +10997,7 @@
               <a:buNone/>
             </a:pPr>
             <a:r>
-              <a:rPr lang="en-US" sz="1550" dirty="0">
+              <a:rPr lang="en-US" sz="1320" dirty="0">
                 <a:solidFill>
                   <a:srgbClr val="17364A"/>
                 </a:solidFill>
@@ -10868,9 +11005,9 @@
                 <a:ea typeface="Aptos" pitchFamily="34" charset="-122"/>
                 <a:cs typeface="Aptos" pitchFamily="34" charset="-120"/>
               </a:rPr>
-              <a:t>Connect the concept to public health purpose, responsible use, required safeguards, documentation, and the next action a department should take.</a:t>
-            </a:r>
-            <a:endParaRPr lang="en-US" sz="1550" dirty="0"/>
+              <a:t>Connect the concept to public health purpose, responsible use, required safeguards, documentation, and the next action a.</a:t>
+            </a:r>
+            <a:endParaRPr lang="en-US" sz="1320" dirty="0"/>
           </a:p>
         </p:txBody>
       </p:sp>
@@ -11171,63 +11308,75 @@
           <a:ln/>
         </p:spPr>
         <p:txBody>
-          <a:bodyPr wrap="square" lIns="635" tIns="635" rIns="635" bIns="635" rtlCol="0" anchor="t">
+          <a:bodyPr wrap="square" lIns="1016" tIns="1016" rIns="1016" bIns="1016" rtlCol="0" anchor="t">
             <a:normAutofit/>
           </a:bodyPr>
           <a:lstStyle/>
           <a:p>
+            <a:pPr indent="0" marL="0">
+              <a:buNone/>
+            </a:pPr>
             <a:r>
               <a:rPr lang="en-US" sz="1900" dirty="0">
                 <a:solidFill>
-                  <a:srgbClr val="17364A"/>
-                </a:solidFill>
-                <a:latin typeface="Aptos" pitchFamily="34" charset="0"/>
-                <a:ea typeface="Aptos" pitchFamily="34" charset="-122"/>
-                <a:cs typeface="Aptos" pitchFamily="34" charset="-120"/>
-              </a:rPr>
-              <a:t>Play 11: Build and Deploy AI Solutions - This lesson informs Play 11 by helping learners connect the lesson.</a:t>
+                  <a:srgbClr val="003A63"/>
+                </a:solidFill>
+                <a:latin typeface="Aptos" pitchFamily="34" charset="0"/>
+                <a:ea typeface="Aptos" pitchFamily="34" charset="-122"/>
+                <a:cs typeface="Aptos" pitchFamily="34" charset="-120"/>
+              </a:rPr>
+              <a:t>• Play 11: Build and Deploy AI Solutions - This lesson informs Play 11 by helping learners.</a:t>
             </a:r>
             <a:endParaRPr lang="en-US" sz="1900" dirty="0"/>
           </a:p>
           <a:p>
+            <a:pPr indent="0" marL="0">
+              <a:buNone/>
+            </a:pPr>
             <a:r>
               <a:rPr lang="en-US" sz="1900" dirty="0">
                 <a:solidFill>
-                  <a:srgbClr val="17364A"/>
-                </a:solidFill>
-                <a:latin typeface="Aptos" pitchFamily="34" charset="0"/>
-                <a:ea typeface="Aptos" pitchFamily="34" charset="-122"/>
-                <a:cs typeface="Aptos" pitchFamily="34" charset="-120"/>
-              </a:rPr>
-              <a:t>Play 2: Readiness Assessment - This lesson informs Play 2 by helping learners connect the lesson topic to.</a:t>
+                  <a:srgbClr val="003A63"/>
+                </a:solidFill>
+                <a:latin typeface="Aptos" pitchFamily="34" charset="0"/>
+                <a:ea typeface="Aptos" pitchFamily="34" charset="-122"/>
+                <a:cs typeface="Aptos" pitchFamily="34" charset="-120"/>
+              </a:rPr>
+              <a:t>• Play 2: Readiness Assessment - This lesson informs Play 2 by helping learners connect the.</a:t>
             </a:r>
             <a:endParaRPr lang="en-US" sz="1900" dirty="0"/>
           </a:p>
           <a:p>
+            <a:pPr indent="0" marL="0">
+              <a:buNone/>
+            </a:pPr>
             <a:r>
               <a:rPr lang="en-US" sz="1900" dirty="0">
                 <a:solidFill>
-                  <a:srgbClr val="17364A"/>
-                </a:solidFill>
-                <a:latin typeface="Aptos" pitchFamily="34" charset="0"/>
-                <a:ea typeface="Aptos" pitchFamily="34" charset="-122"/>
-                <a:cs typeface="Aptos" pitchFamily="34" charset="-120"/>
-              </a:rPr>
-              <a:t>Play 3: Establish AI Governance - This lesson informs Play 3 by helping learners connect the lesson topic to.</a:t>
+                  <a:srgbClr val="003A63"/>
+                </a:solidFill>
+                <a:latin typeface="Aptos" pitchFamily="34" charset="0"/>
+                <a:ea typeface="Aptos" pitchFamily="34" charset="-122"/>
+                <a:cs typeface="Aptos" pitchFamily="34" charset="-120"/>
+              </a:rPr>
+              <a:t>• Play 3: Establish AI Governance - This lesson informs Play 3 by helping learners connect the.</a:t>
             </a:r>
             <a:endParaRPr lang="en-US" sz="1900" dirty="0"/>
           </a:p>
           <a:p>
+            <a:pPr indent="0" marL="0">
+              <a:buNone/>
+            </a:pPr>
             <a:r>
               <a:rPr lang="en-US" sz="1900" dirty="0">
                 <a:solidFill>
-                  <a:srgbClr val="17364A"/>
-                </a:solidFill>
-                <a:latin typeface="Aptos" pitchFamily="34" charset="0"/>
-                <a:ea typeface="Aptos" pitchFamily="34" charset="-122"/>
-                <a:cs typeface="Aptos" pitchFamily="34" charset="-120"/>
-              </a:rPr>
-              <a:t>Play 1: Vision &amp; Guardrails - This lesson informs Play 1 by helping learners connect the lesson topic to.</a:t>
+                  <a:srgbClr val="003A63"/>
+                </a:solidFill>
+                <a:latin typeface="Aptos" pitchFamily="34" charset="0"/>
+                <a:ea typeface="Aptos" pitchFamily="34" charset="-122"/>
+                <a:cs typeface="Aptos" pitchFamily="34" charset="-120"/>
+              </a:rPr>
+              <a:t>• Play 1: Vision &amp; Guardrails - This lesson informs Play 1 by helping learners connect the.</a:t>
             </a:r>
             <a:endParaRPr lang="en-US" sz="1900" dirty="0"/>
           </a:p>
@@ -11307,17 +11456,17 @@
         </p:nvSpPr>
         <p:spPr>
           <a:xfrm>
-            <a:off x="8211312" y="1920240"/>
-            <a:ext cx="2734056" cy="1463040"/>
-          </a:xfrm>
-          <a:prstGeom prst="rect">
-            <a:avLst/>
-          </a:prstGeom>
-          <a:noFill/>
-          <a:ln/>
-        </p:spPr>
-        <p:txBody>
-          <a:bodyPr wrap="square" lIns="0" tIns="0" rIns="0" bIns="0" rtlCol="0" anchor="t">
+            <a:off x="8211312" y="1892808"/>
+            <a:ext cx="2734056" cy="1536192"/>
+          </a:xfrm>
+          <a:prstGeom prst="rect">
+            <a:avLst/>
+          </a:prstGeom>
+          <a:noFill/>
+          <a:ln/>
+        </p:spPr>
+        <p:txBody>
+          <a:bodyPr wrap="square" lIns="254" tIns="254" rIns="254" bIns="254" rtlCol="0" anchor="t">
             <a:normAutofit/>
           </a:bodyPr>
           <a:lstStyle/>
@@ -11326,7 +11475,7 @@
               <a:buNone/>
             </a:pPr>
             <a:r>
-              <a:rPr lang="en-US" sz="1550" dirty="0">
+              <a:rPr lang="en-US" sz="1320" dirty="0">
                 <a:solidFill>
                   <a:srgbClr val="17364A"/>
                 </a:solidFill>
@@ -11334,9 +11483,9 @@
                 <a:ea typeface="Aptos" pitchFamily="34" charset="-122"/>
                 <a:cs typeface="Aptos" pitchFamily="34" charset="-120"/>
               </a:rPr>
-              <a:t>Use the related plays to identify decisions, participants, timing, approvals, and documentation needed for responsible implementation.</a:t>
-            </a:r>
-            <a:endParaRPr lang="en-US" sz="1550" dirty="0"/>
+              <a:t>Use the related plays to identify decisions, participants, timing, approvals, and documentation needed for responsible.</a:t>
+            </a:r>
+            <a:endParaRPr lang="en-US" sz="1320" dirty="0"/>
           </a:p>
         </p:txBody>
       </p:sp>
@@ -11424,13 +11573,16 @@
           <a:ln/>
         </p:spPr>
         <p:txBody>
-          <a:bodyPr wrap="square" lIns="254" tIns="254" rIns="254" bIns="254" rtlCol="0" anchor="t">
+          <a:bodyPr wrap="square" lIns="508" tIns="508" rIns="508" bIns="508" rtlCol="0" anchor="t">
             <a:normAutofit/>
           </a:bodyPr>
           <a:lstStyle/>
           <a:p>
-            <a:r>
-              <a:rPr lang="en-US" sz="1380" dirty="0">
+            <a:pPr indent="0" marL="0">
+              <a:buNone/>
+            </a:pPr>
+            <a:r>
+              <a:rPr lang="en-US" sz="1220" dirty="0">
                 <a:solidFill>
                   <a:srgbClr val="17364A"/>
                 </a:solidFill>
@@ -11440,11 +11592,14 @@
               </a:rPr>
               <a:t>Locate the decision point in the playbook sequence.</a:t>
             </a:r>
-            <a:endParaRPr lang="en-US" sz="1380" dirty="0"/>
-          </a:p>
-          <a:p>
-            <a:r>
-              <a:rPr lang="en-US" sz="1380" dirty="0">
+            <a:endParaRPr lang="en-US" sz="1220" dirty="0"/>
+          </a:p>
+          <a:p>
+            <a:pPr indent="0" marL="0">
+              <a:buNone/>
+            </a:pPr>
+            <a:r>
+              <a:rPr lang="en-US" sz="1220" dirty="0">
                 <a:solidFill>
                   <a:srgbClr val="17364A"/>
                 </a:solidFill>
@@ -11454,11 +11609,14 @@
               </a:rPr>
               <a:t>Identify who should participate in the work.</a:t>
             </a:r>
-            <a:endParaRPr lang="en-US" sz="1380" dirty="0"/>
-          </a:p>
-          <a:p>
-            <a:r>
-              <a:rPr lang="en-US" sz="1380" dirty="0">
+            <a:endParaRPr lang="en-US" sz="1220" dirty="0"/>
+          </a:p>
+          <a:p>
+            <a:pPr indent="0" marL="0">
+              <a:buNone/>
+            </a:pPr>
+            <a:r>
+              <a:rPr lang="en-US" sz="1220" dirty="0">
                 <a:solidFill>
                   <a:srgbClr val="17364A"/>
                 </a:solidFill>
@@ -11468,7 +11626,7 @@
               </a:rPr>
               <a:t>Document the review, approval, or implementation step.</a:t>
             </a:r>
-            <a:endParaRPr lang="en-US" sz="1380" dirty="0"/>
+            <a:endParaRPr lang="en-US" sz="1220" dirty="0"/>
           </a:p>
         </p:txBody>
       </p:sp>
@@ -11769,63 +11927,75 @@
           <a:ln/>
         </p:spPr>
         <p:txBody>
-          <a:bodyPr wrap="square" lIns="635" tIns="635" rIns="635" bIns="635" rtlCol="0" anchor="t">
+          <a:bodyPr wrap="square" lIns="1016" tIns="1016" rIns="1016" bIns="1016" rtlCol="0" anchor="t">
             <a:normAutofit/>
           </a:bodyPr>
           <a:lstStyle/>
           <a:p>
+            <a:pPr indent="0" marL="0">
+              <a:buNone/>
+            </a:pPr>
             <a:r>
               <a:rPr lang="en-US" sz="1850" dirty="0">
                 <a:solidFill>
-                  <a:srgbClr val="17364A"/>
-                </a:solidFill>
-                <a:latin typeface="Aptos" pitchFamily="34" charset="0"/>
-                <a:ea typeface="Aptos" pitchFamily="34" charset="-122"/>
-                <a:cs typeface="Aptos" pitchFamily="34" charset="-120"/>
-              </a:rPr>
-              <a:t>Tool 4: AI Policy Landscape Scan (Worksheet) - Use AI Policy Landscape Scan to translate this lesson into a.</a:t>
+                  <a:srgbClr val="003A63"/>
+                </a:solidFill>
+                <a:latin typeface="Aptos" pitchFamily="34" charset="0"/>
+                <a:ea typeface="Aptos" pitchFamily="34" charset="-122"/>
+                <a:cs typeface="Aptos" pitchFamily="34" charset="-120"/>
+              </a:rPr>
+              <a:t>• Tool 4: AI Policy Landscape Scan (Worksheet) - Use AI Policy Landscape Scan to translate this.</a:t>
             </a:r>
             <a:endParaRPr lang="en-US" sz="1850" dirty="0"/>
           </a:p>
           <a:p>
+            <a:pPr indent="0" marL="0">
+              <a:buNone/>
+            </a:pPr>
             <a:r>
               <a:rPr lang="en-US" sz="1850" dirty="0">
                 <a:solidFill>
-                  <a:srgbClr val="17364A"/>
-                </a:solidFill>
-                <a:latin typeface="Aptos" pitchFamily="34" charset="0"/>
-                <a:ea typeface="Aptos" pitchFamily="34" charset="-122"/>
-                <a:cs typeface="Aptos" pitchFamily="34" charset="-120"/>
-              </a:rPr>
-              <a:t>Tool 5: AI Environmental and Resource Impact Review (Checklist) - Use AI Environmental and Resource Impact.</a:t>
+                  <a:srgbClr val="003A63"/>
+                </a:solidFill>
+                <a:latin typeface="Aptos" pitchFamily="34" charset="0"/>
+                <a:ea typeface="Aptos" pitchFamily="34" charset="-122"/>
+                <a:cs typeface="Aptos" pitchFamily="34" charset="-120"/>
+              </a:rPr>
+              <a:t>• Tool 5: AI Environmental and Resource Impact Review (Checklist) - Use AI Environmental and.</a:t>
             </a:r>
             <a:endParaRPr lang="en-US" sz="1850" dirty="0"/>
           </a:p>
           <a:p>
+            <a:pPr indent="0" marL="0">
+              <a:buNone/>
+            </a:pPr>
             <a:r>
               <a:rPr lang="en-US" sz="1850" dirty="0">
                 <a:solidFill>
-                  <a:srgbClr val="17364A"/>
-                </a:solidFill>
-                <a:latin typeface="Aptos" pitchFamily="34" charset="0"/>
-                <a:ea typeface="Aptos" pitchFamily="34" charset="-122"/>
-                <a:cs typeface="Aptos" pitchFamily="34" charset="-120"/>
-              </a:rPr>
-              <a:t>Tool 6: Human-Centered AI Decision Rule Checklist (Checklist) - Use Human-Centered AI Decision Rule.</a:t>
+                  <a:srgbClr val="003A63"/>
+                </a:solidFill>
+                <a:latin typeface="Aptos" pitchFamily="34" charset="0"/>
+                <a:ea typeface="Aptos" pitchFamily="34" charset="-122"/>
+                <a:cs typeface="Aptos" pitchFamily="34" charset="-120"/>
+              </a:rPr>
+              <a:t>• Tool 6: Human-Centered AI Decision Rule Checklist (Checklist) - Use Human-Centered AI Decision.</a:t>
             </a:r>
             <a:endParaRPr lang="en-US" sz="1850" dirty="0"/>
           </a:p>
           <a:p>
+            <a:pPr indent="0" marL="0">
+              <a:buNone/>
+            </a:pPr>
             <a:r>
               <a:rPr lang="en-US" sz="1850" dirty="0">
                 <a:solidFill>
-                  <a:srgbClr val="17364A"/>
-                </a:solidFill>
-                <a:latin typeface="Aptos" pitchFamily="34" charset="0"/>
-                <a:ea typeface="Aptos" pitchFamily="34" charset="-122"/>
-                <a:cs typeface="Aptos" pitchFamily="34" charset="-120"/>
-              </a:rPr>
-              <a:t>Tool 8: AI Project Charter (Planning) - Use AI Project Charter to translate this lesson into a documented.</a:t>
+                  <a:srgbClr val="003A63"/>
+                </a:solidFill>
+                <a:latin typeface="Aptos" pitchFamily="34" charset="0"/>
+                <a:ea typeface="Aptos" pitchFamily="34" charset="-122"/>
+                <a:cs typeface="Aptos" pitchFamily="34" charset="-120"/>
+              </a:rPr>
+              <a:t>• Tool 8: AI Project Charter (Planning) - Use AI Project Charter to translate this lesson into a.</a:t>
             </a:r>
             <a:endParaRPr lang="en-US" sz="1850" dirty="0"/>
           </a:p>
@@ -11905,17 +12075,17 @@
         </p:nvSpPr>
         <p:spPr>
           <a:xfrm>
-            <a:off x="8211312" y="1920240"/>
-            <a:ext cx="2734056" cy="1463040"/>
-          </a:xfrm>
-          <a:prstGeom prst="rect">
-            <a:avLst/>
-          </a:prstGeom>
-          <a:noFill/>
-          <a:ln/>
-        </p:spPr>
-        <p:txBody>
-          <a:bodyPr wrap="square" lIns="0" tIns="0" rIns="0" bIns="0" rtlCol="0" anchor="t">
+            <a:off x="8211312" y="1892808"/>
+            <a:ext cx="2734056" cy="1536192"/>
+          </a:xfrm>
+          <a:prstGeom prst="rect">
+            <a:avLst/>
+          </a:prstGeom>
+          <a:noFill/>
+          <a:ln/>
+        </p:spPr>
+        <p:txBody>
+          <a:bodyPr wrap="square" lIns="254" tIns="254" rIns="254" bIns="254" rtlCol="0" anchor="t">
             <a:normAutofit/>
           </a:bodyPr>
           <a:lstStyle/>
@@ -11924,7 +12094,7 @@
               <a:buNone/>
             </a:pPr>
             <a:r>
-              <a:rPr lang="en-US" sz="1550" dirty="0">
+              <a:rPr lang="en-US" sz="1320" dirty="0">
                 <a:solidFill>
                   <a:srgbClr val="17364A"/>
                 </a:solidFill>
@@ -11932,9 +12102,9 @@
                 <a:ea typeface="Aptos" pitchFamily="34" charset="-122"/>
                 <a:cs typeface="Aptos" pitchFamily="34" charset="-120"/>
               </a:rPr>
-              <a:t>Use linked tools when your department needs a structured worksheet, template, checklist, review process, or documentation artifact.</a:t>
-            </a:r>
-            <a:endParaRPr lang="en-US" sz="1550" dirty="0"/>
+              <a:t>Use linked tools when your department needs a structured worksheet, template, checklist, review process, or.</a:t>
+            </a:r>
+            <a:endParaRPr lang="en-US" sz="1320" dirty="0"/>
           </a:p>
         </p:txBody>
       </p:sp>
@@ -12022,13 +12192,16 @@
           <a:ln/>
         </p:spPr>
         <p:txBody>
-          <a:bodyPr wrap="square" lIns="254" tIns="254" rIns="254" bIns="254" rtlCol="0" anchor="t">
+          <a:bodyPr wrap="square" lIns="508" tIns="508" rIns="508" bIns="508" rtlCol="0" anchor="t">
             <a:normAutofit/>
           </a:bodyPr>
           <a:lstStyle/>
           <a:p>
-            <a:r>
-              <a:rPr lang="en-US" sz="1380" dirty="0">
+            <a:pPr indent="0" marL="0">
+              <a:buNone/>
+            </a:pPr>
+            <a:r>
+              <a:rPr lang="en-US" sz="1220" dirty="0">
                 <a:solidFill>
                   <a:srgbClr val="17364A"/>
                 </a:solidFill>
@@ -12038,11 +12211,14 @@
               </a:rPr>
               <a:t>Use a tool when no comparable local process exists.</a:t>
             </a:r>
-            <a:endParaRPr lang="en-US" sz="1380" dirty="0"/>
-          </a:p>
-          <a:p>
-            <a:r>
-              <a:rPr lang="en-US" sz="1380" dirty="0">
+            <a:endParaRPr lang="en-US" sz="1220" dirty="0"/>
+          </a:p>
+          <a:p>
+            <a:pPr indent="0" marL="0">
+              <a:buNone/>
+            </a:pPr>
+            <a:r>
+              <a:rPr lang="en-US" sz="1220" dirty="0">
                 <a:solidFill>
                   <a:srgbClr val="17364A"/>
                 </a:solidFill>
@@ -12050,13 +12226,16 @@
                 <a:ea typeface="Aptos" pitchFamily="34" charset="-122"/>
                 <a:cs typeface="Aptos" pitchFamily="34" charset="-120"/>
               </a:rPr>
-              <a:t>Adapt existing department templates when they already fit the purpose.</a:t>
-            </a:r>
-            <a:endParaRPr lang="en-US" sz="1380" dirty="0"/>
-          </a:p>
-          <a:p>
-            <a:r>
-              <a:rPr lang="en-US" sz="1380" dirty="0">
+              <a:t>Adapt existing department templates when they already fit the.</a:t>
+            </a:r>
+            <a:endParaRPr lang="en-US" sz="1220" dirty="0"/>
+          </a:p>
+          <a:p>
+            <a:pPr indent="0" marL="0">
+              <a:buNone/>
+            </a:pPr>
+            <a:r>
+              <a:rPr lang="en-US" sz="1220" dirty="0">
                 <a:solidFill>
                   <a:srgbClr val="17364A"/>
                 </a:solidFill>
@@ -12066,7 +12245,7 @@
               </a:rPr>
               <a:t>Save the completed artifact as evidence of the decision.</a:t>
             </a:r>
-            <a:endParaRPr lang="en-US" sz="1380" dirty="0"/>
+            <a:endParaRPr lang="en-US" sz="1220" dirty="0"/>
           </a:p>
         </p:txBody>
       </p:sp>
@@ -12367,49 +12546,58 @@
           <a:ln/>
         </p:spPr>
         <p:txBody>
-          <a:bodyPr wrap="square" lIns="635" tIns="635" rIns="635" bIns="635" rtlCol="0" anchor="t">
+          <a:bodyPr wrap="square" lIns="1016" tIns="1016" rIns="1016" bIns="1016" rtlCol="0" anchor="t">
             <a:normAutofit/>
           </a:bodyPr>
           <a:lstStyle/>
           <a:p>
+            <a:pPr indent="0" marL="0">
+              <a:buNone/>
+            </a:pPr>
             <a:r>
               <a:rPr lang="en-US" sz="2100" dirty="0">
                 <a:solidFill>
-                  <a:srgbClr val="17364A"/>
-                </a:solidFill>
-                <a:latin typeface="Aptos" pitchFamily="34" charset="0"/>
-                <a:ea typeface="Aptos" pitchFamily="34" charset="-122"/>
-                <a:cs typeface="Aptos" pitchFamily="34" charset="-120"/>
-              </a:rPr>
-              <a:t>Identify workforce roles needed for responsible AI adoption in public health.</a:t>
+                  <a:srgbClr val="003A63"/>
+                </a:solidFill>
+                <a:latin typeface="Aptos" pitchFamily="34" charset="0"/>
+                <a:ea typeface="Aptos" pitchFamily="34" charset="-122"/>
+                <a:cs typeface="Aptos" pitchFamily="34" charset="-120"/>
+              </a:rPr>
+              <a:t>• Identify workforce roles needed for responsible AI adoption in public health.</a:t>
             </a:r>
             <a:endParaRPr lang="en-US" sz="2100" dirty="0"/>
           </a:p>
           <a:p>
+            <a:pPr indent="0" marL="0">
+              <a:buNone/>
+            </a:pPr>
             <a:r>
               <a:rPr lang="en-US" sz="2100" dirty="0">
                 <a:solidFill>
-                  <a:srgbClr val="17364A"/>
-                </a:solidFill>
-                <a:latin typeface="Aptos" pitchFamily="34" charset="0"/>
-                <a:ea typeface="Aptos" pitchFamily="34" charset="-122"/>
-                <a:cs typeface="Aptos" pitchFamily="34" charset="-120"/>
-              </a:rPr>
-              <a:t>Distinguish between AI users, reviewers, implementers, governance participants, and accountability.</a:t>
+                  <a:srgbClr val="003A63"/>
+                </a:solidFill>
+                <a:latin typeface="Aptos" pitchFamily="34" charset="0"/>
+                <a:ea typeface="Aptos" pitchFamily="34" charset="-122"/>
+                <a:cs typeface="Aptos" pitchFamily="34" charset="-120"/>
+              </a:rPr>
+              <a:t>• Distinguish between AI users, reviewers, implementers, governance participants, and.</a:t>
             </a:r>
             <a:endParaRPr lang="en-US" sz="2100" dirty="0"/>
           </a:p>
           <a:p>
+            <a:pPr indent="0" marL="0">
+              <a:buNone/>
+            </a:pPr>
             <a:r>
               <a:rPr lang="en-US" sz="2100" dirty="0">
                 <a:solidFill>
-                  <a:srgbClr val="17364A"/>
-                </a:solidFill>
-                <a:latin typeface="Aptos" pitchFamily="34" charset="0"/>
-                <a:ea typeface="Aptos" pitchFamily="34" charset="-122"/>
-                <a:cs typeface="Aptos" pitchFamily="34" charset="-120"/>
-              </a:rPr>
-              <a:t>Develop role-based competency expectations for AI-supported work.</a:t>
+                  <a:srgbClr val="003A63"/>
+                </a:solidFill>
+                <a:latin typeface="Aptos" pitchFamily="34" charset="0"/>
+                <a:ea typeface="Aptos" pitchFamily="34" charset="-122"/>
+                <a:cs typeface="Aptos" pitchFamily="34" charset="-120"/>
+              </a:rPr>
+              <a:t>• Develop role-based competency expectations for AI-supported work.</a:t>
             </a:r>
             <a:endParaRPr lang="en-US" sz="2100" dirty="0"/>
           </a:p>
@@ -12489,17 +12677,17 @@
         </p:nvSpPr>
         <p:spPr>
           <a:xfrm>
-            <a:off x="7799832" y="1828800"/>
-            <a:ext cx="3145536" cy="685800"/>
-          </a:xfrm>
-          <a:prstGeom prst="rect">
-            <a:avLst/>
-          </a:prstGeom>
-          <a:noFill/>
-          <a:ln/>
-        </p:spPr>
-        <p:txBody>
-          <a:bodyPr wrap="square" lIns="0" tIns="0" rIns="0" bIns="0" rtlCol="0" anchor="t">
+            <a:off x="7799832" y="1801368"/>
+            <a:ext cx="3145536" cy="758952"/>
+          </a:xfrm>
+          <a:prstGeom prst="rect">
+            <a:avLst/>
+          </a:prstGeom>
+          <a:noFill/>
+          <a:ln/>
+        </p:spPr>
+        <p:txBody>
+          <a:bodyPr wrap="square" lIns="254" tIns="254" rIns="254" bIns="254" rtlCol="0" anchor="t">
             <a:normAutofit/>
           </a:bodyPr>
           <a:lstStyle/>
@@ -12508,7 +12696,7 @@
               <a:buNone/>
             </a:pPr>
             <a:r>
-              <a:rPr lang="en-US" sz="1550" dirty="0">
+              <a:rPr lang="en-US" sz="1320" dirty="0">
                 <a:solidFill>
                   <a:srgbClr val="17364A"/>
                 </a:solidFill>
@@ -12518,7 +12706,7 @@
               </a:rPr>
               <a:t>Identify workforce roles needed for responsible AI adoption in public health.</a:t>
             </a:r>
-            <a:endParaRPr lang="en-US" sz="1550" dirty="0"/>
+            <a:endParaRPr lang="en-US" sz="1320" dirty="0"/>
           </a:p>
         </p:txBody>
       </p:sp>
@@ -12606,13 +12794,16 @@
           <a:ln/>
         </p:spPr>
         <p:txBody>
-          <a:bodyPr wrap="square" lIns="254" tIns="254" rIns="254" bIns="254" rtlCol="0" anchor="t">
+          <a:bodyPr wrap="square" lIns="508" tIns="508" rIns="508" bIns="508" rtlCol="0" anchor="t">
             <a:normAutofit/>
           </a:bodyPr>
           <a:lstStyle/>
           <a:p>
-            <a:r>
-              <a:rPr lang="en-US" sz="1380" dirty="0">
+            <a:pPr indent="0" marL="0">
+              <a:buNone/>
+            </a:pPr>
+            <a:r>
+              <a:rPr lang="en-US" sz="1220" dirty="0">
                 <a:solidFill>
                   <a:srgbClr val="17364A"/>
                 </a:solidFill>
@@ -12620,13 +12811,16 @@
                 <a:ea typeface="Aptos" pitchFamily="34" charset="-122"/>
                 <a:cs typeface="Aptos" pitchFamily="34" charset="-120"/>
               </a:rPr>
-              <a:t>Distinguish between AI users, reviewers, implementers, governance participants, and.</a:t>
-            </a:r>
-            <a:endParaRPr lang="en-US" sz="1380" dirty="0"/>
-          </a:p>
-          <a:p>
-            <a:r>
-              <a:rPr lang="en-US" sz="1380" dirty="0">
+              <a:t>Distinguish between AI users, reviewers, implementers, governance.</a:t>
+            </a:r>
+            <a:endParaRPr lang="en-US" sz="1220" dirty="0"/>
+          </a:p>
+          <a:p>
+            <a:pPr indent="0" marL="0">
+              <a:buNone/>
+            </a:pPr>
+            <a:r>
+              <a:rPr lang="en-US" sz="1220" dirty="0">
                 <a:solidFill>
                   <a:srgbClr val="17364A"/>
                 </a:solidFill>
@@ -12634,13 +12828,16 @@
                 <a:ea typeface="Aptos" pitchFamily="34" charset="-122"/>
                 <a:cs typeface="Aptos" pitchFamily="34" charset="-120"/>
               </a:rPr>
-              <a:t>Recognize workforce risks such as deskilling, uneven access to training, and unclear role.</a:t>
-            </a:r>
-            <a:endParaRPr lang="en-US" sz="1380" dirty="0"/>
-          </a:p>
-          <a:p>
-            <a:r>
-              <a:rPr lang="en-US" sz="1380" dirty="0">
+              <a:t>Recognize workforce risks such as deskilling, uneven access to.</a:t>
+            </a:r>
+            <a:endParaRPr lang="en-US" sz="1220" dirty="0"/>
+          </a:p>
+          <a:p>
+            <a:pPr indent="0" marL="0">
+              <a:buNone/>
+            </a:pPr>
+            <a:r>
+              <a:rPr lang="en-US" sz="1220" dirty="0">
                 <a:solidFill>
                   <a:srgbClr val="17364A"/>
                 </a:solidFill>
@@ -12650,7 +12847,7 @@
               </a:rPr>
               <a:t>Produce a workforce readiness and role design plan.</a:t>
             </a:r>
-            <a:endParaRPr lang="en-US" sz="1380" dirty="0"/>
+            <a:endParaRPr lang="en-US" sz="1220" dirty="0"/>
           </a:p>
         </p:txBody>
       </p:sp>
@@ -12728,17 +12925,17 @@
         </p:nvSpPr>
         <p:spPr>
           <a:xfrm>
-            <a:off x="7799832" y="5001768"/>
-            <a:ext cx="3145536" cy="502920"/>
-          </a:xfrm>
-          <a:prstGeom prst="rect">
-            <a:avLst/>
-          </a:prstGeom>
-          <a:noFill/>
-          <a:ln/>
-        </p:spPr>
-        <p:txBody>
-          <a:bodyPr wrap="square" lIns="0" tIns="0" rIns="0" bIns="0" rtlCol="0" anchor="t">
+            <a:off x="7799832" y="4974336"/>
+            <a:ext cx="3145536" cy="576072"/>
+          </a:xfrm>
+          <a:prstGeom prst="rect">
+            <a:avLst/>
+          </a:prstGeom>
+          <a:noFill/>
+          <a:ln/>
+        </p:spPr>
+        <p:txBody>
+          <a:bodyPr wrap="square" lIns="254" tIns="254" rIns="254" bIns="254" rtlCol="0" anchor="t">
             <a:normAutofit/>
           </a:bodyPr>
           <a:lstStyle/>
@@ -12747,7 +12944,7 @@
               <a:buNone/>
             </a:pPr>
             <a:r>
-              <a:rPr lang="en-US" sz="1550" dirty="0">
+              <a:rPr lang="en-US" sz="1320" dirty="0">
                 <a:solidFill>
                   <a:srgbClr val="17364A"/>
                 </a:solidFill>
@@ -12755,9 +12952,9 @@
                 <a:ea typeface="Aptos" pitchFamily="34" charset="-122"/>
                 <a:cs typeface="Aptos" pitchFamily="34" charset="-120"/>
               </a:rPr>
-              <a:t>Use the assignment to test whether you can explain the concept, apply it to a realistic public health situation, and identify what would need review before the work moves forward.</a:t>
-            </a:r>
-            <a:endParaRPr lang="en-US" sz="1550" dirty="0"/>
+              <a:t>Use the assignment to test whether you can explain the concept, apply it to a realistic public health situation, and.</a:t>
+            </a:r>
+            <a:endParaRPr lang="en-US" sz="1320" dirty="0"/>
           </a:p>
         </p:txBody>
       </p:sp>
@@ -13058,49 +13255,58 @@
           <a:ln/>
         </p:spPr>
         <p:txBody>
-          <a:bodyPr wrap="square" lIns="635" tIns="635" rIns="635" bIns="635" rtlCol="0" anchor="t">
+          <a:bodyPr wrap="square" lIns="1016" tIns="1016" rIns="1016" bIns="1016" rtlCol="0" anchor="t">
             <a:normAutofit/>
           </a:bodyPr>
           <a:lstStyle/>
           <a:p>
+            <a:pPr indent="0" marL="0">
+              <a:buNone/>
+            </a:pPr>
             <a:r>
               <a:rPr lang="en-US" sz="2100" dirty="0">
                 <a:solidFill>
-                  <a:srgbClr val="17364A"/>
-                </a:solidFill>
-                <a:latin typeface="Aptos" pitchFamily="34" charset="0"/>
-                <a:ea typeface="Aptos" pitchFamily="34" charset="-122"/>
-                <a:cs typeface="Aptos" pitchFamily="34" charset="-120"/>
-              </a:rPr>
-              <a:t>AI changes the skills, roles, and collaboration patterns needed in public health agencies.</a:t>
+                  <a:srgbClr val="003A63"/>
+                </a:solidFill>
+                <a:latin typeface="Aptos" pitchFamily="34" charset="0"/>
+                <a:ea typeface="Aptos" pitchFamily="34" charset="-122"/>
+                <a:cs typeface="Aptos" pitchFamily="34" charset="-120"/>
+              </a:rPr>
+              <a:t>• AI changes the skills, roles, and collaboration patterns needed in public health agencies.</a:t>
             </a:r>
             <a:endParaRPr lang="en-US" sz="2100" dirty="0"/>
           </a:p>
           <a:p>
+            <a:pPr indent="0" marL="0">
+              <a:buNone/>
+            </a:pPr>
             <a:r>
               <a:rPr lang="en-US" sz="2100" dirty="0">
                 <a:solidFill>
-                  <a:srgbClr val="17364A"/>
-                </a:solidFill>
-                <a:latin typeface="Aptos" pitchFamily="34" charset="0"/>
-                <a:ea typeface="Aptos" pitchFamily="34" charset="-122"/>
-                <a:cs typeface="Aptos" pitchFamily="34" charset="-120"/>
-              </a:rPr>
-              <a:t>It does not eliminate the need for public health expertise.</a:t>
+                  <a:srgbClr val="003A63"/>
+                </a:solidFill>
+                <a:latin typeface="Aptos" pitchFamily="34" charset="0"/>
+                <a:ea typeface="Aptos" pitchFamily="34" charset="-122"/>
+                <a:cs typeface="Aptos" pitchFamily="34" charset="-120"/>
+              </a:rPr>
+              <a:t>• It does not eliminate the need for public health expertise.</a:t>
             </a:r>
             <a:endParaRPr lang="en-US" sz="2100" dirty="0"/>
           </a:p>
           <a:p>
+            <a:pPr indent="0" marL="0">
+              <a:buNone/>
+            </a:pPr>
             <a:r>
               <a:rPr lang="en-US" sz="2100" dirty="0">
                 <a:solidFill>
-                  <a:srgbClr val="17364A"/>
-                </a:solidFill>
-                <a:latin typeface="Aptos" pitchFamily="34" charset="0"/>
-                <a:ea typeface="Aptos" pitchFamily="34" charset="-122"/>
-                <a:cs typeface="Aptos" pitchFamily="34" charset="-120"/>
-              </a:rPr>
-              <a:t>Instead, it increases the need for staff who can translate across program, data, technology, privacy,.</a:t>
+                  <a:srgbClr val="003A63"/>
+                </a:solidFill>
+                <a:latin typeface="Aptos" pitchFamily="34" charset="0"/>
+                <a:ea typeface="Aptos" pitchFamily="34" charset="-122"/>
+                <a:cs typeface="Aptos" pitchFamily="34" charset="-120"/>
+              </a:rPr>
+              <a:t>• Instead, it increases the need for staff who can translate across program, data, technology,.</a:t>
             </a:r>
             <a:endParaRPr lang="en-US" sz="2100" dirty="0"/>
           </a:p>
@@ -13180,17 +13386,17 @@
         </p:nvSpPr>
         <p:spPr>
           <a:xfrm>
-            <a:off x="7799832" y="1828800"/>
-            <a:ext cx="3145536" cy="685800"/>
-          </a:xfrm>
-          <a:prstGeom prst="rect">
-            <a:avLst/>
-          </a:prstGeom>
-          <a:noFill/>
-          <a:ln/>
-        </p:spPr>
-        <p:txBody>
-          <a:bodyPr wrap="square" lIns="0" tIns="0" rIns="0" bIns="0" rtlCol="0" anchor="t">
+            <a:off x="7799832" y="1801368"/>
+            <a:ext cx="3145536" cy="758952"/>
+          </a:xfrm>
+          <a:prstGeom prst="rect">
+            <a:avLst/>
+          </a:prstGeom>
+          <a:noFill/>
+          <a:ln/>
+        </p:spPr>
+        <p:txBody>
+          <a:bodyPr wrap="square" lIns="254" tIns="254" rIns="254" bIns="254" rtlCol="0" anchor="t">
             <a:normAutofit/>
           </a:bodyPr>
           <a:lstStyle/>
@@ -13199,7 +13405,7 @@
               <a:buNone/>
             </a:pPr>
             <a:r>
-              <a:rPr lang="en-US" sz="1550" dirty="0">
+              <a:rPr lang="en-US" sz="1320" dirty="0">
                 <a:solidFill>
                   <a:srgbClr val="17364A"/>
                 </a:solidFill>
@@ -13209,7 +13415,7 @@
               </a:rPr>
               <a:t>AI changes the skills, roles, and collaboration patterns needed in public health agencies.</a:t>
             </a:r>
-            <a:endParaRPr lang="en-US" sz="1550" dirty="0"/>
+            <a:endParaRPr lang="en-US" sz="1320" dirty="0"/>
           </a:p>
         </p:txBody>
       </p:sp>
@@ -13297,13 +13503,16 @@
           <a:ln/>
         </p:spPr>
         <p:txBody>
-          <a:bodyPr wrap="square" lIns="254" tIns="254" rIns="254" bIns="254" rtlCol="0" anchor="t">
+          <a:bodyPr wrap="square" lIns="508" tIns="508" rIns="508" bIns="508" rtlCol="0" anchor="t">
             <a:normAutofit/>
           </a:bodyPr>
           <a:lstStyle/>
           <a:p>
-            <a:r>
-              <a:rPr lang="en-US" sz="1380" dirty="0">
+            <a:pPr indent="0" marL="0">
+              <a:buNone/>
+            </a:pPr>
+            <a:r>
+              <a:rPr lang="en-US" sz="1220" dirty="0">
                 <a:solidFill>
                   <a:srgbClr val="17364A"/>
                 </a:solidFill>
@@ -13311,13 +13520,16 @@
                 <a:ea typeface="Aptos" pitchFamily="34" charset="-122"/>
                 <a:cs typeface="Aptos" pitchFamily="34" charset="-120"/>
               </a:rPr>
-              <a:t>Instead, it increases the need for staff who can translate across program, data,.</a:t>
-            </a:r>
-            <a:endParaRPr lang="en-US" sz="1380" dirty="0"/>
-          </a:p>
-          <a:p>
-            <a:r>
-              <a:rPr lang="en-US" sz="1380" dirty="0">
+              <a:t>Instead, it increases the need for staff who can translate across.</a:t>
+            </a:r>
+            <a:endParaRPr lang="en-US" sz="1220" dirty="0"/>
+          </a:p>
+          <a:p>
+            <a:pPr indent="0" marL="0">
+              <a:buNone/>
+            </a:pPr>
+            <a:r>
+              <a:rPr lang="en-US" sz="1220" dirty="0">
                 <a:solidFill>
                   <a:srgbClr val="17364A"/>
                 </a:solidFill>
@@ -13325,13 +13537,16 @@
                 <a:ea typeface="Aptos" pitchFamily="34" charset="-122"/>
                 <a:cs typeface="Aptos" pitchFamily="34" charset="-120"/>
               </a:rPr>
-              <a:t>Leaders need a workforce strategy that prepares staff to use, review, govern, and improve.</a:t>
-            </a:r>
-            <a:endParaRPr lang="en-US" sz="1380" dirty="0"/>
-          </a:p>
-          <a:p>
-            <a:r>
-              <a:rPr lang="en-US" sz="1380" dirty="0">
+              <a:t>Leaders need a workforce strategy that prepares staff to use,.</a:t>
+            </a:r>
+            <a:endParaRPr lang="en-US" sz="1220" dirty="0"/>
+          </a:p>
+          <a:p>
+            <a:pPr indent="0" marL="0">
+              <a:buNone/>
+            </a:pPr>
+            <a:r>
+              <a:rPr lang="en-US" sz="1220" dirty="0">
                 <a:solidFill>
                   <a:srgbClr val="17364A"/>
                 </a:solidFill>
@@ -13339,9 +13554,9 @@
                 <a:ea typeface="Aptos" pitchFamily="34" charset="-122"/>
                 <a:cs typeface="Aptos" pitchFamily="34" charset="-120"/>
               </a:rPr>
-              <a:t>This module helps leaders identify AI-related roles and competencies.</a:t>
-            </a:r>
-            <a:endParaRPr lang="en-US" sz="1380" dirty="0"/>
+              <a:t>This module helps leaders identify AI-related roles and.</a:t>
+            </a:r>
+            <a:endParaRPr lang="en-US" sz="1220" dirty="0"/>
           </a:p>
         </p:txBody>
       </p:sp>
@@ -13419,17 +13634,17 @@
         </p:nvSpPr>
         <p:spPr>
           <a:xfrm>
-            <a:off x="7799832" y="5001768"/>
-            <a:ext cx="3145536" cy="502920"/>
-          </a:xfrm>
-          <a:prstGeom prst="rect">
-            <a:avLst/>
-          </a:prstGeom>
-          <a:noFill/>
-          <a:ln/>
-        </p:spPr>
-        <p:txBody>
-          <a:bodyPr wrap="square" lIns="0" tIns="0" rIns="0" bIns="0" rtlCol="0" anchor="t">
+            <a:off x="7799832" y="4974336"/>
+            <a:ext cx="3145536" cy="576072"/>
+          </a:xfrm>
+          <a:prstGeom prst="rect">
+            <a:avLst/>
+          </a:prstGeom>
+          <a:noFill/>
+          <a:ln/>
+        </p:spPr>
+        <p:txBody>
+          <a:bodyPr wrap="square" lIns="254" tIns="254" rIns="254" bIns="254" rtlCol="0" anchor="t">
             <a:normAutofit/>
           </a:bodyPr>
           <a:lstStyle/>
@@ -13438,7 +13653,7 @@
               <a:buNone/>
             </a:pPr>
             <a:r>
-              <a:rPr lang="en-US" sz="1550" dirty="0">
+              <a:rPr lang="en-US" sz="1320" dirty="0">
                 <a:solidFill>
                   <a:srgbClr val="17364A"/>
                 </a:solidFill>
@@ -13446,9 +13661,9 @@
                 <a:ea typeface="Aptos" pitchFamily="34" charset="-122"/>
                 <a:cs typeface="Aptos" pitchFamily="34" charset="-120"/>
               </a:rPr>
-              <a:t>Connect the concept to public health purpose, responsible use, required safeguards, documentation, and the next action a department should take.</a:t>
-            </a:r>
-            <a:endParaRPr lang="en-US" sz="1550" dirty="0"/>
+              <a:t>Connect the concept to public health purpose, responsible use, required safeguards, documentation, and the next action a.</a:t>
+            </a:r>
+            <a:endParaRPr lang="en-US" sz="1320" dirty="0"/>
           </a:p>
         </p:txBody>
       </p:sp>
@@ -13749,49 +13964,58 @@
           <a:ln/>
         </p:spPr>
         <p:txBody>
-          <a:bodyPr wrap="square" lIns="635" tIns="635" rIns="635" bIns="635" rtlCol="0" anchor="t">
+          <a:bodyPr wrap="square" lIns="1016" tIns="1016" rIns="1016" bIns="1016" rtlCol="0" anchor="t">
             <a:normAutofit/>
           </a:bodyPr>
           <a:lstStyle/>
           <a:p>
+            <a:pPr indent="0" marL="0">
+              <a:buNone/>
+            </a:pPr>
             <a:r>
               <a:rPr lang="en-US" sz="2100" dirty="0">
                 <a:solidFill>
-                  <a:srgbClr val="17364A"/>
-                </a:solidFill>
-                <a:latin typeface="Aptos" pitchFamily="34" charset="0"/>
-                <a:ea typeface="Aptos" pitchFamily="34" charset="-122"/>
-                <a:cs typeface="Aptos" pitchFamily="34" charset="-120"/>
-              </a:rPr>
-              <a:t>Public health AI depends on people who understand both technology and context.</a:t>
+                  <a:srgbClr val="003A63"/>
+                </a:solidFill>
+                <a:latin typeface="Aptos" pitchFamily="34" charset="0"/>
+                <a:ea typeface="Aptos" pitchFamily="34" charset="-122"/>
+                <a:cs typeface="Aptos" pitchFamily="34" charset="-120"/>
+              </a:rPr>
+              <a:t>• Public health AI depends on people who understand both technology and context.</a:t>
             </a:r>
             <a:endParaRPr lang="en-US" sz="2100" dirty="0"/>
           </a:p>
           <a:p>
+            <a:pPr indent="0" marL="0">
+              <a:buNone/>
+            </a:pPr>
             <a:r>
               <a:rPr lang="en-US" sz="2100" dirty="0">
                 <a:solidFill>
-                  <a:srgbClr val="17364A"/>
-                </a:solidFill>
-                <a:latin typeface="Aptos" pitchFamily="34" charset="0"/>
-                <a:ea typeface="Aptos" pitchFamily="34" charset="-122"/>
-                <a:cs typeface="Aptos" pitchFamily="34" charset="-120"/>
-              </a:rPr>
-              <a:t>A model may generate a summary, but an epidemiologist must judge whether the summary is meaningful.</a:t>
+                  <a:srgbClr val="003A63"/>
+                </a:solidFill>
+                <a:latin typeface="Aptos" pitchFamily="34" charset="0"/>
+                <a:ea typeface="Aptos" pitchFamily="34" charset="-122"/>
+                <a:cs typeface="Aptos" pitchFamily="34" charset="-120"/>
+              </a:rPr>
+              <a:t>• A model may generate a summary, but an epidemiologist must judge whether the summary is.</a:t>
             </a:r>
             <a:endParaRPr lang="en-US" sz="2100" dirty="0"/>
           </a:p>
           <a:p>
+            <a:pPr indent="0" marL="0">
+              <a:buNone/>
+            </a:pPr>
             <a:r>
               <a:rPr lang="en-US" sz="2100" dirty="0">
                 <a:solidFill>
-                  <a:srgbClr val="17364A"/>
-                </a:solidFill>
-                <a:latin typeface="Aptos" pitchFamily="34" charset="0"/>
-                <a:ea typeface="Aptos" pitchFamily="34" charset="-122"/>
-                <a:cs typeface="Aptos" pitchFamily="34" charset="-120"/>
-              </a:rPr>
-              <a:t>A vendor may describe a product, but an informatician must assess interoperability and data flow.</a:t>
+                  <a:srgbClr val="003A63"/>
+                </a:solidFill>
+                <a:latin typeface="Aptos" pitchFamily="34" charset="0"/>
+                <a:ea typeface="Aptos" pitchFamily="34" charset="-122"/>
+                <a:cs typeface="Aptos" pitchFamily="34" charset="-120"/>
+              </a:rPr>
+              <a:t>• A vendor may describe a product, but an informatician must assess interoperability and data.</a:t>
             </a:r>
             <a:endParaRPr lang="en-US" sz="2100" dirty="0"/>
           </a:p>
@@ -13871,17 +14095,17 @@
         </p:nvSpPr>
         <p:spPr>
           <a:xfrm>
-            <a:off x="7799832" y="1828800"/>
-            <a:ext cx="3145536" cy="685800"/>
-          </a:xfrm>
-          <a:prstGeom prst="rect">
-            <a:avLst/>
-          </a:prstGeom>
-          <a:noFill/>
-          <a:ln/>
-        </p:spPr>
-        <p:txBody>
-          <a:bodyPr wrap="square" lIns="0" tIns="0" rIns="0" bIns="0" rtlCol="0" anchor="t">
+            <a:off x="7799832" y="1801368"/>
+            <a:ext cx="3145536" cy="758952"/>
+          </a:xfrm>
+          <a:prstGeom prst="rect">
+            <a:avLst/>
+          </a:prstGeom>
+          <a:noFill/>
+          <a:ln/>
+        </p:spPr>
+        <p:txBody>
+          <a:bodyPr wrap="square" lIns="254" tIns="254" rIns="254" bIns="254" rtlCol="0" anchor="t">
             <a:normAutofit/>
           </a:bodyPr>
           <a:lstStyle/>
@@ -13890,7 +14114,7 @@
               <a:buNone/>
             </a:pPr>
             <a:r>
-              <a:rPr lang="en-US" sz="1550" dirty="0">
+              <a:rPr lang="en-US" sz="1320" dirty="0">
                 <a:solidFill>
                   <a:srgbClr val="17364A"/>
                 </a:solidFill>
@@ -13900,7 +14124,7 @@
               </a:rPr>
               <a:t>Public health AI depends on people who understand both technology and context.</a:t>
             </a:r>
-            <a:endParaRPr lang="en-US" sz="1550" dirty="0"/>
+            <a:endParaRPr lang="en-US" sz="1320" dirty="0"/>
           </a:p>
         </p:txBody>
       </p:sp>
@@ -13988,13 +14212,16 @@
           <a:ln/>
         </p:spPr>
         <p:txBody>
-          <a:bodyPr wrap="square" lIns="254" tIns="254" rIns="254" bIns="254" rtlCol="0" anchor="t">
+          <a:bodyPr wrap="square" lIns="508" tIns="508" rIns="508" bIns="508" rtlCol="0" anchor="t">
             <a:normAutofit/>
           </a:bodyPr>
           <a:lstStyle/>
           <a:p>
-            <a:r>
-              <a:rPr lang="en-US" sz="1380" dirty="0">
+            <a:pPr indent="0" marL="0">
+              <a:buNone/>
+            </a:pPr>
+            <a:r>
+              <a:rPr lang="en-US" sz="1220" dirty="0">
                 <a:solidFill>
                   <a:srgbClr val="17364A"/>
                 </a:solidFill>
@@ -14002,13 +14229,16 @@
                 <a:ea typeface="Aptos" pitchFamily="34" charset="-122"/>
                 <a:cs typeface="Aptos" pitchFamily="34" charset="-120"/>
               </a:rPr>
-              <a:t>A leader may approve a use case, but governance participants must ensure that privacy,.</a:t>
-            </a:r>
-            <a:endParaRPr lang="en-US" sz="1380" dirty="0"/>
-          </a:p>
-          <a:p>
-            <a:r>
-              <a:rPr lang="en-US" sz="1380" dirty="0">
+              <a:t>A leader may approve a use case, but governance participants must.</a:t>
+            </a:r>
+            <a:endParaRPr lang="en-US" sz="1220" dirty="0"/>
+          </a:p>
+          <a:p>
+            <a:pPr indent="0" marL="0">
+              <a:buNone/>
+            </a:pPr>
+            <a:r>
+              <a:rPr lang="en-US" sz="1220" dirty="0">
                 <a:solidFill>
                   <a:srgbClr val="17364A"/>
                 </a:solidFill>
@@ -14018,11 +14248,14 @@
               </a:rPr>
               <a:t>Workforce strategy helps agencies move beyond ad hoc training.</a:t>
             </a:r>
-            <a:endParaRPr lang="en-US" sz="1380" dirty="0"/>
-          </a:p>
-          <a:p>
-            <a:r>
-              <a:rPr lang="en-US" sz="1380" dirty="0">
+            <a:endParaRPr lang="en-US" sz="1220" dirty="0"/>
+          </a:p>
+          <a:p>
+            <a:pPr indent="0" marL="0">
+              <a:buNone/>
+            </a:pPr>
+            <a:r>
+              <a:rPr lang="en-US" sz="1220" dirty="0">
                 <a:solidFill>
                   <a:srgbClr val="17364A"/>
                 </a:solidFill>
@@ -14030,9 +14263,9 @@
                 <a:ea typeface="Aptos" pitchFamily="34" charset="-122"/>
                 <a:cs typeface="Aptos" pitchFamily="34" charset="-120"/>
               </a:rPr>
-              <a:t>It defines which staff need baseline literacy, which staff need deeper technical skills,.</a:t>
-            </a:r>
-            <a:endParaRPr lang="en-US" sz="1380" dirty="0"/>
+              <a:t>It defines which staff need baseline literacy, which staff need.</a:t>
+            </a:r>
+            <a:endParaRPr lang="en-US" sz="1220" dirty="0"/>
           </a:p>
         </p:txBody>
       </p:sp>
@@ -14110,17 +14343,17 @@
         </p:nvSpPr>
         <p:spPr>
           <a:xfrm>
-            <a:off x="7799832" y="5001768"/>
-            <a:ext cx="3145536" cy="502920"/>
-          </a:xfrm>
-          <a:prstGeom prst="rect">
-            <a:avLst/>
-          </a:prstGeom>
-          <a:noFill/>
-          <a:ln/>
-        </p:spPr>
-        <p:txBody>
-          <a:bodyPr wrap="square" lIns="0" tIns="0" rIns="0" bIns="0" rtlCol="0" anchor="t">
+            <a:off x="7799832" y="4974336"/>
+            <a:ext cx="3145536" cy="576072"/>
+          </a:xfrm>
+          <a:prstGeom prst="rect">
+            <a:avLst/>
+          </a:prstGeom>
+          <a:noFill/>
+          <a:ln/>
+        </p:spPr>
+        <p:txBody>
+          <a:bodyPr wrap="square" lIns="254" tIns="254" rIns="254" bIns="254" rtlCol="0" anchor="t">
             <a:normAutofit/>
           </a:bodyPr>
           <a:lstStyle/>
@@ -14129,7 +14362,7 @@
               <a:buNone/>
             </a:pPr>
             <a:r>
-              <a:rPr lang="en-US" sz="1550" dirty="0">
+              <a:rPr lang="en-US" sz="1320" dirty="0">
                 <a:solidFill>
                   <a:srgbClr val="17364A"/>
                 </a:solidFill>
@@ -14137,9 +14370,9 @@
                 <a:ea typeface="Aptos" pitchFamily="34" charset="-122"/>
                 <a:cs typeface="Aptos" pitchFamily="34" charset="-120"/>
               </a:rPr>
-              <a:t>Connect the concept to public health purpose, responsible use, required safeguards, documentation, and the next action a department should take.</a:t>
-            </a:r>
-            <a:endParaRPr lang="en-US" sz="1550" dirty="0"/>
+              <a:t>Connect the concept to public health purpose, responsible use, required safeguards, documentation, and the next action a.</a:t>
+            </a:r>
+            <a:endParaRPr lang="en-US" sz="1320" dirty="0"/>
           </a:p>
         </p:txBody>
       </p:sp>
@@ -14440,49 +14673,58 @@
           <a:ln/>
         </p:spPr>
         <p:txBody>
-          <a:bodyPr wrap="square" lIns="635" tIns="635" rIns="635" bIns="635" rtlCol="0" anchor="t">
+          <a:bodyPr wrap="square" lIns="1016" tIns="1016" rIns="1016" bIns="1016" rtlCol="0" anchor="t">
             <a:normAutofit/>
           </a:bodyPr>
           <a:lstStyle/>
           <a:p>
+            <a:pPr indent="0" marL="0">
+              <a:buNone/>
+            </a:pPr>
             <a:r>
               <a:rPr lang="en-US" sz="2100" dirty="0">
                 <a:solidFill>
-                  <a:srgbClr val="17364A"/>
-                </a:solidFill>
-                <a:latin typeface="Aptos" pitchFamily="34" charset="0"/>
-                <a:ea typeface="Aptos" pitchFamily="34" charset="-122"/>
-                <a:cs typeface="Aptos" pitchFamily="34" charset="-120"/>
-              </a:rPr>
-              <a:t>A public health agency implements several AI tools: a document assistant, a case summarization tool, a.</a:t>
+                  <a:srgbClr val="003A63"/>
+                </a:solidFill>
+                <a:latin typeface="Aptos" pitchFamily="34" charset="0"/>
+                <a:ea typeface="Aptos" pitchFamily="34" charset="-122"/>
+                <a:cs typeface="Aptos" pitchFamily="34" charset="-120"/>
+              </a:rPr>
+              <a:t>• A public health agency implements several AI tools: a document assistant, a case summarization.</a:t>
             </a:r>
             <a:endParaRPr lang="en-US" sz="2100" dirty="0"/>
           </a:p>
           <a:p>
+            <a:pPr indent="0" marL="0">
+              <a:buNone/>
+            </a:pPr>
             <a:r>
               <a:rPr lang="en-US" sz="2100" dirty="0">
                 <a:solidFill>
-                  <a:srgbClr val="17364A"/>
-                </a:solidFill>
-                <a:latin typeface="Aptos" pitchFamily="34" charset="0"/>
-                <a:ea typeface="Aptos" pitchFamily="34" charset="-122"/>
-                <a:cs typeface="Aptos" pitchFamily="34" charset="-120"/>
-              </a:rPr>
-              <a:t>Staff quickly discover that no single role owns all the knowledge needed.</a:t>
+                  <a:srgbClr val="003A63"/>
+                </a:solidFill>
+                <a:latin typeface="Aptos" pitchFamily="34" charset="0"/>
+                <a:ea typeface="Aptos" pitchFamily="34" charset="-122"/>
+                <a:cs typeface="Aptos" pitchFamily="34" charset="-120"/>
+              </a:rPr>
+              <a:t>• Staff quickly discover that no single role owns all the knowledge needed.</a:t>
             </a:r>
             <a:endParaRPr lang="en-US" sz="2100" dirty="0"/>
           </a:p>
           <a:p>
+            <a:pPr indent="0" marL="0">
+              <a:buNone/>
+            </a:pPr>
             <a:r>
               <a:rPr lang="en-US" sz="2100" dirty="0">
                 <a:solidFill>
-                  <a:srgbClr val="17364A"/>
-                </a:solidFill>
-                <a:latin typeface="Aptos" pitchFamily="34" charset="0"/>
-                <a:ea typeface="Aptos" pitchFamily="34" charset="-122"/>
-                <a:cs typeface="Aptos" pitchFamily="34" charset="-120"/>
-              </a:rPr>
-              <a:t>Program staff understand workflow, IT understands integration, privacy understands data restrictions,.</a:t>
+                  <a:srgbClr val="003A63"/>
+                </a:solidFill>
+                <a:latin typeface="Aptos" pitchFamily="34" charset="0"/>
+                <a:ea typeface="Aptos" pitchFamily="34" charset="-122"/>
+                <a:cs typeface="Aptos" pitchFamily="34" charset="-120"/>
+              </a:rPr>
+              <a:t>• Program staff understand workflow, IT understands integration, privacy understands data.</a:t>
             </a:r>
             <a:endParaRPr lang="en-US" sz="2100" dirty="0"/>
           </a:p>
@@ -14562,17 +14804,17 @@
         </p:nvSpPr>
         <p:spPr>
           <a:xfrm>
-            <a:off x="7799832" y="1828800"/>
-            <a:ext cx="3145536" cy="685800"/>
-          </a:xfrm>
-          <a:prstGeom prst="rect">
-            <a:avLst/>
-          </a:prstGeom>
-          <a:noFill/>
-          <a:ln/>
-        </p:spPr>
-        <p:txBody>
-          <a:bodyPr wrap="square" lIns="0" tIns="0" rIns="0" bIns="0" rtlCol="0" anchor="t">
+            <a:off x="7799832" y="1801368"/>
+            <a:ext cx="3145536" cy="758952"/>
+          </a:xfrm>
+          <a:prstGeom prst="rect">
+            <a:avLst/>
+          </a:prstGeom>
+          <a:noFill/>
+          <a:ln/>
+        </p:spPr>
+        <p:txBody>
+          <a:bodyPr wrap="square" lIns="254" tIns="254" rIns="254" bIns="254" rtlCol="0" anchor="t">
             <a:normAutofit/>
           </a:bodyPr>
           <a:lstStyle/>
@@ -14581,7 +14823,7 @@
               <a:buNone/>
             </a:pPr>
             <a:r>
-              <a:rPr lang="en-US" sz="1550" dirty="0">
+              <a:rPr lang="en-US" sz="1320" dirty="0">
                 <a:solidFill>
                   <a:srgbClr val="17364A"/>
                 </a:solidFill>
@@ -14591,7 +14833,7 @@
               </a:rPr>
               <a:t>A public health agency implements several AI tools: a document assistant, a case summarization tool, a.</a:t>
             </a:r>
-            <a:endParaRPr lang="en-US" sz="1550" dirty="0"/>
+            <a:endParaRPr lang="en-US" sz="1320" dirty="0"/>
           </a:p>
         </p:txBody>
       </p:sp>
@@ -14679,13 +14921,16 @@
           <a:ln/>
         </p:spPr>
         <p:txBody>
-          <a:bodyPr wrap="square" lIns="254" tIns="254" rIns="254" bIns="254" rtlCol="0" anchor="t">
+          <a:bodyPr wrap="square" lIns="508" tIns="508" rIns="508" bIns="508" rtlCol="0" anchor="t">
             <a:normAutofit/>
           </a:bodyPr>
           <a:lstStyle/>
           <a:p>
-            <a:r>
-              <a:rPr lang="en-US" sz="1380" dirty="0">
+            <a:pPr indent="0" marL="0">
+              <a:buNone/>
+            </a:pPr>
+            <a:r>
+              <a:rPr lang="en-US" sz="1220" dirty="0">
                 <a:solidFill>
                   <a:srgbClr val="17364A"/>
                 </a:solidFill>
@@ -14693,13 +14938,16 @@
                 <a:ea typeface="Aptos" pitchFamily="34" charset="-122"/>
                 <a:cs typeface="Aptos" pitchFamily="34" charset="-120"/>
               </a:rPr>
-              <a:t>A public health agency implements several AI tools: a document assistant, a case.</a:t>
-            </a:r>
-            <a:endParaRPr lang="en-US" sz="1380" dirty="0"/>
-          </a:p>
-          <a:p>
-            <a:r>
-              <a:rPr lang="en-US" sz="1380" dirty="0">
+              <a:t>A public health agency implements several AI tools: a document.</a:t>
+            </a:r>
+            <a:endParaRPr lang="en-US" sz="1220" dirty="0"/>
+          </a:p>
+          <a:p>
+            <a:pPr indent="0" marL="0">
+              <a:buNone/>
+            </a:pPr>
+            <a:r>
+              <a:rPr lang="en-US" sz="1220" dirty="0">
                 <a:solidFill>
                   <a:srgbClr val="17364A"/>
                 </a:solidFill>
@@ -14707,13 +14955,16 @@
                 <a:ea typeface="Aptos" pitchFamily="34" charset="-122"/>
                 <a:cs typeface="Aptos" pitchFamily="34" charset="-120"/>
               </a:rPr>
-              <a:t>Program staff understand workflow, IT understands integration, privacy understands data.</a:t>
-            </a:r>
-            <a:endParaRPr lang="en-US" sz="1380" dirty="0"/>
-          </a:p>
-          <a:p>
-            <a:r>
-              <a:rPr lang="en-US" sz="1380" dirty="0">
+              <a:t>Program staff understand workflow, IT understands integration,.</a:t>
+            </a:r>
+            <a:endParaRPr lang="en-US" sz="1220" dirty="0"/>
+          </a:p>
+          <a:p>
+            <a:pPr indent="0" marL="0">
+              <a:buNone/>
+            </a:pPr>
+            <a:r>
+              <a:rPr lang="en-US" sz="1220" dirty="0">
                 <a:solidFill>
                   <a:srgbClr val="17364A"/>
                 </a:solidFill>
@@ -14721,9 +14972,9 @@
                 <a:ea typeface="Aptos" pitchFamily="34" charset="-122"/>
                 <a:cs typeface="Aptos" pitchFamily="34" charset="-120"/>
               </a:rPr>
-              <a:t>However, there is no role that connects these perspectives consistently.</a:t>
-            </a:r>
-            <a:endParaRPr lang="en-US" sz="1380" dirty="0"/>
+              <a:t>However, there is no role that connects these perspectives.</a:t>
+            </a:r>
+            <a:endParaRPr lang="en-US" sz="1220" dirty="0"/>
           </a:p>
         </p:txBody>
       </p:sp>
@@ -14801,17 +15052,17 @@
         </p:nvSpPr>
         <p:spPr>
           <a:xfrm>
-            <a:off x="7799832" y="5001768"/>
-            <a:ext cx="3145536" cy="502920"/>
-          </a:xfrm>
-          <a:prstGeom prst="rect">
-            <a:avLst/>
-          </a:prstGeom>
-          <a:noFill/>
-          <a:ln/>
-        </p:spPr>
-        <p:txBody>
-          <a:bodyPr wrap="square" lIns="0" tIns="0" rIns="0" bIns="0" rtlCol="0" anchor="t">
+            <a:off x="7799832" y="4974336"/>
+            <a:ext cx="3145536" cy="576072"/>
+          </a:xfrm>
+          <a:prstGeom prst="rect">
+            <a:avLst/>
+          </a:prstGeom>
+          <a:noFill/>
+          <a:ln/>
+        </p:spPr>
+        <p:txBody>
+          <a:bodyPr wrap="square" lIns="254" tIns="254" rIns="254" bIns="254" rtlCol="0" anchor="t">
             <a:normAutofit/>
           </a:bodyPr>
           <a:lstStyle/>
@@ -14820,7 +15071,7 @@
               <a:buNone/>
             </a:pPr>
             <a:r>
-              <a:rPr lang="en-US" sz="1550" dirty="0">
+              <a:rPr lang="en-US" sz="1320" dirty="0">
                 <a:solidFill>
                   <a:srgbClr val="17364A"/>
                 </a:solidFill>
@@ -14828,9 +15079,9 @@
                 <a:ea typeface="Aptos" pitchFamily="34" charset="-122"/>
                 <a:cs typeface="Aptos" pitchFamily="34" charset="-120"/>
               </a:rPr>
-              <a:t>Connect the concept to public health purpose, responsible use, required safeguards, documentation, and the next action a department should take.</a:t>
-            </a:r>
-            <a:endParaRPr lang="en-US" sz="1550" dirty="0"/>
+              <a:t>Connect the concept to public health purpose, responsible use, required safeguards, documentation, and the next action a.</a:t>
+            </a:r>
+            <a:endParaRPr lang="en-US" sz="1320" dirty="0"/>
           </a:p>
         </p:txBody>
       </p:sp>
@@ -15131,49 +15382,58 @@
           <a:ln/>
         </p:spPr>
         <p:txBody>
-          <a:bodyPr wrap="square" lIns="635" tIns="635" rIns="635" bIns="635" rtlCol="0" anchor="t">
+          <a:bodyPr wrap="square" lIns="1016" tIns="1016" rIns="1016" bIns="1016" rtlCol="0" anchor="t">
             <a:normAutofit/>
           </a:bodyPr>
           <a:lstStyle/>
           <a:p>
+            <a:pPr indent="0" marL="0">
+              <a:buNone/>
+            </a:pPr>
             <a:r>
               <a:rPr lang="en-US" sz="2100" dirty="0">
                 <a:solidFill>
-                  <a:srgbClr val="17364A"/>
-                </a:solidFill>
-                <a:latin typeface="Aptos" pitchFamily="34" charset="0"/>
-                <a:ea typeface="Aptos" pitchFamily="34" charset="-122"/>
-                <a:cs typeface="Aptos" pitchFamily="34" charset="-120"/>
-              </a:rPr>
-              <a:t>An AI workforce strategy should define role groups.</a:t>
+                  <a:srgbClr val="003A63"/>
+                </a:solidFill>
+                <a:latin typeface="Aptos" pitchFamily="34" charset="0"/>
+                <a:ea typeface="Aptos" pitchFamily="34" charset="-122"/>
+                <a:cs typeface="Aptos" pitchFamily="34" charset="-120"/>
+              </a:rPr>
+              <a:t>• An AI workforce strategy should define role groups.</a:t>
             </a:r>
             <a:endParaRPr lang="en-US" sz="2100" dirty="0"/>
           </a:p>
           <a:p>
+            <a:pPr indent="0" marL="0">
+              <a:buNone/>
+            </a:pPr>
             <a:r>
               <a:rPr lang="en-US" sz="2100" dirty="0">
                 <a:solidFill>
-                  <a:srgbClr val="17364A"/>
-                </a:solidFill>
-                <a:latin typeface="Aptos" pitchFamily="34" charset="0"/>
-                <a:ea typeface="Aptos" pitchFamily="34" charset="-122"/>
-                <a:cs typeface="Aptos" pitchFamily="34" charset="-120"/>
-              </a:rPr>
-              <a:t>General staff may need baseline AI literacy, approved-use guidance, and prompt safety.</a:t>
+                  <a:srgbClr val="003A63"/>
+                </a:solidFill>
+                <a:latin typeface="Aptos" pitchFamily="34" charset="0"/>
+                <a:ea typeface="Aptos" pitchFamily="34" charset="-122"/>
+                <a:cs typeface="Aptos" pitchFamily="34" charset="-120"/>
+              </a:rPr>
+              <a:t>• General staff may need baseline AI literacy, approved-use guidance, and prompt safety.</a:t>
             </a:r>
             <a:endParaRPr lang="en-US" sz="2100" dirty="0"/>
           </a:p>
           <a:p>
+            <a:pPr indent="0" marL="0">
+              <a:buNone/>
+            </a:pPr>
             <a:r>
               <a:rPr lang="en-US" sz="2100" dirty="0">
                 <a:solidFill>
-                  <a:srgbClr val="17364A"/>
-                </a:solidFill>
-                <a:latin typeface="Aptos" pitchFamily="34" charset="0"/>
-                <a:ea typeface="Aptos" pitchFamily="34" charset="-122"/>
-                <a:cs typeface="Aptos" pitchFamily="34" charset="-120"/>
-              </a:rPr>
-              <a:t>Frontline users need workflow-specific training and escalation expectations.</a:t>
+                  <a:srgbClr val="003A63"/>
+                </a:solidFill>
+                <a:latin typeface="Aptos" pitchFamily="34" charset="0"/>
+                <a:ea typeface="Aptos" pitchFamily="34" charset="-122"/>
+                <a:cs typeface="Aptos" pitchFamily="34" charset="-120"/>
+              </a:rPr>
+              <a:t>• Frontline users need workflow-specific training and escalation expectations.</a:t>
             </a:r>
             <a:endParaRPr lang="en-US" sz="2100" dirty="0"/>
           </a:p>
@@ -15253,17 +15513,17 @@
         </p:nvSpPr>
         <p:spPr>
           <a:xfrm>
-            <a:off x="7799832" y="1828800"/>
-            <a:ext cx="3145536" cy="685800"/>
-          </a:xfrm>
-          <a:prstGeom prst="rect">
-            <a:avLst/>
-          </a:prstGeom>
-          <a:noFill/>
-          <a:ln/>
-        </p:spPr>
-        <p:txBody>
-          <a:bodyPr wrap="square" lIns="0" tIns="0" rIns="0" bIns="0" rtlCol="0" anchor="t">
+            <a:off x="7799832" y="1801368"/>
+            <a:ext cx="3145536" cy="758952"/>
+          </a:xfrm>
+          <a:prstGeom prst="rect">
+            <a:avLst/>
+          </a:prstGeom>
+          <a:noFill/>
+          <a:ln/>
+        </p:spPr>
+        <p:txBody>
+          <a:bodyPr wrap="square" lIns="254" tIns="254" rIns="254" bIns="254" rtlCol="0" anchor="t">
             <a:normAutofit/>
           </a:bodyPr>
           <a:lstStyle/>
@@ -15272,7 +15532,7 @@
               <a:buNone/>
             </a:pPr>
             <a:r>
-              <a:rPr lang="en-US" sz="1550" dirty="0">
+              <a:rPr lang="en-US" sz="1320" dirty="0">
                 <a:solidFill>
                   <a:srgbClr val="17364A"/>
                 </a:solidFill>
@@ -15282,7 +15542,7 @@
               </a:rPr>
               <a:t>An AI workforce strategy should define role groups.</a:t>
             </a:r>
-            <a:endParaRPr lang="en-US" sz="1550" dirty="0"/>
+            <a:endParaRPr lang="en-US" sz="1320" dirty="0"/>
           </a:p>
         </p:txBody>
       </p:sp>
@@ -15370,13 +15630,16 @@
           <a:ln/>
         </p:spPr>
         <p:txBody>
-          <a:bodyPr wrap="square" lIns="254" tIns="254" rIns="254" bIns="254" rtlCol="0" anchor="t">
+          <a:bodyPr wrap="square" lIns="508" tIns="508" rIns="508" bIns="508" rtlCol="0" anchor="t">
             <a:normAutofit/>
           </a:bodyPr>
           <a:lstStyle/>
           <a:p>
-            <a:r>
-              <a:rPr lang="en-US" sz="1380" dirty="0">
+            <a:pPr indent="0" marL="0">
+              <a:buNone/>
+            </a:pPr>
+            <a:r>
+              <a:rPr lang="en-US" sz="1220" dirty="0">
                 <a:solidFill>
                   <a:srgbClr val="17364A"/>
                 </a:solidFill>
@@ -15386,11 +15649,14 @@
               </a:rPr>
               <a:t>Supervisors need to support review, feedback, and documentation.</a:t>
             </a:r>
-            <a:endParaRPr lang="en-US" sz="1380" dirty="0"/>
-          </a:p>
-          <a:p>
-            <a:r>
-              <a:rPr lang="en-US" sz="1380" dirty="0">
+            <a:endParaRPr lang="en-US" sz="1220" dirty="0"/>
+          </a:p>
+          <a:p>
+            <a:pPr indent="0" marL="0">
+              <a:buNone/>
+            </a:pPr>
+            <a:r>
+              <a:rPr lang="en-US" sz="1220" dirty="0">
                 <a:solidFill>
                   <a:srgbClr val="17364A"/>
                 </a:solidFill>
@@ -15398,13 +15664,16 @@
                 <a:ea typeface="Aptos" pitchFamily="34" charset="-122"/>
                 <a:cs typeface="Aptos" pitchFamily="34" charset="-120"/>
               </a:rPr>
-              <a:t>Program owners need to understand accountability and performance monitoring.</a:t>
-            </a:r>
-            <a:endParaRPr lang="en-US" sz="1380" dirty="0"/>
-          </a:p>
-          <a:p>
-            <a:r>
-              <a:rPr lang="en-US" sz="1380" dirty="0">
+              <a:t>Program owners need to understand accountability and performance.</a:t>
+            </a:r>
+            <a:endParaRPr lang="en-US" sz="1220" dirty="0"/>
+          </a:p>
+          <a:p>
+            <a:pPr indent="0" marL="0">
+              <a:buNone/>
+            </a:pPr>
+            <a:r>
+              <a:rPr lang="en-US" sz="1220" dirty="0">
                 <a:solidFill>
                   <a:srgbClr val="17364A"/>
                 </a:solidFill>
@@ -15412,9 +15681,9 @@
                 <a:ea typeface="Aptos" pitchFamily="34" charset="-122"/>
                 <a:cs typeface="Aptos" pitchFamily="34" charset="-120"/>
               </a:rPr>
-              <a:t>Technical staff need deeper knowledge of data, architecture, validation, and security.</a:t>
-            </a:r>
-            <a:endParaRPr lang="en-US" sz="1380" dirty="0"/>
+              <a:t>Technical staff need deeper knowledge of data, architecture,.</a:t>
+            </a:r>
+            <a:endParaRPr lang="en-US" sz="1220" dirty="0"/>
           </a:p>
         </p:txBody>
       </p:sp>
@@ -15492,17 +15761,17 @@
         </p:nvSpPr>
         <p:spPr>
           <a:xfrm>
-            <a:off x="7799832" y="5001768"/>
-            <a:ext cx="3145536" cy="502920"/>
-          </a:xfrm>
-          <a:prstGeom prst="rect">
-            <a:avLst/>
-          </a:prstGeom>
-          <a:noFill/>
-          <a:ln/>
-        </p:spPr>
-        <p:txBody>
-          <a:bodyPr wrap="square" lIns="0" tIns="0" rIns="0" bIns="0" rtlCol="0" anchor="t">
+            <a:off x="7799832" y="4974336"/>
+            <a:ext cx="3145536" cy="576072"/>
+          </a:xfrm>
+          <a:prstGeom prst="rect">
+            <a:avLst/>
+          </a:prstGeom>
+          <a:noFill/>
+          <a:ln/>
+        </p:spPr>
+        <p:txBody>
+          <a:bodyPr wrap="square" lIns="254" tIns="254" rIns="254" bIns="254" rtlCol="0" anchor="t">
             <a:normAutofit/>
           </a:bodyPr>
           <a:lstStyle/>
@@ -15511,7 +15780,7 @@
               <a:buNone/>
             </a:pPr>
             <a:r>
-              <a:rPr lang="en-US" sz="1550" dirty="0">
+              <a:rPr lang="en-US" sz="1320" dirty="0">
                 <a:solidFill>
                   <a:srgbClr val="17364A"/>
                 </a:solidFill>
@@ -15519,9 +15788,9 @@
                 <a:ea typeface="Aptos" pitchFamily="34" charset="-122"/>
                 <a:cs typeface="Aptos" pitchFamily="34" charset="-120"/>
               </a:rPr>
-              <a:t>Translate this concept into clear decision rights, review steps, documentation expectations, and escalation paths before an AI-supported workflow is approved.</a:t>
-            </a:r>
-            <a:endParaRPr lang="en-US" sz="1550" dirty="0"/>
+              <a:t>Translate this concept into clear decision rights, review steps, documentation expectations, and escalation paths before.</a:t>
+            </a:r>
+            <a:endParaRPr lang="en-US" sz="1320" dirty="0"/>
           </a:p>
         </p:txBody>
       </p:sp>

--- a/downloads/presentations/modules/exe-440.pptx
+++ b/downloads/presentations/modules/exe-440.pptx
@@ -3228,11 +3228,11 @@
         <p:spPr>
           <a:xfrm>
             <a:off x="7635240" y="1325880"/>
-            <a:ext cx="3474720" cy="1325880"/>
+            <a:ext cx="3474720" cy="1207008"/>
           </a:xfrm>
           <a:prstGeom prst="roundRect">
             <a:avLst>
-              <a:gd name="adj" fmla="val 8276"/>
+              <a:gd name="adj" fmla="val 9091"/>
             </a:avLst>
           </a:prstGeom>
           <a:solidFill>
@@ -3294,7 +3294,7 @@
         <p:spPr>
           <a:xfrm>
             <a:off x="7799832" y="1801368"/>
-            <a:ext cx="3145536" cy="758952"/>
+            <a:ext cx="3145536" cy="640080"/>
           </a:xfrm>
           <a:prstGeom prst="rect">
             <a:avLst/>
@@ -3334,7 +3334,7 @@
         </p:nvSpPr>
         <p:spPr>
           <a:xfrm>
-            <a:off x="7635240" y="2788920"/>
+            <a:off x="7635240" y="2670048"/>
             <a:ext cx="3474720" cy="1536192"/>
           </a:xfrm>
           <a:prstGeom prst="roundRect">
@@ -3361,8 +3361,8 @@
         </p:nvSpPr>
         <p:spPr>
           <a:xfrm>
-            <a:off x="7799832" y="2935224"/>
-            <a:ext cx="3145536" cy="256032"/>
+            <a:off x="7799832" y="2798064"/>
+            <a:ext cx="3145536" cy="237744"/>
           </a:xfrm>
           <a:prstGeom prst="rect">
             <a:avLst/>
@@ -3378,7 +3378,7 @@
               <a:buNone/>
             </a:pPr>
             <a:r>
-              <a:rPr lang="en-US" sz="1300" b="1" dirty="0">
+              <a:rPr lang="en-US" sz="1250" b="1" dirty="0">
                 <a:solidFill>
                   <a:srgbClr val="0068B7"/>
                 </a:solidFill>
@@ -3386,101 +3386,317 @@
                 <a:ea typeface="Aptos" pitchFamily="34" charset="-122"/>
                 <a:cs typeface="Aptos" pitchFamily="34" charset="-120"/>
               </a:rPr>
-              <a:t>Concept checkpoints</a:t>
-            </a:r>
-            <a:endParaRPr lang="en-US" sz="1300" dirty="0"/>
-          </a:p>
-        </p:txBody>
-      </p:sp>
-      <p:sp>
-        <p:nvSpPr>
-          <p:cNvPr id="15" name="Text 13"/>
-          <p:cNvSpPr/>
-          <p:nvPr/>
-        </p:nvSpPr>
-        <p:spPr>
-          <a:xfrm>
-            <a:off x="7818120" y="3300984"/>
-            <a:ext cx="3090672" cy="877824"/>
-          </a:xfrm>
-          <a:prstGeom prst="rect">
-            <a:avLst/>
-          </a:prstGeom>
-          <a:noFill/>
-          <a:ln/>
-        </p:spPr>
-        <p:txBody>
-          <a:bodyPr wrap="square" lIns="508" tIns="508" rIns="508" bIns="508" rtlCol="0" anchor="t">
+              <a:t>Risk control loop</a:t>
+            </a:r>
+            <a:endParaRPr lang="en-US" sz="1250" dirty="0"/>
+          </a:p>
+        </p:txBody>
+      </p:sp>
+      <p:sp>
+        <p:nvSpPr>
+          <p:cNvPr id="15" name="Shape 13"/>
+          <p:cNvSpPr/>
+          <p:nvPr/>
+        </p:nvSpPr>
+        <p:spPr>
+          <a:xfrm>
+            <a:off x="8763000" y="3351276"/>
+            <a:ext cx="164592" cy="0"/>
+          </a:xfrm>
+          <a:prstGeom prst="line">
+            <a:avLst/>
+          </a:prstGeom>
+          <a:noFill/>
+          <a:ln w="15240">
+            <a:solidFill>
+              <a:srgbClr val="8ABBD8"/>
+            </a:solidFill>
+            <a:prstDash val="solid"/>
+          </a:ln>
+        </p:spPr>
+      </p:sp>
+      <p:sp>
+        <p:nvSpPr>
+          <p:cNvPr id="16" name="Shape 14"/>
+          <p:cNvSpPr/>
+          <p:nvPr/>
+        </p:nvSpPr>
+        <p:spPr>
+          <a:xfrm>
+            <a:off x="7872984" y="3200400"/>
+            <a:ext cx="890016" cy="301752"/>
+          </a:xfrm>
+          <a:prstGeom prst="roundRect">
+            <a:avLst>
+              <a:gd name="adj" fmla="val 24242"/>
+            </a:avLst>
+          </a:prstGeom>
+          <a:solidFill>
+            <a:srgbClr val="0068B7"/>
+          </a:solidFill>
+          <a:ln w="12700">
+            <a:solidFill>
+              <a:srgbClr val="0068B7"/>
+            </a:solidFill>
+            <a:prstDash val="solid"/>
+          </a:ln>
+        </p:spPr>
+      </p:sp>
+      <p:sp>
+        <p:nvSpPr>
+          <p:cNvPr id="17" name="Text 15"/>
+          <p:cNvSpPr/>
+          <p:nvPr/>
+        </p:nvSpPr>
+        <p:spPr>
+          <a:xfrm>
+            <a:off x="7909560" y="3273552"/>
+            <a:ext cx="816864" cy="146304"/>
+          </a:xfrm>
+          <a:prstGeom prst="rect">
+            <a:avLst/>
+          </a:prstGeom>
+          <a:noFill/>
+          <a:ln/>
+        </p:spPr>
+        <p:txBody>
+          <a:bodyPr wrap="square" lIns="0" tIns="0" rIns="0" bIns="0" rtlCol="0" anchor="ctr">
             <a:normAutofit/>
           </a:bodyPr>
           <a:lstStyle/>
           <a:p>
-            <a:pPr indent="0" marL="0">
-              <a:buNone/>
-            </a:pPr>
-            <a:r>
-              <a:rPr lang="en-US" sz="1220" dirty="0">
-                <a:solidFill>
-                  <a:srgbClr val="17364A"/>
-                </a:solidFill>
-                <a:latin typeface="Aptos" pitchFamily="34" charset="0"/>
-                <a:ea typeface="Aptos" pitchFamily="34" charset="-122"/>
-                <a:cs typeface="Aptos" pitchFamily="34" charset="-120"/>
-              </a:rPr>
-              <a:t>Another risk is uneven access to AI skills.</a:t>
-            </a:r>
-            <a:endParaRPr lang="en-US" sz="1220" dirty="0"/>
-          </a:p>
-          <a:p>
-            <a:pPr indent="0" marL="0">
-              <a:buNone/>
-            </a:pPr>
-            <a:r>
-              <a:rPr lang="en-US" sz="1220" dirty="0">
-                <a:solidFill>
-                  <a:srgbClr val="17364A"/>
-                </a:solidFill>
-                <a:latin typeface="Aptos" pitchFamily="34" charset="0"/>
-                <a:ea typeface="Aptos" pitchFamily="34" charset="-122"/>
-                <a:cs typeface="Aptos" pitchFamily="34" charset="-120"/>
-              </a:rPr>
-              <a:t>Staff in better-resourced programs may receive training first,.</a:t>
-            </a:r>
-            <a:endParaRPr lang="en-US" sz="1220" dirty="0"/>
-          </a:p>
-          <a:p>
-            <a:pPr indent="0" marL="0">
-              <a:buNone/>
-            </a:pPr>
-            <a:r>
-              <a:rPr lang="en-US" sz="1220" dirty="0">
-                <a:solidFill>
-                  <a:srgbClr val="17364A"/>
-                </a:solidFill>
-                <a:latin typeface="Aptos" pitchFamily="34" charset="0"/>
-                <a:ea typeface="Aptos" pitchFamily="34" charset="-122"/>
-                <a:cs typeface="Aptos" pitchFamily="34" charset="-120"/>
-              </a:rPr>
-              <a:t>A guardrail is to create a role-based training plan that includes.</a:t>
-            </a:r>
-            <a:endParaRPr lang="en-US" sz="1220" dirty="0"/>
-          </a:p>
-        </p:txBody>
-      </p:sp>
-      <p:sp>
-        <p:nvSpPr>
-          <p:cNvPr id="16" name="Shape 14"/>
-          <p:cNvSpPr/>
-          <p:nvPr/>
-        </p:nvSpPr>
-        <p:spPr>
-          <a:xfrm>
-            <a:off x="7635240" y="4498848"/>
-            <a:ext cx="3474720" cy="1143000"/>
+            <a:pPr algn="ctr" indent="0" marL="0">
+              <a:buNone/>
+            </a:pPr>
+            <a:r>
+              <a:rPr lang="en-US" sz="880" b="1" dirty="0">
+                <a:solidFill>
+                  <a:srgbClr val="FFFFFF"/>
+                </a:solidFill>
+                <a:latin typeface="Aptos" pitchFamily="34" charset="0"/>
+                <a:ea typeface="Aptos" pitchFamily="34" charset="-122"/>
+                <a:cs typeface="Aptos" pitchFamily="34" charset="-120"/>
+              </a:rPr>
+              <a:t>Identify</a:t>
+            </a:r>
+            <a:endParaRPr lang="en-US" sz="880" dirty="0"/>
+          </a:p>
+        </p:txBody>
+      </p:sp>
+      <p:sp>
+        <p:nvSpPr>
+          <p:cNvPr id="18" name="Shape 16"/>
+          <p:cNvSpPr/>
+          <p:nvPr/>
+        </p:nvSpPr>
+        <p:spPr>
+          <a:xfrm>
+            <a:off x="9817608" y="3351276"/>
+            <a:ext cx="164592" cy="0"/>
+          </a:xfrm>
+          <a:prstGeom prst="line">
+            <a:avLst/>
+          </a:prstGeom>
+          <a:noFill/>
+          <a:ln w="15240">
+            <a:solidFill>
+              <a:srgbClr val="8ABBD8"/>
+            </a:solidFill>
+            <a:prstDash val="solid"/>
+          </a:ln>
+        </p:spPr>
+      </p:sp>
+      <p:sp>
+        <p:nvSpPr>
+          <p:cNvPr id="19" name="Shape 17"/>
+          <p:cNvSpPr/>
+          <p:nvPr/>
+        </p:nvSpPr>
+        <p:spPr>
+          <a:xfrm>
+            <a:off x="8927592" y="3200400"/>
+            <a:ext cx="890016" cy="301752"/>
           </a:xfrm>
           <a:prstGeom prst="roundRect">
             <a:avLst>
-              <a:gd name="adj" fmla="val 9600"/>
+              <a:gd name="adj" fmla="val 24242"/>
+            </a:avLst>
+          </a:prstGeom>
+          <a:solidFill>
+            <a:srgbClr val="2F8A28"/>
+          </a:solidFill>
+          <a:ln w="12700">
+            <a:solidFill>
+              <a:srgbClr val="2F8A28"/>
+            </a:solidFill>
+            <a:prstDash val="solid"/>
+          </a:ln>
+        </p:spPr>
+      </p:sp>
+      <p:sp>
+        <p:nvSpPr>
+          <p:cNvPr id="20" name="Text 18"/>
+          <p:cNvSpPr/>
+          <p:nvPr/>
+        </p:nvSpPr>
+        <p:spPr>
+          <a:xfrm>
+            <a:off x="8964168" y="3273552"/>
+            <a:ext cx="816864" cy="146304"/>
+          </a:xfrm>
+          <a:prstGeom prst="rect">
+            <a:avLst/>
+          </a:prstGeom>
+          <a:noFill/>
+          <a:ln/>
+        </p:spPr>
+        <p:txBody>
+          <a:bodyPr wrap="square" lIns="0" tIns="0" rIns="0" bIns="0" rtlCol="0" anchor="ctr">
+            <a:normAutofit/>
+          </a:bodyPr>
+          <a:lstStyle/>
+          <a:p>
+            <a:pPr algn="ctr" indent="0" marL="0">
+              <a:buNone/>
+            </a:pPr>
+            <a:r>
+              <a:rPr lang="en-US" sz="880" b="1" dirty="0">
+                <a:solidFill>
+                  <a:srgbClr val="FFFFFF"/>
+                </a:solidFill>
+                <a:latin typeface="Aptos" pitchFamily="34" charset="0"/>
+                <a:ea typeface="Aptos" pitchFamily="34" charset="-122"/>
+                <a:cs typeface="Aptos" pitchFamily="34" charset="-120"/>
+              </a:rPr>
+              <a:t>Control</a:t>
+            </a:r>
+            <a:endParaRPr lang="en-US" sz="880" dirty="0"/>
+          </a:p>
+        </p:txBody>
+      </p:sp>
+      <p:sp>
+        <p:nvSpPr>
+          <p:cNvPr id="21" name="Shape 19"/>
+          <p:cNvSpPr/>
+          <p:nvPr/>
+        </p:nvSpPr>
+        <p:spPr>
+          <a:xfrm>
+            <a:off x="9982200" y="3200400"/>
+            <a:ext cx="890016" cy="301752"/>
+          </a:xfrm>
+          <a:prstGeom prst="roundRect">
+            <a:avLst>
+              <a:gd name="adj" fmla="val 24242"/>
+            </a:avLst>
+          </a:prstGeom>
+          <a:solidFill>
+            <a:srgbClr val="6A4CA3"/>
+          </a:solidFill>
+          <a:ln w="12700">
+            <a:solidFill>
+              <a:srgbClr val="6A4CA3"/>
+            </a:solidFill>
+            <a:prstDash val="solid"/>
+          </a:ln>
+        </p:spPr>
+      </p:sp>
+      <p:sp>
+        <p:nvSpPr>
+          <p:cNvPr id="22" name="Text 20"/>
+          <p:cNvSpPr/>
+          <p:nvPr/>
+        </p:nvSpPr>
+        <p:spPr>
+          <a:xfrm>
+            <a:off x="10018776" y="3273552"/>
+            <a:ext cx="816864" cy="146304"/>
+          </a:xfrm>
+          <a:prstGeom prst="rect">
+            <a:avLst/>
+          </a:prstGeom>
+          <a:noFill/>
+          <a:ln/>
+        </p:spPr>
+        <p:txBody>
+          <a:bodyPr wrap="square" lIns="0" tIns="0" rIns="0" bIns="0" rtlCol="0" anchor="ctr">
+            <a:normAutofit/>
+          </a:bodyPr>
+          <a:lstStyle/>
+          <a:p>
+            <a:pPr algn="ctr" indent="0" marL="0">
+              <a:buNone/>
+            </a:pPr>
+            <a:r>
+              <a:rPr lang="en-US" sz="880" b="1" dirty="0">
+                <a:solidFill>
+                  <a:srgbClr val="FFFFFF"/>
+                </a:solidFill>
+                <a:latin typeface="Aptos" pitchFamily="34" charset="0"/>
+                <a:ea typeface="Aptos" pitchFamily="34" charset="-122"/>
+                <a:cs typeface="Aptos" pitchFamily="34" charset="-120"/>
+              </a:rPr>
+              <a:t>Monitor</a:t>
+            </a:r>
+            <a:endParaRPr lang="en-US" sz="880" dirty="0"/>
+          </a:p>
+        </p:txBody>
+      </p:sp>
+      <p:sp>
+        <p:nvSpPr>
+          <p:cNvPr id="23" name="Text 21"/>
+          <p:cNvSpPr/>
+          <p:nvPr/>
+        </p:nvSpPr>
+        <p:spPr>
+          <a:xfrm>
+            <a:off x="7854696" y="3694176"/>
+            <a:ext cx="3035808" cy="365760"/>
+          </a:xfrm>
+          <a:prstGeom prst="rect">
+            <a:avLst/>
+          </a:prstGeom>
+          <a:noFill/>
+          <a:ln/>
+        </p:spPr>
+        <p:txBody>
+          <a:bodyPr wrap="square" lIns="254" tIns="254" rIns="254" bIns="254" rtlCol="0" anchor="t">
+            <a:normAutofit/>
+          </a:bodyPr>
+          <a:lstStyle/>
+          <a:p>
+            <a:pPr indent="0" marL="0">
+              <a:buNone/>
+            </a:pPr>
+            <a:r>
+              <a:rPr lang="en-US" sz="1120" dirty="0">
+                <a:solidFill>
+                  <a:srgbClr val="17364A"/>
+                </a:solidFill>
+                <a:latin typeface="Aptos" pitchFamily="34" charset="0"/>
+                <a:ea typeface="Aptos" pitchFamily="34" charset="-122"/>
+                <a:cs typeface="Aptos" pitchFamily="34" charset="-120"/>
+              </a:rPr>
+              <a:t>Responsible use depends on finding risks early, applying safeguards, and watching for drift or harm over time.</a:t>
+            </a:r>
+            <a:endParaRPr lang="en-US" sz="1120" dirty="0"/>
+          </a:p>
+        </p:txBody>
+      </p:sp>
+      <p:sp>
+        <p:nvSpPr>
+          <p:cNvPr id="24" name="Shape 22"/>
+          <p:cNvSpPr/>
+          <p:nvPr/>
+        </p:nvSpPr>
+        <p:spPr>
+          <a:xfrm>
+            <a:off x="7635240" y="4343400"/>
+            <a:ext cx="3474720" cy="1255471"/>
+          </a:xfrm>
+          <a:prstGeom prst="roundRect">
+            <a:avLst>
+              <a:gd name="adj" fmla="val 8740"/>
             </a:avLst>
           </a:prstGeom>
           <a:solidFill>
@@ -3496,13 +3712,13 @@
       </p:sp>
       <p:sp>
         <p:nvSpPr>
-          <p:cNvPr id="17" name="Text 15"/>
-          <p:cNvSpPr/>
-          <p:nvPr/>
-        </p:nvSpPr>
-        <p:spPr>
-          <a:xfrm>
-            <a:off x="7799832" y="4645152"/>
+          <p:cNvPr id="25" name="Text 23"/>
+          <p:cNvSpPr/>
+          <p:nvPr/>
+        </p:nvSpPr>
+        <p:spPr>
+          <a:xfrm>
+            <a:off x="7799832" y="4489704"/>
             <a:ext cx="3145536" cy="256032"/>
           </a:xfrm>
           <a:prstGeom prst="rect">
@@ -3535,14 +3751,14 @@
       </p:sp>
       <p:sp>
         <p:nvSpPr>
-          <p:cNvPr id="18" name="Text 16"/>
-          <p:cNvSpPr/>
-          <p:nvPr/>
-        </p:nvSpPr>
-        <p:spPr>
-          <a:xfrm>
-            <a:off x="7799832" y="4974336"/>
-            <a:ext cx="3145536" cy="576072"/>
+          <p:cNvPr id="26" name="Text 24"/>
+          <p:cNvSpPr/>
+          <p:nvPr/>
+        </p:nvSpPr>
+        <p:spPr>
+          <a:xfrm>
+            <a:off x="7799832" y="4818888"/>
+            <a:ext cx="3145536" cy="688543"/>
           </a:xfrm>
           <a:prstGeom prst="rect">
             <a:avLst/>
@@ -3568,7 +3784,7 @@
                 <a:ea typeface="Aptos" pitchFamily="34" charset="-122"/>
                 <a:cs typeface="Aptos" pitchFamily="34" charset="-120"/>
               </a:rPr>
-              <a:t>Identify what could go wrong, who could be affected, what safeguards are needed, and what evidence should be reviewed.</a:t>
+              <a:t>Identify what could go wrong, who could be affected, what safeguards are needed, and what evidence should be reviewed before use.</a:t>
             </a:r>
             <a:endParaRPr lang="en-US" sz="1320" dirty="0"/>
           </a:p>
@@ -3937,11 +4153,11 @@
         <p:spPr>
           <a:xfrm>
             <a:off x="7635240" y="1325880"/>
-            <a:ext cx="3474720" cy="1325880"/>
+            <a:ext cx="3474720" cy="1207008"/>
           </a:xfrm>
           <a:prstGeom prst="roundRect">
             <a:avLst>
-              <a:gd name="adj" fmla="val 8276"/>
+              <a:gd name="adj" fmla="val 9091"/>
             </a:avLst>
           </a:prstGeom>
           <a:solidFill>
@@ -4003,7 +4219,7 @@
         <p:spPr>
           <a:xfrm>
             <a:off x="7799832" y="1801368"/>
-            <a:ext cx="3145536" cy="758952"/>
+            <a:ext cx="3145536" cy="640080"/>
           </a:xfrm>
           <a:prstGeom prst="rect">
             <a:avLst/>
@@ -4043,12 +4259,12 @@
         </p:nvSpPr>
         <p:spPr>
           <a:xfrm>
-            <a:off x="7635240" y="2788920"/>
-            <a:ext cx="3474720" cy="1536192"/>
+            <a:off x="7635240" y="2670048"/>
+            <a:ext cx="3474720" cy="1377086"/>
           </a:xfrm>
           <a:prstGeom prst="roundRect">
             <a:avLst>
-              <a:gd name="adj" fmla="val 7143"/>
+              <a:gd name="adj" fmla="val 7968"/>
             </a:avLst>
           </a:prstGeom>
           <a:solidFill>
@@ -4070,8 +4286,8 @@
         </p:nvSpPr>
         <p:spPr>
           <a:xfrm>
-            <a:off x="7799832" y="2935224"/>
-            <a:ext cx="3145536" cy="256032"/>
+            <a:off x="7799832" y="2798064"/>
+            <a:ext cx="3145536" cy="237744"/>
           </a:xfrm>
           <a:prstGeom prst="rect">
             <a:avLst/>
@@ -4087,7 +4303,7 @@
               <a:buNone/>
             </a:pPr>
             <a:r>
-              <a:rPr lang="en-US" sz="1300" b="1" dirty="0">
+              <a:rPr lang="en-US" sz="1250" b="1" dirty="0">
                 <a:solidFill>
                   <a:srgbClr val="0068B7"/>
                 </a:solidFill>
@@ -4095,101 +4311,317 @@
                 <a:ea typeface="Aptos" pitchFamily="34" charset="-122"/>
                 <a:cs typeface="Aptos" pitchFamily="34" charset="-120"/>
               </a:rPr>
-              <a:t>Concept checkpoints</a:t>
-            </a:r>
-            <a:endParaRPr lang="en-US" sz="1300" dirty="0"/>
-          </a:p>
-        </p:txBody>
-      </p:sp>
-      <p:sp>
-        <p:nvSpPr>
-          <p:cNvPr id="15" name="Text 13"/>
-          <p:cNvSpPr/>
-          <p:nvPr/>
-        </p:nvSpPr>
-        <p:spPr>
-          <a:xfrm>
-            <a:off x="7818120" y="3300984"/>
-            <a:ext cx="3090672" cy="877824"/>
-          </a:xfrm>
-          <a:prstGeom prst="rect">
-            <a:avLst/>
-          </a:prstGeom>
-          <a:noFill/>
-          <a:ln/>
-        </p:spPr>
-        <p:txBody>
-          <a:bodyPr wrap="square" lIns="508" tIns="508" rIns="508" bIns="508" rtlCol="0" anchor="t">
+              <a:t>Implementation path</a:t>
+            </a:r>
+            <a:endParaRPr lang="en-US" sz="1250" dirty="0"/>
+          </a:p>
+        </p:txBody>
+      </p:sp>
+      <p:sp>
+        <p:nvSpPr>
+          <p:cNvPr id="15" name="Shape 13"/>
+          <p:cNvSpPr/>
+          <p:nvPr/>
+        </p:nvSpPr>
+        <p:spPr>
+          <a:xfrm>
+            <a:off x="8763000" y="3351276"/>
+            <a:ext cx="164592" cy="0"/>
+          </a:xfrm>
+          <a:prstGeom prst="line">
+            <a:avLst/>
+          </a:prstGeom>
+          <a:noFill/>
+          <a:ln w="15240">
+            <a:solidFill>
+              <a:srgbClr val="8ABBD8"/>
+            </a:solidFill>
+            <a:prstDash val="solid"/>
+          </a:ln>
+        </p:spPr>
+      </p:sp>
+      <p:sp>
+        <p:nvSpPr>
+          <p:cNvPr id="16" name="Shape 14"/>
+          <p:cNvSpPr/>
+          <p:nvPr/>
+        </p:nvSpPr>
+        <p:spPr>
+          <a:xfrm>
+            <a:off x="7872984" y="3200400"/>
+            <a:ext cx="890016" cy="301752"/>
+          </a:xfrm>
+          <a:prstGeom prst="roundRect">
+            <a:avLst>
+              <a:gd name="adj" fmla="val 24242"/>
+            </a:avLst>
+          </a:prstGeom>
+          <a:solidFill>
+            <a:srgbClr val="0068B7"/>
+          </a:solidFill>
+          <a:ln w="12700">
+            <a:solidFill>
+              <a:srgbClr val="0068B7"/>
+            </a:solidFill>
+            <a:prstDash val="solid"/>
+          </a:ln>
+        </p:spPr>
+      </p:sp>
+      <p:sp>
+        <p:nvSpPr>
+          <p:cNvPr id="17" name="Text 15"/>
+          <p:cNvSpPr/>
+          <p:nvPr/>
+        </p:nvSpPr>
+        <p:spPr>
+          <a:xfrm>
+            <a:off x="7909560" y="3273552"/>
+            <a:ext cx="816864" cy="146304"/>
+          </a:xfrm>
+          <a:prstGeom prst="rect">
+            <a:avLst/>
+          </a:prstGeom>
+          <a:noFill/>
+          <a:ln/>
+        </p:spPr>
+        <p:txBody>
+          <a:bodyPr wrap="square" lIns="0" tIns="0" rIns="0" bIns="0" rtlCol="0" anchor="ctr">
             <a:normAutofit/>
           </a:bodyPr>
           <a:lstStyle/>
           <a:p>
-            <a:pPr indent="0" marL="0">
-              <a:buNone/>
-            </a:pPr>
-            <a:r>
-              <a:rPr lang="en-US" sz="1220" dirty="0">
-                <a:solidFill>
-                  <a:srgbClr val="17364A"/>
-                </a:solidFill>
-                <a:latin typeface="Aptos" pitchFamily="34" charset="0"/>
-                <a:ea typeface="Aptos" pitchFamily="34" charset="-122"/>
-                <a:cs typeface="Aptos" pitchFamily="34" charset="-120"/>
-              </a:rPr>
-              <a:t>Generative AI requires staff who can review outputs and manage.</a:t>
-            </a:r>
-            <a:endParaRPr lang="en-US" sz="1220" dirty="0"/>
-          </a:p>
-          <a:p>
-            <a:pPr indent="0" marL="0">
-              <a:buNone/>
-            </a:pPr>
-            <a:r>
-              <a:rPr lang="en-US" sz="1220" dirty="0">
-                <a:solidFill>
-                  <a:srgbClr val="17364A"/>
-                </a:solidFill>
-                <a:latin typeface="Aptos" pitchFamily="34" charset="0"/>
-                <a:ea typeface="Aptos" pitchFamily="34" charset="-122"/>
-                <a:cs typeface="Aptos" pitchFamily="34" charset="-120"/>
-              </a:rPr>
-              <a:t>Predictive analytics requires staff who can interpret performance.</a:t>
-            </a:r>
-            <a:endParaRPr lang="en-US" sz="1220" dirty="0"/>
-          </a:p>
-          <a:p>
-            <a:pPr indent="0" marL="0">
-              <a:buNone/>
-            </a:pPr>
-            <a:r>
-              <a:rPr lang="en-US" sz="1220" dirty="0">
-                <a:solidFill>
-                  <a:srgbClr val="17364A"/>
-                </a:solidFill>
-                <a:latin typeface="Aptos" pitchFamily="34" charset="0"/>
-                <a:ea typeface="Aptos" pitchFamily="34" charset="-122"/>
-                <a:cs typeface="Aptos" pitchFamily="34" charset="-120"/>
-              </a:rPr>
-              <a:t>Agentic workflows require staff who can oversee permissions,.</a:t>
-            </a:r>
-            <a:endParaRPr lang="en-US" sz="1220" dirty="0"/>
-          </a:p>
-        </p:txBody>
-      </p:sp>
-      <p:sp>
-        <p:nvSpPr>
-          <p:cNvPr id="16" name="Shape 14"/>
-          <p:cNvSpPr/>
-          <p:nvPr/>
-        </p:nvSpPr>
-        <p:spPr>
-          <a:xfrm>
-            <a:off x="7635240" y="4498848"/>
-            <a:ext cx="3474720" cy="1143000"/>
+            <a:pPr algn="ctr" indent="0" marL="0">
+              <a:buNone/>
+            </a:pPr>
+            <a:r>
+              <a:rPr lang="en-US" sz="880" b="1" dirty="0">
+                <a:solidFill>
+                  <a:srgbClr val="FFFFFF"/>
+                </a:solidFill>
+                <a:latin typeface="Aptos" pitchFamily="34" charset="0"/>
+                <a:ea typeface="Aptos" pitchFamily="34" charset="-122"/>
+                <a:cs typeface="Aptos" pitchFamily="34" charset="-120"/>
+              </a:rPr>
+              <a:t>Need</a:t>
+            </a:r>
+            <a:endParaRPr lang="en-US" sz="880" dirty="0"/>
+          </a:p>
+        </p:txBody>
+      </p:sp>
+      <p:sp>
+        <p:nvSpPr>
+          <p:cNvPr id="18" name="Shape 16"/>
+          <p:cNvSpPr/>
+          <p:nvPr/>
+        </p:nvSpPr>
+        <p:spPr>
+          <a:xfrm>
+            <a:off x="9817608" y="3351276"/>
+            <a:ext cx="164592" cy="0"/>
+          </a:xfrm>
+          <a:prstGeom prst="line">
+            <a:avLst/>
+          </a:prstGeom>
+          <a:noFill/>
+          <a:ln w="15240">
+            <a:solidFill>
+              <a:srgbClr val="8ABBD8"/>
+            </a:solidFill>
+            <a:prstDash val="solid"/>
+          </a:ln>
+        </p:spPr>
+      </p:sp>
+      <p:sp>
+        <p:nvSpPr>
+          <p:cNvPr id="19" name="Shape 17"/>
+          <p:cNvSpPr/>
+          <p:nvPr/>
+        </p:nvSpPr>
+        <p:spPr>
+          <a:xfrm>
+            <a:off x="8927592" y="3200400"/>
+            <a:ext cx="890016" cy="301752"/>
           </a:xfrm>
           <a:prstGeom prst="roundRect">
             <a:avLst>
-              <a:gd name="adj" fmla="val 9600"/>
+              <a:gd name="adj" fmla="val 24242"/>
+            </a:avLst>
+          </a:prstGeom>
+          <a:solidFill>
+            <a:srgbClr val="2F8A28"/>
+          </a:solidFill>
+          <a:ln w="12700">
+            <a:solidFill>
+              <a:srgbClr val="2F8A28"/>
+            </a:solidFill>
+            <a:prstDash val="solid"/>
+          </a:ln>
+        </p:spPr>
+      </p:sp>
+      <p:sp>
+        <p:nvSpPr>
+          <p:cNvPr id="20" name="Text 18"/>
+          <p:cNvSpPr/>
+          <p:nvPr/>
+        </p:nvSpPr>
+        <p:spPr>
+          <a:xfrm>
+            <a:off x="8964168" y="3273552"/>
+            <a:ext cx="816864" cy="146304"/>
+          </a:xfrm>
+          <a:prstGeom prst="rect">
+            <a:avLst/>
+          </a:prstGeom>
+          <a:noFill/>
+          <a:ln/>
+        </p:spPr>
+        <p:txBody>
+          <a:bodyPr wrap="square" lIns="0" tIns="0" rIns="0" bIns="0" rtlCol="0" anchor="ctr">
+            <a:normAutofit/>
+          </a:bodyPr>
+          <a:lstStyle/>
+          <a:p>
+            <a:pPr algn="ctr" indent="0" marL="0">
+              <a:buNone/>
+            </a:pPr>
+            <a:r>
+              <a:rPr lang="en-US" sz="880" b="1" dirty="0">
+                <a:solidFill>
+                  <a:srgbClr val="FFFFFF"/>
+                </a:solidFill>
+                <a:latin typeface="Aptos" pitchFamily="34" charset="0"/>
+                <a:ea typeface="Aptos" pitchFamily="34" charset="-122"/>
+                <a:cs typeface="Aptos" pitchFamily="34" charset="-120"/>
+              </a:rPr>
+              <a:t>Build</a:t>
+            </a:r>
+            <a:endParaRPr lang="en-US" sz="880" dirty="0"/>
+          </a:p>
+        </p:txBody>
+      </p:sp>
+      <p:sp>
+        <p:nvSpPr>
+          <p:cNvPr id="21" name="Shape 19"/>
+          <p:cNvSpPr/>
+          <p:nvPr/>
+        </p:nvSpPr>
+        <p:spPr>
+          <a:xfrm>
+            <a:off x="9982200" y="3200400"/>
+            <a:ext cx="890016" cy="301752"/>
+          </a:xfrm>
+          <a:prstGeom prst="roundRect">
+            <a:avLst>
+              <a:gd name="adj" fmla="val 24242"/>
+            </a:avLst>
+          </a:prstGeom>
+          <a:solidFill>
+            <a:srgbClr val="6A4CA3"/>
+          </a:solidFill>
+          <a:ln w="12700">
+            <a:solidFill>
+              <a:srgbClr val="6A4CA3"/>
+            </a:solidFill>
+            <a:prstDash val="solid"/>
+          </a:ln>
+        </p:spPr>
+      </p:sp>
+      <p:sp>
+        <p:nvSpPr>
+          <p:cNvPr id="22" name="Text 20"/>
+          <p:cNvSpPr/>
+          <p:nvPr/>
+        </p:nvSpPr>
+        <p:spPr>
+          <a:xfrm>
+            <a:off x="10018776" y="3273552"/>
+            <a:ext cx="816864" cy="146304"/>
+          </a:xfrm>
+          <a:prstGeom prst="rect">
+            <a:avLst/>
+          </a:prstGeom>
+          <a:noFill/>
+          <a:ln/>
+        </p:spPr>
+        <p:txBody>
+          <a:bodyPr wrap="square" lIns="0" tIns="0" rIns="0" bIns="0" rtlCol="0" anchor="ctr">
+            <a:normAutofit/>
+          </a:bodyPr>
+          <a:lstStyle/>
+          <a:p>
+            <a:pPr algn="ctr" indent="0" marL="0">
+              <a:buNone/>
+            </a:pPr>
+            <a:r>
+              <a:rPr lang="en-US" sz="880" b="1" dirty="0">
+                <a:solidFill>
+                  <a:srgbClr val="FFFFFF"/>
+                </a:solidFill>
+                <a:latin typeface="Aptos" pitchFamily="34" charset="0"/>
+                <a:ea typeface="Aptos" pitchFamily="34" charset="-122"/>
+                <a:cs typeface="Aptos" pitchFamily="34" charset="-120"/>
+              </a:rPr>
+              <a:t>Adopt</a:t>
+            </a:r>
+            <a:endParaRPr lang="en-US" sz="880" dirty="0"/>
+          </a:p>
+        </p:txBody>
+      </p:sp>
+      <p:sp>
+        <p:nvSpPr>
+          <p:cNvPr id="23" name="Text 21"/>
+          <p:cNvSpPr/>
+          <p:nvPr/>
+        </p:nvSpPr>
+        <p:spPr>
+          <a:xfrm>
+            <a:off x="7854696" y="3694176"/>
+            <a:ext cx="3035808" cy="206654"/>
+          </a:xfrm>
+          <a:prstGeom prst="rect">
+            <a:avLst/>
+          </a:prstGeom>
+          <a:noFill/>
+          <a:ln/>
+        </p:spPr>
+        <p:txBody>
+          <a:bodyPr wrap="square" lIns="254" tIns="254" rIns="254" bIns="254" rtlCol="0" anchor="t">
+            <a:normAutofit/>
+          </a:bodyPr>
+          <a:lstStyle/>
+          <a:p>
+            <a:pPr indent="0" marL="0">
+              <a:buNone/>
+            </a:pPr>
+            <a:r>
+              <a:rPr lang="en-US" sz="1120" dirty="0">
+                <a:solidFill>
+                  <a:srgbClr val="17364A"/>
+                </a:solidFill>
+                <a:latin typeface="Aptos" pitchFamily="34" charset="0"/>
+                <a:ea typeface="Aptos" pitchFamily="34" charset="-122"/>
+                <a:cs typeface="Aptos" pitchFamily="34" charset="-120"/>
+              </a:rPr>
+              <a:t>Implementation work should make dependencies, approvals, training, and sustainment visible before launch.</a:t>
+            </a:r>
+            <a:endParaRPr lang="en-US" sz="1120" dirty="0"/>
+          </a:p>
+        </p:txBody>
+      </p:sp>
+      <p:sp>
+        <p:nvSpPr>
+          <p:cNvPr id="24" name="Shape 22"/>
+          <p:cNvSpPr/>
+          <p:nvPr/>
+        </p:nvSpPr>
+        <p:spPr>
+          <a:xfrm>
+            <a:off x="7635240" y="4184294"/>
+            <a:ext cx="3474720" cy="1466698"/>
+          </a:xfrm>
+          <a:prstGeom prst="roundRect">
+            <a:avLst>
+              <a:gd name="adj" fmla="val 7481"/>
             </a:avLst>
           </a:prstGeom>
           <a:solidFill>
@@ -4205,13 +4637,13 @@
       </p:sp>
       <p:sp>
         <p:nvSpPr>
-          <p:cNvPr id="17" name="Text 15"/>
-          <p:cNvSpPr/>
-          <p:nvPr/>
-        </p:nvSpPr>
-        <p:spPr>
-          <a:xfrm>
-            <a:off x="7799832" y="4645152"/>
+          <p:cNvPr id="25" name="Text 23"/>
+          <p:cNvSpPr/>
+          <p:nvPr/>
+        </p:nvSpPr>
+        <p:spPr>
+          <a:xfrm>
+            <a:off x="7799832" y="4330598"/>
             <a:ext cx="3145536" cy="256032"/>
           </a:xfrm>
           <a:prstGeom prst="rect">
@@ -4244,14 +4676,14 @@
       </p:sp>
       <p:sp>
         <p:nvSpPr>
-          <p:cNvPr id="18" name="Text 16"/>
-          <p:cNvSpPr/>
-          <p:nvPr/>
-        </p:nvSpPr>
-        <p:spPr>
-          <a:xfrm>
-            <a:off x="7799832" y="4974336"/>
-            <a:ext cx="3145536" cy="576072"/>
+          <p:cNvPr id="26" name="Text 24"/>
+          <p:cNvSpPr/>
+          <p:nvPr/>
+        </p:nvSpPr>
+        <p:spPr>
+          <a:xfrm>
+            <a:off x="7799832" y="4659782"/>
+            <a:ext cx="3145536" cy="899770"/>
           </a:xfrm>
           <a:prstGeom prst="rect">
             <a:avLst/>
@@ -4277,7 +4709,7 @@
                 <a:ea typeface="Aptos" pitchFamily="34" charset="-122"/>
                 <a:cs typeface="Aptos" pitchFamily="34" charset="-120"/>
               </a:rPr>
-              <a:t>Use the concept to clarify workflow changes, dependencies, staffing, procurement requirements, training needs, and.</a:t>
+              <a:t>Use the concept to clarify workflow changes, dependencies, staffing, procurement requirements, training needs, and implementation checkpoints.</a:t>
             </a:r>
             <a:endParaRPr lang="en-US" sz="1320" dirty="0"/>
           </a:p>
@@ -4646,11 +5078,11 @@
         <p:spPr>
           <a:xfrm>
             <a:off x="7635240" y="1325880"/>
-            <a:ext cx="3474720" cy="1325880"/>
+            <a:ext cx="3474720" cy="1255471"/>
           </a:xfrm>
           <a:prstGeom prst="roundRect">
             <a:avLst>
-              <a:gd name="adj" fmla="val 8276"/>
+              <a:gd name="adj" fmla="val 8740"/>
             </a:avLst>
           </a:prstGeom>
           <a:solidFill>
@@ -4712,7 +5144,7 @@
         <p:spPr>
           <a:xfrm>
             <a:off x="7799832" y="1801368"/>
-            <a:ext cx="3145536" cy="758952"/>
+            <a:ext cx="3145536" cy="688543"/>
           </a:xfrm>
           <a:prstGeom prst="rect">
             <a:avLst/>
@@ -4752,12 +5184,12 @@
         </p:nvSpPr>
         <p:spPr>
           <a:xfrm>
-            <a:off x="7635240" y="2788920"/>
-            <a:ext cx="3474720" cy="1536192"/>
+            <a:off x="7635240" y="2718511"/>
+            <a:ext cx="3474720" cy="1328623"/>
           </a:xfrm>
           <a:prstGeom prst="roundRect">
             <a:avLst>
-              <a:gd name="adj" fmla="val 7143"/>
+              <a:gd name="adj" fmla="val 8259"/>
             </a:avLst>
           </a:prstGeom>
           <a:solidFill>
@@ -4779,7 +5211,7 @@
         </p:nvSpPr>
         <p:spPr>
           <a:xfrm>
-            <a:off x="7799832" y="2935224"/>
+            <a:off x="7799832" y="2864815"/>
             <a:ext cx="3145536" cy="256032"/>
           </a:xfrm>
           <a:prstGeom prst="rect">
@@ -4818,8 +5250,8 @@
         </p:nvSpPr>
         <p:spPr>
           <a:xfrm>
-            <a:off x="7818120" y="3300984"/>
-            <a:ext cx="3090672" cy="877824"/>
+            <a:off x="7818120" y="3230575"/>
+            <a:ext cx="3090672" cy="670255"/>
           </a:xfrm>
           <a:prstGeom prst="rect">
             <a:avLst/>
@@ -4893,12 +5325,12 @@
         </p:nvSpPr>
         <p:spPr>
           <a:xfrm>
-            <a:off x="7635240" y="4498848"/>
-            <a:ext cx="3474720" cy="1143000"/>
+            <a:off x="7635240" y="4184294"/>
+            <a:ext cx="3474720" cy="1466698"/>
           </a:xfrm>
           <a:prstGeom prst="roundRect">
             <a:avLst>
-              <a:gd name="adj" fmla="val 9600"/>
+              <a:gd name="adj" fmla="val 7481"/>
             </a:avLst>
           </a:prstGeom>
           <a:solidFill>
@@ -4920,7 +5352,7 @@
         </p:nvSpPr>
         <p:spPr>
           <a:xfrm>
-            <a:off x="7799832" y="4645152"/>
+            <a:off x="7799832" y="4330598"/>
             <a:ext cx="3145536" cy="256032"/>
           </a:xfrm>
           <a:prstGeom prst="rect">
@@ -4959,8 +5391,8 @@
         </p:nvSpPr>
         <p:spPr>
           <a:xfrm>
-            <a:off x="7799832" y="4974336"/>
-            <a:ext cx="3145536" cy="576072"/>
+            <a:off x="7799832" y="4659782"/>
+            <a:ext cx="3145536" cy="899770"/>
           </a:xfrm>
           <a:prstGeom prst="rect">
             <a:avLst/>
@@ -4986,7 +5418,7 @@
                 <a:ea typeface="Aptos" pitchFamily="34" charset="-122"/>
                 <a:cs typeface="Aptos" pitchFamily="34" charset="-120"/>
               </a:rPr>
-              <a:t>Connect the concept to public health purpose, responsible use, required safeguards, documentation, and the next action a.</a:t>
+              <a:t>Connect the concept to public health purpose, responsible use, required safeguards, documentation, and the next action a department should take.</a:t>
             </a:r>
             <a:endParaRPr lang="en-US" sz="1320" dirty="0"/>
           </a:p>
@@ -5338,11 +5770,11 @@
         <p:spPr>
           <a:xfrm>
             <a:off x="7635240" y="1325880"/>
-            <a:ext cx="3474720" cy="1325880"/>
+            <a:ext cx="3474720" cy="1207008"/>
           </a:xfrm>
           <a:prstGeom prst="roundRect">
             <a:avLst>
-              <a:gd name="adj" fmla="val 8276"/>
+              <a:gd name="adj" fmla="val 9091"/>
             </a:avLst>
           </a:prstGeom>
           <a:solidFill>
@@ -5404,7 +5836,7 @@
         <p:spPr>
           <a:xfrm>
             <a:off x="7799832" y="1801368"/>
-            <a:ext cx="3145536" cy="758952"/>
+            <a:ext cx="3145536" cy="640080"/>
           </a:xfrm>
           <a:prstGeom prst="rect">
             <a:avLst/>
@@ -5430,7 +5862,7 @@
                 <a:ea typeface="Aptos" pitchFamily="34" charset="-122"/>
                 <a:cs typeface="Aptos" pitchFamily="34" charset="-120"/>
               </a:rPr>
-              <a:t>Which staff, partners, or communities would be affected if this issue were handled poorly?</a:t>
+              <a:t>Which staff, partners, or communities would be affected if this issue were handled.</a:t>
             </a:r>
             <a:endParaRPr lang="en-US" sz="1320" dirty="0"/>
           </a:p>
@@ -5444,12 +5876,12 @@
         </p:nvSpPr>
         <p:spPr>
           <a:xfrm>
-            <a:off x="7635240" y="2788920"/>
-            <a:ext cx="3474720" cy="1536192"/>
+            <a:off x="7635240" y="2670048"/>
+            <a:ext cx="3474720" cy="1377086"/>
           </a:xfrm>
           <a:prstGeom prst="roundRect">
             <a:avLst>
-              <a:gd name="adj" fmla="val 7143"/>
+              <a:gd name="adj" fmla="val 7968"/>
             </a:avLst>
           </a:prstGeom>
           <a:solidFill>
@@ -5471,7 +5903,7 @@
         </p:nvSpPr>
         <p:spPr>
           <a:xfrm>
-            <a:off x="7799832" y="2935224"/>
+            <a:off x="7799832" y="2816352"/>
             <a:ext cx="3145536" cy="256032"/>
           </a:xfrm>
           <a:prstGeom prst="rect">
@@ -5510,8 +5942,8 @@
         </p:nvSpPr>
         <p:spPr>
           <a:xfrm>
-            <a:off x="7818120" y="3300984"/>
-            <a:ext cx="3090672" cy="877824"/>
+            <a:off x="7818120" y="3182112"/>
+            <a:ext cx="3090672" cy="718718"/>
           </a:xfrm>
           <a:prstGeom prst="rect">
             <a:avLst/>
@@ -5568,12 +6000,12 @@
         </p:nvSpPr>
         <p:spPr>
           <a:xfrm>
-            <a:off x="7635240" y="4498848"/>
-            <a:ext cx="3474720" cy="1143000"/>
+            <a:off x="7635240" y="4184294"/>
+            <a:ext cx="3474720" cy="1466698"/>
           </a:xfrm>
           <a:prstGeom prst="roundRect">
             <a:avLst>
-              <a:gd name="adj" fmla="val 9600"/>
+              <a:gd name="adj" fmla="val 7481"/>
             </a:avLst>
           </a:prstGeom>
           <a:solidFill>
@@ -5595,7 +6027,7 @@
         </p:nvSpPr>
         <p:spPr>
           <a:xfrm>
-            <a:off x="7799832" y="4645152"/>
+            <a:off x="7799832" y="4330598"/>
             <a:ext cx="3145536" cy="256032"/>
           </a:xfrm>
           <a:prstGeom prst="rect">
@@ -5634,8 +6066,8 @@
         </p:nvSpPr>
         <p:spPr>
           <a:xfrm>
-            <a:off x="7799832" y="4974336"/>
-            <a:ext cx="3145536" cy="576072"/>
+            <a:off x="7799832" y="4659782"/>
+            <a:ext cx="3145536" cy="899770"/>
           </a:xfrm>
           <a:prstGeom prst="rect">
             <a:avLst/>
@@ -5661,7 +6093,7 @@
                 <a:ea typeface="Aptos" pitchFamily="34" charset="-122"/>
                 <a:cs typeface="Aptos" pitchFamily="34" charset="-120"/>
               </a:rPr>
-              <a:t>Connect the concept to public health purpose, responsible use, required safeguards, documentation, and the next action a.</a:t>
+              <a:t>Connect the concept to public health purpose, responsible use, required safeguards, documentation, and the next action a department should take.</a:t>
             </a:r>
             <a:endParaRPr lang="en-US" sz="1320" dirty="0"/>
           </a:p>
@@ -6013,11 +6445,11 @@
         <p:spPr>
           <a:xfrm>
             <a:off x="7635240" y="1325880"/>
-            <a:ext cx="3474720" cy="1325880"/>
+            <a:ext cx="3474720" cy="1207008"/>
           </a:xfrm>
           <a:prstGeom prst="roundRect">
             <a:avLst>
-              <a:gd name="adj" fmla="val 8276"/>
+              <a:gd name="adj" fmla="val 9091"/>
             </a:avLst>
           </a:prstGeom>
           <a:solidFill>
@@ -6079,7 +6511,7 @@
         <p:spPr>
           <a:xfrm>
             <a:off x="7799832" y="1801368"/>
-            <a:ext cx="3145536" cy="758952"/>
+            <a:ext cx="3145536" cy="640080"/>
           </a:xfrm>
           <a:prstGeom prst="rect">
             <a:avLst/>
@@ -6119,12 +6551,12 @@
         </p:nvSpPr>
         <p:spPr>
           <a:xfrm>
-            <a:off x="7635240" y="2788920"/>
-            <a:ext cx="3474720" cy="1536192"/>
+            <a:off x="7635240" y="2670048"/>
+            <a:ext cx="3474720" cy="1377086"/>
           </a:xfrm>
           <a:prstGeom prst="roundRect">
             <a:avLst>
-              <a:gd name="adj" fmla="val 7143"/>
+              <a:gd name="adj" fmla="val 7968"/>
             </a:avLst>
           </a:prstGeom>
           <a:solidFill>
@@ -6146,7 +6578,7 @@
         </p:nvSpPr>
         <p:spPr>
           <a:xfrm>
-            <a:off x="7799832" y="2935224"/>
+            <a:off x="7799832" y="2816352"/>
             <a:ext cx="3145536" cy="256032"/>
           </a:xfrm>
           <a:prstGeom prst="rect">
@@ -6185,8 +6617,8 @@
         </p:nvSpPr>
         <p:spPr>
           <a:xfrm>
-            <a:off x="7818120" y="3300984"/>
-            <a:ext cx="3090672" cy="877824"/>
+            <a:off x="7818120" y="3182112"/>
+            <a:ext cx="3090672" cy="718718"/>
           </a:xfrm>
           <a:prstGeom prst="rect">
             <a:avLst/>
@@ -6243,12 +6675,12 @@
         </p:nvSpPr>
         <p:spPr>
           <a:xfrm>
-            <a:off x="7635240" y="4498848"/>
-            <a:ext cx="3474720" cy="1143000"/>
+            <a:off x="7635240" y="4184294"/>
+            <a:ext cx="3474720" cy="1466698"/>
           </a:xfrm>
           <a:prstGeom prst="roundRect">
             <a:avLst>
-              <a:gd name="adj" fmla="val 9600"/>
+              <a:gd name="adj" fmla="val 7481"/>
             </a:avLst>
           </a:prstGeom>
           <a:solidFill>
@@ -6270,7 +6702,7 @@
         </p:nvSpPr>
         <p:spPr>
           <a:xfrm>
-            <a:off x="7799832" y="4645152"/>
+            <a:off x="7799832" y="4330598"/>
             <a:ext cx="3145536" cy="256032"/>
           </a:xfrm>
           <a:prstGeom prst="rect">
@@ -6309,8 +6741,8 @@
         </p:nvSpPr>
         <p:spPr>
           <a:xfrm>
-            <a:off x="7799832" y="4974336"/>
-            <a:ext cx="3145536" cy="576072"/>
+            <a:off x="7799832" y="4659782"/>
+            <a:ext cx="3145536" cy="899770"/>
           </a:xfrm>
           <a:prstGeom prst="rect">
             <a:avLst/>
@@ -6336,7 +6768,7 @@
                 <a:ea typeface="Aptos" pitchFamily="34" charset="-122"/>
                 <a:cs typeface="Aptos" pitchFamily="34" charset="-120"/>
               </a:rPr>
-              <a:t>Use the assignment to test whether you can explain the concept, apply it to a realistic public health situation, and.</a:t>
+              <a:t>Use the assignment to test whether you can explain the concept, apply it to a realistic public health situation, and identify what would need review before the work moves forward.</a:t>
             </a:r>
             <a:endParaRPr lang="en-US" sz="1320" dirty="0"/>
           </a:p>
@@ -6705,11 +7137,11 @@
         <p:spPr>
           <a:xfrm>
             <a:off x="7635240" y="1325880"/>
-            <a:ext cx="3474720" cy="1325880"/>
+            <a:ext cx="3474720" cy="1207008"/>
           </a:xfrm>
           <a:prstGeom prst="roundRect">
             <a:avLst>
-              <a:gd name="adj" fmla="val 8276"/>
+              <a:gd name="adj" fmla="val 9091"/>
             </a:avLst>
           </a:prstGeom>
           <a:solidFill>
@@ -6771,7 +7203,7 @@
         <p:spPr>
           <a:xfrm>
             <a:off x="7799832" y="1801368"/>
-            <a:ext cx="3145536" cy="758952"/>
+            <a:ext cx="3145536" cy="640080"/>
           </a:xfrm>
           <a:prstGeom prst="rect">
             <a:avLst/>
@@ -6811,12 +7243,12 @@
         </p:nvSpPr>
         <p:spPr>
           <a:xfrm>
-            <a:off x="7635240" y="2788920"/>
-            <a:ext cx="3474720" cy="1536192"/>
+            <a:off x="7635240" y="2670048"/>
+            <a:ext cx="3474720" cy="1377086"/>
           </a:xfrm>
           <a:prstGeom prst="roundRect">
             <a:avLst>
-              <a:gd name="adj" fmla="val 7143"/>
+              <a:gd name="adj" fmla="val 7968"/>
             </a:avLst>
           </a:prstGeom>
           <a:solidFill>
@@ -6838,7 +7270,7 @@
         </p:nvSpPr>
         <p:spPr>
           <a:xfrm>
-            <a:off x="7799832" y="2935224"/>
+            <a:off x="7799832" y="2816352"/>
             <a:ext cx="3145536" cy="256032"/>
           </a:xfrm>
           <a:prstGeom prst="rect">
@@ -6877,8 +7309,8 @@
         </p:nvSpPr>
         <p:spPr>
           <a:xfrm>
-            <a:off x="7818120" y="3300984"/>
-            <a:ext cx="3090672" cy="877824"/>
+            <a:off x="7818120" y="3182112"/>
+            <a:ext cx="3090672" cy="718718"/>
           </a:xfrm>
           <a:prstGeom prst="rect">
             <a:avLst/>
@@ -6935,12 +7367,12 @@
         </p:nvSpPr>
         <p:spPr>
           <a:xfrm>
-            <a:off x="7635240" y="4498848"/>
-            <a:ext cx="3474720" cy="1143000"/>
+            <a:off x="7635240" y="4184294"/>
+            <a:ext cx="3474720" cy="1466698"/>
           </a:xfrm>
           <a:prstGeom prst="roundRect">
             <a:avLst>
-              <a:gd name="adj" fmla="val 9600"/>
+              <a:gd name="adj" fmla="val 7481"/>
             </a:avLst>
           </a:prstGeom>
           <a:solidFill>
@@ -6962,7 +7394,7 @@
         </p:nvSpPr>
         <p:spPr>
           <a:xfrm>
-            <a:off x="7799832" y="4645152"/>
+            <a:off x="7799832" y="4330598"/>
             <a:ext cx="3145536" cy="256032"/>
           </a:xfrm>
           <a:prstGeom prst="rect">
@@ -7001,8 +7433,8 @@
         </p:nvSpPr>
         <p:spPr>
           <a:xfrm>
-            <a:off x="7799832" y="4974336"/>
-            <a:ext cx="3145536" cy="576072"/>
+            <a:off x="7799832" y="4659782"/>
+            <a:ext cx="3145536" cy="899770"/>
           </a:xfrm>
           <a:prstGeom prst="rect">
             <a:avLst/>
@@ -7028,7 +7460,7 @@
                 <a:ea typeface="Aptos" pitchFamily="34" charset="-122"/>
                 <a:cs typeface="Aptos" pitchFamily="34" charset="-120"/>
               </a:rPr>
-              <a:t>Connect the concept to public health purpose, responsible use, required safeguards, documentation, and the next action a.</a:t>
+              <a:t>Connect the concept to public health purpose, responsible use, required safeguards, documentation, and the next action a department should take.</a:t>
             </a:r>
             <a:endParaRPr lang="en-US" sz="1320" dirty="0"/>
           </a:p>
@@ -7363,11 +7795,11 @@
         <p:spPr>
           <a:xfrm>
             <a:off x="7635240" y="1325880"/>
-            <a:ext cx="3474720" cy="1325880"/>
+            <a:ext cx="3474720" cy="1255471"/>
           </a:xfrm>
           <a:prstGeom prst="roundRect">
             <a:avLst>
-              <a:gd name="adj" fmla="val 8276"/>
+              <a:gd name="adj" fmla="val 8740"/>
             </a:avLst>
           </a:prstGeom>
           <a:solidFill>
@@ -7429,7 +7861,7 @@
         <p:spPr>
           <a:xfrm>
             <a:off x="7799832" y="1801368"/>
-            <a:ext cx="3145536" cy="758952"/>
+            <a:ext cx="3145536" cy="688543"/>
           </a:xfrm>
           <a:prstGeom prst="rect">
             <a:avLst/>
@@ -7469,12 +7901,12 @@
         </p:nvSpPr>
         <p:spPr>
           <a:xfrm>
-            <a:off x="7635240" y="2788920"/>
-            <a:ext cx="3474720" cy="1536192"/>
+            <a:off x="7635240" y="2718511"/>
+            <a:ext cx="3474720" cy="1328623"/>
           </a:xfrm>
           <a:prstGeom prst="roundRect">
             <a:avLst>
-              <a:gd name="adj" fmla="val 7143"/>
+              <a:gd name="adj" fmla="val 8259"/>
             </a:avLst>
           </a:prstGeom>
           <a:solidFill>
@@ -7496,7 +7928,7 @@
         </p:nvSpPr>
         <p:spPr>
           <a:xfrm>
-            <a:off x="7799832" y="2935224"/>
+            <a:off x="7799832" y="2864815"/>
             <a:ext cx="3145536" cy="256032"/>
           </a:xfrm>
           <a:prstGeom prst="rect">
@@ -7535,8 +7967,8 @@
         </p:nvSpPr>
         <p:spPr>
           <a:xfrm>
-            <a:off x="7818120" y="3300984"/>
-            <a:ext cx="3090672" cy="877824"/>
+            <a:off x="7818120" y="3230575"/>
+            <a:ext cx="3090672" cy="670255"/>
           </a:xfrm>
           <a:prstGeom prst="rect">
             <a:avLst/>
@@ -7576,12 +8008,12 @@
         </p:nvSpPr>
         <p:spPr>
           <a:xfrm>
-            <a:off x="7635240" y="4498848"/>
-            <a:ext cx="3474720" cy="1143000"/>
+            <a:off x="7635240" y="4184294"/>
+            <a:ext cx="3474720" cy="1466698"/>
           </a:xfrm>
           <a:prstGeom prst="roundRect">
             <a:avLst>
-              <a:gd name="adj" fmla="val 9600"/>
+              <a:gd name="adj" fmla="val 7481"/>
             </a:avLst>
           </a:prstGeom>
           <a:solidFill>
@@ -7603,7 +8035,7 @@
         </p:nvSpPr>
         <p:spPr>
           <a:xfrm>
-            <a:off x="7799832" y="4645152"/>
+            <a:off x="7799832" y="4330598"/>
             <a:ext cx="3145536" cy="256032"/>
           </a:xfrm>
           <a:prstGeom prst="rect">
@@ -7642,8 +8074,8 @@
         </p:nvSpPr>
         <p:spPr>
           <a:xfrm>
-            <a:off x="7799832" y="4974336"/>
-            <a:ext cx="3145536" cy="576072"/>
+            <a:off x="7799832" y="4659782"/>
+            <a:ext cx="3145536" cy="899770"/>
           </a:xfrm>
           <a:prstGeom prst="rect">
             <a:avLst/>
@@ -7669,7 +8101,7 @@
                 <a:ea typeface="Aptos" pitchFamily="34" charset="-122"/>
                 <a:cs typeface="Aptos" pitchFamily="34" charset="-120"/>
               </a:rPr>
-              <a:t>Connect the concept to public health purpose, responsible use, required safeguards, documentation, and the next action a.</a:t>
+              <a:t>Connect the concept to public health purpose, responsible use, required safeguards, documentation, and the next action a department should take.</a:t>
             </a:r>
             <a:endParaRPr lang="en-US" sz="1320" dirty="0"/>
           </a:p>
@@ -8004,11 +8436,11 @@
         <p:spPr>
           <a:xfrm>
             <a:off x="7635240" y="1325880"/>
-            <a:ext cx="3474720" cy="1325880"/>
+            <a:ext cx="3474720" cy="1255471"/>
           </a:xfrm>
           <a:prstGeom prst="roundRect">
             <a:avLst>
-              <a:gd name="adj" fmla="val 8276"/>
+              <a:gd name="adj" fmla="val 8740"/>
             </a:avLst>
           </a:prstGeom>
           <a:solidFill>
@@ -8070,7 +8502,7 @@
         <p:spPr>
           <a:xfrm>
             <a:off x="7799832" y="1801368"/>
-            <a:ext cx="3145536" cy="758952"/>
+            <a:ext cx="3145536" cy="688543"/>
           </a:xfrm>
           <a:prstGeom prst="rect">
             <a:avLst/>
@@ -8110,12 +8542,12 @@
         </p:nvSpPr>
         <p:spPr>
           <a:xfrm>
-            <a:off x="7635240" y="2788920"/>
-            <a:ext cx="3474720" cy="1536192"/>
+            <a:off x="7635240" y="2718511"/>
+            <a:ext cx="3474720" cy="1328623"/>
           </a:xfrm>
           <a:prstGeom prst="roundRect">
             <a:avLst>
-              <a:gd name="adj" fmla="val 7143"/>
+              <a:gd name="adj" fmla="val 8259"/>
             </a:avLst>
           </a:prstGeom>
           <a:solidFill>
@@ -8137,7 +8569,7 @@
         </p:nvSpPr>
         <p:spPr>
           <a:xfrm>
-            <a:off x="7799832" y="2935224"/>
+            <a:off x="7799832" y="2864815"/>
             <a:ext cx="3145536" cy="256032"/>
           </a:xfrm>
           <a:prstGeom prst="rect">
@@ -8176,8 +8608,8 @@
         </p:nvSpPr>
         <p:spPr>
           <a:xfrm>
-            <a:off x="7818120" y="3300984"/>
-            <a:ext cx="3090672" cy="877824"/>
+            <a:off x="7818120" y="3230575"/>
+            <a:ext cx="3090672" cy="670255"/>
           </a:xfrm>
           <a:prstGeom prst="rect">
             <a:avLst/>
@@ -8217,12 +8649,12 @@
         </p:nvSpPr>
         <p:spPr>
           <a:xfrm>
-            <a:off x="7635240" y="4498848"/>
-            <a:ext cx="3474720" cy="1143000"/>
+            <a:off x="7635240" y="4184294"/>
+            <a:ext cx="3474720" cy="1466698"/>
           </a:xfrm>
           <a:prstGeom prst="roundRect">
             <a:avLst>
-              <a:gd name="adj" fmla="val 9600"/>
+              <a:gd name="adj" fmla="val 7481"/>
             </a:avLst>
           </a:prstGeom>
           <a:solidFill>
@@ -8244,7 +8676,7 @@
         </p:nvSpPr>
         <p:spPr>
           <a:xfrm>
-            <a:off x="7799832" y="4645152"/>
+            <a:off x="7799832" y="4330598"/>
             <a:ext cx="3145536" cy="256032"/>
           </a:xfrm>
           <a:prstGeom prst="rect">
@@ -8283,8 +8715,8 @@
         </p:nvSpPr>
         <p:spPr>
           <a:xfrm>
-            <a:off x="7799832" y="4974336"/>
-            <a:ext cx="3145536" cy="576072"/>
+            <a:off x="7799832" y="4659782"/>
+            <a:ext cx="3145536" cy="899770"/>
           </a:xfrm>
           <a:prstGeom prst="rect">
             <a:avLst/>
@@ -8310,7 +8742,7 @@
                 <a:ea typeface="Aptos" pitchFamily="34" charset="-122"/>
                 <a:cs typeface="Aptos" pitchFamily="34" charset="-120"/>
               </a:rPr>
-              <a:t>Use the assignment to test whether you can explain the concept, apply it to a realistic public health situation, and.</a:t>
+              <a:t>Use the assignment to test whether you can explain the concept, apply it to a realistic public health situation, and identify what would need review before the work moves forward.</a:t>
             </a:r>
             <a:endParaRPr lang="en-US" sz="1320" dirty="0"/>
           </a:p>
@@ -8679,11 +9111,11 @@
         <p:spPr>
           <a:xfrm>
             <a:off x="7635240" y="1325880"/>
-            <a:ext cx="3474720" cy="1325880"/>
+            <a:ext cx="3474720" cy="1255471"/>
           </a:xfrm>
           <a:prstGeom prst="roundRect">
             <a:avLst>
-              <a:gd name="adj" fmla="val 8276"/>
+              <a:gd name="adj" fmla="val 8740"/>
             </a:avLst>
           </a:prstGeom>
           <a:solidFill>
@@ -8745,7 +9177,7 @@
         <p:spPr>
           <a:xfrm>
             <a:off x="7799832" y="1801368"/>
-            <a:ext cx="3145536" cy="758952"/>
+            <a:ext cx="3145536" cy="688543"/>
           </a:xfrm>
           <a:prstGeom prst="rect">
             <a:avLst/>
@@ -8785,12 +9217,12 @@
         </p:nvSpPr>
         <p:spPr>
           <a:xfrm>
-            <a:off x="7635240" y="2788920"/>
-            <a:ext cx="3474720" cy="1536192"/>
+            <a:off x="7635240" y="2718511"/>
+            <a:ext cx="3474720" cy="1328623"/>
           </a:xfrm>
           <a:prstGeom prst="roundRect">
             <a:avLst>
-              <a:gd name="adj" fmla="val 7143"/>
+              <a:gd name="adj" fmla="val 8259"/>
             </a:avLst>
           </a:prstGeom>
           <a:solidFill>
@@ -8812,7 +9244,7 @@
         </p:nvSpPr>
         <p:spPr>
           <a:xfrm>
-            <a:off x="7799832" y="2935224"/>
+            <a:off x="7799832" y="2864815"/>
             <a:ext cx="3145536" cy="256032"/>
           </a:xfrm>
           <a:prstGeom prst="rect">
@@ -8851,8 +9283,8 @@
         </p:nvSpPr>
         <p:spPr>
           <a:xfrm>
-            <a:off x="7818120" y="3300984"/>
-            <a:ext cx="3090672" cy="877824"/>
+            <a:off x="7818120" y="3230575"/>
+            <a:ext cx="3090672" cy="670255"/>
           </a:xfrm>
           <a:prstGeom prst="rect">
             <a:avLst/>
@@ -8926,12 +9358,12 @@
         </p:nvSpPr>
         <p:spPr>
           <a:xfrm>
-            <a:off x="7635240" y="4498848"/>
-            <a:ext cx="3474720" cy="1143000"/>
+            <a:off x="7635240" y="4184294"/>
+            <a:ext cx="3474720" cy="1466698"/>
           </a:xfrm>
           <a:prstGeom prst="roundRect">
             <a:avLst>
-              <a:gd name="adj" fmla="val 9600"/>
+              <a:gd name="adj" fmla="val 7481"/>
             </a:avLst>
           </a:prstGeom>
           <a:solidFill>
@@ -8953,7 +9385,7 @@
         </p:nvSpPr>
         <p:spPr>
           <a:xfrm>
-            <a:off x="7799832" y="4645152"/>
+            <a:off x="7799832" y="4330598"/>
             <a:ext cx="3145536" cy="256032"/>
           </a:xfrm>
           <a:prstGeom prst="rect">
@@ -8992,8 +9424,8 @@
         </p:nvSpPr>
         <p:spPr>
           <a:xfrm>
-            <a:off x="7799832" y="4974336"/>
-            <a:ext cx="3145536" cy="576072"/>
+            <a:off x="7799832" y="4659782"/>
+            <a:ext cx="3145536" cy="899770"/>
           </a:xfrm>
           <a:prstGeom prst="rect">
             <a:avLst/>
@@ -9019,7 +9451,7 @@
                 <a:ea typeface="Aptos" pitchFamily="34" charset="-122"/>
                 <a:cs typeface="Aptos" pitchFamily="34" charset="-120"/>
               </a:rPr>
-              <a:t>Use the assignment to test whether you can explain the concept, apply it to a realistic public health situation, and.</a:t>
+              <a:t>Use the assignment to test whether you can explain the concept, apply it to a realistic public health situation, and identify what would need review before the work moves forward.</a:t>
             </a:r>
             <a:endParaRPr lang="en-US" sz="1320" dirty="0"/>
           </a:p>
@@ -9388,11 +9820,11 @@
         <p:spPr>
           <a:xfrm>
             <a:off x="7635240" y="1325880"/>
-            <a:ext cx="3474720" cy="1325880"/>
+            <a:ext cx="3474720" cy="1207008"/>
           </a:xfrm>
           <a:prstGeom prst="roundRect">
             <a:avLst>
-              <a:gd name="adj" fmla="val 8276"/>
+              <a:gd name="adj" fmla="val 9091"/>
             </a:avLst>
           </a:prstGeom>
           <a:solidFill>
@@ -9454,7 +9886,7 @@
         <p:spPr>
           <a:xfrm>
             <a:off x="7799832" y="1801368"/>
-            <a:ext cx="3145536" cy="758952"/>
+            <a:ext cx="3145536" cy="640080"/>
           </a:xfrm>
           <a:prstGeom prst="rect">
             <a:avLst/>
@@ -9494,12 +9926,12 @@
         </p:nvSpPr>
         <p:spPr>
           <a:xfrm>
-            <a:off x="7635240" y="2788920"/>
-            <a:ext cx="3474720" cy="1536192"/>
+            <a:off x="7635240" y="2670048"/>
+            <a:ext cx="3474720" cy="1377086"/>
           </a:xfrm>
           <a:prstGeom prst="roundRect">
             <a:avLst>
-              <a:gd name="adj" fmla="val 7143"/>
+              <a:gd name="adj" fmla="val 7968"/>
             </a:avLst>
           </a:prstGeom>
           <a:solidFill>
@@ -9521,7 +9953,7 @@
         </p:nvSpPr>
         <p:spPr>
           <a:xfrm>
-            <a:off x="7799832" y="2935224"/>
+            <a:off x="7799832" y="2816352"/>
             <a:ext cx="3145536" cy="256032"/>
           </a:xfrm>
           <a:prstGeom prst="rect">
@@ -9560,8 +9992,8 @@
         </p:nvSpPr>
         <p:spPr>
           <a:xfrm>
-            <a:off x="7818120" y="3300984"/>
-            <a:ext cx="3090672" cy="877824"/>
+            <a:off x="7818120" y="3182112"/>
+            <a:ext cx="3090672" cy="718718"/>
           </a:xfrm>
           <a:prstGeom prst="rect">
             <a:avLst/>
@@ -9635,12 +10067,12 @@
         </p:nvSpPr>
         <p:spPr>
           <a:xfrm>
-            <a:off x="7635240" y="4498848"/>
-            <a:ext cx="3474720" cy="1143000"/>
+            <a:off x="7635240" y="4184294"/>
+            <a:ext cx="3474720" cy="1466698"/>
           </a:xfrm>
           <a:prstGeom prst="roundRect">
             <a:avLst>
-              <a:gd name="adj" fmla="val 9600"/>
+              <a:gd name="adj" fmla="val 7481"/>
             </a:avLst>
           </a:prstGeom>
           <a:solidFill>
@@ -9662,7 +10094,7 @@
         </p:nvSpPr>
         <p:spPr>
           <a:xfrm>
-            <a:off x="7799832" y="4645152"/>
+            <a:off x="7799832" y="4330598"/>
             <a:ext cx="3145536" cy="256032"/>
           </a:xfrm>
           <a:prstGeom prst="rect">
@@ -9701,8 +10133,8 @@
         </p:nvSpPr>
         <p:spPr>
           <a:xfrm>
-            <a:off x="7799832" y="4974336"/>
-            <a:ext cx="3145536" cy="576072"/>
+            <a:off x="7799832" y="4659782"/>
+            <a:ext cx="3145536" cy="899770"/>
           </a:xfrm>
           <a:prstGeom prst="rect">
             <a:avLst/>
@@ -9728,7 +10160,7 @@
                 <a:ea typeface="Aptos" pitchFamily="34" charset="-122"/>
                 <a:cs typeface="Aptos" pitchFamily="34" charset="-120"/>
               </a:rPr>
-              <a:t>Connect the concept to public health purpose, responsible use, required safeguards, documentation, and the next action a.</a:t>
+              <a:t>Connect the concept to public health purpose, responsible use, required safeguards, documentation, and the next action a department should take.</a:t>
             </a:r>
             <a:endParaRPr lang="en-US" sz="1320" dirty="0"/>
           </a:p>
@@ -10682,11 +11114,11 @@
         <p:spPr>
           <a:xfrm>
             <a:off x="7635240" y="1325880"/>
-            <a:ext cx="3474720" cy="1325880"/>
+            <a:ext cx="3474720" cy="1255471"/>
           </a:xfrm>
           <a:prstGeom prst="roundRect">
             <a:avLst>
-              <a:gd name="adj" fmla="val 8276"/>
+              <a:gd name="adj" fmla="val 8740"/>
             </a:avLst>
           </a:prstGeom>
           <a:solidFill>
@@ -10748,7 +11180,7 @@
         <p:spPr>
           <a:xfrm>
             <a:off x="7799832" y="1801368"/>
-            <a:ext cx="3145536" cy="758952"/>
+            <a:ext cx="3145536" cy="688543"/>
           </a:xfrm>
           <a:prstGeom prst="rect">
             <a:avLst/>
@@ -10788,12 +11220,12 @@
         </p:nvSpPr>
         <p:spPr>
           <a:xfrm>
-            <a:off x="7635240" y="2788920"/>
-            <a:ext cx="3474720" cy="1536192"/>
+            <a:off x="7635240" y="2718511"/>
+            <a:ext cx="3474720" cy="1328623"/>
           </a:xfrm>
           <a:prstGeom prst="roundRect">
             <a:avLst>
-              <a:gd name="adj" fmla="val 7143"/>
+              <a:gd name="adj" fmla="val 8259"/>
             </a:avLst>
           </a:prstGeom>
           <a:solidFill>
@@ -10815,7 +11247,7 @@
         </p:nvSpPr>
         <p:spPr>
           <a:xfrm>
-            <a:off x="7799832" y="2935224"/>
+            <a:off x="7799832" y="2864815"/>
             <a:ext cx="3145536" cy="256032"/>
           </a:xfrm>
           <a:prstGeom prst="rect">
@@ -10854,8 +11286,8 @@
         </p:nvSpPr>
         <p:spPr>
           <a:xfrm>
-            <a:off x="7818120" y="3300984"/>
-            <a:ext cx="3090672" cy="877824"/>
+            <a:off x="7818120" y="3230575"/>
+            <a:ext cx="3090672" cy="670255"/>
           </a:xfrm>
           <a:prstGeom prst="rect">
             <a:avLst/>
@@ -10912,12 +11344,12 @@
         </p:nvSpPr>
         <p:spPr>
           <a:xfrm>
-            <a:off x="7635240" y="4498848"/>
-            <a:ext cx="3474720" cy="1143000"/>
+            <a:off x="7635240" y="4184294"/>
+            <a:ext cx="3474720" cy="1466698"/>
           </a:xfrm>
           <a:prstGeom prst="roundRect">
             <a:avLst>
-              <a:gd name="adj" fmla="val 9600"/>
+              <a:gd name="adj" fmla="val 7481"/>
             </a:avLst>
           </a:prstGeom>
           <a:solidFill>
@@ -10939,7 +11371,7 @@
         </p:nvSpPr>
         <p:spPr>
           <a:xfrm>
-            <a:off x="7799832" y="4645152"/>
+            <a:off x="7799832" y="4330598"/>
             <a:ext cx="3145536" cy="256032"/>
           </a:xfrm>
           <a:prstGeom prst="rect">
@@ -10978,8 +11410,8 @@
         </p:nvSpPr>
         <p:spPr>
           <a:xfrm>
-            <a:off x="7799832" y="4974336"/>
-            <a:ext cx="3145536" cy="576072"/>
+            <a:off x="7799832" y="4659782"/>
+            <a:ext cx="3145536" cy="899770"/>
           </a:xfrm>
           <a:prstGeom prst="rect">
             <a:avLst/>
@@ -11005,7 +11437,7 @@
                 <a:ea typeface="Aptos" pitchFamily="34" charset="-122"/>
                 <a:cs typeface="Aptos" pitchFamily="34" charset="-120"/>
               </a:rPr>
-              <a:t>Connect the concept to public health purpose, responsible use, required safeguards, documentation, and the next action a.</a:t>
+              <a:t>Connect the concept to public health purpose, responsible use, required safeguards, documentation, and the next action a department should take.</a:t>
             </a:r>
             <a:endParaRPr lang="en-US" sz="1320" dirty="0"/>
           </a:p>
@@ -11483,7 +11915,7 @@
                 <a:ea typeface="Aptos" pitchFamily="34" charset="-122"/>
                 <a:cs typeface="Aptos" pitchFamily="34" charset="-120"/>
               </a:rPr>
-              <a:t>Use the related plays to identify decisions, participants, timing, approvals, and documentation needed for responsible.</a:t>
+              <a:t>Use the related plays to identify decisions, participants, timing, approvals, and documentation needed for responsible implementation.</a:t>
             </a:r>
             <a:endParaRPr lang="en-US" sz="1320" dirty="0"/>
           </a:p>
@@ -12102,7 +12534,7 @@
                 <a:ea typeface="Aptos" pitchFamily="34" charset="-122"/>
                 <a:cs typeface="Aptos" pitchFamily="34" charset="-120"/>
               </a:rPr>
-              <a:t>Use linked tools when your department needs a structured worksheet, template, checklist, review process, or.</a:t>
+              <a:t>Use linked tools when your department needs a structured worksheet, template, checklist, review process, or documentation artifact.</a:t>
             </a:r>
             <a:endParaRPr lang="en-US" sz="1320" dirty="0"/>
           </a:p>
@@ -12612,11 +13044,11 @@
         <p:spPr>
           <a:xfrm>
             <a:off x="7635240" y="1325880"/>
-            <a:ext cx="3474720" cy="1325880"/>
+            <a:ext cx="3474720" cy="1207008"/>
           </a:xfrm>
           <a:prstGeom prst="roundRect">
             <a:avLst>
-              <a:gd name="adj" fmla="val 8276"/>
+              <a:gd name="adj" fmla="val 9091"/>
             </a:avLst>
           </a:prstGeom>
           <a:solidFill>
@@ -12678,7 +13110,7 @@
         <p:spPr>
           <a:xfrm>
             <a:off x="7799832" y="1801368"/>
-            <a:ext cx="3145536" cy="758952"/>
+            <a:ext cx="3145536" cy="640080"/>
           </a:xfrm>
           <a:prstGeom prst="rect">
             <a:avLst/>
@@ -12718,12 +13150,12 @@
         </p:nvSpPr>
         <p:spPr>
           <a:xfrm>
-            <a:off x="7635240" y="2788920"/>
-            <a:ext cx="3474720" cy="1536192"/>
+            <a:off x="7635240" y="2670048"/>
+            <a:ext cx="3474720" cy="1377086"/>
           </a:xfrm>
           <a:prstGeom prst="roundRect">
             <a:avLst>
-              <a:gd name="adj" fmla="val 7143"/>
+              <a:gd name="adj" fmla="val 7968"/>
             </a:avLst>
           </a:prstGeom>
           <a:solidFill>
@@ -12745,7 +13177,7 @@
         </p:nvSpPr>
         <p:spPr>
           <a:xfrm>
-            <a:off x="7799832" y="2935224"/>
+            <a:off x="7799832" y="2816352"/>
             <a:ext cx="3145536" cy="256032"/>
           </a:xfrm>
           <a:prstGeom prst="rect">
@@ -12784,8 +13216,8 @@
         </p:nvSpPr>
         <p:spPr>
           <a:xfrm>
-            <a:off x="7818120" y="3300984"/>
-            <a:ext cx="3090672" cy="877824"/>
+            <a:off x="7818120" y="3182112"/>
+            <a:ext cx="3090672" cy="718718"/>
           </a:xfrm>
           <a:prstGeom prst="rect">
             <a:avLst/>
@@ -12859,12 +13291,12 @@
         </p:nvSpPr>
         <p:spPr>
           <a:xfrm>
-            <a:off x="7635240" y="4498848"/>
-            <a:ext cx="3474720" cy="1143000"/>
+            <a:off x="7635240" y="4184294"/>
+            <a:ext cx="3474720" cy="1466698"/>
           </a:xfrm>
           <a:prstGeom prst="roundRect">
             <a:avLst>
-              <a:gd name="adj" fmla="val 9600"/>
+              <a:gd name="adj" fmla="val 7481"/>
             </a:avLst>
           </a:prstGeom>
           <a:solidFill>
@@ -12886,7 +13318,7 @@
         </p:nvSpPr>
         <p:spPr>
           <a:xfrm>
-            <a:off x="7799832" y="4645152"/>
+            <a:off x="7799832" y="4330598"/>
             <a:ext cx="3145536" cy="256032"/>
           </a:xfrm>
           <a:prstGeom prst="rect">
@@ -12925,8 +13357,8 @@
         </p:nvSpPr>
         <p:spPr>
           <a:xfrm>
-            <a:off x="7799832" y="4974336"/>
-            <a:ext cx="3145536" cy="576072"/>
+            <a:off x="7799832" y="4659782"/>
+            <a:ext cx="3145536" cy="899770"/>
           </a:xfrm>
           <a:prstGeom prst="rect">
             <a:avLst/>
@@ -12952,7 +13384,7 @@
                 <a:ea typeface="Aptos" pitchFamily="34" charset="-122"/>
                 <a:cs typeface="Aptos" pitchFamily="34" charset="-120"/>
               </a:rPr>
-              <a:t>Use the assignment to test whether you can explain the concept, apply it to a realistic public health situation, and.</a:t>
+              <a:t>Use the assignment to test whether you can explain the concept, apply it to a realistic public health situation, and identify what would need review before the work moves forward.</a:t>
             </a:r>
             <a:endParaRPr lang="en-US" sz="1320" dirty="0"/>
           </a:p>
@@ -13321,11 +13753,11 @@
         <p:spPr>
           <a:xfrm>
             <a:off x="7635240" y="1325880"/>
-            <a:ext cx="3474720" cy="1325880"/>
+            <a:ext cx="3474720" cy="1207008"/>
           </a:xfrm>
           <a:prstGeom prst="roundRect">
             <a:avLst>
-              <a:gd name="adj" fmla="val 8276"/>
+              <a:gd name="adj" fmla="val 9091"/>
             </a:avLst>
           </a:prstGeom>
           <a:solidFill>
@@ -13387,7 +13819,7 @@
         <p:spPr>
           <a:xfrm>
             <a:off x="7799832" y="1801368"/>
-            <a:ext cx="3145536" cy="758952"/>
+            <a:ext cx="3145536" cy="640080"/>
           </a:xfrm>
           <a:prstGeom prst="rect">
             <a:avLst/>
@@ -13413,7 +13845,7 @@
                 <a:ea typeface="Aptos" pitchFamily="34" charset="-122"/>
                 <a:cs typeface="Aptos" pitchFamily="34" charset="-120"/>
               </a:rPr>
-              <a:t>AI changes the skills, roles, and collaboration patterns needed in public health agencies.</a:t>
+              <a:t>AI changes the skills, roles, and collaboration patterns needed in public health.</a:t>
             </a:r>
             <a:endParaRPr lang="en-US" sz="1320" dirty="0"/>
           </a:p>
@@ -13427,12 +13859,12 @@
         </p:nvSpPr>
         <p:spPr>
           <a:xfrm>
-            <a:off x="7635240" y="2788920"/>
-            <a:ext cx="3474720" cy="1536192"/>
+            <a:off x="7635240" y="2670048"/>
+            <a:ext cx="3474720" cy="1377086"/>
           </a:xfrm>
           <a:prstGeom prst="roundRect">
             <a:avLst>
-              <a:gd name="adj" fmla="val 7143"/>
+              <a:gd name="adj" fmla="val 7968"/>
             </a:avLst>
           </a:prstGeom>
           <a:solidFill>
@@ -13454,7 +13886,7 @@
         </p:nvSpPr>
         <p:spPr>
           <a:xfrm>
-            <a:off x="7799832" y="2935224"/>
+            <a:off x="7799832" y="2816352"/>
             <a:ext cx="3145536" cy="256032"/>
           </a:xfrm>
           <a:prstGeom prst="rect">
@@ -13493,8 +13925,8 @@
         </p:nvSpPr>
         <p:spPr>
           <a:xfrm>
-            <a:off x="7818120" y="3300984"/>
-            <a:ext cx="3090672" cy="877824"/>
+            <a:off x="7818120" y="3182112"/>
+            <a:ext cx="3090672" cy="718718"/>
           </a:xfrm>
           <a:prstGeom prst="rect">
             <a:avLst/>
@@ -13568,12 +14000,12 @@
         </p:nvSpPr>
         <p:spPr>
           <a:xfrm>
-            <a:off x="7635240" y="4498848"/>
-            <a:ext cx="3474720" cy="1143000"/>
+            <a:off x="7635240" y="4184294"/>
+            <a:ext cx="3474720" cy="1466698"/>
           </a:xfrm>
           <a:prstGeom prst="roundRect">
             <a:avLst>
-              <a:gd name="adj" fmla="val 9600"/>
+              <a:gd name="adj" fmla="val 7481"/>
             </a:avLst>
           </a:prstGeom>
           <a:solidFill>
@@ -13595,7 +14027,7 @@
         </p:nvSpPr>
         <p:spPr>
           <a:xfrm>
-            <a:off x="7799832" y="4645152"/>
+            <a:off x="7799832" y="4330598"/>
             <a:ext cx="3145536" cy="256032"/>
           </a:xfrm>
           <a:prstGeom prst="rect">
@@ -13634,8 +14066,8 @@
         </p:nvSpPr>
         <p:spPr>
           <a:xfrm>
-            <a:off x="7799832" y="4974336"/>
-            <a:ext cx="3145536" cy="576072"/>
+            <a:off x="7799832" y="4659782"/>
+            <a:ext cx="3145536" cy="899770"/>
           </a:xfrm>
           <a:prstGeom prst="rect">
             <a:avLst/>
@@ -13661,7 +14093,7 @@
                 <a:ea typeface="Aptos" pitchFamily="34" charset="-122"/>
                 <a:cs typeface="Aptos" pitchFamily="34" charset="-120"/>
               </a:rPr>
-              <a:t>Connect the concept to public health purpose, responsible use, required safeguards, documentation, and the next action a.</a:t>
+              <a:t>Connect the concept to public health purpose, responsible use, required safeguards, documentation, and the next action a department should take.</a:t>
             </a:r>
             <a:endParaRPr lang="en-US" sz="1320" dirty="0"/>
           </a:p>
@@ -14030,11 +14462,11 @@
         <p:spPr>
           <a:xfrm>
             <a:off x="7635240" y="1325880"/>
-            <a:ext cx="3474720" cy="1325880"/>
+            <a:ext cx="3474720" cy="1207008"/>
           </a:xfrm>
           <a:prstGeom prst="roundRect">
             <a:avLst>
-              <a:gd name="adj" fmla="val 8276"/>
+              <a:gd name="adj" fmla="val 9091"/>
             </a:avLst>
           </a:prstGeom>
           <a:solidFill>
@@ -14096,7 +14528,7 @@
         <p:spPr>
           <a:xfrm>
             <a:off x="7799832" y="1801368"/>
-            <a:ext cx="3145536" cy="758952"/>
+            <a:ext cx="3145536" cy="640080"/>
           </a:xfrm>
           <a:prstGeom prst="rect">
             <a:avLst/>
@@ -14136,12 +14568,12 @@
         </p:nvSpPr>
         <p:spPr>
           <a:xfrm>
-            <a:off x="7635240" y="2788920"/>
-            <a:ext cx="3474720" cy="1536192"/>
+            <a:off x="7635240" y="2670048"/>
+            <a:ext cx="3474720" cy="1377086"/>
           </a:xfrm>
           <a:prstGeom prst="roundRect">
             <a:avLst>
-              <a:gd name="adj" fmla="val 7143"/>
+              <a:gd name="adj" fmla="val 7968"/>
             </a:avLst>
           </a:prstGeom>
           <a:solidFill>
@@ -14163,7 +14595,7 @@
         </p:nvSpPr>
         <p:spPr>
           <a:xfrm>
-            <a:off x="7799832" y="2935224"/>
+            <a:off x="7799832" y="2816352"/>
             <a:ext cx="3145536" cy="256032"/>
           </a:xfrm>
           <a:prstGeom prst="rect">
@@ -14202,8 +14634,8 @@
         </p:nvSpPr>
         <p:spPr>
           <a:xfrm>
-            <a:off x="7818120" y="3300984"/>
-            <a:ext cx="3090672" cy="877824"/>
+            <a:off x="7818120" y="3182112"/>
+            <a:ext cx="3090672" cy="718718"/>
           </a:xfrm>
           <a:prstGeom prst="rect">
             <a:avLst/>
@@ -14277,12 +14709,12 @@
         </p:nvSpPr>
         <p:spPr>
           <a:xfrm>
-            <a:off x="7635240" y="4498848"/>
-            <a:ext cx="3474720" cy="1143000"/>
+            <a:off x="7635240" y="4184294"/>
+            <a:ext cx="3474720" cy="1466698"/>
           </a:xfrm>
           <a:prstGeom prst="roundRect">
             <a:avLst>
-              <a:gd name="adj" fmla="val 9600"/>
+              <a:gd name="adj" fmla="val 7481"/>
             </a:avLst>
           </a:prstGeom>
           <a:solidFill>
@@ -14304,7 +14736,7 @@
         </p:nvSpPr>
         <p:spPr>
           <a:xfrm>
-            <a:off x="7799832" y="4645152"/>
+            <a:off x="7799832" y="4330598"/>
             <a:ext cx="3145536" cy="256032"/>
           </a:xfrm>
           <a:prstGeom prst="rect">
@@ -14343,8 +14775,8 @@
         </p:nvSpPr>
         <p:spPr>
           <a:xfrm>
-            <a:off x="7799832" y="4974336"/>
-            <a:ext cx="3145536" cy="576072"/>
+            <a:off x="7799832" y="4659782"/>
+            <a:ext cx="3145536" cy="899770"/>
           </a:xfrm>
           <a:prstGeom prst="rect">
             <a:avLst/>
@@ -14370,7 +14802,7 @@
                 <a:ea typeface="Aptos" pitchFamily="34" charset="-122"/>
                 <a:cs typeface="Aptos" pitchFamily="34" charset="-120"/>
               </a:rPr>
-              <a:t>Connect the concept to public health purpose, responsible use, required safeguards, documentation, and the next action a.</a:t>
+              <a:t>Connect the concept to public health purpose, responsible use, required safeguards, documentation, and the next action a department should take.</a:t>
             </a:r>
             <a:endParaRPr lang="en-US" sz="1320" dirty="0"/>
           </a:p>
@@ -14739,11 +15171,11 @@
         <p:spPr>
           <a:xfrm>
             <a:off x="7635240" y="1325880"/>
-            <a:ext cx="3474720" cy="1325880"/>
+            <a:ext cx="3474720" cy="1255471"/>
           </a:xfrm>
           <a:prstGeom prst="roundRect">
             <a:avLst>
-              <a:gd name="adj" fmla="val 8276"/>
+              <a:gd name="adj" fmla="val 8740"/>
             </a:avLst>
           </a:prstGeom>
           <a:solidFill>
@@ -14805,7 +15237,7 @@
         <p:spPr>
           <a:xfrm>
             <a:off x="7799832" y="1801368"/>
-            <a:ext cx="3145536" cy="758952"/>
+            <a:ext cx="3145536" cy="688543"/>
           </a:xfrm>
           <a:prstGeom prst="rect">
             <a:avLst/>
@@ -14845,12 +15277,12 @@
         </p:nvSpPr>
         <p:spPr>
           <a:xfrm>
-            <a:off x="7635240" y="2788920"/>
-            <a:ext cx="3474720" cy="1536192"/>
+            <a:off x="7635240" y="2718511"/>
+            <a:ext cx="3474720" cy="1328623"/>
           </a:xfrm>
           <a:prstGeom prst="roundRect">
             <a:avLst>
-              <a:gd name="adj" fmla="val 7143"/>
+              <a:gd name="adj" fmla="val 8259"/>
             </a:avLst>
           </a:prstGeom>
           <a:solidFill>
@@ -14872,7 +15304,7 @@
         </p:nvSpPr>
         <p:spPr>
           <a:xfrm>
-            <a:off x="7799832" y="2935224"/>
+            <a:off x="7799832" y="2864815"/>
             <a:ext cx="3145536" cy="256032"/>
           </a:xfrm>
           <a:prstGeom prst="rect">
@@ -14911,8 +15343,8 @@
         </p:nvSpPr>
         <p:spPr>
           <a:xfrm>
-            <a:off x="7818120" y="3300984"/>
-            <a:ext cx="3090672" cy="877824"/>
+            <a:off x="7818120" y="3230575"/>
+            <a:ext cx="3090672" cy="670255"/>
           </a:xfrm>
           <a:prstGeom prst="rect">
             <a:avLst/>
@@ -14986,12 +15418,12 @@
         </p:nvSpPr>
         <p:spPr>
           <a:xfrm>
-            <a:off x="7635240" y="4498848"/>
-            <a:ext cx="3474720" cy="1143000"/>
+            <a:off x="7635240" y="4184294"/>
+            <a:ext cx="3474720" cy="1466698"/>
           </a:xfrm>
           <a:prstGeom prst="roundRect">
             <a:avLst>
-              <a:gd name="adj" fmla="val 9600"/>
+              <a:gd name="adj" fmla="val 7481"/>
             </a:avLst>
           </a:prstGeom>
           <a:solidFill>
@@ -15013,7 +15445,7 @@
         </p:nvSpPr>
         <p:spPr>
           <a:xfrm>
-            <a:off x="7799832" y="4645152"/>
+            <a:off x="7799832" y="4330598"/>
             <a:ext cx="3145536" cy="256032"/>
           </a:xfrm>
           <a:prstGeom prst="rect">
@@ -15052,8 +15484,8 @@
         </p:nvSpPr>
         <p:spPr>
           <a:xfrm>
-            <a:off x="7799832" y="4974336"/>
-            <a:ext cx="3145536" cy="576072"/>
+            <a:off x="7799832" y="4659782"/>
+            <a:ext cx="3145536" cy="899770"/>
           </a:xfrm>
           <a:prstGeom prst="rect">
             <a:avLst/>
@@ -15079,7 +15511,7 @@
                 <a:ea typeface="Aptos" pitchFamily="34" charset="-122"/>
                 <a:cs typeface="Aptos" pitchFamily="34" charset="-120"/>
               </a:rPr>
-              <a:t>Connect the concept to public health purpose, responsible use, required safeguards, documentation, and the next action a.</a:t>
+              <a:t>Connect the concept to public health purpose, responsible use, required safeguards, documentation, and the next action a department should take.</a:t>
             </a:r>
             <a:endParaRPr lang="en-US" sz="1320" dirty="0"/>
           </a:p>
@@ -15448,11 +15880,11 @@
         <p:spPr>
           <a:xfrm>
             <a:off x="7635240" y="1325880"/>
-            <a:ext cx="3474720" cy="1325880"/>
+            <a:ext cx="3474720" cy="1207008"/>
           </a:xfrm>
           <a:prstGeom prst="roundRect">
             <a:avLst>
-              <a:gd name="adj" fmla="val 8276"/>
+              <a:gd name="adj" fmla="val 9091"/>
             </a:avLst>
           </a:prstGeom>
           <a:solidFill>
@@ -15514,7 +15946,7 @@
         <p:spPr>
           <a:xfrm>
             <a:off x="7799832" y="1801368"/>
-            <a:ext cx="3145536" cy="758952"/>
+            <a:ext cx="3145536" cy="640080"/>
           </a:xfrm>
           <a:prstGeom prst="rect">
             <a:avLst/>
@@ -15554,12 +15986,12 @@
         </p:nvSpPr>
         <p:spPr>
           <a:xfrm>
-            <a:off x="7635240" y="2788920"/>
-            <a:ext cx="3474720" cy="1536192"/>
+            <a:off x="7635240" y="2670048"/>
+            <a:ext cx="3474720" cy="1377086"/>
           </a:xfrm>
           <a:prstGeom prst="roundRect">
             <a:avLst>
-              <a:gd name="adj" fmla="val 7143"/>
+              <a:gd name="adj" fmla="val 7968"/>
             </a:avLst>
           </a:prstGeom>
           <a:solidFill>
@@ -15581,8 +16013,8 @@
         </p:nvSpPr>
         <p:spPr>
           <a:xfrm>
-            <a:off x="7799832" y="2935224"/>
-            <a:ext cx="3145536" cy="256032"/>
+            <a:off x="7799832" y="2798064"/>
+            <a:ext cx="3145536" cy="237744"/>
           </a:xfrm>
           <a:prstGeom prst="rect">
             <a:avLst/>
@@ -15598,7 +16030,7 @@
               <a:buNone/>
             </a:pPr>
             <a:r>
-              <a:rPr lang="en-US" sz="1300" b="1" dirty="0">
+              <a:rPr lang="en-US" sz="1250" b="1" dirty="0">
                 <a:solidFill>
                   <a:srgbClr val="0068B7"/>
                 </a:solidFill>
@@ -15606,101 +16038,317 @@
                 <a:ea typeface="Aptos" pitchFamily="34" charset="-122"/>
                 <a:cs typeface="Aptos" pitchFamily="34" charset="-120"/>
               </a:rPr>
-              <a:t>Concept checkpoints</a:t>
-            </a:r>
-            <a:endParaRPr lang="en-US" sz="1300" dirty="0"/>
-          </a:p>
-        </p:txBody>
-      </p:sp>
-      <p:sp>
-        <p:nvSpPr>
-          <p:cNvPr id="15" name="Text 13"/>
-          <p:cNvSpPr/>
-          <p:nvPr/>
-        </p:nvSpPr>
-        <p:spPr>
-          <a:xfrm>
-            <a:off x="7818120" y="3300984"/>
-            <a:ext cx="3090672" cy="877824"/>
-          </a:xfrm>
-          <a:prstGeom prst="rect">
-            <a:avLst/>
-          </a:prstGeom>
-          <a:noFill/>
-          <a:ln/>
-        </p:spPr>
-        <p:txBody>
-          <a:bodyPr wrap="square" lIns="508" tIns="508" rIns="508" bIns="508" rtlCol="0" anchor="t">
+              <a:t>Governance pathway</a:t>
+            </a:r>
+            <a:endParaRPr lang="en-US" sz="1250" dirty="0"/>
+          </a:p>
+        </p:txBody>
+      </p:sp>
+      <p:sp>
+        <p:nvSpPr>
+          <p:cNvPr id="15" name="Shape 13"/>
+          <p:cNvSpPr/>
+          <p:nvPr/>
+        </p:nvSpPr>
+        <p:spPr>
+          <a:xfrm>
+            <a:off x="8763000" y="3351276"/>
+            <a:ext cx="164592" cy="0"/>
+          </a:xfrm>
+          <a:prstGeom prst="line">
+            <a:avLst/>
+          </a:prstGeom>
+          <a:noFill/>
+          <a:ln w="15240">
+            <a:solidFill>
+              <a:srgbClr val="8ABBD8"/>
+            </a:solidFill>
+            <a:prstDash val="solid"/>
+          </a:ln>
+        </p:spPr>
+      </p:sp>
+      <p:sp>
+        <p:nvSpPr>
+          <p:cNvPr id="16" name="Shape 14"/>
+          <p:cNvSpPr/>
+          <p:nvPr/>
+        </p:nvSpPr>
+        <p:spPr>
+          <a:xfrm>
+            <a:off x="7872984" y="3200400"/>
+            <a:ext cx="890016" cy="301752"/>
+          </a:xfrm>
+          <a:prstGeom prst="roundRect">
+            <a:avLst>
+              <a:gd name="adj" fmla="val 24242"/>
+            </a:avLst>
+          </a:prstGeom>
+          <a:solidFill>
+            <a:srgbClr val="0068B7"/>
+          </a:solidFill>
+          <a:ln w="12700">
+            <a:solidFill>
+              <a:srgbClr val="0068B7"/>
+            </a:solidFill>
+            <a:prstDash val="solid"/>
+          </a:ln>
+        </p:spPr>
+      </p:sp>
+      <p:sp>
+        <p:nvSpPr>
+          <p:cNvPr id="17" name="Text 15"/>
+          <p:cNvSpPr/>
+          <p:nvPr/>
+        </p:nvSpPr>
+        <p:spPr>
+          <a:xfrm>
+            <a:off x="7909560" y="3273552"/>
+            <a:ext cx="816864" cy="146304"/>
+          </a:xfrm>
+          <a:prstGeom prst="rect">
+            <a:avLst/>
+          </a:prstGeom>
+          <a:noFill/>
+          <a:ln/>
+        </p:spPr>
+        <p:txBody>
+          <a:bodyPr wrap="square" lIns="0" tIns="0" rIns="0" bIns="0" rtlCol="0" anchor="ctr">
             <a:normAutofit/>
           </a:bodyPr>
           <a:lstStyle/>
           <a:p>
-            <a:pPr indent="0" marL="0">
-              <a:buNone/>
-            </a:pPr>
-            <a:r>
-              <a:rPr lang="en-US" sz="1220" dirty="0">
-                <a:solidFill>
-                  <a:srgbClr val="17364A"/>
-                </a:solidFill>
-                <a:latin typeface="Aptos" pitchFamily="34" charset="0"/>
-                <a:ea typeface="Aptos" pitchFamily="34" charset="-122"/>
-                <a:cs typeface="Aptos" pitchFamily="34" charset="-120"/>
-              </a:rPr>
-              <a:t>Supervisors need to support review, feedback, and documentation.</a:t>
-            </a:r>
-            <a:endParaRPr lang="en-US" sz="1220" dirty="0"/>
-          </a:p>
-          <a:p>
-            <a:pPr indent="0" marL="0">
-              <a:buNone/>
-            </a:pPr>
-            <a:r>
-              <a:rPr lang="en-US" sz="1220" dirty="0">
-                <a:solidFill>
-                  <a:srgbClr val="17364A"/>
-                </a:solidFill>
-                <a:latin typeface="Aptos" pitchFamily="34" charset="0"/>
-                <a:ea typeface="Aptos" pitchFamily="34" charset="-122"/>
-                <a:cs typeface="Aptos" pitchFamily="34" charset="-120"/>
-              </a:rPr>
-              <a:t>Program owners need to understand accountability and performance.</a:t>
-            </a:r>
-            <a:endParaRPr lang="en-US" sz="1220" dirty="0"/>
-          </a:p>
-          <a:p>
-            <a:pPr indent="0" marL="0">
-              <a:buNone/>
-            </a:pPr>
-            <a:r>
-              <a:rPr lang="en-US" sz="1220" dirty="0">
-                <a:solidFill>
-                  <a:srgbClr val="17364A"/>
-                </a:solidFill>
-                <a:latin typeface="Aptos" pitchFamily="34" charset="0"/>
-                <a:ea typeface="Aptos" pitchFamily="34" charset="-122"/>
-                <a:cs typeface="Aptos" pitchFamily="34" charset="-120"/>
-              </a:rPr>
-              <a:t>Technical staff need deeper knowledge of data, architecture,.</a:t>
-            </a:r>
-            <a:endParaRPr lang="en-US" sz="1220" dirty="0"/>
-          </a:p>
-        </p:txBody>
-      </p:sp>
-      <p:sp>
-        <p:nvSpPr>
-          <p:cNvPr id="16" name="Shape 14"/>
-          <p:cNvSpPr/>
-          <p:nvPr/>
-        </p:nvSpPr>
-        <p:spPr>
-          <a:xfrm>
-            <a:off x="7635240" y="4498848"/>
-            <a:ext cx="3474720" cy="1143000"/>
+            <a:pPr algn="ctr" indent="0" marL="0">
+              <a:buNone/>
+            </a:pPr>
+            <a:r>
+              <a:rPr lang="en-US" sz="880" b="1" dirty="0">
+                <a:solidFill>
+                  <a:srgbClr val="FFFFFF"/>
+                </a:solidFill>
+                <a:latin typeface="Aptos" pitchFamily="34" charset="0"/>
+                <a:ea typeface="Aptos" pitchFamily="34" charset="-122"/>
+                <a:cs typeface="Aptos" pitchFamily="34" charset="-120"/>
+              </a:rPr>
+              <a:t>Submit</a:t>
+            </a:r>
+            <a:endParaRPr lang="en-US" sz="880" dirty="0"/>
+          </a:p>
+        </p:txBody>
+      </p:sp>
+      <p:sp>
+        <p:nvSpPr>
+          <p:cNvPr id="18" name="Shape 16"/>
+          <p:cNvSpPr/>
+          <p:nvPr/>
+        </p:nvSpPr>
+        <p:spPr>
+          <a:xfrm>
+            <a:off x="9817608" y="3351276"/>
+            <a:ext cx="164592" cy="0"/>
+          </a:xfrm>
+          <a:prstGeom prst="line">
+            <a:avLst/>
+          </a:prstGeom>
+          <a:noFill/>
+          <a:ln w="15240">
+            <a:solidFill>
+              <a:srgbClr val="8ABBD8"/>
+            </a:solidFill>
+            <a:prstDash val="solid"/>
+          </a:ln>
+        </p:spPr>
+      </p:sp>
+      <p:sp>
+        <p:nvSpPr>
+          <p:cNvPr id="19" name="Shape 17"/>
+          <p:cNvSpPr/>
+          <p:nvPr/>
+        </p:nvSpPr>
+        <p:spPr>
+          <a:xfrm>
+            <a:off x="8927592" y="3200400"/>
+            <a:ext cx="890016" cy="301752"/>
           </a:xfrm>
           <a:prstGeom prst="roundRect">
             <a:avLst>
-              <a:gd name="adj" fmla="val 9600"/>
+              <a:gd name="adj" fmla="val 24242"/>
+            </a:avLst>
+          </a:prstGeom>
+          <a:solidFill>
+            <a:srgbClr val="2F8A28"/>
+          </a:solidFill>
+          <a:ln w="12700">
+            <a:solidFill>
+              <a:srgbClr val="2F8A28"/>
+            </a:solidFill>
+            <a:prstDash val="solid"/>
+          </a:ln>
+        </p:spPr>
+      </p:sp>
+      <p:sp>
+        <p:nvSpPr>
+          <p:cNvPr id="20" name="Text 18"/>
+          <p:cNvSpPr/>
+          <p:nvPr/>
+        </p:nvSpPr>
+        <p:spPr>
+          <a:xfrm>
+            <a:off x="8964168" y="3273552"/>
+            <a:ext cx="816864" cy="146304"/>
+          </a:xfrm>
+          <a:prstGeom prst="rect">
+            <a:avLst/>
+          </a:prstGeom>
+          <a:noFill/>
+          <a:ln/>
+        </p:spPr>
+        <p:txBody>
+          <a:bodyPr wrap="square" lIns="0" tIns="0" rIns="0" bIns="0" rtlCol="0" anchor="ctr">
+            <a:normAutofit/>
+          </a:bodyPr>
+          <a:lstStyle/>
+          <a:p>
+            <a:pPr algn="ctr" indent="0" marL="0">
+              <a:buNone/>
+            </a:pPr>
+            <a:r>
+              <a:rPr lang="en-US" sz="880" b="1" dirty="0">
+                <a:solidFill>
+                  <a:srgbClr val="FFFFFF"/>
+                </a:solidFill>
+                <a:latin typeface="Aptos" pitchFamily="34" charset="0"/>
+                <a:ea typeface="Aptos" pitchFamily="34" charset="-122"/>
+                <a:cs typeface="Aptos" pitchFamily="34" charset="-120"/>
+              </a:rPr>
+              <a:t>Review</a:t>
+            </a:r>
+            <a:endParaRPr lang="en-US" sz="880" dirty="0"/>
+          </a:p>
+        </p:txBody>
+      </p:sp>
+      <p:sp>
+        <p:nvSpPr>
+          <p:cNvPr id="21" name="Shape 19"/>
+          <p:cNvSpPr/>
+          <p:nvPr/>
+        </p:nvSpPr>
+        <p:spPr>
+          <a:xfrm>
+            <a:off x="9982200" y="3200400"/>
+            <a:ext cx="890016" cy="301752"/>
+          </a:xfrm>
+          <a:prstGeom prst="roundRect">
+            <a:avLst>
+              <a:gd name="adj" fmla="val 24242"/>
+            </a:avLst>
+          </a:prstGeom>
+          <a:solidFill>
+            <a:srgbClr val="6A4CA3"/>
+          </a:solidFill>
+          <a:ln w="12700">
+            <a:solidFill>
+              <a:srgbClr val="6A4CA3"/>
+            </a:solidFill>
+            <a:prstDash val="solid"/>
+          </a:ln>
+        </p:spPr>
+      </p:sp>
+      <p:sp>
+        <p:nvSpPr>
+          <p:cNvPr id="22" name="Text 20"/>
+          <p:cNvSpPr/>
+          <p:nvPr/>
+        </p:nvSpPr>
+        <p:spPr>
+          <a:xfrm>
+            <a:off x="10018776" y="3273552"/>
+            <a:ext cx="816864" cy="146304"/>
+          </a:xfrm>
+          <a:prstGeom prst="rect">
+            <a:avLst/>
+          </a:prstGeom>
+          <a:noFill/>
+          <a:ln/>
+        </p:spPr>
+        <p:txBody>
+          <a:bodyPr wrap="square" lIns="0" tIns="0" rIns="0" bIns="0" rtlCol="0" anchor="ctr">
+            <a:normAutofit/>
+          </a:bodyPr>
+          <a:lstStyle/>
+          <a:p>
+            <a:pPr algn="ctr" indent="0" marL="0">
+              <a:buNone/>
+            </a:pPr>
+            <a:r>
+              <a:rPr lang="en-US" sz="880" b="1" dirty="0">
+                <a:solidFill>
+                  <a:srgbClr val="FFFFFF"/>
+                </a:solidFill>
+                <a:latin typeface="Aptos" pitchFamily="34" charset="0"/>
+                <a:ea typeface="Aptos" pitchFamily="34" charset="-122"/>
+                <a:cs typeface="Aptos" pitchFamily="34" charset="-120"/>
+              </a:rPr>
+              <a:t>Oversee</a:t>
+            </a:r>
+            <a:endParaRPr lang="en-US" sz="880" dirty="0"/>
+          </a:p>
+        </p:txBody>
+      </p:sp>
+      <p:sp>
+        <p:nvSpPr>
+          <p:cNvPr id="23" name="Text 21"/>
+          <p:cNvSpPr/>
+          <p:nvPr/>
+        </p:nvSpPr>
+        <p:spPr>
+          <a:xfrm>
+            <a:off x="7854696" y="3694176"/>
+            <a:ext cx="3035808" cy="206654"/>
+          </a:xfrm>
+          <a:prstGeom prst="rect">
+            <a:avLst/>
+          </a:prstGeom>
+          <a:noFill/>
+          <a:ln/>
+        </p:spPr>
+        <p:txBody>
+          <a:bodyPr wrap="square" lIns="254" tIns="254" rIns="254" bIns="254" rtlCol="0" anchor="t">
+            <a:normAutofit/>
+          </a:bodyPr>
+          <a:lstStyle/>
+          <a:p>
+            <a:pPr indent="0" marL="0">
+              <a:buNone/>
+            </a:pPr>
+            <a:r>
+              <a:rPr lang="en-US" sz="1120" dirty="0">
+                <a:solidFill>
+                  <a:srgbClr val="17364A"/>
+                </a:solidFill>
+                <a:latin typeface="Aptos" pitchFamily="34" charset="0"/>
+                <a:ea typeface="Aptos" pitchFamily="34" charset="-122"/>
+                <a:cs typeface="Aptos" pitchFamily="34" charset="-120"/>
+              </a:rPr>
+              <a:t>A proposed AI use should move through documented review before it becomes an operational workflow.</a:t>
+            </a:r>
+            <a:endParaRPr lang="en-US" sz="1120" dirty="0"/>
+          </a:p>
+        </p:txBody>
+      </p:sp>
+      <p:sp>
+        <p:nvSpPr>
+          <p:cNvPr id="24" name="Shape 22"/>
+          <p:cNvSpPr/>
+          <p:nvPr/>
+        </p:nvSpPr>
+        <p:spPr>
+          <a:xfrm>
+            <a:off x="7635240" y="4184294"/>
+            <a:ext cx="3474720" cy="1466698"/>
+          </a:xfrm>
+          <a:prstGeom prst="roundRect">
+            <a:avLst>
+              <a:gd name="adj" fmla="val 7481"/>
             </a:avLst>
           </a:prstGeom>
           <a:solidFill>
@@ -15716,13 +16364,13 @@
       </p:sp>
       <p:sp>
         <p:nvSpPr>
-          <p:cNvPr id="17" name="Text 15"/>
-          <p:cNvSpPr/>
-          <p:nvPr/>
-        </p:nvSpPr>
-        <p:spPr>
-          <a:xfrm>
-            <a:off x="7799832" y="4645152"/>
+          <p:cNvPr id="25" name="Text 23"/>
+          <p:cNvSpPr/>
+          <p:nvPr/>
+        </p:nvSpPr>
+        <p:spPr>
+          <a:xfrm>
+            <a:off x="7799832" y="4330598"/>
             <a:ext cx="3145536" cy="256032"/>
           </a:xfrm>
           <a:prstGeom prst="rect">
@@ -15755,14 +16403,14 @@
       </p:sp>
       <p:sp>
         <p:nvSpPr>
-          <p:cNvPr id="18" name="Text 16"/>
-          <p:cNvSpPr/>
-          <p:nvPr/>
-        </p:nvSpPr>
-        <p:spPr>
-          <a:xfrm>
-            <a:off x="7799832" y="4974336"/>
-            <a:ext cx="3145536" cy="576072"/>
+          <p:cNvPr id="26" name="Text 24"/>
+          <p:cNvSpPr/>
+          <p:nvPr/>
+        </p:nvSpPr>
+        <p:spPr>
+          <a:xfrm>
+            <a:off x="7799832" y="4659782"/>
+            <a:ext cx="3145536" cy="899770"/>
           </a:xfrm>
           <a:prstGeom prst="rect">
             <a:avLst/>
@@ -15788,7 +16436,7 @@
                 <a:ea typeface="Aptos" pitchFamily="34" charset="-122"/>
                 <a:cs typeface="Aptos" pitchFamily="34" charset="-120"/>
               </a:rPr>
-              <a:t>Translate this concept into clear decision rights, review steps, documentation expectations, and escalation paths before.</a:t>
+              <a:t>Translate this concept into clear decision rights, review steps, documentation expectations, and escalation paths before an AI-supported workflow is approved.</a:t>
             </a:r>
             <a:endParaRPr lang="en-US" sz="1320" dirty="0"/>
           </a:p>

--- a/downloads/presentations/modules/exe-440.pptx
+++ b/downloads/presentations/modules/exe-440.pptx
@@ -3152,8 +3152,8 @@
         </p:nvSpPr>
         <p:spPr>
           <a:xfrm>
-            <a:off x="868680" y="1508760"/>
-            <a:ext cx="6309360" cy="4160520"/>
+            <a:off x="822960" y="1463040"/>
+            <a:ext cx="6565392" cy="4343400"/>
           </a:xfrm>
           <a:prstGeom prst="rect">
             <a:avLst/>
@@ -3171,7 +3171,7 @@
               <a:buNone/>
             </a:pPr>
             <a:r>
-              <a:rPr lang="en-US" sz="2100" dirty="0">
+              <a:rPr lang="en-US" sz="1920" dirty="0">
                 <a:solidFill>
                   <a:srgbClr val="003A63"/>
                 </a:solidFill>
@@ -3181,14 +3181,14 @@
               </a:rPr>
               <a:t>• One risk is assuming that AI reduces workforce needs.</a:t>
             </a:r>
-            <a:endParaRPr lang="en-US" sz="2100" dirty="0"/>
-          </a:p>
-          <a:p>
-            <a:pPr indent="0" marL="0">
-              <a:buNone/>
-            </a:pPr>
-            <a:r>
-              <a:rPr lang="en-US" sz="2100" dirty="0">
+            <a:endParaRPr lang="en-US" sz="1920" dirty="0"/>
+          </a:p>
+          <a:p>
+            <a:pPr indent="0" marL="0">
+              <a:buNone/>
+            </a:pPr>
+            <a:r>
+              <a:rPr lang="en-US" sz="1920" dirty="0">
                 <a:solidFill>
                   <a:srgbClr val="003A63"/>
                 </a:solidFill>
@@ -3196,16 +3196,16 @@
                 <a:ea typeface="Aptos" pitchFamily="34" charset="-122"/>
                 <a:cs typeface="Aptos" pitchFamily="34" charset="-120"/>
               </a:rPr>
-              <a:t>• In practice, responsible AI often requires new review, training, documentation, and monitoring.</a:t>
-            </a:r>
-            <a:endParaRPr lang="en-US" sz="2100" dirty="0"/>
-          </a:p>
-          <a:p>
-            <a:pPr indent="0" marL="0">
-              <a:buNone/>
-            </a:pPr>
-            <a:r>
-              <a:rPr lang="en-US" sz="2100" dirty="0">
+              <a:t>• In practice, responsible AI often requires new review, training,.</a:t>
+            </a:r>
+            <a:endParaRPr lang="en-US" sz="1920" dirty="0"/>
+          </a:p>
+          <a:p>
+            <a:pPr indent="0" marL="0">
+              <a:buNone/>
+            </a:pPr>
+            <a:r>
+              <a:rPr lang="en-US" sz="1920" dirty="0">
                 <a:solidFill>
                   <a:srgbClr val="003A63"/>
                 </a:solidFill>
@@ -3213,9 +3213,9 @@
                 <a:ea typeface="Aptos" pitchFamily="34" charset="-122"/>
                 <a:cs typeface="Aptos" pitchFamily="34" charset="-120"/>
               </a:rPr>
-              <a:t>• A guardrail is to include workforce impact in every business case and implementation plan.</a:t>
-            </a:r>
-            <a:endParaRPr lang="en-US" sz="2100" dirty="0"/>
+              <a:t>• A guardrail is to include workforce impact in every business case and.</a:t>
+            </a:r>
+            <a:endParaRPr lang="en-US" sz="1920" dirty="0"/>
           </a:p>
         </p:txBody>
       </p:sp>
@@ -3227,12 +3227,12 @@
         </p:nvSpPr>
         <p:spPr>
           <a:xfrm>
-            <a:off x="7635240" y="1325880"/>
-            <a:ext cx="3474720" cy="1207008"/>
+            <a:off x="7543800" y="1325880"/>
+            <a:ext cx="3611880" cy="1261872"/>
           </a:xfrm>
           <a:prstGeom prst="roundRect">
             <a:avLst>
-              <a:gd name="adj" fmla="val 9091"/>
+              <a:gd name="adj" fmla="val 8696"/>
             </a:avLst>
           </a:prstGeom>
           <a:solidFill>
@@ -3254,8 +3254,8 @@
         </p:nvSpPr>
         <p:spPr>
           <a:xfrm>
-            <a:off x="7799832" y="1472184"/>
-            <a:ext cx="3145536" cy="256032"/>
+            <a:off x="7708392" y="1453896"/>
+            <a:ext cx="3282696" cy="228600"/>
           </a:xfrm>
           <a:prstGeom prst="rect">
             <a:avLst/>
@@ -3271,7 +3271,7 @@
               <a:buNone/>
             </a:pPr>
             <a:r>
-              <a:rPr lang="en-US" sz="1300" b="1" dirty="0">
+              <a:rPr lang="en-US" sz="1220" b="1" dirty="0">
                 <a:solidFill>
                   <a:srgbClr val="0068B7"/>
                 </a:solidFill>
@@ -3281,7 +3281,7 @@
               </a:rPr>
               <a:t>Risk check</a:t>
             </a:r>
-            <a:endParaRPr lang="en-US" sz="1300" dirty="0"/>
+            <a:endParaRPr lang="en-US" sz="1220" dirty="0"/>
           </a:p>
         </p:txBody>
       </p:sp>
@@ -3293,8 +3293,8 @@
         </p:nvSpPr>
         <p:spPr>
           <a:xfrm>
-            <a:off x="7799832" y="1801368"/>
-            <a:ext cx="3145536" cy="640080"/>
+            <a:off x="7708392" y="1764792"/>
+            <a:ext cx="3282696" cy="749808"/>
           </a:xfrm>
           <a:prstGeom prst="rect">
             <a:avLst/>
@@ -3312,7 +3312,7 @@
               <a:buNone/>
             </a:pPr>
             <a:r>
-              <a:rPr lang="en-US" sz="1320" dirty="0">
+              <a:rPr lang="en-US" sz="1220" dirty="0">
                 <a:solidFill>
                   <a:srgbClr val="17364A"/>
                 </a:solidFill>
@@ -3322,7 +3322,7 @@
               </a:rPr>
               <a:t>One risk is assuming that AI reduces workforce needs.</a:t>
             </a:r>
-            <a:endParaRPr lang="en-US" sz="1320" dirty="0"/>
+            <a:endParaRPr lang="en-US" sz="1220" dirty="0"/>
           </a:p>
         </p:txBody>
       </p:sp>
@@ -3334,12 +3334,12 @@
         </p:nvSpPr>
         <p:spPr>
           <a:xfrm>
-            <a:off x="7635240" y="2670048"/>
-            <a:ext cx="3474720" cy="1536192"/>
+            <a:off x="7543800" y="2724912"/>
+            <a:ext cx="3611880" cy="1527048"/>
           </a:xfrm>
           <a:prstGeom prst="roundRect">
             <a:avLst>
-              <a:gd name="adj" fmla="val 7143"/>
+              <a:gd name="adj" fmla="val 7186"/>
             </a:avLst>
           </a:prstGeom>
           <a:solidFill>
@@ -3361,24 +3361,26 @@
         </p:nvSpPr>
         <p:spPr>
           <a:xfrm>
-            <a:off x="7799832" y="2798064"/>
-            <a:ext cx="3145536" cy="237744"/>
-          </a:xfrm>
-          <a:prstGeom prst="rect">
-            <a:avLst/>
-          </a:prstGeom>
-          <a:noFill/>
-          <a:ln/>
-        </p:spPr>
-        <p:txBody>
-          <a:bodyPr wrap="square" lIns="0" tIns="0" rIns="0" bIns="0" rtlCol="0" anchor="ctr"/>
-          <a:lstStyle/>
-          <a:p>
-            <a:pPr indent="0" marL="0">
-              <a:buNone/>
-            </a:pPr>
-            <a:r>
-              <a:rPr lang="en-US" sz="1250" b="1" dirty="0">
+            <a:off x="7708392" y="2852928"/>
+            <a:ext cx="3282696" cy="219456"/>
+          </a:xfrm>
+          <a:prstGeom prst="rect">
+            <a:avLst/>
+          </a:prstGeom>
+          <a:noFill/>
+          <a:ln/>
+        </p:spPr>
+        <p:txBody>
+          <a:bodyPr wrap="square" lIns="0" tIns="0" rIns="0" bIns="0" rtlCol="0" anchor="ctr">
+            <a:normAutofit/>
+          </a:bodyPr>
+          <a:lstStyle/>
+          <a:p>
+            <a:pPr indent="0" marL="0">
+              <a:buNone/>
+            </a:pPr>
+            <a:r>
+              <a:rPr lang="en-US" sz="1160" b="1" dirty="0">
                 <a:solidFill>
                   <a:srgbClr val="0068B7"/>
                 </a:solidFill>
@@ -3388,7 +3390,7 @@
               </a:rPr>
               <a:t>Risk control loop</a:t>
             </a:r>
-            <a:endParaRPr lang="en-US" sz="1250" dirty="0"/>
+            <a:endParaRPr lang="en-US" sz="1160" dirty="0"/>
           </a:p>
         </p:txBody>
       </p:sp>
@@ -3400,7 +3402,7 @@
         </p:nvSpPr>
         <p:spPr>
           <a:xfrm>
-            <a:off x="8763000" y="3351276"/>
+            <a:off x="8717280" y="3406140"/>
             <a:ext cx="164592" cy="0"/>
           </a:xfrm>
           <a:prstGeom prst="line">
@@ -3423,8 +3425,8 @@
         </p:nvSpPr>
         <p:spPr>
           <a:xfrm>
-            <a:off x="7872984" y="3200400"/>
-            <a:ext cx="890016" cy="301752"/>
+            <a:off x="7781544" y="3255264"/>
+            <a:ext cx="935736" cy="301752"/>
           </a:xfrm>
           <a:prstGeom prst="roundRect">
             <a:avLst>
@@ -3450,8 +3452,8 @@
         </p:nvSpPr>
         <p:spPr>
           <a:xfrm>
-            <a:off x="7909560" y="3273552"/>
-            <a:ext cx="816864" cy="146304"/>
+            <a:off x="7818120" y="3328416"/>
+            <a:ext cx="862584" cy="146304"/>
           </a:xfrm>
           <a:prstGeom prst="rect">
             <a:avLst/>
@@ -3491,7 +3493,7 @@
         </p:nvSpPr>
         <p:spPr>
           <a:xfrm>
-            <a:off x="9817608" y="3351276"/>
+            <a:off x="9817608" y="3406140"/>
             <a:ext cx="164592" cy="0"/>
           </a:xfrm>
           <a:prstGeom prst="line">
@@ -3514,8 +3516,8 @@
         </p:nvSpPr>
         <p:spPr>
           <a:xfrm>
-            <a:off x="8927592" y="3200400"/>
-            <a:ext cx="890016" cy="301752"/>
+            <a:off x="8881872" y="3255264"/>
+            <a:ext cx="935736" cy="301752"/>
           </a:xfrm>
           <a:prstGeom prst="roundRect">
             <a:avLst>
@@ -3541,8 +3543,8 @@
         </p:nvSpPr>
         <p:spPr>
           <a:xfrm>
-            <a:off x="8964168" y="3273552"/>
-            <a:ext cx="816864" cy="146304"/>
+            <a:off x="8918448" y="3328416"/>
+            <a:ext cx="862584" cy="146304"/>
           </a:xfrm>
           <a:prstGeom prst="rect">
             <a:avLst/>
@@ -3582,8 +3584,8 @@
         </p:nvSpPr>
         <p:spPr>
           <a:xfrm>
-            <a:off x="9982200" y="3200400"/>
-            <a:ext cx="890016" cy="301752"/>
+            <a:off x="9982200" y="3255264"/>
+            <a:ext cx="935736" cy="301752"/>
           </a:xfrm>
           <a:prstGeom prst="roundRect">
             <a:avLst>
@@ -3609,8 +3611,8 @@
         </p:nvSpPr>
         <p:spPr>
           <a:xfrm>
-            <a:off x="10018776" y="3273552"/>
-            <a:ext cx="816864" cy="146304"/>
+            <a:off x="10018776" y="3328416"/>
+            <a:ext cx="862584" cy="146304"/>
           </a:xfrm>
           <a:prstGeom prst="rect">
             <a:avLst/>
@@ -3650,8 +3652,8 @@
         </p:nvSpPr>
         <p:spPr>
           <a:xfrm>
-            <a:off x="7854696" y="3694176"/>
-            <a:ext cx="3035808" cy="365760"/>
+            <a:off x="7763256" y="3749040"/>
+            <a:ext cx="3172968" cy="356616"/>
           </a:xfrm>
           <a:prstGeom prst="rect">
             <a:avLst/>
@@ -3669,7 +3671,7 @@
               <a:buNone/>
             </a:pPr>
             <a:r>
-              <a:rPr lang="en-US" sz="1120" dirty="0">
+              <a:rPr lang="en-US" sz="1040" dirty="0">
                 <a:solidFill>
                   <a:srgbClr val="17364A"/>
                 </a:solidFill>
@@ -3677,9 +3679,9 @@
                 <a:ea typeface="Aptos" pitchFamily="34" charset="-122"/>
                 <a:cs typeface="Aptos" pitchFamily="34" charset="-120"/>
               </a:rPr>
-              <a:t>Responsible use depends on finding risks early, applying safeguards, and watching for drift or harm over time.</a:t>
-            </a:r>
-            <a:endParaRPr lang="en-US" sz="1120" dirty="0"/>
+              <a:t>Responsible use depends on finding risks early, applying safeguards,.</a:t>
+            </a:r>
+            <a:endParaRPr lang="en-US" sz="1040" dirty="0"/>
           </a:p>
         </p:txBody>
       </p:sp>
@@ -3691,12 +3693,12 @@
         </p:nvSpPr>
         <p:spPr>
           <a:xfrm>
-            <a:off x="7635240" y="4343400"/>
-            <a:ext cx="3474720" cy="1255471"/>
+            <a:off x="7543800" y="4389120"/>
+            <a:ext cx="3611880" cy="1261872"/>
           </a:xfrm>
           <a:prstGeom prst="roundRect">
             <a:avLst>
-              <a:gd name="adj" fmla="val 8740"/>
+              <a:gd name="adj" fmla="val 8696"/>
             </a:avLst>
           </a:prstGeom>
           <a:solidFill>
@@ -3718,8 +3720,8 @@
         </p:nvSpPr>
         <p:spPr>
           <a:xfrm>
-            <a:off x="7799832" y="4489704"/>
-            <a:ext cx="3145536" cy="256032"/>
+            <a:off x="7708392" y="4517136"/>
+            <a:ext cx="3282696" cy="228600"/>
           </a:xfrm>
           <a:prstGeom prst="rect">
             <a:avLst/>
@@ -3735,7 +3737,7 @@
               <a:buNone/>
             </a:pPr>
             <a:r>
-              <a:rPr lang="en-US" sz="1300" b="1" dirty="0">
+              <a:rPr lang="en-US" sz="1220" b="1" dirty="0">
                 <a:solidFill>
                   <a:srgbClr val="0068B7"/>
                 </a:solidFill>
@@ -3745,7 +3747,7 @@
               </a:rPr>
               <a:t>Safeguard to plan</a:t>
             </a:r>
-            <a:endParaRPr lang="en-US" sz="1300" dirty="0"/>
+            <a:endParaRPr lang="en-US" sz="1220" dirty="0"/>
           </a:p>
         </p:txBody>
       </p:sp>
@@ -3757,8 +3759,8 @@
         </p:nvSpPr>
         <p:spPr>
           <a:xfrm>
-            <a:off x="7799832" y="4818888"/>
-            <a:ext cx="3145536" cy="688543"/>
+            <a:off x="7708392" y="4828032"/>
+            <a:ext cx="3282696" cy="749808"/>
           </a:xfrm>
           <a:prstGeom prst="rect">
             <a:avLst/>
@@ -3776,7 +3778,7 @@
               <a:buNone/>
             </a:pPr>
             <a:r>
-              <a:rPr lang="en-US" sz="1320" dirty="0">
+              <a:rPr lang="en-US" sz="1220" dirty="0">
                 <a:solidFill>
                   <a:srgbClr val="17364A"/>
                 </a:solidFill>
@@ -3784,9 +3786,9 @@
                 <a:ea typeface="Aptos" pitchFamily="34" charset="-122"/>
                 <a:cs typeface="Aptos" pitchFamily="34" charset="-120"/>
               </a:rPr>
-              <a:t>Identify what could go wrong, who could be affected, what safeguards are needed, and what evidence should be reviewed before use.</a:t>
-            </a:r>
-            <a:endParaRPr lang="en-US" sz="1320" dirty="0"/>
+              <a:t>Identify what could go wrong, who could be affected, what safeguards are needed,.</a:t>
+            </a:r>
+            <a:endParaRPr lang="en-US" sz="1220" dirty="0"/>
           </a:p>
         </p:txBody>
       </p:sp>
@@ -4077,8 +4079,8 @@
         </p:nvSpPr>
         <p:spPr>
           <a:xfrm>
-            <a:off x="868680" y="1508760"/>
-            <a:ext cx="6309360" cy="4160520"/>
+            <a:off x="822960" y="1463040"/>
+            <a:ext cx="6565392" cy="4343400"/>
           </a:xfrm>
           <a:prstGeom prst="rect">
             <a:avLst/>
@@ -4096,7 +4098,7 @@
               <a:buNone/>
             </a:pPr>
             <a:r>
-              <a:rPr lang="en-US" sz="2100" dirty="0">
+              <a:rPr lang="en-US" sz="1920" dirty="0">
                 <a:solidFill>
                   <a:srgbClr val="003A63"/>
                 </a:solidFill>
@@ -4104,16 +4106,16 @@
                 <a:ea typeface="Aptos" pitchFamily="34" charset="-122"/>
                 <a:cs typeface="Aptos" pitchFamily="34" charset="-120"/>
               </a:rPr>
-              <a:t>• Generative AI requires staff who can review outputs and manage source accuracy.</a:t>
-            </a:r>
-            <a:endParaRPr lang="en-US" sz="2100" dirty="0"/>
-          </a:p>
-          <a:p>
-            <a:pPr indent="0" marL="0">
-              <a:buNone/>
-            </a:pPr>
-            <a:r>
-              <a:rPr lang="en-US" sz="2100" dirty="0">
+              <a:t>• Generative AI requires staff who can review outputs and manage source.</a:t>
+            </a:r>
+            <a:endParaRPr lang="en-US" sz="1920" dirty="0"/>
+          </a:p>
+          <a:p>
+            <a:pPr indent="0" marL="0">
+              <a:buNone/>
+            </a:pPr>
+            <a:r>
+              <a:rPr lang="en-US" sz="1920" dirty="0">
                 <a:solidFill>
                   <a:srgbClr val="003A63"/>
                 </a:solidFill>
@@ -4121,16 +4123,16 @@
                 <a:ea typeface="Aptos" pitchFamily="34" charset="-122"/>
                 <a:cs typeface="Aptos" pitchFamily="34" charset="-120"/>
               </a:rPr>
-              <a:t>• Predictive analytics requires staff who can interpret performance and understand limitations.</a:t>
-            </a:r>
-            <a:endParaRPr lang="en-US" sz="2100" dirty="0"/>
-          </a:p>
-          <a:p>
-            <a:pPr indent="0" marL="0">
-              <a:buNone/>
-            </a:pPr>
-            <a:r>
-              <a:rPr lang="en-US" sz="2100" dirty="0">
+              <a:t>• Predictive analytics requires staff who can interpret performance and.</a:t>
+            </a:r>
+            <a:endParaRPr lang="en-US" sz="1920" dirty="0"/>
+          </a:p>
+          <a:p>
+            <a:pPr indent="0" marL="0">
+              <a:buNone/>
+            </a:pPr>
+            <a:r>
+              <a:rPr lang="en-US" sz="1920" dirty="0">
                 <a:solidFill>
                   <a:srgbClr val="003A63"/>
                 </a:solidFill>
@@ -4138,9 +4140,9 @@
                 <a:ea typeface="Aptos" pitchFamily="34" charset="-122"/>
                 <a:cs typeface="Aptos" pitchFamily="34" charset="-120"/>
               </a:rPr>
-              <a:t>• Agentic workflows require staff who can oversee permissions, actions, escalation, and rollback.</a:t>
-            </a:r>
-            <a:endParaRPr lang="en-US" sz="2100" dirty="0"/>
+              <a:t>• Agentic workflows require staff who can oversee permissions, actions,.</a:t>
+            </a:r>
+            <a:endParaRPr lang="en-US" sz="1920" dirty="0"/>
           </a:p>
         </p:txBody>
       </p:sp>
@@ -4152,12 +4154,12 @@
         </p:nvSpPr>
         <p:spPr>
           <a:xfrm>
-            <a:off x="7635240" y="1325880"/>
-            <a:ext cx="3474720" cy="1207008"/>
+            <a:off x="7543800" y="1325880"/>
+            <a:ext cx="3611880" cy="1261872"/>
           </a:xfrm>
           <a:prstGeom prst="roundRect">
             <a:avLst>
-              <a:gd name="adj" fmla="val 9091"/>
+              <a:gd name="adj" fmla="val 8696"/>
             </a:avLst>
           </a:prstGeom>
           <a:solidFill>
@@ -4179,8 +4181,8 @@
         </p:nvSpPr>
         <p:spPr>
           <a:xfrm>
-            <a:off x="7799832" y="1472184"/>
-            <a:ext cx="3145536" cy="256032"/>
+            <a:off x="7708392" y="1453896"/>
+            <a:ext cx="3282696" cy="228600"/>
           </a:xfrm>
           <a:prstGeom prst="rect">
             <a:avLst/>
@@ -4196,7 +4198,7 @@
               <a:buNone/>
             </a:pPr>
             <a:r>
-              <a:rPr lang="en-US" sz="1300" b="1" dirty="0">
+              <a:rPr lang="en-US" sz="1220" b="1" dirty="0">
                 <a:solidFill>
                   <a:srgbClr val="0068B7"/>
                 </a:solidFill>
@@ -4206,7 +4208,7 @@
               </a:rPr>
               <a:t>Implementation cue</a:t>
             </a:r>
-            <a:endParaRPr lang="en-US" sz="1300" dirty="0"/>
+            <a:endParaRPr lang="en-US" sz="1220" dirty="0"/>
           </a:p>
         </p:txBody>
       </p:sp>
@@ -4218,8 +4220,8 @@
         </p:nvSpPr>
         <p:spPr>
           <a:xfrm>
-            <a:off x="7799832" y="1801368"/>
-            <a:ext cx="3145536" cy="640080"/>
+            <a:off x="7708392" y="1764792"/>
+            <a:ext cx="3282696" cy="749808"/>
           </a:xfrm>
           <a:prstGeom prst="rect">
             <a:avLst/>
@@ -4237,7 +4239,7 @@
               <a:buNone/>
             </a:pPr>
             <a:r>
-              <a:rPr lang="en-US" sz="1320" dirty="0">
+              <a:rPr lang="en-US" sz="1220" dirty="0">
                 <a:solidFill>
                   <a:srgbClr val="17364A"/>
                 </a:solidFill>
@@ -4247,7 +4249,7 @@
               </a:rPr>
               <a:t>Generative AI requires staff who can review outputs and manage source accuracy.</a:t>
             </a:r>
-            <a:endParaRPr lang="en-US" sz="1320" dirty="0"/>
+            <a:endParaRPr lang="en-US" sz="1220" dirty="0"/>
           </a:p>
         </p:txBody>
       </p:sp>
@@ -4259,12 +4261,12 @@
         </p:nvSpPr>
         <p:spPr>
           <a:xfrm>
-            <a:off x="7635240" y="2670048"/>
-            <a:ext cx="3474720" cy="1377086"/>
+            <a:off x="7543800" y="2724912"/>
+            <a:ext cx="3611880" cy="1527048"/>
           </a:xfrm>
           <a:prstGeom prst="roundRect">
             <a:avLst>
-              <a:gd name="adj" fmla="val 7968"/>
+              <a:gd name="adj" fmla="val 7186"/>
             </a:avLst>
           </a:prstGeom>
           <a:solidFill>
@@ -4286,24 +4288,26 @@
         </p:nvSpPr>
         <p:spPr>
           <a:xfrm>
-            <a:off x="7799832" y="2798064"/>
-            <a:ext cx="3145536" cy="237744"/>
-          </a:xfrm>
-          <a:prstGeom prst="rect">
-            <a:avLst/>
-          </a:prstGeom>
-          <a:noFill/>
-          <a:ln/>
-        </p:spPr>
-        <p:txBody>
-          <a:bodyPr wrap="square" lIns="0" tIns="0" rIns="0" bIns="0" rtlCol="0" anchor="ctr"/>
-          <a:lstStyle/>
-          <a:p>
-            <a:pPr indent="0" marL="0">
-              <a:buNone/>
-            </a:pPr>
-            <a:r>
-              <a:rPr lang="en-US" sz="1250" b="1" dirty="0">
+            <a:off x="7708392" y="2852928"/>
+            <a:ext cx="3282696" cy="219456"/>
+          </a:xfrm>
+          <a:prstGeom prst="rect">
+            <a:avLst/>
+          </a:prstGeom>
+          <a:noFill/>
+          <a:ln/>
+        </p:spPr>
+        <p:txBody>
+          <a:bodyPr wrap="square" lIns="0" tIns="0" rIns="0" bIns="0" rtlCol="0" anchor="ctr">
+            <a:normAutofit/>
+          </a:bodyPr>
+          <a:lstStyle/>
+          <a:p>
+            <a:pPr indent="0" marL="0">
+              <a:buNone/>
+            </a:pPr>
+            <a:r>
+              <a:rPr lang="en-US" sz="1160" b="1" dirty="0">
                 <a:solidFill>
                   <a:srgbClr val="0068B7"/>
                 </a:solidFill>
@@ -4313,7 +4317,7 @@
               </a:rPr>
               <a:t>Implementation path</a:t>
             </a:r>
-            <a:endParaRPr lang="en-US" sz="1250" dirty="0"/>
+            <a:endParaRPr lang="en-US" sz="1160" dirty="0"/>
           </a:p>
         </p:txBody>
       </p:sp>
@@ -4325,7 +4329,7 @@
         </p:nvSpPr>
         <p:spPr>
           <a:xfrm>
-            <a:off x="8763000" y="3351276"/>
+            <a:off x="8717280" y="3406140"/>
             <a:ext cx="164592" cy="0"/>
           </a:xfrm>
           <a:prstGeom prst="line">
@@ -4348,8 +4352,8 @@
         </p:nvSpPr>
         <p:spPr>
           <a:xfrm>
-            <a:off x="7872984" y="3200400"/>
-            <a:ext cx="890016" cy="301752"/>
+            <a:off x="7781544" y="3255264"/>
+            <a:ext cx="935736" cy="301752"/>
           </a:xfrm>
           <a:prstGeom prst="roundRect">
             <a:avLst>
@@ -4375,8 +4379,8 @@
         </p:nvSpPr>
         <p:spPr>
           <a:xfrm>
-            <a:off x="7909560" y="3273552"/>
-            <a:ext cx="816864" cy="146304"/>
+            <a:off x="7818120" y="3328416"/>
+            <a:ext cx="862584" cy="146304"/>
           </a:xfrm>
           <a:prstGeom prst="rect">
             <a:avLst/>
@@ -4416,7 +4420,7 @@
         </p:nvSpPr>
         <p:spPr>
           <a:xfrm>
-            <a:off x="9817608" y="3351276"/>
+            <a:off x="9817608" y="3406140"/>
             <a:ext cx="164592" cy="0"/>
           </a:xfrm>
           <a:prstGeom prst="line">
@@ -4439,8 +4443,8 @@
         </p:nvSpPr>
         <p:spPr>
           <a:xfrm>
-            <a:off x="8927592" y="3200400"/>
-            <a:ext cx="890016" cy="301752"/>
+            <a:off x="8881872" y="3255264"/>
+            <a:ext cx="935736" cy="301752"/>
           </a:xfrm>
           <a:prstGeom prst="roundRect">
             <a:avLst>
@@ -4466,8 +4470,8 @@
         </p:nvSpPr>
         <p:spPr>
           <a:xfrm>
-            <a:off x="8964168" y="3273552"/>
-            <a:ext cx="816864" cy="146304"/>
+            <a:off x="8918448" y="3328416"/>
+            <a:ext cx="862584" cy="146304"/>
           </a:xfrm>
           <a:prstGeom prst="rect">
             <a:avLst/>
@@ -4507,8 +4511,8 @@
         </p:nvSpPr>
         <p:spPr>
           <a:xfrm>
-            <a:off x="9982200" y="3200400"/>
-            <a:ext cx="890016" cy="301752"/>
+            <a:off x="9982200" y="3255264"/>
+            <a:ext cx="935736" cy="301752"/>
           </a:xfrm>
           <a:prstGeom prst="roundRect">
             <a:avLst>
@@ -4534,8 +4538,8 @@
         </p:nvSpPr>
         <p:spPr>
           <a:xfrm>
-            <a:off x="10018776" y="3273552"/>
-            <a:ext cx="816864" cy="146304"/>
+            <a:off x="10018776" y="3328416"/>
+            <a:ext cx="862584" cy="146304"/>
           </a:xfrm>
           <a:prstGeom prst="rect">
             <a:avLst/>
@@ -4575,8 +4579,8 @@
         </p:nvSpPr>
         <p:spPr>
           <a:xfrm>
-            <a:off x="7854696" y="3694176"/>
-            <a:ext cx="3035808" cy="206654"/>
+            <a:off x="7763256" y="3749040"/>
+            <a:ext cx="3172968" cy="356616"/>
           </a:xfrm>
           <a:prstGeom prst="rect">
             <a:avLst/>
@@ -4594,7 +4598,7 @@
               <a:buNone/>
             </a:pPr>
             <a:r>
-              <a:rPr lang="en-US" sz="1120" dirty="0">
+              <a:rPr lang="en-US" sz="1040" dirty="0">
                 <a:solidFill>
                   <a:srgbClr val="17364A"/>
                 </a:solidFill>
@@ -4602,9 +4606,9 @@
                 <a:ea typeface="Aptos" pitchFamily="34" charset="-122"/>
                 <a:cs typeface="Aptos" pitchFamily="34" charset="-120"/>
               </a:rPr>
-              <a:t>Implementation work should make dependencies, approvals, training, and sustainment visible before launch.</a:t>
-            </a:r>
-            <a:endParaRPr lang="en-US" sz="1120" dirty="0"/>
+              <a:t>Implementation work should make dependencies, approvals, training, and.</a:t>
+            </a:r>
+            <a:endParaRPr lang="en-US" sz="1040" dirty="0"/>
           </a:p>
         </p:txBody>
       </p:sp>
@@ -4616,12 +4620,12 @@
         </p:nvSpPr>
         <p:spPr>
           <a:xfrm>
-            <a:off x="7635240" y="4184294"/>
-            <a:ext cx="3474720" cy="1466698"/>
+            <a:off x="7543800" y="4389120"/>
+            <a:ext cx="3611880" cy="1261872"/>
           </a:xfrm>
           <a:prstGeom prst="roundRect">
             <a:avLst>
-              <a:gd name="adj" fmla="val 7481"/>
+              <a:gd name="adj" fmla="val 8696"/>
             </a:avLst>
           </a:prstGeom>
           <a:solidFill>
@@ -4643,8 +4647,8 @@
         </p:nvSpPr>
         <p:spPr>
           <a:xfrm>
-            <a:off x="7799832" y="4330598"/>
-            <a:ext cx="3145536" cy="256032"/>
+            <a:off x="7708392" y="4517136"/>
+            <a:ext cx="3282696" cy="228600"/>
           </a:xfrm>
           <a:prstGeom prst="rect">
             <a:avLst/>
@@ -4660,7 +4664,7 @@
               <a:buNone/>
             </a:pPr>
             <a:r>
-              <a:rPr lang="en-US" sz="1300" b="1" dirty="0">
+              <a:rPr lang="en-US" sz="1220" b="1" dirty="0">
                 <a:solidFill>
                   <a:srgbClr val="0068B7"/>
                 </a:solidFill>
@@ -4670,7 +4674,7 @@
               </a:rPr>
               <a:t>Next action</a:t>
             </a:r>
-            <a:endParaRPr lang="en-US" sz="1300" dirty="0"/>
+            <a:endParaRPr lang="en-US" sz="1220" dirty="0"/>
           </a:p>
         </p:txBody>
       </p:sp>
@@ -4682,8 +4686,8 @@
         </p:nvSpPr>
         <p:spPr>
           <a:xfrm>
-            <a:off x="7799832" y="4659782"/>
-            <a:ext cx="3145536" cy="899770"/>
+            <a:off x="7708392" y="4828032"/>
+            <a:ext cx="3282696" cy="749808"/>
           </a:xfrm>
           <a:prstGeom prst="rect">
             <a:avLst/>
@@ -4701,7 +4705,7 @@
               <a:buNone/>
             </a:pPr>
             <a:r>
-              <a:rPr lang="en-US" sz="1320" dirty="0">
+              <a:rPr lang="en-US" sz="1220" dirty="0">
                 <a:solidFill>
                   <a:srgbClr val="17364A"/>
                 </a:solidFill>
@@ -4709,9 +4713,9 @@
                 <a:ea typeface="Aptos" pitchFamily="34" charset="-122"/>
                 <a:cs typeface="Aptos" pitchFamily="34" charset="-120"/>
               </a:rPr>
-              <a:t>Use the concept to clarify workflow changes, dependencies, staffing, procurement requirements, training needs, and implementation checkpoints.</a:t>
-            </a:r>
-            <a:endParaRPr lang="en-US" sz="1320" dirty="0"/>
+              <a:t>Use the concept to clarify workflow changes, dependencies, staffing, procurement.</a:t>
+            </a:r>
+            <a:endParaRPr lang="en-US" sz="1220" dirty="0"/>
           </a:p>
         </p:txBody>
       </p:sp>
@@ -5002,8 +5006,8 @@
         </p:nvSpPr>
         <p:spPr>
           <a:xfrm>
-            <a:off x="868680" y="1508760"/>
-            <a:ext cx="6309360" cy="4160520"/>
+            <a:off x="822960" y="1463040"/>
+            <a:ext cx="6565392" cy="4343400"/>
           </a:xfrm>
           <a:prstGeom prst="rect">
             <a:avLst/>
@@ -5021,7 +5025,7 @@
               <a:buNone/>
             </a:pPr>
             <a:r>
-              <a:rPr lang="en-US" sz="2100" dirty="0">
+              <a:rPr lang="en-US" sz="1920" dirty="0">
                 <a:solidFill>
                   <a:srgbClr val="003A63"/>
                 </a:solidFill>
@@ -5029,16 +5033,16 @@
                 <a:ea typeface="Aptos" pitchFamily="34" charset="-122"/>
                 <a:cs typeface="Aptos" pitchFamily="34" charset="-120"/>
               </a:rPr>
-              <a:t>• Which current or proposed AI use case in your agency raises this leadership or governance.</a:t>
-            </a:r>
-            <a:endParaRPr lang="en-US" sz="2100" dirty="0"/>
-          </a:p>
-          <a:p>
-            <a:pPr indent="0" marL="0">
-              <a:buNone/>
-            </a:pPr>
-            <a:r>
-              <a:rPr lang="en-US" sz="2100" dirty="0">
+              <a:t>• Which current or proposed AI use case in your agency raises this leadership.</a:t>
+            </a:r>
+            <a:endParaRPr lang="en-US" sz="1920" dirty="0"/>
+          </a:p>
+          <a:p>
+            <a:pPr indent="0" marL="0">
+              <a:buNone/>
+            </a:pPr>
+            <a:r>
+              <a:rPr lang="en-US" sz="1920" dirty="0">
                 <a:solidFill>
                   <a:srgbClr val="003A63"/>
                 </a:solidFill>
@@ -5046,16 +5050,16 @@
                 <a:ea typeface="Aptos" pitchFamily="34" charset="-122"/>
                 <a:cs typeface="Aptos" pitchFamily="34" charset="-120"/>
               </a:rPr>
-              <a:t>• Who currently has authority to make decisions about this issue, and is that authority.</a:t>
-            </a:r>
-            <a:endParaRPr lang="en-US" sz="2100" dirty="0"/>
-          </a:p>
-          <a:p>
-            <a:pPr indent="0" marL="0">
-              <a:buNone/>
-            </a:pPr>
-            <a:r>
-              <a:rPr lang="en-US" sz="2100" dirty="0">
+              <a:t>• Who currently has authority to make decisions about this issue, and is that.</a:t>
+            </a:r>
+            <a:endParaRPr lang="en-US" sz="1920" dirty="0"/>
+          </a:p>
+          <a:p>
+            <a:pPr indent="0" marL="0">
+              <a:buNone/>
+            </a:pPr>
+            <a:r>
+              <a:rPr lang="en-US" sz="1920" dirty="0">
                 <a:solidFill>
                   <a:srgbClr val="003A63"/>
                 </a:solidFill>
@@ -5063,9 +5067,9 @@
                 <a:ea typeface="Aptos" pitchFamily="34" charset="-122"/>
                 <a:cs typeface="Aptos" pitchFamily="34" charset="-120"/>
               </a:rPr>
-              <a:t>• What evidence would governance or leadership need before approving the use case?</a:t>
-            </a:r>
-            <a:endParaRPr lang="en-US" sz="2100" dirty="0"/>
+              <a:t>• What evidence would governance or leadership need before approving the use.</a:t>
+            </a:r>
+            <a:endParaRPr lang="en-US" sz="1920" dirty="0"/>
           </a:p>
         </p:txBody>
       </p:sp>
@@ -5077,12 +5081,12 @@
         </p:nvSpPr>
         <p:spPr>
           <a:xfrm>
-            <a:off x="7635240" y="1325880"/>
-            <a:ext cx="3474720" cy="1255471"/>
+            <a:off x="7543800" y="1325880"/>
+            <a:ext cx="3611880" cy="1261872"/>
           </a:xfrm>
           <a:prstGeom prst="roundRect">
             <a:avLst>
-              <a:gd name="adj" fmla="val 8740"/>
+              <a:gd name="adj" fmla="val 8696"/>
             </a:avLst>
           </a:prstGeom>
           <a:solidFill>
@@ -5104,8 +5108,8 @@
         </p:nvSpPr>
         <p:spPr>
           <a:xfrm>
-            <a:off x="7799832" y="1472184"/>
-            <a:ext cx="3145536" cy="256032"/>
+            <a:off x="7708392" y="1453896"/>
+            <a:ext cx="3282696" cy="228600"/>
           </a:xfrm>
           <a:prstGeom prst="rect">
             <a:avLst/>
@@ -5121,7 +5125,7 @@
               <a:buNone/>
             </a:pPr>
             <a:r>
-              <a:rPr lang="en-US" sz="1300" b="1" dirty="0">
+              <a:rPr lang="en-US" sz="1220" b="1" dirty="0">
                 <a:solidFill>
                   <a:srgbClr val="0068B7"/>
                 </a:solidFill>
@@ -5131,7 +5135,7 @@
               </a:rPr>
               <a:t>Core concept</a:t>
             </a:r>
-            <a:endParaRPr lang="en-US" sz="1300" dirty="0"/>
+            <a:endParaRPr lang="en-US" sz="1220" dirty="0"/>
           </a:p>
         </p:txBody>
       </p:sp>
@@ -5143,8 +5147,8 @@
         </p:nvSpPr>
         <p:spPr>
           <a:xfrm>
-            <a:off x="7799832" y="1801368"/>
-            <a:ext cx="3145536" cy="688543"/>
+            <a:off x="7708392" y="1764792"/>
+            <a:ext cx="3282696" cy="749808"/>
           </a:xfrm>
           <a:prstGeom prst="rect">
             <a:avLst/>
@@ -5162,7 +5166,7 @@
               <a:buNone/>
             </a:pPr>
             <a:r>
-              <a:rPr lang="en-US" sz="1320" dirty="0">
+              <a:rPr lang="en-US" sz="1220" dirty="0">
                 <a:solidFill>
                   <a:srgbClr val="17364A"/>
                 </a:solidFill>
@@ -5170,9 +5174,9 @@
                 <a:ea typeface="Aptos" pitchFamily="34" charset="-122"/>
                 <a:cs typeface="Aptos" pitchFamily="34" charset="-120"/>
               </a:rPr>
-              <a:t>Which current or proposed AI use case in your agency raises this leadership or governance issue most.</a:t>
-            </a:r>
-            <a:endParaRPr lang="en-US" sz="1320" dirty="0"/>
+              <a:t>Which current or proposed AI use case in your agency raises this leadership or.</a:t>
+            </a:r>
+            <a:endParaRPr lang="en-US" sz="1220" dirty="0"/>
           </a:p>
         </p:txBody>
       </p:sp>
@@ -5184,12 +5188,12 @@
         </p:nvSpPr>
         <p:spPr>
           <a:xfrm>
-            <a:off x="7635240" y="2718511"/>
-            <a:ext cx="3474720" cy="1328623"/>
+            <a:off x="7543800" y="2724912"/>
+            <a:ext cx="3611880" cy="1527048"/>
           </a:xfrm>
           <a:prstGeom prst="roundRect">
             <a:avLst>
-              <a:gd name="adj" fmla="val 8259"/>
+              <a:gd name="adj" fmla="val 7186"/>
             </a:avLst>
           </a:prstGeom>
           <a:solidFill>
@@ -5211,8 +5215,8 @@
         </p:nvSpPr>
         <p:spPr>
           <a:xfrm>
-            <a:off x="7799832" y="2864815"/>
-            <a:ext cx="3145536" cy="256032"/>
+            <a:off x="7708392" y="2852928"/>
+            <a:ext cx="3282696" cy="228600"/>
           </a:xfrm>
           <a:prstGeom prst="rect">
             <a:avLst/>
@@ -5228,7 +5232,7 @@
               <a:buNone/>
             </a:pPr>
             <a:r>
-              <a:rPr lang="en-US" sz="1300" b="1" dirty="0">
+              <a:rPr lang="en-US" sz="1220" b="1" dirty="0">
                 <a:solidFill>
                   <a:srgbClr val="0068B7"/>
                 </a:solidFill>
@@ -5238,7 +5242,7 @@
               </a:rPr>
               <a:t>Concept checkpoints</a:t>
             </a:r>
-            <a:endParaRPr lang="en-US" sz="1300" dirty="0"/>
+            <a:endParaRPr lang="en-US" sz="1220" dirty="0"/>
           </a:p>
         </p:txBody>
       </p:sp>
@@ -5250,8 +5254,8 @@
         </p:nvSpPr>
         <p:spPr>
           <a:xfrm>
-            <a:off x="7818120" y="3230575"/>
-            <a:ext cx="3090672" cy="670255"/>
+            <a:off x="7726680" y="3182112"/>
+            <a:ext cx="3227832" cy="960120"/>
           </a:xfrm>
           <a:prstGeom prst="rect">
             <a:avLst/>
@@ -5269,7 +5273,7 @@
               <a:buNone/>
             </a:pPr>
             <a:r>
-              <a:rPr lang="en-US" sz="1220" dirty="0">
+              <a:rPr lang="en-US" sz="1140" dirty="0">
                 <a:solidFill>
                   <a:srgbClr val="17364A"/>
                 </a:solidFill>
@@ -5277,16 +5281,16 @@
                 <a:ea typeface="Aptos" pitchFamily="34" charset="-122"/>
                 <a:cs typeface="Aptos" pitchFamily="34" charset="-120"/>
               </a:rPr>
-              <a:t>Which current or proposed AI use case in your agency raises this.</a:t>
-            </a:r>
-            <a:endParaRPr lang="en-US" sz="1220" dirty="0"/>
-          </a:p>
-          <a:p>
-            <a:pPr indent="0" marL="0">
-              <a:buNone/>
-            </a:pPr>
-            <a:r>
-              <a:rPr lang="en-US" sz="1220" dirty="0">
+              <a:t>Which current or proposed AI use case in your.</a:t>
+            </a:r>
+            <a:endParaRPr lang="en-US" sz="1140" dirty="0"/>
+          </a:p>
+          <a:p>
+            <a:pPr indent="0" marL="0">
+              <a:buNone/>
+            </a:pPr>
+            <a:r>
+              <a:rPr lang="en-US" sz="1140" dirty="0">
                 <a:solidFill>
                   <a:srgbClr val="17364A"/>
                 </a:solidFill>
@@ -5294,16 +5298,16 @@
                 <a:ea typeface="Aptos" pitchFamily="34" charset="-122"/>
                 <a:cs typeface="Aptos" pitchFamily="34" charset="-120"/>
               </a:rPr>
-              <a:t>Who currently has authority to make decisions about this issue,.</a:t>
-            </a:r>
-            <a:endParaRPr lang="en-US" sz="1220" dirty="0"/>
-          </a:p>
-          <a:p>
-            <a:pPr indent="0" marL="0">
-              <a:buNone/>
-            </a:pPr>
-            <a:r>
-              <a:rPr lang="en-US" sz="1220" dirty="0">
+              <a:t>Who currently has authority to make decisions.</a:t>
+            </a:r>
+            <a:endParaRPr lang="en-US" sz="1140" dirty="0"/>
+          </a:p>
+          <a:p>
+            <a:pPr indent="0" marL="0">
+              <a:buNone/>
+            </a:pPr>
+            <a:r>
+              <a:rPr lang="en-US" sz="1140" dirty="0">
                 <a:solidFill>
                   <a:srgbClr val="17364A"/>
                 </a:solidFill>
@@ -5311,9 +5315,9 @@
                 <a:ea typeface="Aptos" pitchFamily="34" charset="-122"/>
                 <a:cs typeface="Aptos" pitchFamily="34" charset="-120"/>
               </a:rPr>
-              <a:t>What evidence would governance or leadership need before approving.</a:t>
-            </a:r>
-            <a:endParaRPr lang="en-US" sz="1220" dirty="0"/>
+              <a:t>What evidence would governance or leadership need.</a:t>
+            </a:r>
+            <a:endParaRPr lang="en-US" sz="1140" dirty="0"/>
           </a:p>
         </p:txBody>
       </p:sp>
@@ -5325,12 +5329,12 @@
         </p:nvSpPr>
         <p:spPr>
           <a:xfrm>
-            <a:off x="7635240" y="4184294"/>
-            <a:ext cx="3474720" cy="1466698"/>
+            <a:off x="7543800" y="4389120"/>
+            <a:ext cx="3611880" cy="1261872"/>
           </a:xfrm>
           <a:prstGeom prst="roundRect">
             <a:avLst>
-              <a:gd name="adj" fmla="val 7481"/>
+              <a:gd name="adj" fmla="val 8696"/>
             </a:avLst>
           </a:prstGeom>
           <a:solidFill>
@@ -5352,8 +5356,8 @@
         </p:nvSpPr>
         <p:spPr>
           <a:xfrm>
-            <a:off x="7799832" y="4330598"/>
-            <a:ext cx="3145536" cy="256032"/>
+            <a:off x="7708392" y="4517136"/>
+            <a:ext cx="3282696" cy="228600"/>
           </a:xfrm>
           <a:prstGeom prst="rect">
             <a:avLst/>
@@ -5369,7 +5373,7 @@
               <a:buNone/>
             </a:pPr>
             <a:r>
-              <a:rPr lang="en-US" sz="1300" b="1" dirty="0">
+              <a:rPr lang="en-US" sz="1220" b="1" dirty="0">
                 <a:solidFill>
                   <a:srgbClr val="0068B7"/>
                 </a:solidFill>
@@ -5379,7 +5383,7 @@
               </a:rPr>
               <a:t>Apply it</a:t>
             </a:r>
-            <a:endParaRPr lang="en-US" sz="1300" dirty="0"/>
+            <a:endParaRPr lang="en-US" sz="1220" dirty="0"/>
           </a:p>
         </p:txBody>
       </p:sp>
@@ -5391,8 +5395,8 @@
         </p:nvSpPr>
         <p:spPr>
           <a:xfrm>
-            <a:off x="7799832" y="4659782"/>
-            <a:ext cx="3145536" cy="899770"/>
+            <a:off x="7708392" y="4828032"/>
+            <a:ext cx="3282696" cy="749808"/>
           </a:xfrm>
           <a:prstGeom prst="rect">
             <a:avLst/>
@@ -5410,7 +5414,7 @@
               <a:buNone/>
             </a:pPr>
             <a:r>
-              <a:rPr lang="en-US" sz="1320" dirty="0">
+              <a:rPr lang="en-US" sz="1220" dirty="0">
                 <a:solidFill>
                   <a:srgbClr val="17364A"/>
                 </a:solidFill>
@@ -5418,9 +5422,9 @@
                 <a:ea typeface="Aptos" pitchFamily="34" charset="-122"/>
                 <a:cs typeface="Aptos" pitchFamily="34" charset="-120"/>
               </a:rPr>
-              <a:t>Connect the concept to public health purpose, responsible use, required safeguards, documentation, and the next action a department should take.</a:t>
-            </a:r>
-            <a:endParaRPr lang="en-US" sz="1320" dirty="0"/>
+              <a:t>Connect the concept to public health purpose, responsible use, required.</a:t>
+            </a:r>
+            <a:endParaRPr lang="en-US" sz="1220" dirty="0"/>
           </a:p>
         </p:txBody>
       </p:sp>
@@ -5711,8 +5715,8 @@
         </p:nvSpPr>
         <p:spPr>
           <a:xfrm>
-            <a:off x="868680" y="1508760"/>
-            <a:ext cx="6309360" cy="4160520"/>
+            <a:off x="822960" y="1463040"/>
+            <a:ext cx="6565392" cy="4343400"/>
           </a:xfrm>
           <a:prstGeom prst="rect">
             <a:avLst/>
@@ -5730,7 +5734,7 @@
               <a:buNone/>
             </a:pPr>
             <a:r>
-              <a:rPr lang="en-US" sz="2100" dirty="0">
+              <a:rPr lang="en-US" sz="1920" dirty="0">
                 <a:solidFill>
                   <a:srgbClr val="003A63"/>
                 </a:solidFill>
@@ -5738,16 +5742,16 @@
                 <a:ea typeface="Aptos" pitchFamily="34" charset="-122"/>
                 <a:cs typeface="Aptos" pitchFamily="34" charset="-120"/>
               </a:rPr>
-              <a:t>• Which staff, partners, or communities would be affected if this issue were handled poorly?</a:t>
-            </a:r>
-            <a:endParaRPr lang="en-US" sz="2100" dirty="0"/>
-          </a:p>
-          <a:p>
-            <a:pPr indent="0" marL="0">
-              <a:buNone/>
-            </a:pPr>
-            <a:r>
-              <a:rPr lang="en-US" sz="2100" dirty="0">
+              <a:t>• Which staff, partners, or communities would be affected if this issue were.</a:t>
+            </a:r>
+            <a:endParaRPr lang="en-US" sz="1920" dirty="0"/>
+          </a:p>
+          <a:p>
+            <a:pPr indent="0" marL="0">
+              <a:buNone/>
+            </a:pPr>
+            <a:r>
+              <a:rPr lang="en-US" sz="1920" dirty="0">
                 <a:solidFill>
                   <a:srgbClr val="003A63"/>
                 </a:solidFill>
@@ -5755,9 +5759,9 @@
                 <a:ea typeface="Aptos" pitchFamily="34" charset="-122"/>
                 <a:cs typeface="Aptos" pitchFamily="34" charset="-120"/>
               </a:rPr>
-              <a:t>• What policy, process, or artifact should be created or updated after this module?</a:t>
-            </a:r>
-            <a:endParaRPr lang="en-US" sz="2100" dirty="0"/>
+              <a:t>• What policy, process, or artifact should be created or updated after this.</a:t>
+            </a:r>
+            <a:endParaRPr lang="en-US" sz="1920" dirty="0"/>
           </a:p>
         </p:txBody>
       </p:sp>
@@ -5769,12 +5773,12 @@
         </p:nvSpPr>
         <p:spPr>
           <a:xfrm>
-            <a:off x="7635240" y="1325880"/>
-            <a:ext cx="3474720" cy="1207008"/>
+            <a:off x="7543800" y="1325880"/>
+            <a:ext cx="3611880" cy="1261872"/>
           </a:xfrm>
           <a:prstGeom prst="roundRect">
             <a:avLst>
-              <a:gd name="adj" fmla="val 9091"/>
+              <a:gd name="adj" fmla="val 8696"/>
             </a:avLst>
           </a:prstGeom>
           <a:solidFill>
@@ -5796,8 +5800,8 @@
         </p:nvSpPr>
         <p:spPr>
           <a:xfrm>
-            <a:off x="7799832" y="1472184"/>
-            <a:ext cx="3145536" cy="256032"/>
+            <a:off x="7708392" y="1453896"/>
+            <a:ext cx="3282696" cy="228600"/>
           </a:xfrm>
           <a:prstGeom prst="rect">
             <a:avLst/>
@@ -5813,7 +5817,7 @@
               <a:buNone/>
             </a:pPr>
             <a:r>
-              <a:rPr lang="en-US" sz="1300" b="1" dirty="0">
+              <a:rPr lang="en-US" sz="1220" b="1" dirty="0">
                 <a:solidFill>
                   <a:srgbClr val="0068B7"/>
                 </a:solidFill>
@@ -5823,7 +5827,7 @@
               </a:rPr>
               <a:t>Core concept</a:t>
             </a:r>
-            <a:endParaRPr lang="en-US" sz="1300" dirty="0"/>
+            <a:endParaRPr lang="en-US" sz="1220" dirty="0"/>
           </a:p>
         </p:txBody>
       </p:sp>
@@ -5835,8 +5839,8 @@
         </p:nvSpPr>
         <p:spPr>
           <a:xfrm>
-            <a:off x="7799832" y="1801368"/>
-            <a:ext cx="3145536" cy="640080"/>
+            <a:off x="7708392" y="1764792"/>
+            <a:ext cx="3282696" cy="749808"/>
           </a:xfrm>
           <a:prstGeom prst="rect">
             <a:avLst/>
@@ -5854,7 +5858,7 @@
               <a:buNone/>
             </a:pPr>
             <a:r>
-              <a:rPr lang="en-US" sz="1320" dirty="0">
+              <a:rPr lang="en-US" sz="1220" dirty="0">
                 <a:solidFill>
                   <a:srgbClr val="17364A"/>
                 </a:solidFill>
@@ -5862,9 +5866,9 @@
                 <a:ea typeface="Aptos" pitchFamily="34" charset="-122"/>
                 <a:cs typeface="Aptos" pitchFamily="34" charset="-120"/>
               </a:rPr>
-              <a:t>Which staff, partners, or communities would be affected if this issue were handled.</a:t>
-            </a:r>
-            <a:endParaRPr lang="en-US" sz="1320" dirty="0"/>
+              <a:t>Which staff, partners, or communities would be affected if this issue were.</a:t>
+            </a:r>
+            <a:endParaRPr lang="en-US" sz="1220" dirty="0"/>
           </a:p>
         </p:txBody>
       </p:sp>
@@ -5876,12 +5880,12 @@
         </p:nvSpPr>
         <p:spPr>
           <a:xfrm>
-            <a:off x="7635240" y="2670048"/>
-            <a:ext cx="3474720" cy="1377086"/>
+            <a:off x="7543800" y="2724912"/>
+            <a:ext cx="3611880" cy="1527048"/>
           </a:xfrm>
           <a:prstGeom prst="roundRect">
             <a:avLst>
-              <a:gd name="adj" fmla="val 7968"/>
+              <a:gd name="adj" fmla="val 7186"/>
             </a:avLst>
           </a:prstGeom>
           <a:solidFill>
@@ -5903,8 +5907,8 @@
         </p:nvSpPr>
         <p:spPr>
           <a:xfrm>
-            <a:off x="7799832" y="2816352"/>
-            <a:ext cx="3145536" cy="256032"/>
+            <a:off x="7708392" y="2852928"/>
+            <a:ext cx="3282696" cy="228600"/>
           </a:xfrm>
           <a:prstGeom prst="rect">
             <a:avLst/>
@@ -5920,7 +5924,7 @@
               <a:buNone/>
             </a:pPr>
             <a:r>
-              <a:rPr lang="en-US" sz="1300" b="1" dirty="0">
+              <a:rPr lang="en-US" sz="1220" b="1" dirty="0">
                 <a:solidFill>
                   <a:srgbClr val="0068B7"/>
                 </a:solidFill>
@@ -5930,7 +5934,7 @@
               </a:rPr>
               <a:t>Concept checkpoints</a:t>
             </a:r>
-            <a:endParaRPr lang="en-US" sz="1300" dirty="0"/>
+            <a:endParaRPr lang="en-US" sz="1220" dirty="0"/>
           </a:p>
         </p:txBody>
       </p:sp>
@@ -5942,8 +5946,8 @@
         </p:nvSpPr>
         <p:spPr>
           <a:xfrm>
-            <a:off x="7818120" y="3182112"/>
-            <a:ext cx="3090672" cy="718718"/>
+            <a:off x="7726680" y="3182112"/>
+            <a:ext cx="3227832" cy="960120"/>
           </a:xfrm>
           <a:prstGeom prst="rect">
             <a:avLst/>
@@ -5961,7 +5965,7 @@
               <a:buNone/>
             </a:pPr>
             <a:r>
-              <a:rPr lang="en-US" sz="1220" dirty="0">
+              <a:rPr lang="en-US" sz="1140" dirty="0">
                 <a:solidFill>
                   <a:srgbClr val="17364A"/>
                 </a:solidFill>
@@ -5969,16 +5973,16 @@
                 <a:ea typeface="Aptos" pitchFamily="34" charset="-122"/>
                 <a:cs typeface="Aptos" pitchFamily="34" charset="-120"/>
               </a:rPr>
-              <a:t>Which staff, partners, or communities would be affected if this.</a:t>
-            </a:r>
-            <a:endParaRPr lang="en-US" sz="1220" dirty="0"/>
-          </a:p>
-          <a:p>
-            <a:pPr indent="0" marL="0">
-              <a:buNone/>
-            </a:pPr>
-            <a:r>
-              <a:rPr lang="en-US" sz="1220" dirty="0">
+              <a:t>Which staff, partners, or communities would be.</a:t>
+            </a:r>
+            <a:endParaRPr lang="en-US" sz="1140" dirty="0"/>
+          </a:p>
+          <a:p>
+            <a:pPr indent="0" marL="0">
+              <a:buNone/>
+            </a:pPr>
+            <a:r>
+              <a:rPr lang="en-US" sz="1140" dirty="0">
                 <a:solidFill>
                   <a:srgbClr val="17364A"/>
                 </a:solidFill>
@@ -5986,9 +5990,9 @@
                 <a:ea typeface="Aptos" pitchFamily="34" charset="-122"/>
                 <a:cs typeface="Aptos" pitchFamily="34" charset="-120"/>
               </a:rPr>
-              <a:t>What policy, process, or artifact should be created or updated.</a:t>
-            </a:r>
-            <a:endParaRPr lang="en-US" sz="1220" dirty="0"/>
+              <a:t>What policy, process, or artifact should be.</a:t>
+            </a:r>
+            <a:endParaRPr lang="en-US" sz="1140" dirty="0"/>
           </a:p>
         </p:txBody>
       </p:sp>
@@ -6000,12 +6004,12 @@
         </p:nvSpPr>
         <p:spPr>
           <a:xfrm>
-            <a:off x="7635240" y="4184294"/>
-            <a:ext cx="3474720" cy="1466698"/>
+            <a:off x="7543800" y="4389120"/>
+            <a:ext cx="3611880" cy="1261872"/>
           </a:xfrm>
           <a:prstGeom prst="roundRect">
             <a:avLst>
-              <a:gd name="adj" fmla="val 7481"/>
+              <a:gd name="adj" fmla="val 8696"/>
             </a:avLst>
           </a:prstGeom>
           <a:solidFill>
@@ -6027,8 +6031,8 @@
         </p:nvSpPr>
         <p:spPr>
           <a:xfrm>
-            <a:off x="7799832" y="4330598"/>
-            <a:ext cx="3145536" cy="256032"/>
+            <a:off x="7708392" y="4517136"/>
+            <a:ext cx="3282696" cy="228600"/>
           </a:xfrm>
           <a:prstGeom prst="rect">
             <a:avLst/>
@@ -6044,7 +6048,7 @@
               <a:buNone/>
             </a:pPr>
             <a:r>
-              <a:rPr lang="en-US" sz="1300" b="1" dirty="0">
+              <a:rPr lang="en-US" sz="1220" b="1" dirty="0">
                 <a:solidFill>
                   <a:srgbClr val="0068B7"/>
                 </a:solidFill>
@@ -6054,7 +6058,7 @@
               </a:rPr>
               <a:t>Apply it</a:t>
             </a:r>
-            <a:endParaRPr lang="en-US" sz="1300" dirty="0"/>
+            <a:endParaRPr lang="en-US" sz="1220" dirty="0"/>
           </a:p>
         </p:txBody>
       </p:sp>
@@ -6066,8 +6070,8 @@
         </p:nvSpPr>
         <p:spPr>
           <a:xfrm>
-            <a:off x="7799832" y="4659782"/>
-            <a:ext cx="3145536" cy="899770"/>
+            <a:off x="7708392" y="4828032"/>
+            <a:ext cx="3282696" cy="749808"/>
           </a:xfrm>
           <a:prstGeom prst="rect">
             <a:avLst/>
@@ -6085,7 +6089,7 @@
               <a:buNone/>
             </a:pPr>
             <a:r>
-              <a:rPr lang="en-US" sz="1320" dirty="0">
+              <a:rPr lang="en-US" sz="1220" dirty="0">
                 <a:solidFill>
                   <a:srgbClr val="17364A"/>
                 </a:solidFill>
@@ -6093,9 +6097,9 @@
                 <a:ea typeface="Aptos" pitchFamily="34" charset="-122"/>
                 <a:cs typeface="Aptos" pitchFamily="34" charset="-120"/>
               </a:rPr>
-              <a:t>Connect the concept to public health purpose, responsible use, required safeguards, documentation, and the next action a department should take.</a:t>
-            </a:r>
-            <a:endParaRPr lang="en-US" sz="1320" dirty="0"/>
+              <a:t>Connect the concept to public health purpose, responsible use, required.</a:t>
+            </a:r>
+            <a:endParaRPr lang="en-US" sz="1220" dirty="0"/>
           </a:p>
         </p:txBody>
       </p:sp>
@@ -6386,8 +6390,8 @@
         </p:nvSpPr>
         <p:spPr>
           <a:xfrm>
-            <a:off x="868680" y="1508760"/>
-            <a:ext cx="6309360" cy="4160520"/>
+            <a:off x="822960" y="1463040"/>
+            <a:ext cx="6565392" cy="4343400"/>
           </a:xfrm>
           <a:prstGeom prst="rect">
             <a:avLst/>
@@ -6405,7 +6409,7 @@
               <a:buNone/>
             </a:pPr>
             <a:r>
-              <a:rPr lang="en-US" sz="2100" dirty="0">
+              <a:rPr lang="en-US" sz="1920" dirty="0">
                 <a:solidFill>
                   <a:srgbClr val="003A63"/>
                 </a:solidFill>
@@ -6415,14 +6419,14 @@
               </a:rPr>
               <a:t>• Create a role-based AI workforce readiness plan.</a:t>
             </a:r>
-            <a:endParaRPr lang="en-US" sz="2100" dirty="0"/>
-          </a:p>
-          <a:p>
-            <a:pPr indent="0" marL="0">
-              <a:buNone/>
-            </a:pPr>
-            <a:r>
-              <a:rPr lang="en-US" sz="2100" dirty="0">
+            <a:endParaRPr lang="en-US" sz="1920" dirty="0"/>
+          </a:p>
+          <a:p>
+            <a:pPr indent="0" marL="0">
+              <a:buNone/>
+            </a:pPr>
+            <a:r>
+              <a:rPr lang="en-US" sz="1920" dirty="0">
                 <a:solidFill>
                   <a:srgbClr val="003A63"/>
                 </a:solidFill>
@@ -6430,9 +6434,9 @@
                 <a:ea typeface="Aptos" pitchFamily="34" charset="-122"/>
                 <a:cs typeface="Aptos" pitchFamily="34" charset="-120"/>
               </a:rPr>
-              <a:t>• Include role groups, competencies, required training, responsibilities, decision authority,.</a:t>
-            </a:r>
-            <a:endParaRPr lang="en-US" sz="2100" dirty="0"/>
+              <a:t>• Include role groups, competencies, required training, responsibilities,.</a:t>
+            </a:r>
+            <a:endParaRPr lang="en-US" sz="1920" dirty="0"/>
           </a:p>
         </p:txBody>
       </p:sp>
@@ -6444,12 +6448,12 @@
         </p:nvSpPr>
         <p:spPr>
           <a:xfrm>
-            <a:off x="7635240" y="1325880"/>
-            <a:ext cx="3474720" cy="1207008"/>
+            <a:off x="7543800" y="1325880"/>
+            <a:ext cx="3611880" cy="1261872"/>
           </a:xfrm>
           <a:prstGeom prst="roundRect">
             <a:avLst>
-              <a:gd name="adj" fmla="val 9091"/>
+              <a:gd name="adj" fmla="val 8696"/>
             </a:avLst>
           </a:prstGeom>
           <a:solidFill>
@@ -6471,8 +6475,8 @@
         </p:nvSpPr>
         <p:spPr>
           <a:xfrm>
-            <a:off x="7799832" y="1472184"/>
-            <a:ext cx="3145536" cy="256032"/>
+            <a:off x="7708392" y="1453896"/>
+            <a:ext cx="3282696" cy="228600"/>
           </a:xfrm>
           <a:prstGeom prst="rect">
             <a:avLst/>
@@ -6488,7 +6492,7 @@
               <a:buNone/>
             </a:pPr>
             <a:r>
-              <a:rPr lang="en-US" sz="1300" b="1" dirty="0">
+              <a:rPr lang="en-US" sz="1220" b="1" dirty="0">
                 <a:solidFill>
                   <a:srgbClr val="0068B7"/>
                 </a:solidFill>
@@ -6498,7 +6502,7 @@
               </a:rPr>
               <a:t>Practice focus</a:t>
             </a:r>
-            <a:endParaRPr lang="en-US" sz="1300" dirty="0"/>
+            <a:endParaRPr lang="en-US" sz="1220" dirty="0"/>
           </a:p>
         </p:txBody>
       </p:sp>
@@ -6510,8 +6514,8 @@
         </p:nvSpPr>
         <p:spPr>
           <a:xfrm>
-            <a:off x="7799832" y="1801368"/>
-            <a:ext cx="3145536" cy="640080"/>
+            <a:off x="7708392" y="1764792"/>
+            <a:ext cx="3282696" cy="749808"/>
           </a:xfrm>
           <a:prstGeom prst="rect">
             <a:avLst/>
@@ -6529,7 +6533,7 @@
               <a:buNone/>
             </a:pPr>
             <a:r>
-              <a:rPr lang="en-US" sz="1320" dirty="0">
+              <a:rPr lang="en-US" sz="1220" dirty="0">
                 <a:solidFill>
                   <a:srgbClr val="17364A"/>
                 </a:solidFill>
@@ -6539,7 +6543,7 @@
               </a:rPr>
               <a:t>Create a role-based AI workforce readiness plan.</a:t>
             </a:r>
-            <a:endParaRPr lang="en-US" sz="1320" dirty="0"/>
+            <a:endParaRPr lang="en-US" sz="1220" dirty="0"/>
           </a:p>
         </p:txBody>
       </p:sp>
@@ -6551,12 +6555,12 @@
         </p:nvSpPr>
         <p:spPr>
           <a:xfrm>
-            <a:off x="7635240" y="2670048"/>
-            <a:ext cx="3474720" cy="1377086"/>
+            <a:off x="7543800" y="2724912"/>
+            <a:ext cx="3611880" cy="1527048"/>
           </a:xfrm>
           <a:prstGeom prst="roundRect">
             <a:avLst>
-              <a:gd name="adj" fmla="val 7968"/>
+              <a:gd name="adj" fmla="val 7186"/>
             </a:avLst>
           </a:prstGeom>
           <a:solidFill>
@@ -6578,8 +6582,8 @@
         </p:nvSpPr>
         <p:spPr>
           <a:xfrm>
-            <a:off x="7799832" y="2816352"/>
-            <a:ext cx="3145536" cy="256032"/>
+            <a:off x="7708392" y="2852928"/>
+            <a:ext cx="3282696" cy="228600"/>
           </a:xfrm>
           <a:prstGeom prst="rect">
             <a:avLst/>
@@ -6595,7 +6599,7 @@
               <a:buNone/>
             </a:pPr>
             <a:r>
-              <a:rPr lang="en-US" sz="1300" b="1" dirty="0">
+              <a:rPr lang="en-US" sz="1220" b="1" dirty="0">
                 <a:solidFill>
                   <a:srgbClr val="0068B7"/>
                 </a:solidFill>
@@ -6605,7 +6609,7 @@
               </a:rPr>
               <a:t>Concept checkpoints</a:t>
             </a:r>
-            <a:endParaRPr lang="en-US" sz="1300" dirty="0"/>
+            <a:endParaRPr lang="en-US" sz="1220" dirty="0"/>
           </a:p>
         </p:txBody>
       </p:sp>
@@ -6617,8 +6621,8 @@
         </p:nvSpPr>
         <p:spPr>
           <a:xfrm>
-            <a:off x="7818120" y="3182112"/>
-            <a:ext cx="3090672" cy="718718"/>
+            <a:off x="7726680" y="3182112"/>
+            <a:ext cx="3227832" cy="960120"/>
           </a:xfrm>
           <a:prstGeom prst="rect">
             <a:avLst/>
@@ -6636,7 +6640,7 @@
               <a:buNone/>
             </a:pPr>
             <a:r>
-              <a:rPr lang="en-US" sz="1220" dirty="0">
+              <a:rPr lang="en-US" sz="1140" dirty="0">
                 <a:solidFill>
                   <a:srgbClr val="17364A"/>
                 </a:solidFill>
@@ -6646,14 +6650,14 @@
               </a:rPr>
               <a:t>Create a role-based AI workforce readiness plan.</a:t>
             </a:r>
-            <a:endParaRPr lang="en-US" sz="1220" dirty="0"/>
-          </a:p>
-          <a:p>
-            <a:pPr indent="0" marL="0">
-              <a:buNone/>
-            </a:pPr>
-            <a:r>
-              <a:rPr lang="en-US" sz="1220" dirty="0">
+            <a:endParaRPr lang="en-US" sz="1140" dirty="0"/>
+          </a:p>
+          <a:p>
+            <a:pPr indent="0" marL="0">
+              <a:buNone/>
+            </a:pPr>
+            <a:r>
+              <a:rPr lang="en-US" sz="1140" dirty="0">
                 <a:solidFill>
                   <a:srgbClr val="17364A"/>
                 </a:solidFill>
@@ -6661,9 +6665,9 @@
                 <a:ea typeface="Aptos" pitchFamily="34" charset="-122"/>
                 <a:cs typeface="Aptos" pitchFamily="34" charset="-120"/>
               </a:rPr>
-              <a:t>Include role groups, competencies, required training,.</a:t>
-            </a:r>
-            <a:endParaRPr lang="en-US" sz="1220" dirty="0"/>
+              <a:t>Include role groups, competencies, required.</a:t>
+            </a:r>
+            <a:endParaRPr lang="en-US" sz="1140" dirty="0"/>
           </a:p>
         </p:txBody>
       </p:sp>
@@ -6675,12 +6679,12 @@
         </p:nvSpPr>
         <p:spPr>
           <a:xfrm>
-            <a:off x="7635240" y="4184294"/>
-            <a:ext cx="3474720" cy="1466698"/>
+            <a:off x="7543800" y="4389120"/>
+            <a:ext cx="3611880" cy="1261872"/>
           </a:xfrm>
           <a:prstGeom prst="roundRect">
             <a:avLst>
-              <a:gd name="adj" fmla="val 7481"/>
+              <a:gd name="adj" fmla="val 8696"/>
             </a:avLst>
           </a:prstGeom>
           <a:solidFill>
@@ -6702,8 +6706,8 @@
         </p:nvSpPr>
         <p:spPr>
           <a:xfrm>
-            <a:off x="7799832" y="4330598"/>
-            <a:ext cx="3145536" cy="256032"/>
+            <a:off x="7708392" y="4517136"/>
+            <a:ext cx="3282696" cy="228600"/>
           </a:xfrm>
           <a:prstGeom prst="rect">
             <a:avLst/>
@@ -6719,7 +6723,7 @@
               <a:buNone/>
             </a:pPr>
             <a:r>
-              <a:rPr lang="en-US" sz="1300" b="1" dirty="0">
+              <a:rPr lang="en-US" sz="1220" b="1" dirty="0">
                 <a:solidFill>
                   <a:srgbClr val="0068B7"/>
                 </a:solidFill>
@@ -6729,7 +6733,7 @@
               </a:rPr>
               <a:t>What to produce</a:t>
             </a:r>
-            <a:endParaRPr lang="en-US" sz="1300" dirty="0"/>
+            <a:endParaRPr lang="en-US" sz="1220" dirty="0"/>
           </a:p>
         </p:txBody>
       </p:sp>
@@ -6741,8 +6745,8 @@
         </p:nvSpPr>
         <p:spPr>
           <a:xfrm>
-            <a:off x="7799832" y="4659782"/>
-            <a:ext cx="3145536" cy="899770"/>
+            <a:off x="7708392" y="4828032"/>
+            <a:ext cx="3282696" cy="749808"/>
           </a:xfrm>
           <a:prstGeom prst="rect">
             <a:avLst/>
@@ -6760,7 +6764,7 @@
               <a:buNone/>
             </a:pPr>
             <a:r>
-              <a:rPr lang="en-US" sz="1320" dirty="0">
+              <a:rPr lang="en-US" sz="1220" dirty="0">
                 <a:solidFill>
                   <a:srgbClr val="17364A"/>
                 </a:solidFill>
@@ -6768,9 +6772,9 @@
                 <a:ea typeface="Aptos" pitchFamily="34" charset="-122"/>
                 <a:cs typeface="Aptos" pitchFamily="34" charset="-120"/>
               </a:rPr>
-              <a:t>Use the assignment to test whether you can explain the concept, apply it to a realistic public health situation, and identify what would need review before the work moves forward.</a:t>
-            </a:r>
-            <a:endParaRPr lang="en-US" sz="1320" dirty="0"/>
+              <a:t>Use the assignment to test whether you can explain the concept, apply it to a.</a:t>
+            </a:r>
+            <a:endParaRPr lang="en-US" sz="1220" dirty="0"/>
           </a:p>
         </p:txBody>
       </p:sp>
@@ -7061,8 +7065,8 @@
         </p:nvSpPr>
         <p:spPr>
           <a:xfrm>
-            <a:off x="868680" y="1508760"/>
-            <a:ext cx="6309360" cy="4160520"/>
+            <a:off x="822960" y="1463040"/>
+            <a:ext cx="6565392" cy="4343400"/>
           </a:xfrm>
           <a:prstGeom prst="rect">
             <a:avLst/>
@@ -7080,7 +7084,7 @@
               <a:buNone/>
             </a:pPr>
             <a:r>
-              <a:rPr lang="en-US" sz="2100" dirty="0">
+              <a:rPr lang="en-US" sz="1920" dirty="0">
                 <a:solidFill>
                   <a:srgbClr val="003A63"/>
                 </a:solidFill>
@@ -7090,14 +7094,14 @@
               </a:rPr>
               <a:t>• Choose a real or realistic public health AI use case.</a:t>
             </a:r>
-            <a:endParaRPr lang="en-US" sz="2100" dirty="0"/>
-          </a:p>
-          <a:p>
-            <a:pPr indent="0" marL="0">
-              <a:buNone/>
-            </a:pPr>
-            <a:r>
-              <a:rPr lang="en-US" sz="2100" dirty="0">
+            <a:endParaRPr lang="en-US" sz="1920" dirty="0"/>
+          </a:p>
+          <a:p>
+            <a:pPr indent="0" marL="0">
+              <a:buNone/>
+            </a:pPr>
+            <a:r>
+              <a:rPr lang="en-US" sz="1920" dirty="0">
                 <a:solidFill>
                   <a:srgbClr val="003A63"/>
                 </a:solidFill>
@@ -7105,16 +7109,16 @@
                 <a:ea typeface="Aptos" pitchFamily="34" charset="-122"/>
                 <a:cs typeface="Aptos" pitchFamily="34" charset="-120"/>
               </a:rPr>
-              <a:t>• Document assumptions, unresolved questions, and which agency roles would need to review the.</a:t>
-            </a:r>
-            <a:endParaRPr lang="en-US" sz="2100" dirty="0"/>
-          </a:p>
-          <a:p>
-            <a:pPr indent="0" marL="0">
-              <a:buNone/>
-            </a:pPr>
-            <a:r>
-              <a:rPr lang="en-US" sz="2100" dirty="0">
+              <a:t>• Document assumptions, unresolved questions, and which agency roles would.</a:t>
+            </a:r>
+            <a:endParaRPr lang="en-US" sz="1920" dirty="0"/>
+          </a:p>
+          <a:p>
+            <a:pPr indent="0" marL="0">
+              <a:buNone/>
+            </a:pPr>
+            <a:r>
+              <a:rPr lang="en-US" sz="1920" dirty="0">
                 <a:solidFill>
                   <a:srgbClr val="003A63"/>
                 </a:solidFill>
@@ -7122,9 +7126,9 @@
                 <a:ea typeface="Aptos" pitchFamily="34" charset="-122"/>
                 <a:cs typeface="Aptos" pitchFamily="34" charset="-120"/>
               </a:rPr>
-              <a:t>• The exercise should produce a work product that could support governance review, leadership.</a:t>
-            </a:r>
-            <a:endParaRPr lang="en-US" sz="2100" dirty="0"/>
+              <a:t>• The exercise should produce a work product that could support governance.</a:t>
+            </a:r>
+            <a:endParaRPr lang="en-US" sz="1920" dirty="0"/>
           </a:p>
         </p:txBody>
       </p:sp>
@@ -7136,12 +7140,12 @@
         </p:nvSpPr>
         <p:spPr>
           <a:xfrm>
-            <a:off x="7635240" y="1325880"/>
-            <a:ext cx="3474720" cy="1207008"/>
+            <a:off x="7543800" y="1325880"/>
+            <a:ext cx="3611880" cy="1261872"/>
           </a:xfrm>
           <a:prstGeom prst="roundRect">
             <a:avLst>
-              <a:gd name="adj" fmla="val 9091"/>
+              <a:gd name="adj" fmla="val 8696"/>
             </a:avLst>
           </a:prstGeom>
           <a:solidFill>
@@ -7163,8 +7167,8 @@
         </p:nvSpPr>
         <p:spPr>
           <a:xfrm>
-            <a:off x="7799832" y="1472184"/>
-            <a:ext cx="3145536" cy="256032"/>
+            <a:off x="7708392" y="1453896"/>
+            <a:ext cx="3282696" cy="228600"/>
           </a:xfrm>
           <a:prstGeom prst="rect">
             <a:avLst/>
@@ -7180,7 +7184,7 @@
               <a:buNone/>
             </a:pPr>
             <a:r>
-              <a:rPr lang="en-US" sz="1300" b="1" dirty="0">
+              <a:rPr lang="en-US" sz="1220" b="1" dirty="0">
                 <a:solidFill>
                   <a:srgbClr val="0068B7"/>
                 </a:solidFill>
@@ -7190,7 +7194,7 @@
               </a:rPr>
               <a:t>Core concept</a:t>
             </a:r>
-            <a:endParaRPr lang="en-US" sz="1300" dirty="0"/>
+            <a:endParaRPr lang="en-US" sz="1220" dirty="0"/>
           </a:p>
         </p:txBody>
       </p:sp>
@@ -7202,8 +7206,8 @@
         </p:nvSpPr>
         <p:spPr>
           <a:xfrm>
-            <a:off x="7799832" y="1801368"/>
-            <a:ext cx="3145536" cy="640080"/>
+            <a:off x="7708392" y="1764792"/>
+            <a:ext cx="3282696" cy="749808"/>
           </a:xfrm>
           <a:prstGeom prst="rect">
             <a:avLst/>
@@ -7221,7 +7225,7 @@
               <a:buNone/>
             </a:pPr>
             <a:r>
-              <a:rPr lang="en-US" sz="1320" dirty="0">
+              <a:rPr lang="en-US" sz="1220" dirty="0">
                 <a:solidFill>
                   <a:srgbClr val="17364A"/>
                 </a:solidFill>
@@ -7231,7 +7235,7 @@
               </a:rPr>
               <a:t>Choose a real or realistic public health AI use case.</a:t>
             </a:r>
-            <a:endParaRPr lang="en-US" sz="1320" dirty="0"/>
+            <a:endParaRPr lang="en-US" sz="1220" dirty="0"/>
           </a:p>
         </p:txBody>
       </p:sp>
@@ -7243,12 +7247,12 @@
         </p:nvSpPr>
         <p:spPr>
           <a:xfrm>
-            <a:off x="7635240" y="2670048"/>
-            <a:ext cx="3474720" cy="1377086"/>
+            <a:off x="7543800" y="2724912"/>
+            <a:ext cx="3611880" cy="1527048"/>
           </a:xfrm>
           <a:prstGeom prst="roundRect">
             <a:avLst>
-              <a:gd name="adj" fmla="val 7968"/>
+              <a:gd name="adj" fmla="val 7186"/>
             </a:avLst>
           </a:prstGeom>
           <a:solidFill>
@@ -7270,8 +7274,8 @@
         </p:nvSpPr>
         <p:spPr>
           <a:xfrm>
-            <a:off x="7799832" y="2816352"/>
-            <a:ext cx="3145536" cy="256032"/>
+            <a:off x="7708392" y="2852928"/>
+            <a:ext cx="3282696" cy="228600"/>
           </a:xfrm>
           <a:prstGeom prst="rect">
             <a:avLst/>
@@ -7287,7 +7291,7 @@
               <a:buNone/>
             </a:pPr>
             <a:r>
-              <a:rPr lang="en-US" sz="1300" b="1" dirty="0">
+              <a:rPr lang="en-US" sz="1220" b="1" dirty="0">
                 <a:solidFill>
                   <a:srgbClr val="0068B7"/>
                 </a:solidFill>
@@ -7297,7 +7301,7 @@
               </a:rPr>
               <a:t>Concept checkpoints</a:t>
             </a:r>
-            <a:endParaRPr lang="en-US" sz="1300" dirty="0"/>
+            <a:endParaRPr lang="en-US" sz="1220" dirty="0"/>
           </a:p>
         </p:txBody>
       </p:sp>
@@ -7309,8 +7313,8 @@
         </p:nvSpPr>
         <p:spPr>
           <a:xfrm>
-            <a:off x="7818120" y="3182112"/>
-            <a:ext cx="3090672" cy="718718"/>
+            <a:off x="7726680" y="3182112"/>
+            <a:ext cx="3227832" cy="960120"/>
           </a:xfrm>
           <a:prstGeom prst="rect">
             <a:avLst/>
@@ -7328,7 +7332,7 @@
               <a:buNone/>
             </a:pPr>
             <a:r>
-              <a:rPr lang="en-US" sz="1220" dirty="0">
+              <a:rPr lang="en-US" sz="1140" dirty="0">
                 <a:solidFill>
                   <a:srgbClr val="17364A"/>
                 </a:solidFill>
@@ -7336,16 +7340,16 @@
                 <a:ea typeface="Aptos" pitchFamily="34" charset="-122"/>
                 <a:cs typeface="Aptos" pitchFamily="34" charset="-120"/>
               </a:rPr>
-              <a:t>Document assumptions, unresolved questions, and which agency roles.</a:t>
-            </a:r>
-            <a:endParaRPr lang="en-US" sz="1220" dirty="0"/>
-          </a:p>
-          <a:p>
-            <a:pPr indent="0" marL="0">
-              <a:buNone/>
-            </a:pPr>
-            <a:r>
-              <a:rPr lang="en-US" sz="1220" dirty="0">
+              <a:t>Document assumptions, unresolved questions, and.</a:t>
+            </a:r>
+            <a:endParaRPr lang="en-US" sz="1140" dirty="0"/>
+          </a:p>
+          <a:p>
+            <a:pPr indent="0" marL="0">
+              <a:buNone/>
+            </a:pPr>
+            <a:r>
+              <a:rPr lang="en-US" sz="1140" dirty="0">
                 <a:solidFill>
                   <a:srgbClr val="17364A"/>
                 </a:solidFill>
@@ -7353,9 +7357,9 @@
                 <a:ea typeface="Aptos" pitchFamily="34" charset="-122"/>
                 <a:cs typeface="Aptos" pitchFamily="34" charset="-120"/>
               </a:rPr>
-              <a:t>The exercise should produce a work product that could support.</a:t>
-            </a:r>
-            <a:endParaRPr lang="en-US" sz="1220" dirty="0"/>
+              <a:t>The exercise should produce a work product that.</a:t>
+            </a:r>
+            <a:endParaRPr lang="en-US" sz="1140" dirty="0"/>
           </a:p>
         </p:txBody>
       </p:sp>
@@ -7367,12 +7371,12 @@
         </p:nvSpPr>
         <p:spPr>
           <a:xfrm>
-            <a:off x="7635240" y="4184294"/>
-            <a:ext cx="3474720" cy="1466698"/>
+            <a:off x="7543800" y="4389120"/>
+            <a:ext cx="3611880" cy="1261872"/>
           </a:xfrm>
           <a:prstGeom prst="roundRect">
             <a:avLst>
-              <a:gd name="adj" fmla="val 7481"/>
+              <a:gd name="adj" fmla="val 8696"/>
             </a:avLst>
           </a:prstGeom>
           <a:solidFill>
@@ -7394,8 +7398,8 @@
         </p:nvSpPr>
         <p:spPr>
           <a:xfrm>
-            <a:off x="7799832" y="4330598"/>
-            <a:ext cx="3145536" cy="256032"/>
+            <a:off x="7708392" y="4517136"/>
+            <a:ext cx="3282696" cy="228600"/>
           </a:xfrm>
           <a:prstGeom prst="rect">
             <a:avLst/>
@@ -7411,7 +7415,7 @@
               <a:buNone/>
             </a:pPr>
             <a:r>
-              <a:rPr lang="en-US" sz="1300" b="1" dirty="0">
+              <a:rPr lang="en-US" sz="1220" b="1" dirty="0">
                 <a:solidFill>
                   <a:srgbClr val="0068B7"/>
                 </a:solidFill>
@@ -7421,7 +7425,7 @@
               </a:rPr>
               <a:t>Apply it</a:t>
             </a:r>
-            <a:endParaRPr lang="en-US" sz="1300" dirty="0"/>
+            <a:endParaRPr lang="en-US" sz="1220" dirty="0"/>
           </a:p>
         </p:txBody>
       </p:sp>
@@ -7433,8 +7437,8 @@
         </p:nvSpPr>
         <p:spPr>
           <a:xfrm>
-            <a:off x="7799832" y="4659782"/>
-            <a:ext cx="3145536" cy="899770"/>
+            <a:off x="7708392" y="4828032"/>
+            <a:ext cx="3282696" cy="749808"/>
           </a:xfrm>
           <a:prstGeom prst="rect">
             <a:avLst/>
@@ -7452,7 +7456,7 @@
               <a:buNone/>
             </a:pPr>
             <a:r>
-              <a:rPr lang="en-US" sz="1320" dirty="0">
+              <a:rPr lang="en-US" sz="1220" dirty="0">
                 <a:solidFill>
                   <a:srgbClr val="17364A"/>
                 </a:solidFill>
@@ -7460,9 +7464,9 @@
                 <a:ea typeface="Aptos" pitchFamily="34" charset="-122"/>
                 <a:cs typeface="Aptos" pitchFamily="34" charset="-120"/>
               </a:rPr>
-              <a:t>Connect the concept to public health purpose, responsible use, required safeguards, documentation, and the next action a department should take.</a:t>
-            </a:r>
-            <a:endParaRPr lang="en-US" sz="1320" dirty="0"/>
+              <a:t>Connect the concept to public health purpose, responsible use, required.</a:t>
+            </a:r>
+            <a:endParaRPr lang="en-US" sz="1220" dirty="0"/>
           </a:p>
         </p:txBody>
       </p:sp>
@@ -7753,8 +7757,8 @@
         </p:nvSpPr>
         <p:spPr>
           <a:xfrm>
-            <a:off x="868680" y="1508760"/>
-            <a:ext cx="6309360" cy="4160520"/>
+            <a:off x="822960" y="1463040"/>
+            <a:ext cx="6565392" cy="4343400"/>
           </a:xfrm>
           <a:prstGeom prst="rect">
             <a:avLst/>
@@ -7772,7 +7776,7 @@
               <a:buNone/>
             </a:pPr>
             <a:r>
-              <a:rPr lang="en-US" sz="2100" dirty="0">
+              <a:rPr lang="en-US" sz="1920" dirty="0">
                 <a:solidFill>
                   <a:srgbClr val="003A63"/>
                 </a:solidFill>
@@ -7780,9 +7784,9 @@
                 <a:ea typeface="Aptos" pitchFamily="34" charset="-122"/>
                 <a:cs typeface="Aptos" pitchFamily="34" charset="-120"/>
               </a:rPr>
-              <a:t>• Workforce readiness plan; role-based competency matrix; training assignment matrix; AI bridge.</a:t>
-            </a:r>
-            <a:endParaRPr lang="en-US" sz="2100" dirty="0"/>
+              <a:t>• Workforce readiness plan; role-based competency matrix; training assignment.</a:t>
+            </a:r>
+            <a:endParaRPr lang="en-US" sz="1920" dirty="0"/>
           </a:p>
         </p:txBody>
       </p:sp>
@@ -7794,12 +7798,12 @@
         </p:nvSpPr>
         <p:spPr>
           <a:xfrm>
-            <a:off x="7635240" y="1325880"/>
-            <a:ext cx="3474720" cy="1255471"/>
+            <a:off x="7543800" y="1325880"/>
+            <a:ext cx="3611880" cy="1261872"/>
           </a:xfrm>
           <a:prstGeom prst="roundRect">
             <a:avLst>
-              <a:gd name="adj" fmla="val 8740"/>
+              <a:gd name="adj" fmla="val 8696"/>
             </a:avLst>
           </a:prstGeom>
           <a:solidFill>
@@ -7821,8 +7825,8 @@
         </p:nvSpPr>
         <p:spPr>
           <a:xfrm>
-            <a:off x="7799832" y="1472184"/>
-            <a:ext cx="3145536" cy="256032"/>
+            <a:off x="7708392" y="1453896"/>
+            <a:ext cx="3282696" cy="228600"/>
           </a:xfrm>
           <a:prstGeom prst="rect">
             <a:avLst/>
@@ -7838,7 +7842,7 @@
               <a:buNone/>
             </a:pPr>
             <a:r>
-              <a:rPr lang="en-US" sz="1300" b="1" dirty="0">
+              <a:rPr lang="en-US" sz="1220" b="1" dirty="0">
                 <a:solidFill>
                   <a:srgbClr val="0068B7"/>
                 </a:solidFill>
@@ -7848,7 +7852,7 @@
               </a:rPr>
               <a:t>Core concept</a:t>
             </a:r>
-            <a:endParaRPr lang="en-US" sz="1300" dirty="0"/>
+            <a:endParaRPr lang="en-US" sz="1220" dirty="0"/>
           </a:p>
         </p:txBody>
       </p:sp>
@@ -7860,8 +7864,8 @@
         </p:nvSpPr>
         <p:spPr>
           <a:xfrm>
-            <a:off x="7799832" y="1801368"/>
-            <a:ext cx="3145536" cy="688543"/>
+            <a:off x="7708392" y="1764792"/>
+            <a:ext cx="3282696" cy="749808"/>
           </a:xfrm>
           <a:prstGeom prst="rect">
             <a:avLst/>
@@ -7879,7 +7883,7 @@
               <a:buNone/>
             </a:pPr>
             <a:r>
-              <a:rPr lang="en-US" sz="1320" dirty="0">
+              <a:rPr lang="en-US" sz="1220" dirty="0">
                 <a:solidFill>
                   <a:srgbClr val="17364A"/>
                 </a:solidFill>
@@ -7887,9 +7891,9 @@
                 <a:ea typeface="Aptos" pitchFamily="34" charset="-122"/>
                 <a:cs typeface="Aptos" pitchFamily="34" charset="-120"/>
               </a:rPr>
-              <a:t>Workforce readiness plan; role-based competency matrix; training assignment matrix; AI bridge role.</a:t>
-            </a:r>
-            <a:endParaRPr lang="en-US" sz="1320" dirty="0"/>
+              <a:t>Workforce readiness plan; role-based competency matrix; training assignment.</a:t>
+            </a:r>
+            <a:endParaRPr lang="en-US" sz="1220" dirty="0"/>
           </a:p>
         </p:txBody>
       </p:sp>
@@ -7901,12 +7905,12 @@
         </p:nvSpPr>
         <p:spPr>
           <a:xfrm>
-            <a:off x="7635240" y="2718511"/>
-            <a:ext cx="3474720" cy="1328623"/>
+            <a:off x="7543800" y="2724912"/>
+            <a:ext cx="3611880" cy="1527048"/>
           </a:xfrm>
           <a:prstGeom prst="roundRect">
             <a:avLst>
-              <a:gd name="adj" fmla="val 8259"/>
+              <a:gd name="adj" fmla="val 7186"/>
             </a:avLst>
           </a:prstGeom>
           <a:solidFill>
@@ -7928,8 +7932,8 @@
         </p:nvSpPr>
         <p:spPr>
           <a:xfrm>
-            <a:off x="7799832" y="2864815"/>
-            <a:ext cx="3145536" cy="256032"/>
+            <a:off x="7708392" y="2852928"/>
+            <a:ext cx="3282696" cy="228600"/>
           </a:xfrm>
           <a:prstGeom prst="rect">
             <a:avLst/>
@@ -7945,7 +7949,7 @@
               <a:buNone/>
             </a:pPr>
             <a:r>
-              <a:rPr lang="en-US" sz="1300" b="1" dirty="0">
+              <a:rPr lang="en-US" sz="1220" b="1" dirty="0">
                 <a:solidFill>
                   <a:srgbClr val="0068B7"/>
                 </a:solidFill>
@@ -7955,7 +7959,7 @@
               </a:rPr>
               <a:t>Concept checkpoints</a:t>
             </a:r>
-            <a:endParaRPr lang="en-US" sz="1300" dirty="0"/>
+            <a:endParaRPr lang="en-US" sz="1220" dirty="0"/>
           </a:p>
         </p:txBody>
       </p:sp>
@@ -7967,8 +7971,8 @@
         </p:nvSpPr>
         <p:spPr>
           <a:xfrm>
-            <a:off x="7818120" y="3230575"/>
-            <a:ext cx="3090672" cy="670255"/>
+            <a:off x="7726680" y="3182112"/>
+            <a:ext cx="3227832" cy="960120"/>
           </a:xfrm>
           <a:prstGeom prst="rect">
             <a:avLst/>
@@ -7986,7 +7990,7 @@
               <a:buNone/>
             </a:pPr>
             <a:r>
-              <a:rPr lang="en-US" sz="1220" dirty="0">
+              <a:rPr lang="en-US" sz="1140" dirty="0">
                 <a:solidFill>
                   <a:srgbClr val="17364A"/>
                 </a:solidFill>
@@ -7994,9 +7998,9 @@
                 <a:ea typeface="Aptos" pitchFamily="34" charset="-122"/>
                 <a:cs typeface="Aptos" pitchFamily="34" charset="-120"/>
               </a:rPr>
-              <a:t>Workforce readiness plan; role-based competency matrix; training.</a:t>
-            </a:r>
-            <a:endParaRPr lang="en-US" sz="1220" dirty="0"/>
+              <a:t>Workforce readiness plan; role-based competency.</a:t>
+            </a:r>
+            <a:endParaRPr lang="en-US" sz="1140" dirty="0"/>
           </a:p>
         </p:txBody>
       </p:sp>
@@ -8008,12 +8012,12 @@
         </p:nvSpPr>
         <p:spPr>
           <a:xfrm>
-            <a:off x="7635240" y="4184294"/>
-            <a:ext cx="3474720" cy="1466698"/>
+            <a:off x="7543800" y="4389120"/>
+            <a:ext cx="3611880" cy="1261872"/>
           </a:xfrm>
           <a:prstGeom prst="roundRect">
             <a:avLst>
-              <a:gd name="adj" fmla="val 7481"/>
+              <a:gd name="adj" fmla="val 8696"/>
             </a:avLst>
           </a:prstGeom>
           <a:solidFill>
@@ -8035,8 +8039,8 @@
         </p:nvSpPr>
         <p:spPr>
           <a:xfrm>
-            <a:off x="7799832" y="4330598"/>
-            <a:ext cx="3145536" cy="256032"/>
+            <a:off x="7708392" y="4517136"/>
+            <a:ext cx="3282696" cy="228600"/>
           </a:xfrm>
           <a:prstGeom prst="rect">
             <a:avLst/>
@@ -8052,7 +8056,7 @@
               <a:buNone/>
             </a:pPr>
             <a:r>
-              <a:rPr lang="en-US" sz="1300" b="1" dirty="0">
+              <a:rPr lang="en-US" sz="1220" b="1" dirty="0">
                 <a:solidFill>
                   <a:srgbClr val="0068B7"/>
                 </a:solidFill>
@@ -8062,7 +8066,7 @@
               </a:rPr>
               <a:t>Apply it</a:t>
             </a:r>
-            <a:endParaRPr lang="en-US" sz="1300" dirty="0"/>
+            <a:endParaRPr lang="en-US" sz="1220" dirty="0"/>
           </a:p>
         </p:txBody>
       </p:sp>
@@ -8074,8 +8078,8 @@
         </p:nvSpPr>
         <p:spPr>
           <a:xfrm>
-            <a:off x="7799832" y="4659782"/>
-            <a:ext cx="3145536" cy="899770"/>
+            <a:off x="7708392" y="4828032"/>
+            <a:ext cx="3282696" cy="749808"/>
           </a:xfrm>
           <a:prstGeom prst="rect">
             <a:avLst/>
@@ -8093,7 +8097,7 @@
               <a:buNone/>
             </a:pPr>
             <a:r>
-              <a:rPr lang="en-US" sz="1320" dirty="0">
+              <a:rPr lang="en-US" sz="1220" dirty="0">
                 <a:solidFill>
                   <a:srgbClr val="17364A"/>
                 </a:solidFill>
@@ -8101,9 +8105,9 @@
                 <a:ea typeface="Aptos" pitchFamily="34" charset="-122"/>
                 <a:cs typeface="Aptos" pitchFamily="34" charset="-120"/>
               </a:rPr>
-              <a:t>Connect the concept to public health purpose, responsible use, required safeguards, documentation, and the next action a department should take.</a:t>
-            </a:r>
-            <a:endParaRPr lang="en-US" sz="1320" dirty="0"/>
+              <a:t>Connect the concept to public health purpose, responsible use, required.</a:t>
+            </a:r>
+            <a:endParaRPr lang="en-US" sz="1220" dirty="0"/>
           </a:p>
         </p:txBody>
       </p:sp>
@@ -8394,8 +8398,8 @@
         </p:nvSpPr>
         <p:spPr>
           <a:xfrm>
-            <a:off x="868680" y="1508760"/>
-            <a:ext cx="6309360" cy="4160520"/>
+            <a:off x="822960" y="1463040"/>
+            <a:ext cx="6565392" cy="4343400"/>
           </a:xfrm>
           <a:prstGeom prst="rect">
             <a:avLst/>
@@ -8413,7 +8417,7 @@
               <a:buNone/>
             </a:pPr>
             <a:r>
-              <a:rPr lang="en-US" sz="2100" dirty="0">
+              <a:rPr lang="en-US" sz="1920" dirty="0">
                 <a:solidFill>
                   <a:srgbClr val="003A63"/>
                 </a:solidFill>
@@ -8421,9 +8425,9 @@
                 <a:ea typeface="Aptos" pitchFamily="34" charset="-122"/>
                 <a:cs typeface="Aptos" pitchFamily="34" charset="-120"/>
               </a:rPr>
-              <a:t>• Workforce readiness plan; role-based competency matrix; training assignment matrix; AI bridge.</a:t>
-            </a:r>
-            <a:endParaRPr lang="en-US" sz="2100" dirty="0"/>
+              <a:t>• Workforce readiness plan; role-based competency matrix; training assignment.</a:t>
+            </a:r>
+            <a:endParaRPr lang="en-US" sz="1920" dirty="0"/>
           </a:p>
         </p:txBody>
       </p:sp>
@@ -8435,12 +8439,12 @@
         </p:nvSpPr>
         <p:spPr>
           <a:xfrm>
-            <a:off x="7635240" y="1325880"/>
-            <a:ext cx="3474720" cy="1255471"/>
+            <a:off x="7543800" y="1325880"/>
+            <a:ext cx="3611880" cy="1261872"/>
           </a:xfrm>
           <a:prstGeom prst="roundRect">
             <a:avLst>
-              <a:gd name="adj" fmla="val 8740"/>
+              <a:gd name="adj" fmla="val 8696"/>
             </a:avLst>
           </a:prstGeom>
           <a:solidFill>
@@ -8462,8 +8466,8 @@
         </p:nvSpPr>
         <p:spPr>
           <a:xfrm>
-            <a:off x="7799832" y="1472184"/>
-            <a:ext cx="3145536" cy="256032"/>
+            <a:off x="7708392" y="1453896"/>
+            <a:ext cx="3282696" cy="228600"/>
           </a:xfrm>
           <a:prstGeom prst="rect">
             <a:avLst/>
@@ -8479,7 +8483,7 @@
               <a:buNone/>
             </a:pPr>
             <a:r>
-              <a:rPr lang="en-US" sz="1300" b="1" dirty="0">
+              <a:rPr lang="en-US" sz="1220" b="1" dirty="0">
                 <a:solidFill>
                   <a:srgbClr val="0068B7"/>
                 </a:solidFill>
@@ -8489,7 +8493,7 @@
               </a:rPr>
               <a:t>Practice focus</a:t>
             </a:r>
-            <a:endParaRPr lang="en-US" sz="1300" dirty="0"/>
+            <a:endParaRPr lang="en-US" sz="1220" dirty="0"/>
           </a:p>
         </p:txBody>
       </p:sp>
@@ -8501,8 +8505,8 @@
         </p:nvSpPr>
         <p:spPr>
           <a:xfrm>
-            <a:off x="7799832" y="1801368"/>
-            <a:ext cx="3145536" cy="688543"/>
+            <a:off x="7708392" y="1764792"/>
+            <a:ext cx="3282696" cy="749808"/>
           </a:xfrm>
           <a:prstGeom prst="rect">
             <a:avLst/>
@@ -8520,7 +8524,7 @@
               <a:buNone/>
             </a:pPr>
             <a:r>
-              <a:rPr lang="en-US" sz="1320" dirty="0">
+              <a:rPr lang="en-US" sz="1220" dirty="0">
                 <a:solidFill>
                   <a:srgbClr val="17364A"/>
                 </a:solidFill>
@@ -8528,9 +8532,9 @@
                 <a:ea typeface="Aptos" pitchFamily="34" charset="-122"/>
                 <a:cs typeface="Aptos" pitchFamily="34" charset="-120"/>
               </a:rPr>
-              <a:t>Workforce readiness plan; role-based competency matrix; training assignment matrix; AI bridge role.</a:t>
-            </a:r>
-            <a:endParaRPr lang="en-US" sz="1320" dirty="0"/>
+              <a:t>Workforce readiness plan; role-based competency matrix; training assignment.</a:t>
+            </a:r>
+            <a:endParaRPr lang="en-US" sz="1220" dirty="0"/>
           </a:p>
         </p:txBody>
       </p:sp>
@@ -8542,12 +8546,12 @@
         </p:nvSpPr>
         <p:spPr>
           <a:xfrm>
-            <a:off x="7635240" y="2718511"/>
-            <a:ext cx="3474720" cy="1328623"/>
+            <a:off x="7543800" y="2724912"/>
+            <a:ext cx="3611880" cy="1527048"/>
           </a:xfrm>
           <a:prstGeom prst="roundRect">
             <a:avLst>
-              <a:gd name="adj" fmla="val 8259"/>
+              <a:gd name="adj" fmla="val 7186"/>
             </a:avLst>
           </a:prstGeom>
           <a:solidFill>
@@ -8569,8 +8573,8 @@
         </p:nvSpPr>
         <p:spPr>
           <a:xfrm>
-            <a:off x="7799832" y="2864815"/>
-            <a:ext cx="3145536" cy="256032"/>
+            <a:off x="7708392" y="2852928"/>
+            <a:ext cx="3282696" cy="228600"/>
           </a:xfrm>
           <a:prstGeom prst="rect">
             <a:avLst/>
@@ -8586,7 +8590,7 @@
               <a:buNone/>
             </a:pPr>
             <a:r>
-              <a:rPr lang="en-US" sz="1300" b="1" dirty="0">
+              <a:rPr lang="en-US" sz="1220" b="1" dirty="0">
                 <a:solidFill>
                   <a:srgbClr val="0068B7"/>
                 </a:solidFill>
@@ -8596,7 +8600,7 @@
               </a:rPr>
               <a:t>Concept checkpoints</a:t>
             </a:r>
-            <a:endParaRPr lang="en-US" sz="1300" dirty="0"/>
+            <a:endParaRPr lang="en-US" sz="1220" dirty="0"/>
           </a:p>
         </p:txBody>
       </p:sp>
@@ -8608,8 +8612,8 @@
         </p:nvSpPr>
         <p:spPr>
           <a:xfrm>
-            <a:off x="7818120" y="3230575"/>
-            <a:ext cx="3090672" cy="670255"/>
+            <a:off x="7726680" y="3182112"/>
+            <a:ext cx="3227832" cy="960120"/>
           </a:xfrm>
           <a:prstGeom prst="rect">
             <a:avLst/>
@@ -8627,7 +8631,7 @@
               <a:buNone/>
             </a:pPr>
             <a:r>
-              <a:rPr lang="en-US" sz="1220" dirty="0">
+              <a:rPr lang="en-US" sz="1140" dirty="0">
                 <a:solidFill>
                   <a:srgbClr val="17364A"/>
                 </a:solidFill>
@@ -8635,9 +8639,9 @@
                 <a:ea typeface="Aptos" pitchFamily="34" charset="-122"/>
                 <a:cs typeface="Aptos" pitchFamily="34" charset="-120"/>
               </a:rPr>
-              <a:t>Workforce readiness plan; role-based competency matrix; training.</a:t>
-            </a:r>
-            <a:endParaRPr lang="en-US" sz="1220" dirty="0"/>
+              <a:t>Workforce readiness plan; role-based competency.</a:t>
+            </a:r>
+            <a:endParaRPr lang="en-US" sz="1140" dirty="0"/>
           </a:p>
         </p:txBody>
       </p:sp>
@@ -8649,12 +8653,12 @@
         </p:nvSpPr>
         <p:spPr>
           <a:xfrm>
-            <a:off x="7635240" y="4184294"/>
-            <a:ext cx="3474720" cy="1466698"/>
+            <a:off x="7543800" y="4389120"/>
+            <a:ext cx="3611880" cy="1261872"/>
           </a:xfrm>
           <a:prstGeom prst="roundRect">
             <a:avLst>
-              <a:gd name="adj" fmla="val 7481"/>
+              <a:gd name="adj" fmla="val 8696"/>
             </a:avLst>
           </a:prstGeom>
           <a:solidFill>
@@ -8676,8 +8680,8 @@
         </p:nvSpPr>
         <p:spPr>
           <a:xfrm>
-            <a:off x="7799832" y="4330598"/>
-            <a:ext cx="3145536" cy="256032"/>
+            <a:off x="7708392" y="4517136"/>
+            <a:ext cx="3282696" cy="228600"/>
           </a:xfrm>
           <a:prstGeom prst="rect">
             <a:avLst/>
@@ -8693,7 +8697,7 @@
               <a:buNone/>
             </a:pPr>
             <a:r>
-              <a:rPr lang="en-US" sz="1300" b="1" dirty="0">
+              <a:rPr lang="en-US" sz="1220" b="1" dirty="0">
                 <a:solidFill>
                   <a:srgbClr val="0068B7"/>
                 </a:solidFill>
@@ -8703,7 +8707,7 @@
               </a:rPr>
               <a:t>What to produce</a:t>
             </a:r>
-            <a:endParaRPr lang="en-US" sz="1300" dirty="0"/>
+            <a:endParaRPr lang="en-US" sz="1220" dirty="0"/>
           </a:p>
         </p:txBody>
       </p:sp>
@@ -8715,8 +8719,8 @@
         </p:nvSpPr>
         <p:spPr>
           <a:xfrm>
-            <a:off x="7799832" y="4659782"/>
-            <a:ext cx="3145536" cy="899770"/>
+            <a:off x="7708392" y="4828032"/>
+            <a:ext cx="3282696" cy="749808"/>
           </a:xfrm>
           <a:prstGeom prst="rect">
             <a:avLst/>
@@ -8734,7 +8738,7 @@
               <a:buNone/>
             </a:pPr>
             <a:r>
-              <a:rPr lang="en-US" sz="1320" dirty="0">
+              <a:rPr lang="en-US" sz="1220" dirty="0">
                 <a:solidFill>
                   <a:srgbClr val="17364A"/>
                 </a:solidFill>
@@ -8742,9 +8746,9 @@
                 <a:ea typeface="Aptos" pitchFamily="34" charset="-122"/>
                 <a:cs typeface="Aptos" pitchFamily="34" charset="-120"/>
               </a:rPr>
-              <a:t>Use the assignment to test whether you can explain the concept, apply it to a realistic public health situation, and identify what would need review before the work moves forward.</a:t>
-            </a:r>
-            <a:endParaRPr lang="en-US" sz="1320" dirty="0"/>
+              <a:t>Use the assignment to test whether you can explain the concept, apply it to a.</a:t>
+            </a:r>
+            <a:endParaRPr lang="en-US" sz="1220" dirty="0"/>
           </a:p>
         </p:txBody>
       </p:sp>
@@ -9035,8 +9039,8 @@
         </p:nvSpPr>
         <p:spPr>
           <a:xfrm>
-            <a:off x="868680" y="1508760"/>
-            <a:ext cx="6309360" cy="4160520"/>
+            <a:off x="822960" y="1463040"/>
+            <a:ext cx="6565392" cy="4343400"/>
           </a:xfrm>
           <a:prstGeom prst="rect">
             <a:avLst/>
@@ -9054,7 +9058,7 @@
               <a:buNone/>
             </a:pPr>
             <a:r>
-              <a:rPr lang="en-US" sz="2100" dirty="0">
+              <a:rPr lang="en-US" sz="1920" dirty="0">
                 <a:solidFill>
                   <a:srgbClr val="003A63"/>
                 </a:solidFill>
@@ -9062,16 +9066,16 @@
                 <a:ea typeface="Aptos" pitchFamily="34" charset="-122"/>
                 <a:cs typeface="Aptos" pitchFamily="34" charset="-120"/>
               </a:rPr>
-              <a:t>• 1. What is the strongest reason this module topic belongs in AI leadership and governance.</a:t>
-            </a:r>
-            <a:endParaRPr lang="en-US" sz="2100" dirty="0"/>
-          </a:p>
-          <a:p>
-            <a:pPr indent="0" marL="0">
-              <a:buNone/>
-            </a:pPr>
-            <a:r>
-              <a:rPr lang="en-US" sz="2100" dirty="0">
+              <a:t>• 1. What is the strongest reason this module topic belongs in AI leadership.</a:t>
+            </a:r>
+            <a:endParaRPr lang="en-US" sz="1920" dirty="0"/>
+          </a:p>
+          <a:p>
+            <a:pPr indent="0" marL="0">
+              <a:buNone/>
+            </a:pPr>
+            <a:r>
+              <a:rPr lang="en-US" sz="1920" dirty="0">
                 <a:solidFill>
                   <a:srgbClr val="003A63"/>
                 </a:solidFill>
@@ -9081,14 +9085,14 @@
               </a:rPr>
               <a:t>• 2. Which practice best supports accountable public health AI governance?</a:t>
             </a:r>
-            <a:endParaRPr lang="en-US" sz="2100" dirty="0"/>
-          </a:p>
-          <a:p>
-            <a:pPr indent="0" marL="0">
-              <a:buNone/>
-            </a:pPr>
-            <a:r>
-              <a:rPr lang="en-US" sz="2100" dirty="0">
+            <a:endParaRPr lang="en-US" sz="1920" dirty="0"/>
+          </a:p>
+          <a:p>
+            <a:pPr indent="0" marL="0">
+              <a:buNone/>
+            </a:pPr>
+            <a:r>
+              <a:rPr lang="en-US" sz="1920" dirty="0">
                 <a:solidFill>
                   <a:srgbClr val="003A63"/>
                 </a:solidFill>
@@ -9096,9 +9100,9 @@
                 <a:ea typeface="Aptos" pitchFamily="34" charset="-122"/>
                 <a:cs typeface="Aptos" pitchFamily="34" charset="-120"/>
               </a:rPr>
-              <a:t>• 3. When should an AI use case be escalated for leadership or governance review?</a:t>
-            </a:r>
-            <a:endParaRPr lang="en-US" sz="2100" dirty="0"/>
+              <a:t>• 3. When should an AI use case be escalated for leadership or governance.</a:t>
+            </a:r>
+            <a:endParaRPr lang="en-US" sz="1920" dirty="0"/>
           </a:p>
         </p:txBody>
       </p:sp>
@@ -9110,12 +9114,12 @@
         </p:nvSpPr>
         <p:spPr>
           <a:xfrm>
-            <a:off x="7635240" y="1325880"/>
-            <a:ext cx="3474720" cy="1255471"/>
+            <a:off x="7543800" y="1325880"/>
+            <a:ext cx="3611880" cy="1261872"/>
           </a:xfrm>
           <a:prstGeom prst="roundRect">
             <a:avLst>
-              <a:gd name="adj" fmla="val 8740"/>
+              <a:gd name="adj" fmla="val 8696"/>
             </a:avLst>
           </a:prstGeom>
           <a:solidFill>
@@ -9137,8 +9141,8 @@
         </p:nvSpPr>
         <p:spPr>
           <a:xfrm>
-            <a:off x="7799832" y="1472184"/>
-            <a:ext cx="3145536" cy="256032"/>
+            <a:off x="7708392" y="1453896"/>
+            <a:ext cx="3282696" cy="228600"/>
           </a:xfrm>
           <a:prstGeom prst="rect">
             <a:avLst/>
@@ -9154,7 +9158,7 @@
               <a:buNone/>
             </a:pPr>
             <a:r>
-              <a:rPr lang="en-US" sz="1300" b="1" dirty="0">
+              <a:rPr lang="en-US" sz="1220" b="1" dirty="0">
                 <a:solidFill>
                   <a:srgbClr val="0068B7"/>
                 </a:solidFill>
@@ -9164,7 +9168,7 @@
               </a:rPr>
               <a:t>Practice focus</a:t>
             </a:r>
-            <a:endParaRPr lang="en-US" sz="1300" dirty="0"/>
+            <a:endParaRPr lang="en-US" sz="1220" dirty="0"/>
           </a:p>
         </p:txBody>
       </p:sp>
@@ -9176,8 +9180,8 @@
         </p:nvSpPr>
         <p:spPr>
           <a:xfrm>
-            <a:off x="7799832" y="1801368"/>
-            <a:ext cx="3145536" cy="688543"/>
+            <a:off x="7708392" y="1764792"/>
+            <a:ext cx="3282696" cy="749808"/>
           </a:xfrm>
           <a:prstGeom prst="rect">
             <a:avLst/>
@@ -9195,7 +9199,7 @@
               <a:buNone/>
             </a:pPr>
             <a:r>
-              <a:rPr lang="en-US" sz="1320" dirty="0">
+              <a:rPr lang="en-US" sz="1220" dirty="0">
                 <a:solidFill>
                   <a:srgbClr val="17364A"/>
                 </a:solidFill>
@@ -9203,9 +9207,9 @@
                 <a:ea typeface="Aptos" pitchFamily="34" charset="-122"/>
                 <a:cs typeface="Aptos" pitchFamily="34" charset="-120"/>
               </a:rPr>
-              <a:t>1. What is the strongest reason this module topic belongs in AI leadership and governance training?</a:t>
-            </a:r>
-            <a:endParaRPr lang="en-US" sz="1320" dirty="0"/>
+              <a:t>1. What is the strongest reason this module topic belongs in AI leadership and.</a:t>
+            </a:r>
+            <a:endParaRPr lang="en-US" sz="1220" dirty="0"/>
           </a:p>
         </p:txBody>
       </p:sp>
@@ -9217,12 +9221,12 @@
         </p:nvSpPr>
         <p:spPr>
           <a:xfrm>
-            <a:off x="7635240" y="2718511"/>
-            <a:ext cx="3474720" cy="1328623"/>
+            <a:off x="7543800" y="2724912"/>
+            <a:ext cx="3611880" cy="1527048"/>
           </a:xfrm>
           <a:prstGeom prst="roundRect">
             <a:avLst>
-              <a:gd name="adj" fmla="val 8259"/>
+              <a:gd name="adj" fmla="val 7186"/>
             </a:avLst>
           </a:prstGeom>
           <a:solidFill>
@@ -9244,8 +9248,8 @@
         </p:nvSpPr>
         <p:spPr>
           <a:xfrm>
-            <a:off x="7799832" y="2864815"/>
-            <a:ext cx="3145536" cy="256032"/>
+            <a:off x="7708392" y="2852928"/>
+            <a:ext cx="3282696" cy="228600"/>
           </a:xfrm>
           <a:prstGeom prst="rect">
             <a:avLst/>
@@ -9261,7 +9265,7 @@
               <a:buNone/>
             </a:pPr>
             <a:r>
-              <a:rPr lang="en-US" sz="1300" b="1" dirty="0">
+              <a:rPr lang="en-US" sz="1220" b="1" dirty="0">
                 <a:solidFill>
                   <a:srgbClr val="0068B7"/>
                 </a:solidFill>
@@ -9271,7 +9275,7 @@
               </a:rPr>
               <a:t>Concept checkpoints</a:t>
             </a:r>
-            <a:endParaRPr lang="en-US" sz="1300" dirty="0"/>
+            <a:endParaRPr lang="en-US" sz="1220" dirty="0"/>
           </a:p>
         </p:txBody>
       </p:sp>
@@ -9283,8 +9287,8 @@
         </p:nvSpPr>
         <p:spPr>
           <a:xfrm>
-            <a:off x="7818120" y="3230575"/>
-            <a:ext cx="3090672" cy="670255"/>
+            <a:off x="7726680" y="3182112"/>
+            <a:ext cx="3227832" cy="960120"/>
           </a:xfrm>
           <a:prstGeom prst="rect">
             <a:avLst/>
@@ -9302,7 +9306,7 @@
               <a:buNone/>
             </a:pPr>
             <a:r>
-              <a:rPr lang="en-US" sz="1220" dirty="0">
+              <a:rPr lang="en-US" sz="1140" dirty="0">
                 <a:solidFill>
                   <a:srgbClr val="17364A"/>
                 </a:solidFill>
@@ -9312,14 +9316,14 @@
               </a:rPr>
               <a:t>1.</a:t>
             </a:r>
-            <a:endParaRPr lang="en-US" sz="1220" dirty="0"/>
-          </a:p>
-          <a:p>
-            <a:pPr indent="0" marL="0">
-              <a:buNone/>
-            </a:pPr>
-            <a:r>
-              <a:rPr lang="en-US" sz="1220" dirty="0">
+            <a:endParaRPr lang="en-US" sz="1140" dirty="0"/>
+          </a:p>
+          <a:p>
+            <a:pPr indent="0" marL="0">
+              <a:buNone/>
+            </a:pPr>
+            <a:r>
+              <a:rPr lang="en-US" sz="1140" dirty="0">
                 <a:solidFill>
                   <a:srgbClr val="17364A"/>
                 </a:solidFill>
@@ -9327,16 +9331,16 @@
                 <a:ea typeface="Aptos" pitchFamily="34" charset="-122"/>
                 <a:cs typeface="Aptos" pitchFamily="34" charset="-120"/>
               </a:rPr>
-              <a:t>What is the strongest reason this module topic belongs in AI.</a:t>
-            </a:r>
-            <a:endParaRPr lang="en-US" sz="1220" dirty="0"/>
-          </a:p>
-          <a:p>
-            <a:pPr indent="0" marL="0">
-              <a:buNone/>
-            </a:pPr>
-            <a:r>
-              <a:rPr lang="en-US" sz="1220" dirty="0">
+              <a:t>What is the strongest reason this module topic.</a:t>
+            </a:r>
+            <a:endParaRPr lang="en-US" sz="1140" dirty="0"/>
+          </a:p>
+          <a:p>
+            <a:pPr indent="0" marL="0">
+              <a:buNone/>
+            </a:pPr>
+            <a:r>
+              <a:rPr lang="en-US" sz="1140" dirty="0">
                 <a:solidFill>
                   <a:srgbClr val="17364A"/>
                 </a:solidFill>
@@ -9346,7 +9350,7 @@
               </a:rPr>
               <a:t>2.</a:t>
             </a:r>
-            <a:endParaRPr lang="en-US" sz="1220" dirty="0"/>
+            <a:endParaRPr lang="en-US" sz="1140" dirty="0"/>
           </a:p>
         </p:txBody>
       </p:sp>
@@ -9358,12 +9362,12 @@
         </p:nvSpPr>
         <p:spPr>
           <a:xfrm>
-            <a:off x="7635240" y="4184294"/>
-            <a:ext cx="3474720" cy="1466698"/>
+            <a:off x="7543800" y="4389120"/>
+            <a:ext cx="3611880" cy="1261872"/>
           </a:xfrm>
           <a:prstGeom prst="roundRect">
             <a:avLst>
-              <a:gd name="adj" fmla="val 7481"/>
+              <a:gd name="adj" fmla="val 8696"/>
             </a:avLst>
           </a:prstGeom>
           <a:solidFill>
@@ -9385,8 +9389,8 @@
         </p:nvSpPr>
         <p:spPr>
           <a:xfrm>
-            <a:off x="7799832" y="4330598"/>
-            <a:ext cx="3145536" cy="256032"/>
+            <a:off x="7708392" y="4517136"/>
+            <a:ext cx="3282696" cy="228600"/>
           </a:xfrm>
           <a:prstGeom prst="rect">
             <a:avLst/>
@@ -9402,7 +9406,7 @@
               <a:buNone/>
             </a:pPr>
             <a:r>
-              <a:rPr lang="en-US" sz="1300" b="1" dirty="0">
+              <a:rPr lang="en-US" sz="1220" b="1" dirty="0">
                 <a:solidFill>
                   <a:srgbClr val="0068B7"/>
                 </a:solidFill>
@@ -9412,7 +9416,7 @@
               </a:rPr>
               <a:t>What to produce</a:t>
             </a:r>
-            <a:endParaRPr lang="en-US" sz="1300" dirty="0"/>
+            <a:endParaRPr lang="en-US" sz="1220" dirty="0"/>
           </a:p>
         </p:txBody>
       </p:sp>
@@ -9424,8 +9428,8 @@
         </p:nvSpPr>
         <p:spPr>
           <a:xfrm>
-            <a:off x="7799832" y="4659782"/>
-            <a:ext cx="3145536" cy="899770"/>
+            <a:off x="7708392" y="4828032"/>
+            <a:ext cx="3282696" cy="749808"/>
           </a:xfrm>
           <a:prstGeom prst="rect">
             <a:avLst/>
@@ -9443,7 +9447,7 @@
               <a:buNone/>
             </a:pPr>
             <a:r>
-              <a:rPr lang="en-US" sz="1320" dirty="0">
+              <a:rPr lang="en-US" sz="1220" dirty="0">
                 <a:solidFill>
                   <a:srgbClr val="17364A"/>
                 </a:solidFill>
@@ -9451,9 +9455,9 @@
                 <a:ea typeface="Aptos" pitchFamily="34" charset="-122"/>
                 <a:cs typeface="Aptos" pitchFamily="34" charset="-120"/>
               </a:rPr>
-              <a:t>Use the assignment to test whether you can explain the concept, apply it to a realistic public health situation, and identify what would need review before the work moves forward.</a:t>
-            </a:r>
-            <a:endParaRPr lang="en-US" sz="1320" dirty="0"/>
+              <a:t>Use the assignment to test whether you can explain the concept, apply it to a.</a:t>
+            </a:r>
+            <a:endParaRPr lang="en-US" sz="1220" dirty="0"/>
           </a:p>
         </p:txBody>
       </p:sp>
@@ -9744,8 +9748,8 @@
         </p:nvSpPr>
         <p:spPr>
           <a:xfrm>
-            <a:off x="868680" y="1508760"/>
-            <a:ext cx="6309360" cy="4160520"/>
+            <a:off x="822960" y="1463040"/>
+            <a:ext cx="6565392" cy="4343400"/>
           </a:xfrm>
           <a:prstGeom prst="rect">
             <a:avLst/>
@@ -9763,7 +9767,7 @@
               <a:buNone/>
             </a:pPr>
             <a:r>
-              <a:rPr lang="en-US" sz="2100" dirty="0">
+              <a:rPr lang="en-US" sz="1920" dirty="0">
                 <a:solidFill>
                   <a:srgbClr val="003A63"/>
                 </a:solidFill>
@@ -9773,14 +9777,14 @@
               </a:rPr>
               <a:t>• NIST Artificial Intelligence Risk Management Framework (AI RMF 1.0):.</a:t>
             </a:r>
-            <a:endParaRPr lang="en-US" sz="2100" dirty="0"/>
-          </a:p>
-          <a:p>
-            <a:pPr indent="0" marL="0">
-              <a:buNone/>
-            </a:pPr>
-            <a:r>
-              <a:rPr lang="en-US" sz="2100" dirty="0">
+            <a:endParaRPr lang="en-US" sz="1920" dirty="0"/>
+          </a:p>
+          <a:p>
+            <a:pPr indent="0" marL="0">
+              <a:buNone/>
+            </a:pPr>
+            <a:r>
+              <a:rPr lang="en-US" sz="1920" dirty="0">
                 <a:solidFill>
                   <a:srgbClr val="003A63"/>
                 </a:solidFill>
@@ -9790,14 +9794,14 @@
               </a:rPr>
               <a:t>• NIST Generative AI Profile:.</a:t>
             </a:r>
-            <a:endParaRPr lang="en-US" sz="2100" dirty="0"/>
-          </a:p>
-          <a:p>
-            <a:pPr indent="0" marL="0">
-              <a:buNone/>
-            </a:pPr>
-            <a:r>
-              <a:rPr lang="en-US" sz="2100" dirty="0">
+            <a:endParaRPr lang="en-US" sz="1920" dirty="0"/>
+          </a:p>
+          <a:p>
+            <a:pPr indent="0" marL="0">
+              <a:buNone/>
+            </a:pPr>
+            <a:r>
+              <a:rPr lang="en-US" sz="1920" dirty="0">
                 <a:solidFill>
                   <a:srgbClr val="003A63"/>
                 </a:solidFill>
@@ -9807,7 +9811,7 @@
               </a:rPr>
               <a:t>• NIST Privacy Framework</a:t>
             </a:r>
-            <a:endParaRPr lang="en-US" sz="2100" dirty="0"/>
+            <a:endParaRPr lang="en-US" sz="1920" dirty="0"/>
           </a:p>
         </p:txBody>
       </p:sp>
@@ -9819,12 +9823,12 @@
         </p:nvSpPr>
         <p:spPr>
           <a:xfrm>
-            <a:off x="7635240" y="1325880"/>
-            <a:ext cx="3474720" cy="1207008"/>
+            <a:off x="7543800" y="1325880"/>
+            <a:ext cx="3611880" cy="1261872"/>
           </a:xfrm>
           <a:prstGeom prst="roundRect">
             <a:avLst>
-              <a:gd name="adj" fmla="val 9091"/>
+              <a:gd name="adj" fmla="val 8696"/>
             </a:avLst>
           </a:prstGeom>
           <a:solidFill>
@@ -9846,8 +9850,8 @@
         </p:nvSpPr>
         <p:spPr>
           <a:xfrm>
-            <a:off x="7799832" y="1472184"/>
-            <a:ext cx="3145536" cy="256032"/>
+            <a:off x="7708392" y="1453896"/>
+            <a:ext cx="3282696" cy="228600"/>
           </a:xfrm>
           <a:prstGeom prst="rect">
             <a:avLst/>
@@ -9863,7 +9867,7 @@
               <a:buNone/>
             </a:pPr>
             <a:r>
-              <a:rPr lang="en-US" sz="1300" b="1" dirty="0">
+              <a:rPr lang="en-US" sz="1220" b="1" dirty="0">
                 <a:solidFill>
                   <a:srgbClr val="0068B7"/>
                 </a:solidFill>
@@ -9873,7 +9877,7 @@
               </a:rPr>
               <a:t>Core concept</a:t>
             </a:r>
-            <a:endParaRPr lang="en-US" sz="1300" dirty="0"/>
+            <a:endParaRPr lang="en-US" sz="1220" dirty="0"/>
           </a:p>
         </p:txBody>
       </p:sp>
@@ -9885,8 +9889,8 @@
         </p:nvSpPr>
         <p:spPr>
           <a:xfrm>
-            <a:off x="7799832" y="1801368"/>
-            <a:ext cx="3145536" cy="640080"/>
+            <a:off x="7708392" y="1764792"/>
+            <a:ext cx="3282696" cy="749808"/>
           </a:xfrm>
           <a:prstGeom prst="rect">
             <a:avLst/>
@@ -9904,7 +9908,7 @@
               <a:buNone/>
             </a:pPr>
             <a:r>
-              <a:rPr lang="en-US" sz="1320" dirty="0">
+              <a:rPr lang="en-US" sz="1220" dirty="0">
                 <a:solidFill>
                   <a:srgbClr val="17364A"/>
                 </a:solidFill>
@@ -9914,7 +9918,7 @@
               </a:rPr>
               <a:t>NIST Artificial Intelligence Risk Management Framework (AI RMF 1.0):.</a:t>
             </a:r>
-            <a:endParaRPr lang="en-US" sz="1320" dirty="0"/>
+            <a:endParaRPr lang="en-US" sz="1220" dirty="0"/>
           </a:p>
         </p:txBody>
       </p:sp>
@@ -9926,12 +9930,12 @@
         </p:nvSpPr>
         <p:spPr>
           <a:xfrm>
-            <a:off x="7635240" y="2670048"/>
-            <a:ext cx="3474720" cy="1377086"/>
+            <a:off x="7543800" y="2724912"/>
+            <a:ext cx="3611880" cy="1527048"/>
           </a:xfrm>
           <a:prstGeom prst="roundRect">
             <a:avLst>
-              <a:gd name="adj" fmla="val 7968"/>
+              <a:gd name="adj" fmla="val 7186"/>
             </a:avLst>
           </a:prstGeom>
           <a:solidFill>
@@ -9953,8 +9957,8 @@
         </p:nvSpPr>
         <p:spPr>
           <a:xfrm>
-            <a:off x="7799832" y="2816352"/>
-            <a:ext cx="3145536" cy="256032"/>
+            <a:off x="7708392" y="2852928"/>
+            <a:ext cx="3282696" cy="228600"/>
           </a:xfrm>
           <a:prstGeom prst="rect">
             <a:avLst/>
@@ -9970,7 +9974,7 @@
               <a:buNone/>
             </a:pPr>
             <a:r>
-              <a:rPr lang="en-US" sz="1300" b="1" dirty="0">
+              <a:rPr lang="en-US" sz="1220" b="1" dirty="0">
                 <a:solidFill>
                   <a:srgbClr val="0068B7"/>
                 </a:solidFill>
@@ -9980,7 +9984,7 @@
               </a:rPr>
               <a:t>Concept checkpoints</a:t>
             </a:r>
-            <a:endParaRPr lang="en-US" sz="1300" dirty="0"/>
+            <a:endParaRPr lang="en-US" sz="1220" dirty="0"/>
           </a:p>
         </p:txBody>
       </p:sp>
@@ -9992,8 +9996,8 @@
         </p:nvSpPr>
         <p:spPr>
           <a:xfrm>
-            <a:off x="7818120" y="3182112"/>
-            <a:ext cx="3090672" cy="718718"/>
+            <a:off x="7726680" y="3182112"/>
+            <a:ext cx="3227832" cy="960120"/>
           </a:xfrm>
           <a:prstGeom prst="rect">
             <a:avLst/>
@@ -10011,7 +10015,7 @@
               <a:buNone/>
             </a:pPr>
             <a:r>
-              <a:rPr lang="en-US" sz="1220" dirty="0">
+              <a:rPr lang="en-US" sz="1140" dirty="0">
                 <a:solidFill>
                   <a:srgbClr val="17364A"/>
                 </a:solidFill>
@@ -10019,16 +10023,16 @@
                 <a:ea typeface="Aptos" pitchFamily="34" charset="-122"/>
                 <a:cs typeface="Aptos" pitchFamily="34" charset="-120"/>
               </a:rPr>
-              <a:t>NIST Artificial Intelligence Risk Management Framework (AI RMF.</a:t>
-            </a:r>
-            <a:endParaRPr lang="en-US" sz="1220" dirty="0"/>
-          </a:p>
-          <a:p>
-            <a:pPr indent="0" marL="0">
-              <a:buNone/>
-            </a:pPr>
-            <a:r>
-              <a:rPr lang="en-US" sz="1220" dirty="0">
+              <a:t>NIST Artificial Intelligence Risk Management.</a:t>
+            </a:r>
+            <a:endParaRPr lang="en-US" sz="1140" dirty="0"/>
+          </a:p>
+          <a:p>
+            <a:pPr indent="0" marL="0">
+              <a:buNone/>
+            </a:pPr>
+            <a:r>
+              <a:rPr lang="en-US" sz="1140" dirty="0">
                 <a:solidFill>
                   <a:srgbClr val="17364A"/>
                 </a:solidFill>
@@ -10036,16 +10040,16 @@
                 <a:ea typeface="Aptos" pitchFamily="34" charset="-122"/>
                 <a:cs typeface="Aptos" pitchFamily="34" charset="-120"/>
               </a:rPr>
-              <a:t>CDC Public Health Data Strategy and Data Modernization resources:.</a:t>
-            </a:r>
-            <a:endParaRPr lang="en-US" sz="1220" dirty="0"/>
-          </a:p>
-          <a:p>
-            <a:pPr indent="0" marL="0">
-              <a:buNone/>
-            </a:pPr>
-            <a:r>
-              <a:rPr lang="en-US" sz="1220" dirty="0">
+              <a:t>CDC Public Health Data Strategy and Data.</a:t>
+            </a:r>
+            <a:endParaRPr lang="en-US" sz="1140" dirty="0"/>
+          </a:p>
+          <a:p>
+            <a:pPr indent="0" marL="0">
+              <a:buNone/>
+            </a:pPr>
+            <a:r>
+              <a:rPr lang="en-US" sz="1140" dirty="0">
                 <a:solidFill>
                   <a:srgbClr val="17364A"/>
                 </a:solidFill>
@@ -10053,9 +10057,9 @@
                 <a:ea typeface="Aptos" pitchFamily="34" charset="-122"/>
                 <a:cs typeface="Aptos" pitchFamily="34" charset="-120"/>
               </a:rPr>
-              <a:t>WHO Ethics and Governance of Artificial Intelligence for Health:.</a:t>
-            </a:r>
-            <a:endParaRPr lang="en-US" sz="1220" dirty="0"/>
+              <a:t>WHO Ethics and Governance of Artificial.</a:t>
+            </a:r>
+            <a:endParaRPr lang="en-US" sz="1140" dirty="0"/>
           </a:p>
         </p:txBody>
       </p:sp>
@@ -10067,12 +10071,12 @@
         </p:nvSpPr>
         <p:spPr>
           <a:xfrm>
-            <a:off x="7635240" y="4184294"/>
-            <a:ext cx="3474720" cy="1466698"/>
+            <a:off x="7543800" y="4389120"/>
+            <a:ext cx="3611880" cy="1261872"/>
           </a:xfrm>
           <a:prstGeom prst="roundRect">
             <a:avLst>
-              <a:gd name="adj" fmla="val 7481"/>
+              <a:gd name="adj" fmla="val 8696"/>
             </a:avLst>
           </a:prstGeom>
           <a:solidFill>
@@ -10094,8 +10098,8 @@
         </p:nvSpPr>
         <p:spPr>
           <a:xfrm>
-            <a:off x="7799832" y="4330598"/>
-            <a:ext cx="3145536" cy="256032"/>
+            <a:off x="7708392" y="4517136"/>
+            <a:ext cx="3282696" cy="228600"/>
           </a:xfrm>
           <a:prstGeom prst="rect">
             <a:avLst/>
@@ -10111,7 +10115,7 @@
               <a:buNone/>
             </a:pPr>
             <a:r>
-              <a:rPr lang="en-US" sz="1300" b="1" dirty="0">
+              <a:rPr lang="en-US" sz="1220" b="1" dirty="0">
                 <a:solidFill>
                   <a:srgbClr val="0068B7"/>
                 </a:solidFill>
@@ -10121,7 +10125,7 @@
               </a:rPr>
               <a:t>Apply it</a:t>
             </a:r>
-            <a:endParaRPr lang="en-US" sz="1300" dirty="0"/>
+            <a:endParaRPr lang="en-US" sz="1220" dirty="0"/>
           </a:p>
         </p:txBody>
       </p:sp>
@@ -10133,8 +10137,8 @@
         </p:nvSpPr>
         <p:spPr>
           <a:xfrm>
-            <a:off x="7799832" y="4659782"/>
-            <a:ext cx="3145536" cy="899770"/>
+            <a:off x="7708392" y="4828032"/>
+            <a:ext cx="3282696" cy="749808"/>
           </a:xfrm>
           <a:prstGeom prst="rect">
             <a:avLst/>
@@ -10152,7 +10156,7 @@
               <a:buNone/>
             </a:pPr>
             <a:r>
-              <a:rPr lang="en-US" sz="1320" dirty="0">
+              <a:rPr lang="en-US" sz="1220" dirty="0">
                 <a:solidFill>
                   <a:srgbClr val="17364A"/>
                 </a:solidFill>
@@ -10160,9 +10164,9 @@
                 <a:ea typeface="Aptos" pitchFamily="34" charset="-122"/>
                 <a:cs typeface="Aptos" pitchFamily="34" charset="-120"/>
               </a:rPr>
-              <a:t>Connect the concept to public health purpose, responsible use, required safeguards, documentation, and the next action a department should take.</a:t>
-            </a:r>
-            <a:endParaRPr lang="en-US" sz="1320" dirty="0"/>
+              <a:t>Connect the concept to public health purpose, responsible use, required.</a:t>
+            </a:r>
+            <a:endParaRPr lang="en-US" sz="1220" dirty="0"/>
           </a:p>
         </p:txBody>
       </p:sp>
@@ -10480,7 +10484,7 @@
                 <a:ea typeface="Aptos" pitchFamily="34" charset="-122"/>
                 <a:cs typeface="Aptos" pitchFamily="34" charset="-120"/>
               </a:rPr>
-              <a:t>• AI changes the skills, roles, and collaboration patterns needed in public health agencies.</a:t>
+              <a:t>• AI changes the skills, roles, and collaboration patterns needed in public.</a:t>
             </a:r>
             <a:endParaRPr lang="en-US" sz="2100" dirty="0"/>
           </a:p>
@@ -10514,7 +10518,7 @@
                 <a:ea typeface="Aptos" pitchFamily="34" charset="-122"/>
                 <a:cs typeface="Aptos" pitchFamily="34" charset="-120"/>
               </a:rPr>
-              <a:t>• Instead, it increases the need for staff who can translate across program, data, technology,.</a:t>
+              <a:t>• Instead, it increases the need for staff who can translate across program,.</a:t>
             </a:r>
             <a:endParaRPr lang="en-US" sz="2100" dirty="0"/>
           </a:p>
@@ -10555,8 +10559,8 @@
         </p:nvSpPr>
         <p:spPr>
           <a:xfrm>
-            <a:off x="8074152" y="1563624"/>
-            <a:ext cx="2825496" cy="256032"/>
+            <a:off x="8074152" y="1545336"/>
+            <a:ext cx="2825496" cy="228600"/>
           </a:xfrm>
           <a:prstGeom prst="rect">
             <a:avLst/>
@@ -10572,7 +10576,7 @@
               <a:buNone/>
             </a:pPr>
             <a:r>
-              <a:rPr lang="en-US" sz="1300" b="1" dirty="0">
+              <a:rPr lang="en-US" sz="1220" b="1" dirty="0">
                 <a:solidFill>
                   <a:srgbClr val="0068B7"/>
                 </a:solidFill>
@@ -10582,7 +10586,7 @@
               </a:rPr>
               <a:t>Module details</a:t>
             </a:r>
-            <a:endParaRPr lang="en-US" sz="1300" dirty="0"/>
+            <a:endParaRPr lang="en-US" sz="1220" dirty="0"/>
           </a:p>
         </p:txBody>
       </p:sp>
@@ -10594,8 +10598,8 @@
         </p:nvSpPr>
         <p:spPr>
           <a:xfrm>
-            <a:off x="8074152" y="1892808"/>
-            <a:ext cx="2825496" cy="1353312"/>
+            <a:off x="8074152" y="1856232"/>
+            <a:ext cx="2825496" cy="1408176"/>
           </a:xfrm>
           <a:prstGeom prst="rect">
             <a:avLst/>
@@ -10613,7 +10617,7 @@
               <a:buNone/>
             </a:pPr>
             <a:r>
-              <a:rPr lang="en-US" sz="1320" dirty="0">
+              <a:rPr lang="en-US" sz="1220" dirty="0">
                 <a:solidFill>
                   <a:srgbClr val="17364A"/>
                 </a:solidFill>
@@ -10621,9 +10625,9 @@
                 <a:ea typeface="Aptos" pitchFamily="34" charset="-122"/>
                 <a:cs typeface="Aptos" pitchFamily="34" charset="-120"/>
               </a:rPr>
-              <a:t>Level: advanced/leadership Primary track: Public Health Executive Leadership Track Appears in tracks: governance-security</a:t>
-            </a:r>
-            <a:endParaRPr lang="en-US" sz="1320" dirty="0"/>
+              <a:t>Level: advanced/leadership Primary track: Public Health Executive Leadership.</a:t>
+            </a:r>
+            <a:endParaRPr lang="en-US" sz="1220" dirty="0"/>
           </a:p>
         </p:txBody>
       </p:sp>
@@ -10662,8 +10666,8 @@
         </p:nvSpPr>
         <p:spPr>
           <a:xfrm>
-            <a:off x="8074152" y="3822192"/>
-            <a:ext cx="2825496" cy="256032"/>
+            <a:off x="8074152" y="3803904"/>
+            <a:ext cx="2825496" cy="228600"/>
           </a:xfrm>
           <a:prstGeom prst="rect">
             <a:avLst/>
@@ -10679,7 +10683,7 @@
               <a:buNone/>
             </a:pPr>
             <a:r>
-              <a:rPr lang="en-US" sz="1300" b="1" dirty="0">
+              <a:rPr lang="en-US" sz="1220" b="1" dirty="0">
                 <a:solidFill>
                   <a:srgbClr val="0068B7"/>
                 </a:solidFill>
@@ -10689,7 +10693,7 @@
               </a:rPr>
               <a:t>Learning sequence</a:t>
             </a:r>
-            <a:endParaRPr lang="en-US" sz="1300" dirty="0"/>
+            <a:endParaRPr lang="en-US" sz="1220" dirty="0"/>
           </a:p>
         </p:txBody>
       </p:sp>
@@ -10701,8 +10705,8 @@
         </p:nvSpPr>
         <p:spPr>
           <a:xfrm>
-            <a:off x="8092440" y="4187952"/>
-            <a:ext cx="2770632" cy="1033272"/>
+            <a:off x="8092440" y="4133088"/>
+            <a:ext cx="2770632" cy="1124712"/>
           </a:xfrm>
           <a:prstGeom prst="rect">
             <a:avLst/>
@@ -10720,7 +10724,7 @@
               <a:buNone/>
             </a:pPr>
             <a:r>
-              <a:rPr lang="en-US" sz="1220" dirty="0">
+              <a:rPr lang="en-US" sz="1140" dirty="0">
                 <a:solidFill>
                   <a:srgbClr val="17364A"/>
                 </a:solidFill>
@@ -10730,14 +10734,14 @@
               </a:rPr>
               <a:t>Read the module for shared vocabulary and context.</a:t>
             </a:r>
-            <a:endParaRPr lang="en-US" sz="1220" dirty="0"/>
-          </a:p>
-          <a:p>
-            <a:pPr indent="0" marL="0">
-              <a:buNone/>
-            </a:pPr>
-            <a:r>
-              <a:rPr lang="en-US" sz="1220" dirty="0">
+            <a:endParaRPr lang="en-US" sz="1140" dirty="0"/>
+          </a:p>
+          <a:p>
+            <a:pPr indent="0" marL="0">
+              <a:buNone/>
+            </a:pPr>
+            <a:r>
+              <a:rPr lang="en-US" sz="1140" dirty="0">
                 <a:solidFill>
                   <a:srgbClr val="17364A"/>
                 </a:solidFill>
@@ -10745,16 +10749,16 @@
                 <a:ea typeface="Aptos" pitchFamily="34" charset="-122"/>
                 <a:cs typeface="Aptos" pitchFamily="34" charset="-120"/>
               </a:rPr>
-              <a:t>Complete the practical exercise to apply the concept.</a:t>
-            </a:r>
-            <a:endParaRPr lang="en-US" sz="1220" dirty="0"/>
-          </a:p>
-          <a:p>
-            <a:pPr indent="0" marL="0">
-              <a:buNone/>
-            </a:pPr>
-            <a:r>
-              <a:rPr lang="en-US" sz="1220" dirty="0">
+              <a:t>Complete the practical exercise to apply the.</a:t>
+            </a:r>
+            <a:endParaRPr lang="en-US" sz="1140" dirty="0"/>
+          </a:p>
+          <a:p>
+            <a:pPr indent="0" marL="0">
+              <a:buNone/>
+            </a:pPr>
+            <a:r>
+              <a:rPr lang="en-US" sz="1140" dirty="0">
                 <a:solidFill>
                   <a:srgbClr val="17364A"/>
                 </a:solidFill>
@@ -10764,7 +10768,7 @@
               </a:rPr>
               <a:t>Use the notes and references for deeper review.</a:t>
             </a:r>
-            <a:endParaRPr lang="en-US" sz="1220" dirty="0"/>
+            <a:endParaRPr lang="en-US" sz="1140" dirty="0"/>
           </a:p>
         </p:txBody>
       </p:sp>
@@ -11055,8 +11059,8 @@
         </p:nvSpPr>
         <p:spPr>
           <a:xfrm>
-            <a:off x="868680" y="1508760"/>
-            <a:ext cx="6309360" cy="4160520"/>
+            <a:off x="822960" y="1463040"/>
+            <a:ext cx="6565392" cy="4343400"/>
           </a:xfrm>
           <a:prstGeom prst="rect">
             <a:avLst/>
@@ -11074,7 +11078,7 @@
               <a:buNone/>
             </a:pPr>
             <a:r>
-              <a:rPr lang="en-US" sz="2100" dirty="0">
+              <a:rPr lang="en-US" sz="1920" dirty="0">
                 <a:solidFill>
                   <a:srgbClr val="003A63"/>
                 </a:solidFill>
@@ -11082,16 +11086,16 @@
                 <a:ea typeface="Aptos" pitchFamily="34" charset="-122"/>
                 <a:cs typeface="Aptos" pitchFamily="34" charset="-120"/>
               </a:rPr>
-              <a:t>• OMB Memorandum M-24-10 on federal AI governance, risk management, and innovation, where.</a:t>
-            </a:r>
-            <a:endParaRPr lang="en-US" sz="2100" dirty="0"/>
-          </a:p>
-          <a:p>
-            <a:pPr indent="0" marL="0">
-              <a:buNone/>
-            </a:pPr>
-            <a:r>
-              <a:rPr lang="en-US" sz="2100" dirty="0">
+              <a:t>• OMB Memorandum M-24-10 on federal AI governance, risk management, and.</a:t>
+            </a:r>
+            <a:endParaRPr lang="en-US" sz="1920" dirty="0"/>
+          </a:p>
+          <a:p>
+            <a:pPr indent="0" marL="0">
+              <a:buNone/>
+            </a:pPr>
+            <a:r>
+              <a:rPr lang="en-US" sz="1920" dirty="0">
                 <a:solidFill>
                   <a:srgbClr val="003A63"/>
                 </a:solidFill>
@@ -11099,9 +11103,9 @@
                 <a:ea typeface="Aptos" pitchFamily="34" charset="-122"/>
                 <a:cs typeface="Aptos" pitchFamily="34" charset="-120"/>
               </a:rPr>
-              <a:t>• Agency strategic plans, procurement policies, privacy policies, cybersecurity policies, records.</a:t>
-            </a:r>
-            <a:endParaRPr lang="en-US" sz="2100" dirty="0"/>
+              <a:t>• Agency strategic plans, procurement policies, privacy policies,.</a:t>
+            </a:r>
+            <a:endParaRPr lang="en-US" sz="1920" dirty="0"/>
           </a:p>
         </p:txBody>
       </p:sp>
@@ -11113,12 +11117,12 @@
         </p:nvSpPr>
         <p:spPr>
           <a:xfrm>
-            <a:off x="7635240" y="1325880"/>
-            <a:ext cx="3474720" cy="1255471"/>
+            <a:off x="7543800" y="1325880"/>
+            <a:ext cx="3611880" cy="1261872"/>
           </a:xfrm>
           <a:prstGeom prst="roundRect">
             <a:avLst>
-              <a:gd name="adj" fmla="val 8740"/>
+              <a:gd name="adj" fmla="val 8696"/>
             </a:avLst>
           </a:prstGeom>
           <a:solidFill>
@@ -11140,8 +11144,8 @@
         </p:nvSpPr>
         <p:spPr>
           <a:xfrm>
-            <a:off x="7799832" y="1472184"/>
-            <a:ext cx="3145536" cy="256032"/>
+            <a:off x="7708392" y="1453896"/>
+            <a:ext cx="3282696" cy="228600"/>
           </a:xfrm>
           <a:prstGeom prst="rect">
             <a:avLst/>
@@ -11157,7 +11161,7 @@
               <a:buNone/>
             </a:pPr>
             <a:r>
-              <a:rPr lang="en-US" sz="1300" b="1" dirty="0">
+              <a:rPr lang="en-US" sz="1220" b="1" dirty="0">
                 <a:solidFill>
                   <a:srgbClr val="0068B7"/>
                 </a:solidFill>
@@ -11167,7 +11171,7 @@
               </a:rPr>
               <a:t>Core concept</a:t>
             </a:r>
-            <a:endParaRPr lang="en-US" sz="1300" dirty="0"/>
+            <a:endParaRPr lang="en-US" sz="1220" dirty="0"/>
           </a:p>
         </p:txBody>
       </p:sp>
@@ -11179,8 +11183,8 @@
         </p:nvSpPr>
         <p:spPr>
           <a:xfrm>
-            <a:off x="7799832" y="1801368"/>
-            <a:ext cx="3145536" cy="688543"/>
+            <a:off x="7708392" y="1764792"/>
+            <a:ext cx="3282696" cy="749808"/>
           </a:xfrm>
           <a:prstGeom prst="rect">
             <a:avLst/>
@@ -11198,7 +11202,7 @@
               <a:buNone/>
             </a:pPr>
             <a:r>
-              <a:rPr lang="en-US" sz="1320" dirty="0">
+              <a:rPr lang="en-US" sz="1220" dirty="0">
                 <a:solidFill>
                   <a:srgbClr val="17364A"/>
                 </a:solidFill>
@@ -11206,9 +11210,9 @@
                 <a:ea typeface="Aptos" pitchFamily="34" charset="-122"/>
                 <a:cs typeface="Aptos" pitchFamily="34" charset="-120"/>
               </a:rPr>
-              <a:t>OMB Memorandum M-24-10 on federal AI governance, risk management, and innovation, where relevant to.</a:t>
-            </a:r>
-            <a:endParaRPr lang="en-US" sz="1320" dirty="0"/>
+              <a:t>OMB Memorandum M-24-10 on federal AI governance, risk management, and.</a:t>
+            </a:r>
+            <a:endParaRPr lang="en-US" sz="1220" dirty="0"/>
           </a:p>
         </p:txBody>
       </p:sp>
@@ -11220,12 +11224,12 @@
         </p:nvSpPr>
         <p:spPr>
           <a:xfrm>
-            <a:off x="7635240" y="2718511"/>
-            <a:ext cx="3474720" cy="1328623"/>
+            <a:off x="7543800" y="2724912"/>
+            <a:ext cx="3611880" cy="1527048"/>
           </a:xfrm>
           <a:prstGeom prst="roundRect">
             <a:avLst>
-              <a:gd name="adj" fmla="val 8259"/>
+              <a:gd name="adj" fmla="val 7186"/>
             </a:avLst>
           </a:prstGeom>
           <a:solidFill>
@@ -11247,8 +11251,8 @@
         </p:nvSpPr>
         <p:spPr>
           <a:xfrm>
-            <a:off x="7799832" y="2864815"/>
-            <a:ext cx="3145536" cy="256032"/>
+            <a:off x="7708392" y="2852928"/>
+            <a:ext cx="3282696" cy="228600"/>
           </a:xfrm>
           <a:prstGeom prst="rect">
             <a:avLst/>
@@ -11264,7 +11268,7 @@
               <a:buNone/>
             </a:pPr>
             <a:r>
-              <a:rPr lang="en-US" sz="1300" b="1" dirty="0">
+              <a:rPr lang="en-US" sz="1220" b="1" dirty="0">
                 <a:solidFill>
                   <a:srgbClr val="0068B7"/>
                 </a:solidFill>
@@ -11274,7 +11278,7 @@
               </a:rPr>
               <a:t>Concept checkpoints</a:t>
             </a:r>
-            <a:endParaRPr lang="en-US" sz="1300" dirty="0"/>
+            <a:endParaRPr lang="en-US" sz="1220" dirty="0"/>
           </a:p>
         </p:txBody>
       </p:sp>
@@ -11286,8 +11290,8 @@
         </p:nvSpPr>
         <p:spPr>
           <a:xfrm>
-            <a:off x="7818120" y="3230575"/>
-            <a:ext cx="3090672" cy="670255"/>
+            <a:off x="7726680" y="3182112"/>
+            <a:ext cx="3227832" cy="960120"/>
           </a:xfrm>
           <a:prstGeom prst="rect">
             <a:avLst/>
@@ -11305,7 +11309,7 @@
               <a:buNone/>
             </a:pPr>
             <a:r>
-              <a:rPr lang="en-US" sz="1220" dirty="0">
+              <a:rPr lang="en-US" sz="1140" dirty="0">
                 <a:solidFill>
                   <a:srgbClr val="17364A"/>
                 </a:solidFill>
@@ -11313,16 +11317,16 @@
                 <a:ea typeface="Aptos" pitchFamily="34" charset="-122"/>
                 <a:cs typeface="Aptos" pitchFamily="34" charset="-120"/>
               </a:rPr>
-              <a:t>OMB Memorandum M-24-10 on federal AI governance, risk management,.</a:t>
-            </a:r>
-            <a:endParaRPr lang="en-US" sz="1220" dirty="0"/>
-          </a:p>
-          <a:p>
-            <a:pPr indent="0" marL="0">
-              <a:buNone/>
-            </a:pPr>
-            <a:r>
-              <a:rPr lang="en-US" sz="1220" dirty="0">
+              <a:t>OMB Memorandum M-24-10 on federal AI governance,.</a:t>
+            </a:r>
+            <a:endParaRPr lang="en-US" sz="1140" dirty="0"/>
+          </a:p>
+          <a:p>
+            <a:pPr indent="0" marL="0">
+              <a:buNone/>
+            </a:pPr>
+            <a:r>
+              <a:rPr lang="en-US" sz="1140" dirty="0">
                 <a:solidFill>
                   <a:srgbClr val="17364A"/>
                 </a:solidFill>
@@ -11330,9 +11334,9 @@
                 <a:ea typeface="Aptos" pitchFamily="34" charset="-122"/>
                 <a:cs typeface="Aptos" pitchFamily="34" charset="-120"/>
               </a:rPr>
-              <a:t>Agency strategic plans, procurement policies, privacy policies,.</a:t>
-            </a:r>
-            <a:endParaRPr lang="en-US" sz="1220" dirty="0"/>
+              <a:t>Agency strategic plans, procurement policies,.</a:t>
+            </a:r>
+            <a:endParaRPr lang="en-US" sz="1140" dirty="0"/>
           </a:p>
         </p:txBody>
       </p:sp>
@@ -11344,12 +11348,12 @@
         </p:nvSpPr>
         <p:spPr>
           <a:xfrm>
-            <a:off x="7635240" y="4184294"/>
-            <a:ext cx="3474720" cy="1466698"/>
+            <a:off x="7543800" y="4389120"/>
+            <a:ext cx="3611880" cy="1261872"/>
           </a:xfrm>
           <a:prstGeom prst="roundRect">
             <a:avLst>
-              <a:gd name="adj" fmla="val 7481"/>
+              <a:gd name="adj" fmla="val 8696"/>
             </a:avLst>
           </a:prstGeom>
           <a:solidFill>
@@ -11371,8 +11375,8 @@
         </p:nvSpPr>
         <p:spPr>
           <a:xfrm>
-            <a:off x="7799832" y="4330598"/>
-            <a:ext cx="3145536" cy="256032"/>
+            <a:off x="7708392" y="4517136"/>
+            <a:ext cx="3282696" cy="228600"/>
           </a:xfrm>
           <a:prstGeom prst="rect">
             <a:avLst/>
@@ -11388,7 +11392,7 @@
               <a:buNone/>
             </a:pPr>
             <a:r>
-              <a:rPr lang="en-US" sz="1300" b="1" dirty="0">
+              <a:rPr lang="en-US" sz="1220" b="1" dirty="0">
                 <a:solidFill>
                   <a:srgbClr val="0068B7"/>
                 </a:solidFill>
@@ -11398,7 +11402,7 @@
               </a:rPr>
               <a:t>Apply it</a:t>
             </a:r>
-            <a:endParaRPr lang="en-US" sz="1300" dirty="0"/>
+            <a:endParaRPr lang="en-US" sz="1220" dirty="0"/>
           </a:p>
         </p:txBody>
       </p:sp>
@@ -11410,8 +11414,8 @@
         </p:nvSpPr>
         <p:spPr>
           <a:xfrm>
-            <a:off x="7799832" y="4659782"/>
-            <a:ext cx="3145536" cy="899770"/>
+            <a:off x="7708392" y="4828032"/>
+            <a:ext cx="3282696" cy="749808"/>
           </a:xfrm>
           <a:prstGeom prst="rect">
             <a:avLst/>
@@ -11429,7 +11433,7 @@
               <a:buNone/>
             </a:pPr>
             <a:r>
-              <a:rPr lang="en-US" sz="1320" dirty="0">
+              <a:rPr lang="en-US" sz="1220" dirty="0">
                 <a:solidFill>
                   <a:srgbClr val="17364A"/>
                 </a:solidFill>
@@ -11437,9 +11441,9 @@
                 <a:ea typeface="Aptos" pitchFamily="34" charset="-122"/>
                 <a:cs typeface="Aptos" pitchFamily="34" charset="-120"/>
               </a:rPr>
-              <a:t>Connect the concept to public health purpose, responsible use, required safeguards, documentation, and the next action a department should take.</a:t>
-            </a:r>
-            <a:endParaRPr lang="en-US" sz="1320" dirty="0"/>
+              <a:t>Connect the concept to public health purpose, responsible use, required.</a:t>
+            </a:r>
+            <a:endParaRPr lang="en-US" sz="1220" dirty="0"/>
           </a:p>
         </p:txBody>
       </p:sp>
@@ -11757,7 +11761,7 @@
                 <a:ea typeface="Aptos" pitchFamily="34" charset="-122"/>
                 <a:cs typeface="Aptos" pitchFamily="34" charset="-120"/>
               </a:rPr>
-              <a:t>• Play 11: Build and Deploy AI Solutions - This lesson informs Play 11 by helping learners.</a:t>
+              <a:t>• Play 11: Build and Deploy AI Solutions - This lesson informs Play 11 by.</a:t>
             </a:r>
             <a:endParaRPr lang="en-US" sz="1900" dirty="0"/>
           </a:p>
@@ -11774,7 +11778,7 @@
                 <a:ea typeface="Aptos" pitchFamily="34" charset="-122"/>
                 <a:cs typeface="Aptos" pitchFamily="34" charset="-120"/>
               </a:rPr>
-              <a:t>• Play 2: Readiness Assessment - This lesson informs Play 2 by helping learners connect the.</a:t>
+              <a:t>• Play 2: Readiness Assessment - This lesson informs Play 2 by helping.</a:t>
             </a:r>
             <a:endParaRPr lang="en-US" sz="1900" dirty="0"/>
           </a:p>
@@ -11791,7 +11795,7 @@
                 <a:ea typeface="Aptos" pitchFamily="34" charset="-122"/>
                 <a:cs typeface="Aptos" pitchFamily="34" charset="-120"/>
               </a:rPr>
-              <a:t>• Play 3: Establish AI Governance - This lesson informs Play 3 by helping learners connect the.</a:t>
+              <a:t>• Play 3: Establish AI Governance - This lesson informs Play 3 by helping.</a:t>
             </a:r>
             <a:endParaRPr lang="en-US" sz="1900" dirty="0"/>
           </a:p>
@@ -11808,7 +11812,7 @@
                 <a:ea typeface="Aptos" pitchFamily="34" charset="-122"/>
                 <a:cs typeface="Aptos" pitchFamily="34" charset="-120"/>
               </a:rPr>
-              <a:t>• Play 1: Vision &amp; Guardrails - This lesson informs Play 1 by helping learners connect the.</a:t>
+              <a:t>• Play 1: Vision &amp; Guardrails - This lesson informs Play 1 by helping learners.</a:t>
             </a:r>
             <a:endParaRPr lang="en-US" sz="1900" dirty="0"/>
           </a:p>
@@ -11849,8 +11853,8 @@
         </p:nvSpPr>
         <p:spPr>
           <a:xfrm>
-            <a:off x="8211312" y="1563624"/>
-            <a:ext cx="2734056" cy="256032"/>
+            <a:off x="8211312" y="1545336"/>
+            <a:ext cx="2734056" cy="228600"/>
           </a:xfrm>
           <a:prstGeom prst="rect">
             <a:avLst/>
@@ -11866,7 +11870,7 @@
               <a:buNone/>
             </a:pPr>
             <a:r>
-              <a:rPr lang="en-US" sz="1300" b="1" dirty="0">
+              <a:rPr lang="en-US" sz="1220" b="1" dirty="0">
                 <a:solidFill>
                   <a:srgbClr val="0068B7"/>
                 </a:solidFill>
@@ -11876,7 +11880,7 @@
               </a:rPr>
               <a:t>Apply the lesson</a:t>
             </a:r>
-            <a:endParaRPr lang="en-US" sz="1300" dirty="0"/>
+            <a:endParaRPr lang="en-US" sz="1220" dirty="0"/>
           </a:p>
         </p:txBody>
       </p:sp>
@@ -11888,8 +11892,8 @@
         </p:nvSpPr>
         <p:spPr>
           <a:xfrm>
-            <a:off x="8211312" y="1892808"/>
-            <a:ext cx="2734056" cy="1536192"/>
+            <a:off x="8211312" y="1856232"/>
+            <a:ext cx="2734056" cy="1591056"/>
           </a:xfrm>
           <a:prstGeom prst="rect">
             <a:avLst/>
@@ -11907,7 +11911,7 @@
               <a:buNone/>
             </a:pPr>
             <a:r>
-              <a:rPr lang="en-US" sz="1320" dirty="0">
+              <a:rPr lang="en-US" sz="1220" dirty="0">
                 <a:solidFill>
                   <a:srgbClr val="17364A"/>
                 </a:solidFill>
@@ -11915,9 +11919,9 @@
                 <a:ea typeface="Aptos" pitchFamily="34" charset="-122"/>
                 <a:cs typeface="Aptos" pitchFamily="34" charset="-120"/>
               </a:rPr>
-              <a:t>Use the related plays to identify decisions, participants, timing, approvals, and documentation needed for responsible implementation.</a:t>
-            </a:r>
-            <a:endParaRPr lang="en-US" sz="1320" dirty="0"/>
+              <a:t>Use the related plays to identify decisions, participants, timing, approvals,.</a:t>
+            </a:r>
+            <a:endParaRPr lang="en-US" sz="1220" dirty="0"/>
           </a:p>
         </p:txBody>
       </p:sp>
@@ -11956,8 +11960,8 @@
         </p:nvSpPr>
         <p:spPr>
           <a:xfrm>
-            <a:off x="8211312" y="3941064"/>
-            <a:ext cx="2734056" cy="256032"/>
+            <a:off x="8211312" y="3922776"/>
+            <a:ext cx="2734056" cy="228600"/>
           </a:xfrm>
           <a:prstGeom prst="rect">
             <a:avLst/>
@@ -11973,7 +11977,7 @@
               <a:buNone/>
             </a:pPr>
             <a:r>
-              <a:rPr lang="en-US" sz="1300" b="1" dirty="0">
+              <a:rPr lang="en-US" sz="1220" b="1" dirty="0">
                 <a:solidFill>
                   <a:srgbClr val="0068B7"/>
                 </a:solidFill>
@@ -11983,7 +11987,7 @@
               </a:rPr>
               <a:t>Use the play links to</a:t>
             </a:r>
-            <a:endParaRPr lang="en-US" sz="1300" dirty="0"/>
+            <a:endParaRPr lang="en-US" sz="1220" dirty="0"/>
           </a:p>
         </p:txBody>
       </p:sp>
@@ -11995,8 +11999,8 @@
         </p:nvSpPr>
         <p:spPr>
           <a:xfrm>
-            <a:off x="8229600" y="4306824"/>
-            <a:ext cx="2679192" cy="941832"/>
+            <a:off x="8229600" y="4251960"/>
+            <a:ext cx="2679192" cy="1033272"/>
           </a:xfrm>
           <a:prstGeom prst="rect">
             <a:avLst/>
@@ -12014,7 +12018,7 @@
               <a:buNone/>
             </a:pPr>
             <a:r>
-              <a:rPr lang="en-US" sz="1220" dirty="0">
+              <a:rPr lang="en-US" sz="1140" dirty="0">
                 <a:solidFill>
                   <a:srgbClr val="17364A"/>
                 </a:solidFill>
@@ -12024,14 +12028,14 @@
               </a:rPr>
               <a:t>Locate the decision point in the playbook sequence.</a:t>
             </a:r>
-            <a:endParaRPr lang="en-US" sz="1220" dirty="0"/>
-          </a:p>
-          <a:p>
-            <a:pPr indent="0" marL="0">
-              <a:buNone/>
-            </a:pPr>
-            <a:r>
-              <a:rPr lang="en-US" sz="1220" dirty="0">
+            <a:endParaRPr lang="en-US" sz="1140" dirty="0"/>
+          </a:p>
+          <a:p>
+            <a:pPr indent="0" marL="0">
+              <a:buNone/>
+            </a:pPr>
+            <a:r>
+              <a:rPr lang="en-US" sz="1140" dirty="0">
                 <a:solidFill>
                   <a:srgbClr val="17364A"/>
                 </a:solidFill>
@@ -12041,14 +12045,14 @@
               </a:rPr>
               <a:t>Identify who should participate in the work.</a:t>
             </a:r>
-            <a:endParaRPr lang="en-US" sz="1220" dirty="0"/>
-          </a:p>
-          <a:p>
-            <a:pPr indent="0" marL="0">
-              <a:buNone/>
-            </a:pPr>
-            <a:r>
-              <a:rPr lang="en-US" sz="1220" dirty="0">
+            <a:endParaRPr lang="en-US" sz="1140" dirty="0"/>
+          </a:p>
+          <a:p>
+            <a:pPr indent="0" marL="0">
+              <a:buNone/>
+            </a:pPr>
+            <a:r>
+              <a:rPr lang="en-US" sz="1140" dirty="0">
                 <a:solidFill>
                   <a:srgbClr val="17364A"/>
                 </a:solidFill>
@@ -12056,9 +12060,9 @@
                 <a:ea typeface="Aptos" pitchFamily="34" charset="-122"/>
                 <a:cs typeface="Aptos" pitchFamily="34" charset="-120"/>
               </a:rPr>
-              <a:t>Document the review, approval, or implementation step.</a:t>
-            </a:r>
-            <a:endParaRPr lang="en-US" sz="1220" dirty="0"/>
+              <a:t>Document the review, approval, or implementation.</a:t>
+            </a:r>
+            <a:endParaRPr lang="en-US" sz="1140" dirty="0"/>
           </a:p>
         </p:txBody>
       </p:sp>
@@ -12376,7 +12380,7 @@
                 <a:ea typeface="Aptos" pitchFamily="34" charset="-122"/>
                 <a:cs typeface="Aptos" pitchFamily="34" charset="-120"/>
               </a:rPr>
-              <a:t>• Tool 4: AI Policy Landscape Scan (Worksheet) - Use AI Policy Landscape Scan to translate this.</a:t>
+              <a:t>• Tool 4: AI Policy Landscape Scan (Worksheet) - Use AI Policy Landscape Scan.</a:t>
             </a:r>
             <a:endParaRPr lang="en-US" sz="1850" dirty="0"/>
           </a:p>
@@ -12393,7 +12397,7 @@
                 <a:ea typeface="Aptos" pitchFamily="34" charset="-122"/>
                 <a:cs typeface="Aptos" pitchFamily="34" charset="-120"/>
               </a:rPr>
-              <a:t>• Tool 5: AI Environmental and Resource Impact Review (Checklist) - Use AI Environmental and.</a:t>
+              <a:t>• Tool 5: AI Environmental and Resource Impact Review (Checklist) - Use AI.</a:t>
             </a:r>
             <a:endParaRPr lang="en-US" sz="1850" dirty="0"/>
           </a:p>
@@ -12410,7 +12414,7 @@
                 <a:ea typeface="Aptos" pitchFamily="34" charset="-122"/>
                 <a:cs typeface="Aptos" pitchFamily="34" charset="-120"/>
               </a:rPr>
-              <a:t>• Tool 6: Human-Centered AI Decision Rule Checklist (Checklist) - Use Human-Centered AI Decision.</a:t>
+              <a:t>• Tool 6: Human-Centered AI Decision Rule Checklist (Checklist) - Use.</a:t>
             </a:r>
             <a:endParaRPr lang="en-US" sz="1850" dirty="0"/>
           </a:p>
@@ -12427,7 +12431,7 @@
                 <a:ea typeface="Aptos" pitchFamily="34" charset="-122"/>
                 <a:cs typeface="Aptos" pitchFamily="34" charset="-120"/>
               </a:rPr>
-              <a:t>• Tool 8: AI Project Charter (Planning) - Use AI Project Charter to translate this lesson into a.</a:t>
+              <a:t>• Tool 8: AI Project Charter (Planning) - Use AI Project Charter to translate.</a:t>
             </a:r>
             <a:endParaRPr lang="en-US" sz="1850" dirty="0"/>
           </a:p>
@@ -12468,8 +12472,8 @@
         </p:nvSpPr>
         <p:spPr>
           <a:xfrm>
-            <a:off x="8211312" y="1563624"/>
-            <a:ext cx="2734056" cy="256032"/>
+            <a:off x="8211312" y="1545336"/>
+            <a:ext cx="2734056" cy="228600"/>
           </a:xfrm>
           <a:prstGeom prst="rect">
             <a:avLst/>
@@ -12485,7 +12489,7 @@
               <a:buNone/>
             </a:pPr>
             <a:r>
-              <a:rPr lang="en-US" sz="1300" b="1" dirty="0">
+              <a:rPr lang="en-US" sz="1220" b="1" dirty="0">
                 <a:solidFill>
                   <a:srgbClr val="0068B7"/>
                 </a:solidFill>
@@ -12495,7 +12499,7 @@
               </a:rPr>
               <a:t>Use the tools</a:t>
             </a:r>
-            <a:endParaRPr lang="en-US" sz="1300" dirty="0"/>
+            <a:endParaRPr lang="en-US" sz="1220" dirty="0"/>
           </a:p>
         </p:txBody>
       </p:sp>
@@ -12507,8 +12511,8 @@
         </p:nvSpPr>
         <p:spPr>
           <a:xfrm>
-            <a:off x="8211312" y="1892808"/>
-            <a:ext cx="2734056" cy="1536192"/>
+            <a:off x="8211312" y="1856232"/>
+            <a:ext cx="2734056" cy="1591056"/>
           </a:xfrm>
           <a:prstGeom prst="rect">
             <a:avLst/>
@@ -12526,7 +12530,7 @@
               <a:buNone/>
             </a:pPr>
             <a:r>
-              <a:rPr lang="en-US" sz="1320" dirty="0">
+              <a:rPr lang="en-US" sz="1220" dirty="0">
                 <a:solidFill>
                   <a:srgbClr val="17364A"/>
                 </a:solidFill>
@@ -12534,9 +12538,9 @@
                 <a:ea typeface="Aptos" pitchFamily="34" charset="-122"/>
                 <a:cs typeface="Aptos" pitchFamily="34" charset="-120"/>
               </a:rPr>
-              <a:t>Use linked tools when your department needs a structured worksheet, template, checklist, review process, or documentation artifact.</a:t>
-            </a:r>
-            <a:endParaRPr lang="en-US" sz="1320" dirty="0"/>
+              <a:t>Use linked tools when your department needs a structured worksheet, template,.</a:t>
+            </a:r>
+            <a:endParaRPr lang="en-US" sz="1220" dirty="0"/>
           </a:p>
         </p:txBody>
       </p:sp>
@@ -12575,8 +12579,8 @@
         </p:nvSpPr>
         <p:spPr>
           <a:xfrm>
-            <a:off x="8211312" y="3941064"/>
-            <a:ext cx="2734056" cy="256032"/>
+            <a:off x="8211312" y="3922776"/>
+            <a:ext cx="2734056" cy="228600"/>
           </a:xfrm>
           <a:prstGeom prst="rect">
             <a:avLst/>
@@ -12592,7 +12596,7 @@
               <a:buNone/>
             </a:pPr>
             <a:r>
-              <a:rPr lang="en-US" sz="1300" b="1" dirty="0">
+              <a:rPr lang="en-US" sz="1220" b="1" dirty="0">
                 <a:solidFill>
                   <a:srgbClr val="0068B7"/>
                 </a:solidFill>
@@ -12602,7 +12606,7 @@
               </a:rPr>
               <a:t>Tool selection cues</a:t>
             </a:r>
-            <a:endParaRPr lang="en-US" sz="1300" dirty="0"/>
+            <a:endParaRPr lang="en-US" sz="1220" dirty="0"/>
           </a:p>
         </p:txBody>
       </p:sp>
@@ -12614,8 +12618,8 @@
         </p:nvSpPr>
         <p:spPr>
           <a:xfrm>
-            <a:off x="8229600" y="4306824"/>
-            <a:ext cx="2679192" cy="941832"/>
+            <a:off x="8229600" y="4251960"/>
+            <a:ext cx="2679192" cy="1033272"/>
           </a:xfrm>
           <a:prstGeom prst="rect">
             <a:avLst/>
@@ -12633,7 +12637,7 @@
               <a:buNone/>
             </a:pPr>
             <a:r>
-              <a:rPr lang="en-US" sz="1220" dirty="0">
+              <a:rPr lang="en-US" sz="1140" dirty="0">
                 <a:solidFill>
                   <a:srgbClr val="17364A"/>
                 </a:solidFill>
@@ -12643,14 +12647,14 @@
               </a:rPr>
               <a:t>Use a tool when no comparable local process exists.</a:t>
             </a:r>
-            <a:endParaRPr lang="en-US" sz="1220" dirty="0"/>
-          </a:p>
-          <a:p>
-            <a:pPr indent="0" marL="0">
-              <a:buNone/>
-            </a:pPr>
-            <a:r>
-              <a:rPr lang="en-US" sz="1220" dirty="0">
+            <a:endParaRPr lang="en-US" sz="1140" dirty="0"/>
+          </a:p>
+          <a:p>
+            <a:pPr indent="0" marL="0">
+              <a:buNone/>
+            </a:pPr>
+            <a:r>
+              <a:rPr lang="en-US" sz="1140" dirty="0">
                 <a:solidFill>
                   <a:srgbClr val="17364A"/>
                 </a:solidFill>
@@ -12658,16 +12662,16 @@
                 <a:ea typeface="Aptos" pitchFamily="34" charset="-122"/>
                 <a:cs typeface="Aptos" pitchFamily="34" charset="-120"/>
               </a:rPr>
-              <a:t>Adapt existing department templates when they already fit the.</a:t>
-            </a:r>
-            <a:endParaRPr lang="en-US" sz="1220" dirty="0"/>
-          </a:p>
-          <a:p>
-            <a:pPr indent="0" marL="0">
-              <a:buNone/>
-            </a:pPr>
-            <a:r>
-              <a:rPr lang="en-US" sz="1220" dirty="0">
+              <a:t>Adapt existing department templates when they.</a:t>
+            </a:r>
+            <a:endParaRPr lang="en-US" sz="1140" dirty="0"/>
+          </a:p>
+          <a:p>
+            <a:pPr indent="0" marL="0">
+              <a:buNone/>
+            </a:pPr>
+            <a:r>
+              <a:rPr lang="en-US" sz="1140" dirty="0">
                 <a:solidFill>
                   <a:srgbClr val="17364A"/>
                 </a:solidFill>
@@ -12675,9 +12679,9 @@
                 <a:ea typeface="Aptos" pitchFamily="34" charset="-122"/>
                 <a:cs typeface="Aptos" pitchFamily="34" charset="-120"/>
               </a:rPr>
-              <a:t>Save the completed artifact as evidence of the decision.</a:t>
-            </a:r>
-            <a:endParaRPr lang="en-US" sz="1220" dirty="0"/>
+              <a:t>Save the completed artifact as evidence of the.</a:t>
+            </a:r>
+            <a:endParaRPr lang="en-US" sz="1140" dirty="0"/>
           </a:p>
         </p:txBody>
       </p:sp>
@@ -12968,8 +12972,8 @@
         </p:nvSpPr>
         <p:spPr>
           <a:xfrm>
-            <a:off x="868680" y="1508760"/>
-            <a:ext cx="6309360" cy="4160520"/>
+            <a:off x="822960" y="1463040"/>
+            <a:ext cx="6565392" cy="4343400"/>
           </a:xfrm>
           <a:prstGeom prst="rect">
             <a:avLst/>
@@ -12987,7 +12991,7 @@
               <a:buNone/>
             </a:pPr>
             <a:r>
-              <a:rPr lang="en-US" sz="2100" dirty="0">
+              <a:rPr lang="en-US" sz="1920" dirty="0">
                 <a:solidFill>
                   <a:srgbClr val="003A63"/>
                 </a:solidFill>
@@ -12997,14 +13001,14 @@
               </a:rPr>
               <a:t>• Identify workforce roles needed for responsible AI adoption in public health.</a:t>
             </a:r>
-            <a:endParaRPr lang="en-US" sz="2100" dirty="0"/>
-          </a:p>
-          <a:p>
-            <a:pPr indent="0" marL="0">
-              <a:buNone/>
-            </a:pPr>
-            <a:r>
-              <a:rPr lang="en-US" sz="2100" dirty="0">
+            <a:endParaRPr lang="en-US" sz="1920" dirty="0"/>
+          </a:p>
+          <a:p>
+            <a:pPr indent="0" marL="0">
+              <a:buNone/>
+            </a:pPr>
+            <a:r>
+              <a:rPr lang="en-US" sz="1920" dirty="0">
                 <a:solidFill>
                   <a:srgbClr val="003A63"/>
                 </a:solidFill>
@@ -13012,16 +13016,16 @@
                 <a:ea typeface="Aptos" pitchFamily="34" charset="-122"/>
                 <a:cs typeface="Aptos" pitchFamily="34" charset="-120"/>
               </a:rPr>
-              <a:t>• Distinguish between AI users, reviewers, implementers, governance participants, and.</a:t>
-            </a:r>
-            <a:endParaRPr lang="en-US" sz="2100" dirty="0"/>
-          </a:p>
-          <a:p>
-            <a:pPr indent="0" marL="0">
-              <a:buNone/>
-            </a:pPr>
-            <a:r>
-              <a:rPr lang="en-US" sz="2100" dirty="0">
+              <a:t>• Distinguish between AI users, reviewers, implementers, governance.</a:t>
+            </a:r>
+            <a:endParaRPr lang="en-US" sz="1920" dirty="0"/>
+          </a:p>
+          <a:p>
+            <a:pPr indent="0" marL="0">
+              <a:buNone/>
+            </a:pPr>
+            <a:r>
+              <a:rPr lang="en-US" sz="1920" dirty="0">
                 <a:solidFill>
                   <a:srgbClr val="003A63"/>
                 </a:solidFill>
@@ -13031,7 +13035,7 @@
               </a:rPr>
               <a:t>• Develop role-based competency expectations for AI-supported work.</a:t>
             </a:r>
-            <a:endParaRPr lang="en-US" sz="2100" dirty="0"/>
+            <a:endParaRPr lang="en-US" sz="1920" dirty="0"/>
           </a:p>
         </p:txBody>
       </p:sp>
@@ -13043,12 +13047,12 @@
         </p:nvSpPr>
         <p:spPr>
           <a:xfrm>
-            <a:off x="7635240" y="1325880"/>
-            <a:ext cx="3474720" cy="1207008"/>
+            <a:off x="7543800" y="1325880"/>
+            <a:ext cx="3611880" cy="1261872"/>
           </a:xfrm>
           <a:prstGeom prst="roundRect">
             <a:avLst>
-              <a:gd name="adj" fmla="val 9091"/>
+              <a:gd name="adj" fmla="val 8696"/>
             </a:avLst>
           </a:prstGeom>
           <a:solidFill>
@@ -13070,8 +13074,8 @@
         </p:nvSpPr>
         <p:spPr>
           <a:xfrm>
-            <a:off x="7799832" y="1472184"/>
-            <a:ext cx="3145536" cy="256032"/>
+            <a:off x="7708392" y="1453896"/>
+            <a:ext cx="3282696" cy="228600"/>
           </a:xfrm>
           <a:prstGeom prst="rect">
             <a:avLst/>
@@ -13087,7 +13091,7 @@
               <a:buNone/>
             </a:pPr>
             <a:r>
-              <a:rPr lang="en-US" sz="1300" b="1" dirty="0">
+              <a:rPr lang="en-US" sz="1220" b="1" dirty="0">
                 <a:solidFill>
                   <a:srgbClr val="0068B7"/>
                 </a:solidFill>
@@ -13097,7 +13101,7 @@
               </a:rPr>
               <a:t>Practice focus</a:t>
             </a:r>
-            <a:endParaRPr lang="en-US" sz="1300" dirty="0"/>
+            <a:endParaRPr lang="en-US" sz="1220" dirty="0"/>
           </a:p>
         </p:txBody>
       </p:sp>
@@ -13109,8 +13113,8 @@
         </p:nvSpPr>
         <p:spPr>
           <a:xfrm>
-            <a:off x="7799832" y="1801368"/>
-            <a:ext cx="3145536" cy="640080"/>
+            <a:off x="7708392" y="1764792"/>
+            <a:ext cx="3282696" cy="749808"/>
           </a:xfrm>
           <a:prstGeom prst="rect">
             <a:avLst/>
@@ -13128,7 +13132,7 @@
               <a:buNone/>
             </a:pPr>
             <a:r>
-              <a:rPr lang="en-US" sz="1320" dirty="0">
+              <a:rPr lang="en-US" sz="1220" dirty="0">
                 <a:solidFill>
                   <a:srgbClr val="17364A"/>
                 </a:solidFill>
@@ -13138,7 +13142,7 @@
               </a:rPr>
               <a:t>Identify workforce roles needed for responsible AI adoption in public health.</a:t>
             </a:r>
-            <a:endParaRPr lang="en-US" sz="1320" dirty="0"/>
+            <a:endParaRPr lang="en-US" sz="1220" dirty="0"/>
           </a:p>
         </p:txBody>
       </p:sp>
@@ -13150,12 +13154,12 @@
         </p:nvSpPr>
         <p:spPr>
           <a:xfrm>
-            <a:off x="7635240" y="2670048"/>
-            <a:ext cx="3474720" cy="1377086"/>
+            <a:off x="7543800" y="2724912"/>
+            <a:ext cx="3611880" cy="1527048"/>
           </a:xfrm>
           <a:prstGeom prst="roundRect">
             <a:avLst>
-              <a:gd name="adj" fmla="val 7968"/>
+              <a:gd name="adj" fmla="val 7186"/>
             </a:avLst>
           </a:prstGeom>
           <a:solidFill>
@@ -13177,8 +13181,8 @@
         </p:nvSpPr>
         <p:spPr>
           <a:xfrm>
-            <a:off x="7799832" y="2816352"/>
-            <a:ext cx="3145536" cy="256032"/>
+            <a:off x="7708392" y="2852928"/>
+            <a:ext cx="3282696" cy="228600"/>
           </a:xfrm>
           <a:prstGeom prst="rect">
             <a:avLst/>
@@ -13194,7 +13198,7 @@
               <a:buNone/>
             </a:pPr>
             <a:r>
-              <a:rPr lang="en-US" sz="1300" b="1" dirty="0">
+              <a:rPr lang="en-US" sz="1220" b="1" dirty="0">
                 <a:solidFill>
                   <a:srgbClr val="0068B7"/>
                 </a:solidFill>
@@ -13204,7 +13208,7 @@
               </a:rPr>
               <a:t>Concept checkpoints</a:t>
             </a:r>
-            <a:endParaRPr lang="en-US" sz="1300" dirty="0"/>
+            <a:endParaRPr lang="en-US" sz="1220" dirty="0"/>
           </a:p>
         </p:txBody>
       </p:sp>
@@ -13216,8 +13220,8 @@
         </p:nvSpPr>
         <p:spPr>
           <a:xfrm>
-            <a:off x="7818120" y="3182112"/>
-            <a:ext cx="3090672" cy="718718"/>
+            <a:off x="7726680" y="3182112"/>
+            <a:ext cx="3227832" cy="960120"/>
           </a:xfrm>
           <a:prstGeom prst="rect">
             <a:avLst/>
@@ -13235,7 +13239,7 @@
               <a:buNone/>
             </a:pPr>
             <a:r>
-              <a:rPr lang="en-US" sz="1220" dirty="0">
+              <a:rPr lang="en-US" sz="1140" dirty="0">
                 <a:solidFill>
                   <a:srgbClr val="17364A"/>
                 </a:solidFill>
@@ -13243,16 +13247,16 @@
                 <a:ea typeface="Aptos" pitchFamily="34" charset="-122"/>
                 <a:cs typeface="Aptos" pitchFamily="34" charset="-120"/>
               </a:rPr>
-              <a:t>Distinguish between AI users, reviewers, implementers, governance.</a:t>
-            </a:r>
-            <a:endParaRPr lang="en-US" sz="1220" dirty="0"/>
-          </a:p>
-          <a:p>
-            <a:pPr indent="0" marL="0">
-              <a:buNone/>
-            </a:pPr>
-            <a:r>
-              <a:rPr lang="en-US" sz="1220" dirty="0">
+              <a:t>Distinguish between AI users, reviewers,.</a:t>
+            </a:r>
+            <a:endParaRPr lang="en-US" sz="1140" dirty="0"/>
+          </a:p>
+          <a:p>
+            <a:pPr indent="0" marL="0">
+              <a:buNone/>
+            </a:pPr>
+            <a:r>
+              <a:rPr lang="en-US" sz="1140" dirty="0">
                 <a:solidFill>
                   <a:srgbClr val="17364A"/>
                 </a:solidFill>
@@ -13260,16 +13264,16 @@
                 <a:ea typeface="Aptos" pitchFamily="34" charset="-122"/>
                 <a:cs typeface="Aptos" pitchFamily="34" charset="-120"/>
               </a:rPr>
-              <a:t>Recognize workforce risks such as deskilling, uneven access to.</a:t>
-            </a:r>
-            <a:endParaRPr lang="en-US" sz="1220" dirty="0"/>
-          </a:p>
-          <a:p>
-            <a:pPr indent="0" marL="0">
-              <a:buNone/>
-            </a:pPr>
-            <a:r>
-              <a:rPr lang="en-US" sz="1220" dirty="0">
+              <a:t>Recognize workforce risks such as deskilling,.</a:t>
+            </a:r>
+            <a:endParaRPr lang="en-US" sz="1140" dirty="0"/>
+          </a:p>
+          <a:p>
+            <a:pPr indent="0" marL="0">
+              <a:buNone/>
+            </a:pPr>
+            <a:r>
+              <a:rPr lang="en-US" sz="1140" dirty="0">
                 <a:solidFill>
                   <a:srgbClr val="17364A"/>
                 </a:solidFill>
@@ -13279,7 +13283,7 @@
               </a:rPr>
               <a:t>Produce a workforce readiness and role design plan.</a:t>
             </a:r>
-            <a:endParaRPr lang="en-US" sz="1220" dirty="0"/>
+            <a:endParaRPr lang="en-US" sz="1140" dirty="0"/>
           </a:p>
         </p:txBody>
       </p:sp>
@@ -13291,12 +13295,12 @@
         </p:nvSpPr>
         <p:spPr>
           <a:xfrm>
-            <a:off x="7635240" y="4184294"/>
-            <a:ext cx="3474720" cy="1466698"/>
+            <a:off x="7543800" y="4389120"/>
+            <a:ext cx="3611880" cy="1261872"/>
           </a:xfrm>
           <a:prstGeom prst="roundRect">
             <a:avLst>
-              <a:gd name="adj" fmla="val 7481"/>
+              <a:gd name="adj" fmla="val 8696"/>
             </a:avLst>
           </a:prstGeom>
           <a:solidFill>
@@ -13318,8 +13322,8 @@
         </p:nvSpPr>
         <p:spPr>
           <a:xfrm>
-            <a:off x="7799832" y="4330598"/>
-            <a:ext cx="3145536" cy="256032"/>
+            <a:off x="7708392" y="4517136"/>
+            <a:ext cx="3282696" cy="228600"/>
           </a:xfrm>
           <a:prstGeom prst="rect">
             <a:avLst/>
@@ -13335,7 +13339,7 @@
               <a:buNone/>
             </a:pPr>
             <a:r>
-              <a:rPr lang="en-US" sz="1300" b="1" dirty="0">
+              <a:rPr lang="en-US" sz="1220" b="1" dirty="0">
                 <a:solidFill>
                   <a:srgbClr val="0068B7"/>
                 </a:solidFill>
@@ -13345,7 +13349,7 @@
               </a:rPr>
               <a:t>What to produce</a:t>
             </a:r>
-            <a:endParaRPr lang="en-US" sz="1300" dirty="0"/>
+            <a:endParaRPr lang="en-US" sz="1220" dirty="0"/>
           </a:p>
         </p:txBody>
       </p:sp>
@@ -13357,8 +13361,8 @@
         </p:nvSpPr>
         <p:spPr>
           <a:xfrm>
-            <a:off x="7799832" y="4659782"/>
-            <a:ext cx="3145536" cy="899770"/>
+            <a:off x="7708392" y="4828032"/>
+            <a:ext cx="3282696" cy="749808"/>
           </a:xfrm>
           <a:prstGeom prst="rect">
             <a:avLst/>
@@ -13376,7 +13380,7 @@
               <a:buNone/>
             </a:pPr>
             <a:r>
-              <a:rPr lang="en-US" sz="1320" dirty="0">
+              <a:rPr lang="en-US" sz="1220" dirty="0">
                 <a:solidFill>
                   <a:srgbClr val="17364A"/>
                 </a:solidFill>
@@ -13384,9 +13388,9 @@
                 <a:ea typeface="Aptos" pitchFamily="34" charset="-122"/>
                 <a:cs typeface="Aptos" pitchFamily="34" charset="-120"/>
               </a:rPr>
-              <a:t>Use the assignment to test whether you can explain the concept, apply it to a realistic public health situation, and identify what would need review before the work moves forward.</a:t>
-            </a:r>
-            <a:endParaRPr lang="en-US" sz="1320" dirty="0"/>
+              <a:t>Use the assignment to test whether you can explain the concept, apply it to a.</a:t>
+            </a:r>
+            <a:endParaRPr lang="en-US" sz="1220" dirty="0"/>
           </a:p>
         </p:txBody>
       </p:sp>
@@ -13677,8 +13681,8 @@
         </p:nvSpPr>
         <p:spPr>
           <a:xfrm>
-            <a:off x="868680" y="1508760"/>
-            <a:ext cx="6309360" cy="4160520"/>
+            <a:off x="822960" y="1463040"/>
+            <a:ext cx="6565392" cy="4343400"/>
           </a:xfrm>
           <a:prstGeom prst="rect">
             <a:avLst/>
@@ -13696,7 +13700,7 @@
               <a:buNone/>
             </a:pPr>
             <a:r>
-              <a:rPr lang="en-US" sz="2100" dirty="0">
+              <a:rPr lang="en-US" sz="1920" dirty="0">
                 <a:solidFill>
                   <a:srgbClr val="003A63"/>
                 </a:solidFill>
@@ -13704,16 +13708,16 @@
                 <a:ea typeface="Aptos" pitchFamily="34" charset="-122"/>
                 <a:cs typeface="Aptos" pitchFamily="34" charset="-120"/>
               </a:rPr>
-              <a:t>• AI changes the skills, roles, and collaboration patterns needed in public health agencies.</a:t>
-            </a:r>
-            <a:endParaRPr lang="en-US" sz="2100" dirty="0"/>
-          </a:p>
-          <a:p>
-            <a:pPr indent="0" marL="0">
-              <a:buNone/>
-            </a:pPr>
-            <a:r>
-              <a:rPr lang="en-US" sz="2100" dirty="0">
+              <a:t>• AI changes the skills, roles, and collaboration patterns needed in public.</a:t>
+            </a:r>
+            <a:endParaRPr lang="en-US" sz="1920" dirty="0"/>
+          </a:p>
+          <a:p>
+            <a:pPr indent="0" marL="0">
+              <a:buNone/>
+            </a:pPr>
+            <a:r>
+              <a:rPr lang="en-US" sz="1920" dirty="0">
                 <a:solidFill>
                   <a:srgbClr val="003A63"/>
                 </a:solidFill>
@@ -13723,14 +13727,14 @@
               </a:rPr>
               <a:t>• It does not eliminate the need for public health expertise.</a:t>
             </a:r>
-            <a:endParaRPr lang="en-US" sz="2100" dirty="0"/>
-          </a:p>
-          <a:p>
-            <a:pPr indent="0" marL="0">
-              <a:buNone/>
-            </a:pPr>
-            <a:r>
-              <a:rPr lang="en-US" sz="2100" dirty="0">
+            <a:endParaRPr lang="en-US" sz="1920" dirty="0"/>
+          </a:p>
+          <a:p>
+            <a:pPr indent="0" marL="0">
+              <a:buNone/>
+            </a:pPr>
+            <a:r>
+              <a:rPr lang="en-US" sz="1920" dirty="0">
                 <a:solidFill>
                   <a:srgbClr val="003A63"/>
                 </a:solidFill>
@@ -13738,9 +13742,9 @@
                 <a:ea typeface="Aptos" pitchFamily="34" charset="-122"/>
                 <a:cs typeface="Aptos" pitchFamily="34" charset="-120"/>
               </a:rPr>
-              <a:t>• Instead, it increases the need for staff who can translate across program, data, technology,.</a:t>
-            </a:r>
-            <a:endParaRPr lang="en-US" sz="2100" dirty="0"/>
+              <a:t>• Instead, it increases the need for staff who can translate across program,.</a:t>
+            </a:r>
+            <a:endParaRPr lang="en-US" sz="1920" dirty="0"/>
           </a:p>
         </p:txBody>
       </p:sp>
@@ -13752,12 +13756,12 @@
         </p:nvSpPr>
         <p:spPr>
           <a:xfrm>
-            <a:off x="7635240" y="1325880"/>
-            <a:ext cx="3474720" cy="1207008"/>
+            <a:off x="7543800" y="1325880"/>
+            <a:ext cx="3611880" cy="1261872"/>
           </a:xfrm>
           <a:prstGeom prst="roundRect">
             <a:avLst>
-              <a:gd name="adj" fmla="val 9091"/>
+              <a:gd name="adj" fmla="val 8696"/>
             </a:avLst>
           </a:prstGeom>
           <a:solidFill>
@@ -13779,8 +13783,8 @@
         </p:nvSpPr>
         <p:spPr>
           <a:xfrm>
-            <a:off x="7799832" y="1472184"/>
-            <a:ext cx="3145536" cy="256032"/>
+            <a:off x="7708392" y="1453896"/>
+            <a:ext cx="3282696" cy="228600"/>
           </a:xfrm>
           <a:prstGeom prst="rect">
             <a:avLst/>
@@ -13796,7 +13800,7 @@
               <a:buNone/>
             </a:pPr>
             <a:r>
-              <a:rPr lang="en-US" sz="1300" b="1" dirty="0">
+              <a:rPr lang="en-US" sz="1220" b="1" dirty="0">
                 <a:solidFill>
                   <a:srgbClr val="0068B7"/>
                 </a:solidFill>
@@ -13806,7 +13810,7 @@
               </a:rPr>
               <a:t>Core concept</a:t>
             </a:r>
-            <a:endParaRPr lang="en-US" sz="1300" dirty="0"/>
+            <a:endParaRPr lang="en-US" sz="1220" dirty="0"/>
           </a:p>
         </p:txBody>
       </p:sp>
@@ -13818,8 +13822,8 @@
         </p:nvSpPr>
         <p:spPr>
           <a:xfrm>
-            <a:off x="7799832" y="1801368"/>
-            <a:ext cx="3145536" cy="640080"/>
+            <a:off x="7708392" y="1764792"/>
+            <a:ext cx="3282696" cy="749808"/>
           </a:xfrm>
           <a:prstGeom prst="rect">
             <a:avLst/>
@@ -13837,7 +13841,7 @@
               <a:buNone/>
             </a:pPr>
             <a:r>
-              <a:rPr lang="en-US" sz="1320" dirty="0">
+              <a:rPr lang="en-US" sz="1220" dirty="0">
                 <a:solidFill>
                   <a:srgbClr val="17364A"/>
                 </a:solidFill>
@@ -13847,7 +13851,7 @@
               </a:rPr>
               <a:t>AI changes the skills, roles, and collaboration patterns needed in public health.</a:t>
             </a:r>
-            <a:endParaRPr lang="en-US" sz="1320" dirty="0"/>
+            <a:endParaRPr lang="en-US" sz="1220" dirty="0"/>
           </a:p>
         </p:txBody>
       </p:sp>
@@ -13859,12 +13863,12 @@
         </p:nvSpPr>
         <p:spPr>
           <a:xfrm>
-            <a:off x="7635240" y="2670048"/>
-            <a:ext cx="3474720" cy="1377086"/>
+            <a:off x="7543800" y="2724912"/>
+            <a:ext cx="3611880" cy="1527048"/>
           </a:xfrm>
           <a:prstGeom prst="roundRect">
             <a:avLst>
-              <a:gd name="adj" fmla="val 7968"/>
+              <a:gd name="adj" fmla="val 7186"/>
             </a:avLst>
           </a:prstGeom>
           <a:solidFill>
@@ -13886,8 +13890,8 @@
         </p:nvSpPr>
         <p:spPr>
           <a:xfrm>
-            <a:off x="7799832" y="2816352"/>
-            <a:ext cx="3145536" cy="256032"/>
+            <a:off x="7708392" y="2852928"/>
+            <a:ext cx="3282696" cy="228600"/>
           </a:xfrm>
           <a:prstGeom prst="rect">
             <a:avLst/>
@@ -13903,7 +13907,7 @@
               <a:buNone/>
             </a:pPr>
             <a:r>
-              <a:rPr lang="en-US" sz="1300" b="1" dirty="0">
+              <a:rPr lang="en-US" sz="1220" b="1" dirty="0">
                 <a:solidFill>
                   <a:srgbClr val="0068B7"/>
                 </a:solidFill>
@@ -13913,7 +13917,7 @@
               </a:rPr>
               <a:t>Concept checkpoints</a:t>
             </a:r>
-            <a:endParaRPr lang="en-US" sz="1300" dirty="0"/>
+            <a:endParaRPr lang="en-US" sz="1220" dirty="0"/>
           </a:p>
         </p:txBody>
       </p:sp>
@@ -13925,8 +13929,8 @@
         </p:nvSpPr>
         <p:spPr>
           <a:xfrm>
-            <a:off x="7818120" y="3182112"/>
-            <a:ext cx="3090672" cy="718718"/>
+            <a:off x="7726680" y="3182112"/>
+            <a:ext cx="3227832" cy="960120"/>
           </a:xfrm>
           <a:prstGeom prst="rect">
             <a:avLst/>
@@ -13944,7 +13948,7 @@
               <a:buNone/>
             </a:pPr>
             <a:r>
-              <a:rPr lang="en-US" sz="1220" dirty="0">
+              <a:rPr lang="en-US" sz="1140" dirty="0">
                 <a:solidFill>
                   <a:srgbClr val="17364A"/>
                 </a:solidFill>
@@ -13952,16 +13956,16 @@
                 <a:ea typeface="Aptos" pitchFamily="34" charset="-122"/>
                 <a:cs typeface="Aptos" pitchFamily="34" charset="-120"/>
               </a:rPr>
-              <a:t>Instead, it increases the need for staff who can translate across.</a:t>
-            </a:r>
-            <a:endParaRPr lang="en-US" sz="1220" dirty="0"/>
-          </a:p>
-          <a:p>
-            <a:pPr indent="0" marL="0">
-              <a:buNone/>
-            </a:pPr>
-            <a:r>
-              <a:rPr lang="en-US" sz="1220" dirty="0">
+              <a:t>Instead, it increases the need for staff who can.</a:t>
+            </a:r>
+            <a:endParaRPr lang="en-US" sz="1140" dirty="0"/>
+          </a:p>
+          <a:p>
+            <a:pPr indent="0" marL="0">
+              <a:buNone/>
+            </a:pPr>
+            <a:r>
+              <a:rPr lang="en-US" sz="1140" dirty="0">
                 <a:solidFill>
                   <a:srgbClr val="17364A"/>
                 </a:solidFill>
@@ -13969,16 +13973,16 @@
                 <a:ea typeface="Aptos" pitchFamily="34" charset="-122"/>
                 <a:cs typeface="Aptos" pitchFamily="34" charset="-120"/>
               </a:rPr>
-              <a:t>Leaders need a workforce strategy that prepares staff to use,.</a:t>
-            </a:r>
-            <a:endParaRPr lang="en-US" sz="1220" dirty="0"/>
-          </a:p>
-          <a:p>
-            <a:pPr indent="0" marL="0">
-              <a:buNone/>
-            </a:pPr>
-            <a:r>
-              <a:rPr lang="en-US" sz="1220" dirty="0">
+              <a:t>Leaders need a workforce strategy that prepares.</a:t>
+            </a:r>
+            <a:endParaRPr lang="en-US" sz="1140" dirty="0"/>
+          </a:p>
+          <a:p>
+            <a:pPr indent="0" marL="0">
+              <a:buNone/>
+            </a:pPr>
+            <a:r>
+              <a:rPr lang="en-US" sz="1140" dirty="0">
                 <a:solidFill>
                   <a:srgbClr val="17364A"/>
                 </a:solidFill>
@@ -13986,9 +13990,9 @@
                 <a:ea typeface="Aptos" pitchFamily="34" charset="-122"/>
                 <a:cs typeface="Aptos" pitchFamily="34" charset="-120"/>
               </a:rPr>
-              <a:t>This module helps leaders identify AI-related roles and.</a:t>
-            </a:r>
-            <a:endParaRPr lang="en-US" sz="1220" dirty="0"/>
+              <a:t>This module helps leaders identify AI-related.</a:t>
+            </a:r>
+            <a:endParaRPr lang="en-US" sz="1140" dirty="0"/>
           </a:p>
         </p:txBody>
       </p:sp>
@@ -14000,12 +14004,12 @@
         </p:nvSpPr>
         <p:spPr>
           <a:xfrm>
-            <a:off x="7635240" y="4184294"/>
-            <a:ext cx="3474720" cy="1466698"/>
+            <a:off x="7543800" y="4389120"/>
+            <a:ext cx="3611880" cy="1261872"/>
           </a:xfrm>
           <a:prstGeom prst="roundRect">
             <a:avLst>
-              <a:gd name="adj" fmla="val 7481"/>
+              <a:gd name="adj" fmla="val 8696"/>
             </a:avLst>
           </a:prstGeom>
           <a:solidFill>
@@ -14027,8 +14031,8 @@
         </p:nvSpPr>
         <p:spPr>
           <a:xfrm>
-            <a:off x="7799832" y="4330598"/>
-            <a:ext cx="3145536" cy="256032"/>
+            <a:off x="7708392" y="4517136"/>
+            <a:ext cx="3282696" cy="228600"/>
           </a:xfrm>
           <a:prstGeom prst="rect">
             <a:avLst/>
@@ -14044,7 +14048,7 @@
               <a:buNone/>
             </a:pPr>
             <a:r>
-              <a:rPr lang="en-US" sz="1300" b="1" dirty="0">
+              <a:rPr lang="en-US" sz="1220" b="1" dirty="0">
                 <a:solidFill>
                   <a:srgbClr val="0068B7"/>
                 </a:solidFill>
@@ -14054,7 +14058,7 @@
               </a:rPr>
               <a:t>Apply it</a:t>
             </a:r>
-            <a:endParaRPr lang="en-US" sz="1300" dirty="0"/>
+            <a:endParaRPr lang="en-US" sz="1220" dirty="0"/>
           </a:p>
         </p:txBody>
       </p:sp>
@@ -14066,8 +14070,8 @@
         </p:nvSpPr>
         <p:spPr>
           <a:xfrm>
-            <a:off x="7799832" y="4659782"/>
-            <a:ext cx="3145536" cy="899770"/>
+            <a:off x="7708392" y="4828032"/>
+            <a:ext cx="3282696" cy="749808"/>
           </a:xfrm>
           <a:prstGeom prst="rect">
             <a:avLst/>
@@ -14085,7 +14089,7 @@
               <a:buNone/>
             </a:pPr>
             <a:r>
-              <a:rPr lang="en-US" sz="1320" dirty="0">
+              <a:rPr lang="en-US" sz="1220" dirty="0">
                 <a:solidFill>
                   <a:srgbClr val="17364A"/>
                 </a:solidFill>
@@ -14093,9 +14097,9 @@
                 <a:ea typeface="Aptos" pitchFamily="34" charset="-122"/>
                 <a:cs typeface="Aptos" pitchFamily="34" charset="-120"/>
               </a:rPr>
-              <a:t>Connect the concept to public health purpose, responsible use, required safeguards, documentation, and the next action a department should take.</a:t>
-            </a:r>
-            <a:endParaRPr lang="en-US" sz="1320" dirty="0"/>
+              <a:t>Connect the concept to public health purpose, responsible use, required.</a:t>
+            </a:r>
+            <a:endParaRPr lang="en-US" sz="1220" dirty="0"/>
           </a:p>
         </p:txBody>
       </p:sp>
@@ -14386,8 +14390,8 @@
         </p:nvSpPr>
         <p:spPr>
           <a:xfrm>
-            <a:off x="868680" y="1508760"/>
-            <a:ext cx="6309360" cy="4160520"/>
+            <a:off x="822960" y="1463040"/>
+            <a:ext cx="6565392" cy="4343400"/>
           </a:xfrm>
           <a:prstGeom prst="rect">
             <a:avLst/>
@@ -14405,7 +14409,7 @@
               <a:buNone/>
             </a:pPr>
             <a:r>
-              <a:rPr lang="en-US" sz="2100" dirty="0">
+              <a:rPr lang="en-US" sz="1920" dirty="0">
                 <a:solidFill>
                   <a:srgbClr val="003A63"/>
                 </a:solidFill>
@@ -14415,14 +14419,14 @@
               </a:rPr>
               <a:t>• Public health AI depends on people who understand both technology and context.</a:t>
             </a:r>
-            <a:endParaRPr lang="en-US" sz="2100" dirty="0"/>
-          </a:p>
-          <a:p>
-            <a:pPr indent="0" marL="0">
-              <a:buNone/>
-            </a:pPr>
-            <a:r>
-              <a:rPr lang="en-US" sz="2100" dirty="0">
+            <a:endParaRPr lang="en-US" sz="1920" dirty="0"/>
+          </a:p>
+          <a:p>
+            <a:pPr indent="0" marL="0">
+              <a:buNone/>
+            </a:pPr>
+            <a:r>
+              <a:rPr lang="en-US" sz="1920" dirty="0">
                 <a:solidFill>
                   <a:srgbClr val="003A63"/>
                 </a:solidFill>
@@ -14430,16 +14434,16 @@
                 <a:ea typeface="Aptos" pitchFamily="34" charset="-122"/>
                 <a:cs typeface="Aptos" pitchFamily="34" charset="-120"/>
               </a:rPr>
-              <a:t>• A model may generate a summary, but an epidemiologist must judge whether the summary is.</a:t>
-            </a:r>
-            <a:endParaRPr lang="en-US" sz="2100" dirty="0"/>
-          </a:p>
-          <a:p>
-            <a:pPr indent="0" marL="0">
-              <a:buNone/>
-            </a:pPr>
-            <a:r>
-              <a:rPr lang="en-US" sz="2100" dirty="0">
+              <a:t>• A model may generate a summary, but an epidemiologist must judge whether the.</a:t>
+            </a:r>
+            <a:endParaRPr lang="en-US" sz="1920" dirty="0"/>
+          </a:p>
+          <a:p>
+            <a:pPr indent="0" marL="0">
+              <a:buNone/>
+            </a:pPr>
+            <a:r>
+              <a:rPr lang="en-US" sz="1920" dirty="0">
                 <a:solidFill>
                   <a:srgbClr val="003A63"/>
                 </a:solidFill>
@@ -14447,9 +14451,9 @@
                 <a:ea typeface="Aptos" pitchFamily="34" charset="-122"/>
                 <a:cs typeface="Aptos" pitchFamily="34" charset="-120"/>
               </a:rPr>
-              <a:t>• A vendor may describe a product, but an informatician must assess interoperability and data.</a:t>
-            </a:r>
-            <a:endParaRPr lang="en-US" sz="2100" dirty="0"/>
+              <a:t>• A vendor may describe a product, but an informatician must assess.</a:t>
+            </a:r>
+            <a:endParaRPr lang="en-US" sz="1920" dirty="0"/>
           </a:p>
         </p:txBody>
       </p:sp>
@@ -14461,12 +14465,12 @@
         </p:nvSpPr>
         <p:spPr>
           <a:xfrm>
-            <a:off x="7635240" y="1325880"/>
-            <a:ext cx="3474720" cy="1207008"/>
+            <a:off x="7543800" y="1325880"/>
+            <a:ext cx="3611880" cy="1261872"/>
           </a:xfrm>
           <a:prstGeom prst="roundRect">
             <a:avLst>
-              <a:gd name="adj" fmla="val 9091"/>
+              <a:gd name="adj" fmla="val 8696"/>
             </a:avLst>
           </a:prstGeom>
           <a:solidFill>
@@ -14488,8 +14492,8 @@
         </p:nvSpPr>
         <p:spPr>
           <a:xfrm>
-            <a:off x="7799832" y="1472184"/>
-            <a:ext cx="3145536" cy="256032"/>
+            <a:off x="7708392" y="1453896"/>
+            <a:ext cx="3282696" cy="228600"/>
           </a:xfrm>
           <a:prstGeom prst="rect">
             <a:avLst/>
@@ -14505,7 +14509,7 @@
               <a:buNone/>
             </a:pPr>
             <a:r>
-              <a:rPr lang="en-US" sz="1300" b="1" dirty="0">
+              <a:rPr lang="en-US" sz="1220" b="1" dirty="0">
                 <a:solidFill>
                   <a:srgbClr val="0068B7"/>
                 </a:solidFill>
@@ -14515,7 +14519,7 @@
               </a:rPr>
               <a:t>Core concept</a:t>
             </a:r>
-            <a:endParaRPr lang="en-US" sz="1300" dirty="0"/>
+            <a:endParaRPr lang="en-US" sz="1220" dirty="0"/>
           </a:p>
         </p:txBody>
       </p:sp>
@@ -14527,8 +14531,8 @@
         </p:nvSpPr>
         <p:spPr>
           <a:xfrm>
-            <a:off x="7799832" y="1801368"/>
-            <a:ext cx="3145536" cy="640080"/>
+            <a:off x="7708392" y="1764792"/>
+            <a:ext cx="3282696" cy="749808"/>
           </a:xfrm>
           <a:prstGeom prst="rect">
             <a:avLst/>
@@ -14546,7 +14550,7 @@
               <a:buNone/>
             </a:pPr>
             <a:r>
-              <a:rPr lang="en-US" sz="1320" dirty="0">
+              <a:rPr lang="en-US" sz="1220" dirty="0">
                 <a:solidFill>
                   <a:srgbClr val="17364A"/>
                 </a:solidFill>
@@ -14556,7 +14560,7 @@
               </a:rPr>
               <a:t>Public health AI depends on people who understand both technology and context.</a:t>
             </a:r>
-            <a:endParaRPr lang="en-US" sz="1320" dirty="0"/>
+            <a:endParaRPr lang="en-US" sz="1220" dirty="0"/>
           </a:p>
         </p:txBody>
       </p:sp>
@@ -14568,12 +14572,12 @@
         </p:nvSpPr>
         <p:spPr>
           <a:xfrm>
-            <a:off x="7635240" y="2670048"/>
-            <a:ext cx="3474720" cy="1377086"/>
+            <a:off x="7543800" y="2724912"/>
+            <a:ext cx="3611880" cy="1527048"/>
           </a:xfrm>
           <a:prstGeom prst="roundRect">
             <a:avLst>
-              <a:gd name="adj" fmla="val 7968"/>
+              <a:gd name="adj" fmla="val 7186"/>
             </a:avLst>
           </a:prstGeom>
           <a:solidFill>
@@ -14595,8 +14599,8 @@
         </p:nvSpPr>
         <p:spPr>
           <a:xfrm>
-            <a:off x="7799832" y="2816352"/>
-            <a:ext cx="3145536" cy="256032"/>
+            <a:off x="7708392" y="2852928"/>
+            <a:ext cx="3282696" cy="228600"/>
           </a:xfrm>
           <a:prstGeom prst="rect">
             <a:avLst/>
@@ -14612,7 +14616,7 @@
               <a:buNone/>
             </a:pPr>
             <a:r>
-              <a:rPr lang="en-US" sz="1300" b="1" dirty="0">
+              <a:rPr lang="en-US" sz="1220" b="1" dirty="0">
                 <a:solidFill>
                   <a:srgbClr val="0068B7"/>
                 </a:solidFill>
@@ -14622,7 +14626,7 @@
               </a:rPr>
               <a:t>Concept checkpoints</a:t>
             </a:r>
-            <a:endParaRPr lang="en-US" sz="1300" dirty="0"/>
+            <a:endParaRPr lang="en-US" sz="1220" dirty="0"/>
           </a:p>
         </p:txBody>
       </p:sp>
@@ -14634,8 +14638,8 @@
         </p:nvSpPr>
         <p:spPr>
           <a:xfrm>
-            <a:off x="7818120" y="3182112"/>
-            <a:ext cx="3090672" cy="718718"/>
+            <a:off x="7726680" y="3182112"/>
+            <a:ext cx="3227832" cy="960120"/>
           </a:xfrm>
           <a:prstGeom prst="rect">
             <a:avLst/>
@@ -14653,7 +14657,7 @@
               <a:buNone/>
             </a:pPr>
             <a:r>
-              <a:rPr lang="en-US" sz="1220" dirty="0">
+              <a:rPr lang="en-US" sz="1140" dirty="0">
                 <a:solidFill>
                   <a:srgbClr val="17364A"/>
                 </a:solidFill>
@@ -14661,16 +14665,16 @@
                 <a:ea typeface="Aptos" pitchFamily="34" charset="-122"/>
                 <a:cs typeface="Aptos" pitchFamily="34" charset="-120"/>
               </a:rPr>
-              <a:t>A leader may approve a use case, but governance participants must.</a:t>
-            </a:r>
-            <a:endParaRPr lang="en-US" sz="1220" dirty="0"/>
-          </a:p>
-          <a:p>
-            <a:pPr indent="0" marL="0">
-              <a:buNone/>
-            </a:pPr>
-            <a:r>
-              <a:rPr lang="en-US" sz="1220" dirty="0">
+              <a:t>A leader may approve a use case, but governance.</a:t>
+            </a:r>
+            <a:endParaRPr lang="en-US" sz="1140" dirty="0"/>
+          </a:p>
+          <a:p>
+            <a:pPr indent="0" marL="0">
+              <a:buNone/>
+            </a:pPr>
+            <a:r>
+              <a:rPr lang="en-US" sz="1140" dirty="0">
                 <a:solidFill>
                   <a:srgbClr val="17364A"/>
                 </a:solidFill>
@@ -14678,16 +14682,16 @@
                 <a:ea typeface="Aptos" pitchFamily="34" charset="-122"/>
                 <a:cs typeface="Aptos" pitchFamily="34" charset="-120"/>
               </a:rPr>
-              <a:t>Workforce strategy helps agencies move beyond ad hoc training.</a:t>
-            </a:r>
-            <a:endParaRPr lang="en-US" sz="1220" dirty="0"/>
-          </a:p>
-          <a:p>
-            <a:pPr indent="0" marL="0">
-              <a:buNone/>
-            </a:pPr>
-            <a:r>
-              <a:rPr lang="en-US" sz="1220" dirty="0">
+              <a:t>Workforce strategy helps agencies move beyond ad.</a:t>
+            </a:r>
+            <a:endParaRPr lang="en-US" sz="1140" dirty="0"/>
+          </a:p>
+          <a:p>
+            <a:pPr indent="0" marL="0">
+              <a:buNone/>
+            </a:pPr>
+            <a:r>
+              <a:rPr lang="en-US" sz="1140" dirty="0">
                 <a:solidFill>
                   <a:srgbClr val="17364A"/>
                 </a:solidFill>
@@ -14695,9 +14699,9 @@
                 <a:ea typeface="Aptos" pitchFamily="34" charset="-122"/>
                 <a:cs typeface="Aptos" pitchFamily="34" charset="-120"/>
               </a:rPr>
-              <a:t>It defines which staff need baseline literacy, which staff need.</a:t>
-            </a:r>
-            <a:endParaRPr lang="en-US" sz="1220" dirty="0"/>
+              <a:t>It defines which staff need baseline literacy,.</a:t>
+            </a:r>
+            <a:endParaRPr lang="en-US" sz="1140" dirty="0"/>
           </a:p>
         </p:txBody>
       </p:sp>
@@ -14709,12 +14713,12 @@
         </p:nvSpPr>
         <p:spPr>
           <a:xfrm>
-            <a:off x="7635240" y="4184294"/>
-            <a:ext cx="3474720" cy="1466698"/>
+            <a:off x="7543800" y="4389120"/>
+            <a:ext cx="3611880" cy="1261872"/>
           </a:xfrm>
           <a:prstGeom prst="roundRect">
             <a:avLst>
-              <a:gd name="adj" fmla="val 7481"/>
+              <a:gd name="adj" fmla="val 8696"/>
             </a:avLst>
           </a:prstGeom>
           <a:solidFill>
@@ -14736,8 +14740,8 @@
         </p:nvSpPr>
         <p:spPr>
           <a:xfrm>
-            <a:off x="7799832" y="4330598"/>
-            <a:ext cx="3145536" cy="256032"/>
+            <a:off x="7708392" y="4517136"/>
+            <a:ext cx="3282696" cy="228600"/>
           </a:xfrm>
           <a:prstGeom prst="rect">
             <a:avLst/>
@@ -14753,7 +14757,7 @@
               <a:buNone/>
             </a:pPr>
             <a:r>
-              <a:rPr lang="en-US" sz="1300" b="1" dirty="0">
+              <a:rPr lang="en-US" sz="1220" b="1" dirty="0">
                 <a:solidFill>
                   <a:srgbClr val="0068B7"/>
                 </a:solidFill>
@@ -14763,7 +14767,7 @@
               </a:rPr>
               <a:t>Apply it</a:t>
             </a:r>
-            <a:endParaRPr lang="en-US" sz="1300" dirty="0"/>
+            <a:endParaRPr lang="en-US" sz="1220" dirty="0"/>
           </a:p>
         </p:txBody>
       </p:sp>
@@ -14775,8 +14779,8 @@
         </p:nvSpPr>
         <p:spPr>
           <a:xfrm>
-            <a:off x="7799832" y="4659782"/>
-            <a:ext cx="3145536" cy="899770"/>
+            <a:off x="7708392" y="4828032"/>
+            <a:ext cx="3282696" cy="749808"/>
           </a:xfrm>
           <a:prstGeom prst="rect">
             <a:avLst/>
@@ -14794,7 +14798,7 @@
               <a:buNone/>
             </a:pPr>
             <a:r>
-              <a:rPr lang="en-US" sz="1320" dirty="0">
+              <a:rPr lang="en-US" sz="1220" dirty="0">
                 <a:solidFill>
                   <a:srgbClr val="17364A"/>
                 </a:solidFill>
@@ -14802,9 +14806,9 @@
                 <a:ea typeface="Aptos" pitchFamily="34" charset="-122"/>
                 <a:cs typeface="Aptos" pitchFamily="34" charset="-120"/>
               </a:rPr>
-              <a:t>Connect the concept to public health purpose, responsible use, required safeguards, documentation, and the next action a department should take.</a:t>
-            </a:r>
-            <a:endParaRPr lang="en-US" sz="1320" dirty="0"/>
+              <a:t>Connect the concept to public health purpose, responsible use, required.</a:t>
+            </a:r>
+            <a:endParaRPr lang="en-US" sz="1220" dirty="0"/>
           </a:p>
         </p:txBody>
       </p:sp>
@@ -15095,8 +15099,8 @@
         </p:nvSpPr>
         <p:spPr>
           <a:xfrm>
-            <a:off x="868680" y="1508760"/>
-            <a:ext cx="6309360" cy="4160520"/>
+            <a:off x="822960" y="1463040"/>
+            <a:ext cx="6565392" cy="4343400"/>
           </a:xfrm>
           <a:prstGeom prst="rect">
             <a:avLst/>
@@ -15114,7 +15118,7 @@
               <a:buNone/>
             </a:pPr>
             <a:r>
-              <a:rPr lang="en-US" sz="2100" dirty="0">
+              <a:rPr lang="en-US" sz="1920" dirty="0">
                 <a:solidFill>
                   <a:srgbClr val="003A63"/>
                 </a:solidFill>
@@ -15122,16 +15126,16 @@
                 <a:ea typeface="Aptos" pitchFamily="34" charset="-122"/>
                 <a:cs typeface="Aptos" pitchFamily="34" charset="-120"/>
               </a:rPr>
-              <a:t>• A public health agency implements several AI tools: a document assistant, a case summarization.</a:t>
-            </a:r>
-            <a:endParaRPr lang="en-US" sz="2100" dirty="0"/>
-          </a:p>
-          <a:p>
-            <a:pPr indent="0" marL="0">
-              <a:buNone/>
-            </a:pPr>
-            <a:r>
-              <a:rPr lang="en-US" sz="2100" dirty="0">
+              <a:t>• A public health agency implements several AI tools: a document assistant, a.</a:t>
+            </a:r>
+            <a:endParaRPr lang="en-US" sz="1920" dirty="0"/>
+          </a:p>
+          <a:p>
+            <a:pPr indent="0" marL="0">
+              <a:buNone/>
+            </a:pPr>
+            <a:r>
+              <a:rPr lang="en-US" sz="1920" dirty="0">
                 <a:solidFill>
                   <a:srgbClr val="003A63"/>
                 </a:solidFill>
@@ -15141,14 +15145,14 @@
               </a:rPr>
               <a:t>• Staff quickly discover that no single role owns all the knowledge needed.</a:t>
             </a:r>
-            <a:endParaRPr lang="en-US" sz="2100" dirty="0"/>
-          </a:p>
-          <a:p>
-            <a:pPr indent="0" marL="0">
-              <a:buNone/>
-            </a:pPr>
-            <a:r>
-              <a:rPr lang="en-US" sz="2100" dirty="0">
+            <a:endParaRPr lang="en-US" sz="1920" dirty="0"/>
+          </a:p>
+          <a:p>
+            <a:pPr indent="0" marL="0">
+              <a:buNone/>
+            </a:pPr>
+            <a:r>
+              <a:rPr lang="en-US" sz="1920" dirty="0">
                 <a:solidFill>
                   <a:srgbClr val="003A63"/>
                 </a:solidFill>
@@ -15156,9 +15160,9 @@
                 <a:ea typeface="Aptos" pitchFamily="34" charset="-122"/>
                 <a:cs typeface="Aptos" pitchFamily="34" charset="-120"/>
               </a:rPr>
-              <a:t>• Program staff understand workflow, IT understands integration, privacy understands data.</a:t>
-            </a:r>
-            <a:endParaRPr lang="en-US" sz="2100" dirty="0"/>
+              <a:t>• Program staff understand workflow, IT understands integration, privacy.</a:t>
+            </a:r>
+            <a:endParaRPr lang="en-US" sz="1920" dirty="0"/>
           </a:p>
         </p:txBody>
       </p:sp>
@@ -15170,12 +15174,12 @@
         </p:nvSpPr>
         <p:spPr>
           <a:xfrm>
-            <a:off x="7635240" y="1325880"/>
-            <a:ext cx="3474720" cy="1255471"/>
+            <a:off x="7543800" y="1325880"/>
+            <a:ext cx="3611880" cy="1261872"/>
           </a:xfrm>
           <a:prstGeom prst="roundRect">
             <a:avLst>
-              <a:gd name="adj" fmla="val 8740"/>
+              <a:gd name="adj" fmla="val 8696"/>
             </a:avLst>
           </a:prstGeom>
           <a:solidFill>
@@ -15197,8 +15201,8 @@
         </p:nvSpPr>
         <p:spPr>
           <a:xfrm>
-            <a:off x="7799832" y="1472184"/>
-            <a:ext cx="3145536" cy="256032"/>
+            <a:off x="7708392" y="1453896"/>
+            <a:ext cx="3282696" cy="228600"/>
           </a:xfrm>
           <a:prstGeom prst="rect">
             <a:avLst/>
@@ -15214,7 +15218,7 @@
               <a:buNone/>
             </a:pPr>
             <a:r>
-              <a:rPr lang="en-US" sz="1300" b="1" dirty="0">
+              <a:rPr lang="en-US" sz="1220" b="1" dirty="0">
                 <a:solidFill>
                   <a:srgbClr val="0068B7"/>
                 </a:solidFill>
@@ -15224,7 +15228,7 @@
               </a:rPr>
               <a:t>Core concept</a:t>
             </a:r>
-            <a:endParaRPr lang="en-US" sz="1300" dirty="0"/>
+            <a:endParaRPr lang="en-US" sz="1220" dirty="0"/>
           </a:p>
         </p:txBody>
       </p:sp>
@@ -15236,8 +15240,8 @@
         </p:nvSpPr>
         <p:spPr>
           <a:xfrm>
-            <a:off x="7799832" y="1801368"/>
-            <a:ext cx="3145536" cy="688543"/>
+            <a:off x="7708392" y="1764792"/>
+            <a:ext cx="3282696" cy="749808"/>
           </a:xfrm>
           <a:prstGeom prst="rect">
             <a:avLst/>
@@ -15255,7 +15259,7 @@
               <a:buNone/>
             </a:pPr>
             <a:r>
-              <a:rPr lang="en-US" sz="1320" dirty="0">
+              <a:rPr lang="en-US" sz="1220" dirty="0">
                 <a:solidFill>
                   <a:srgbClr val="17364A"/>
                 </a:solidFill>
@@ -15263,9 +15267,9 @@
                 <a:ea typeface="Aptos" pitchFamily="34" charset="-122"/>
                 <a:cs typeface="Aptos" pitchFamily="34" charset="-120"/>
               </a:rPr>
-              <a:t>A public health agency implements several AI tools: a document assistant, a case summarization tool, a.</a:t>
-            </a:r>
-            <a:endParaRPr lang="en-US" sz="1320" dirty="0"/>
+              <a:t>A public health agency implements several AI tools: a document assistant, a case.</a:t>
+            </a:r>
+            <a:endParaRPr lang="en-US" sz="1220" dirty="0"/>
           </a:p>
         </p:txBody>
       </p:sp>
@@ -15277,12 +15281,12 @@
         </p:nvSpPr>
         <p:spPr>
           <a:xfrm>
-            <a:off x="7635240" y="2718511"/>
-            <a:ext cx="3474720" cy="1328623"/>
+            <a:off x="7543800" y="2724912"/>
+            <a:ext cx="3611880" cy="1527048"/>
           </a:xfrm>
           <a:prstGeom prst="roundRect">
             <a:avLst>
-              <a:gd name="adj" fmla="val 8259"/>
+              <a:gd name="adj" fmla="val 7186"/>
             </a:avLst>
           </a:prstGeom>
           <a:solidFill>
@@ -15304,8 +15308,8 @@
         </p:nvSpPr>
         <p:spPr>
           <a:xfrm>
-            <a:off x="7799832" y="2864815"/>
-            <a:ext cx="3145536" cy="256032"/>
+            <a:off x="7708392" y="2852928"/>
+            <a:ext cx="3282696" cy="228600"/>
           </a:xfrm>
           <a:prstGeom prst="rect">
             <a:avLst/>
@@ -15321,7 +15325,7 @@
               <a:buNone/>
             </a:pPr>
             <a:r>
-              <a:rPr lang="en-US" sz="1300" b="1" dirty="0">
+              <a:rPr lang="en-US" sz="1220" b="1" dirty="0">
                 <a:solidFill>
                   <a:srgbClr val="0068B7"/>
                 </a:solidFill>
@@ -15331,7 +15335,7 @@
               </a:rPr>
               <a:t>Concept checkpoints</a:t>
             </a:r>
-            <a:endParaRPr lang="en-US" sz="1300" dirty="0"/>
+            <a:endParaRPr lang="en-US" sz="1220" dirty="0"/>
           </a:p>
         </p:txBody>
       </p:sp>
@@ -15343,8 +15347,8 @@
         </p:nvSpPr>
         <p:spPr>
           <a:xfrm>
-            <a:off x="7818120" y="3230575"/>
-            <a:ext cx="3090672" cy="670255"/>
+            <a:off x="7726680" y="3182112"/>
+            <a:ext cx="3227832" cy="960120"/>
           </a:xfrm>
           <a:prstGeom prst="rect">
             <a:avLst/>
@@ -15362,7 +15366,7 @@
               <a:buNone/>
             </a:pPr>
             <a:r>
-              <a:rPr lang="en-US" sz="1220" dirty="0">
+              <a:rPr lang="en-US" sz="1140" dirty="0">
                 <a:solidFill>
                   <a:srgbClr val="17364A"/>
                 </a:solidFill>
@@ -15370,16 +15374,16 @@
                 <a:ea typeface="Aptos" pitchFamily="34" charset="-122"/>
                 <a:cs typeface="Aptos" pitchFamily="34" charset="-120"/>
               </a:rPr>
-              <a:t>A public health agency implements several AI tools: a document.</a:t>
-            </a:r>
-            <a:endParaRPr lang="en-US" sz="1220" dirty="0"/>
-          </a:p>
-          <a:p>
-            <a:pPr indent="0" marL="0">
-              <a:buNone/>
-            </a:pPr>
-            <a:r>
-              <a:rPr lang="en-US" sz="1220" dirty="0">
+              <a:t>A public health agency implements several AI.</a:t>
+            </a:r>
+            <a:endParaRPr lang="en-US" sz="1140" dirty="0"/>
+          </a:p>
+          <a:p>
+            <a:pPr indent="0" marL="0">
+              <a:buNone/>
+            </a:pPr>
+            <a:r>
+              <a:rPr lang="en-US" sz="1140" dirty="0">
                 <a:solidFill>
                   <a:srgbClr val="17364A"/>
                 </a:solidFill>
@@ -15387,16 +15391,16 @@
                 <a:ea typeface="Aptos" pitchFamily="34" charset="-122"/>
                 <a:cs typeface="Aptos" pitchFamily="34" charset="-120"/>
               </a:rPr>
-              <a:t>Program staff understand workflow, IT understands integration,.</a:t>
-            </a:r>
-            <a:endParaRPr lang="en-US" sz="1220" dirty="0"/>
-          </a:p>
-          <a:p>
-            <a:pPr indent="0" marL="0">
-              <a:buNone/>
-            </a:pPr>
-            <a:r>
-              <a:rPr lang="en-US" sz="1220" dirty="0">
+              <a:t>Program staff understand workflow, IT understands.</a:t>
+            </a:r>
+            <a:endParaRPr lang="en-US" sz="1140" dirty="0"/>
+          </a:p>
+          <a:p>
+            <a:pPr indent="0" marL="0">
+              <a:buNone/>
+            </a:pPr>
+            <a:r>
+              <a:rPr lang="en-US" sz="1140" dirty="0">
                 <a:solidFill>
                   <a:srgbClr val="17364A"/>
                 </a:solidFill>
@@ -15404,9 +15408,9 @@
                 <a:ea typeface="Aptos" pitchFamily="34" charset="-122"/>
                 <a:cs typeface="Aptos" pitchFamily="34" charset="-120"/>
               </a:rPr>
-              <a:t>However, there is no role that connects these perspectives.</a:t>
-            </a:r>
-            <a:endParaRPr lang="en-US" sz="1220" dirty="0"/>
+              <a:t>However, there is no role that connects these.</a:t>
+            </a:r>
+            <a:endParaRPr lang="en-US" sz="1140" dirty="0"/>
           </a:p>
         </p:txBody>
       </p:sp>
@@ -15418,12 +15422,12 @@
         </p:nvSpPr>
         <p:spPr>
           <a:xfrm>
-            <a:off x="7635240" y="4184294"/>
-            <a:ext cx="3474720" cy="1466698"/>
+            <a:off x="7543800" y="4389120"/>
+            <a:ext cx="3611880" cy="1261872"/>
           </a:xfrm>
           <a:prstGeom prst="roundRect">
             <a:avLst>
-              <a:gd name="adj" fmla="val 7481"/>
+              <a:gd name="adj" fmla="val 8696"/>
             </a:avLst>
           </a:prstGeom>
           <a:solidFill>
@@ -15445,8 +15449,8 @@
         </p:nvSpPr>
         <p:spPr>
           <a:xfrm>
-            <a:off x="7799832" y="4330598"/>
-            <a:ext cx="3145536" cy="256032"/>
+            <a:off x="7708392" y="4517136"/>
+            <a:ext cx="3282696" cy="228600"/>
           </a:xfrm>
           <a:prstGeom prst="rect">
             <a:avLst/>
@@ -15462,7 +15466,7 @@
               <a:buNone/>
             </a:pPr>
             <a:r>
-              <a:rPr lang="en-US" sz="1300" b="1" dirty="0">
+              <a:rPr lang="en-US" sz="1220" b="1" dirty="0">
                 <a:solidFill>
                   <a:srgbClr val="0068B7"/>
                 </a:solidFill>
@@ -15472,7 +15476,7 @@
               </a:rPr>
               <a:t>Apply it</a:t>
             </a:r>
-            <a:endParaRPr lang="en-US" sz="1300" dirty="0"/>
+            <a:endParaRPr lang="en-US" sz="1220" dirty="0"/>
           </a:p>
         </p:txBody>
       </p:sp>
@@ -15484,8 +15488,8 @@
         </p:nvSpPr>
         <p:spPr>
           <a:xfrm>
-            <a:off x="7799832" y="4659782"/>
-            <a:ext cx="3145536" cy="899770"/>
+            <a:off x="7708392" y="4828032"/>
+            <a:ext cx="3282696" cy="749808"/>
           </a:xfrm>
           <a:prstGeom prst="rect">
             <a:avLst/>
@@ -15503,7 +15507,7 @@
               <a:buNone/>
             </a:pPr>
             <a:r>
-              <a:rPr lang="en-US" sz="1320" dirty="0">
+              <a:rPr lang="en-US" sz="1220" dirty="0">
                 <a:solidFill>
                   <a:srgbClr val="17364A"/>
                 </a:solidFill>
@@ -15511,9 +15515,9 @@
                 <a:ea typeface="Aptos" pitchFamily="34" charset="-122"/>
                 <a:cs typeface="Aptos" pitchFamily="34" charset="-120"/>
               </a:rPr>
-              <a:t>Connect the concept to public health purpose, responsible use, required safeguards, documentation, and the next action a department should take.</a:t>
-            </a:r>
-            <a:endParaRPr lang="en-US" sz="1320" dirty="0"/>
+              <a:t>Connect the concept to public health purpose, responsible use, required.</a:t>
+            </a:r>
+            <a:endParaRPr lang="en-US" sz="1220" dirty="0"/>
           </a:p>
         </p:txBody>
       </p:sp>
@@ -15804,8 +15808,8 @@
         </p:nvSpPr>
         <p:spPr>
           <a:xfrm>
-            <a:off x="868680" y="1508760"/>
-            <a:ext cx="6309360" cy="4160520"/>
+            <a:off x="822960" y="1463040"/>
+            <a:ext cx="6565392" cy="4343400"/>
           </a:xfrm>
           <a:prstGeom prst="rect">
             <a:avLst/>
@@ -15823,7 +15827,7 @@
               <a:buNone/>
             </a:pPr>
             <a:r>
-              <a:rPr lang="en-US" sz="2100" dirty="0">
+              <a:rPr lang="en-US" sz="1920" dirty="0">
                 <a:solidFill>
                   <a:srgbClr val="003A63"/>
                 </a:solidFill>
@@ -15833,14 +15837,14 @@
               </a:rPr>
               <a:t>• An AI workforce strategy should define role groups.</a:t>
             </a:r>
-            <a:endParaRPr lang="en-US" sz="2100" dirty="0"/>
-          </a:p>
-          <a:p>
-            <a:pPr indent="0" marL="0">
-              <a:buNone/>
-            </a:pPr>
-            <a:r>
-              <a:rPr lang="en-US" sz="2100" dirty="0">
+            <a:endParaRPr lang="en-US" sz="1920" dirty="0"/>
+          </a:p>
+          <a:p>
+            <a:pPr indent="0" marL="0">
+              <a:buNone/>
+            </a:pPr>
+            <a:r>
+              <a:rPr lang="en-US" sz="1920" dirty="0">
                 <a:solidFill>
                   <a:srgbClr val="003A63"/>
                 </a:solidFill>
@@ -15848,16 +15852,16 @@
                 <a:ea typeface="Aptos" pitchFamily="34" charset="-122"/>
                 <a:cs typeface="Aptos" pitchFamily="34" charset="-120"/>
               </a:rPr>
-              <a:t>• General staff may need baseline AI literacy, approved-use guidance, and prompt safety.</a:t>
-            </a:r>
-            <a:endParaRPr lang="en-US" sz="2100" dirty="0"/>
-          </a:p>
-          <a:p>
-            <a:pPr indent="0" marL="0">
-              <a:buNone/>
-            </a:pPr>
-            <a:r>
-              <a:rPr lang="en-US" sz="2100" dirty="0">
+              <a:t>• General staff may need baseline AI literacy, approved-use guidance, and.</a:t>
+            </a:r>
+            <a:endParaRPr lang="en-US" sz="1920" dirty="0"/>
+          </a:p>
+          <a:p>
+            <a:pPr indent="0" marL="0">
+              <a:buNone/>
+            </a:pPr>
+            <a:r>
+              <a:rPr lang="en-US" sz="1920" dirty="0">
                 <a:solidFill>
                   <a:srgbClr val="003A63"/>
                 </a:solidFill>
@@ -15867,7 +15871,7 @@
               </a:rPr>
               <a:t>• Frontline users need workflow-specific training and escalation expectations.</a:t>
             </a:r>
-            <a:endParaRPr lang="en-US" sz="2100" dirty="0"/>
+            <a:endParaRPr lang="en-US" sz="1920" dirty="0"/>
           </a:p>
         </p:txBody>
       </p:sp>
@@ -15879,12 +15883,12 @@
         </p:nvSpPr>
         <p:spPr>
           <a:xfrm>
-            <a:off x="7635240" y="1325880"/>
-            <a:ext cx="3474720" cy="1207008"/>
+            <a:off x="7543800" y="1325880"/>
+            <a:ext cx="3611880" cy="1261872"/>
           </a:xfrm>
           <a:prstGeom prst="roundRect">
             <a:avLst>
-              <a:gd name="adj" fmla="val 9091"/>
+              <a:gd name="adj" fmla="val 8696"/>
             </a:avLst>
           </a:prstGeom>
           <a:solidFill>
@@ -15906,8 +15910,8 @@
         </p:nvSpPr>
         <p:spPr>
           <a:xfrm>
-            <a:off x="7799832" y="1472184"/>
-            <a:ext cx="3145536" cy="256032"/>
+            <a:off x="7708392" y="1453896"/>
+            <a:ext cx="3282696" cy="228600"/>
           </a:xfrm>
           <a:prstGeom prst="rect">
             <a:avLst/>
@@ -15923,7 +15927,7 @@
               <a:buNone/>
             </a:pPr>
             <a:r>
-              <a:rPr lang="en-US" sz="1300" b="1" dirty="0">
+              <a:rPr lang="en-US" sz="1220" b="1" dirty="0">
                 <a:solidFill>
                   <a:srgbClr val="0068B7"/>
                 </a:solidFill>
@@ -15933,7 +15937,7 @@
               </a:rPr>
               <a:t>Governance lens</a:t>
             </a:r>
-            <a:endParaRPr lang="en-US" sz="1300" dirty="0"/>
+            <a:endParaRPr lang="en-US" sz="1220" dirty="0"/>
           </a:p>
         </p:txBody>
       </p:sp>
@@ -15945,8 +15949,8 @@
         </p:nvSpPr>
         <p:spPr>
           <a:xfrm>
-            <a:off x="7799832" y="1801368"/>
-            <a:ext cx="3145536" cy="640080"/>
+            <a:off x="7708392" y="1764792"/>
+            <a:ext cx="3282696" cy="749808"/>
           </a:xfrm>
           <a:prstGeom prst="rect">
             <a:avLst/>
@@ -15964,7 +15968,7 @@
               <a:buNone/>
             </a:pPr>
             <a:r>
-              <a:rPr lang="en-US" sz="1320" dirty="0">
+              <a:rPr lang="en-US" sz="1220" dirty="0">
                 <a:solidFill>
                   <a:srgbClr val="17364A"/>
                 </a:solidFill>
@@ -15974,7 +15978,7 @@
               </a:rPr>
               <a:t>An AI workforce strategy should define role groups.</a:t>
             </a:r>
-            <a:endParaRPr lang="en-US" sz="1320" dirty="0"/>
+            <a:endParaRPr lang="en-US" sz="1220" dirty="0"/>
           </a:p>
         </p:txBody>
       </p:sp>
@@ -15986,12 +15990,12 @@
         </p:nvSpPr>
         <p:spPr>
           <a:xfrm>
-            <a:off x="7635240" y="2670048"/>
-            <a:ext cx="3474720" cy="1377086"/>
+            <a:off x="7543800" y="2724912"/>
+            <a:ext cx="3611880" cy="1527048"/>
           </a:xfrm>
           <a:prstGeom prst="roundRect">
             <a:avLst>
-              <a:gd name="adj" fmla="val 7968"/>
+              <a:gd name="adj" fmla="val 7186"/>
             </a:avLst>
           </a:prstGeom>
           <a:solidFill>
@@ -16013,24 +16017,26 @@
         </p:nvSpPr>
         <p:spPr>
           <a:xfrm>
-            <a:off x="7799832" y="2798064"/>
-            <a:ext cx="3145536" cy="237744"/>
-          </a:xfrm>
-          <a:prstGeom prst="rect">
-            <a:avLst/>
-          </a:prstGeom>
-          <a:noFill/>
-          <a:ln/>
-        </p:spPr>
-        <p:txBody>
-          <a:bodyPr wrap="square" lIns="0" tIns="0" rIns="0" bIns="0" rtlCol="0" anchor="ctr"/>
-          <a:lstStyle/>
-          <a:p>
-            <a:pPr indent="0" marL="0">
-              <a:buNone/>
-            </a:pPr>
-            <a:r>
-              <a:rPr lang="en-US" sz="1250" b="1" dirty="0">
+            <a:off x="7708392" y="2852928"/>
+            <a:ext cx="3282696" cy="219456"/>
+          </a:xfrm>
+          <a:prstGeom prst="rect">
+            <a:avLst/>
+          </a:prstGeom>
+          <a:noFill/>
+          <a:ln/>
+        </p:spPr>
+        <p:txBody>
+          <a:bodyPr wrap="square" lIns="0" tIns="0" rIns="0" bIns="0" rtlCol="0" anchor="ctr">
+            <a:normAutofit/>
+          </a:bodyPr>
+          <a:lstStyle/>
+          <a:p>
+            <a:pPr indent="0" marL="0">
+              <a:buNone/>
+            </a:pPr>
+            <a:r>
+              <a:rPr lang="en-US" sz="1160" b="1" dirty="0">
                 <a:solidFill>
                   <a:srgbClr val="0068B7"/>
                 </a:solidFill>
@@ -16040,7 +16046,7 @@
               </a:rPr>
               <a:t>Governance pathway</a:t>
             </a:r>
-            <a:endParaRPr lang="en-US" sz="1250" dirty="0"/>
+            <a:endParaRPr lang="en-US" sz="1160" dirty="0"/>
           </a:p>
         </p:txBody>
       </p:sp>
@@ -16052,7 +16058,7 @@
         </p:nvSpPr>
         <p:spPr>
           <a:xfrm>
-            <a:off x="8763000" y="3351276"/>
+            <a:off x="8717280" y="3406140"/>
             <a:ext cx="164592" cy="0"/>
           </a:xfrm>
           <a:prstGeom prst="line">
@@ -16075,8 +16081,8 @@
         </p:nvSpPr>
         <p:spPr>
           <a:xfrm>
-            <a:off x="7872984" y="3200400"/>
-            <a:ext cx="890016" cy="301752"/>
+            <a:off x="7781544" y="3255264"/>
+            <a:ext cx="935736" cy="301752"/>
           </a:xfrm>
           <a:prstGeom prst="roundRect">
             <a:avLst>
@@ -16102,8 +16108,8 @@
         </p:nvSpPr>
         <p:spPr>
           <a:xfrm>
-            <a:off x="7909560" y="3273552"/>
-            <a:ext cx="816864" cy="146304"/>
+            <a:off x="7818120" y="3328416"/>
+            <a:ext cx="862584" cy="146304"/>
           </a:xfrm>
           <a:prstGeom prst="rect">
             <a:avLst/>
@@ -16143,7 +16149,7 @@
         </p:nvSpPr>
         <p:spPr>
           <a:xfrm>
-            <a:off x="9817608" y="3351276"/>
+            <a:off x="9817608" y="3406140"/>
             <a:ext cx="164592" cy="0"/>
           </a:xfrm>
           <a:prstGeom prst="line">
@@ -16166,8 +16172,8 @@
         </p:nvSpPr>
         <p:spPr>
           <a:xfrm>
-            <a:off x="8927592" y="3200400"/>
-            <a:ext cx="890016" cy="301752"/>
+            <a:off x="8881872" y="3255264"/>
+            <a:ext cx="935736" cy="301752"/>
           </a:xfrm>
           <a:prstGeom prst="roundRect">
             <a:avLst>
@@ -16193,8 +16199,8 @@
         </p:nvSpPr>
         <p:spPr>
           <a:xfrm>
-            <a:off x="8964168" y="3273552"/>
-            <a:ext cx="816864" cy="146304"/>
+            <a:off x="8918448" y="3328416"/>
+            <a:ext cx="862584" cy="146304"/>
           </a:xfrm>
           <a:prstGeom prst="rect">
             <a:avLst/>
@@ -16234,8 +16240,8 @@
         </p:nvSpPr>
         <p:spPr>
           <a:xfrm>
-            <a:off x="9982200" y="3200400"/>
-            <a:ext cx="890016" cy="301752"/>
+            <a:off x="9982200" y="3255264"/>
+            <a:ext cx="935736" cy="301752"/>
           </a:xfrm>
           <a:prstGeom prst="roundRect">
             <a:avLst>
@@ -16261,8 +16267,8 @@
         </p:nvSpPr>
         <p:spPr>
           <a:xfrm>
-            <a:off x="10018776" y="3273552"/>
-            <a:ext cx="816864" cy="146304"/>
+            <a:off x="10018776" y="3328416"/>
+            <a:ext cx="862584" cy="146304"/>
           </a:xfrm>
           <a:prstGeom prst="rect">
             <a:avLst/>
@@ -16302,8 +16308,8 @@
         </p:nvSpPr>
         <p:spPr>
           <a:xfrm>
-            <a:off x="7854696" y="3694176"/>
-            <a:ext cx="3035808" cy="206654"/>
+            <a:off x="7763256" y="3749040"/>
+            <a:ext cx="3172968" cy="356616"/>
           </a:xfrm>
           <a:prstGeom prst="rect">
             <a:avLst/>
@@ -16321,7 +16327,7 @@
               <a:buNone/>
             </a:pPr>
             <a:r>
-              <a:rPr lang="en-US" sz="1120" dirty="0">
+              <a:rPr lang="en-US" sz="1040" dirty="0">
                 <a:solidFill>
                   <a:srgbClr val="17364A"/>
                 </a:solidFill>
@@ -16329,9 +16335,9 @@
                 <a:ea typeface="Aptos" pitchFamily="34" charset="-122"/>
                 <a:cs typeface="Aptos" pitchFamily="34" charset="-120"/>
               </a:rPr>
-              <a:t>A proposed AI use should move through documented review before it becomes an operational workflow.</a:t>
-            </a:r>
-            <a:endParaRPr lang="en-US" sz="1120" dirty="0"/>
+              <a:t>A proposed AI use should move through documented review before it.</a:t>
+            </a:r>
+            <a:endParaRPr lang="en-US" sz="1040" dirty="0"/>
           </a:p>
         </p:txBody>
       </p:sp>
@@ -16343,12 +16349,12 @@
         </p:nvSpPr>
         <p:spPr>
           <a:xfrm>
-            <a:off x="7635240" y="4184294"/>
-            <a:ext cx="3474720" cy="1466698"/>
+            <a:off x="7543800" y="4389120"/>
+            <a:ext cx="3611880" cy="1261872"/>
           </a:xfrm>
           <a:prstGeom prst="roundRect">
             <a:avLst>
-              <a:gd name="adj" fmla="val 7481"/>
+              <a:gd name="adj" fmla="val 8696"/>
             </a:avLst>
           </a:prstGeom>
           <a:solidFill>
@@ -16370,8 +16376,8 @@
         </p:nvSpPr>
         <p:spPr>
           <a:xfrm>
-            <a:off x="7799832" y="4330598"/>
-            <a:ext cx="3145536" cy="256032"/>
+            <a:off x="7708392" y="4517136"/>
+            <a:ext cx="3282696" cy="228600"/>
           </a:xfrm>
           <a:prstGeom prst="rect">
             <a:avLst/>
@@ -16387,7 +16393,7 @@
               <a:buNone/>
             </a:pPr>
             <a:r>
-              <a:rPr lang="en-US" sz="1300" b="1" dirty="0">
+              <a:rPr lang="en-US" sz="1220" b="1" dirty="0">
                 <a:solidFill>
                   <a:srgbClr val="0068B7"/>
                 </a:solidFill>
@@ -16397,7 +16403,7 @@
               </a:rPr>
               <a:t>What to document</a:t>
             </a:r>
-            <a:endParaRPr lang="en-US" sz="1300" dirty="0"/>
+            <a:endParaRPr lang="en-US" sz="1220" dirty="0"/>
           </a:p>
         </p:txBody>
       </p:sp>
@@ -16409,8 +16415,8 @@
         </p:nvSpPr>
         <p:spPr>
           <a:xfrm>
-            <a:off x="7799832" y="4659782"/>
-            <a:ext cx="3145536" cy="899770"/>
+            <a:off x="7708392" y="4828032"/>
+            <a:ext cx="3282696" cy="749808"/>
           </a:xfrm>
           <a:prstGeom prst="rect">
             <a:avLst/>
@@ -16428,7 +16434,7 @@
               <a:buNone/>
             </a:pPr>
             <a:r>
-              <a:rPr lang="en-US" sz="1320" dirty="0">
+              <a:rPr lang="en-US" sz="1220" dirty="0">
                 <a:solidFill>
                   <a:srgbClr val="17364A"/>
                 </a:solidFill>
@@ -16436,9 +16442,9 @@
                 <a:ea typeface="Aptos" pitchFamily="34" charset="-122"/>
                 <a:cs typeface="Aptos" pitchFamily="34" charset="-120"/>
               </a:rPr>
-              <a:t>Translate this concept into clear decision rights, review steps, documentation expectations, and escalation paths before an AI-supported workflow is approved.</a:t>
-            </a:r>
-            <a:endParaRPr lang="en-US" sz="1320" dirty="0"/>
+              <a:t>Translate this concept into clear decision rights, review steps, documentation.</a:t>
+            </a:r>
+            <a:endParaRPr lang="en-US" sz="1220" dirty="0"/>
           </a:p>
         </p:txBody>
       </p:sp>

--- a/downloads/presentations/modules/exe-440.pptx
+++ b/downloads/presentations/modules/exe-440.pptx
@@ -9066,7 +9066,7 @@
                 <a:ea typeface="Aptos" pitchFamily="34" charset="-122"/>
                 <a:cs typeface="Aptos" pitchFamily="34" charset="-120"/>
               </a:rPr>
-              <a:t>• 1. What is the strongest reason this module topic belongs in AI leadership.</a:t>
+              <a:t>1. What is the strongest reason this module topic belongs in AI leadership.</a:t>
             </a:r>
             <a:endParaRPr lang="en-US" sz="1920" dirty="0"/>
           </a:p>
@@ -9083,7 +9083,7 @@
                 <a:ea typeface="Aptos" pitchFamily="34" charset="-122"/>
                 <a:cs typeface="Aptos" pitchFamily="34" charset="-120"/>
               </a:rPr>
-              <a:t>• 2. Which practice best supports accountable public health AI governance?</a:t>
+              <a:t>2. Which practice best supports accountable public health AI governance?</a:t>
             </a:r>
             <a:endParaRPr lang="en-US" sz="1920" dirty="0"/>
           </a:p>
@@ -9100,7 +9100,7 @@
                 <a:ea typeface="Aptos" pitchFamily="34" charset="-122"/>
                 <a:cs typeface="Aptos" pitchFamily="34" charset="-120"/>
               </a:rPr>
-              <a:t>• 3. When should an AI use case be escalated for leadership or governance.</a:t>
+              <a:t>3. When should an AI use case be escalated for leadership or governance.</a:t>
             </a:r>
             <a:endParaRPr lang="en-US" sz="1920" dirty="0"/>
           </a:p>
@@ -9207,7 +9207,7 @@
                 <a:ea typeface="Aptos" pitchFamily="34" charset="-122"/>
                 <a:cs typeface="Aptos" pitchFamily="34" charset="-120"/>
               </a:rPr>
-              <a:t>1. What is the strongest reason this module topic belongs in AI leadership and.</a:t>
+              <a:t>What is the strongest reason this module topic belongs in AI leadership and.</a:t>
             </a:r>
             <a:endParaRPr lang="en-US" sz="1220" dirty="0"/>
           </a:p>
@@ -9314,41 +9314,7 @@
                 <a:ea typeface="Aptos" pitchFamily="34" charset="-122"/>
                 <a:cs typeface="Aptos" pitchFamily="34" charset="-120"/>
               </a:rPr>
-              <a:t>1.</a:t>
-            </a:r>
-            <a:endParaRPr lang="en-US" sz="1140" dirty="0"/>
-          </a:p>
-          <a:p>
-            <a:pPr indent="0" marL="0">
-              <a:buNone/>
-            </a:pPr>
-            <a:r>
-              <a:rPr lang="en-US" sz="1140" dirty="0">
-                <a:solidFill>
-                  <a:srgbClr val="17364A"/>
-                </a:solidFill>
-                <a:latin typeface="Aptos" pitchFamily="34" charset="0"/>
-                <a:ea typeface="Aptos" pitchFamily="34" charset="-122"/>
-                <a:cs typeface="Aptos" pitchFamily="34" charset="-120"/>
-              </a:rPr>
               <a:t>What is the strongest reason this module topic.</a:t>
-            </a:r>
-            <a:endParaRPr lang="en-US" sz="1140" dirty="0"/>
-          </a:p>
-          <a:p>
-            <a:pPr indent="0" marL="0">
-              <a:buNone/>
-            </a:pPr>
-            <a:r>
-              <a:rPr lang="en-US" sz="1140" dirty="0">
-                <a:solidFill>
-                  <a:srgbClr val="17364A"/>
-                </a:solidFill>
-                <a:latin typeface="Aptos" pitchFamily="34" charset="0"/>
-                <a:ea typeface="Aptos" pitchFamily="34" charset="-122"/>
-                <a:cs typeface="Aptos" pitchFamily="34" charset="-120"/>
-              </a:rPr>
-              <a:t>2.</a:t>
             </a:r>
             <a:endParaRPr lang="en-US" sz="1140" dirty="0"/>
           </a:p>
